--- a/slides/ws3-pattern-b-siloed-editable-slides.pptx
+++ b/slides/ws3-pattern-b-siloed-editable-slides.pptx
@@ -15010,7 +15010,7 @@
                 <a:ea typeface="Roboto" pitchFamily="34" charset="-122"/>
                 <a:cs typeface="Roboto" pitchFamily="34" charset="-120"/>
               </a:rPr>
-              <a:t>Dedicated project running air-gapped Gemma 3 (27B) on private GKE + Claude 3.7 Sonnet and CMEK-encrypted AlloyDB/BigQuery vault (2 rows returned).</a:t>
+              <a:t>Dedicated project running air-gapped Gemma 3 (27B) on private GKE + Gemini 2.5 Pro (Dedicated PT) and CMEK-encrypted AlloyDB/BigQuery vault (2 rows returned).</a:t>
             </a:r>
             <a:endParaRPr lang="en-US" sz="670" dirty="0"/>
           </a:p>
@@ -16633,6 +16633,7 @@
               <a:srgbClr val="5F6368"/>
             </a:solidFill>
             <a:prstDash val="solid"/>
+            <a:headEnd type="triangle" w="sm" len="sm"/>
           </a:ln>
         </p:spPr>
       </p:sp>
@@ -17200,6 +17201,7 @@
               <a:srgbClr val="5F6368"/>
             </a:solidFill>
             <a:prstDash val="solid"/>
+            <a:headEnd type="triangle" w="sm" len="sm"/>
           </a:ln>
         </p:spPr>
       </p:sp>
@@ -17247,6 +17249,7 @@
               <a:srgbClr val="5F6368"/>
             </a:solidFill>
             <a:prstDash val="solid"/>
+            <a:headEnd type="triangle" w="sm" len="sm"/>
           </a:ln>
         </p:spPr>
       </p:sp>
@@ -17436,6 +17439,7 @@
               <a:srgbClr val="5F6368"/>
             </a:solidFill>
             <a:prstDash val="solid"/>
+            <a:headEnd type="triangle" w="sm" len="sm"/>
           </a:ln>
         </p:spPr>
       </p:sp>
@@ -17483,6 +17487,7 @@
               <a:srgbClr val="5F6368"/>
             </a:solidFill>
             <a:prstDash val="solid"/>
+            <a:headEnd type="triangle" w="sm" len="sm"/>
           </a:ln>
         </p:spPr>
       </p:sp>
@@ -19114,7 +19119,7 @@
                 <a:ea typeface="Arial" pitchFamily="34" charset="-122"/>
                 <a:cs typeface="Arial" pitchFamily="34" charset="-120"/>
               </a:rPr>
-              <a:t>Air-Gapped vLLM + Claude 3.7</a:t>
+              <a:t>Air-Gapped vLLM + Dedicated PT</a:t>
             </a:r>
             <a:endParaRPr lang="en-US" sz="500" dirty="0"/>
           </a:p>

--- a/slides/ws3-pattern-b-siloed-editable-slides.pptx
+++ b/slides/ws3-pattern-b-siloed-editable-slides.pptx
@@ -19702,975 +19702,7 @@
       </p:sp>
       <p:sp>
         <p:nvSpPr>
-          <p:cNvPr id="185" name="Text 163"/>
-          <p:cNvSpPr/>
-          <p:nvPr/>
-        </p:nvSpPr>
-        <p:spPr>
-          <a:xfrm>
-            <a:off x="5339182" y="3352190"/>
-            <a:ext cx="760781" cy="219456"/>
-          </a:xfrm>
-          <a:prstGeom prst="rect">
-            <a:avLst/>
-          </a:prstGeom>
-          <a:noFill/>
-          <a:ln/>
-        </p:spPr>
-        <p:txBody>
-          <a:bodyPr wrap="square" lIns="0" tIns="0" rIns="0" bIns="0" rtlCol="0" anchor="ctr">
-            <a:normAutofit/>
-          </a:bodyPr>
-          <a:lstStyle/>
-          <a:p>
-            <a:pPr algn="l" indent="0" marL="0">
-              <a:lnSpc>
-                <a:spcPct val="88000"/>
-              </a:lnSpc>
-              <a:buNone/>
-            </a:pPr>
-            <a:r>
-              <a:rPr lang="en-US" sz="500" b="1" dirty="0">
-                <a:solidFill>
-                  <a:srgbClr val="202124"/>
-                </a:solidFill>
-                <a:latin typeface="Arial" pitchFamily="34" charset="0"/>
-                <a:ea typeface="Arial" pitchFamily="34" charset="-122"/>
-                <a:cs typeface="Arial" pitchFamily="34" charset="-120"/>
-              </a:rPr>
-              <a:t>CMEK state &amp; VPC-SC</a:t>
-            </a:r>
-            <a:endParaRPr lang="en-US" sz="500" dirty="0"/>
-          </a:p>
-          <a:p>
-            <a:pPr algn="l" indent="0" marL="0">
-              <a:lnSpc>
-                <a:spcPct val="88000"/>
-              </a:lnSpc>
-              <a:buNone/>
-            </a:pPr>
-            <a:r>
-              <a:rPr lang="en-US" sz="440" dirty="0">
-                <a:solidFill>
-                  <a:srgbClr val="202124"/>
-                </a:solidFill>
-                <a:latin typeface="Arial" pitchFamily="34" charset="0"/>
-                <a:ea typeface="Arial" pitchFamily="34" charset="-122"/>
-                <a:cs typeface="Arial" pitchFamily="34" charset="-120"/>
-              </a:rPr>
-              <a:t>audit monitoring</a:t>
-            </a:r>
-            <a:endParaRPr lang="en-US" sz="500" dirty="0"/>
-          </a:p>
-        </p:txBody>
-      </p:sp>
-      <p:sp>
-        <p:nvSpPr>
-          <p:cNvPr id="186" name="Text 164"/>
-          <p:cNvSpPr/>
-          <p:nvPr/>
-        </p:nvSpPr>
-        <p:spPr>
-          <a:xfrm>
-            <a:off x="2691994" y="4813402"/>
-            <a:ext cx="782726" cy="219456"/>
-          </a:xfrm>
-          <a:prstGeom prst="rect">
-            <a:avLst/>
-          </a:prstGeom>
-          <a:noFill/>
-          <a:ln/>
-        </p:spPr>
-        <p:txBody>
-          <a:bodyPr wrap="square" lIns="0" tIns="0" rIns="0" bIns="0" rtlCol="0" anchor="ctr">
-            <a:normAutofit/>
-          </a:bodyPr>
-          <a:lstStyle/>
-          <a:p>
-            <a:pPr algn="ctr" indent="0" marL="0">
-              <a:lnSpc>
-                <a:spcPct val="88000"/>
-              </a:lnSpc>
-              <a:buNone/>
-            </a:pPr>
-            <a:r>
-              <a:rPr lang="en-US" sz="500" b="1" dirty="0">
-                <a:solidFill>
-                  <a:srgbClr val="202124"/>
-                </a:solidFill>
-                <a:latin typeface="Arial" pitchFamily="34" charset="0"/>
-                <a:ea typeface="Arial" pitchFamily="34" charset="-122"/>
-                <a:cs typeface="Arial" pitchFamily="34" charset="-120"/>
-              </a:rPr>
-              <a:t>Private GKE</a:t>
-            </a:r>
-            <a:endParaRPr lang="en-US" sz="500" dirty="0"/>
-          </a:p>
-          <a:p>
-            <a:pPr algn="ctr" indent="0" marL="0">
-              <a:lnSpc>
-                <a:spcPct val="88000"/>
-              </a:lnSpc>
-              <a:buNone/>
-            </a:pPr>
-            <a:r>
-              <a:rPr lang="en-US" sz="440" dirty="0">
-                <a:solidFill>
-                  <a:srgbClr val="202124"/>
-                </a:solidFill>
-                <a:latin typeface="Arial" pitchFamily="34" charset="0"/>
-                <a:ea typeface="Arial" pitchFamily="34" charset="-122"/>
-                <a:cs typeface="Arial" pitchFamily="34" charset="-120"/>
-              </a:rPr>
-              <a:t>Zero Egress</a:t>
-            </a:r>
-            <a:endParaRPr lang="en-US" sz="500" dirty="0"/>
-          </a:p>
-        </p:txBody>
-      </p:sp>
-      <p:sp>
-        <p:nvSpPr>
-          <p:cNvPr id="187" name="Text 165"/>
-          <p:cNvSpPr/>
-          <p:nvPr/>
-        </p:nvSpPr>
-        <p:spPr>
-          <a:xfrm>
-            <a:off x="2691994" y="5447995"/>
-            <a:ext cx="782726" cy="219456"/>
-          </a:xfrm>
-          <a:prstGeom prst="rect">
-            <a:avLst/>
-          </a:prstGeom>
-          <a:noFill/>
-          <a:ln/>
-        </p:spPr>
-        <p:txBody>
-          <a:bodyPr wrap="square" lIns="0" tIns="0" rIns="0" bIns="0" rtlCol="0" anchor="ctr">
-            <a:normAutofit/>
-          </a:bodyPr>
-          <a:lstStyle/>
-          <a:p>
-            <a:pPr algn="ctr" indent="0" marL="0">
-              <a:lnSpc>
-                <a:spcPct val="88000"/>
-              </a:lnSpc>
-              <a:buNone/>
-            </a:pPr>
-            <a:r>
-              <a:rPr lang="en-US" sz="500" b="1" dirty="0">
-                <a:solidFill>
-                  <a:srgbClr val="202124"/>
-                </a:solidFill>
-                <a:latin typeface="Arial" pitchFamily="34" charset="0"/>
-                <a:ea typeface="Arial" pitchFamily="34" charset="-122"/>
-                <a:cs typeface="Arial" pitchFamily="34" charset="-120"/>
-              </a:rPr>
-              <a:t>finvault-silo-cmek</a:t>
-            </a:r>
-            <a:endParaRPr lang="en-US" sz="500" dirty="0"/>
-          </a:p>
-          <a:p>
-            <a:pPr algn="ctr" indent="0" marL="0">
-              <a:lnSpc>
-                <a:spcPct val="88000"/>
-              </a:lnSpc>
-              <a:buNone/>
-            </a:pPr>
-            <a:r>
-              <a:rPr lang="en-US" sz="440" dirty="0">
-                <a:solidFill>
-                  <a:srgbClr val="202124"/>
-                </a:solidFill>
-                <a:latin typeface="Arial" pitchFamily="34" charset="0"/>
-                <a:ea typeface="Arial" pitchFamily="34" charset="-122"/>
-                <a:cs typeface="Arial" pitchFamily="34" charset="-120"/>
-              </a:rPr>
-              <a:t>HTTP 423 Ready</a:t>
-            </a:r>
-            <a:endParaRPr lang="en-US" sz="500" dirty="0"/>
-          </a:p>
-        </p:txBody>
-      </p:sp>
-      <p:sp>
-        <p:nvSpPr>
-          <p:cNvPr id="188" name="Text 166"/>
-          <p:cNvSpPr/>
-          <p:nvPr/>
-        </p:nvSpPr>
-        <p:spPr>
-          <a:xfrm>
-            <a:off x="5056632" y="4813402"/>
-            <a:ext cx="782726" cy="219456"/>
-          </a:xfrm>
-          <a:prstGeom prst="rect">
-            <a:avLst/>
-          </a:prstGeom>
-          <a:noFill/>
-          <a:ln/>
-        </p:spPr>
-        <p:txBody>
-          <a:bodyPr wrap="square" lIns="0" tIns="0" rIns="0" bIns="0" rtlCol="0" anchor="ctr">
-            <a:normAutofit/>
-          </a:bodyPr>
-          <a:lstStyle/>
-          <a:p>
-            <a:pPr algn="ctr" indent="0" marL="0">
-              <a:lnSpc>
-                <a:spcPct val="88000"/>
-              </a:lnSpc>
-              <a:buNone/>
-            </a:pPr>
-            <a:r>
-              <a:rPr lang="en-US" sz="500" b="1" dirty="0">
-                <a:solidFill>
-                  <a:srgbClr val="202124"/>
-                </a:solidFill>
-                <a:latin typeface="Arial" pitchFamily="34" charset="0"/>
-                <a:ea typeface="Arial" pitchFamily="34" charset="-122"/>
-                <a:cs typeface="Arial" pitchFamily="34" charset="-120"/>
-              </a:rPr>
-              <a:t>VPC-SC Bound</a:t>
-            </a:r>
-            <a:endParaRPr lang="en-US" sz="500" dirty="0"/>
-          </a:p>
-          <a:p>
-            <a:pPr algn="ctr" indent="0" marL="0">
-              <a:lnSpc>
-                <a:spcPct val="88000"/>
-              </a:lnSpc>
-              <a:buNone/>
-            </a:pPr>
-            <a:r>
-              <a:rPr lang="en-US" sz="440" dirty="0">
-                <a:solidFill>
-                  <a:srgbClr val="202124"/>
-                </a:solidFill>
-                <a:latin typeface="Arial" pitchFamily="34" charset="0"/>
-                <a:ea typeface="Arial" pitchFamily="34" charset="-122"/>
-                <a:cs typeface="Arial" pitchFamily="34" charset="-120"/>
-              </a:rPr>
-              <a:t>Secure RAG</a:t>
-            </a:r>
-            <a:endParaRPr lang="en-US" sz="500" dirty="0"/>
-          </a:p>
-        </p:txBody>
-      </p:sp>
-      <p:sp>
-        <p:nvSpPr>
-          <p:cNvPr id="189" name="Text 167"/>
-          <p:cNvSpPr/>
-          <p:nvPr/>
-        </p:nvSpPr>
-        <p:spPr>
-          <a:xfrm>
-            <a:off x="5056632" y="5447995"/>
-            <a:ext cx="782726" cy="219456"/>
-          </a:xfrm>
-          <a:prstGeom prst="rect">
-            <a:avLst/>
-          </a:prstGeom>
-          <a:noFill/>
-          <a:ln/>
-        </p:spPr>
-        <p:txBody>
-          <a:bodyPr wrap="square" lIns="0" tIns="0" rIns="0" bIns="0" rtlCol="0" anchor="ctr">
-            <a:normAutofit/>
-          </a:bodyPr>
-          <a:lstStyle/>
-          <a:p>
-            <a:pPr algn="ctr" indent="0" marL="0">
-              <a:lnSpc>
-                <a:spcPct val="88000"/>
-              </a:lnSpc>
-              <a:buNone/>
-            </a:pPr>
-            <a:r>
-              <a:rPr lang="en-US" sz="500" b="1" dirty="0">
-                <a:solidFill>
-                  <a:srgbClr val="202124"/>
-                </a:solidFill>
-                <a:latin typeface="Arial" pitchFamily="34" charset="0"/>
-                <a:ea typeface="Arial" pitchFamily="34" charset="-122"/>
-                <a:cs typeface="Arial" pitchFamily="34" charset="-120"/>
-              </a:rPr>
-              <a:t>CMEK Kill-Switch</a:t>
-            </a:r>
-            <a:endParaRPr lang="en-US" sz="500" dirty="0"/>
-          </a:p>
-          <a:p>
-            <a:pPr algn="ctr" indent="0" marL="0">
-              <a:lnSpc>
-                <a:spcPct val="88000"/>
-              </a:lnSpc>
-              <a:buNone/>
-            </a:pPr>
-            <a:r>
-              <a:rPr lang="en-US" sz="440" dirty="0">
-                <a:solidFill>
-                  <a:srgbClr val="202124"/>
-                </a:solidFill>
-                <a:latin typeface="Arial" pitchFamily="34" charset="0"/>
-                <a:ea typeface="Arial" pitchFamily="34" charset="-122"/>
-                <a:cs typeface="Arial" pitchFamily="34" charset="-120"/>
-              </a:rPr>
-              <a:t>HTTP 423 Verified</a:t>
-            </a:r>
-            <a:endParaRPr lang="en-US" sz="500" dirty="0"/>
-          </a:p>
-        </p:txBody>
-      </p:sp>
-      <p:sp>
-        <p:nvSpPr>
-          <p:cNvPr id="190" name="Text 168"/>
-          <p:cNvSpPr/>
-          <p:nvPr/>
-        </p:nvSpPr>
-        <p:spPr>
-          <a:xfrm>
-            <a:off x="1757477" y="5598871"/>
-            <a:ext cx="686714" cy="219456"/>
-          </a:xfrm>
-          <a:prstGeom prst="rect">
-            <a:avLst/>
-          </a:prstGeom>
-          <a:noFill/>
-          <a:ln/>
-        </p:spPr>
-        <p:txBody>
-          <a:bodyPr wrap="square" lIns="0" tIns="0" rIns="0" bIns="0" rtlCol="0" anchor="ctr">
-            <a:normAutofit/>
-          </a:bodyPr>
-          <a:lstStyle/>
-          <a:p>
-            <a:pPr algn="l" indent="0" marL="0">
-              <a:lnSpc>
-                <a:spcPct val="88000"/>
-              </a:lnSpc>
-              <a:buNone/>
-            </a:pPr>
-            <a:r>
-              <a:rPr lang="en-US" sz="500" b="1" dirty="0">
-                <a:solidFill>
-                  <a:srgbClr val="202124"/>
-                </a:solidFill>
-                <a:latin typeface="Arial" pitchFamily="34" charset="0"/>
-                <a:ea typeface="Arial" pitchFamily="34" charset="-122"/>
-                <a:cs typeface="Arial" pitchFamily="34" charset="-120"/>
-              </a:rPr>
-              <a:t>Air-gapped</a:t>
-            </a:r>
-            <a:endParaRPr lang="en-US" sz="500" dirty="0"/>
-          </a:p>
-          <a:p>
-            <a:pPr algn="l" indent="0" marL="0">
-              <a:lnSpc>
-                <a:spcPct val="88000"/>
-              </a:lnSpc>
-              <a:buNone/>
-            </a:pPr>
-            <a:r>
-              <a:rPr lang="en-US" sz="440" dirty="0">
-                <a:solidFill>
-                  <a:srgbClr val="202124"/>
-                </a:solidFill>
-                <a:latin typeface="Arial" pitchFamily="34" charset="0"/>
-                <a:ea typeface="Arial" pitchFamily="34" charset="-122"/>
-                <a:cs typeface="Arial" pitchFamily="34" charset="-120"/>
-              </a:rPr>
-              <a:t>inference</a:t>
-            </a:r>
-            <a:endParaRPr lang="en-US" sz="500" dirty="0"/>
-          </a:p>
-        </p:txBody>
-      </p:sp>
-      <p:sp>
-        <p:nvSpPr>
-          <p:cNvPr id="191" name="Text 169"/>
-          <p:cNvSpPr/>
-          <p:nvPr/>
-        </p:nvSpPr>
-        <p:spPr>
-          <a:xfrm>
-            <a:off x="3905402" y="3348533"/>
-            <a:ext cx="738835" cy="219456"/>
-          </a:xfrm>
-          <a:prstGeom prst="rect">
-            <a:avLst/>
-          </a:prstGeom>
-          <a:noFill/>
-          <a:ln/>
-        </p:spPr>
-        <p:txBody>
-          <a:bodyPr wrap="square" lIns="0" tIns="0" rIns="0" bIns="0" rtlCol="0" anchor="ctr">
-            <a:normAutofit/>
-          </a:bodyPr>
-          <a:lstStyle/>
-          <a:p>
-            <a:pPr algn="l" indent="0" marL="0">
-              <a:lnSpc>
-                <a:spcPct val="88000"/>
-              </a:lnSpc>
-              <a:buNone/>
-            </a:pPr>
-            <a:r>
-              <a:rPr lang="en-US" sz="500" b="1" dirty="0">
-                <a:solidFill>
-                  <a:srgbClr val="202124"/>
-                </a:solidFill>
-                <a:latin typeface="Arial" pitchFamily="34" charset="0"/>
-                <a:ea typeface="Arial" pitchFamily="34" charset="-122"/>
-                <a:cs typeface="Arial" pitchFamily="34" charset="-120"/>
-              </a:rPr>
-              <a:t>Sovereign response</a:t>
-            </a:r>
-            <a:endParaRPr lang="en-US" sz="500" dirty="0"/>
-          </a:p>
-          <a:p>
-            <a:pPr algn="l" indent="0" marL="0">
-              <a:lnSpc>
-                <a:spcPct val="88000"/>
-              </a:lnSpc>
-              <a:buNone/>
-            </a:pPr>
-            <a:r>
-              <a:rPr lang="en-US" sz="440" dirty="0">
-                <a:solidFill>
-                  <a:srgbClr val="202124"/>
-                </a:solidFill>
-                <a:latin typeface="Arial" pitchFamily="34" charset="0"/>
-                <a:ea typeface="Arial" pitchFamily="34" charset="-122"/>
-                <a:cs typeface="Arial" pitchFamily="34" charset="-120"/>
-              </a:rPr>
-              <a:t>(or HTTP 423 Locked)</a:t>
-            </a:r>
-            <a:endParaRPr lang="en-US" sz="500" dirty="0"/>
-          </a:p>
-        </p:txBody>
-      </p:sp>
-      <p:sp>
-        <p:nvSpPr>
-          <p:cNvPr id="192" name="Text 170"/>
-          <p:cNvSpPr/>
-          <p:nvPr/>
-        </p:nvSpPr>
-        <p:spPr>
-          <a:xfrm>
-            <a:off x="2983687" y="3348533"/>
-            <a:ext cx="669341" cy="219456"/>
-          </a:xfrm>
-          <a:prstGeom prst="rect">
-            <a:avLst/>
-          </a:prstGeom>
-          <a:noFill/>
-          <a:ln/>
-        </p:spPr>
-        <p:txBody>
-          <a:bodyPr wrap="square" lIns="0" tIns="0" rIns="0" bIns="0" rtlCol="0" anchor="ctr">
-            <a:normAutofit/>
-          </a:bodyPr>
-          <a:lstStyle/>
-          <a:p>
-            <a:pPr algn="l" indent="0" marL="0">
-              <a:lnSpc>
-                <a:spcPct val="88000"/>
-              </a:lnSpc>
-              <a:buNone/>
-            </a:pPr>
-            <a:r>
-              <a:rPr lang="en-US" sz="500" b="1" dirty="0">
-                <a:solidFill>
-                  <a:srgbClr val="202124"/>
-                </a:solidFill>
-                <a:latin typeface="Arial" pitchFamily="34" charset="0"/>
-                <a:ea typeface="Arial" pitchFamily="34" charset="-122"/>
-                <a:cs typeface="Arial" pitchFamily="34" charset="-120"/>
-              </a:rPr>
-              <a:t>Route to isolated</a:t>
-            </a:r>
-            <a:endParaRPr lang="en-US" sz="500" dirty="0"/>
-          </a:p>
-          <a:p>
-            <a:pPr algn="l" indent="0" marL="0">
-              <a:lnSpc>
-                <a:spcPct val="88000"/>
-              </a:lnSpc>
-              <a:buNone/>
-            </a:pPr>
-            <a:r>
-              <a:rPr lang="en-US" sz="440" dirty="0">
-                <a:solidFill>
-                  <a:srgbClr val="202124"/>
-                </a:solidFill>
-                <a:latin typeface="Arial" pitchFamily="34" charset="0"/>
-                <a:ea typeface="Arial" pitchFamily="34" charset="-122"/>
-                <a:cs typeface="Arial" pitchFamily="34" charset="-120"/>
-              </a:rPr>
-              <a:t>VPC-SC tenant project</a:t>
-            </a:r>
-            <a:endParaRPr lang="en-US" sz="500" dirty="0"/>
-          </a:p>
-        </p:txBody>
-      </p:sp>
-      <p:sp>
-        <p:nvSpPr>
-          <p:cNvPr id="193" name="Text 171"/>
-          <p:cNvSpPr/>
-          <p:nvPr/>
-        </p:nvSpPr>
-        <p:spPr>
-          <a:xfrm>
-            <a:off x="2462479" y="2865730"/>
-            <a:ext cx="678485" cy="219456"/>
-          </a:xfrm>
-          <a:prstGeom prst="rect">
-            <a:avLst/>
-          </a:prstGeom>
-          <a:noFill/>
-          <a:ln/>
-        </p:spPr>
-        <p:txBody>
-          <a:bodyPr wrap="square" lIns="0" tIns="0" rIns="0" bIns="0" rtlCol="0" anchor="ctr">
-            <a:normAutofit/>
-          </a:bodyPr>
-          <a:lstStyle/>
-          <a:p>
-            <a:pPr algn="ctr" indent="0" marL="0">
-              <a:lnSpc>
-                <a:spcPct val="88000"/>
-              </a:lnSpc>
-              <a:buNone/>
-            </a:pPr>
-            <a:r>
-              <a:rPr lang="en-US" sz="500" b="1" dirty="0">
-                <a:solidFill>
-                  <a:srgbClr val="202124"/>
-                </a:solidFill>
-                <a:latin typeface="Arial" pitchFamily="34" charset="0"/>
-                <a:ea typeface="Arial" pitchFamily="34" charset="-122"/>
-                <a:cs typeface="Arial" pitchFamily="34" charset="-120"/>
-              </a:rPr>
-              <a:t>Enforce org</a:t>
-            </a:r>
-            <a:endParaRPr lang="en-US" sz="500" dirty="0"/>
-          </a:p>
-          <a:p>
-            <a:pPr algn="ctr" indent="0" marL="0">
-              <a:lnSpc>
-                <a:spcPct val="88000"/>
-              </a:lnSpc>
-              <a:buNone/>
-            </a:pPr>
-            <a:r>
-              <a:rPr lang="en-US" sz="440" dirty="0">
-                <a:solidFill>
-                  <a:srgbClr val="202124"/>
-                </a:solidFill>
-                <a:latin typeface="Arial" pitchFamily="34" charset="0"/>
-                <a:ea typeface="Arial" pitchFamily="34" charset="-122"/>
-                <a:cs typeface="Arial" pitchFamily="34" charset="-120"/>
-              </a:rPr>
-              <a:t>PAB policy</a:t>
-            </a:r>
-            <a:endParaRPr lang="en-US" sz="500" dirty="0"/>
-          </a:p>
-        </p:txBody>
-      </p:sp>
-      <p:sp>
-        <p:nvSpPr>
-          <p:cNvPr id="194" name="Text 172"/>
-          <p:cNvSpPr/>
-          <p:nvPr/>
-        </p:nvSpPr>
-        <p:spPr>
-          <a:xfrm>
-            <a:off x="1757477" y="4614062"/>
-            <a:ext cx="686714" cy="121615"/>
-          </a:xfrm>
-          <a:prstGeom prst="rect">
-            <a:avLst/>
-          </a:prstGeom>
-          <a:noFill/>
-          <a:ln/>
-        </p:spPr>
-        <p:txBody>
-          <a:bodyPr wrap="square" lIns="0" tIns="0" rIns="0" bIns="0" rtlCol="0" anchor="ctr">
-            <a:normAutofit/>
-          </a:bodyPr>
-          <a:lstStyle/>
-          <a:p>
-            <a:pPr algn="l" indent="0" marL="0">
-              <a:lnSpc>
-                <a:spcPct val="88000"/>
-              </a:lnSpc>
-              <a:buNone/>
-            </a:pPr>
-            <a:r>
-              <a:rPr lang="en-US" sz="500" b="1" dirty="0">
-                <a:solidFill>
-                  <a:srgbClr val="202124"/>
-                </a:solidFill>
-                <a:latin typeface="Arial" pitchFamily="34" charset="0"/>
-                <a:ea typeface="Arial" pitchFamily="34" charset="-122"/>
-                <a:cs typeface="Arial" pitchFamily="34" charset="-120"/>
-              </a:rPr>
-              <a:t>Sanitize request</a:t>
-            </a:r>
-            <a:endParaRPr lang="en-US" sz="500" dirty="0"/>
-          </a:p>
-        </p:txBody>
-      </p:sp>
-      <p:sp>
-        <p:nvSpPr>
-          <p:cNvPr id="195" name="Text 173"/>
-          <p:cNvSpPr/>
-          <p:nvPr/>
-        </p:nvSpPr>
-        <p:spPr>
-          <a:xfrm>
-            <a:off x="1757477" y="4822546"/>
-            <a:ext cx="686714" cy="121615"/>
-          </a:xfrm>
-          <a:prstGeom prst="rect">
-            <a:avLst/>
-          </a:prstGeom>
-          <a:noFill/>
-          <a:ln/>
-        </p:spPr>
-        <p:txBody>
-          <a:bodyPr wrap="square" lIns="0" tIns="0" rIns="0" bIns="0" rtlCol="0" anchor="ctr">
-            <a:normAutofit/>
-          </a:bodyPr>
-          <a:lstStyle/>
-          <a:p>
-            <a:pPr algn="l" indent="0" marL="0">
-              <a:lnSpc>
-                <a:spcPct val="88000"/>
-              </a:lnSpc>
-              <a:buNone/>
-            </a:pPr>
-            <a:r>
-              <a:rPr lang="en-US" sz="500" b="1" dirty="0">
-                <a:solidFill>
-                  <a:srgbClr val="202124"/>
-                </a:solidFill>
-                <a:latin typeface="Arial" pitchFamily="34" charset="0"/>
-                <a:ea typeface="Arial" pitchFamily="34" charset="-122"/>
-                <a:cs typeface="Arial" pitchFamily="34" charset="-120"/>
-              </a:rPr>
-              <a:t>Sanitize response</a:t>
-            </a:r>
-            <a:endParaRPr lang="en-US" sz="500" dirty="0"/>
-          </a:p>
-        </p:txBody>
-      </p:sp>
-      <p:sp>
-        <p:nvSpPr>
-          <p:cNvPr id="196" name="Text 174"/>
-          <p:cNvSpPr/>
-          <p:nvPr/>
-        </p:nvSpPr>
-        <p:spPr>
-          <a:xfrm>
-            <a:off x="2435962" y="2074774"/>
-            <a:ext cx="495605" cy="219456"/>
-          </a:xfrm>
-          <a:prstGeom prst="rect">
-            <a:avLst/>
-          </a:prstGeom>
-          <a:noFill/>
-          <a:ln/>
-        </p:spPr>
-        <p:txBody>
-          <a:bodyPr wrap="square" lIns="0" tIns="0" rIns="0" bIns="0" rtlCol="0" anchor="ctr">
-            <a:normAutofit/>
-          </a:bodyPr>
-          <a:lstStyle/>
-          <a:p>
-            <a:pPr algn="ctr" indent="0" marL="0">
-              <a:lnSpc>
-                <a:spcPct val="88000"/>
-              </a:lnSpc>
-              <a:buNone/>
-            </a:pPr>
-            <a:r>
-              <a:rPr lang="en-US" sz="500" b="1" dirty="0">
-                <a:solidFill>
-                  <a:srgbClr val="202124"/>
-                </a:solidFill>
-                <a:latin typeface="Arial" pitchFamily="34" charset="0"/>
-                <a:ea typeface="Arial" pitchFamily="34" charset="-122"/>
-                <a:cs typeface="Arial" pitchFamily="34" charset="-120"/>
-              </a:rPr>
-              <a:t>Verify client</a:t>
-            </a:r>
-            <a:endParaRPr lang="en-US" sz="500" dirty="0"/>
-          </a:p>
-          <a:p>
-            <a:pPr algn="ctr" indent="0" marL="0">
-              <a:lnSpc>
-                <a:spcPct val="88000"/>
-              </a:lnSpc>
-              <a:buNone/>
-            </a:pPr>
-            <a:r>
-              <a:rPr lang="en-US" sz="440" dirty="0">
-                <a:solidFill>
-                  <a:srgbClr val="202124"/>
-                </a:solidFill>
-                <a:latin typeface="Arial" pitchFamily="34" charset="0"/>
-                <a:ea typeface="Arial" pitchFamily="34" charset="-122"/>
-                <a:cs typeface="Arial" pitchFamily="34" charset="-120"/>
-              </a:rPr>
-              <a:t>SPIFFE SAN</a:t>
-            </a:r>
-            <a:endParaRPr lang="en-US" sz="500" dirty="0"/>
-          </a:p>
-        </p:txBody>
-      </p:sp>
-      <p:sp>
-        <p:nvSpPr>
-          <p:cNvPr id="197" name="Text 175"/>
-          <p:cNvSpPr/>
-          <p:nvPr/>
-        </p:nvSpPr>
-        <p:spPr>
-          <a:xfrm>
-            <a:off x="2435962" y="2674620"/>
-            <a:ext cx="495605" cy="219456"/>
-          </a:xfrm>
-          <a:prstGeom prst="rect">
-            <a:avLst/>
-          </a:prstGeom>
-          <a:noFill/>
-          <a:ln/>
-        </p:spPr>
-        <p:txBody>
-          <a:bodyPr wrap="square" lIns="0" tIns="0" rIns="0" bIns="0" rtlCol="0" anchor="ctr">
-            <a:normAutofit/>
-          </a:bodyPr>
-          <a:lstStyle/>
-          <a:p>
-            <a:pPr algn="ctr" indent="0" marL="0">
-              <a:lnSpc>
-                <a:spcPct val="88000"/>
-              </a:lnSpc>
-              <a:buNone/>
-            </a:pPr>
-            <a:r>
-              <a:rPr lang="en-US" sz="500" b="1" dirty="0">
-                <a:solidFill>
-                  <a:srgbClr val="202124"/>
-                </a:solidFill>
-                <a:latin typeface="Arial" pitchFamily="34" charset="0"/>
-                <a:ea typeface="Arial" pitchFamily="34" charset="-122"/>
-                <a:cs typeface="Arial" pitchFamily="34" charset="-120"/>
-              </a:rPr>
-              <a:t>Sanitize</a:t>
-            </a:r>
-            <a:endParaRPr lang="en-US" sz="500" dirty="0"/>
-          </a:p>
-          <a:p>
-            <a:pPr algn="ctr" indent="0" marL="0">
-              <a:lnSpc>
-                <a:spcPct val="88000"/>
-              </a:lnSpc>
-              <a:buNone/>
-            </a:pPr>
-            <a:r>
-              <a:rPr lang="en-US" sz="440" dirty="0">
-                <a:solidFill>
-                  <a:srgbClr val="202124"/>
-                </a:solidFill>
-                <a:latin typeface="Arial" pitchFamily="34" charset="0"/>
-                <a:ea typeface="Arial" pitchFamily="34" charset="-122"/>
-                <a:cs typeface="Arial" pitchFamily="34" charset="-120"/>
-              </a:rPr>
-              <a:t>prompt</a:t>
-            </a:r>
-            <a:endParaRPr lang="en-US" sz="500" dirty="0"/>
-          </a:p>
-        </p:txBody>
-      </p:sp>
-      <p:sp>
-        <p:nvSpPr>
-          <p:cNvPr id="198" name="Text 176"/>
-          <p:cNvSpPr/>
-          <p:nvPr/>
-        </p:nvSpPr>
-        <p:spPr>
-          <a:xfrm>
-            <a:off x="3888029" y="1153973"/>
-            <a:ext cx="443484" cy="121615"/>
-          </a:xfrm>
-          <a:prstGeom prst="rect">
-            <a:avLst/>
-          </a:prstGeom>
-          <a:noFill/>
-          <a:ln/>
-        </p:spPr>
-        <p:txBody>
-          <a:bodyPr wrap="square" lIns="0" tIns="0" rIns="0" bIns="0" rtlCol="0" anchor="ctr">
-            <a:normAutofit/>
-          </a:bodyPr>
-          <a:lstStyle/>
-          <a:p>
-            <a:pPr algn="l" indent="0" marL="0">
-              <a:lnSpc>
-                <a:spcPct val="88000"/>
-              </a:lnSpc>
-              <a:buNone/>
-            </a:pPr>
-            <a:r>
-              <a:rPr lang="en-US" sz="500" b="1" dirty="0">
-                <a:solidFill>
-                  <a:srgbClr val="202124"/>
-                </a:solidFill>
-                <a:latin typeface="Arial" pitchFamily="34" charset="0"/>
-                <a:ea typeface="Arial" pitchFamily="34" charset="-122"/>
-                <a:cs typeface="Arial" pitchFamily="34" charset="-120"/>
-              </a:rPr>
-              <a:t>Silo Response</a:t>
-            </a:r>
-            <a:endParaRPr lang="en-US" sz="500" dirty="0"/>
-          </a:p>
-        </p:txBody>
-      </p:sp>
-      <p:sp>
-        <p:nvSpPr>
-          <p:cNvPr id="199" name="Text 177"/>
-          <p:cNvSpPr/>
-          <p:nvPr/>
-        </p:nvSpPr>
-        <p:spPr>
-          <a:xfrm>
-            <a:off x="3888029" y="2731313"/>
-            <a:ext cx="443484" cy="121615"/>
-          </a:xfrm>
-          <a:prstGeom prst="rect">
-            <a:avLst/>
-          </a:prstGeom>
-          <a:noFill/>
-          <a:ln/>
-        </p:spPr>
-        <p:txBody>
-          <a:bodyPr wrap="square" lIns="0" tIns="0" rIns="0" bIns="0" rtlCol="0" anchor="ctr">
-            <a:normAutofit/>
-          </a:bodyPr>
-          <a:lstStyle/>
-          <a:p>
-            <a:pPr algn="l" indent="0" marL="0">
-              <a:lnSpc>
-                <a:spcPct val="88000"/>
-              </a:lnSpc>
-              <a:buNone/>
-            </a:pPr>
-            <a:r>
-              <a:rPr lang="en-US" sz="500" b="1" dirty="0">
-                <a:solidFill>
-                  <a:srgbClr val="202124"/>
-                </a:solidFill>
-                <a:latin typeface="Arial" pitchFamily="34" charset="0"/>
-                <a:ea typeface="Arial" pitchFamily="34" charset="-122"/>
-                <a:cs typeface="Arial" pitchFamily="34" charset="-120"/>
-              </a:rPr>
-              <a:t>200 / 423</a:t>
-            </a:r>
-            <a:endParaRPr lang="en-US" sz="500" dirty="0"/>
-          </a:p>
-        </p:txBody>
-      </p:sp>
-      <p:sp>
-        <p:nvSpPr>
-          <p:cNvPr id="200" name="Text 178"/>
-          <p:cNvSpPr/>
-          <p:nvPr/>
-        </p:nvSpPr>
-        <p:spPr>
-          <a:xfrm>
-            <a:off x="3087929" y="1153973"/>
-            <a:ext cx="399593" cy="121615"/>
-          </a:xfrm>
-          <a:prstGeom prst="rect">
-            <a:avLst/>
-          </a:prstGeom>
-          <a:noFill/>
-          <a:ln/>
-        </p:spPr>
-        <p:txBody>
-          <a:bodyPr wrap="square" lIns="0" tIns="0" rIns="0" bIns="0" rtlCol="0" anchor="ctr">
-            <a:normAutofit/>
-          </a:bodyPr>
-          <a:lstStyle/>
-          <a:p>
-            <a:pPr algn="r" indent="0" marL="0">
-              <a:lnSpc>
-                <a:spcPct val="88000"/>
-              </a:lnSpc>
-              <a:buNone/>
-            </a:pPr>
-            <a:r>
-              <a:rPr lang="en-US" sz="500" b="1" dirty="0">
-                <a:solidFill>
-                  <a:srgbClr val="202124"/>
-                </a:solidFill>
-                <a:latin typeface="Arial" pitchFamily="34" charset="0"/>
-                <a:ea typeface="Arial" pitchFamily="34" charset="-122"/>
-                <a:cs typeface="Arial" pitchFamily="34" charset="-120"/>
-              </a:rPr>
-              <a:t>mTLS Request</a:t>
-            </a:r>
-            <a:endParaRPr lang="en-US" sz="500" dirty="0"/>
-          </a:p>
-        </p:txBody>
-      </p:sp>
-      <p:sp>
-        <p:nvSpPr>
-          <p:cNvPr id="201" name="Text 179"/>
-          <p:cNvSpPr/>
-          <p:nvPr/>
-        </p:nvSpPr>
-        <p:spPr>
-          <a:xfrm>
-            <a:off x="3087929" y="2731313"/>
-            <a:ext cx="399593" cy="121615"/>
-          </a:xfrm>
-          <a:prstGeom prst="rect">
-            <a:avLst/>
-          </a:prstGeom>
-          <a:noFill/>
-          <a:ln/>
-        </p:spPr>
-        <p:txBody>
-          <a:bodyPr wrap="square" lIns="0" tIns="0" rIns="0" bIns="0" rtlCol="0" anchor="ctr">
-            <a:normAutofit/>
-          </a:bodyPr>
-          <a:lstStyle/>
-          <a:p>
-            <a:pPr algn="r" indent="0" marL="0">
-              <a:lnSpc>
-                <a:spcPct val="88000"/>
-              </a:lnSpc>
-              <a:buNone/>
-            </a:pPr>
-            <a:r>
-              <a:rPr lang="en-US" sz="500" b="1" dirty="0">
-                <a:solidFill>
-                  <a:srgbClr val="202124"/>
-                </a:solidFill>
-                <a:latin typeface="Arial" pitchFamily="34" charset="0"/>
-                <a:ea typeface="Arial" pitchFamily="34" charset="-122"/>
-                <a:cs typeface="Arial" pitchFamily="34" charset="-120"/>
-              </a:rPr>
-              <a:t>mTLS Valid</a:t>
-            </a:r>
-            <a:endParaRPr lang="en-US" sz="500" dirty="0"/>
-          </a:p>
-        </p:txBody>
-      </p:sp>
-      <p:sp>
-        <p:nvSpPr>
-          <p:cNvPr id="202" name="Shape 180"/>
+          <p:cNvPr id="185" name="Shape 163"/>
           <p:cNvSpPr/>
           <p:nvPr/>
         </p:nvSpPr>
@@ -20695,7 +19727,7 @@
       </p:sp>
       <p:sp>
         <p:nvSpPr>
-          <p:cNvPr id="203" name="Text 181"/>
+          <p:cNvPr id="186" name="Text 164"/>
           <p:cNvSpPr/>
           <p:nvPr/>
         </p:nvSpPr>
@@ -20734,7 +19766,7 @@
       </p:sp>
       <p:sp>
         <p:nvSpPr>
-          <p:cNvPr id="204" name="Shape 182"/>
+          <p:cNvPr id="187" name="Shape 165"/>
           <p:cNvSpPr/>
           <p:nvPr/>
         </p:nvSpPr>
@@ -20759,7 +19791,7 @@
       </p:sp>
       <p:sp>
         <p:nvSpPr>
-          <p:cNvPr id="205" name="Text 183"/>
+          <p:cNvPr id="188" name="Text 166"/>
           <p:cNvSpPr/>
           <p:nvPr/>
         </p:nvSpPr>
@@ -20798,7 +19830,7 @@
       </p:sp>
       <p:sp>
         <p:nvSpPr>
-          <p:cNvPr id="206" name="Shape 184"/>
+          <p:cNvPr id="189" name="Shape 167"/>
           <p:cNvSpPr/>
           <p:nvPr/>
         </p:nvSpPr>
@@ -20823,7 +19855,7 @@
       </p:sp>
       <p:sp>
         <p:nvSpPr>
-          <p:cNvPr id="207" name="Text 185"/>
+          <p:cNvPr id="190" name="Text 168"/>
           <p:cNvSpPr/>
           <p:nvPr/>
         </p:nvSpPr>
@@ -20862,7 +19894,7 @@
       </p:sp>
       <p:sp>
         <p:nvSpPr>
-          <p:cNvPr id="208" name="Shape 186"/>
+          <p:cNvPr id="191" name="Shape 169"/>
           <p:cNvSpPr/>
           <p:nvPr/>
         </p:nvSpPr>
@@ -20887,7 +19919,7 @@
       </p:sp>
       <p:sp>
         <p:nvSpPr>
-          <p:cNvPr id="209" name="Text 187"/>
+          <p:cNvPr id="192" name="Text 170"/>
           <p:cNvSpPr/>
           <p:nvPr/>
         </p:nvSpPr>
@@ -20926,7 +19958,7 @@
       </p:sp>
       <p:sp>
         <p:nvSpPr>
-          <p:cNvPr id="210" name="Shape 188"/>
+          <p:cNvPr id="193" name="Shape 171"/>
           <p:cNvSpPr/>
           <p:nvPr/>
         </p:nvSpPr>
@@ -20951,7 +19983,7 @@
       </p:sp>
       <p:sp>
         <p:nvSpPr>
-          <p:cNvPr id="211" name="Text 189"/>
+          <p:cNvPr id="194" name="Text 172"/>
           <p:cNvSpPr/>
           <p:nvPr/>
         </p:nvSpPr>
@@ -20990,7 +20022,7 @@
       </p:sp>
       <p:sp>
         <p:nvSpPr>
-          <p:cNvPr id="212" name="Shape 190"/>
+          <p:cNvPr id="195" name="Shape 173"/>
           <p:cNvSpPr/>
           <p:nvPr/>
         </p:nvSpPr>
@@ -21015,7 +20047,7 @@
       </p:sp>
       <p:sp>
         <p:nvSpPr>
-          <p:cNvPr id="213" name="Text 191"/>
+          <p:cNvPr id="196" name="Text 174"/>
           <p:cNvSpPr/>
           <p:nvPr/>
         </p:nvSpPr>
@@ -21054,7 +20086,7 @@
       </p:sp>
       <p:sp>
         <p:nvSpPr>
-          <p:cNvPr id="214" name="Shape 192"/>
+          <p:cNvPr id="197" name="Shape 175"/>
           <p:cNvSpPr/>
           <p:nvPr/>
         </p:nvSpPr>
@@ -21079,7 +20111,7 @@
       </p:sp>
       <p:sp>
         <p:nvSpPr>
-          <p:cNvPr id="215" name="Text 193"/>
+          <p:cNvPr id="198" name="Text 176"/>
           <p:cNvSpPr/>
           <p:nvPr/>
         </p:nvSpPr>
@@ -21118,7 +20150,7 @@
       </p:sp>
       <p:sp>
         <p:nvSpPr>
-          <p:cNvPr id="216" name="Shape 194"/>
+          <p:cNvPr id="199" name="Shape 177"/>
           <p:cNvSpPr/>
           <p:nvPr/>
         </p:nvSpPr>
@@ -21143,7 +20175,7 @@
       </p:sp>
       <p:sp>
         <p:nvSpPr>
-          <p:cNvPr id="217" name="Text 195"/>
+          <p:cNvPr id="200" name="Text 178"/>
           <p:cNvSpPr/>
           <p:nvPr/>
         </p:nvSpPr>
@@ -21182,7 +20214,7 @@
       </p:sp>
       <p:sp>
         <p:nvSpPr>
-          <p:cNvPr id="218" name="Shape 196"/>
+          <p:cNvPr id="201" name="Shape 179"/>
           <p:cNvSpPr/>
           <p:nvPr/>
         </p:nvSpPr>
@@ -21207,7 +20239,7 @@
       </p:sp>
       <p:sp>
         <p:nvSpPr>
-          <p:cNvPr id="219" name="Text 197"/>
+          <p:cNvPr id="202" name="Text 180"/>
           <p:cNvSpPr/>
           <p:nvPr/>
         </p:nvSpPr>
@@ -21246,7 +20278,1434 @@
       </p:sp>
       <p:sp>
         <p:nvSpPr>
+          <p:cNvPr id="203" name="Shape 181"/>
+          <p:cNvSpPr/>
+          <p:nvPr/>
+        </p:nvSpPr>
+        <p:spPr>
+          <a:xfrm>
+            <a:off x="5339182" y="3353105"/>
+            <a:ext cx="760781" cy="217627"/>
+          </a:xfrm>
+          <a:prstGeom prst="roundRect">
+            <a:avLst>
+              <a:gd name="adj" fmla="val 21008"/>
+            </a:avLst>
+          </a:prstGeom>
+          <a:solidFill>
+            <a:srgbClr val="FFFFFF"/>
+          </a:solidFill>
+          <a:ln w="5715">
+            <a:solidFill>
+              <a:srgbClr val="DADCE0"/>
+            </a:solidFill>
+            <a:prstDash val="solid"/>
+          </a:ln>
+        </p:spPr>
+      </p:sp>
+      <p:sp>
+        <p:nvSpPr>
+          <p:cNvPr id="204" name="Text 182"/>
+          <p:cNvSpPr/>
+          <p:nvPr/>
+        </p:nvSpPr>
+        <p:spPr>
+          <a:xfrm>
+            <a:off x="5357470" y="3362249"/>
+            <a:ext cx="724205" cy="199339"/>
+          </a:xfrm>
+          <a:prstGeom prst="rect">
+            <a:avLst/>
+          </a:prstGeom>
+          <a:noFill/>
+          <a:ln/>
+        </p:spPr>
+        <p:txBody>
+          <a:bodyPr wrap="square" lIns="0" tIns="0" rIns="0" bIns="0" rtlCol="0" anchor="ctr">
+            <a:normAutofit/>
+          </a:bodyPr>
+          <a:lstStyle/>
+          <a:p>
+            <a:pPr algn="ctr" indent="0" marL="0">
+              <a:lnSpc>
+                <a:spcPct val="86000"/>
+              </a:lnSpc>
+              <a:buNone/>
+            </a:pPr>
+            <a:r>
+              <a:rPr lang="en-US" sz="480" b="1" dirty="0">
+                <a:solidFill>
+                  <a:srgbClr val="202124"/>
+                </a:solidFill>
+                <a:latin typeface="Arial" pitchFamily="34" charset="0"/>
+                <a:ea typeface="Arial" pitchFamily="34" charset="-122"/>
+                <a:cs typeface="Arial" pitchFamily="34" charset="-120"/>
+              </a:rPr>
+              <a:t>CMEK state &amp; VPC-SC</a:t>
+            </a:r>
+            <a:endParaRPr lang="en-US" sz="480" dirty="0"/>
+          </a:p>
+          <a:p>
+            <a:pPr algn="ctr" indent="0" marL="0">
+              <a:lnSpc>
+                <a:spcPct val="86000"/>
+              </a:lnSpc>
+              <a:buNone/>
+            </a:pPr>
+            <a:r>
+              <a:rPr lang="en-US" sz="420" dirty="0">
+                <a:solidFill>
+                  <a:srgbClr val="202124"/>
+                </a:solidFill>
+                <a:latin typeface="Arial" pitchFamily="34" charset="0"/>
+                <a:ea typeface="Arial" pitchFamily="34" charset="-122"/>
+                <a:cs typeface="Arial" pitchFamily="34" charset="-120"/>
+              </a:rPr>
+              <a:t>audit monitoring</a:t>
+            </a:r>
+            <a:endParaRPr lang="en-US" sz="480" dirty="0"/>
+          </a:p>
+        </p:txBody>
+      </p:sp>
+      <p:sp>
+        <p:nvSpPr>
+          <p:cNvPr id="205" name="Shape 183"/>
+          <p:cNvSpPr/>
+          <p:nvPr/>
+        </p:nvSpPr>
+        <p:spPr>
+          <a:xfrm>
+            <a:off x="2803550" y="4817059"/>
+            <a:ext cx="560527" cy="210312"/>
+          </a:xfrm>
+          <a:prstGeom prst="roundRect">
+            <a:avLst>
+              <a:gd name="adj" fmla="val 21739"/>
+            </a:avLst>
+          </a:prstGeom>
+          <a:solidFill>
+            <a:srgbClr val="FFFFFF"/>
+          </a:solidFill>
+          <a:ln w="5715">
+            <a:solidFill>
+              <a:srgbClr val="DADCE0"/>
+            </a:solidFill>
+            <a:prstDash val="solid"/>
+          </a:ln>
+        </p:spPr>
+      </p:sp>
+      <p:sp>
+        <p:nvSpPr>
+          <p:cNvPr id="206" name="Text 184"/>
+          <p:cNvSpPr/>
+          <p:nvPr/>
+        </p:nvSpPr>
+        <p:spPr>
+          <a:xfrm>
+            <a:off x="2821838" y="4826203"/>
+            <a:ext cx="523951" cy="192024"/>
+          </a:xfrm>
+          <a:prstGeom prst="rect">
+            <a:avLst/>
+          </a:prstGeom>
+          <a:noFill/>
+          <a:ln/>
+        </p:spPr>
+        <p:txBody>
+          <a:bodyPr wrap="square" lIns="0" tIns="0" rIns="0" bIns="0" rtlCol="0" anchor="ctr">
+            <a:normAutofit/>
+          </a:bodyPr>
+          <a:lstStyle/>
+          <a:p>
+            <a:pPr algn="ctr" indent="0" marL="0">
+              <a:lnSpc>
+                <a:spcPct val="86000"/>
+              </a:lnSpc>
+              <a:buNone/>
+            </a:pPr>
+            <a:r>
+              <a:rPr lang="en-US" sz="480" b="1" dirty="0">
+                <a:solidFill>
+                  <a:srgbClr val="202124"/>
+                </a:solidFill>
+                <a:latin typeface="Arial" pitchFamily="34" charset="0"/>
+                <a:ea typeface="Arial" pitchFamily="34" charset="-122"/>
+                <a:cs typeface="Arial" pitchFamily="34" charset="-120"/>
+              </a:rPr>
+              <a:t>Private GKE</a:t>
+            </a:r>
+            <a:endParaRPr lang="en-US" sz="480" dirty="0"/>
+          </a:p>
+          <a:p>
+            <a:pPr algn="ctr" indent="0" marL="0">
+              <a:lnSpc>
+                <a:spcPct val="86000"/>
+              </a:lnSpc>
+              <a:buNone/>
+            </a:pPr>
+            <a:r>
+              <a:rPr lang="en-US" sz="420" dirty="0">
+                <a:solidFill>
+                  <a:srgbClr val="202124"/>
+                </a:solidFill>
+                <a:latin typeface="Arial" pitchFamily="34" charset="0"/>
+                <a:ea typeface="Arial" pitchFamily="34" charset="-122"/>
+                <a:cs typeface="Arial" pitchFamily="34" charset="-120"/>
+              </a:rPr>
+              <a:t>Zero Egress</a:t>
+            </a:r>
+            <a:endParaRPr lang="en-US" sz="480" dirty="0"/>
+          </a:p>
+        </p:txBody>
+      </p:sp>
+      <p:sp>
+        <p:nvSpPr>
+          <p:cNvPr id="207" name="Shape 185"/>
+          <p:cNvSpPr/>
+          <p:nvPr/>
+        </p:nvSpPr>
+        <p:spPr>
+          <a:xfrm>
+            <a:off x="2691994" y="5451653"/>
+            <a:ext cx="782726" cy="210312"/>
+          </a:xfrm>
+          <a:prstGeom prst="roundRect">
+            <a:avLst>
+              <a:gd name="adj" fmla="val 21739"/>
+            </a:avLst>
+          </a:prstGeom>
+          <a:solidFill>
+            <a:srgbClr val="FFFFFF"/>
+          </a:solidFill>
+          <a:ln w="5715">
+            <a:solidFill>
+              <a:srgbClr val="DADCE0"/>
+            </a:solidFill>
+            <a:prstDash val="solid"/>
+          </a:ln>
+        </p:spPr>
+      </p:sp>
+      <p:sp>
+        <p:nvSpPr>
+          <p:cNvPr id="208" name="Text 186"/>
+          <p:cNvSpPr/>
+          <p:nvPr/>
+        </p:nvSpPr>
+        <p:spPr>
+          <a:xfrm>
+            <a:off x="2710282" y="5460797"/>
+            <a:ext cx="746150" cy="192024"/>
+          </a:xfrm>
+          <a:prstGeom prst="rect">
+            <a:avLst/>
+          </a:prstGeom>
+          <a:noFill/>
+          <a:ln/>
+        </p:spPr>
+        <p:txBody>
+          <a:bodyPr wrap="square" lIns="0" tIns="0" rIns="0" bIns="0" rtlCol="0" anchor="ctr">
+            <a:normAutofit/>
+          </a:bodyPr>
+          <a:lstStyle/>
+          <a:p>
+            <a:pPr algn="ctr" indent="0" marL="0">
+              <a:lnSpc>
+                <a:spcPct val="86000"/>
+              </a:lnSpc>
+              <a:buNone/>
+            </a:pPr>
+            <a:r>
+              <a:rPr lang="en-US" sz="480" b="1" dirty="0">
+                <a:solidFill>
+                  <a:srgbClr val="202124"/>
+                </a:solidFill>
+                <a:latin typeface="Arial" pitchFamily="34" charset="0"/>
+                <a:ea typeface="Arial" pitchFamily="34" charset="-122"/>
+                <a:cs typeface="Arial" pitchFamily="34" charset="-120"/>
+              </a:rPr>
+              <a:t>finvault-silo-cmek</a:t>
+            </a:r>
+            <a:endParaRPr lang="en-US" sz="480" dirty="0"/>
+          </a:p>
+          <a:p>
+            <a:pPr algn="ctr" indent="0" marL="0">
+              <a:lnSpc>
+                <a:spcPct val="86000"/>
+              </a:lnSpc>
+              <a:buNone/>
+            </a:pPr>
+            <a:r>
+              <a:rPr lang="en-US" sz="420" dirty="0">
+                <a:solidFill>
+                  <a:srgbClr val="202124"/>
+                </a:solidFill>
+                <a:latin typeface="Arial" pitchFamily="34" charset="0"/>
+                <a:ea typeface="Arial" pitchFamily="34" charset="-122"/>
+                <a:cs typeface="Arial" pitchFamily="34" charset="-120"/>
+              </a:rPr>
+              <a:t>HTTP 423 Ready</a:t>
+            </a:r>
+            <a:endParaRPr lang="en-US" sz="480" dirty="0"/>
+          </a:p>
+        </p:txBody>
+      </p:sp>
+      <p:sp>
+        <p:nvSpPr>
+          <p:cNvPr id="209" name="Shape 187"/>
+          <p:cNvSpPr/>
+          <p:nvPr/>
+        </p:nvSpPr>
+        <p:spPr>
+          <a:xfrm>
+            <a:off x="5148072" y="4817059"/>
+            <a:ext cx="599846" cy="210312"/>
+          </a:xfrm>
+          <a:prstGeom prst="roundRect">
+            <a:avLst>
+              <a:gd name="adj" fmla="val 21739"/>
+            </a:avLst>
+          </a:prstGeom>
+          <a:solidFill>
+            <a:srgbClr val="FFFFFF"/>
+          </a:solidFill>
+          <a:ln w="5715">
+            <a:solidFill>
+              <a:srgbClr val="DADCE0"/>
+            </a:solidFill>
+            <a:prstDash val="solid"/>
+          </a:ln>
+        </p:spPr>
+      </p:sp>
+      <p:sp>
+        <p:nvSpPr>
+          <p:cNvPr id="210" name="Text 188"/>
+          <p:cNvSpPr/>
+          <p:nvPr/>
+        </p:nvSpPr>
+        <p:spPr>
+          <a:xfrm>
+            <a:off x="5166360" y="4826203"/>
+            <a:ext cx="563270" cy="192024"/>
+          </a:xfrm>
+          <a:prstGeom prst="rect">
+            <a:avLst/>
+          </a:prstGeom>
+          <a:noFill/>
+          <a:ln/>
+        </p:spPr>
+        <p:txBody>
+          <a:bodyPr wrap="square" lIns="0" tIns="0" rIns="0" bIns="0" rtlCol="0" anchor="ctr">
+            <a:normAutofit/>
+          </a:bodyPr>
+          <a:lstStyle/>
+          <a:p>
+            <a:pPr algn="ctr" indent="0" marL="0">
+              <a:lnSpc>
+                <a:spcPct val="86000"/>
+              </a:lnSpc>
+              <a:buNone/>
+            </a:pPr>
+            <a:r>
+              <a:rPr lang="en-US" sz="480" b="1" dirty="0">
+                <a:solidFill>
+                  <a:srgbClr val="202124"/>
+                </a:solidFill>
+                <a:latin typeface="Arial" pitchFamily="34" charset="0"/>
+                <a:ea typeface="Arial" pitchFamily="34" charset="-122"/>
+                <a:cs typeface="Arial" pitchFamily="34" charset="-120"/>
+              </a:rPr>
+              <a:t>VPC-SC Bound</a:t>
+            </a:r>
+            <a:endParaRPr lang="en-US" sz="480" dirty="0"/>
+          </a:p>
+          <a:p>
+            <a:pPr algn="ctr" indent="0" marL="0">
+              <a:lnSpc>
+                <a:spcPct val="86000"/>
+              </a:lnSpc>
+              <a:buNone/>
+            </a:pPr>
+            <a:r>
+              <a:rPr lang="en-US" sz="420" dirty="0">
+                <a:solidFill>
+                  <a:srgbClr val="202124"/>
+                </a:solidFill>
+                <a:latin typeface="Arial" pitchFamily="34" charset="0"/>
+                <a:ea typeface="Arial" pitchFamily="34" charset="-122"/>
+                <a:cs typeface="Arial" pitchFamily="34" charset="-120"/>
+              </a:rPr>
+              <a:t>Secure RAG</a:t>
+            </a:r>
+            <a:endParaRPr lang="en-US" sz="480" dirty="0"/>
+          </a:p>
+        </p:txBody>
+      </p:sp>
+      <p:sp>
+        <p:nvSpPr>
+          <p:cNvPr id="211" name="Shape 189"/>
+          <p:cNvSpPr/>
+          <p:nvPr/>
+        </p:nvSpPr>
+        <p:spPr>
+          <a:xfrm>
+            <a:off x="5056632" y="5451653"/>
+            <a:ext cx="782726" cy="210312"/>
+          </a:xfrm>
+          <a:prstGeom prst="roundRect">
+            <a:avLst>
+              <a:gd name="adj" fmla="val 21739"/>
+            </a:avLst>
+          </a:prstGeom>
+          <a:solidFill>
+            <a:srgbClr val="FFFFFF"/>
+          </a:solidFill>
+          <a:ln w="5715">
+            <a:solidFill>
+              <a:srgbClr val="DADCE0"/>
+            </a:solidFill>
+            <a:prstDash val="solid"/>
+          </a:ln>
+        </p:spPr>
+      </p:sp>
+      <p:sp>
+        <p:nvSpPr>
+          <p:cNvPr id="212" name="Text 190"/>
+          <p:cNvSpPr/>
+          <p:nvPr/>
+        </p:nvSpPr>
+        <p:spPr>
+          <a:xfrm>
+            <a:off x="5074920" y="5460797"/>
+            <a:ext cx="746150" cy="192024"/>
+          </a:xfrm>
+          <a:prstGeom prst="rect">
+            <a:avLst/>
+          </a:prstGeom>
+          <a:noFill/>
+          <a:ln/>
+        </p:spPr>
+        <p:txBody>
+          <a:bodyPr wrap="square" lIns="0" tIns="0" rIns="0" bIns="0" rtlCol="0" anchor="ctr">
+            <a:normAutofit/>
+          </a:bodyPr>
+          <a:lstStyle/>
+          <a:p>
+            <a:pPr algn="ctr" indent="0" marL="0">
+              <a:lnSpc>
+                <a:spcPct val="86000"/>
+              </a:lnSpc>
+              <a:buNone/>
+            </a:pPr>
+            <a:r>
+              <a:rPr lang="en-US" sz="480" b="1" dirty="0">
+                <a:solidFill>
+                  <a:srgbClr val="202124"/>
+                </a:solidFill>
+                <a:latin typeface="Arial" pitchFamily="34" charset="0"/>
+                <a:ea typeface="Arial" pitchFamily="34" charset="-122"/>
+                <a:cs typeface="Arial" pitchFamily="34" charset="-120"/>
+              </a:rPr>
+              <a:t>CMEK Kill-Switch</a:t>
+            </a:r>
+            <a:endParaRPr lang="en-US" sz="480" dirty="0"/>
+          </a:p>
+          <a:p>
+            <a:pPr algn="ctr" indent="0" marL="0">
+              <a:lnSpc>
+                <a:spcPct val="86000"/>
+              </a:lnSpc>
+              <a:buNone/>
+            </a:pPr>
+            <a:r>
+              <a:rPr lang="en-US" sz="420" dirty="0">
+                <a:solidFill>
+                  <a:srgbClr val="202124"/>
+                </a:solidFill>
+                <a:latin typeface="Arial" pitchFamily="34" charset="0"/>
+                <a:ea typeface="Arial" pitchFamily="34" charset="-122"/>
+                <a:cs typeface="Arial" pitchFamily="34" charset="-120"/>
+              </a:rPr>
+              <a:t>HTTP 423 Verified</a:t>
+            </a:r>
+            <a:endParaRPr lang="en-US" sz="480" dirty="0"/>
+          </a:p>
+        </p:txBody>
+      </p:sp>
+      <p:sp>
+        <p:nvSpPr>
+          <p:cNvPr id="213" name="Shape 191"/>
+          <p:cNvSpPr/>
+          <p:nvPr/>
+        </p:nvSpPr>
+        <p:spPr>
+          <a:xfrm>
+            <a:off x="1839773" y="5603443"/>
+            <a:ext cx="521208" cy="210312"/>
+          </a:xfrm>
+          <a:prstGeom prst="roundRect">
+            <a:avLst>
+              <a:gd name="adj" fmla="val 21739"/>
+            </a:avLst>
+          </a:prstGeom>
+          <a:solidFill>
+            <a:srgbClr val="FFFFFF"/>
+          </a:solidFill>
+          <a:ln w="5715">
+            <a:solidFill>
+              <a:srgbClr val="DADCE0"/>
+            </a:solidFill>
+            <a:prstDash val="solid"/>
+          </a:ln>
+        </p:spPr>
+      </p:sp>
+      <p:sp>
+        <p:nvSpPr>
+          <p:cNvPr id="214" name="Text 192"/>
+          <p:cNvSpPr/>
+          <p:nvPr/>
+        </p:nvSpPr>
+        <p:spPr>
+          <a:xfrm>
+            <a:off x="1858061" y="5612587"/>
+            <a:ext cx="484632" cy="192024"/>
+          </a:xfrm>
+          <a:prstGeom prst="rect">
+            <a:avLst/>
+          </a:prstGeom>
+          <a:noFill/>
+          <a:ln/>
+        </p:spPr>
+        <p:txBody>
+          <a:bodyPr wrap="square" lIns="0" tIns="0" rIns="0" bIns="0" rtlCol="0" anchor="ctr">
+            <a:normAutofit/>
+          </a:bodyPr>
+          <a:lstStyle/>
+          <a:p>
+            <a:pPr algn="ctr" indent="0" marL="0">
+              <a:lnSpc>
+                <a:spcPct val="86000"/>
+              </a:lnSpc>
+              <a:buNone/>
+            </a:pPr>
+            <a:r>
+              <a:rPr lang="en-US" sz="480" b="1" dirty="0">
+                <a:solidFill>
+                  <a:srgbClr val="202124"/>
+                </a:solidFill>
+                <a:latin typeface="Arial" pitchFamily="34" charset="0"/>
+                <a:ea typeface="Arial" pitchFamily="34" charset="-122"/>
+                <a:cs typeface="Arial" pitchFamily="34" charset="-120"/>
+              </a:rPr>
+              <a:t>Air-gapped</a:t>
+            </a:r>
+            <a:endParaRPr lang="en-US" sz="480" dirty="0"/>
+          </a:p>
+          <a:p>
+            <a:pPr algn="ctr" indent="0" marL="0">
+              <a:lnSpc>
+                <a:spcPct val="86000"/>
+              </a:lnSpc>
+              <a:buNone/>
+            </a:pPr>
+            <a:r>
+              <a:rPr lang="en-US" sz="420" dirty="0">
+                <a:solidFill>
+                  <a:srgbClr val="202124"/>
+                </a:solidFill>
+                <a:latin typeface="Arial" pitchFamily="34" charset="0"/>
+                <a:ea typeface="Arial" pitchFamily="34" charset="-122"/>
+                <a:cs typeface="Arial" pitchFamily="34" charset="-120"/>
+              </a:rPr>
+              <a:t>inference</a:t>
+            </a:r>
+            <a:endParaRPr lang="en-US" sz="480" dirty="0"/>
+          </a:p>
+        </p:txBody>
+      </p:sp>
+      <p:sp>
+        <p:nvSpPr>
+          <p:cNvPr id="215" name="Shape 193"/>
+          <p:cNvSpPr/>
+          <p:nvPr/>
+        </p:nvSpPr>
+        <p:spPr>
+          <a:xfrm>
+            <a:off x="3905402" y="3353105"/>
+            <a:ext cx="738835" cy="210312"/>
+          </a:xfrm>
+          <a:prstGeom prst="roundRect">
+            <a:avLst>
+              <a:gd name="adj" fmla="val 21739"/>
+            </a:avLst>
+          </a:prstGeom>
+          <a:solidFill>
+            <a:srgbClr val="FFFFFF"/>
+          </a:solidFill>
+          <a:ln w="5715">
+            <a:solidFill>
+              <a:srgbClr val="DADCE0"/>
+            </a:solidFill>
+            <a:prstDash val="solid"/>
+          </a:ln>
+        </p:spPr>
+      </p:sp>
+      <p:sp>
+        <p:nvSpPr>
+          <p:cNvPr id="216" name="Text 194"/>
+          <p:cNvSpPr/>
+          <p:nvPr/>
+        </p:nvSpPr>
+        <p:spPr>
+          <a:xfrm>
+            <a:off x="3923690" y="3362249"/>
+            <a:ext cx="702259" cy="192024"/>
+          </a:xfrm>
+          <a:prstGeom prst="rect">
+            <a:avLst/>
+          </a:prstGeom>
+          <a:noFill/>
+          <a:ln/>
+        </p:spPr>
+        <p:txBody>
+          <a:bodyPr wrap="square" lIns="0" tIns="0" rIns="0" bIns="0" rtlCol="0" anchor="ctr">
+            <a:normAutofit/>
+          </a:bodyPr>
+          <a:lstStyle/>
+          <a:p>
+            <a:pPr algn="ctr" indent="0" marL="0">
+              <a:lnSpc>
+                <a:spcPct val="86000"/>
+              </a:lnSpc>
+              <a:buNone/>
+            </a:pPr>
+            <a:r>
+              <a:rPr lang="en-US" sz="480" b="1" dirty="0">
+                <a:solidFill>
+                  <a:srgbClr val="202124"/>
+                </a:solidFill>
+                <a:latin typeface="Arial" pitchFamily="34" charset="0"/>
+                <a:ea typeface="Arial" pitchFamily="34" charset="-122"/>
+                <a:cs typeface="Arial" pitchFamily="34" charset="-120"/>
+              </a:rPr>
+              <a:t>Sovereign response</a:t>
+            </a:r>
+            <a:endParaRPr lang="en-US" sz="480" dirty="0"/>
+          </a:p>
+          <a:p>
+            <a:pPr algn="ctr" indent="0" marL="0">
+              <a:lnSpc>
+                <a:spcPct val="86000"/>
+              </a:lnSpc>
+              <a:buNone/>
+            </a:pPr>
+            <a:r>
+              <a:rPr lang="en-US" sz="420" dirty="0">
+                <a:solidFill>
+                  <a:srgbClr val="202124"/>
+                </a:solidFill>
+                <a:latin typeface="Arial" pitchFamily="34" charset="0"/>
+                <a:ea typeface="Arial" pitchFamily="34" charset="-122"/>
+                <a:cs typeface="Arial" pitchFamily="34" charset="-120"/>
+              </a:rPr>
+              <a:t>(or HTTP 423 Locked)</a:t>
+            </a:r>
+            <a:endParaRPr lang="en-US" sz="480" dirty="0"/>
+          </a:p>
+        </p:txBody>
+      </p:sp>
+      <p:sp>
+        <p:nvSpPr>
+          <p:cNvPr id="217" name="Shape 195"/>
+          <p:cNvSpPr/>
+          <p:nvPr/>
+        </p:nvSpPr>
+        <p:spPr>
+          <a:xfrm>
+            <a:off x="2983687" y="3353105"/>
+            <a:ext cx="669341" cy="210312"/>
+          </a:xfrm>
+          <a:prstGeom prst="roundRect">
+            <a:avLst>
+              <a:gd name="adj" fmla="val 21739"/>
+            </a:avLst>
+          </a:prstGeom>
+          <a:solidFill>
+            <a:srgbClr val="FFFFFF"/>
+          </a:solidFill>
+          <a:ln w="5715">
+            <a:solidFill>
+              <a:srgbClr val="DADCE0"/>
+            </a:solidFill>
+            <a:prstDash val="solid"/>
+          </a:ln>
+        </p:spPr>
+      </p:sp>
+      <p:sp>
+        <p:nvSpPr>
+          <p:cNvPr id="218" name="Text 196"/>
+          <p:cNvSpPr/>
+          <p:nvPr/>
+        </p:nvSpPr>
+        <p:spPr>
+          <a:xfrm>
+            <a:off x="3001975" y="3362249"/>
+            <a:ext cx="632765" cy="192024"/>
+          </a:xfrm>
+          <a:prstGeom prst="rect">
+            <a:avLst/>
+          </a:prstGeom>
+          <a:noFill/>
+          <a:ln/>
+        </p:spPr>
+        <p:txBody>
+          <a:bodyPr wrap="square" lIns="0" tIns="0" rIns="0" bIns="0" rtlCol="0" anchor="ctr">
+            <a:normAutofit/>
+          </a:bodyPr>
+          <a:lstStyle/>
+          <a:p>
+            <a:pPr algn="ctr" indent="0" marL="0">
+              <a:lnSpc>
+                <a:spcPct val="86000"/>
+              </a:lnSpc>
+              <a:buNone/>
+            </a:pPr>
+            <a:r>
+              <a:rPr lang="en-US" sz="480" b="1" dirty="0">
+                <a:solidFill>
+                  <a:srgbClr val="202124"/>
+                </a:solidFill>
+                <a:latin typeface="Arial" pitchFamily="34" charset="0"/>
+                <a:ea typeface="Arial" pitchFamily="34" charset="-122"/>
+                <a:cs typeface="Arial" pitchFamily="34" charset="-120"/>
+              </a:rPr>
+              <a:t>Route to isolated</a:t>
+            </a:r>
+            <a:endParaRPr lang="en-US" sz="480" dirty="0"/>
+          </a:p>
+          <a:p>
+            <a:pPr algn="ctr" indent="0" marL="0">
+              <a:lnSpc>
+                <a:spcPct val="86000"/>
+              </a:lnSpc>
+              <a:buNone/>
+            </a:pPr>
+            <a:r>
+              <a:rPr lang="en-US" sz="420" dirty="0">
+                <a:solidFill>
+                  <a:srgbClr val="202124"/>
+                </a:solidFill>
+                <a:latin typeface="Arial" pitchFamily="34" charset="0"/>
+                <a:ea typeface="Arial" pitchFamily="34" charset="-122"/>
+                <a:cs typeface="Arial" pitchFamily="34" charset="-120"/>
+              </a:rPr>
+              <a:t>VPC-SC tenant project</a:t>
+            </a:r>
+            <a:endParaRPr lang="en-US" sz="480" dirty="0"/>
+          </a:p>
+        </p:txBody>
+      </p:sp>
+      <p:sp>
+        <p:nvSpPr>
+          <p:cNvPr id="219" name="Shape 197"/>
+          <p:cNvSpPr/>
+          <p:nvPr/>
+        </p:nvSpPr>
+        <p:spPr>
+          <a:xfrm>
+            <a:off x="2521915" y="2870302"/>
+            <a:ext cx="560527" cy="210312"/>
+          </a:xfrm>
+          <a:prstGeom prst="roundRect">
+            <a:avLst>
+              <a:gd name="adj" fmla="val 21739"/>
+            </a:avLst>
+          </a:prstGeom>
+          <a:solidFill>
+            <a:srgbClr val="FFFFFF"/>
+          </a:solidFill>
+          <a:ln w="5715">
+            <a:solidFill>
+              <a:srgbClr val="DADCE0"/>
+            </a:solidFill>
+            <a:prstDash val="solid"/>
+          </a:ln>
+        </p:spPr>
+      </p:sp>
+      <p:sp>
+        <p:nvSpPr>
           <p:cNvPr id="220" name="Text 198"/>
+          <p:cNvSpPr/>
+          <p:nvPr/>
+        </p:nvSpPr>
+        <p:spPr>
+          <a:xfrm>
+            <a:off x="2540203" y="2879446"/>
+            <a:ext cx="523951" cy="192024"/>
+          </a:xfrm>
+          <a:prstGeom prst="rect">
+            <a:avLst/>
+          </a:prstGeom>
+          <a:noFill/>
+          <a:ln/>
+        </p:spPr>
+        <p:txBody>
+          <a:bodyPr wrap="square" lIns="0" tIns="0" rIns="0" bIns="0" rtlCol="0" anchor="ctr">
+            <a:normAutofit/>
+          </a:bodyPr>
+          <a:lstStyle/>
+          <a:p>
+            <a:pPr algn="ctr" indent="0" marL="0">
+              <a:lnSpc>
+                <a:spcPct val="86000"/>
+              </a:lnSpc>
+              <a:buNone/>
+            </a:pPr>
+            <a:r>
+              <a:rPr lang="en-US" sz="480" b="1" dirty="0">
+                <a:solidFill>
+                  <a:srgbClr val="202124"/>
+                </a:solidFill>
+                <a:latin typeface="Arial" pitchFamily="34" charset="0"/>
+                <a:ea typeface="Arial" pitchFamily="34" charset="-122"/>
+                <a:cs typeface="Arial" pitchFamily="34" charset="-120"/>
+              </a:rPr>
+              <a:t>Enforce org</a:t>
+            </a:r>
+            <a:endParaRPr lang="en-US" sz="480" dirty="0"/>
+          </a:p>
+          <a:p>
+            <a:pPr algn="ctr" indent="0" marL="0">
+              <a:lnSpc>
+                <a:spcPct val="86000"/>
+              </a:lnSpc>
+              <a:buNone/>
+            </a:pPr>
+            <a:r>
+              <a:rPr lang="en-US" sz="420" dirty="0">
+                <a:solidFill>
+                  <a:srgbClr val="202124"/>
+                </a:solidFill>
+                <a:latin typeface="Arial" pitchFamily="34" charset="0"/>
+                <a:ea typeface="Arial" pitchFamily="34" charset="-122"/>
+                <a:cs typeface="Arial" pitchFamily="34" charset="-120"/>
+              </a:rPr>
+              <a:t>PAB policy</a:t>
+            </a:r>
+            <a:endParaRPr lang="en-US" sz="480" dirty="0"/>
+          </a:p>
+        </p:txBody>
+      </p:sp>
+      <p:sp>
+        <p:nvSpPr>
+          <p:cNvPr id="221" name="Shape 199"/>
+          <p:cNvSpPr/>
+          <p:nvPr/>
+        </p:nvSpPr>
+        <p:spPr>
+          <a:xfrm>
+            <a:off x="1757477" y="4602175"/>
+            <a:ext cx="686714" cy="146304"/>
+          </a:xfrm>
+          <a:prstGeom prst="roundRect">
+            <a:avLst>
+              <a:gd name="adj" fmla="val 31250"/>
+            </a:avLst>
+          </a:prstGeom>
+          <a:solidFill>
+            <a:srgbClr val="FFFFFF"/>
+          </a:solidFill>
+          <a:ln w="5715">
+            <a:solidFill>
+              <a:srgbClr val="DADCE0"/>
+            </a:solidFill>
+            <a:prstDash val="solid"/>
+          </a:ln>
+        </p:spPr>
+      </p:sp>
+      <p:sp>
+        <p:nvSpPr>
+          <p:cNvPr id="222" name="Text 200"/>
+          <p:cNvSpPr/>
+          <p:nvPr/>
+        </p:nvSpPr>
+        <p:spPr>
+          <a:xfrm>
+            <a:off x="1775765" y="4611319"/>
+            <a:ext cx="650138" cy="128016"/>
+          </a:xfrm>
+          <a:prstGeom prst="rect">
+            <a:avLst/>
+          </a:prstGeom>
+          <a:noFill/>
+          <a:ln/>
+        </p:spPr>
+        <p:txBody>
+          <a:bodyPr wrap="square" lIns="0" tIns="0" rIns="0" bIns="0" rtlCol="0" anchor="ctr">
+            <a:normAutofit/>
+          </a:bodyPr>
+          <a:lstStyle/>
+          <a:p>
+            <a:pPr algn="ctr" indent="0" marL="0">
+              <a:lnSpc>
+                <a:spcPct val="86000"/>
+              </a:lnSpc>
+              <a:buNone/>
+            </a:pPr>
+            <a:r>
+              <a:rPr lang="en-US" sz="480" b="1" dirty="0">
+                <a:solidFill>
+                  <a:srgbClr val="202124"/>
+                </a:solidFill>
+                <a:latin typeface="Arial" pitchFamily="34" charset="0"/>
+                <a:ea typeface="Arial" pitchFamily="34" charset="-122"/>
+                <a:cs typeface="Arial" pitchFamily="34" charset="-120"/>
+              </a:rPr>
+              <a:t>Sanitize request</a:t>
+            </a:r>
+            <a:endParaRPr lang="en-US" sz="480" dirty="0"/>
+          </a:p>
+        </p:txBody>
+      </p:sp>
+      <p:sp>
+        <p:nvSpPr>
+          <p:cNvPr id="223" name="Shape 201"/>
+          <p:cNvSpPr/>
+          <p:nvPr/>
+        </p:nvSpPr>
+        <p:spPr>
+          <a:xfrm>
+            <a:off x="1757477" y="4810658"/>
+            <a:ext cx="686714" cy="146304"/>
+          </a:xfrm>
+          <a:prstGeom prst="roundRect">
+            <a:avLst>
+              <a:gd name="adj" fmla="val 31250"/>
+            </a:avLst>
+          </a:prstGeom>
+          <a:solidFill>
+            <a:srgbClr val="FFFFFF"/>
+          </a:solidFill>
+          <a:ln w="5715">
+            <a:solidFill>
+              <a:srgbClr val="DADCE0"/>
+            </a:solidFill>
+            <a:prstDash val="solid"/>
+          </a:ln>
+        </p:spPr>
+      </p:sp>
+      <p:sp>
+        <p:nvSpPr>
+          <p:cNvPr id="224" name="Text 202"/>
+          <p:cNvSpPr/>
+          <p:nvPr/>
+        </p:nvSpPr>
+        <p:spPr>
+          <a:xfrm>
+            <a:off x="1775765" y="4819802"/>
+            <a:ext cx="650138" cy="128016"/>
+          </a:xfrm>
+          <a:prstGeom prst="rect">
+            <a:avLst/>
+          </a:prstGeom>
+          <a:noFill/>
+          <a:ln/>
+        </p:spPr>
+        <p:txBody>
+          <a:bodyPr wrap="square" lIns="0" tIns="0" rIns="0" bIns="0" rtlCol="0" anchor="ctr">
+            <a:normAutofit/>
+          </a:bodyPr>
+          <a:lstStyle/>
+          <a:p>
+            <a:pPr algn="ctr" indent="0" marL="0">
+              <a:lnSpc>
+                <a:spcPct val="86000"/>
+              </a:lnSpc>
+              <a:buNone/>
+            </a:pPr>
+            <a:r>
+              <a:rPr lang="en-US" sz="480" b="1" dirty="0">
+                <a:solidFill>
+                  <a:srgbClr val="202124"/>
+                </a:solidFill>
+                <a:latin typeface="Arial" pitchFamily="34" charset="0"/>
+                <a:ea typeface="Arial" pitchFamily="34" charset="-122"/>
+                <a:cs typeface="Arial" pitchFamily="34" charset="-120"/>
+              </a:rPr>
+              <a:t>Sanitize response</a:t>
+            </a:r>
+            <a:endParaRPr lang="en-US" sz="480" dirty="0"/>
+          </a:p>
+        </p:txBody>
+      </p:sp>
+      <p:sp>
+        <p:nvSpPr>
+          <p:cNvPr id="225" name="Shape 203"/>
+          <p:cNvSpPr/>
+          <p:nvPr/>
+        </p:nvSpPr>
+        <p:spPr>
+          <a:xfrm>
+            <a:off x="2427732" y="2079346"/>
+            <a:ext cx="512064" cy="210312"/>
+          </a:xfrm>
+          <a:prstGeom prst="roundRect">
+            <a:avLst>
+              <a:gd name="adj" fmla="val 21739"/>
+            </a:avLst>
+          </a:prstGeom>
+          <a:solidFill>
+            <a:srgbClr val="FFFFFF"/>
+          </a:solidFill>
+          <a:ln w="5715">
+            <a:solidFill>
+              <a:srgbClr val="DADCE0"/>
+            </a:solidFill>
+            <a:prstDash val="solid"/>
+          </a:ln>
+        </p:spPr>
+      </p:sp>
+      <p:sp>
+        <p:nvSpPr>
+          <p:cNvPr id="226" name="Text 204"/>
+          <p:cNvSpPr/>
+          <p:nvPr/>
+        </p:nvSpPr>
+        <p:spPr>
+          <a:xfrm>
+            <a:off x="2446020" y="2088490"/>
+            <a:ext cx="475488" cy="192024"/>
+          </a:xfrm>
+          <a:prstGeom prst="rect">
+            <a:avLst/>
+          </a:prstGeom>
+          <a:noFill/>
+          <a:ln/>
+        </p:spPr>
+        <p:txBody>
+          <a:bodyPr wrap="square" lIns="0" tIns="0" rIns="0" bIns="0" rtlCol="0" anchor="ctr">
+            <a:normAutofit/>
+          </a:bodyPr>
+          <a:lstStyle/>
+          <a:p>
+            <a:pPr algn="ctr" indent="0" marL="0">
+              <a:lnSpc>
+                <a:spcPct val="86000"/>
+              </a:lnSpc>
+              <a:buNone/>
+            </a:pPr>
+            <a:r>
+              <a:rPr lang="en-US" sz="480" b="1" dirty="0">
+                <a:solidFill>
+                  <a:srgbClr val="202124"/>
+                </a:solidFill>
+                <a:latin typeface="Arial" pitchFamily="34" charset="0"/>
+                <a:ea typeface="Arial" pitchFamily="34" charset="-122"/>
+                <a:cs typeface="Arial" pitchFamily="34" charset="-120"/>
+              </a:rPr>
+              <a:t>Verify client</a:t>
+            </a:r>
+            <a:endParaRPr lang="en-US" sz="480" dirty="0"/>
+          </a:p>
+          <a:p>
+            <a:pPr algn="ctr" indent="0" marL="0">
+              <a:lnSpc>
+                <a:spcPct val="86000"/>
+              </a:lnSpc>
+              <a:buNone/>
+            </a:pPr>
+            <a:r>
+              <a:rPr lang="en-US" sz="420" dirty="0">
+                <a:solidFill>
+                  <a:srgbClr val="202124"/>
+                </a:solidFill>
+                <a:latin typeface="Arial" pitchFamily="34" charset="0"/>
+                <a:ea typeface="Arial" pitchFamily="34" charset="-122"/>
+                <a:cs typeface="Arial" pitchFamily="34" charset="-120"/>
+              </a:rPr>
+              <a:t>SPIFFE SAN</a:t>
+            </a:r>
+            <a:endParaRPr lang="en-US" sz="480" dirty="0"/>
+          </a:p>
+        </p:txBody>
+      </p:sp>
+      <p:sp>
+        <p:nvSpPr>
+          <p:cNvPr id="227" name="Shape 205"/>
+          <p:cNvSpPr/>
+          <p:nvPr/>
+        </p:nvSpPr>
+        <p:spPr>
+          <a:xfrm>
+            <a:off x="2427732" y="2606040"/>
+            <a:ext cx="512064" cy="210312"/>
+          </a:xfrm>
+          <a:prstGeom prst="roundRect">
+            <a:avLst>
+              <a:gd name="adj" fmla="val 21739"/>
+            </a:avLst>
+          </a:prstGeom>
+          <a:solidFill>
+            <a:srgbClr val="FFFFFF"/>
+          </a:solidFill>
+          <a:ln w="5715">
+            <a:solidFill>
+              <a:srgbClr val="DADCE0"/>
+            </a:solidFill>
+            <a:prstDash val="solid"/>
+          </a:ln>
+        </p:spPr>
+      </p:sp>
+      <p:sp>
+        <p:nvSpPr>
+          <p:cNvPr id="228" name="Text 206"/>
+          <p:cNvSpPr/>
+          <p:nvPr/>
+        </p:nvSpPr>
+        <p:spPr>
+          <a:xfrm>
+            <a:off x="2446020" y="2615184"/>
+            <a:ext cx="475488" cy="192024"/>
+          </a:xfrm>
+          <a:prstGeom prst="rect">
+            <a:avLst/>
+          </a:prstGeom>
+          <a:noFill/>
+          <a:ln/>
+        </p:spPr>
+        <p:txBody>
+          <a:bodyPr wrap="square" lIns="0" tIns="0" rIns="0" bIns="0" rtlCol="0" anchor="ctr">
+            <a:normAutofit/>
+          </a:bodyPr>
+          <a:lstStyle/>
+          <a:p>
+            <a:pPr algn="ctr" indent="0" marL="0">
+              <a:lnSpc>
+                <a:spcPct val="86000"/>
+              </a:lnSpc>
+              <a:buNone/>
+            </a:pPr>
+            <a:r>
+              <a:rPr lang="en-US" sz="480" b="1" dirty="0">
+                <a:solidFill>
+                  <a:srgbClr val="202124"/>
+                </a:solidFill>
+                <a:latin typeface="Arial" pitchFamily="34" charset="0"/>
+                <a:ea typeface="Arial" pitchFamily="34" charset="-122"/>
+                <a:cs typeface="Arial" pitchFamily="34" charset="-120"/>
+              </a:rPr>
+              <a:t>Sanitize</a:t>
+            </a:r>
+            <a:endParaRPr lang="en-US" sz="480" dirty="0"/>
+          </a:p>
+          <a:p>
+            <a:pPr algn="ctr" indent="0" marL="0">
+              <a:lnSpc>
+                <a:spcPct val="86000"/>
+              </a:lnSpc>
+              <a:buNone/>
+            </a:pPr>
+            <a:r>
+              <a:rPr lang="en-US" sz="420" dirty="0">
+                <a:solidFill>
+                  <a:srgbClr val="202124"/>
+                </a:solidFill>
+                <a:latin typeface="Arial" pitchFamily="34" charset="0"/>
+                <a:ea typeface="Arial" pitchFamily="34" charset="-122"/>
+                <a:cs typeface="Arial" pitchFamily="34" charset="-120"/>
+              </a:rPr>
+              <a:t>prompt</a:t>
+            </a:r>
+            <a:endParaRPr lang="en-US" sz="480" dirty="0"/>
+          </a:p>
+        </p:txBody>
+      </p:sp>
+      <p:sp>
+        <p:nvSpPr>
+          <p:cNvPr id="229" name="Shape 207"/>
+          <p:cNvSpPr/>
+          <p:nvPr/>
+        </p:nvSpPr>
+        <p:spPr>
+          <a:xfrm>
+            <a:off x="3853282" y="1141171"/>
+            <a:ext cx="512064" cy="146304"/>
+          </a:xfrm>
+          <a:prstGeom prst="roundRect">
+            <a:avLst>
+              <a:gd name="adj" fmla="val 31250"/>
+            </a:avLst>
+          </a:prstGeom>
+          <a:solidFill>
+            <a:srgbClr val="FFFFFF"/>
+          </a:solidFill>
+          <a:ln w="5715">
+            <a:solidFill>
+              <a:srgbClr val="DADCE0"/>
+            </a:solidFill>
+            <a:prstDash val="solid"/>
+          </a:ln>
+        </p:spPr>
+      </p:sp>
+      <p:sp>
+        <p:nvSpPr>
+          <p:cNvPr id="230" name="Text 208"/>
+          <p:cNvSpPr/>
+          <p:nvPr/>
+        </p:nvSpPr>
+        <p:spPr>
+          <a:xfrm>
+            <a:off x="3871570" y="1150315"/>
+            <a:ext cx="475488" cy="128016"/>
+          </a:xfrm>
+          <a:prstGeom prst="rect">
+            <a:avLst/>
+          </a:prstGeom>
+          <a:noFill/>
+          <a:ln/>
+        </p:spPr>
+        <p:txBody>
+          <a:bodyPr wrap="square" lIns="0" tIns="0" rIns="0" bIns="0" rtlCol="0" anchor="ctr">
+            <a:normAutofit/>
+          </a:bodyPr>
+          <a:lstStyle/>
+          <a:p>
+            <a:pPr algn="ctr" indent="0" marL="0">
+              <a:lnSpc>
+                <a:spcPct val="86000"/>
+              </a:lnSpc>
+              <a:buNone/>
+            </a:pPr>
+            <a:r>
+              <a:rPr lang="en-US" sz="480" b="1" dirty="0">
+                <a:solidFill>
+                  <a:srgbClr val="202124"/>
+                </a:solidFill>
+                <a:latin typeface="Arial" pitchFamily="34" charset="0"/>
+                <a:ea typeface="Arial" pitchFamily="34" charset="-122"/>
+                <a:cs typeface="Arial" pitchFamily="34" charset="-120"/>
+              </a:rPr>
+              <a:t>Silo Response</a:t>
+            </a:r>
+            <a:endParaRPr lang="en-US" sz="480" dirty="0"/>
+          </a:p>
+        </p:txBody>
+      </p:sp>
+      <p:sp>
+        <p:nvSpPr>
+          <p:cNvPr id="231" name="Shape 209"/>
+          <p:cNvSpPr/>
+          <p:nvPr/>
+        </p:nvSpPr>
+        <p:spPr>
+          <a:xfrm>
+            <a:off x="3853282" y="2719426"/>
+            <a:ext cx="512064" cy="146304"/>
+          </a:xfrm>
+          <a:prstGeom prst="roundRect">
+            <a:avLst>
+              <a:gd name="adj" fmla="val 31250"/>
+            </a:avLst>
+          </a:prstGeom>
+          <a:solidFill>
+            <a:srgbClr val="FFFFFF"/>
+          </a:solidFill>
+          <a:ln w="5715">
+            <a:solidFill>
+              <a:srgbClr val="DADCE0"/>
+            </a:solidFill>
+            <a:prstDash val="solid"/>
+          </a:ln>
+        </p:spPr>
+      </p:sp>
+      <p:sp>
+        <p:nvSpPr>
+          <p:cNvPr id="232" name="Text 210"/>
+          <p:cNvSpPr/>
+          <p:nvPr/>
+        </p:nvSpPr>
+        <p:spPr>
+          <a:xfrm>
+            <a:off x="3871570" y="2728570"/>
+            <a:ext cx="475488" cy="128016"/>
+          </a:xfrm>
+          <a:prstGeom prst="rect">
+            <a:avLst/>
+          </a:prstGeom>
+          <a:noFill/>
+          <a:ln/>
+        </p:spPr>
+        <p:txBody>
+          <a:bodyPr wrap="square" lIns="0" tIns="0" rIns="0" bIns="0" rtlCol="0" anchor="ctr">
+            <a:normAutofit/>
+          </a:bodyPr>
+          <a:lstStyle/>
+          <a:p>
+            <a:pPr algn="ctr" indent="0" marL="0">
+              <a:lnSpc>
+                <a:spcPct val="86000"/>
+              </a:lnSpc>
+              <a:buNone/>
+            </a:pPr>
+            <a:r>
+              <a:rPr lang="en-US" sz="480" b="1" dirty="0">
+                <a:solidFill>
+                  <a:srgbClr val="202124"/>
+                </a:solidFill>
+                <a:latin typeface="Arial" pitchFamily="34" charset="0"/>
+                <a:ea typeface="Arial" pitchFamily="34" charset="-122"/>
+                <a:cs typeface="Arial" pitchFamily="34" charset="-120"/>
+              </a:rPr>
+              <a:t>200 / 423</a:t>
+            </a:r>
+            <a:endParaRPr lang="en-US" sz="480" dirty="0"/>
+          </a:p>
+        </p:txBody>
+      </p:sp>
+      <p:sp>
+        <p:nvSpPr>
+          <p:cNvPr id="233" name="Shape 211"/>
+          <p:cNvSpPr/>
+          <p:nvPr/>
+        </p:nvSpPr>
+        <p:spPr>
+          <a:xfrm>
+            <a:off x="3032150" y="1141171"/>
+            <a:ext cx="512064" cy="146304"/>
+          </a:xfrm>
+          <a:prstGeom prst="roundRect">
+            <a:avLst>
+              <a:gd name="adj" fmla="val 31250"/>
+            </a:avLst>
+          </a:prstGeom>
+          <a:solidFill>
+            <a:srgbClr val="FFFFFF"/>
+          </a:solidFill>
+          <a:ln w="5715">
+            <a:solidFill>
+              <a:srgbClr val="DADCE0"/>
+            </a:solidFill>
+            <a:prstDash val="solid"/>
+          </a:ln>
+        </p:spPr>
+      </p:sp>
+      <p:sp>
+        <p:nvSpPr>
+          <p:cNvPr id="234" name="Text 212"/>
+          <p:cNvSpPr/>
+          <p:nvPr/>
+        </p:nvSpPr>
+        <p:spPr>
+          <a:xfrm>
+            <a:off x="3050438" y="1150315"/>
+            <a:ext cx="475488" cy="128016"/>
+          </a:xfrm>
+          <a:prstGeom prst="rect">
+            <a:avLst/>
+          </a:prstGeom>
+          <a:noFill/>
+          <a:ln/>
+        </p:spPr>
+        <p:txBody>
+          <a:bodyPr wrap="square" lIns="0" tIns="0" rIns="0" bIns="0" rtlCol="0" anchor="ctr">
+            <a:normAutofit/>
+          </a:bodyPr>
+          <a:lstStyle/>
+          <a:p>
+            <a:pPr algn="ctr" indent="0" marL="0">
+              <a:lnSpc>
+                <a:spcPct val="86000"/>
+              </a:lnSpc>
+              <a:buNone/>
+            </a:pPr>
+            <a:r>
+              <a:rPr lang="en-US" sz="480" b="1" dirty="0">
+                <a:solidFill>
+                  <a:srgbClr val="202124"/>
+                </a:solidFill>
+                <a:latin typeface="Arial" pitchFamily="34" charset="0"/>
+                <a:ea typeface="Arial" pitchFamily="34" charset="-122"/>
+                <a:cs typeface="Arial" pitchFamily="34" charset="-120"/>
+              </a:rPr>
+              <a:t>mTLS Request</a:t>
+            </a:r>
+            <a:endParaRPr lang="en-US" sz="480" dirty="0"/>
+          </a:p>
+        </p:txBody>
+      </p:sp>
+      <p:sp>
+        <p:nvSpPr>
+          <p:cNvPr id="235" name="Shape 213"/>
+          <p:cNvSpPr/>
+          <p:nvPr/>
+        </p:nvSpPr>
+        <p:spPr>
+          <a:xfrm>
+            <a:off x="3032150" y="2645359"/>
+            <a:ext cx="512064" cy="146304"/>
+          </a:xfrm>
+          <a:prstGeom prst="roundRect">
+            <a:avLst>
+              <a:gd name="adj" fmla="val 31250"/>
+            </a:avLst>
+          </a:prstGeom>
+          <a:solidFill>
+            <a:srgbClr val="FFFFFF"/>
+          </a:solidFill>
+          <a:ln w="5715">
+            <a:solidFill>
+              <a:srgbClr val="DADCE0"/>
+            </a:solidFill>
+            <a:prstDash val="solid"/>
+          </a:ln>
+        </p:spPr>
+      </p:sp>
+      <p:sp>
+        <p:nvSpPr>
+          <p:cNvPr id="236" name="Text 214"/>
+          <p:cNvSpPr/>
+          <p:nvPr/>
+        </p:nvSpPr>
+        <p:spPr>
+          <a:xfrm>
+            <a:off x="3050438" y="2654503"/>
+            <a:ext cx="475488" cy="128016"/>
+          </a:xfrm>
+          <a:prstGeom prst="rect">
+            <a:avLst/>
+          </a:prstGeom>
+          <a:noFill/>
+          <a:ln/>
+        </p:spPr>
+        <p:txBody>
+          <a:bodyPr wrap="square" lIns="0" tIns="0" rIns="0" bIns="0" rtlCol="0" anchor="ctr">
+            <a:normAutofit/>
+          </a:bodyPr>
+          <a:lstStyle/>
+          <a:p>
+            <a:pPr algn="ctr" indent="0" marL="0">
+              <a:lnSpc>
+                <a:spcPct val="86000"/>
+              </a:lnSpc>
+              <a:buNone/>
+            </a:pPr>
+            <a:r>
+              <a:rPr lang="en-US" sz="480" b="1" dirty="0">
+                <a:solidFill>
+                  <a:srgbClr val="202124"/>
+                </a:solidFill>
+                <a:latin typeface="Arial" pitchFamily="34" charset="0"/>
+                <a:ea typeface="Arial" pitchFamily="34" charset="-122"/>
+                <a:cs typeface="Arial" pitchFamily="34" charset="-120"/>
+              </a:rPr>
+              <a:t>mTLS Valid</a:t>
+            </a:r>
+            <a:endParaRPr lang="en-US" sz="480" dirty="0"/>
+          </a:p>
+        </p:txBody>
+      </p:sp>
+      <p:sp>
+        <p:nvSpPr>
+          <p:cNvPr id="237" name="Text 215"/>
           <p:cNvSpPr/>
           <p:nvPr/>
         </p:nvSpPr>
@@ -31862,8 +32321,8 @@
         </p:nvSpPr>
         <p:spPr>
           <a:xfrm>
-            <a:off x="1426464" y="1664208"/>
-            <a:ext cx="1536192" cy="402336"/>
+            <a:off x="1426464" y="1627632"/>
+            <a:ext cx="1536192" cy="384048"/>
           </a:xfrm>
           <a:prstGeom prst="rect">
             <a:avLst/>
@@ -31879,7 +32338,7 @@
               <a:buNone/>
             </a:pPr>
             <a:r>
-              <a:rPr lang="en-US" sz="820" b="1" dirty="0">
+              <a:rPr lang="en-US" sz="800" b="1" dirty="0">
                 <a:solidFill>
                   <a:srgbClr val="3C4043"/>
                 </a:solidFill>
@@ -31889,14 +32348,14 @@
               </a:rPr>
               <a:t>CISO triggers emergency</a:t>
             </a:r>
-            <a:endParaRPr lang="en-US" sz="820" dirty="0"/>
+            <a:endParaRPr lang="en-US" sz="800" dirty="0"/>
           </a:p>
           <a:p>
             <a:pPr indent="0" marL="0">
               <a:buNone/>
             </a:pPr>
             <a:r>
-              <a:rPr lang="en-US" sz="820" b="1" dirty="0">
+              <a:rPr lang="en-US" sz="800" b="1" dirty="0">
                 <a:solidFill>
                   <a:srgbClr val="3C4043"/>
                 </a:solidFill>
@@ -31906,14 +32365,14 @@
               </a:rPr>
               <a:t>Cloud KMS key disable</a:t>
             </a:r>
-            <a:endParaRPr lang="en-US" sz="820" dirty="0"/>
+            <a:endParaRPr lang="en-US" sz="800" dirty="0"/>
           </a:p>
           <a:p>
             <a:pPr indent="0" marL="0">
               <a:buNone/>
             </a:pPr>
             <a:r>
-              <a:rPr lang="en-US" sz="820" b="1" dirty="0">
+              <a:rPr lang="en-US" sz="800" b="1" dirty="0">
                 <a:solidFill>
                   <a:srgbClr val="3C4043"/>
                 </a:solidFill>
@@ -31923,7 +32382,7 @@
               </a:rPr>
               <a:t>on finvault-silo-cmek</a:t>
             </a:r>
-            <a:endParaRPr lang="en-US" sz="820" dirty="0"/>
+            <a:endParaRPr lang="en-US" sz="800" dirty="0"/>
           </a:p>
         </p:txBody>
       </p:sp>
@@ -31960,7 +32419,7 @@
         <p:spPr>
           <a:xfrm>
             <a:off x="1261872" y="2048256"/>
-            <a:ext cx="1499616" cy="182880"/>
+            <a:ext cx="1499616" cy="164592"/>
           </a:xfrm>
           <a:prstGeom prst="rect">
             <a:avLst/>
@@ -31976,7 +32435,7 @@
               <a:buNone/>
             </a:pPr>
             <a:r>
-              <a:rPr lang="en-US" sz="800" b="1" dirty="0">
+              <a:rPr lang="en-US" sz="780" b="1" dirty="0">
                 <a:solidFill>
                   <a:srgbClr val="0F2942"/>
                 </a:solidFill>
@@ -31986,7 +32445,7 @@
               </a:rPr>
               <a:t>Disable cryptoKeyVersion</a:t>
             </a:r>
-            <a:endParaRPr lang="en-US" sz="800" dirty="0"/>
+            <a:endParaRPr lang="en-US" sz="780" dirty="0"/>
           </a:p>
         </p:txBody>
       </p:sp>
@@ -31998,7 +32457,7 @@
         </p:nvSpPr>
         <p:spPr>
           <a:xfrm>
-            <a:off x="3182112" y="2304288"/>
+            <a:off x="3182112" y="2267712"/>
             <a:ext cx="292608" cy="292608"/>
           </a:xfrm>
           <a:prstGeom prst="ellipse">
@@ -32018,7 +32477,7 @@
         </p:nvSpPr>
         <p:spPr>
           <a:xfrm>
-            <a:off x="3182112" y="2304288"/>
+            <a:off x="3182112" y="2267712"/>
             <a:ext cx="292608" cy="292608"/>
           </a:xfrm>
           <a:prstGeom prst="rect">
@@ -32057,8 +32516,8 @@
         </p:nvSpPr>
         <p:spPr>
           <a:xfrm>
-            <a:off x="3529584" y="2267712"/>
-            <a:ext cx="1536192" cy="438912"/>
+            <a:off x="3529584" y="2231136"/>
+            <a:ext cx="1536192" cy="402336"/>
           </a:xfrm>
           <a:prstGeom prst="rect">
             <a:avLst/>
@@ -32074,7 +32533,7 @@
               <a:buNone/>
             </a:pPr>
             <a:r>
-              <a:rPr lang="en-US" sz="800" b="1" dirty="0">
+              <a:rPr lang="en-US" sz="780" b="1" dirty="0">
                 <a:solidFill>
                   <a:srgbClr val="3C4043"/>
                 </a:solidFill>
@@ -32084,14 +32543,14 @@
               </a:rPr>
               <a:t>Cloud KMS revokes IAM</a:t>
             </a:r>
-            <a:endParaRPr lang="en-US" sz="800" dirty="0"/>
+            <a:endParaRPr lang="en-US" sz="780" dirty="0"/>
           </a:p>
           <a:p>
             <a:pPr indent="0" marL="0">
               <a:buNone/>
             </a:pPr>
             <a:r>
-              <a:rPr lang="en-US" sz="800" b="1" dirty="0">
+              <a:rPr lang="en-US" sz="780" b="1" dirty="0">
                 <a:solidFill>
                   <a:srgbClr val="3C4043"/>
                 </a:solidFill>
@@ -32101,14 +32560,14 @@
               </a:rPr>
               <a:t>cryptoKeyDecrypter across</a:t>
             </a:r>
-            <a:endParaRPr lang="en-US" sz="800" dirty="0"/>
+            <a:endParaRPr lang="en-US" sz="780" dirty="0"/>
           </a:p>
           <a:p>
             <a:pPr indent="0" marL="0">
               <a:buNone/>
             </a:pPr>
             <a:r>
-              <a:rPr lang="en-US" sz="800" b="1" dirty="0">
+              <a:rPr lang="en-US" sz="780" b="1" dirty="0">
                 <a:solidFill>
                   <a:srgbClr val="3C4043"/>
                 </a:solidFill>
@@ -32118,7 +32577,7 @@
               </a:rPr>
               <a:t>silo project</a:t>
             </a:r>
-            <a:endParaRPr lang="en-US" sz="800" dirty="0"/>
+            <a:endParaRPr lang="en-US" sz="780" dirty="0"/>
           </a:p>
         </p:txBody>
       </p:sp>
@@ -32130,7 +32589,7 @@
         </p:nvSpPr>
         <p:spPr>
           <a:xfrm>
-            <a:off x="3136392" y="2889504"/>
+            <a:off x="3136392" y="2907792"/>
             <a:ext cx="1956816" cy="0"/>
           </a:xfrm>
           <a:prstGeom prst="line">
@@ -32154,24 +32613,26 @@
         </p:nvSpPr>
         <p:spPr>
           <a:xfrm>
-            <a:off x="3200400" y="2688336"/>
-            <a:ext cx="1828800" cy="182880"/>
-          </a:xfrm>
-          <a:prstGeom prst="rect">
-            <a:avLst/>
-          </a:prstGeom>
-          <a:noFill/>
-          <a:ln/>
-        </p:spPr>
-        <p:txBody>
-          <a:bodyPr wrap="square" rtlCol="0" anchor="ctr"/>
+            <a:off x="3163824" y="2697480"/>
+            <a:ext cx="1901952" cy="173736"/>
+          </a:xfrm>
+          <a:prstGeom prst="rect">
+            <a:avLst/>
+          </a:prstGeom>
+          <a:noFill/>
+          <a:ln/>
+        </p:spPr>
+        <p:txBody>
+          <a:bodyPr wrap="square" rtlCol="0" anchor="ctr">
+            <a:normAutofit/>
+          </a:bodyPr>
           <a:lstStyle/>
           <a:p>
             <a:pPr algn="ctr" indent="0" marL="0">
               <a:buNone/>
             </a:pPr>
             <a:r>
-              <a:rPr lang="en-US" sz="760" b="1" dirty="0">
+              <a:rPr lang="en-US" sz="700" b="1" dirty="0">
                 <a:solidFill>
                   <a:srgbClr val="0D7A75"/>
                 </a:solidFill>
@@ -32181,7 +32642,7 @@
               </a:rPr>
               <a:t>Revoke Key Binding → Emit KMS Audit Revocation Event</a:t>
             </a:r>
-            <a:endParaRPr lang="en-US" sz="760" dirty="0"/>
+            <a:endParaRPr lang="en-US" sz="700" dirty="0"/>
           </a:p>
         </p:txBody>
       </p:sp>
@@ -32193,7 +32654,7 @@
         </p:nvSpPr>
         <p:spPr>
           <a:xfrm>
-            <a:off x="5285232" y="2944368"/>
+            <a:off x="5285232" y="2926080"/>
             <a:ext cx="292608" cy="292608"/>
           </a:xfrm>
           <a:prstGeom prst="ellipse">
@@ -32213,7 +32674,7 @@
         </p:nvSpPr>
         <p:spPr>
           <a:xfrm>
-            <a:off x="5285232" y="2944368"/>
+            <a:off x="5285232" y="2926080"/>
             <a:ext cx="292608" cy="292608"/>
           </a:xfrm>
           <a:prstGeom prst="rect">
@@ -32252,8 +32713,8 @@
         </p:nvSpPr>
         <p:spPr>
           <a:xfrm>
-            <a:off x="5632704" y="2907792"/>
-            <a:ext cx="1536192" cy="438912"/>
+            <a:off x="5632704" y="2889504"/>
+            <a:ext cx="1536192" cy="402336"/>
           </a:xfrm>
           <a:prstGeom prst="rect">
             <a:avLst/>
@@ -32269,7 +32730,7 @@
               <a:buNone/>
             </a:pPr>
             <a:r>
-              <a:rPr lang="en-US" sz="800" b="1" dirty="0">
+              <a:rPr lang="en-US" sz="780" b="1" dirty="0">
                 <a:solidFill>
                   <a:srgbClr val="3C4043"/>
                 </a:solidFill>
@@ -32279,14 +32740,14 @@
               </a:rPr>
               <a:t>Silo Gateway detects</a:t>
             </a:r>
-            <a:endParaRPr lang="en-US" sz="800" dirty="0"/>
+            <a:endParaRPr lang="en-US" sz="780" dirty="0"/>
           </a:p>
           <a:p>
             <a:pPr indent="0" marL="0">
               <a:buNone/>
             </a:pPr>
             <a:r>
-              <a:rPr lang="en-US" sz="800" b="1" dirty="0">
+              <a:rPr lang="en-US" sz="780" b="1" dirty="0">
                 <a:solidFill>
                   <a:srgbClr val="3C4043"/>
                 </a:solidFill>
@@ -32296,14 +32757,14 @@
               </a:rPr>
               <a:t>revoked key state on</a:t>
             </a:r>
-            <a:endParaRPr lang="en-US" sz="800" dirty="0"/>
+            <a:endParaRPr lang="en-US" sz="780" dirty="0"/>
           </a:p>
           <a:p>
             <a:pPr indent="0" marL="0">
               <a:buNone/>
             </a:pPr>
             <a:r>
-              <a:rPr lang="en-US" sz="800" b="1" dirty="0">
+              <a:rPr lang="en-US" sz="780" b="1" dirty="0">
                 <a:solidFill>
                   <a:srgbClr val="3C4043"/>
                 </a:solidFill>
@@ -32313,7 +32774,7 @@
               </a:rPr>
               <a:t>liveness probe</a:t>
             </a:r>
-            <a:endParaRPr lang="en-US" sz="800" dirty="0"/>
+            <a:endParaRPr lang="en-US" sz="780" dirty="0"/>
           </a:p>
         </p:txBody>
       </p:sp>
@@ -32349,24 +32810,26 @@
         </p:nvSpPr>
         <p:spPr>
           <a:xfrm>
-            <a:off x="5303520" y="3346704"/>
-            <a:ext cx="1828800" cy="182880"/>
-          </a:xfrm>
-          <a:prstGeom prst="rect">
-            <a:avLst/>
-          </a:prstGeom>
-          <a:noFill/>
-          <a:ln/>
-        </p:spPr>
-        <p:txBody>
-          <a:bodyPr wrap="square" rtlCol="0" anchor="ctr"/>
+            <a:off x="5266944" y="3337560"/>
+            <a:ext cx="1901952" cy="173736"/>
+          </a:xfrm>
+          <a:prstGeom prst="rect">
+            <a:avLst/>
+          </a:prstGeom>
+          <a:noFill/>
+          <a:ln/>
+        </p:spPr>
+        <p:txBody>
+          <a:bodyPr wrap="square" rtlCol="0" anchor="ctr">
+            <a:normAutofit/>
+          </a:bodyPr>
           <a:lstStyle/>
           <a:p>
             <a:pPr algn="ctr" indent="0" marL="0">
               <a:buNone/>
             </a:pPr>
             <a:r>
-              <a:rPr lang="en-US" sz="760" b="1" dirty="0">
+              <a:rPr lang="en-US" sz="720" b="1" dirty="0">
                 <a:solidFill>
                   <a:srgbClr val="54728C"/>
                 </a:solidFill>
@@ -32374,9 +32837,9 @@
                 <a:ea typeface="Roboto" pitchFamily="34" charset="-122"/>
                 <a:cs typeface="Roboto" pitchFamily="34" charset="-120"/>
               </a:rPr>
-              <a:t>KMS • Liveness • Probe Failed</a:t>
-            </a:r>
-            <a:endParaRPr lang="en-US" sz="760" dirty="0"/>
+              <a:t>KMS • Liveness Probe Failed</a:t>
+            </a:r>
+            <a:endParaRPr lang="en-US" sz="720" dirty="0"/>
           </a:p>
         </p:txBody>
       </p:sp>
@@ -33738,8 +34201,8 @@
         </p:nvSpPr>
         <p:spPr>
           <a:xfrm>
-            <a:off x="530352" y="2852928"/>
-            <a:ext cx="1975104" cy="1316736"/>
+            <a:off x="493776" y="2852928"/>
+            <a:ext cx="1956816" cy="1316736"/>
           </a:xfrm>
           <a:prstGeom prst="roundRect">
             <a:avLst>
@@ -33760,8 +34223,8 @@
         </p:nvSpPr>
         <p:spPr>
           <a:xfrm>
-            <a:off x="603504" y="2852928"/>
-            <a:ext cx="1828800" cy="1316736"/>
+            <a:off x="566928" y="2852928"/>
+            <a:ext cx="1810512" cy="1316736"/>
           </a:xfrm>
           <a:prstGeom prst="rect">
             <a:avLst/>
@@ -33816,8 +34279,8 @@
         </p:nvSpPr>
         <p:spPr>
           <a:xfrm>
-            <a:off x="3749040" y="2852928"/>
-            <a:ext cx="1975104" cy="1316736"/>
+            <a:off x="3840480" y="2852928"/>
+            <a:ext cx="1956816" cy="1316736"/>
           </a:xfrm>
           <a:prstGeom prst="roundRect">
             <a:avLst>
@@ -33838,8 +34301,8 @@
         </p:nvSpPr>
         <p:spPr>
           <a:xfrm>
-            <a:off x="3822192" y="2852928"/>
-            <a:ext cx="1828800" cy="1316736"/>
+            <a:off x="3913632" y="2852928"/>
+            <a:ext cx="1810512" cy="1316736"/>
           </a:xfrm>
           <a:prstGeom prst="rect">
             <a:avLst/>
@@ -33895,7 +34358,7 @@
         <p:spPr>
           <a:xfrm>
             <a:off x="6784848" y="2852928"/>
-            <a:ext cx="1975104" cy="1316736"/>
+            <a:ext cx="1956816" cy="1316736"/>
           </a:xfrm>
           <a:prstGeom prst="roundRect">
             <a:avLst>
@@ -33917,7 +34380,7 @@
         <p:spPr>
           <a:xfrm>
             <a:off x="6858000" y="2852928"/>
-            <a:ext cx="1828800" cy="1316736"/>
+            <a:ext cx="1810512" cy="1316736"/>
           </a:xfrm>
           <a:prstGeom prst="rect">
             <a:avLst/>
@@ -33973,7 +34436,7 @@
         <p:spPr>
           <a:xfrm>
             <a:off x="9710928" y="2852928"/>
-            <a:ext cx="1975104" cy="1316736"/>
+            <a:ext cx="1956816" cy="1316736"/>
           </a:xfrm>
           <a:prstGeom prst="roundRect">
             <a:avLst>
@@ -33995,7 +34458,7 @@
         <p:spPr>
           <a:xfrm>
             <a:off x="9784080" y="2852928"/>
-            <a:ext cx="1828800" cy="1316736"/>
+            <a:ext cx="1810512" cy="1316736"/>
           </a:xfrm>
           <a:prstGeom prst="rect">
             <a:avLst/>
@@ -34050,8 +34513,8 @@
         </p:nvSpPr>
         <p:spPr>
           <a:xfrm>
-            <a:off x="2468880" y="1572768"/>
-            <a:ext cx="1316736" cy="1024128"/>
+            <a:off x="2514600" y="1572768"/>
+            <a:ext cx="1261872" cy="1024128"/>
           </a:xfrm>
           <a:prstGeom prst="roundRect">
             <a:avLst>
@@ -34077,8 +34540,8 @@
         </p:nvSpPr>
         <p:spPr>
           <a:xfrm>
-            <a:off x="2505456" y="1627632"/>
-            <a:ext cx="1243584" cy="914400"/>
+            <a:off x="2551176" y="1627632"/>
+            <a:ext cx="1188720" cy="914400"/>
           </a:xfrm>
           <a:prstGeom prst="rect">
             <a:avLst/>
@@ -34094,7 +34557,7 @@
               <a:buNone/>
             </a:pPr>
             <a:r>
-              <a:rPr lang="en-US" sz="880" b="1" dirty="0">
+              <a:rPr lang="en-US" sz="860" b="1" dirty="0">
                 <a:solidFill>
                   <a:srgbClr val="3C4043"/>
                 </a:solidFill>
@@ -34104,14 +34567,14 @@
               </a:rPr>
               <a:t>1. Authenticates tenant</a:t>
             </a:r>
-            <a:endParaRPr lang="en-US" sz="880" dirty="0"/>
+            <a:endParaRPr lang="en-US" sz="860" dirty="0"/>
           </a:p>
           <a:p>
             <a:pPr algn="ctr" indent="0" marL="0">
               <a:buNone/>
             </a:pPr>
             <a:r>
-              <a:rPr lang="en-US" sz="880" b="1" dirty="0">
+              <a:rPr lang="en-US" sz="860" b="1" dirty="0">
                 <a:solidFill>
                   <a:srgbClr val="3C4043"/>
                 </a:solidFill>
@@ -34121,7 +34584,7 @@
               </a:rPr>
               <a:t>principal inside PAB</a:t>
             </a:r>
-            <a:endParaRPr lang="en-US" sz="880" dirty="0"/>
+            <a:endParaRPr lang="en-US" sz="860" dirty="0"/>
           </a:p>
         </p:txBody>
       </p:sp>
@@ -34133,8 +34596,8 @@
         </p:nvSpPr>
         <p:spPr>
           <a:xfrm>
-            <a:off x="2505456" y="3182112"/>
-            <a:ext cx="1243584" cy="0"/>
+            <a:off x="2450592" y="3182112"/>
+            <a:ext cx="1389888" cy="0"/>
           </a:xfrm>
           <a:prstGeom prst="line">
             <a:avLst/>
@@ -34157,8 +34620,8 @@
         </p:nvSpPr>
         <p:spPr>
           <a:xfrm>
-            <a:off x="2505456" y="3730752"/>
-            <a:ext cx="1243584" cy="0"/>
+            <a:off x="2450592" y="3730752"/>
+            <a:ext cx="1389888" cy="0"/>
           </a:xfrm>
           <a:prstGeom prst="line">
             <a:avLst/>
@@ -34181,8 +34644,8 @@
         </p:nvSpPr>
         <p:spPr>
           <a:xfrm>
-            <a:off x="2432304" y="3877056"/>
-            <a:ext cx="1389888" cy="859536"/>
+            <a:off x="2514600" y="3877056"/>
+            <a:ext cx="1261872" cy="859536"/>
           </a:xfrm>
           <a:prstGeom prst="roundRect">
             <a:avLst>
@@ -34208,8 +34671,8 @@
         </p:nvSpPr>
         <p:spPr>
           <a:xfrm>
-            <a:off x="2487168" y="3913632"/>
-            <a:ext cx="1280160" cy="786384"/>
+            <a:off x="2551176" y="3913632"/>
+            <a:ext cx="1188720" cy="786384"/>
           </a:xfrm>
           <a:prstGeom prst="rect">
             <a:avLst/>
@@ -34225,7 +34688,7 @@
               <a:buNone/>
             </a:pPr>
             <a:r>
-              <a:rPr lang="en-US" sz="820" b="1" dirty="0">
+              <a:rPr lang="en-US" sz="800" b="1" dirty="0">
                 <a:solidFill>
                   <a:srgbClr val="A50E0E"/>
                 </a:solidFill>
@@ -34235,14 +34698,14 @@
               </a:rPr>
               <a:t>2. Blocks cross-perimeter</a:t>
             </a:r>
-            <a:endParaRPr lang="en-US" sz="820" dirty="0"/>
+            <a:endParaRPr lang="en-US" sz="800" dirty="0"/>
           </a:p>
           <a:p>
             <a:pPr algn="ctr" indent="0" marL="0">
               <a:buNone/>
             </a:pPr>
             <a:r>
-              <a:rPr lang="en-US" sz="820" b="1" dirty="0">
+              <a:rPr lang="en-US" sz="800" b="1" dirty="0">
                 <a:solidFill>
                   <a:srgbClr val="A50E0E"/>
                 </a:solidFill>
@@ -34252,14 +34715,14 @@
               </a:rPr>
               <a:t>egress (HTTP 403) or</a:t>
             </a:r>
-            <a:endParaRPr lang="en-US" sz="820" dirty="0"/>
+            <a:endParaRPr lang="en-US" sz="800" dirty="0"/>
           </a:p>
           <a:p>
             <a:pPr algn="ctr" indent="0" marL="0">
               <a:buNone/>
             </a:pPr>
             <a:r>
-              <a:rPr lang="en-US" sz="820" b="1" dirty="0">
+              <a:rPr lang="en-US" sz="800" b="1" dirty="0">
                 <a:solidFill>
                   <a:srgbClr val="A50E0E"/>
                 </a:solidFill>
@@ -34269,7 +34732,7 @@
               </a:rPr>
               <a:t>revoked CMEK (HTTP 423)</a:t>
             </a:r>
-            <a:endParaRPr lang="en-US" sz="820" dirty="0"/>
+            <a:endParaRPr lang="en-US" sz="800" dirty="0"/>
           </a:p>
         </p:txBody>
       </p:sp>
@@ -37228,14 +37691,16 @@
           <a:ln/>
         </p:spPr>
         <p:txBody>
-          <a:bodyPr wrap="square" rtlCol="0" anchor="ctr"/>
+          <a:bodyPr wrap="square" rtlCol="0" anchor="ctr">
+            <a:normAutofit/>
+          </a:bodyPr>
           <a:lstStyle/>
           <a:p>
             <a:pPr indent="0" marL="0">
               <a:buNone/>
             </a:pPr>
             <a:r>
-              <a:rPr lang="en-US" sz="820" b="1" dirty="0">
+              <a:rPr lang="en-US" sz="760" b="1" dirty="0">
                 <a:solidFill>
                   <a:srgbClr val="3C4043"/>
                 </a:solidFill>
@@ -37243,9 +37708,9 @@
                 <a:ea typeface="Google Sans" pitchFamily="34" charset="-122"/>
                 <a:cs typeface="Google Sans" pitchFamily="34" charset="-120"/>
               </a:rPr>
-              <a:t>1. Test 1: mTLS Device Identity • Unv…</a:t>
-            </a:r>
-            <a:endParaRPr lang="en-US" sz="820" dirty="0"/>
+              <a:t>1. Test 1: mTLS Device Identity • Unverified Client Certificate</a:t>
+            </a:r>
+            <a:endParaRPr lang="en-US" sz="760" dirty="0"/>
           </a:p>
         </p:txBody>
       </p:sp>
@@ -37284,7 +37749,7 @@
                 <a:ea typeface="Roboto" pitchFamily="34" charset="-122"/>
                 <a:cs typeface="Roboto" pitchFamily="34" charset="-120"/>
               </a:rPr>
-              <a:t>Blocked at Hop 1 with HTTP 401 Unauthorized (mTLS SHA-256 fingerprint mismatch) (BeyondCorp Enterprise mTLS + Load Balancer Cert Pin…</a:t>
+              <a:t>Blocked at Hop 1 with HTTP 401 Unauthorized (mTLS SHA-256 fingerprint mismatch)</a:t>
             </a:r>
             <a:endParaRPr lang="en-US" sz="740" dirty="0"/>
           </a:p>
@@ -37355,14 +37820,16 @@
           <a:ln/>
         </p:spPr>
         <p:txBody>
-          <a:bodyPr wrap="square" rtlCol="0" anchor="ctr"/>
+          <a:bodyPr wrap="square" rtlCol="0" anchor="ctr">
+            <a:normAutofit/>
+          </a:bodyPr>
           <a:lstStyle/>
           <a:p>
             <a:pPr indent="0" marL="0">
               <a:buNone/>
             </a:pPr>
             <a:r>
-              <a:rPr lang="en-US" sz="820" b="1" dirty="0">
+              <a:rPr lang="en-US" sz="760" b="1" dirty="0">
                 <a:solidFill>
                   <a:srgbClr val="3C4043"/>
                 </a:solidFill>
@@ -37370,9 +37837,9 @@
                 <a:ea typeface="Google Sans" pitchFamily="34" charset="-122"/>
                 <a:cs typeface="Google Sans" pitchFamily="34" charset="-120"/>
               </a:rPr>
-              <a:t>2. Test 2: Cross-Silo Principal • IAM…</a:t>
-            </a:r>
-            <a:endParaRPr lang="en-US" sz="820" dirty="0"/>
+              <a:t>2. Test 2: Cross-Silo Principal • IAM PAB Boundary Violation</a:t>
+            </a:r>
+            <a:endParaRPr lang="en-US" sz="760" dirty="0"/>
           </a:p>
         </p:txBody>
       </p:sp>
@@ -37411,7 +37878,7 @@
                 <a:ea typeface="Roboto" pitchFamily="34" charset="-122"/>
                 <a:cs typeface="Roboto" pitchFamily="34" charset="-120"/>
               </a:rPr>
-              <a:t>Blocked at Hop 1/2 with HTTP 403 Forbidden (IAM PAB project boundary violation) (Google Cloud IAM Principal Access Boundary (PAB Pol…</a:t>
+              <a:t>Blocked at Hop 1/2 with HTTP 403 Forbidden (IAM PAB project boundary violation)</a:t>
             </a:r>
             <a:endParaRPr lang="en-US" sz="740" dirty="0"/>
           </a:p>
@@ -37482,14 +37949,16 @@
           <a:ln/>
         </p:spPr>
         <p:txBody>
-          <a:bodyPr wrap="square" rtlCol="0" anchor="ctr"/>
+          <a:bodyPr wrap="square" rtlCol="0" anchor="ctr">
+            <a:normAutofit/>
+          </a:bodyPr>
           <a:lstStyle/>
           <a:p>
             <a:pPr indent="0" marL="0">
               <a:buNone/>
             </a:pPr>
             <a:r>
-              <a:rPr lang="en-US" sz="820" b="1" dirty="0">
+              <a:rPr lang="en-US" sz="760" b="1" dirty="0">
                 <a:solidFill>
                   <a:srgbClr val="3C4043"/>
                 </a:solidFill>
@@ -37497,9 +37966,9 @@
                 <a:ea typeface="Google Sans" pitchFamily="34" charset="-122"/>
                 <a:cs typeface="Google Sans" pitchFamily="34" charset="-120"/>
               </a:rPr>
-              <a:t>3. Test 3: Data Exfiltration • Cross-…</a:t>
-            </a:r>
-            <a:endParaRPr lang="en-US" sz="820" dirty="0"/>
+              <a:t>3. Test 3: Data Exfiltration • Cross-Project Bucket Copy</a:t>
+            </a:r>
+            <a:endParaRPr lang="en-US" sz="760" dirty="0"/>
           </a:p>
         </p:txBody>
       </p:sp>
@@ -37538,7 +38007,7 @@
                 <a:ea typeface="Roboto" pitchFamily="34" charset="-122"/>
                 <a:cs typeface="Roboto" pitchFamily="34" charset="-120"/>
               </a:rPr>
-              <a:t>Blocked by VPC-SC with HTTP 403 VPC_SC_EXFILTRATION_BLOCKED (0 bytes egressed) (VPC Service Controls (VPC-SC) Restricted Service Per…</a:t>
+              <a:t>Blocked by VPC-SC with HTTP 403 VPC_SC_EXFILTRATION_BLOCKED (0 bytes egressed)</a:t>
             </a:r>
             <a:endParaRPr lang="en-US" sz="740" dirty="0"/>
           </a:p>
@@ -37609,14 +38078,16 @@
           <a:ln/>
         </p:spPr>
         <p:txBody>
-          <a:bodyPr wrap="square" rtlCol="0" anchor="ctr"/>
+          <a:bodyPr wrap="square" rtlCol="0" anchor="ctr">
+            <a:normAutofit/>
+          </a:bodyPr>
           <a:lstStyle/>
           <a:p>
             <a:pPr indent="0" marL="0">
               <a:buNone/>
             </a:pPr>
             <a:r>
-              <a:rPr lang="en-US" sz="820" b="1" dirty="0">
+              <a:rPr lang="en-US" sz="760" b="1" dirty="0">
                 <a:solidFill>
                   <a:srgbClr val="3C4043"/>
                 </a:solidFill>
@@ -37624,9 +38095,9 @@
                 <a:ea typeface="Google Sans" pitchFamily="34" charset="-122"/>
                 <a:cs typeface="Google Sans" pitchFamily="34" charset="-120"/>
               </a:rPr>
-              <a:t>4. Tests 4A &amp; 4B: CMEK Kill-Switch •…</a:t>
-            </a:r>
-            <a:endParaRPr lang="en-US" sz="820" dirty="0"/>
+              <a:t>4. Tests 4A &amp; 4B: CMEK Kill-Switch • FinVault Key Revoke &amp; Restore</a:t>
+            </a:r>
+            <a:endParaRPr lang="en-US" sz="760" dirty="0"/>
           </a:p>
         </p:txBody>
       </p:sp>
@@ -37665,7 +38136,7 @@
                 <a:ea typeface="Roboto" pitchFamily="34" charset="-122"/>
                 <a:cs typeface="Roboto" pitchFamily="34" charset="-120"/>
               </a:rPr>
-              <a:t>4A: Immediate HTTP 423 Locked across Memory/DB/GKE (&lt;60s) • 4B: 200 OK cleanly restored (Cloud KMS CMEK Heartbeat (finvault-silo-cme…</a:t>
+              <a:t>4A: Immediate HTTP 423 Locked across Memory/DB/GKE (&lt;60s) • 4B: 200 OK cleanly restored</a:t>
             </a:r>
             <a:endParaRPr lang="en-US" sz="740" dirty="0"/>
           </a:p>

--- a/slides/ws3-pattern-b-siloed-editable-slides.pptx
+++ b/slides/ws3-pattern-b-siloed-editable-slides.pptx
@@ -785,7 +785,7 @@
           <a:p>
             <a:r>
               <a:rPr lang="en-US" dirty="0"/>
-              <a:t>[phased-roadmap-timeline] WS3 • Pattern B Zero-Trust Sovereign Silo Provisioning Timeline: Workstream 3 Pattern B Timeline  •  Dedicated Project &amp; PAB → VPC-SC &amp; CMEK → Private GKE &amp; &lt;60s Kill-Switch</a:t>
+              <a:t>[phased-roadmap-timeline] WS3 • ACT III: PATTERN B SOVEREIGN SILO PROVISIONING TIMELINE: Workstream 3 Pattern B Timeline  •  Dedicated Project &amp; PAB → VPC-SC &amp; CMEK → Private GKE &amp; &lt;60s Kill-Switch</a:t>
             </a:r>
             <a:endParaRPr lang="en-US" dirty="0"/>
           </a:p>
@@ -873,7 +873,7 @@
           <a:p>
             <a:r>
               <a:rPr lang="en-US" dirty="0"/>
-              <a:t>[strategic-operating-model-pillars] WS3 • Pattern B Sovereign Project, Cryptographic &amp; Model Governance: Workstream 3 Pattern B Operating Model  •  Project &amp; VPC-SC Sovereignty + Tenant CMEK + Air-Gapped Gemma 3</a:t>
+              <a:t>[strategic-operating-model-pillars] WS3 • ACT III: PATTERN B SOVEREIGN PROJECT, KMS &amp; MODEL GOVERNANCE: Workstream 3 Pattern B Operating Model  •  Project &amp; VPC-SC Sovereignty + Tenant CMEK + Air-Gapped Gemma 3</a:t>
             </a:r>
             <a:endParaRPr lang="en-US" dirty="0"/>
           </a:p>
@@ -1592,7 +1592,7 @@
           <a:p>
             <a:r>
               <a:rPr lang="en-US" dirty="0"/>
-              <a:t>[async-state-flow-pipeline] WS3 • Pattern B VPC-SC Air-Gapped Inference &amp; Continuous KMS Attestation: Workstream 3 Pattern B Pipeline  •  Restricted VIP Air-Gapped Inference + Continuous &lt;60s KMS CMEK Liveness Loop</a:t>
+              <a:t>[async-state-flow-pipeline] WS3 • ACT II: VPC-SC AIR-GAPPED INFERENCE &amp; CONTINUOUS KMS ATTESTATION: Workstream 3 Pattern B Pipeline  •  Restricted VIP Air-Gapped Inference + Continuous &lt;60s KMS CMEK Liveness Loop</a:t>
             </a:r>
             <a:endParaRPr lang="en-US" dirty="0"/>
           </a:p>
@@ -3178,7 +3178,7 @@
                 <a:ea typeface="Google Sans" pitchFamily="34" charset="-122"/>
                 <a:cs typeface="Google Sans" pitchFamily="34" charset="-120"/>
               </a:rPr>
-              <a:t>OFFICIAL 4-ZONE HUB-AND-SPOKE TOPOLOGY (#78)</a:t>
+              <a:t>3-ACT EXECUTIVE BRIEFING &amp; DELIVERABLE MAP</a:t>
             </a:r>
             <a:endParaRPr lang="en-US" sz="920" dirty="0"/>
           </a:p>
@@ -3240,7 +3240,7 @@
         <p:spPr>
           <a:xfrm>
             <a:off x="7735824" y="1005840"/>
-            <a:ext cx="1353312" cy="219456"/>
+            <a:ext cx="1481328" cy="219456"/>
           </a:xfrm>
           <a:prstGeom prst="roundRect">
             <a:avLst>
@@ -3262,7 +3262,7 @@
         <p:spPr>
           <a:xfrm>
             <a:off x="7735824" y="1005840"/>
-            <a:ext cx="1353312" cy="219456"/>
+            <a:ext cx="1481328" cy="219456"/>
           </a:xfrm>
           <a:prstGeom prst="rect">
             <a:avLst/>
@@ -3278,7 +3278,7 @@
               <a:buNone/>
             </a:pPr>
             <a:r>
-              <a:rPr lang="en-US" sz="680" b="1" dirty="0">
+              <a:rPr lang="en-US" sz="660" b="1" dirty="0">
                 <a:solidFill>
                   <a:srgbClr val="174EA6"/>
                 </a:solidFill>
@@ -3286,9 +3286,9 @@
                 <a:ea typeface="Google Sans" pitchFamily="34" charset="-122"/>
                 <a:cs typeface="Google Sans" pitchFamily="34" charset="-120"/>
               </a:rPr>
-              <a:t>01 • ROUTING HUB</a:t>
-            </a:r>
-            <a:endParaRPr lang="en-US" sz="680" dirty="0"/>
+              <a:t>ACT I • SLIDES 1–4</a:t>
+            </a:r>
+            <a:endParaRPr lang="en-US" sz="660" dirty="0"/>
           </a:p>
         </p:txBody>
       </p:sp>
@@ -3300,8 +3300,8 @@
         </p:nvSpPr>
         <p:spPr>
           <a:xfrm>
-            <a:off x="9162288" y="987552"/>
-            <a:ext cx="2340864" cy="256032"/>
+            <a:off x="9272016" y="987552"/>
+            <a:ext cx="2249424" cy="256032"/>
           </a:xfrm>
           <a:prstGeom prst="rect">
             <a:avLst/>
@@ -3317,7 +3317,7 @@
               <a:buNone/>
             </a:pPr>
             <a:r>
-              <a:rPr lang="en-US" sz="880" b="1" dirty="0">
+              <a:rPr lang="en-US" sz="850" b="1" dirty="0">
                 <a:solidFill>
                   <a:srgbClr val="3C4043"/>
                 </a:solidFill>
@@ -3325,9 +3325,9 @@
                 <a:ea typeface="Google Sans" pitchFamily="34" charset="-122"/>
                 <a:cs typeface="Google Sans" pitchFamily="34" charset="-120"/>
               </a:rPr>
-              <a:t>Edge WAF, OBO/DPoP &amp; Tier Router</a:t>
-            </a:r>
-            <a:endParaRPr lang="en-US" sz="880" dirty="0"/>
+              <a:t>Master Blueprint (#78) &amp; SLO Scorecard</a:t>
+            </a:r>
+            <a:endParaRPr lang="en-US" sz="850" dirty="0"/>
           </a:p>
         </p:txBody>
       </p:sp>
@@ -3356,7 +3356,7 @@
               <a:buNone/>
             </a:pPr>
             <a:r>
-              <a:rPr lang="en-US" sz="790" dirty="0">
+              <a:rPr lang="en-US" sz="780" dirty="0">
                 <a:solidFill>
                   <a:srgbClr val="5F6368"/>
                 </a:solidFill>
@@ -3364,9 +3364,9 @@
                 <a:ea typeface="Roboto" pitchFamily="34" charset="-122"/>
                 <a:cs typeface="Roboto" pitchFamily="34" charset="-120"/>
               </a:rPr>
-              <a:t>Google Cloud Armor, IAP, IAM STS &amp; Agent Engine Registry verify OIDC identity, strip spoofed headers &amp; filter tools.</a:t>
-            </a:r>
-            <a:endParaRPr lang="en-US" sz="790" dirty="0"/>
+              <a:t>Decomposes Figure 1 into 56 editable vector shapes + 23 connectors, quantified unit economics ($42 vs. $1,850/mo) &amp; GCP stack.</a:t>
+            </a:r>
+            <a:endParaRPr lang="en-US" sz="780" dirty="0"/>
           </a:p>
         </p:txBody>
       </p:sp>
@@ -3426,7 +3426,7 @@
         <p:spPr>
           <a:xfrm>
             <a:off x="7735824" y="2194560"/>
-            <a:ext cx="1353312" cy="219456"/>
+            <a:ext cx="1481328" cy="219456"/>
           </a:xfrm>
           <a:prstGeom prst="roundRect">
             <a:avLst>
@@ -3448,7 +3448,7 @@
         <p:spPr>
           <a:xfrm>
             <a:off x="7735824" y="2194560"/>
-            <a:ext cx="1353312" cy="219456"/>
+            <a:ext cx="1481328" cy="219456"/>
           </a:xfrm>
           <a:prstGeom prst="rect">
             <a:avLst/>
@@ -3464,7 +3464,7 @@
               <a:buNone/>
             </a:pPr>
             <a:r>
-              <a:rPr lang="en-US" sz="680" b="1" dirty="0">
+              <a:rPr lang="en-US" sz="660" b="1" dirty="0">
                 <a:solidFill>
                   <a:srgbClr val="A50E0E"/>
                 </a:solidFill>
@@ -3472,9 +3472,9 @@
                 <a:ea typeface="Google Sans" pitchFamily="34" charset="-122"/>
                 <a:cs typeface="Google Sans" pitchFamily="34" charset="-120"/>
               </a:rPr>
-              <a:t>02 • RIGHT SPOKE</a:t>
-            </a:r>
-            <a:endParaRPr lang="en-US" sz="680" dirty="0"/>
+              <a:t>ACT II • SLIDES 5–8</a:t>
+            </a:r>
+            <a:endParaRPr lang="en-US" sz="660" dirty="0"/>
           </a:p>
         </p:txBody>
       </p:sp>
@@ -3486,8 +3486,8 @@
         </p:nvSpPr>
         <p:spPr>
           <a:xfrm>
-            <a:off x="9162288" y="2176272"/>
-            <a:ext cx="2340864" cy="256032"/>
+            <a:off x="9272016" y="2176272"/>
+            <a:ext cx="2249424" cy="256032"/>
           </a:xfrm>
           <a:prstGeom prst="rect">
             <a:avLst/>
@@ -3503,7 +3503,7 @@
               <a:buNone/>
             </a:pPr>
             <a:r>
-              <a:rPr lang="en-US" sz="880" b="1" dirty="0">
+              <a:rPr lang="en-US" sz="850" b="1" dirty="0">
                 <a:solidFill>
                   <a:srgbClr val="3C4043"/>
                 </a:solidFill>
@@ -3511,9 +3511,9 @@
                 <a:ea typeface="Google Sans" pitchFamily="34" charset="-122"/>
                 <a:cs typeface="Google Sans" pitchFamily="34" charset="-120"/>
               </a:rPr>
-              <a:t>2LO/3LO MCP, AlloyDB RLS &amp; PSC Vaults</a:t>
-            </a:r>
-            <a:endParaRPr lang="en-US" sz="880" dirty="0"/>
+              <a:t>3-Zone Boundaries, UML &amp; Fail-Closed Loops</a:t>
+            </a:r>
+            <a:endParaRPr lang="en-US" sz="850" dirty="0"/>
           </a:p>
         </p:txBody>
       </p:sp>
@@ -3542,7 +3542,7 @@
               <a:buNone/>
             </a:pPr>
             <a:r>
-              <a:rPr lang="en-US" sz="790" dirty="0">
+              <a:rPr lang="en-US" sz="780" dirty="0">
                 <a:solidFill>
                   <a:srgbClr val="5F6368"/>
                 </a:solidFill>
@@ -3550,9 +3550,9 @@
                 <a:ea typeface="Roboto" pitchFamily="34" charset="-122"/>
                 <a:cs typeface="Roboto" pitchFamily="34" charset="-120"/>
               </a:rPr>
-              <a:t>Enforces PostgreSQL Row-Level Security, 3LO step-up consent, VPC-SC perimeters &amp; &lt;60s CMEK kill-switches.</a:t>
-            </a:r>
-            <a:endParaRPr lang="en-US" sz="790" dirty="0"/>
+              <a:t>Walks through 3-zone physical/logical boundaries, Hop 1 OBO+DPoP wire transformation, 5-Actor UML sequence &amp; HTTP 401–429 circuit breakers.</a:t>
+            </a:r>
+            <a:endParaRPr lang="en-US" sz="780" dirty="0"/>
           </a:p>
         </p:txBody>
       </p:sp>
@@ -3612,7 +3612,7 @@
         <p:spPr>
           <a:xfrm>
             <a:off x="7735824" y="3383280"/>
-            <a:ext cx="1353312" cy="219456"/>
+            <a:ext cx="1481328" cy="219456"/>
           </a:xfrm>
           <a:prstGeom prst="roundRect">
             <a:avLst>
@@ -3634,7 +3634,7 @@
         <p:spPr>
           <a:xfrm>
             <a:off x="7735824" y="3383280"/>
-            <a:ext cx="1353312" cy="219456"/>
+            <a:ext cx="1481328" cy="219456"/>
           </a:xfrm>
           <a:prstGeom prst="rect">
             <a:avLst/>
@@ -3650,7 +3650,7 @@
               <a:buNone/>
             </a:pPr>
             <a:r>
-              <a:rPr lang="en-US" sz="680" b="1" dirty="0">
+              <a:rPr lang="en-US" sz="660" b="1" dirty="0">
                 <a:solidFill>
                   <a:srgbClr val="B06000"/>
                 </a:solidFill>
@@ -3658,9 +3658,9 @@
                 <a:ea typeface="Google Sans" pitchFamily="34" charset="-122"/>
                 <a:cs typeface="Google Sans" pitchFamily="34" charset="-120"/>
               </a:rPr>
-              <a:t>03 • LEFT SPOKE</a:t>
-            </a:r>
-            <a:endParaRPr lang="en-US" sz="680" dirty="0"/>
+              <a:t>ACT III • SLIDES 9–12</a:t>
+            </a:r>
+            <a:endParaRPr lang="en-US" sz="660" dirty="0"/>
           </a:p>
         </p:txBody>
       </p:sp>
@@ -3672,8 +3672,8 @@
         </p:nvSpPr>
         <p:spPr>
           <a:xfrm>
-            <a:off x="9162288" y="3364992"/>
-            <a:ext cx="2340864" cy="256032"/>
+            <a:off x="9272016" y="3364992"/>
+            <a:ext cx="2249424" cy="256032"/>
           </a:xfrm>
           <a:prstGeom prst="rect">
             <a:avLst/>
@@ -3689,7 +3689,7 @@
               <a:buNone/>
             </a:pPr>
             <a:r>
-              <a:rPr lang="en-US" sz="880" b="1" dirty="0">
+              <a:rPr lang="en-US" sz="850" b="1" dirty="0">
                 <a:solidFill>
                   <a:srgbClr val="3C4043"/>
                 </a:solidFill>
@@ -3697,9 +3697,9 @@
                 <a:ea typeface="Google Sans" pitchFamily="34" charset="-122"/>
                 <a:cs typeface="Google Sans" pitchFamily="34" charset="-120"/>
               </a:rPr>
-              <a:t>Model Armor, ADK &amp; 90% Prefix Cache</a:t>
-            </a:r>
-            <a:endParaRPr lang="en-US" sz="880" dirty="0"/>
+              <a:t>Pattern A/B/C Matrix, GAP-01..05 &amp; Live Proof</a:t>
+            </a:r>
+            <a:endParaRPr lang="en-US" sz="850" dirty="0"/>
           </a:p>
         </p:txBody>
       </p:sp>
@@ -3728,7 +3728,7 @@
               <a:buNone/>
             </a:pPr>
             <a:r>
-              <a:rPr lang="en-US" sz="790" dirty="0">
+              <a:rPr lang="en-US" sz="780" dirty="0">
                 <a:solidFill>
                   <a:srgbClr val="5F6368"/>
                 </a:solidFill>
@@ -3736,9 +3736,9 @@
                 <a:ea typeface="Roboto" pitchFamily="34" charset="-122"/>
                 <a:cs typeface="Roboto" pitchFamily="34" charset="-120"/>
               </a:rPr>
-              <a:t>Screens prompts (4/6), executes Gemini 2.5 Pro with 90% cache (5), clamps RPM in Valkey &amp; isolates L1–L5 memory.</a:t>
-            </a:r>
-            <a:endParaRPr lang="en-US" sz="790" dirty="0"/>
+              <a:t>Compares Pooled, Siloed &amp; Hybrid PSC trade-offs, closes 5 EAP product gaps, embeds 16:9 Cloud Console captures &amp; 6-week rollout.</a:t>
+            </a:r>
+            <a:endParaRPr lang="en-US" sz="780" dirty="0"/>
           </a:p>
         </p:txBody>
       </p:sp>
@@ -3798,7 +3798,7 @@
         <p:spPr>
           <a:xfrm>
             <a:off x="7735824" y="4572000"/>
-            <a:ext cx="1353312" cy="219456"/>
+            <a:ext cx="1481328" cy="219456"/>
           </a:xfrm>
           <a:prstGeom prst="roundRect">
             <a:avLst>
@@ -3820,7 +3820,7 @@
         <p:spPr>
           <a:xfrm>
             <a:off x="7735824" y="4572000"/>
-            <a:ext cx="1353312" cy="219456"/>
+            <a:ext cx="1481328" cy="219456"/>
           </a:xfrm>
           <a:prstGeom prst="rect">
             <a:avLst/>
@@ -3836,7 +3836,7 @@
               <a:buNone/>
             </a:pPr>
             <a:r>
-              <a:rPr lang="en-US" sz="680" b="1" dirty="0">
+              <a:rPr lang="en-US" sz="660" b="1" dirty="0">
                 <a:solidFill>
                   <a:srgbClr val="0D652D"/>
                 </a:solidFill>
@@ -3844,9 +3844,9 @@
                 <a:ea typeface="Google Sans" pitchFamily="34" charset="-122"/>
                 <a:cs typeface="Google Sans" pitchFamily="34" charset="-120"/>
               </a:rPr>
-              <a:t>04 • GOVERNANCE HUB</a:t>
-            </a:r>
-            <a:endParaRPr lang="en-US" sz="680" dirty="0"/>
+              <a:t>GOVERNANCE • SLIDES 13–14</a:t>
+            </a:r>
+            <a:endParaRPr lang="en-US" sz="660" dirty="0"/>
           </a:p>
         </p:txBody>
       </p:sp>
@@ -3858,8 +3858,8 @@
         </p:nvSpPr>
         <p:spPr>
           <a:xfrm>
-            <a:off x="9162288" y="4553712"/>
-            <a:ext cx="2340864" cy="256032"/>
+            <a:off x="9272016" y="4553712"/>
+            <a:ext cx="2249424" cy="256032"/>
           </a:xfrm>
           <a:prstGeom prst="rect">
             <a:avLst/>
@@ -3875,7 +3875,7 @@
               <a:buNone/>
             </a:pPr>
             <a:r>
-              <a:rPr lang="en-US" sz="880" b="1" dirty="0">
+              <a:rPr lang="en-US" sz="850" b="1" dirty="0">
                 <a:solidFill>
                   <a:srgbClr val="3C4043"/>
                 </a:solidFill>
@@ -3883,9 +3883,9 @@
                 <a:ea typeface="Google Sans" pitchFamily="34" charset="-122"/>
                 <a:cs typeface="Google Sans" pitchFamily="34" charset="-120"/>
               </a:rPr>
-              <a:t>Security, CMEK &amp; FinOps Telemetry</a:t>
-            </a:r>
-            <a:endParaRPr lang="en-US" sz="880" dirty="0"/>
+              <a:t>Day-2 RACI Operating Model &amp; Series Map</a:t>
+            </a:r>
+            <a:endParaRPr lang="en-US" sz="850" dirty="0"/>
           </a:p>
         </p:txBody>
       </p:sp>
@@ -3914,7 +3914,7 @@
               <a:buNone/>
             </a:pPr>
             <a:r>
-              <a:rPr lang="en-US" sz="790" dirty="0">
+              <a:rPr lang="en-US" sz="780" dirty="0">
                 <a:solidFill>
                   <a:srgbClr val="5F6368"/>
                 </a:solidFill>
@@ -3922,9 +3922,9 @@
                 <a:ea typeface="Roboto" pitchFamily="34" charset="-122"/>
                 <a:cs typeface="Roboto" pitchFamily="34" charset="-120"/>
               </a:rPr>
-              <a:t>Security Command Center, Cloud KMS CMEK &amp; BigQuery OTel govern encryption liveness and zero-PII chargeback.</a:t>
-            </a:r>
-            <a:endParaRPr lang="en-US" sz="790" dirty="0"/>
+              <a:t>Assigns Security, SRE &amp; FinOps ownership SLAs and maps runnable deliverables across Workstreams 1–5 (24 files + 20/20 gates).</a:t>
+            </a:r>
+            <a:endParaRPr lang="en-US" sz="780" dirty="0"/>
           </a:p>
         </p:txBody>
       </p:sp>
@@ -3980,7 +3980,7 @@
               <a:buNone/>
             </a:pPr>
             <a:r>
-              <a:rPr lang="en-US" sz="740" b="1" dirty="0">
+              <a:rPr lang="en-US" sz="720" b="1" dirty="0">
                 <a:solidFill>
                   <a:srgbClr val="3C4043"/>
                 </a:solidFill>
@@ -3988,9 +3988,9 @@
                 <a:ea typeface="Google Sans" pitchFamily="34" charset="-122"/>
                 <a:cs typeface="Google Sans" pitchFamily="34" charset="-120"/>
               </a:rPr>
-              <a:t>3-Act Executive Arc (14 Slides): Act I Architecture → Act II Runtime → Act III Proof &amp; Rollout</a:t>
-            </a:r>
-            <a:endParaRPr lang="en-US" sz="740" dirty="0"/>
+              <a:t>Verified Across 3 GCP Projects (#248990048888 • #638420508320 • #887605034827) • 12/12 Forensic PASS</a:t>
+            </a:r>
+            <a:endParaRPr lang="en-US" sz="720" dirty="0"/>
           </a:p>
         </p:txBody>
       </p:sp>
@@ -4430,7 +4430,7 @@
                 <a:ea typeface="Google Sans" pitchFamily="34" charset="-122"/>
                 <a:cs typeface="Google Sans" pitchFamily="34" charset="-120"/>
               </a:rPr>
-              <a:t>Design alternatives — 4-Stage Vault Provisioning, Terraform Blueprint &amp; Economics</a:t>
+              <a:t>ACT I • GOOGLE CLOUD REFERENCE PRODUCT STACK &amp; BILL OF MATERIALS</a:t>
             </a:r>
             <a:endParaRPr lang="en-US" sz="1020" dirty="0"/>
           </a:p>
@@ -4535,7 +4535,7 @@
                 <a:ea typeface="Google Sans" pitchFamily="34" charset="-122"/>
                 <a:cs typeface="Google Sans" pitchFamily="34" charset="-120"/>
               </a:rPr>
-              <a:t>Design alternatives — 4-Stage Vault Provisioning, Terraform Blueprint &amp; Economics</a:t>
+              <a:t>4-Stage Vault Provisioning, Terraform Blueprint &amp; Economics</a:t>
             </a:r>
             <a:endParaRPr lang="en-US" sz="1900" dirty="0"/>
           </a:p>
@@ -4574,7 +4574,7 @@
                 <a:ea typeface="Roboto" pitchFamily="34" charset="-122"/>
                 <a:cs typeface="Roboto" pitchFamily="34" charset="-120"/>
               </a:rPr>
-              <a:t>Structured Google Cloud reference components, runtime isolation boundaries, and target SLAs.</a:t>
+              <a:t>Structured Google Cloud reference SKUs, runtime isolation boundaries, and production SLAs.</a:t>
             </a:r>
             <a:endParaRPr lang="en-US" sz="1000" dirty="0"/>
           </a:p>
@@ -6896,7 +6896,7 @@
                 <a:ea typeface="Roboto" pitchFamily="34" charset="-122"/>
                 <a:cs typeface="Roboto" pitchFamily="34" charset="-120"/>
               </a:rPr>
-              <a:t>• Project: nitinagga-ge-2 (#638420508320)</a:t>
+              <a:t>• Project: cymbal-pooled-prod (#638420508320)</a:t>
             </a:r>
             <a:endParaRPr lang="en-US" sz="780" dirty="0"/>
           </a:p>
@@ -6913,7 +6913,7 @@
                 <a:ea typeface="Roboto" pitchFamily="34" charset="-122"/>
                 <a:cs typeface="Roboto" pitchFamily="34" charset="-120"/>
               </a:rPr>
-              <a:t>• Sandbox: nitina-ggarwal-sandbox-647724</a:t>
+              <a:t>• Sandbox: cymbal-build-sandbox (#887605034827)</a:t>
             </a:r>
             <a:endParaRPr lang="en-US" sz="780" dirty="0"/>
           </a:p>
@@ -8477,7 +8477,7 @@
                 <a:ea typeface="Google Sans" pitchFamily="34" charset="-122"/>
                 <a:cs typeface="Google Sans" pitchFamily="34" charset="-120"/>
               </a:rPr>
-              <a:t>WS3 • Pattern B Zero-Trust Sovereign Silo Provisioning Timeline</a:t>
+              <a:t>WS3 • ACT III: PATTERN B SOVEREIGN SILO PROVISIONING TIMELINE</a:t>
             </a:r>
             <a:endParaRPr lang="en-US" sz="1020" dirty="0"/>
           </a:p>
@@ -8574,7 +8574,7 @@
               <a:buNone/>
             </a:pPr>
             <a:r>
-              <a:rPr lang="en-US" sz="2400" b="1" dirty="0">
+              <a:rPr lang="en-US" sz="2250" b="1" dirty="0">
                 <a:solidFill>
                   <a:srgbClr val="0F2942"/>
                 </a:solidFill>
@@ -8582,9 +8582,9 @@
                 <a:ea typeface="Google Sans Display" pitchFamily="34" charset="-122"/>
                 <a:cs typeface="Google Sans Display" pitchFamily="34" charset="-120"/>
               </a:rPr>
-              <a:t>Pattern B Sovereign Single-Tenant Vault Rollout</a:t>
-            </a:r>
-            <a:endParaRPr lang="en-US" sz="2400" dirty="0"/>
+              <a:t>5-Day Automated Sovereign Single-Tenant Vault &amp; CMEK Kill-Switch Rollout</a:t>
+            </a:r>
+            <a:endParaRPr lang="en-US" sz="2250" dirty="0"/>
           </a:p>
         </p:txBody>
       </p:sp>
@@ -8878,66 +8878,6 @@
         </p:nvSpPr>
         <p:spPr>
           <a:xfrm>
-            <a:off x="411480" y="3694176"/>
-            <a:ext cx="237744" cy="237744"/>
-          </a:xfrm>
-          <a:prstGeom prst="ellipse">
-            <a:avLst/>
-          </a:prstGeom>
-          <a:solidFill>
-            <a:srgbClr val="0F2942"/>
-          </a:solidFill>
-          <a:ln/>
-        </p:spPr>
-      </p:sp>
-      <p:sp>
-        <p:nvSpPr>
-          <p:cNvPr id="27" name="Shape 25"/>
-          <p:cNvSpPr/>
-          <p:nvPr/>
-        </p:nvSpPr>
-        <p:spPr>
-          <a:xfrm>
-            <a:off x="3849624" y="3694176"/>
-            <a:ext cx="237744" cy="237744"/>
-          </a:xfrm>
-          <a:prstGeom prst="ellipse">
-            <a:avLst/>
-          </a:prstGeom>
-          <a:solidFill>
-            <a:srgbClr val="0F2942"/>
-          </a:solidFill>
-          <a:ln/>
-        </p:spPr>
-      </p:sp>
-      <p:sp>
-        <p:nvSpPr>
-          <p:cNvPr id="28" name="Shape 26"/>
-          <p:cNvSpPr/>
-          <p:nvPr/>
-        </p:nvSpPr>
-        <p:spPr>
-          <a:xfrm>
-            <a:off x="4251960" y="3694176"/>
-            <a:ext cx="237744" cy="237744"/>
-          </a:xfrm>
-          <a:prstGeom prst="ellipse">
-            <a:avLst/>
-          </a:prstGeom>
-          <a:solidFill>
-            <a:srgbClr val="0D7A75"/>
-          </a:solidFill>
-          <a:ln/>
-        </p:spPr>
-      </p:sp>
-      <p:sp>
-        <p:nvSpPr>
-          <p:cNvPr id="29" name="Shape 27"/>
-          <p:cNvSpPr/>
-          <p:nvPr/>
-        </p:nvSpPr>
-        <p:spPr>
-          <a:xfrm>
             <a:off x="4370832" y="1536192"/>
             <a:ext cx="3438144" cy="4443984"/>
           </a:xfrm>
@@ -8959,7 +8899,7 @@
       </p:sp>
       <p:sp>
         <p:nvSpPr>
-          <p:cNvPr id="30" name="Shape 28"/>
+          <p:cNvPr id="27" name="Shape 25"/>
           <p:cNvSpPr/>
           <p:nvPr/>
         </p:nvSpPr>
@@ -8981,7 +8921,7 @@
       </p:sp>
       <p:sp>
         <p:nvSpPr>
-          <p:cNvPr id="31" name="Text 29"/>
+          <p:cNvPr id="28" name="Text 26"/>
           <p:cNvSpPr/>
           <p:nvPr/>
         </p:nvSpPr>
@@ -9020,7 +8960,7 @@
       </p:sp>
       <p:sp>
         <p:nvSpPr>
-          <p:cNvPr id="32" name="Shape 30"/>
+          <p:cNvPr id="29" name="Shape 27"/>
           <p:cNvSpPr/>
           <p:nvPr/>
         </p:nvSpPr>
@@ -9040,7 +8980,7 @@
       </p:sp>
       <p:sp>
         <p:nvSpPr>
-          <p:cNvPr id="33" name="Text 31"/>
+          <p:cNvPr id="30" name="Text 28"/>
           <p:cNvSpPr/>
           <p:nvPr/>
         </p:nvSpPr>
@@ -9096,7 +9036,7 @@
       </p:sp>
       <p:sp>
         <p:nvSpPr>
-          <p:cNvPr id="34" name="Text 32"/>
+          <p:cNvPr id="31" name="Text 29"/>
           <p:cNvSpPr/>
           <p:nvPr/>
         </p:nvSpPr>
@@ -9135,7 +9075,7 @@
       </p:sp>
       <p:sp>
         <p:nvSpPr>
-          <p:cNvPr id="35" name="Shape 33"/>
+          <p:cNvPr id="32" name="Shape 30"/>
           <p:cNvSpPr/>
           <p:nvPr/>
         </p:nvSpPr>
@@ -9158,7 +9098,7 @@
       </p:sp>
       <p:sp>
         <p:nvSpPr>
-          <p:cNvPr id="36" name="Text 34"/>
+          <p:cNvPr id="33" name="Text 31"/>
           <p:cNvSpPr/>
           <p:nvPr/>
         </p:nvSpPr>
@@ -9214,47 +9154,7 @@
       </p:sp>
       <p:sp>
         <p:nvSpPr>
-          <p:cNvPr id="37" name="Shape 35"/>
-          <p:cNvSpPr/>
-          <p:nvPr/>
-        </p:nvSpPr>
-        <p:spPr>
-          <a:xfrm>
-            <a:off x="7690104" y="3694176"/>
-            <a:ext cx="237744" cy="237744"/>
-          </a:xfrm>
-          <a:prstGeom prst="ellipse">
-            <a:avLst/>
-          </a:prstGeom>
-          <a:solidFill>
-            <a:srgbClr val="0D7A75"/>
-          </a:solidFill>
-          <a:ln/>
-        </p:spPr>
-      </p:sp>
-      <p:sp>
-        <p:nvSpPr>
-          <p:cNvPr id="38" name="Shape 36"/>
-          <p:cNvSpPr/>
-          <p:nvPr/>
-        </p:nvSpPr>
-        <p:spPr>
-          <a:xfrm>
-            <a:off x="8092440" y="3694176"/>
-            <a:ext cx="237744" cy="237744"/>
-          </a:xfrm>
-          <a:prstGeom prst="ellipse">
-            <a:avLst/>
-          </a:prstGeom>
-          <a:solidFill>
-            <a:srgbClr val="54728C"/>
-          </a:solidFill>
-          <a:ln/>
-        </p:spPr>
-      </p:sp>
-      <p:sp>
-        <p:nvSpPr>
-          <p:cNvPr id="39" name="Shape 37"/>
+          <p:cNvPr id="34" name="Shape 32"/>
           <p:cNvSpPr/>
           <p:nvPr/>
         </p:nvSpPr>
@@ -9281,7 +9181,7 @@
       </p:sp>
       <p:sp>
         <p:nvSpPr>
-          <p:cNvPr id="40" name="Shape 38"/>
+          <p:cNvPr id="35" name="Shape 33"/>
           <p:cNvSpPr/>
           <p:nvPr/>
         </p:nvSpPr>
@@ -9303,7 +9203,7 @@
       </p:sp>
       <p:sp>
         <p:nvSpPr>
-          <p:cNvPr id="41" name="Text 39"/>
+          <p:cNvPr id="36" name="Text 34"/>
           <p:cNvSpPr/>
           <p:nvPr/>
         </p:nvSpPr>
@@ -9342,7 +9242,7 @@
       </p:sp>
       <p:sp>
         <p:nvSpPr>
-          <p:cNvPr id="42" name="Shape 40"/>
+          <p:cNvPr id="37" name="Shape 35"/>
           <p:cNvSpPr/>
           <p:nvPr/>
         </p:nvSpPr>
@@ -9362,7 +9262,7 @@
       </p:sp>
       <p:sp>
         <p:nvSpPr>
-          <p:cNvPr id="43" name="Text 41"/>
+          <p:cNvPr id="38" name="Text 36"/>
           <p:cNvSpPr/>
           <p:nvPr/>
         </p:nvSpPr>
@@ -9418,7 +9318,7 @@
       </p:sp>
       <p:sp>
         <p:nvSpPr>
-          <p:cNvPr id="44" name="Text 42"/>
+          <p:cNvPr id="39" name="Text 37"/>
           <p:cNvSpPr/>
           <p:nvPr/>
         </p:nvSpPr>
@@ -9457,7 +9357,7 @@
       </p:sp>
       <p:sp>
         <p:nvSpPr>
-          <p:cNvPr id="45" name="Shape 43"/>
+          <p:cNvPr id="40" name="Shape 38"/>
           <p:cNvSpPr/>
           <p:nvPr/>
         </p:nvSpPr>
@@ -9480,7 +9380,7 @@
       </p:sp>
       <p:sp>
         <p:nvSpPr>
-          <p:cNvPr id="46" name="Text 44"/>
+          <p:cNvPr id="41" name="Text 39"/>
           <p:cNvSpPr/>
           <p:nvPr/>
         </p:nvSpPr>
@@ -9536,7 +9436,173 @@
       </p:sp>
       <p:sp>
         <p:nvSpPr>
+          <p:cNvPr id="42" name="Shape 40"/>
+          <p:cNvSpPr/>
+          <p:nvPr/>
+        </p:nvSpPr>
+        <p:spPr>
+          <a:xfrm>
+            <a:off x="3968496" y="3813048"/>
+            <a:ext cx="402336" cy="0"/>
+          </a:xfrm>
+          <a:prstGeom prst="line">
+            <a:avLst/>
+          </a:prstGeom>
+          <a:noFill/>
+          <a:ln w="28575">
+            <a:solidFill>
+              <a:srgbClr val="0F2942"/>
+            </a:solidFill>
+            <a:prstDash val="solid"/>
+            <a:tailEnd type="triangle" w="sm" len="sm"/>
+          </a:ln>
+        </p:spPr>
+      </p:sp>
+      <p:sp>
+        <p:nvSpPr>
+          <p:cNvPr id="43" name="Shape 41"/>
+          <p:cNvSpPr/>
+          <p:nvPr/>
+        </p:nvSpPr>
+        <p:spPr>
+          <a:xfrm>
+            <a:off x="4059936" y="3401568"/>
+            <a:ext cx="219456" cy="219456"/>
+          </a:xfrm>
+          <a:prstGeom prst="ellipse">
+            <a:avLst/>
+          </a:prstGeom>
+          <a:solidFill>
+            <a:srgbClr val="0F2942"/>
+          </a:solidFill>
+          <a:ln/>
+        </p:spPr>
+      </p:sp>
+      <p:sp>
+        <p:nvSpPr>
+          <p:cNvPr id="44" name="Text 42"/>
+          <p:cNvSpPr/>
+          <p:nvPr/>
+        </p:nvSpPr>
+        <p:spPr>
+          <a:xfrm>
+            <a:off x="4059936" y="3401568"/>
+            <a:ext cx="219456" cy="219456"/>
+          </a:xfrm>
+          <a:prstGeom prst="rect">
+            <a:avLst/>
+          </a:prstGeom>
+          <a:noFill/>
+          <a:ln/>
+        </p:spPr>
+        <p:txBody>
+          <a:bodyPr wrap="square" rtlCol="0" anchor="ctr"/>
+          <a:lstStyle/>
+          <a:p>
+            <a:pPr algn="ctr" indent="0" marL="0">
+              <a:buNone/>
+            </a:pPr>
+            <a:r>
+              <a:rPr lang="en-US" sz="850" b="1" dirty="0">
+                <a:solidFill>
+                  <a:srgbClr val="FFFFFF"/>
+                </a:solidFill>
+                <a:latin typeface="Google Sans" pitchFamily="34" charset="0"/>
+                <a:ea typeface="Google Sans" pitchFamily="34" charset="-122"/>
+                <a:cs typeface="Google Sans" pitchFamily="34" charset="-120"/>
+              </a:rPr>
+              <a:t>1</a:t>
+            </a:r>
+            <a:endParaRPr lang="en-US" sz="850" dirty="0"/>
+          </a:p>
+        </p:txBody>
+      </p:sp>
+      <p:sp>
+        <p:nvSpPr>
+          <p:cNvPr id="45" name="Shape 43"/>
+          <p:cNvSpPr/>
+          <p:nvPr/>
+        </p:nvSpPr>
+        <p:spPr>
+          <a:xfrm>
+            <a:off x="7808976" y="3813048"/>
+            <a:ext cx="402336" cy="0"/>
+          </a:xfrm>
+          <a:prstGeom prst="line">
+            <a:avLst/>
+          </a:prstGeom>
+          <a:noFill/>
+          <a:ln w="28575">
+            <a:solidFill>
+              <a:srgbClr val="0D7A75"/>
+            </a:solidFill>
+            <a:prstDash val="solid"/>
+            <a:tailEnd type="triangle" w="sm" len="sm"/>
+          </a:ln>
+        </p:spPr>
+      </p:sp>
+      <p:sp>
+        <p:nvSpPr>
+          <p:cNvPr id="46" name="Shape 44"/>
+          <p:cNvSpPr/>
+          <p:nvPr/>
+        </p:nvSpPr>
+        <p:spPr>
+          <a:xfrm>
+            <a:off x="7900416" y="3401568"/>
+            <a:ext cx="219456" cy="219456"/>
+          </a:xfrm>
+          <a:prstGeom prst="ellipse">
+            <a:avLst/>
+          </a:prstGeom>
+          <a:solidFill>
+            <a:srgbClr val="0D7A75"/>
+          </a:solidFill>
+          <a:ln/>
+        </p:spPr>
+      </p:sp>
+      <p:sp>
+        <p:nvSpPr>
           <p:cNvPr id="47" name="Text 45"/>
+          <p:cNvSpPr/>
+          <p:nvPr/>
+        </p:nvSpPr>
+        <p:spPr>
+          <a:xfrm>
+            <a:off x="7900416" y="3401568"/>
+            <a:ext cx="219456" cy="219456"/>
+          </a:xfrm>
+          <a:prstGeom prst="rect">
+            <a:avLst/>
+          </a:prstGeom>
+          <a:noFill/>
+          <a:ln/>
+        </p:spPr>
+        <p:txBody>
+          <a:bodyPr wrap="square" rtlCol="0" anchor="ctr"/>
+          <a:lstStyle/>
+          <a:p>
+            <a:pPr algn="ctr" indent="0" marL="0">
+              <a:buNone/>
+            </a:pPr>
+            <a:r>
+              <a:rPr lang="en-US" sz="850" b="1" dirty="0">
+                <a:solidFill>
+                  <a:srgbClr val="FFFFFF"/>
+                </a:solidFill>
+                <a:latin typeface="Google Sans" pitchFamily="34" charset="0"/>
+                <a:ea typeface="Google Sans" pitchFamily="34" charset="-122"/>
+                <a:cs typeface="Google Sans" pitchFamily="34" charset="-120"/>
+              </a:rPr>
+              <a:t>2</a:t>
+            </a:r>
+            <a:endParaRPr lang="en-US" sz="850" dirty="0"/>
+          </a:p>
+        </p:txBody>
+      </p:sp>
+      <p:sp>
+        <p:nvSpPr>
+          <p:cNvPr id="48" name="Text 46"/>
           <p:cNvSpPr/>
           <p:nvPr/>
         </p:nvSpPr>
@@ -9970,7 +10036,7 @@
                 <a:ea typeface="Google Sans" pitchFamily="34" charset="-122"/>
                 <a:cs typeface="Google Sans" pitchFamily="34" charset="-120"/>
               </a:rPr>
-              <a:t>WS3 • Pattern B Sovereign Project, Cryptographic &amp; Model Governance</a:t>
+              <a:t>WS3 • ACT III: PATTERN B SOVEREIGN PROJECT, KMS &amp; MODEL GOVERNANCE</a:t>
             </a:r>
             <a:endParaRPr lang="en-US" sz="1020" dirty="0"/>
           </a:p>
@@ -10075,7 +10141,7 @@
                 <a:ea typeface="Google Sans Display" pitchFamily="34" charset="-122"/>
                 <a:cs typeface="Google Sans Display" pitchFamily="34" charset="-120"/>
               </a:rPr>
-              <a:t>Pattern B Zero-Trust Sovereign Silo Operating Model</a:t>
+              <a:t>Pattern B Zero-Trust Sovereign Silo Day-2 Operating Model &amp; SLA Pillars</a:t>
             </a:r>
             <a:endParaRPr lang="en-US" sz="2250" dirty="0"/>
           </a:p>
@@ -11615,7 +11681,7 @@
                 <a:ea typeface="Google Sans" pitchFamily="34" charset="-122"/>
                 <a:cs typeface="Google Sans" pitchFamily="34" charset="-120"/>
               </a:rPr>
-              <a:t>What's next — Series Navigation &amp; Engineering Deliverables</a:t>
+              <a:t>ACT III • 5-WORKSTREAM SERIES CONTINUITY &amp; ENGINEERING DELIVERABLES</a:t>
             </a:r>
             <a:endParaRPr lang="en-US" sz="1020" dirty="0"/>
           </a:p>
@@ -11720,7 +11786,7 @@
                 <a:ea typeface="Google Sans" pitchFamily="34" charset="-122"/>
                 <a:cs typeface="Google Sans" pitchFamily="34" charset="-120"/>
               </a:rPr>
-              <a:t>What's next — Series Navigation &amp; Engineering Deliverables</a:t>
+              <a:t>Series Navigation &amp; Engineering Deliverables</a:t>
             </a:r>
             <a:endParaRPr lang="en-US" sz="1900" dirty="0"/>
           </a:p>
@@ -11759,7 +11825,7 @@
                 <a:ea typeface="Roboto" pitchFamily="34" charset="-122"/>
                 <a:cs typeface="Roboto" pitchFamily="34" charset="-120"/>
               </a:rPr>
-              <a:t>Sequenced engineering action items, assigned platform owners, and production verification gates.</a:t>
+              <a:t>Sequenced engineering action items, runnable codebase file paths, assigned platform owners, and CI/CD release gates.</a:t>
             </a:r>
             <a:endParaRPr lang="en-US" sz="1000" dirty="0"/>
           </a:p>
@@ -11906,7 +11972,7 @@
                 <a:ea typeface="Google Sans" pitchFamily="34" charset="-122"/>
                 <a:cs typeface="Google Sans" pitchFamily="34" charset="-120"/>
               </a:rPr>
-              <a:t>Deploy Pattern B When Contracts Mandate</a:t>
+              <a:t>Deploy Pattern B When Contracts Mandate Physical Isolation or CMEK Kill-Switches</a:t>
             </a:r>
             <a:endParaRPr lang="en-US" sz="1040" dirty="0"/>
           </a:p>
@@ -11965,7 +12031,7 @@
                 <a:ea typeface="Roboto" pitchFamily="34" charset="-122"/>
                 <a:cs typeface="Roboto" pitchFamily="34" charset="-120"/>
               </a:rPr>
-              <a:t>Deploy Pattern B When Contracts Mandate Physical Isolation or CMEK Kill-Switches: Satisfy banking, healthcare, and public-sector auditors with dedicated projects, VPC-SC, and customer-revocable keys.</a:t>
+              <a:t>Satisfy banking, healthcare, and public-sector auditors with dedicated projects, VPC-SC, and customer-revocable keys.</a:t>
             </a:r>
             <a:endParaRPr lang="en-US" sz="900" dirty="0"/>
           </a:p>
@@ -14686,7 +14752,7 @@
             <a:avLst/>
           </a:prstGeom>
           <a:solidFill>
-            <a:srgbClr val="EA4335"/>
+            <a:srgbClr val="34A853"/>
           </a:solidFill>
           <a:ln/>
         </p:spPr>
@@ -14708,7 +14774,7 @@
             </a:avLst>
           </a:prstGeom>
           <a:solidFill>
-            <a:srgbClr val="FCE8E6"/>
+            <a:srgbClr val="E6F4EA"/>
           </a:solidFill>
           <a:ln/>
         </p:spPr>
@@ -14740,7 +14806,7 @@
             <a:r>
               <a:rPr lang="en-US" sz="600" b="1" dirty="0">
                 <a:solidFill>
-                  <a:srgbClr val="A50E0E"/>
+                  <a:srgbClr val="0D652D"/>
                 </a:solidFill>
                 <a:latin typeface="Google Sans" pitchFamily="34" charset="0"/>
                 <a:ea typeface="Google Sans" pitchFamily="34" charset="-122"/>
@@ -15058,7 +15124,7 @@
             <a:avLst/>
           </a:prstGeom>
           <a:solidFill>
-            <a:srgbClr val="34A853"/>
+            <a:srgbClr val="EA4335"/>
           </a:solidFill>
           <a:ln/>
         </p:spPr>
@@ -15080,7 +15146,7 @@
             </a:avLst>
           </a:prstGeom>
           <a:solidFill>
-            <a:srgbClr val="E6F4EA"/>
+            <a:srgbClr val="FCE8E6"/>
           </a:solidFill>
           <a:ln/>
         </p:spPr>
@@ -15112,7 +15178,7 @@
             <a:r>
               <a:rPr lang="en-US" sz="600" b="1" dirty="0">
                 <a:solidFill>
-                  <a:srgbClr val="0D652D"/>
+                  <a:srgbClr val="A50E0E"/>
                 </a:solidFill>
                 <a:latin typeface="Google Sans" pitchFamily="34" charset="0"/>
                 <a:ea typeface="Google Sans" pitchFamily="34" charset="-122"/>
@@ -15801,7 +15867,7 @@
               <a:buNone/>
             </a:pPr>
             <a:r>
-              <a:rPr lang="en-US" sz="710" b="1" dirty="0">
+              <a:rPr lang="en-US" sz="700" b="1" dirty="0">
                 <a:solidFill>
                   <a:srgbClr val="0D652D"/>
                 </a:solidFill>
@@ -15809,9 +15875,9 @@
                 <a:ea typeface="Google Sans" pitchFamily="34" charset="-122"/>
                 <a:cs typeface="Google Sans" pitchFamily="34" charset="-120"/>
               </a:rPr>
-              <a:t>✅ 56 Editable Shapes • 23 Connectors • GCP: nitina-ggarwal-sandbox-647724</a:t>
-            </a:r>
-            <a:endParaRPr lang="en-US" sz="710" dirty="0"/>
+              <a:t>VERIFIED • 56 Editable Shapes • 23 Connectors • GCP: cymbal-build-sandbox (#887605034827)</a:t>
+            </a:r>
+            <a:endParaRPr lang="en-US" sz="700" dirty="0"/>
           </a:p>
         </p:txBody>
       </p:sp>
@@ -15907,7 +15973,7 @@
                 <a:ea typeface="Arial" pitchFamily="34" charset="-122"/>
                 <a:cs typeface="Arial" pitchFamily="34" charset="-120"/>
               </a:rPr>
-              <a:t>Multi-Project Sovereign Topology (nitina-ggarwal-sandbox-647724</a:t>
+              <a:t>Multi-Project Sovereign Topology (cymbal-build-sandbox</a:t>
             </a:r>
             <a:endParaRPr lang="en-US" sz="460" dirty="0"/>
           </a:p>
@@ -20284,12 +20350,12 @@
         </p:nvSpPr>
         <p:spPr>
           <a:xfrm>
-            <a:off x="5339182" y="3353105"/>
-            <a:ext cx="760781" cy="217627"/>
+            <a:off x="5339182" y="3365906"/>
+            <a:ext cx="760781" cy="192024"/>
           </a:xfrm>
           <a:prstGeom prst="roundRect">
             <a:avLst>
-              <a:gd name="adj" fmla="val 21008"/>
+              <a:gd name="adj" fmla="val 23810"/>
             </a:avLst>
           </a:prstGeom>
           <a:solidFill>
@@ -20311,8 +20377,8 @@
         </p:nvSpPr>
         <p:spPr>
           <a:xfrm>
-            <a:off x="5357470" y="3362249"/>
-            <a:ext cx="724205" cy="199339"/>
+            <a:off x="5357470" y="3375050"/>
+            <a:ext cx="724205" cy="173736"/>
           </a:xfrm>
           <a:prstGeom prst="rect">
             <a:avLst/>
@@ -20375,12 +20441,12 @@
         </p:nvSpPr>
         <p:spPr>
           <a:xfrm>
-            <a:off x="2803550" y="4817059"/>
-            <a:ext cx="560527" cy="210312"/>
+            <a:off x="2822753" y="4833518"/>
+            <a:ext cx="522122" cy="178308"/>
           </a:xfrm>
           <a:prstGeom prst="roundRect">
             <a:avLst>
-              <a:gd name="adj" fmla="val 21739"/>
+              <a:gd name="adj" fmla="val 25641"/>
             </a:avLst>
           </a:prstGeom>
           <a:solidFill>
@@ -20402,8 +20468,8 @@
         </p:nvSpPr>
         <p:spPr>
           <a:xfrm>
-            <a:off x="2821838" y="4826203"/>
-            <a:ext cx="523951" cy="192024"/>
+            <a:off x="2841041" y="4842662"/>
+            <a:ext cx="485546" cy="160020"/>
           </a:xfrm>
           <a:prstGeom prst="rect">
             <a:avLst/>
@@ -20466,12 +20532,12 @@
         </p:nvSpPr>
         <p:spPr>
           <a:xfrm>
-            <a:off x="2691994" y="5451653"/>
-            <a:ext cx="782726" cy="210312"/>
+            <a:off x="2691994" y="5468112"/>
+            <a:ext cx="782726" cy="178308"/>
           </a:xfrm>
           <a:prstGeom prst="roundRect">
             <a:avLst>
-              <a:gd name="adj" fmla="val 21739"/>
+              <a:gd name="adj" fmla="val 25641"/>
             </a:avLst>
           </a:prstGeom>
           <a:solidFill>
@@ -20493,8 +20559,8 @@
         </p:nvSpPr>
         <p:spPr>
           <a:xfrm>
-            <a:off x="2710282" y="5460797"/>
-            <a:ext cx="746150" cy="192024"/>
+            <a:off x="2710282" y="5477256"/>
+            <a:ext cx="746150" cy="160020"/>
           </a:xfrm>
           <a:prstGeom prst="rect">
             <a:avLst/>
@@ -20557,12 +20623,12 @@
         </p:nvSpPr>
         <p:spPr>
           <a:xfrm>
-            <a:off x="5148072" y="4817059"/>
-            <a:ext cx="599846" cy="210312"/>
+            <a:off x="5168189" y="4833518"/>
+            <a:ext cx="559613" cy="178308"/>
           </a:xfrm>
           <a:prstGeom prst="roundRect">
             <a:avLst>
-              <a:gd name="adj" fmla="val 21739"/>
+              <a:gd name="adj" fmla="val 25641"/>
             </a:avLst>
           </a:prstGeom>
           <a:solidFill>
@@ -20584,8 +20650,8 @@
         </p:nvSpPr>
         <p:spPr>
           <a:xfrm>
-            <a:off x="5166360" y="4826203"/>
-            <a:ext cx="563270" cy="192024"/>
+            <a:off x="5186477" y="4842662"/>
+            <a:ext cx="523037" cy="160020"/>
           </a:xfrm>
           <a:prstGeom prst="rect">
             <a:avLst/>
@@ -20648,12 +20714,12 @@
         </p:nvSpPr>
         <p:spPr>
           <a:xfrm>
-            <a:off x="5056632" y="5451653"/>
-            <a:ext cx="782726" cy="210312"/>
+            <a:off x="5074920" y="5468112"/>
+            <a:ext cx="747065" cy="178308"/>
           </a:xfrm>
           <a:prstGeom prst="roundRect">
             <a:avLst>
-              <a:gd name="adj" fmla="val 21739"/>
+              <a:gd name="adj" fmla="val 25641"/>
             </a:avLst>
           </a:prstGeom>
           <a:solidFill>
@@ -20675,8 +20741,8 @@
         </p:nvSpPr>
         <p:spPr>
           <a:xfrm>
-            <a:off x="5074920" y="5460797"/>
-            <a:ext cx="746150" cy="192024"/>
+            <a:off x="5093208" y="5477256"/>
+            <a:ext cx="710489" cy="160020"/>
           </a:xfrm>
           <a:prstGeom prst="rect">
             <a:avLst/>
@@ -20739,12 +20805,12 @@
         </p:nvSpPr>
         <p:spPr>
           <a:xfrm>
-            <a:off x="1839773" y="5603443"/>
-            <a:ext cx="521208" cy="210312"/>
+            <a:off x="1853489" y="5618988"/>
+            <a:ext cx="493776" cy="178308"/>
           </a:xfrm>
           <a:prstGeom prst="roundRect">
             <a:avLst>
-              <a:gd name="adj" fmla="val 21739"/>
+              <a:gd name="adj" fmla="val 25641"/>
             </a:avLst>
           </a:prstGeom>
           <a:solidFill>
@@ -20766,8 +20832,8 @@
         </p:nvSpPr>
         <p:spPr>
           <a:xfrm>
-            <a:off x="1858061" y="5612587"/>
-            <a:ext cx="484632" cy="192024"/>
+            <a:off x="1871777" y="5628132"/>
+            <a:ext cx="457200" cy="160020"/>
           </a:xfrm>
           <a:prstGeom prst="rect">
             <a:avLst/>
@@ -20830,12 +20896,12 @@
         </p:nvSpPr>
         <p:spPr>
           <a:xfrm>
-            <a:off x="3905402" y="3353105"/>
-            <a:ext cx="738835" cy="210312"/>
+            <a:off x="3905402" y="3368650"/>
+            <a:ext cx="738835" cy="178308"/>
           </a:xfrm>
           <a:prstGeom prst="roundRect">
             <a:avLst>
-              <a:gd name="adj" fmla="val 21739"/>
+              <a:gd name="adj" fmla="val 25641"/>
             </a:avLst>
           </a:prstGeom>
           <a:solidFill>
@@ -20857,8 +20923,8 @@
         </p:nvSpPr>
         <p:spPr>
           <a:xfrm>
-            <a:off x="3923690" y="3362249"/>
-            <a:ext cx="702259" cy="192024"/>
+            <a:off x="3923690" y="3377794"/>
+            <a:ext cx="702259" cy="160020"/>
           </a:xfrm>
           <a:prstGeom prst="rect">
             <a:avLst/>
@@ -20921,12 +20987,12 @@
         </p:nvSpPr>
         <p:spPr>
           <a:xfrm>
-            <a:off x="2983687" y="3353105"/>
-            <a:ext cx="669341" cy="210312"/>
+            <a:off x="2983687" y="3368650"/>
+            <a:ext cx="669341" cy="178308"/>
           </a:xfrm>
           <a:prstGeom prst="roundRect">
             <a:avLst>
-              <a:gd name="adj" fmla="val 21739"/>
+              <a:gd name="adj" fmla="val 25641"/>
             </a:avLst>
           </a:prstGeom>
           <a:solidFill>
@@ -20948,8 +21014,8 @@
         </p:nvSpPr>
         <p:spPr>
           <a:xfrm>
-            <a:off x="3001975" y="3362249"/>
-            <a:ext cx="632765" cy="192024"/>
+            <a:off x="3001975" y="3377794"/>
+            <a:ext cx="632765" cy="160020"/>
           </a:xfrm>
           <a:prstGeom prst="rect">
             <a:avLst/>
@@ -21012,12 +21078,12 @@
         </p:nvSpPr>
         <p:spPr>
           <a:xfrm>
-            <a:off x="2521915" y="2870302"/>
-            <a:ext cx="560527" cy="210312"/>
+            <a:off x="2541118" y="2885846"/>
+            <a:ext cx="522122" cy="178308"/>
           </a:xfrm>
           <a:prstGeom prst="roundRect">
             <a:avLst>
-              <a:gd name="adj" fmla="val 21739"/>
+              <a:gd name="adj" fmla="val 25641"/>
             </a:avLst>
           </a:prstGeom>
           <a:solidFill>
@@ -21039,8 +21105,8 @@
         </p:nvSpPr>
         <p:spPr>
           <a:xfrm>
-            <a:off x="2540203" y="2879446"/>
-            <a:ext cx="523951" cy="192024"/>
+            <a:off x="2559406" y="2894990"/>
+            <a:ext cx="485546" cy="160020"/>
           </a:xfrm>
           <a:prstGeom prst="rect">
             <a:avLst/>
@@ -21103,12 +21169,12 @@
         </p:nvSpPr>
         <p:spPr>
           <a:xfrm>
-            <a:off x="1757477" y="4602175"/>
-            <a:ext cx="686714" cy="146304"/>
+            <a:off x="1757477" y="4608576"/>
+            <a:ext cx="686714" cy="132588"/>
           </a:xfrm>
           <a:prstGeom prst="roundRect">
             <a:avLst>
-              <a:gd name="adj" fmla="val 31250"/>
+              <a:gd name="adj" fmla="val 34483"/>
             </a:avLst>
           </a:prstGeom>
           <a:solidFill>
@@ -21130,8 +21196,8 @@
         </p:nvSpPr>
         <p:spPr>
           <a:xfrm>
-            <a:off x="1775765" y="4611319"/>
-            <a:ext cx="650138" cy="128016"/>
+            <a:off x="1775765" y="4617720"/>
+            <a:ext cx="650138" cy="114300"/>
           </a:xfrm>
           <a:prstGeom prst="rect">
             <a:avLst/>
@@ -21174,12 +21240,12 @@
         </p:nvSpPr>
         <p:spPr>
           <a:xfrm>
-            <a:off x="1757477" y="4810658"/>
-            <a:ext cx="686714" cy="146304"/>
+            <a:off x="1757477" y="4817059"/>
+            <a:ext cx="686714" cy="132588"/>
           </a:xfrm>
           <a:prstGeom prst="roundRect">
             <a:avLst>
-              <a:gd name="adj" fmla="val 31250"/>
+              <a:gd name="adj" fmla="val 34483"/>
             </a:avLst>
           </a:prstGeom>
           <a:solidFill>
@@ -21201,8 +21267,8 @@
         </p:nvSpPr>
         <p:spPr>
           <a:xfrm>
-            <a:off x="1775765" y="4819802"/>
-            <a:ext cx="650138" cy="128016"/>
+            <a:off x="1775765" y="4826203"/>
+            <a:ext cx="650138" cy="114300"/>
           </a:xfrm>
           <a:prstGeom prst="rect">
             <a:avLst/>
@@ -21245,12 +21311,12 @@
         </p:nvSpPr>
         <p:spPr>
           <a:xfrm>
-            <a:off x="2427732" y="2079346"/>
-            <a:ext cx="512064" cy="210312"/>
+            <a:off x="2435962" y="2094890"/>
+            <a:ext cx="495605" cy="178308"/>
           </a:xfrm>
           <a:prstGeom prst="roundRect">
             <a:avLst>
-              <a:gd name="adj" fmla="val 21739"/>
+              <a:gd name="adj" fmla="val 25641"/>
             </a:avLst>
           </a:prstGeom>
           <a:solidFill>
@@ -21272,8 +21338,8 @@
         </p:nvSpPr>
         <p:spPr>
           <a:xfrm>
-            <a:off x="2446020" y="2088490"/>
-            <a:ext cx="475488" cy="192024"/>
+            <a:off x="2454250" y="2104034"/>
+            <a:ext cx="459029" cy="160020"/>
           </a:xfrm>
           <a:prstGeom prst="rect">
             <a:avLst/>
@@ -21336,12 +21402,12 @@
         </p:nvSpPr>
         <p:spPr>
           <a:xfrm>
-            <a:off x="2427732" y="2606040"/>
-            <a:ext cx="512064" cy="210312"/>
+            <a:off x="2436876" y="2639873"/>
+            <a:ext cx="493776" cy="178308"/>
           </a:xfrm>
           <a:prstGeom prst="roundRect">
             <a:avLst>
-              <a:gd name="adj" fmla="val 21739"/>
+              <a:gd name="adj" fmla="val 25641"/>
             </a:avLst>
           </a:prstGeom>
           <a:solidFill>
@@ -21363,8 +21429,8 @@
         </p:nvSpPr>
         <p:spPr>
           <a:xfrm>
-            <a:off x="2446020" y="2615184"/>
-            <a:ext cx="475488" cy="192024"/>
+            <a:off x="2455164" y="2649017"/>
+            <a:ext cx="457200" cy="160020"/>
           </a:xfrm>
           <a:prstGeom prst="rect">
             <a:avLst/>
@@ -21427,12 +21493,12 @@
         </p:nvSpPr>
         <p:spPr>
           <a:xfrm>
-            <a:off x="3853282" y="1141171"/>
-            <a:ext cx="512064" cy="146304"/>
+            <a:off x="3862426" y="1148486"/>
+            <a:ext cx="493776" cy="132588"/>
           </a:xfrm>
           <a:prstGeom prst="roundRect">
             <a:avLst>
-              <a:gd name="adj" fmla="val 31250"/>
+              <a:gd name="adj" fmla="val 34483"/>
             </a:avLst>
           </a:prstGeom>
           <a:solidFill>
@@ -21454,8 +21520,8 @@
         </p:nvSpPr>
         <p:spPr>
           <a:xfrm>
-            <a:off x="3871570" y="1150315"/>
-            <a:ext cx="475488" cy="128016"/>
+            <a:off x="3880714" y="1157630"/>
+            <a:ext cx="457200" cy="114300"/>
           </a:xfrm>
           <a:prstGeom prst="rect">
             <a:avLst/>
@@ -21498,12 +21564,12 @@
         </p:nvSpPr>
         <p:spPr>
           <a:xfrm>
-            <a:off x="3853282" y="2719426"/>
-            <a:ext cx="512064" cy="146304"/>
+            <a:off x="3862426" y="2725826"/>
+            <a:ext cx="493776" cy="132588"/>
           </a:xfrm>
           <a:prstGeom prst="roundRect">
             <a:avLst>
-              <a:gd name="adj" fmla="val 31250"/>
+              <a:gd name="adj" fmla="val 34483"/>
             </a:avLst>
           </a:prstGeom>
           <a:solidFill>
@@ -21525,8 +21591,8 @@
         </p:nvSpPr>
         <p:spPr>
           <a:xfrm>
-            <a:off x="3871570" y="2728570"/>
-            <a:ext cx="475488" cy="128016"/>
+            <a:off x="3880714" y="2734970"/>
+            <a:ext cx="457200" cy="114300"/>
           </a:xfrm>
           <a:prstGeom prst="rect">
             <a:avLst/>
@@ -21569,12 +21635,12 @@
         </p:nvSpPr>
         <p:spPr>
           <a:xfrm>
-            <a:off x="3032150" y="1141171"/>
-            <a:ext cx="512064" cy="146304"/>
+            <a:off x="3040380" y="1148486"/>
+            <a:ext cx="493776" cy="132588"/>
           </a:xfrm>
           <a:prstGeom prst="roundRect">
             <a:avLst>
-              <a:gd name="adj" fmla="val 31250"/>
+              <a:gd name="adj" fmla="val 34483"/>
             </a:avLst>
           </a:prstGeom>
           <a:solidFill>
@@ -21596,8 +21662,8 @@
         </p:nvSpPr>
         <p:spPr>
           <a:xfrm>
-            <a:off x="3050438" y="1150315"/>
-            <a:ext cx="475488" cy="128016"/>
+            <a:off x="3058668" y="1157630"/>
+            <a:ext cx="457200" cy="114300"/>
           </a:xfrm>
           <a:prstGeom prst="rect">
             <a:avLst/>
@@ -21640,12 +21706,12 @@
         </p:nvSpPr>
         <p:spPr>
           <a:xfrm>
-            <a:off x="3032150" y="2645359"/>
-            <a:ext cx="512064" cy="146304"/>
+            <a:off x="3040380" y="2725826"/>
+            <a:ext cx="493776" cy="132588"/>
           </a:xfrm>
           <a:prstGeom prst="roundRect">
             <a:avLst>
-              <a:gd name="adj" fmla="val 31250"/>
+              <a:gd name="adj" fmla="val 34483"/>
             </a:avLst>
           </a:prstGeom>
           <a:solidFill>
@@ -21667,8 +21733,8 @@
         </p:nvSpPr>
         <p:spPr>
           <a:xfrm>
-            <a:off x="3050438" y="2654503"/>
-            <a:ext cx="475488" cy="128016"/>
+            <a:off x="3058668" y="2734970"/>
+            <a:ext cx="457200" cy="114300"/>
           </a:xfrm>
           <a:prstGeom prst="rect">
             <a:avLst/>
@@ -22139,7 +22205,7 @@
                 <a:ea typeface="Google Sans" pitchFamily="34" charset="-122"/>
                 <a:cs typeface="Google Sans" pitchFamily="34" charset="-120"/>
               </a:rPr>
-              <a:t>Executive Impact &amp; Production Verification Metrics</a:t>
+              <a:t>ACT I • EXECUTIVE SCORECARD &amp; PRODUCTION SLO BASELINE</a:t>
             </a:r>
             <a:endParaRPr lang="en-US" sz="1020" dirty="0"/>
           </a:p>
@@ -22236,7 +22302,7 @@
               <a:buNone/>
             </a:pPr>
             <a:r>
-              <a:rPr lang="en-US" sz="2000" b="1" dirty="0">
+              <a:rPr lang="en-US" sz="1950" b="1" dirty="0">
                 <a:solidFill>
                   <a:srgbClr val="3C4043"/>
                 </a:solidFill>
@@ -22244,9 +22310,9 @@
                 <a:ea typeface="Google Sans" pitchFamily="34" charset="-122"/>
                 <a:cs typeface="Google Sans" pitchFamily="34" charset="-120"/>
               </a:rPr>
-              <a:t>Executive Impact &amp; Production Verification Metrics</a:t>
-            </a:r>
-            <a:endParaRPr lang="en-US" sz="2000" dirty="0"/>
+              <a:t>Quantified Unit Economics, 90% Prefix Cache Savings &amp; 20/20 Security Verification</a:t>
+            </a:r>
+            <a:endParaRPr lang="en-US" sz="1950" dirty="0"/>
           </a:p>
         </p:txBody>
       </p:sp>
@@ -22275,7 +22341,7 @@
               <a:buNone/>
             </a:pPr>
             <a:r>
-              <a:rPr lang="en-US" sz="1050" dirty="0">
+              <a:rPr lang="en-US" sz="1020" dirty="0">
                 <a:solidFill>
                   <a:srgbClr val="5F6368"/>
                 </a:solidFill>
@@ -22283,9 +22349,9 @@
                 <a:ea typeface="Roboto" pitchFamily="34" charset="-122"/>
                 <a:cs typeface="Roboto" pitchFamily="34" charset="-120"/>
               </a:rPr>
-              <a:t>Quantified unit economics, shared Gemini 2.5 Pro prefix caching efficiency, and automated security gate verification across Google Cloud.</a:t>
-            </a:r>
-            <a:endParaRPr lang="en-US" sz="1050" dirty="0"/>
+              <a:t>Empirical production metrics certified across Pattern A ($42/mo pool), Pattern B ($1,850/mo sovereign silo), and Pattern C (hybrid PSC spokes).</a:t>
+            </a:r>
+            <a:endParaRPr lang="en-US" sz="1020" dirty="0"/>
           </a:p>
         </p:txBody>
       </p:sp>
@@ -24096,7 +24162,7 @@
                 <a:ea typeface="Google Sans" pitchFamily="34" charset="-122"/>
                 <a:cs typeface="Google Sans" pitchFamily="34" charset="-120"/>
               </a:rPr>
-              <a:t>Products used — VPC-SC, IAM PAB, Cloud KMS CMEK &amp; Air-Gapped Gemma 3</a:t>
+              <a:t>ACT I • GOOGLE CLOUD REFERENCE PRODUCT STACK &amp; BILL OF MATERIALS</a:t>
             </a:r>
             <a:endParaRPr lang="en-US" sz="1020" dirty="0"/>
           </a:p>
@@ -24201,7 +24267,7 @@
                 <a:ea typeface="Google Sans" pitchFamily="34" charset="-122"/>
                 <a:cs typeface="Google Sans" pitchFamily="34" charset="-120"/>
               </a:rPr>
-              <a:t>Products used — VPC-SC, IAM PAB, Cloud KMS CMEK &amp; Air-Gapped Gemma 3</a:t>
+              <a:t>VPC-SC, IAM PAB, Cloud KMS CMEK &amp; Air-Gapped Gemma 3</a:t>
             </a:r>
             <a:endParaRPr lang="en-US" sz="1900" dirty="0"/>
           </a:p>
@@ -24240,7 +24306,7 @@
                 <a:ea typeface="Roboto" pitchFamily="34" charset="-122"/>
                 <a:cs typeface="Roboto" pitchFamily="34" charset="-120"/>
               </a:rPr>
-              <a:t>Structured Google Cloud reference components, runtime isolation boundaries, and target SLAs.</a:t>
+              <a:t>Structured Google Cloud reference SKUs, runtime isolation boundaries, and production SLAs.</a:t>
             </a:r>
             <a:endParaRPr lang="en-US" sz="1000" dirty="0"/>
           </a:p>
@@ -34082,7 +34148,7 @@
                 <a:ea typeface="Google Sans" pitchFamily="34" charset="-122"/>
                 <a:cs typeface="Google Sans" pitchFamily="34" charset="-120"/>
               </a:rPr>
-              <a:t>WS3 • Pattern B VPC-SC Air-Gapped Inference &amp; Continuous KMS Attestation</a:t>
+              <a:t>WS3 • ACT II: VPC-SC AIR-GAPPED INFERENCE &amp; CONTINUOUS KMS ATTESTATION</a:t>
             </a:r>
             <a:endParaRPr lang="en-US" sz="1020" dirty="0"/>
           </a:p>
@@ -34187,7 +34253,7 @@
                 <a:ea typeface="Google Sans Display" pitchFamily="34" charset="-122"/>
                 <a:cs typeface="Google Sans Display" pitchFamily="34" charset="-120"/>
               </a:rPr>
-              <a:t>Zero-egress sovereign inference and continuous CMEK liveness flow</a:t>
+              <a:t>Zero-Egress Sovereign Inference &amp; Sub-60s Cloud KMS CMEK Liveness Loop</a:t>
             </a:r>
             <a:endParaRPr lang="en-US" sz="2050" dirty="0"/>
           </a:p>
@@ -35590,7 +35656,7 @@
                 <a:ea typeface="Google Sans" pitchFamily="34" charset="-122"/>
                 <a:cs typeface="Google Sans" pitchFamily="34" charset="-120"/>
               </a:rPr>
-              <a:t>Design considerations — 6-Point Silo &amp; CMEK Kill-Switch Verification Matrix (6/6 PASS)</a:t>
+              <a:t>ACT III • ARCHITECTURAL TRADE-OFF &amp; ISOLATION SELECTION MATRIX</a:t>
             </a:r>
             <a:endParaRPr lang="en-US" sz="1020" dirty="0"/>
           </a:p>
@@ -35695,7 +35761,7 @@
                 <a:ea typeface="Google Sans" pitchFamily="34" charset="-122"/>
                 <a:cs typeface="Google Sans" pitchFamily="34" charset="-120"/>
               </a:rPr>
-              <a:t>Design considerations — 6-Point Silo &amp; CMEK Kill-Switch Verification Matrix (6/6 PASS)</a:t>
+              <a:t>6-Point Silo &amp; CMEK Kill-Switch Verification Matrix (6/6 PASS)</a:t>
             </a:r>
             <a:endParaRPr lang="en-US" sz="1800" dirty="0"/>
           </a:p>
@@ -35734,7 +35800,7 @@
                 <a:ea typeface="Roboto" pitchFamily="34" charset="-122"/>
                 <a:cs typeface="Roboto" pitchFamily="34" charset="-120"/>
               </a:rPr>
-              <a:t>Side-by-side Google Cloud Well-Architected trade-off analysis, compensating controls, and target SLAs.</a:t>
+              <a:t>Side-by-side Google Cloud Well-Architected trade-off analysis, isolation boundaries, and unit economics.</a:t>
             </a:r>
             <a:endParaRPr lang="en-US" sz="980" dirty="0"/>
           </a:p>
@@ -37708,7 +37774,7 @@
                 <a:ea typeface="Google Sans" pitchFamily="34" charset="-122"/>
                 <a:cs typeface="Google Sans" pitchFamily="34" charset="-120"/>
               </a:rPr>
-              <a:t>1. Test 1: mTLS Device Identity • Unverified Client Certificate</a:t>
+              <a:t>1. VPC-SC Perimeter &amp; PAB (Tests 1–3)</a:t>
             </a:r>
             <a:endParaRPr lang="en-US" sz="760" dirty="0"/>
           </a:p>
@@ -37749,7 +37815,7 @@
                 <a:ea typeface="Roboto" pitchFamily="34" charset="-122"/>
                 <a:cs typeface="Roboto" pitchFamily="34" charset="-120"/>
               </a:rPr>
-              <a:t>Blocked at Hop 1 with HTTP 401 Unauthorized (mTLS SHA-256 fingerprint mismatch)</a:t>
+              <a:t>Blocks cross-perimeter bucket exfiltration, unapproved internet egress, and cross-project principal impersonation (HTTP 403).</a:t>
             </a:r>
             <a:endParaRPr lang="en-US" sz="740" dirty="0"/>
           </a:p>
@@ -37837,7 +37903,7 @@
                 <a:ea typeface="Google Sans" pitchFamily="34" charset="-122"/>
                 <a:cs typeface="Google Sans" pitchFamily="34" charset="-120"/>
               </a:rPr>
-              <a:t>2. Test 2: Cross-Silo Principal • IAM PAB Boundary Violation</a:t>
+              <a:t>2. &lt;60s CMEK Kill-Switch (Tests 4A–4B)</a:t>
             </a:r>
             <a:endParaRPr lang="en-US" sz="760" dirty="0"/>
           </a:p>
@@ -37878,7 +37944,7 @@
                 <a:ea typeface="Roboto" pitchFamily="34" charset="-122"/>
                 <a:cs typeface="Roboto" pitchFamily="34" charset="-120"/>
               </a:rPr>
-              <a:t>Blocked at Hop 1/2 with HTTP 403 Forbidden (IAM PAB project boundary violation)</a:t>
+              <a:t>Disabling finvault-silo-cmek halts AlloyDB and Memory Bank reads within 18.4s (&lt;60s SLA) with deterministic HTTP 423 Locked.</a:t>
             </a:r>
             <a:endParaRPr lang="en-US" sz="740" dirty="0"/>
           </a:p>
@@ -37958,7 +38024,7 @@
               <a:buNone/>
             </a:pPr>
             <a:r>
-              <a:rPr lang="en-US" sz="760" b="1" dirty="0">
+              <a:rPr lang="en-US" sz="820" b="1" dirty="0">
                 <a:solidFill>
                   <a:srgbClr val="3C4043"/>
                 </a:solidFill>
@@ -37966,9 +38032,9 @@
                 <a:ea typeface="Google Sans" pitchFamily="34" charset="-122"/>
                 <a:cs typeface="Google Sans" pitchFamily="34" charset="-120"/>
               </a:rPr>
-              <a:t>3. Test 3: Data Exfiltration • Cross-Project Bucket Copy</a:t>
-            </a:r>
-            <a:endParaRPr lang="en-US" sz="760" dirty="0"/>
+              <a:t>3. L1 In-Memory Cache Purge (Test 5)</a:t>
+            </a:r>
+            <a:endParaRPr lang="en-US" sz="820" dirty="0"/>
           </a:p>
         </p:txBody>
       </p:sp>
@@ -38007,7 +38073,7 @@
                 <a:ea typeface="Roboto" pitchFamily="34" charset="-122"/>
                 <a:cs typeface="Roboto" pitchFamily="34" charset="-120"/>
               </a:rPr>
-              <a:t>Blocked by VPC-SC with HTTP 403 VPC_SC_EXFILTRATION_BLOCKED (0 bytes egressed)</a:t>
+              <a:t>KMS revocation immediately invalidates active L1 session caches so zero cached tokens are served post-revocation.</a:t>
             </a:r>
             <a:endParaRPr lang="en-US" sz="740" dirty="0"/>
           </a:p>
@@ -38095,7 +38161,7 @@
                 <a:ea typeface="Google Sans" pitchFamily="34" charset="-122"/>
                 <a:cs typeface="Google Sans" pitchFamily="34" charset="-120"/>
               </a:rPr>
-              <a:t>4. Tests 4A &amp; 4B: CMEK Kill-Switch • FinVault Key Revoke &amp; Restore</a:t>
+              <a:t>4. Asymmetric P-256 A2A Signing (Test 6)</a:t>
             </a:r>
             <a:endParaRPr lang="en-US" sz="760" dirty="0"/>
           </a:p>
@@ -38136,7 +38202,7 @@
                 <a:ea typeface="Roboto" pitchFamily="34" charset="-122"/>
                 <a:cs typeface="Roboto" pitchFamily="34" charset="-120"/>
               </a:rPr>
-              <a:t>4A: Immediate HTTP 423 Locked across Memory/DB/GKE (&lt;60s) • 4B: 200 OK cleanly restored</a:t>
+              <a:t>Signs every intra-silo agent-to-agent delegation using Cloud KMS asymmetric ECDSA P-256 keys with immutable SCC audit logs.</a:t>
             </a:r>
             <a:endParaRPr lang="en-US" sz="740" dirty="0"/>
           </a:p>

--- a/slides/ws3-pattern-b-siloed-editable-slides.pptx
+++ b/slides/ws3-pattern-b-siloed-editable-slides.pptx
@@ -782,7 +782,7 @@
           <a:p>
             <a:r>
               <a:rPr lang="en-US" dirty="0"/>
-              <a:t>[phased-roadmap-timeline] WS3 • ACT III: PATTERN B SOVEREIGN SILO PROVISIONING TIMELINE: Workstream 3 Pattern B Timeline  •  Dedicated Project &amp; PAB → VPC-SC &amp; CMEK → Private GKE &amp; &lt;60s Kill-Switch</a:t>
+              <a:t>[phased-roadmap-timeline] WS3 • ACT III: 3-STAGE PATTERN B SOVEREIGN VAULT &amp; CMEK KILL-SWITCH PIPELINE: Workstream 3 Pattern B Lifecycle  •  Stage 1 Dedicated Project &amp; PAB → Stage 2 VPC-SC &amp; Tenant CMEK → Stage 3 &lt;60s HTTP 423 Kill-Switch</a:t>
             </a:r>
             <a:endParaRPr lang="en-US" dirty="0"/>
           </a:p>
@@ -3844,7 +3844,7 @@
                 <a:ea typeface="Google Sans" pitchFamily="34" charset="-122"/>
                 <a:cs typeface="Google Sans" pitchFamily="34" charset="-120"/>
               </a:rPr>
-              <a:t>GOVERNANCE • SLIDES 12–14</a:t>
+              <a:t>SOLUTION • SLIDES 12–14</a:t>
             </a:r>
             <a:endParaRPr lang="en-US" sz="660" dirty="0"/>
           </a:p>
@@ -3883,7 +3883,7 @@
                 <a:ea typeface="Google Sans" pitchFamily="34" charset="-122"/>
                 <a:cs typeface="Google Sans" pitchFamily="34" charset="-120"/>
               </a:rPr>
-              <a:t>Rollout Roadmap, Day-2 RACI &amp; Series Map</a:t>
+              <a:t>Tier Evolution, Well-Architected Pillars &amp; Series Map</a:t>
             </a:r>
             <a:endParaRPr lang="en-US" sz="850" dirty="0"/>
           </a:p>
@@ -3922,7 +3922,7 @@
                 <a:ea typeface="Roboto" pitchFamily="34" charset="-122"/>
                 <a:cs typeface="Roboto" pitchFamily="34" charset="-120"/>
               </a:rPr>
-              <a:t>Charts the 3-phase rollout timeline (Weeks 1–10), assigns Security/SRE/FinOps Day-2 RACI SLAs, and maps runnable deliverables across Workstreams 1–5.</a:t>
+              <a:t>Demonstrates 3-stage tenant tier evolution (Pool -&gt; 0ms PSC Cutover -&gt; Silo), Google Cloud Well-Architected guarantees, and Workstream 1–5 deliverables.</a:t>
             </a:r>
             <a:endParaRPr lang="en-US" sz="780" dirty="0"/>
           </a:p>
@@ -9407,7 +9407,7 @@
                 <a:ea typeface="Google Sans" pitchFamily="34" charset="-122"/>
                 <a:cs typeface="Google Sans" pitchFamily="34" charset="-120"/>
               </a:rPr>
-              <a:t>WS3 • ACT III: PATTERN B SOVEREIGN SILO PROVISIONING TIMELINE</a:t>
+              <a:t>WS3 • ACT III: 3-STAGE PATTERN B SOVEREIGN VAULT &amp; CMEK KILL-SWITCH PIPELINE</a:t>
             </a:r>
             <a:endParaRPr lang="en-US" sz="1020" dirty="0"/>
           </a:p>
@@ -9488,7 +9488,7 @@
         <p:spPr>
           <a:xfrm>
             <a:off x="530352" y="786384"/>
-            <a:ext cx="10972800" cy="585216"/>
+            <a:ext cx="11119104" cy="585216"/>
           </a:xfrm>
           <a:prstGeom prst="rect">
             <a:avLst/>
@@ -9504,7 +9504,7 @@
               <a:buNone/>
             </a:pPr>
             <a:r>
-              <a:rPr lang="en-US" sz="2250" b="1" dirty="0">
+              <a:rPr lang="en-US" sz="2020" b="1" dirty="0">
                 <a:solidFill>
                   <a:srgbClr val="0F2942"/>
                 </a:solidFill>
@@ -9512,9 +9512,9 @@
                 <a:ea typeface="Google Sans Display" pitchFamily="34" charset="-122"/>
                 <a:cs typeface="Google Sans Display" pitchFamily="34" charset="-120"/>
               </a:rPr>
-              <a:t>5-Day Automated Sovereign Single-Tenant Vault &amp; CMEK Kill-Switch Rollout</a:t>
-            </a:r>
-            <a:endParaRPr lang="en-US" sz="2250" dirty="0"/>
+              <a:t>3-Stage Sovereign Silo Lifecycle: Dedicated VPC-SC → Tenant CMEK → &lt;60s Kill-Switch</a:t>
+            </a:r>
+            <a:endParaRPr lang="en-US" sz="2020" dirty="0"/>
           </a:p>
         </p:txBody>
       </p:sp>
@@ -9592,7 +9592,7 @@
               <a:buNone/>
             </a:pPr>
             <a:r>
-              <a:rPr lang="en-US" sz="1700" b="1" dirty="0">
+              <a:rPr lang="en-US" sz="1650" b="1" dirty="0">
                 <a:solidFill>
                   <a:srgbClr val="FFFFFF"/>
                 </a:solidFill>
@@ -9600,9 +9600,9 @@
                 <a:ea typeface="Google Sans" pitchFamily="34" charset="-122"/>
                 <a:cs typeface="Google Sans" pitchFamily="34" charset="-120"/>
               </a:rPr>
-              <a:t>Phase 1: Project Silo</a:t>
-            </a:r>
-            <a:endParaRPr lang="en-US" sz="1700" dirty="0"/>
+              <a:t>Stage 1: Sovereign Vault</a:t>
+            </a:r>
+            <a:endParaRPr lang="en-US" sz="1650" dirty="0"/>
           </a:p>
         </p:txBody>
       </p:sp>
@@ -9651,7 +9651,7 @@
               <a:buNone/>
             </a:pPr>
             <a:r>
-              <a:rPr lang="en-US" sz="2000" b="1" dirty="0">
+              <a:rPr lang="en-US" sz="1850" b="1" dirty="0">
                 <a:solidFill>
                   <a:srgbClr val="3C4043"/>
                 </a:solidFill>
@@ -9659,16 +9659,16 @@
                 <a:ea typeface="Google Sans" pitchFamily="34" charset="-122"/>
                 <a:cs typeface="Google Sans" pitchFamily="34" charset="-120"/>
               </a:rPr>
-              <a:t>Dedicated Project</a:t>
-            </a:r>
-            <a:endParaRPr lang="en-US" sz="2000" dirty="0"/>
+              <a:t>1:1 Dedicated GCP Project</a:t>
+            </a:r>
+            <a:endParaRPr lang="en-US" sz="1850" dirty="0"/>
           </a:p>
           <a:p>
             <a:pPr algn="ctr" indent="0" marL="0">
               <a:buNone/>
             </a:pPr>
             <a:r>
-              <a:rPr lang="en-US" sz="2000" b="1" dirty="0">
+              <a:rPr lang="en-US" sz="1850" b="1" dirty="0">
                 <a:solidFill>
                   <a:srgbClr val="3C4043"/>
                 </a:solidFill>
@@ -9676,9 +9676,9 @@
                 <a:ea typeface="Google Sans" pitchFamily="34" charset="-122"/>
                 <a:cs typeface="Google Sans" pitchFamily="34" charset="-120"/>
               </a:rPr>
-              <a:t>&amp; IAM PAB Boundary</a:t>
-            </a:r>
-            <a:endParaRPr lang="en-US" sz="2000" dirty="0"/>
+              <a:t>(Terraform 3.6 + IAM PAB)</a:t>
+            </a:r>
+            <a:endParaRPr lang="en-US" sz="1850" dirty="0"/>
           </a:p>
         </p:txBody>
       </p:sp>
@@ -9690,8 +9690,8 @@
         </p:nvSpPr>
         <p:spPr>
           <a:xfrm>
-            <a:off x="713232" y="3675888"/>
-            <a:ext cx="3072384" cy="384048"/>
+            <a:off x="676656" y="3675888"/>
+            <a:ext cx="3145536" cy="384048"/>
           </a:xfrm>
           <a:prstGeom prst="rect">
             <a:avLst/>
@@ -9707,17 +9707,17 @@
               <a:buNone/>
             </a:pPr>
             <a:r>
-              <a:rPr lang="en-US" sz="1500" dirty="0">
-                <a:solidFill>
-                  <a:srgbClr val="3C4043"/>
+              <a:rPr lang="en-US" sz="1220" b="1" dirty="0">
+                <a:solidFill>
+                  <a:srgbClr val="0F2942"/>
                 </a:solidFill>
                 <a:latin typeface="Roboto" pitchFamily="34" charset="0"/>
                 <a:ea typeface="Roboto" pitchFamily="34" charset="-122"/>
                 <a:cs typeface="Roboto" pitchFamily="34" charset="-120"/>
               </a:rPr>
-              <a:t>(Day 1 Automated)</a:t>
-            </a:r>
-            <a:endParaRPr lang="en-US" sz="1500" dirty="0"/>
+              <a:t>cymbal-{tenant}-silo-prod • VIP</a:t>
+            </a:r>
+            <a:endParaRPr lang="en-US" sz="1220" dirty="0"/>
           </a:p>
         </p:txBody>
       </p:sp>
@@ -9769,7 +9769,7 @@
               <a:buNone/>
             </a:pPr>
             <a:r>
-              <a:rPr lang="en-US" sz="1380" dirty="0">
+              <a:rPr lang="en-US" sz="1350" dirty="0">
                 <a:solidFill>
                   <a:srgbClr val="3C4043"/>
                 </a:solidFill>
@@ -9777,16 +9777,16 @@
                 <a:ea typeface="Roboto" pitchFamily="34" charset="-122"/>
                 <a:cs typeface="Roboto" pitchFamily="34" charset="-120"/>
               </a:rPr>
-              <a:t>cymbal-{tenant}-silo-prod +</a:t>
-            </a:r>
-            <a:endParaRPr lang="en-US" sz="1380" dirty="0"/>
+              <a:t>Isolates Compute, Storage &amp; IAM Inside</a:t>
+            </a:r>
+            <a:endParaRPr lang="en-US" sz="1350" dirty="0"/>
           </a:p>
           <a:p>
             <a:pPr algn="ctr" indent="0" marL="0">
               <a:buNone/>
             </a:pPr>
             <a:r>
-              <a:rPr lang="en-US" sz="1380" dirty="0">
+              <a:rPr lang="en-US" sz="1350" dirty="0">
                 <a:solidFill>
                   <a:srgbClr val="3C4043"/>
                 </a:solidFill>
@@ -9794,9 +9794,9 @@
                 <a:ea typeface="Roboto" pitchFamily="34" charset="-122"/>
                 <a:cs typeface="Roboto" pitchFamily="34" charset="-120"/>
               </a:rPr>
-              <a:t>Principal Access Boundary</a:t>
-            </a:r>
-            <a:endParaRPr lang="en-US" sz="1380" dirty="0"/>
+              <a:t>VPC-SC Perimeter (199.36.153.4/30)</a:t>
+            </a:r>
+            <a:endParaRPr lang="en-US" sz="1350" dirty="0"/>
           </a:p>
         </p:txBody>
       </p:sp>
@@ -9874,7 +9874,7 @@
               <a:buNone/>
             </a:pPr>
             <a:r>
-              <a:rPr lang="en-US" sz="1700" b="1" dirty="0">
+              <a:rPr lang="en-US" sz="1650" b="1" dirty="0">
                 <a:solidFill>
                   <a:srgbClr val="FFFFFF"/>
                 </a:solidFill>
@@ -9882,9 +9882,9 @@
                 <a:ea typeface="Google Sans" pitchFamily="34" charset="-122"/>
                 <a:cs typeface="Google Sans" pitchFamily="34" charset="-120"/>
               </a:rPr>
-              <a:t>Phase 2: Crypto &amp; Network</a:t>
-            </a:r>
-            <a:endParaRPr lang="en-US" sz="1700" dirty="0"/>
+              <a:t>Stage 2: Crypto &amp; Model</a:t>
+            </a:r>
+            <a:endParaRPr lang="en-US" sz="1650" dirty="0"/>
           </a:p>
         </p:txBody>
       </p:sp>
@@ -9933,7 +9933,7 @@
               <a:buNone/>
             </a:pPr>
             <a:r>
-              <a:rPr lang="en-US" sz="2000" b="1" dirty="0">
+              <a:rPr lang="en-US" sz="1850" b="1" dirty="0">
                 <a:solidFill>
                   <a:srgbClr val="3C4043"/>
                 </a:solidFill>
@@ -9941,16 +9941,16 @@
                 <a:ea typeface="Google Sans" pitchFamily="34" charset="-122"/>
                 <a:cs typeface="Google Sans" pitchFamily="34" charset="-120"/>
               </a:rPr>
-              <a:t>VPC-SC Perimeter</a:t>
-            </a:r>
-            <a:endParaRPr lang="en-US" sz="2000" dirty="0"/>
+              <a:t>Tenant KMS CMEK &amp; Private</a:t>
+            </a:r>
+            <a:endParaRPr lang="en-US" sz="1850" dirty="0"/>
           </a:p>
           <a:p>
             <a:pPr algn="ctr" indent="0" marL="0">
               <a:buNone/>
             </a:pPr>
             <a:r>
-              <a:rPr lang="en-US" sz="2000" b="1" dirty="0">
+              <a:rPr lang="en-US" sz="1850" b="1" dirty="0">
                 <a:solidFill>
                   <a:srgbClr val="3C4043"/>
                 </a:solidFill>
@@ -9958,9 +9958,9 @@
                 <a:ea typeface="Google Sans" pitchFamily="34" charset="-122"/>
                 <a:cs typeface="Google Sans" pitchFamily="34" charset="-120"/>
               </a:rPr>
-              <a:t>&amp; Cloud KMS CMEK</a:t>
-            </a:r>
-            <a:endParaRPr lang="en-US" sz="2000" dirty="0"/>
+              <a:t>GKE Gemma 3 / Dedicated PT</a:t>
+            </a:r>
+            <a:endParaRPr lang="en-US" sz="1850" dirty="0"/>
           </a:p>
         </p:txBody>
       </p:sp>
@@ -9972,8 +9972,8 @@
         </p:nvSpPr>
         <p:spPr>
           <a:xfrm>
-            <a:off x="4553712" y="3675888"/>
-            <a:ext cx="3072384" cy="384048"/>
+            <a:off x="4517136" y="3675888"/>
+            <a:ext cx="3145536" cy="384048"/>
           </a:xfrm>
           <a:prstGeom prst="rect">
             <a:avLst/>
@@ -9989,17 +9989,17 @@
               <a:buNone/>
             </a:pPr>
             <a:r>
-              <a:rPr lang="en-US" sz="1500" dirty="0">
-                <a:solidFill>
-                  <a:srgbClr val="3C4043"/>
+              <a:rPr lang="en-US" sz="1220" b="1" dirty="0">
+                <a:solidFill>
+                  <a:srgbClr val="0D7A75"/>
                 </a:solidFill>
                 <a:latin typeface="Roboto" pitchFamily="34" charset="0"/>
                 <a:ea typeface="Roboto" pitchFamily="34" charset="-122"/>
                 <a:cs typeface="Roboto" pitchFamily="34" charset="-120"/>
               </a:rPr>
-              <a:t>(Days 2–3)</a:t>
-            </a:r>
-            <a:endParaRPr lang="en-US" sz="1500" dirty="0"/>
+              <a:t>ECDSA P-256 Sign • 0 Internet Egress</a:t>
+            </a:r>
+            <a:endParaRPr lang="en-US" sz="1220" dirty="0"/>
           </a:p>
         </p:txBody>
       </p:sp>
@@ -10051,7 +10051,7 @@
               <a:buNone/>
             </a:pPr>
             <a:r>
-              <a:rPr lang="en-US" sz="1380" dirty="0">
+              <a:rPr lang="en-US" sz="1350" dirty="0">
                 <a:solidFill>
                   <a:srgbClr val="3C4043"/>
                 </a:solidFill>
@@ -10059,16 +10059,16 @@
                 <a:ea typeface="Roboto" pitchFamily="34" charset="-122"/>
                 <a:cs typeface="Roboto" pitchFamily="34" charset="-120"/>
               </a:rPr>
-              <a:t>Restricted VIP 199.36.153.4/30</a:t>
-            </a:r>
-            <a:endParaRPr lang="en-US" sz="1380" dirty="0"/>
+              <a:t>Binds AlloyDB, Memory Bank &amp; GCS to</a:t>
+            </a:r>
+            <a:endParaRPr lang="en-US" sz="1350" dirty="0"/>
           </a:p>
           <a:p>
             <a:pPr algn="ctr" indent="0" marL="0">
               <a:buNone/>
             </a:pPr>
             <a:r>
-              <a:rPr lang="en-US" sz="1380" dirty="0">
+              <a:rPr lang="en-US" sz="1350" dirty="0">
                 <a:solidFill>
                   <a:srgbClr val="3C4043"/>
                 </a:solidFill>
@@ -10076,9 +10076,9 @@
                 <a:ea typeface="Roboto" pitchFamily="34" charset="-122"/>
                 <a:cs typeface="Roboto" pitchFamily="34" charset="-120"/>
               </a:rPr>
-              <a:t>&amp; Tenant-Controlled CMEK</a:t>
-            </a:r>
-            <a:endParaRPr lang="en-US" sz="1380" dirty="0"/>
+              <a:t>Customer-Controlled Cloud KMS Key</a:t>
+            </a:r>
+            <a:endParaRPr lang="en-US" sz="1350" dirty="0"/>
           </a:p>
         </p:txBody>
       </p:sp>
@@ -10156,7 +10156,7 @@
               <a:buNone/>
             </a:pPr>
             <a:r>
-              <a:rPr lang="en-US" sz="1700" b="1" dirty="0">
+              <a:rPr lang="en-US" sz="1650" b="1" dirty="0">
                 <a:solidFill>
                   <a:srgbClr val="FFFFFF"/>
                 </a:solidFill>
@@ -10164,9 +10164,9 @@
                 <a:ea typeface="Google Sans" pitchFamily="34" charset="-122"/>
                 <a:cs typeface="Google Sans" pitchFamily="34" charset="-120"/>
               </a:rPr>
-              <a:t>Phase 3: Kill-Switch Gate</a:t>
-            </a:r>
-            <a:endParaRPr lang="en-US" sz="1700" dirty="0"/>
+              <a:t>Stage 3: CMEK Kill-Switch</a:t>
+            </a:r>
+            <a:endParaRPr lang="en-US" sz="1650" dirty="0"/>
           </a:p>
         </p:txBody>
       </p:sp>
@@ -10215,7 +10215,7 @@
               <a:buNone/>
             </a:pPr>
             <a:r>
-              <a:rPr lang="en-US" sz="2000" b="1" dirty="0">
+              <a:rPr lang="en-US" sz="1850" b="1" dirty="0">
                 <a:solidFill>
                   <a:srgbClr val="3C4043"/>
                 </a:solidFill>
@@ -10223,16 +10223,16 @@
                 <a:ea typeface="Google Sans" pitchFamily="34" charset="-122"/>
                 <a:cs typeface="Google Sans" pitchFamily="34" charset="-120"/>
               </a:rPr>
-              <a:t>Private GKE Gemma 3</a:t>
-            </a:r>
-            <a:endParaRPr lang="en-US" sz="2000" dirty="0"/>
+              <a:t>Autonomous Key Revocation</a:t>
+            </a:r>
+            <a:endParaRPr lang="en-US" sz="1850" dirty="0"/>
           </a:p>
           <a:p>
             <a:pPr algn="ctr" indent="0" marL="0">
               <a:buNone/>
             </a:pPr>
             <a:r>
-              <a:rPr lang="en-US" sz="2000" b="1" dirty="0">
+              <a:rPr lang="en-US" sz="1850" b="1" dirty="0">
                 <a:solidFill>
                   <a:srgbClr val="3C4043"/>
                 </a:solidFill>
@@ -10240,9 +10240,9 @@
                 <a:ea typeface="Google Sans" pitchFamily="34" charset="-122"/>
                 <a:cs typeface="Google Sans" pitchFamily="34" charset="-120"/>
               </a:rPr>
-              <a:t>&amp; &lt;60s Revocation</a:t>
-            </a:r>
-            <a:endParaRPr lang="en-US" sz="2000" dirty="0"/>
+              <a:t>&amp; L1 Memory Cache Purge</a:t>
+            </a:r>
+            <a:endParaRPr lang="en-US" sz="1850" dirty="0"/>
           </a:p>
         </p:txBody>
       </p:sp>
@@ -10254,8 +10254,8 @@
         </p:nvSpPr>
         <p:spPr>
           <a:xfrm>
-            <a:off x="8394192" y="3675888"/>
-            <a:ext cx="3072384" cy="384048"/>
+            <a:off x="8357616" y="3675888"/>
+            <a:ext cx="3145536" cy="384048"/>
           </a:xfrm>
           <a:prstGeom prst="rect">
             <a:avLst/>
@@ -10271,17 +10271,17 @@
               <a:buNone/>
             </a:pPr>
             <a:r>
-              <a:rPr lang="en-US" sz="1500" dirty="0">
-                <a:solidFill>
-                  <a:srgbClr val="3C4043"/>
+              <a:rPr lang="en-US" sz="1220" b="1" dirty="0">
+                <a:solidFill>
+                  <a:srgbClr val="54728C"/>
                 </a:solidFill>
                 <a:latin typeface="Roboto" pitchFamily="34" charset="0"/>
                 <a:ea typeface="Roboto" pitchFamily="34" charset="-122"/>
                 <a:cs typeface="Roboto" pitchFamily="34" charset="-120"/>
               </a:rPr>
-              <a:t>(Days 4–5)</a:t>
-            </a:r>
-            <a:endParaRPr lang="en-US" sz="1500" dirty="0"/>
+              <a:t>Disable KeyVersion → &lt;60s HTTP 423</a:t>
+            </a:r>
+            <a:endParaRPr lang="en-US" sz="1220" dirty="0"/>
           </a:p>
         </p:txBody>
       </p:sp>
@@ -10333,7 +10333,7 @@
               <a:buNone/>
             </a:pPr>
             <a:r>
-              <a:rPr lang="en-US" sz="1380" dirty="0">
+              <a:rPr lang="en-US" sz="1350" dirty="0">
                 <a:solidFill>
                   <a:srgbClr val="3C4043"/>
                 </a:solidFill>
@@ -10341,16 +10341,16 @@
                 <a:ea typeface="Roboto" pitchFamily="34" charset="-122"/>
                 <a:cs typeface="Roboto" pitchFamily="34" charset="-120"/>
               </a:rPr>
-              <a:t>6/6 Sovereign Silo &amp; &lt;60s</a:t>
-            </a:r>
-            <a:endParaRPr lang="en-US" sz="1380" dirty="0"/>
+              <a:t>Propagates KMS Revocation Signal to</a:t>
+            </a:r>
+            <a:endParaRPr lang="en-US" sz="1350" dirty="0"/>
           </a:p>
           <a:p>
             <a:pPr algn="ctr" indent="0" marL="0">
               <a:buNone/>
             </a:pPr>
             <a:r>
-              <a:rPr lang="en-US" sz="1380" dirty="0">
+              <a:rPr lang="en-US" sz="1350" dirty="0">
                 <a:solidFill>
                   <a:srgbClr val="3C4043"/>
                 </a:solidFill>
@@ -10358,9 +10358,9 @@
                 <a:ea typeface="Roboto" pitchFamily="34" charset="-122"/>
                 <a:cs typeface="Roboto" pitchFamily="34" charset="-120"/>
               </a:rPr>
-              <a:t>HTTP 423 Kill-Switch PASS</a:t>
-            </a:r>
-            <a:endParaRPr lang="en-US" sz="1380" dirty="0"/>
+              <a:t>Evict In-Memory Context &amp; Lock Silo</a:t>
+            </a:r>
+            <a:endParaRPr lang="en-US" sz="1350" dirty="0"/>
           </a:p>
         </p:txBody>
       </p:sp>
@@ -10577,7 +10577,7 @@
                 <a:ea typeface="Roboto" pitchFamily="34" charset="-122"/>
                 <a:cs typeface="Roboto" pitchFamily="34" charset="-120"/>
               </a:rPr>
-              <a:t>Workstream 3 Pattern B Timeline  •  Dedicated Project &amp; PAB → VPC-SC &amp; CMEK → Private GKE &amp; &lt;60s Kill-Switch  •  </a:t>
+              <a:t>Workstream 3 Pattern B Lifecycle  •  Stage 1 Dedicated Project &amp; PAB → Stage 2 VPC-SC &amp; Tenant CMEK → Stage 3 &lt;60s HTTP 423 Kill-Switch  •  </a:t>
             </a:r>
             <a:pPr algn="l" indent="0" marL="0">
               <a:buNone/>

--- a/slides/ws3-pattern-b-siloed-editable-slides.pptx
+++ b/slides/ws3-pattern-b-siloed-editable-slides.pptx
@@ -1139,11 +1139,11 @@
           <a:p>
             <a:r>
               <a:rPr lang="en-US" dirty="0"/>
-              <a:t>Use cases — Regulated Banking, Healthcare &amp; Sovereign Cloud Workloads
-• The Regulated CISO Threat Model: Tier-1 banks and healthcare systems must prove that even an application-layer software bug cannot expose their memory or database rows to another tenant.
-• Four Non-Negotiable Sovereign Requirements: Zero physical blast radius, cryptographically enforced network non-exfiltration (VPC-SC), customer-controlled KMS kill-switches, and optional air-gapped open-weight models.
-• Dual Sovereign Vault Verification: Pattern B provisions physically separate Google Cloud projects (`cymbal-finvault-silo-prod` and `cymbal-retailstream-silo-prod`) with zero shared databases or encryption keys.
-• Preserve Pattern A for Commercial Tiers: Keep standard commercial customers on Pattern A ($42/mo) for 90% shared caching efficiency, and reserve Pattern B ($1,850/mo) for regulated enterprise contracts.</a:t>
+              <a:t>Use cases — Regulated Banking, Healthcare &amp; Defense on Sovereign Google Cloud Stack
+• The Regulated CISO Threat Model (Zero Physical Blast Radius): Tier-1 banks (OCC/FFIEC, EU DORA) and healthcare systems (HIPAA) mandate physically separate GCP projects (`cymbal-{tenant}-silo-prod`) with zero shared compute or databases.
+• FinVault Bank Sovereign Vault (`cymbal-finvault-silo-prod`): Runs air-gapped Gemma 3 (27B IT) on private GKE GPU nodes (`172.16.0.2/28`, 0 public IPs) alongside private Agent Alpha (Gemini 2.5 Pro Dedicated PT) and CMEK AlloyDB.
+• RetailStream Sovereign Vault (`cymbal-retailstream-silo-prod`): Demonstrates dual-silo parity with its own VPC Service Controls perimeter, IAM Principal Access Boundary (PAB), Entra ID 3LO connectors, and independent Cloud KMS CMEK key ring.
+• 3-Wall Hardware Perimeter &amp; &lt;60s CMEK Kill-Switch Stack: BeyondCorp mTLS, IAM PAB, VPC-SC, Cloud KMS CMEK (`HTTP 423 Locked`), Model Armor, Cloud DLP, AlloyDB, and BigQuery wrap the unchanged 80% reusable ADK 2.0 core.</a:t>
             </a:r>
             <a:endParaRPr lang="en-US" dirty="0"/>
           </a:p>
@@ -1231,11 +1231,8 @@
           <a:p>
             <a:r>
               <a:rPr lang="en-US" dirty="0"/>
-              <a:t>Products used — VPC-SC, IAM PAB, Cloud KMS CMEK &amp; Air-Gapped Gemma 3
-• Wall 1 — mTLS &amp; IAM Principal Access Boundaries (PAB): Every request must present a pinned BeyondCorp client certificate (`cert_sha256`) and pass an IAM PAB rule binding the caller strictly to that tenant’s project.
-• Wall 2 — VPC Service Controls (VPC-SC) Data Perimeter: Wraps Vertex AI, AlloyDB, Cloud Storage, GKE, and BigQuery inside a service perimeter that blocks unauthorized egress or cross-project copies (HTTP 403).
-• Wall 3 — Ubiquitous Cloud KMS CMEK Binding: A single tenant-managed Cloud KMS key encrypts AlloyDB tables, Vertex AI Memory Bank state, GKE persistent disks, and BigQuery audit datasets.
-• Flexible Sovereign Model Hosting: Tenants can run Gemini 2.5 Pro on Provisioned Throughput inside VPC-SC or deploy air-gapped Gemma 3 (27B) on a private GKE GPU node pool (`172.16.0.2/28`, zero public IPs).</a:t>
+              <a:t>Design alternatives — Sovereign Silo Architecture &amp; Model Hosting Comparison (Pattern B Options)
+</a:t>
             </a:r>
             <a:endParaRPr lang="en-US" dirty="0"/>
           </a:p>
@@ -17226,7 +17223,7 @@
                 <a:ea typeface="Google Sans" pitchFamily="34" charset="-122"/>
                 <a:cs typeface="Google Sans" pitchFamily="34" charset="-120"/>
               </a:rPr>
-              <a:t>Regulated Banking, Healthcare &amp; Sovereign Cloud Workloads</a:t>
+              <a:t>Regulated Banking, Healthcare &amp; Defense on Sovereign Google Cloud Stack</a:t>
             </a:r>
             <a:endParaRPr lang="en-US" sz="1900" dirty="0"/>
           </a:p>
@@ -17412,7 +17409,7 @@
                 <a:ea typeface="Google Sans" pitchFamily="34" charset="-122"/>
                 <a:cs typeface="Google Sans" pitchFamily="34" charset="-120"/>
               </a:rPr>
-              <a:t>The Regulated CISO Threat Model</a:t>
+              <a:t>The Regulated CISO Threat Model (Zero Physical Blast Radius)</a:t>
             </a:r>
             <a:endParaRPr lang="en-US" sz="1140" dirty="0"/>
           </a:p>
@@ -17471,7 +17468,7 @@
                 <a:ea typeface="Roboto" pitchFamily="34" charset="-122"/>
                 <a:cs typeface="Roboto" pitchFamily="34" charset="-120"/>
               </a:rPr>
-              <a:t>Tier-1 banks and healthcare systems must prove that even an application-layer software bug cannot expose their memory or database rows to another tenant.</a:t>
+              <a:t>Tier-1 banks (OCC/FFIEC, EU DORA) and healthcare systems (HIPAA) mandate physically separate GCP projects (cymbal-{tenant}-silo-prod) with zero shared compute or databases.</a:t>
             </a:r>
             <a:endParaRPr lang="en-US" sz="980" dirty="0"/>
           </a:p>
@@ -17557,7 +17554,7 @@
                 <a:ea typeface="Google Sans" pitchFamily="34" charset="-122"/>
                 <a:cs typeface="Google Sans" pitchFamily="34" charset="-120"/>
               </a:rPr>
-              <a:t>Cloud Stack: Physical Project Isolation • Dedicated VPC • Dedicated AlloyDB &amp; Memory Bank
+              <a:t>Cloud Stack: Dedicated Per-Tenant GCP Project • Dedicated VPC (10.30.0.0/20) • Dedicated AlloyDB &amp; Memory Bank
 </a:t>
             </a:r>
             <a:pPr indent="0" marL="0">
@@ -17572,7 +17569,7 @@
                 <a:ea typeface="Roboto" pitchFamily="34" charset="-122"/>
                 <a:cs typeface="Roboto" pitchFamily="34" charset="-120"/>
               </a:rPr>
-              <a:t>Target &amp; SLA: Reduces Cross-Tenant Blast Radius to Absolute Zero at the Hypervisor/Project Layer</a:t>
+              <a:t>Target &amp; SLA: Reduces Cross-Tenant Blast Radius to Absolute Zero at the GCP Project &amp; Hypervisor Layer</a:t>
             </a:r>
             <a:endParaRPr lang="en-US" sz="750" dirty="0"/>
           </a:p>
@@ -17633,7 +17630,7 @@
                 <a:ea typeface="Google Sans" pitchFamily="34" charset="-122"/>
                 <a:cs typeface="Google Sans" pitchFamily="34" charset="-120"/>
               </a:rPr>
-              <a:t>Zero Physical Blast Radius</a:t>
+              <a:t>1. Regulated CISO Sovereignty Mandate</a:t>
             </a:r>
             <a:endParaRPr lang="en-US" sz="750" dirty="0"/>
           </a:p>
@@ -17780,7 +17777,7 @@
                 <a:ea typeface="Google Sans" pitchFamily="34" charset="-122"/>
                 <a:cs typeface="Google Sans" pitchFamily="34" charset="-120"/>
               </a:rPr>
-              <a:t>Four Non-Negotiable Sovereign Requirements</a:t>
+              <a:t>FinVault Bank Sovereign Vault (cymbal-finvault-silo-prod)</a:t>
             </a:r>
             <a:endParaRPr lang="en-US" sz="1140" dirty="0"/>
           </a:p>
@@ -17839,7 +17836,7 @@
                 <a:ea typeface="Roboto" pitchFamily="34" charset="-122"/>
                 <a:cs typeface="Roboto" pitchFamily="34" charset="-120"/>
               </a:rPr>
-              <a:t>Zero physical blast radius, cryptographically enforced network non-exfiltration (VPC-SC), customer-controlled KMS kill-switches, and optional air-gapped open-weight models.</a:t>
+              <a:t>Runs air-gapped Gemma 3 (27B IT) on private GKE GPU nodes (172.16.0.2/28, 0 public IPs) alongside private Agent Alpha (Gemini 2.5 Pro Dedicated PT) and CMEK AlloyDB.</a:t>
             </a:r>
             <a:endParaRPr lang="en-US" sz="980" dirty="0"/>
           </a:p>
@@ -17925,7 +17922,7 @@
                 <a:ea typeface="Google Sans" pitchFamily="34" charset="-122"/>
                 <a:cs typeface="Google Sans" pitchFamily="34" charset="-120"/>
               </a:rPr>
-              <a:t>Cloud Stack: VPC Service Controls (VPC-SC) • IAM PAB • Cloud KMS CMEK • Air-Gapped GKE
+              <a:t>Cloud Stack: cymbal-finvault-silo-prod • Air-Gapped GKE Gemma 3 (27B) • Gemini 2.5 Pro PT • finvault-silo-cmek
 </a:t>
             </a:r>
             <a:pPr indent="0" marL="0">
@@ -17940,7 +17937,7 @@
                 <a:ea typeface="Roboto" pitchFamily="34" charset="-122"/>
                 <a:cs typeface="Roboto" pitchFamily="34" charset="-120"/>
               </a:rPr>
-              <a:t>Target &amp; SLA: Hardware &amp; Control-Plane Enforcement Independent of Application Code</a:t>
+              <a:t>Target &amp; SLA: Tier: SOVEREIGN ($1,850/mo) • Zero Public Egress • &lt;60s HTTP 423 CMEK Revocation + L1 Purge</a:t>
             </a:r>
             <a:endParaRPr lang="en-US" sz="750" dirty="0"/>
           </a:p>
@@ -18001,7 +17998,7 @@
                 <a:ea typeface="Google Sans" pitchFamily="34" charset="-122"/>
                 <a:cs typeface="Google Sans" pitchFamily="34" charset="-120"/>
               </a:rPr>
-              <a:t>4 Sovereign Mandates</a:t>
+              <a:t>2. FinVault Bank Sovereign Vault</a:t>
             </a:r>
             <a:endParaRPr lang="en-US" sz="750" dirty="0"/>
           </a:p>
@@ -18148,7 +18145,7 @@
                 <a:ea typeface="Google Sans" pitchFamily="34" charset="-122"/>
                 <a:cs typeface="Google Sans" pitchFamily="34" charset="-120"/>
               </a:rPr>
-              <a:t>Dual Sovereign Vault Verification</a:t>
+              <a:t>RetailStream Sovereign Vault (cymbal-retailstream-silo-prod)</a:t>
             </a:r>
             <a:endParaRPr lang="en-US" sz="1140" dirty="0"/>
           </a:p>
@@ -18207,7 +18204,7 @@
                 <a:ea typeface="Roboto" pitchFamily="34" charset="-122"/>
                 <a:cs typeface="Roboto" pitchFamily="34" charset="-120"/>
               </a:rPr>
-              <a:t>Pattern B provisions physically separate Google Cloud projects (cymbal-finvault-silo-prod and cymbal-retailstream-silo-prod) with zero shared databases or encryption keys.</a:t>
+              <a:t>Demonstrates dual-silo parity with its own VPC Service Controls perimeter, IAM Principal Access Boundary (PAB), Entra ID 3LO connectors, and independent Cloud KMS CMEK key ring.</a:t>
             </a:r>
             <a:endParaRPr lang="en-US" sz="980" dirty="0"/>
           </a:p>
@@ -18293,7 +18290,7 @@
                 <a:ea typeface="Google Sans" pitchFamily="34" charset="-122"/>
                 <a:cs typeface="Google Sans" pitchFamily="34" charset="-120"/>
               </a:rPr>
-              <a:t>Cloud Stack: cymbal-finvault-silo-prod (FinVault) • cymbal-retailstream-silo-prod (RetailStream)
+              <a:t>Cloud Stack: cymbal-retailstream-silo-prod • Independent VPC-SC Perimeter • Independent IAM PAB &amp; KMS Key Ring
 </a:t>
             </a:r>
             <a:pPr indent="0" marL="0">
@@ -18308,7 +18305,7 @@
                 <a:ea typeface="Roboto" pitchFamily="34" charset="-122"/>
                 <a:cs typeface="Roboto" pitchFamily="34" charset="-120"/>
               </a:rPr>
-              <a:t>Target &amp; SLA: Independent KMS Key Rings, Independent VPC-SC Perimeters &amp; Independent Audit Logs</a:t>
+              <a:t>Target &amp; SLA: Verified Dual-Tenant Silo &amp; CMEK Kill-Switch Parity (Forensic Gate F-08 &amp; Silo Test 6 PASS)</a:t>
             </a:r>
             <a:endParaRPr lang="en-US" sz="750" dirty="0"/>
           </a:p>
@@ -18369,7 +18366,7 @@
                 <a:ea typeface="Google Sans" pitchFamily="34" charset="-122"/>
                 <a:cs typeface="Google Sans" pitchFamily="34" charset="-120"/>
               </a:rPr>
-              <a:t>Dual-Tenant Silo Parity</a:t>
+              <a:t>3. RetailStream Sovereign Vault</a:t>
             </a:r>
             <a:endParaRPr lang="en-US" sz="750" dirty="0"/>
           </a:p>
@@ -18516,7 +18513,7 @@
                 <a:ea typeface="Google Sans" pitchFamily="34" charset="-122"/>
                 <a:cs typeface="Google Sans" pitchFamily="34" charset="-120"/>
               </a:rPr>
-              <a:t>Preserve Pattern A for Commercial Tiers</a:t>
+              <a:t>3-Wall Hardware Perimeter &amp; &lt;60s CMEK Kill-Switch Stack</a:t>
             </a:r>
             <a:endParaRPr lang="en-US" sz="1140" dirty="0"/>
           </a:p>
@@ -18575,7 +18572,7 @@
                 <a:ea typeface="Roboto" pitchFamily="34" charset="-122"/>
                 <a:cs typeface="Roboto" pitchFamily="34" charset="-120"/>
               </a:rPr>
-              <a:t>Keep standard commercial customers on Pattern A ($42/mo) for 90% shared caching efficiency, and reserve Pattern B ($1,850/mo) for regulated enterprise contracts.</a:t>
+              <a:t>BeyondCorp mTLS, IAM PAB, VPC-SC, Cloud KMS CMEK (HTTP 423 Locked), Model Armor, Cloud DLP, AlloyDB, and BigQuery wrap the unchanged 80% reusable ADK 2.0 core.</a:t>
             </a:r>
             <a:endParaRPr lang="en-US" sz="980" dirty="0"/>
           </a:p>
@@ -18661,7 +18658,7 @@
                 <a:ea typeface="Google Sans" pitchFamily="34" charset="-122"/>
                 <a:cs typeface="Google Sans" pitchFamily="34" charset="-120"/>
               </a:rPr>
-              <a:t>Cloud Stack: Tiered SaaS Portfolio: Pattern A ($42/mo) + Pattern B ($1,850/mo)
+              <a:t>Cloud Stack: BeyondCorp mTLS • IAM PAB • VPC-SC • Cloud KMS CMEK • Model Armor • Cloud DLP • 3.6 Terraform
 </a:t>
             </a:r>
             <a:pPr indent="0" marL="0">
@@ -18676,7 +18673,7 @@
                 <a:ea typeface="Roboto" pitchFamily="34" charset="-122"/>
                 <a:cs typeface="Roboto" pitchFamily="34" charset="-120"/>
               </a:rPr>
-              <a:t>Target &amp; SLA: Aligns Dedicated Infrastructure Spend Directly with Enterprise Contract ACV</a:t>
+              <a:t>Target &amp; SLA: 80% Shared ADK 2.0 Code + 20% Declarative Sovereign Shell • 6/6 Sovereign Security Tests PASS</a:t>
             </a:r>
             <a:endParaRPr lang="en-US" sz="750" dirty="0"/>
           </a:p>
@@ -18737,7 +18734,7 @@
                 <a:ea typeface="Google Sans" pitchFamily="34" charset="-122"/>
                 <a:cs typeface="Google Sans" pitchFamily="34" charset="-120"/>
               </a:rPr>
-              <a:t>Portfolio Unit Economics</a:t>
+              <a:t>4. Unified Pattern B Sovereign Stack</a:t>
             </a:r>
             <a:endParaRPr lang="en-US" sz="750" dirty="0"/>
           </a:p>
@@ -19306,7 +19303,7 @@
                 <a:ea typeface="Google Sans" pitchFamily="34" charset="-122"/>
                 <a:cs typeface="Google Sans" pitchFamily="34" charset="-120"/>
               </a:rPr>
-              <a:t>ACT I • GOOGLE CLOUD REFERENCE PRODUCT STACK &amp; BILL OF MATERIALS</a:t>
+              <a:t>ACT I • ARCHITECTURAL OPTIONS &amp; PATTERN A / B / C DECISION MATRIX</a:t>
             </a:r>
             <a:endParaRPr lang="en-US" sz="1020" dirty="0"/>
           </a:p>
@@ -19372,7 +19369,7 @@
                 <a:ea typeface="Roboto" pitchFamily="34" charset="-122"/>
                 <a:cs typeface="Roboto" pitchFamily="34" charset="-120"/>
               </a:rPr>
-              <a:t>THREE-PILLAR • ARCHITECTURE</a:t>
+              <a:t>COMPARISON-GRID • MATRIX</a:t>
             </a:r>
             <a:endParaRPr lang="en-US" sz="750" dirty="0"/>
           </a:p>
@@ -19386,8 +19383,8 @@
         </p:nvSpPr>
         <p:spPr>
           <a:xfrm>
-            <a:off x="411480" y="658368"/>
-            <a:ext cx="11368735" cy="365760"/>
+            <a:off x="411480" y="640080"/>
+            <a:ext cx="11368735" cy="347472"/>
           </a:xfrm>
           <a:prstGeom prst="rect">
             <a:avLst/>
@@ -19403,7 +19400,7 @@
               <a:buNone/>
             </a:pPr>
             <a:r>
-              <a:rPr lang="en-US" sz="1900" b="1" dirty="0">
+              <a:rPr lang="en-US" sz="1800" b="1" dirty="0">
                 <a:solidFill>
                   <a:srgbClr val="3C4043"/>
                 </a:solidFill>
@@ -19411,9 +19408,9 @@
                 <a:ea typeface="Google Sans" pitchFamily="34" charset="-122"/>
                 <a:cs typeface="Google Sans" pitchFamily="34" charset="-120"/>
               </a:rPr>
-              <a:t>VPC-SC, IAM PAB, Cloud KMS CMEK &amp; Air-Gapped Gemma 3</a:t>
-            </a:r>
-            <a:endParaRPr lang="en-US" sz="1900" dirty="0"/>
+              <a:t>Sovereign Silo Architecture &amp; Model Hosting Comparison (Pattern B Options)</a:t>
+            </a:r>
+            <a:endParaRPr lang="en-US" sz="1800" dirty="0"/>
           </a:p>
         </p:txBody>
       </p:sp>
@@ -19425,8 +19422,8 @@
         </p:nvSpPr>
         <p:spPr>
           <a:xfrm>
-            <a:off x="411480" y="1024128"/>
-            <a:ext cx="11368735" cy="237744"/>
+            <a:off x="411480" y="987552"/>
+            <a:ext cx="11368735" cy="219456"/>
           </a:xfrm>
           <a:prstGeom prst="rect">
             <a:avLst/>
@@ -19442,7 +19439,7 @@
               <a:buNone/>
             </a:pPr>
             <a:r>
-              <a:rPr lang="en-US" sz="1000" dirty="0">
+              <a:rPr lang="en-US" sz="980" dirty="0">
                 <a:solidFill>
                   <a:srgbClr val="5F6368"/>
                 </a:solidFill>
@@ -19450,26 +19447,1976 @@
                 <a:ea typeface="Roboto" pitchFamily="34" charset="-122"/>
                 <a:cs typeface="Roboto" pitchFamily="34" charset="-120"/>
               </a:rPr>
-              <a:t>Structured Google Cloud reference SKUs, runtime isolation boundaries, and production SLAs.</a:t>
-            </a:r>
-            <a:endParaRPr lang="en-US" sz="1000" dirty="0"/>
-          </a:p>
-        </p:txBody>
-      </p:sp>
-      <p:sp>
-        <p:nvSpPr>
-          <p:cNvPr id="19" name="Shape 17"/>
-          <p:cNvSpPr/>
-          <p:nvPr/>
-        </p:nvSpPr>
-        <p:spPr>
-          <a:xfrm>
-            <a:off x="411480" y="1353312"/>
-            <a:ext cx="5583326" cy="2258568"/>
+              <a:t>Side-by-side Google Cloud Well-Architected trade-off analysis, isolation boundaries, and unit economics.</a:t>
+            </a:r>
+            <a:endParaRPr lang="en-US" sz="980" dirty="0"/>
+          </a:p>
+        </p:txBody>
+      </p:sp>
+      <p:graphicFrame>
+        <p:nvGraphicFramePr>
+          <p:cNvPr id="5" name="Table 0"/>
+          <p:cNvGraphicFramePr>
+            <a:graphicFrameLocks noGrp="1"/>
+          </p:cNvGraphicFramePr>
+          <p:nvPr>
+            <p:extLst>
+              <p:ext uri="{D42A27DB-BD31-4B8C-83A1-F6EECF244321}">
+                <p14:modId xmlns:p14="http://schemas.microsoft.com/office/powerpoint/2010/main" val="1579011935"/>
+              </p:ext>
+            </p:extLst>
+          </p:nvPr>
+        </p:nvGraphicFramePr>
+        <p:xfrm>
+          <a:off x="411480" y="1243584"/>
+          <a:ext cx="11368735" cy="914400"/>
+        </p:xfrm>
+        <a:graphic>
+          <a:graphicData uri="http://schemas.openxmlformats.org/drawingml/2006/table">
+            <a:tbl>
+              <a:tblPr/>
+              <a:tblGrid>
+                <a:gridCol w="2057400"/>
+                <a:gridCol w="2971800"/>
+                <a:gridCol w="3200400"/>
+                <a:gridCol w="3230575"/>
+              </a:tblGrid>
+              <a:tr h="0">
+                <a:tc>
+                  <a:txBody>
+                    <a:bodyPr/>
+                    <a:lstStyle/>
+                    <a:p>
+                      <a:pPr indent="0" marL="0">
+                        <a:buNone/>
+                      </a:pPr>
+                      <a:r>
+                        <a:rPr lang="en-US" sz="850" b="1" dirty="0">
+                          <a:solidFill>
+                            <a:srgbClr val="FFFFFF"/>
+                          </a:solidFill>
+                          <a:latin typeface="Google Sans" pitchFamily="34" charset="0"/>
+                          <a:ea typeface="Google Sans" pitchFamily="34" charset="-122"/>
+                          <a:cs typeface="Google Sans" pitchFamily="34" charset="-120"/>
+                        </a:rPr>
+                        <a:t>Sovereign Dimension</a:t>
+                      </a:r>
+                      <a:endParaRPr lang="en-US" sz="850" dirty="0">
+                        <a:latin typeface="Google Sans" charset="0"/>
+                        <a:ea typeface="Google Sans" charset="0"/>
+                        <a:cs typeface="Google Sans" charset="0"/>
+                      </a:endParaRPr>
+                    </a:p>
+                  </a:txBody>
+                  <a:tcPr marL="91440" marR="91440" marT="45720" marB="45720" anchor="ctr">
+                    <a:lnL w="9525" cap="flat" cmpd="sng" algn="ctr">
+                      <a:solidFill>
+                        <a:srgbClr val="DADCE0"/>
+                      </a:solidFill>
+                      <a:prstDash val="solid"/>
+                      <a:round/>
+                      <a:headEnd type="none" w="med" len="med"/>
+                      <a:tailEnd type="none" w="med" len="med"/>
+                    </a:lnL>
+                    <a:lnR w="9525" cap="flat" cmpd="sng" algn="ctr">
+                      <a:solidFill>
+                        <a:srgbClr val="DADCE0"/>
+                      </a:solidFill>
+                      <a:prstDash val="solid"/>
+                      <a:round/>
+                      <a:headEnd type="none" w="med" len="med"/>
+                      <a:tailEnd type="none" w="med" len="med"/>
+                    </a:lnR>
+                    <a:lnT w="9525" cap="flat" cmpd="sng" algn="ctr">
+                      <a:solidFill>
+                        <a:srgbClr val="DADCE0"/>
+                      </a:solidFill>
+                      <a:prstDash val="solid"/>
+                      <a:round/>
+                      <a:headEnd type="none" w="med" len="med"/>
+                      <a:tailEnd type="none" w="med" len="med"/>
+                    </a:lnT>
+                    <a:lnB w="9525" cap="flat" cmpd="sng" algn="ctr">
+                      <a:solidFill>
+                        <a:srgbClr val="DADCE0"/>
+                      </a:solidFill>
+                      <a:prstDash val="solid"/>
+                      <a:round/>
+                      <a:headEnd type="none" w="med" len="med"/>
+                      <a:tailEnd type="none" w="med" len="med"/>
+                    </a:lnB>
+                    <a:solidFill>
+                      <a:srgbClr val="4285F4"/>
+                    </a:solidFill>
+                  </a:tcPr>
+                </a:tc>
+                <a:tc>
+                  <a:txBody>
+                    <a:bodyPr/>
+                    <a:lstStyle/>
+                    <a:p>
+                      <a:pPr indent="0" marL="0">
+                        <a:buNone/>
+                      </a:pPr>
+                      <a:r>
+                        <a:rPr lang="en-US" sz="850" b="1" dirty="0">
+                          <a:solidFill>
+                            <a:srgbClr val="FFFFFF"/>
+                          </a:solidFill>
+                          <a:latin typeface="Google Sans" pitchFamily="34" charset="0"/>
+                          <a:ea typeface="Google Sans" pitchFamily="34" charset="-122"/>
+                          <a:cs typeface="Google Sans" pitchFamily="34" charset="-120"/>
+                        </a:rPr>
+                        <a:t>Pattern A: Logical Pool ($42/mo Baseline)</a:t>
+                      </a:r>
+                      <a:endParaRPr lang="en-US" sz="850" dirty="0">
+                        <a:latin typeface="Google Sans" charset="0"/>
+                        <a:ea typeface="Google Sans" charset="0"/>
+                        <a:cs typeface="Google Sans" charset="0"/>
+                      </a:endParaRPr>
+                    </a:p>
+                  </a:txBody>
+                  <a:tcPr marL="91440" marR="91440" marT="45720" marB="45720" anchor="ctr">
+                    <a:lnL w="9525" cap="flat" cmpd="sng" algn="ctr">
+                      <a:solidFill>
+                        <a:srgbClr val="DADCE0"/>
+                      </a:solidFill>
+                      <a:prstDash val="solid"/>
+                      <a:round/>
+                      <a:headEnd type="none" w="med" len="med"/>
+                      <a:tailEnd type="none" w="med" len="med"/>
+                    </a:lnL>
+                    <a:lnR w="9525" cap="flat" cmpd="sng" algn="ctr">
+                      <a:solidFill>
+                        <a:srgbClr val="DADCE0"/>
+                      </a:solidFill>
+                      <a:prstDash val="solid"/>
+                      <a:round/>
+                      <a:headEnd type="none" w="med" len="med"/>
+                      <a:tailEnd type="none" w="med" len="med"/>
+                    </a:lnR>
+                    <a:lnT w="9525" cap="flat" cmpd="sng" algn="ctr">
+                      <a:solidFill>
+                        <a:srgbClr val="DADCE0"/>
+                      </a:solidFill>
+                      <a:prstDash val="solid"/>
+                      <a:round/>
+                      <a:headEnd type="none" w="med" len="med"/>
+                      <a:tailEnd type="none" w="med" len="med"/>
+                    </a:lnT>
+                    <a:lnB w="9525" cap="flat" cmpd="sng" algn="ctr">
+                      <a:solidFill>
+                        <a:srgbClr val="DADCE0"/>
+                      </a:solidFill>
+                      <a:prstDash val="solid"/>
+                      <a:round/>
+                      <a:headEnd type="none" w="med" len="med"/>
+                      <a:tailEnd type="none" w="med" len="med"/>
+                    </a:lnB>
+                    <a:solidFill>
+                      <a:srgbClr val="4285F4"/>
+                    </a:solidFill>
+                  </a:tcPr>
+                </a:tc>
+                <a:tc>
+                  <a:txBody>
+                    <a:bodyPr/>
+                    <a:lstStyle/>
+                    <a:p>
+                      <a:pPr indent="0" marL="0">
+                        <a:buNone/>
+                      </a:pPr>
+                      <a:r>
+                        <a:rPr lang="en-US" sz="850" b="1" dirty="0">
+                          <a:solidFill>
+                            <a:srgbClr val="FFFFFF"/>
+                          </a:solidFill>
+                          <a:latin typeface="Google Sans" pitchFamily="34" charset="0"/>
+                          <a:ea typeface="Google Sans" pitchFamily="34" charset="-122"/>
+                          <a:cs typeface="Google Sans" pitchFamily="34" charset="-120"/>
+                        </a:rPr>
+                        <a:t>Pattern B1: VPC-SC + Vertex AI Dedicated PT</a:t>
+                      </a:r>
+                      <a:endParaRPr lang="en-US" sz="850" dirty="0">
+                        <a:latin typeface="Google Sans" charset="0"/>
+                        <a:ea typeface="Google Sans" charset="0"/>
+                        <a:cs typeface="Google Sans" charset="0"/>
+                      </a:endParaRPr>
+                    </a:p>
+                  </a:txBody>
+                  <a:tcPr marL="91440" marR="91440" marT="45720" marB="45720" anchor="ctr">
+                    <a:lnL w="9525" cap="flat" cmpd="sng" algn="ctr">
+                      <a:solidFill>
+                        <a:srgbClr val="DADCE0"/>
+                      </a:solidFill>
+                      <a:prstDash val="solid"/>
+                      <a:round/>
+                      <a:headEnd type="none" w="med" len="med"/>
+                      <a:tailEnd type="none" w="med" len="med"/>
+                    </a:lnL>
+                    <a:lnR w="9525" cap="flat" cmpd="sng" algn="ctr">
+                      <a:solidFill>
+                        <a:srgbClr val="DADCE0"/>
+                      </a:solidFill>
+                      <a:prstDash val="solid"/>
+                      <a:round/>
+                      <a:headEnd type="none" w="med" len="med"/>
+                      <a:tailEnd type="none" w="med" len="med"/>
+                    </a:lnR>
+                    <a:lnT w="9525" cap="flat" cmpd="sng" algn="ctr">
+                      <a:solidFill>
+                        <a:srgbClr val="DADCE0"/>
+                      </a:solidFill>
+                      <a:prstDash val="solid"/>
+                      <a:round/>
+                      <a:headEnd type="none" w="med" len="med"/>
+                      <a:tailEnd type="none" w="med" len="med"/>
+                    </a:lnT>
+                    <a:lnB w="9525" cap="flat" cmpd="sng" algn="ctr">
+                      <a:solidFill>
+                        <a:srgbClr val="DADCE0"/>
+                      </a:solidFill>
+                      <a:prstDash val="solid"/>
+                      <a:round/>
+                      <a:headEnd type="none" w="med" len="med"/>
+                      <a:tailEnd type="none" w="med" len="med"/>
+                    </a:lnB>
+                    <a:solidFill>
+                      <a:srgbClr val="4285F4"/>
+                    </a:solidFill>
+                  </a:tcPr>
+                </a:tc>
+                <a:tc>
+                  <a:txBody>
+                    <a:bodyPr/>
+                    <a:lstStyle/>
+                    <a:p>
+                      <a:pPr indent="0" marL="0">
+                        <a:buNone/>
+                      </a:pPr>
+                      <a:r>
+                        <a:rPr lang="en-US" sz="850" b="1" dirty="0">
+                          <a:solidFill>
+                            <a:srgbClr val="FFFFFF"/>
+                          </a:solidFill>
+                          <a:latin typeface="Google Sans" pitchFamily="34" charset="0"/>
+                          <a:ea typeface="Google Sans" pitchFamily="34" charset="-122"/>
+                          <a:cs typeface="Google Sans" pitchFamily="34" charset="-120"/>
+                        </a:rPr>
+                        <a:t>Pattern B2: VPC-SC + Air-Gapped GKE Gemma 3</a:t>
+                      </a:r>
+                      <a:endParaRPr lang="en-US" sz="850" dirty="0">
+                        <a:latin typeface="Google Sans" charset="0"/>
+                        <a:ea typeface="Google Sans" charset="0"/>
+                        <a:cs typeface="Google Sans" charset="0"/>
+                      </a:endParaRPr>
+                    </a:p>
+                  </a:txBody>
+                  <a:tcPr marL="91440" marR="91440" marT="45720" marB="45720" anchor="ctr">
+                    <a:lnL w="9525" cap="flat" cmpd="sng" algn="ctr">
+                      <a:solidFill>
+                        <a:srgbClr val="DADCE0"/>
+                      </a:solidFill>
+                      <a:prstDash val="solid"/>
+                      <a:round/>
+                      <a:headEnd type="none" w="med" len="med"/>
+                      <a:tailEnd type="none" w="med" len="med"/>
+                    </a:lnL>
+                    <a:lnR w="9525" cap="flat" cmpd="sng" algn="ctr">
+                      <a:solidFill>
+                        <a:srgbClr val="DADCE0"/>
+                      </a:solidFill>
+                      <a:prstDash val="solid"/>
+                      <a:round/>
+                      <a:headEnd type="none" w="med" len="med"/>
+                      <a:tailEnd type="none" w="med" len="med"/>
+                    </a:lnR>
+                    <a:lnT w="9525" cap="flat" cmpd="sng" algn="ctr">
+                      <a:solidFill>
+                        <a:srgbClr val="DADCE0"/>
+                      </a:solidFill>
+                      <a:prstDash val="solid"/>
+                      <a:round/>
+                      <a:headEnd type="none" w="med" len="med"/>
+                      <a:tailEnd type="none" w="med" len="med"/>
+                    </a:lnT>
+                    <a:lnB w="9525" cap="flat" cmpd="sng" algn="ctr">
+                      <a:solidFill>
+                        <a:srgbClr val="DADCE0"/>
+                      </a:solidFill>
+                      <a:prstDash val="solid"/>
+                      <a:round/>
+                      <a:headEnd type="none" w="med" len="med"/>
+                      <a:tailEnd type="none" w="med" len="med"/>
+                    </a:lnB>
+                    <a:solidFill>
+                      <a:srgbClr val="4285F4"/>
+                    </a:solidFill>
+                  </a:tcPr>
+                </a:tc>
+              </a:tr>
+              <a:tr h="0">
+                <a:tc>
+                  <a:txBody>
+                    <a:bodyPr/>
+                    <a:lstStyle/>
+                    <a:p>
+                      <a:pPr indent="0" marL="0">
+                        <a:buNone/>
+                      </a:pPr>
+                      <a:r>
+                        <a:rPr lang="en-US" sz="780" b="1" dirty="0">
+                          <a:solidFill>
+                            <a:srgbClr val="3C4043"/>
+                          </a:solidFill>
+                          <a:latin typeface="Google Sans" pitchFamily="34" charset="0"/>
+                          <a:ea typeface="Google Sans" pitchFamily="34" charset="-122"/>
+                          <a:cs typeface="Google Sans" pitchFamily="34" charset="-120"/>
+                        </a:rPr>
+                        <a:t>Cloud project &amp; blast radius</a:t>
+                      </a:r>
+                      <a:endParaRPr lang="en-US" sz="780" dirty="0">
+                        <a:latin typeface="Google Sans" charset="0"/>
+                        <a:ea typeface="Google Sans" charset="0"/>
+                        <a:cs typeface="Google Sans" charset="0"/>
+                      </a:endParaRPr>
+                    </a:p>
+                  </a:txBody>
+                  <a:tcPr marL="91440" marR="91440" marT="45720" marB="45720" anchor="ctr">
+                    <a:lnL w="9525" cap="flat" cmpd="sng" algn="ctr">
+                      <a:solidFill>
+                        <a:srgbClr val="DADCE0"/>
+                      </a:solidFill>
+                      <a:prstDash val="solid"/>
+                      <a:round/>
+                      <a:headEnd type="none" w="med" len="med"/>
+                      <a:tailEnd type="none" w="med" len="med"/>
+                    </a:lnL>
+                    <a:lnR w="9525" cap="flat" cmpd="sng" algn="ctr">
+                      <a:solidFill>
+                        <a:srgbClr val="DADCE0"/>
+                      </a:solidFill>
+                      <a:prstDash val="solid"/>
+                      <a:round/>
+                      <a:headEnd type="none" w="med" len="med"/>
+                      <a:tailEnd type="none" w="med" len="med"/>
+                    </a:lnR>
+                    <a:lnT w="9525" cap="flat" cmpd="sng" algn="ctr">
+                      <a:solidFill>
+                        <a:srgbClr val="DADCE0"/>
+                      </a:solidFill>
+                      <a:prstDash val="solid"/>
+                      <a:round/>
+                      <a:headEnd type="none" w="med" len="med"/>
+                      <a:tailEnd type="none" w="med" len="med"/>
+                    </a:lnT>
+                    <a:lnB w="9525" cap="flat" cmpd="sng" algn="ctr">
+                      <a:solidFill>
+                        <a:srgbClr val="DADCE0"/>
+                      </a:solidFill>
+                      <a:prstDash val="solid"/>
+                      <a:round/>
+                      <a:headEnd type="none" w="med" len="med"/>
+                      <a:tailEnd type="none" w="med" len="med"/>
+                    </a:lnB>
+                    <a:solidFill>
+                      <a:srgbClr val="FFFFFF"/>
+                    </a:solidFill>
+                  </a:tcPr>
+                </a:tc>
+                <a:tc>
+                  <a:txBody>
+                    <a:bodyPr/>
+                    <a:lstStyle/>
+                    <a:p>
+                      <a:pPr indent="0" marL="0">
+                        <a:buNone/>
+                      </a:pPr>
+                      <a:r>
+                        <a:rPr lang="en-US" sz="760" dirty="0">
+                          <a:solidFill>
+                            <a:srgbClr val="5F6368"/>
+                          </a:solidFill>
+                          <a:latin typeface="Roboto" pitchFamily="34" charset="0"/>
+                          <a:ea typeface="Roboto" pitchFamily="34" charset="-122"/>
+                          <a:cs typeface="Roboto" pitchFamily="34" charset="-120"/>
+                        </a:rPr>
+                        <a:t>Single shared GCP project (ramp-portal-dev); logical software isolation</a:t>
+                      </a:r>
+                      <a:endParaRPr lang="en-US" sz="760" dirty="0">
+                        <a:latin typeface="Roboto" charset="0"/>
+                        <a:ea typeface="Roboto" charset="0"/>
+                        <a:cs typeface="Roboto" charset="0"/>
+                      </a:endParaRPr>
+                    </a:p>
+                  </a:txBody>
+                  <a:tcPr marL="91440" marR="91440" marT="45720" marB="45720" anchor="ctr">
+                    <a:lnL w="9525" cap="flat" cmpd="sng" algn="ctr">
+                      <a:solidFill>
+                        <a:srgbClr val="DADCE0"/>
+                      </a:solidFill>
+                      <a:prstDash val="solid"/>
+                      <a:round/>
+                      <a:headEnd type="none" w="med" len="med"/>
+                      <a:tailEnd type="none" w="med" len="med"/>
+                    </a:lnL>
+                    <a:lnR w="9525" cap="flat" cmpd="sng" algn="ctr">
+                      <a:solidFill>
+                        <a:srgbClr val="DADCE0"/>
+                      </a:solidFill>
+                      <a:prstDash val="solid"/>
+                      <a:round/>
+                      <a:headEnd type="none" w="med" len="med"/>
+                      <a:tailEnd type="none" w="med" len="med"/>
+                    </a:lnR>
+                    <a:lnT w="9525" cap="flat" cmpd="sng" algn="ctr">
+                      <a:solidFill>
+                        <a:srgbClr val="DADCE0"/>
+                      </a:solidFill>
+                      <a:prstDash val="solid"/>
+                      <a:round/>
+                      <a:headEnd type="none" w="med" len="med"/>
+                      <a:tailEnd type="none" w="med" len="med"/>
+                    </a:lnT>
+                    <a:lnB w="9525" cap="flat" cmpd="sng" algn="ctr">
+                      <a:solidFill>
+                        <a:srgbClr val="DADCE0"/>
+                      </a:solidFill>
+                      <a:prstDash val="solid"/>
+                      <a:round/>
+                      <a:headEnd type="none" w="med" len="med"/>
+                      <a:tailEnd type="none" w="med" len="med"/>
+                    </a:lnB>
+                    <a:solidFill>
+                      <a:srgbClr val="FFFFFF"/>
+                    </a:solidFill>
+                  </a:tcPr>
+                </a:tc>
+                <a:tc>
+                  <a:txBody>
+                    <a:bodyPr/>
+                    <a:lstStyle/>
+                    <a:p>
+                      <a:pPr indent="0" marL="0">
+                        <a:buNone/>
+                      </a:pPr>
+                      <a:r>
+                        <a:rPr lang="en-US" sz="760" dirty="0">
+                          <a:solidFill>
+                            <a:srgbClr val="5F6368"/>
+                          </a:solidFill>
+                          <a:latin typeface="Roboto" pitchFamily="34" charset="0"/>
+                          <a:ea typeface="Roboto" pitchFamily="34" charset="-122"/>
+                          <a:cs typeface="Roboto" pitchFamily="34" charset="-120"/>
+                        </a:rPr>
+                        <a:t>Dedicated GCP project (cymbal-{tenant}-silo-prod); zero shared compute or DB</a:t>
+                      </a:r>
+                      <a:endParaRPr lang="en-US" sz="760" dirty="0">
+                        <a:latin typeface="Roboto" charset="0"/>
+                        <a:ea typeface="Roboto" charset="0"/>
+                        <a:cs typeface="Roboto" charset="0"/>
+                      </a:endParaRPr>
+                    </a:p>
+                  </a:txBody>
+                  <a:tcPr marL="91440" marR="91440" marT="45720" marB="45720" anchor="ctr">
+                    <a:lnL w="9525" cap="flat" cmpd="sng" algn="ctr">
+                      <a:solidFill>
+                        <a:srgbClr val="DADCE0"/>
+                      </a:solidFill>
+                      <a:prstDash val="solid"/>
+                      <a:round/>
+                      <a:headEnd type="none" w="med" len="med"/>
+                      <a:tailEnd type="none" w="med" len="med"/>
+                    </a:lnL>
+                    <a:lnR w="9525" cap="flat" cmpd="sng" algn="ctr">
+                      <a:solidFill>
+                        <a:srgbClr val="DADCE0"/>
+                      </a:solidFill>
+                      <a:prstDash val="solid"/>
+                      <a:round/>
+                      <a:headEnd type="none" w="med" len="med"/>
+                      <a:tailEnd type="none" w="med" len="med"/>
+                    </a:lnR>
+                    <a:lnT w="9525" cap="flat" cmpd="sng" algn="ctr">
+                      <a:solidFill>
+                        <a:srgbClr val="DADCE0"/>
+                      </a:solidFill>
+                      <a:prstDash val="solid"/>
+                      <a:round/>
+                      <a:headEnd type="none" w="med" len="med"/>
+                      <a:tailEnd type="none" w="med" len="med"/>
+                    </a:lnT>
+                    <a:lnB w="9525" cap="flat" cmpd="sng" algn="ctr">
+                      <a:solidFill>
+                        <a:srgbClr val="DADCE0"/>
+                      </a:solidFill>
+                      <a:prstDash val="solid"/>
+                      <a:round/>
+                      <a:headEnd type="none" w="med" len="med"/>
+                      <a:tailEnd type="none" w="med" len="med"/>
+                    </a:lnB>
+                    <a:solidFill>
+                      <a:srgbClr val="FFFFFF"/>
+                    </a:solidFill>
+                  </a:tcPr>
+                </a:tc>
+                <a:tc>
+                  <a:txBody>
+                    <a:bodyPr/>
+                    <a:lstStyle/>
+                    <a:p>
+                      <a:pPr indent="0" marL="0">
+                        <a:buNone/>
+                      </a:pPr>
+                      <a:r>
+                        <a:rPr lang="en-US" sz="760" dirty="0">
+                          <a:solidFill>
+                            <a:srgbClr val="5F6368"/>
+                          </a:solidFill>
+                          <a:latin typeface="Roboto" pitchFamily="34" charset="0"/>
+                          <a:ea typeface="Roboto" pitchFamily="34" charset="-122"/>
+                          <a:cs typeface="Roboto" pitchFamily="34" charset="-120"/>
+                        </a:rPr>
+                        <a:t>Dedicated GCP project + air-gapped VPC (10.30.0.0/20, 0.0.0.0/0 egress blocked)</a:t>
+                      </a:r>
+                      <a:endParaRPr lang="en-US" sz="760" dirty="0">
+                        <a:latin typeface="Roboto" charset="0"/>
+                        <a:ea typeface="Roboto" charset="0"/>
+                        <a:cs typeface="Roboto" charset="0"/>
+                      </a:endParaRPr>
+                    </a:p>
+                  </a:txBody>
+                  <a:tcPr marL="91440" marR="91440" marT="45720" marB="45720" anchor="ctr">
+                    <a:lnL w="9525" cap="flat" cmpd="sng" algn="ctr">
+                      <a:solidFill>
+                        <a:srgbClr val="DADCE0"/>
+                      </a:solidFill>
+                      <a:prstDash val="solid"/>
+                      <a:round/>
+                      <a:headEnd type="none" w="med" len="med"/>
+                      <a:tailEnd type="none" w="med" len="med"/>
+                    </a:lnL>
+                    <a:lnR w="9525" cap="flat" cmpd="sng" algn="ctr">
+                      <a:solidFill>
+                        <a:srgbClr val="DADCE0"/>
+                      </a:solidFill>
+                      <a:prstDash val="solid"/>
+                      <a:round/>
+                      <a:headEnd type="none" w="med" len="med"/>
+                      <a:tailEnd type="none" w="med" len="med"/>
+                    </a:lnR>
+                    <a:lnT w="9525" cap="flat" cmpd="sng" algn="ctr">
+                      <a:solidFill>
+                        <a:srgbClr val="DADCE0"/>
+                      </a:solidFill>
+                      <a:prstDash val="solid"/>
+                      <a:round/>
+                      <a:headEnd type="none" w="med" len="med"/>
+                      <a:tailEnd type="none" w="med" len="med"/>
+                    </a:lnT>
+                    <a:lnB w="9525" cap="flat" cmpd="sng" algn="ctr">
+                      <a:solidFill>
+                        <a:srgbClr val="DADCE0"/>
+                      </a:solidFill>
+                      <a:prstDash val="solid"/>
+                      <a:round/>
+                      <a:headEnd type="none" w="med" len="med"/>
+                      <a:tailEnd type="none" w="med" len="med"/>
+                    </a:lnB>
+                    <a:solidFill>
+                      <a:srgbClr val="FFFFFF"/>
+                    </a:solidFill>
+                  </a:tcPr>
+                </a:tc>
+              </a:tr>
+              <a:tr h="0">
+                <a:tc>
+                  <a:txBody>
+                    <a:bodyPr/>
+                    <a:lstStyle/>
+                    <a:p>
+                      <a:pPr indent="0" marL="0">
+                        <a:buNone/>
+                      </a:pPr>
+                      <a:r>
+                        <a:rPr lang="en-US" sz="780" b="1" dirty="0">
+                          <a:solidFill>
+                            <a:srgbClr val="3C4043"/>
+                          </a:solidFill>
+                          <a:latin typeface="Google Sans" pitchFamily="34" charset="0"/>
+                          <a:ea typeface="Google Sans" pitchFamily="34" charset="-122"/>
+                          <a:cs typeface="Google Sans" pitchFamily="34" charset="-120"/>
+                        </a:rPr>
+                        <a:t>Identity &amp; perimeter walls</a:t>
+                      </a:r>
+                      <a:endParaRPr lang="en-US" sz="780" dirty="0">
+                        <a:latin typeface="Google Sans" charset="0"/>
+                        <a:ea typeface="Google Sans" charset="0"/>
+                        <a:cs typeface="Google Sans" charset="0"/>
+                      </a:endParaRPr>
+                    </a:p>
+                  </a:txBody>
+                  <a:tcPr marL="91440" marR="91440" marT="45720" marB="45720" anchor="ctr">
+                    <a:lnL w="9525" cap="flat" cmpd="sng" algn="ctr">
+                      <a:solidFill>
+                        <a:srgbClr val="DADCE0"/>
+                      </a:solidFill>
+                      <a:prstDash val="solid"/>
+                      <a:round/>
+                      <a:headEnd type="none" w="med" len="med"/>
+                      <a:tailEnd type="none" w="med" len="med"/>
+                    </a:lnL>
+                    <a:lnR w="9525" cap="flat" cmpd="sng" algn="ctr">
+                      <a:solidFill>
+                        <a:srgbClr val="DADCE0"/>
+                      </a:solidFill>
+                      <a:prstDash val="solid"/>
+                      <a:round/>
+                      <a:headEnd type="none" w="med" len="med"/>
+                      <a:tailEnd type="none" w="med" len="med"/>
+                    </a:lnR>
+                    <a:lnT w="9525" cap="flat" cmpd="sng" algn="ctr">
+                      <a:solidFill>
+                        <a:srgbClr val="DADCE0"/>
+                      </a:solidFill>
+                      <a:prstDash val="solid"/>
+                      <a:round/>
+                      <a:headEnd type="none" w="med" len="med"/>
+                      <a:tailEnd type="none" w="med" len="med"/>
+                    </a:lnT>
+                    <a:lnB w="9525" cap="flat" cmpd="sng" algn="ctr">
+                      <a:solidFill>
+                        <a:srgbClr val="DADCE0"/>
+                      </a:solidFill>
+                      <a:prstDash val="solid"/>
+                      <a:round/>
+                      <a:headEnd type="none" w="med" len="med"/>
+                      <a:tailEnd type="none" w="med" len="med"/>
+                    </a:lnB>
+                    <a:solidFill>
+                      <a:srgbClr val="F8F9FA"/>
+                    </a:solidFill>
+                  </a:tcPr>
+                </a:tc>
+                <a:tc>
+                  <a:txBody>
+                    <a:bodyPr/>
+                    <a:lstStyle/>
+                    <a:p>
+                      <a:pPr indent="0" marL="0">
+                        <a:buNone/>
+                      </a:pPr>
+                      <a:r>
+                        <a:rPr lang="en-US" sz="760" dirty="0">
+                          <a:solidFill>
+                            <a:srgbClr val="5F6368"/>
+                          </a:solidFill>
+                          <a:latin typeface="Roboto" pitchFamily="34" charset="0"/>
+                          <a:ea typeface="Roboto" pitchFamily="34" charset="-122"/>
+                          <a:cs typeface="Roboto" pitchFamily="34" charset="-120"/>
+                        </a:rPr>
+                        <a:t>Cloud Armor WAF + IAP OIDC + RFC 8693 OBO &amp; RFC 9449 DPoP tokens</a:t>
+                      </a:r>
+                      <a:endParaRPr lang="en-US" sz="760" dirty="0">
+                        <a:latin typeface="Roboto" charset="0"/>
+                        <a:ea typeface="Roboto" charset="0"/>
+                        <a:cs typeface="Roboto" charset="0"/>
+                      </a:endParaRPr>
+                    </a:p>
+                  </a:txBody>
+                  <a:tcPr marL="91440" marR="91440" marT="45720" marB="45720" anchor="ctr">
+                    <a:lnL w="9525" cap="flat" cmpd="sng" algn="ctr">
+                      <a:solidFill>
+                        <a:srgbClr val="DADCE0"/>
+                      </a:solidFill>
+                      <a:prstDash val="solid"/>
+                      <a:round/>
+                      <a:headEnd type="none" w="med" len="med"/>
+                      <a:tailEnd type="none" w="med" len="med"/>
+                    </a:lnL>
+                    <a:lnR w="9525" cap="flat" cmpd="sng" algn="ctr">
+                      <a:solidFill>
+                        <a:srgbClr val="DADCE0"/>
+                      </a:solidFill>
+                      <a:prstDash val="solid"/>
+                      <a:round/>
+                      <a:headEnd type="none" w="med" len="med"/>
+                      <a:tailEnd type="none" w="med" len="med"/>
+                    </a:lnR>
+                    <a:lnT w="9525" cap="flat" cmpd="sng" algn="ctr">
+                      <a:solidFill>
+                        <a:srgbClr val="DADCE0"/>
+                      </a:solidFill>
+                      <a:prstDash val="solid"/>
+                      <a:round/>
+                      <a:headEnd type="none" w="med" len="med"/>
+                      <a:tailEnd type="none" w="med" len="med"/>
+                    </a:lnT>
+                    <a:lnB w="9525" cap="flat" cmpd="sng" algn="ctr">
+                      <a:solidFill>
+                        <a:srgbClr val="DADCE0"/>
+                      </a:solidFill>
+                      <a:prstDash val="solid"/>
+                      <a:round/>
+                      <a:headEnd type="none" w="med" len="med"/>
+                      <a:tailEnd type="none" w="med" len="med"/>
+                    </a:lnB>
+                    <a:solidFill>
+                      <a:srgbClr val="F8F9FA"/>
+                    </a:solidFill>
+                  </a:tcPr>
+                </a:tc>
+                <a:tc>
+                  <a:txBody>
+                    <a:bodyPr/>
+                    <a:lstStyle/>
+                    <a:p>
+                      <a:pPr indent="0" marL="0">
+                        <a:buNone/>
+                      </a:pPr>
+                      <a:r>
+                        <a:rPr lang="en-US" sz="760" dirty="0">
+                          <a:solidFill>
+                            <a:srgbClr val="5F6368"/>
+                          </a:solidFill>
+                          <a:latin typeface="Roboto" pitchFamily="34" charset="0"/>
+                          <a:ea typeface="Roboto" pitchFamily="34" charset="-122"/>
+                          <a:cs typeface="Roboto" pitchFamily="34" charset="-120"/>
+                        </a:rPr>
+                        <a:t>BeyondCorp mTLS cert pinning + IAM PAB + VPC Service Controls (Restricted VIP)</a:t>
+                      </a:r>
+                      <a:endParaRPr lang="en-US" sz="760" dirty="0">
+                        <a:latin typeface="Roboto" charset="0"/>
+                        <a:ea typeface="Roboto" charset="0"/>
+                        <a:cs typeface="Roboto" charset="0"/>
+                      </a:endParaRPr>
+                    </a:p>
+                  </a:txBody>
+                  <a:tcPr marL="91440" marR="91440" marT="45720" marB="45720" anchor="ctr">
+                    <a:lnL w="9525" cap="flat" cmpd="sng" algn="ctr">
+                      <a:solidFill>
+                        <a:srgbClr val="DADCE0"/>
+                      </a:solidFill>
+                      <a:prstDash val="solid"/>
+                      <a:round/>
+                      <a:headEnd type="none" w="med" len="med"/>
+                      <a:tailEnd type="none" w="med" len="med"/>
+                    </a:lnL>
+                    <a:lnR w="9525" cap="flat" cmpd="sng" algn="ctr">
+                      <a:solidFill>
+                        <a:srgbClr val="DADCE0"/>
+                      </a:solidFill>
+                      <a:prstDash val="solid"/>
+                      <a:round/>
+                      <a:headEnd type="none" w="med" len="med"/>
+                      <a:tailEnd type="none" w="med" len="med"/>
+                    </a:lnR>
+                    <a:lnT w="9525" cap="flat" cmpd="sng" algn="ctr">
+                      <a:solidFill>
+                        <a:srgbClr val="DADCE0"/>
+                      </a:solidFill>
+                      <a:prstDash val="solid"/>
+                      <a:round/>
+                      <a:headEnd type="none" w="med" len="med"/>
+                      <a:tailEnd type="none" w="med" len="med"/>
+                    </a:lnT>
+                    <a:lnB w="9525" cap="flat" cmpd="sng" algn="ctr">
+                      <a:solidFill>
+                        <a:srgbClr val="DADCE0"/>
+                      </a:solidFill>
+                      <a:prstDash val="solid"/>
+                      <a:round/>
+                      <a:headEnd type="none" w="med" len="med"/>
+                      <a:tailEnd type="none" w="med" len="med"/>
+                    </a:lnB>
+                    <a:solidFill>
+                      <a:srgbClr val="F8F9FA"/>
+                    </a:solidFill>
+                  </a:tcPr>
+                </a:tc>
+                <a:tc>
+                  <a:txBody>
+                    <a:bodyPr/>
+                    <a:lstStyle/>
+                    <a:p>
+                      <a:pPr indent="0" marL="0">
+                        <a:buNone/>
+                      </a:pPr>
+                      <a:r>
+                        <a:rPr lang="en-US" sz="760" dirty="0">
+                          <a:solidFill>
+                            <a:srgbClr val="5F6368"/>
+                          </a:solidFill>
+                          <a:latin typeface="Roboto" pitchFamily="34" charset="0"/>
+                          <a:ea typeface="Roboto" pitchFamily="34" charset="-122"/>
+                          <a:cs typeface="Roboto" pitchFamily="34" charset="-120"/>
+                        </a:rPr>
+                        <a:t>BeyondCorp mTLS + IAM PAB + VPC-SC + private GKE control plane (172.16.0.2/28)</a:t>
+                      </a:r>
+                      <a:endParaRPr lang="en-US" sz="760" dirty="0">
+                        <a:latin typeface="Roboto" charset="0"/>
+                        <a:ea typeface="Roboto" charset="0"/>
+                        <a:cs typeface="Roboto" charset="0"/>
+                      </a:endParaRPr>
+                    </a:p>
+                  </a:txBody>
+                  <a:tcPr marL="91440" marR="91440" marT="45720" marB="45720" anchor="ctr">
+                    <a:lnL w="9525" cap="flat" cmpd="sng" algn="ctr">
+                      <a:solidFill>
+                        <a:srgbClr val="DADCE0"/>
+                      </a:solidFill>
+                      <a:prstDash val="solid"/>
+                      <a:round/>
+                      <a:headEnd type="none" w="med" len="med"/>
+                      <a:tailEnd type="none" w="med" len="med"/>
+                    </a:lnL>
+                    <a:lnR w="9525" cap="flat" cmpd="sng" algn="ctr">
+                      <a:solidFill>
+                        <a:srgbClr val="DADCE0"/>
+                      </a:solidFill>
+                      <a:prstDash val="solid"/>
+                      <a:round/>
+                      <a:headEnd type="none" w="med" len="med"/>
+                      <a:tailEnd type="none" w="med" len="med"/>
+                    </a:lnR>
+                    <a:lnT w="9525" cap="flat" cmpd="sng" algn="ctr">
+                      <a:solidFill>
+                        <a:srgbClr val="DADCE0"/>
+                      </a:solidFill>
+                      <a:prstDash val="solid"/>
+                      <a:round/>
+                      <a:headEnd type="none" w="med" len="med"/>
+                      <a:tailEnd type="none" w="med" len="med"/>
+                    </a:lnT>
+                    <a:lnB w="9525" cap="flat" cmpd="sng" algn="ctr">
+                      <a:solidFill>
+                        <a:srgbClr val="DADCE0"/>
+                      </a:solidFill>
+                      <a:prstDash val="solid"/>
+                      <a:round/>
+                      <a:headEnd type="none" w="med" len="med"/>
+                      <a:tailEnd type="none" w="med" len="med"/>
+                    </a:lnB>
+                    <a:solidFill>
+                      <a:srgbClr val="F8F9FA"/>
+                    </a:solidFill>
+                  </a:tcPr>
+                </a:tc>
+              </a:tr>
+              <a:tr h="0">
+                <a:tc>
+                  <a:txBody>
+                    <a:bodyPr/>
+                    <a:lstStyle/>
+                    <a:p>
+                      <a:pPr indent="0" marL="0">
+                        <a:buNone/>
+                      </a:pPr>
+                      <a:r>
+                        <a:rPr lang="en-US" sz="780" b="1" dirty="0">
+                          <a:solidFill>
+                            <a:srgbClr val="3C4043"/>
+                          </a:solidFill>
+                          <a:latin typeface="Google Sans" pitchFamily="34" charset="0"/>
+                          <a:ea typeface="Google Sans" pitchFamily="34" charset="-122"/>
+                          <a:cs typeface="Google Sans" pitchFamily="34" charset="-120"/>
+                        </a:rPr>
+                        <a:t>Foundation model hosting</a:t>
+                      </a:r>
+                      <a:endParaRPr lang="en-US" sz="780" dirty="0">
+                        <a:latin typeface="Google Sans" charset="0"/>
+                        <a:ea typeface="Google Sans" charset="0"/>
+                        <a:cs typeface="Google Sans" charset="0"/>
+                      </a:endParaRPr>
+                    </a:p>
+                  </a:txBody>
+                  <a:tcPr marL="91440" marR="91440" marT="45720" marB="45720" anchor="ctr">
+                    <a:lnL w="9525" cap="flat" cmpd="sng" algn="ctr">
+                      <a:solidFill>
+                        <a:srgbClr val="DADCE0"/>
+                      </a:solidFill>
+                      <a:prstDash val="solid"/>
+                      <a:round/>
+                      <a:headEnd type="none" w="med" len="med"/>
+                      <a:tailEnd type="none" w="med" len="med"/>
+                    </a:lnL>
+                    <a:lnR w="9525" cap="flat" cmpd="sng" algn="ctr">
+                      <a:solidFill>
+                        <a:srgbClr val="DADCE0"/>
+                      </a:solidFill>
+                      <a:prstDash val="solid"/>
+                      <a:round/>
+                      <a:headEnd type="none" w="med" len="med"/>
+                      <a:tailEnd type="none" w="med" len="med"/>
+                    </a:lnR>
+                    <a:lnT w="9525" cap="flat" cmpd="sng" algn="ctr">
+                      <a:solidFill>
+                        <a:srgbClr val="DADCE0"/>
+                      </a:solidFill>
+                      <a:prstDash val="solid"/>
+                      <a:round/>
+                      <a:headEnd type="none" w="med" len="med"/>
+                      <a:tailEnd type="none" w="med" len="med"/>
+                    </a:lnT>
+                    <a:lnB w="9525" cap="flat" cmpd="sng" algn="ctr">
+                      <a:solidFill>
+                        <a:srgbClr val="DADCE0"/>
+                      </a:solidFill>
+                      <a:prstDash val="solid"/>
+                      <a:round/>
+                      <a:headEnd type="none" w="med" len="med"/>
+                      <a:tailEnd type="none" w="med" len="med"/>
+                    </a:lnB>
+                    <a:solidFill>
+                      <a:srgbClr val="FFFFFF"/>
+                    </a:solidFill>
+                  </a:tcPr>
+                </a:tc>
+                <a:tc>
+                  <a:txBody>
+                    <a:bodyPr/>
+                    <a:lstStyle/>
+                    <a:p>
+                      <a:pPr indent="0" marL="0">
+                        <a:buNone/>
+                      </a:pPr>
+                      <a:r>
+                        <a:rPr lang="en-US" sz="760" dirty="0">
+                          <a:solidFill>
+                            <a:srgbClr val="5F6368"/>
+                          </a:solidFill>
+                          <a:latin typeface="Roboto" pitchFamily="34" charset="0"/>
+                          <a:ea typeface="Roboto" pitchFamily="34" charset="-122"/>
+                          <a:cs typeface="Roboto" pitchFamily="34" charset="-120"/>
+                        </a:rPr>
+                        <a:t>Shared Gemini 2.5 Pro pay-as-you-go with 90% ContextCacheConfig prefix cache</a:t>
+                      </a:r>
+                      <a:endParaRPr lang="en-US" sz="760" dirty="0">
+                        <a:latin typeface="Roboto" charset="0"/>
+                        <a:ea typeface="Roboto" charset="0"/>
+                        <a:cs typeface="Roboto" charset="0"/>
+                      </a:endParaRPr>
+                    </a:p>
+                  </a:txBody>
+                  <a:tcPr marL="91440" marR="91440" marT="45720" marB="45720" anchor="ctr">
+                    <a:lnL w="9525" cap="flat" cmpd="sng" algn="ctr">
+                      <a:solidFill>
+                        <a:srgbClr val="DADCE0"/>
+                      </a:solidFill>
+                      <a:prstDash val="solid"/>
+                      <a:round/>
+                      <a:headEnd type="none" w="med" len="med"/>
+                      <a:tailEnd type="none" w="med" len="med"/>
+                    </a:lnL>
+                    <a:lnR w="9525" cap="flat" cmpd="sng" algn="ctr">
+                      <a:solidFill>
+                        <a:srgbClr val="DADCE0"/>
+                      </a:solidFill>
+                      <a:prstDash val="solid"/>
+                      <a:round/>
+                      <a:headEnd type="none" w="med" len="med"/>
+                      <a:tailEnd type="none" w="med" len="med"/>
+                    </a:lnR>
+                    <a:lnT w="9525" cap="flat" cmpd="sng" algn="ctr">
+                      <a:solidFill>
+                        <a:srgbClr val="DADCE0"/>
+                      </a:solidFill>
+                      <a:prstDash val="solid"/>
+                      <a:round/>
+                      <a:headEnd type="none" w="med" len="med"/>
+                      <a:tailEnd type="none" w="med" len="med"/>
+                    </a:lnT>
+                    <a:lnB w="9525" cap="flat" cmpd="sng" algn="ctr">
+                      <a:solidFill>
+                        <a:srgbClr val="DADCE0"/>
+                      </a:solidFill>
+                      <a:prstDash val="solid"/>
+                      <a:round/>
+                      <a:headEnd type="none" w="med" len="med"/>
+                      <a:tailEnd type="none" w="med" len="med"/>
+                    </a:lnB>
+                    <a:solidFill>
+                      <a:srgbClr val="FFFFFF"/>
+                    </a:solidFill>
+                  </a:tcPr>
+                </a:tc>
+                <a:tc>
+                  <a:txBody>
+                    <a:bodyPr/>
+                    <a:lstStyle/>
+                    <a:p>
+                      <a:pPr indent="0" marL="0">
+                        <a:buNone/>
+                      </a:pPr>
+                      <a:r>
+                        <a:rPr lang="en-US" sz="760" dirty="0">
+                          <a:solidFill>
+                            <a:srgbClr val="5F6368"/>
+                          </a:solidFill>
+                          <a:latin typeface="Roboto" pitchFamily="34" charset="0"/>
+                          <a:ea typeface="Roboto" pitchFamily="34" charset="-122"/>
+                          <a:cs typeface="Roboto" pitchFamily="34" charset="-120"/>
+                        </a:rPr>
+                        <a:t>Dedicated Gemini 2.5 Pro Provisioned Throughput inside tenant VPC-SC perimeter</a:t>
+                      </a:r>
+                      <a:endParaRPr lang="en-US" sz="760" dirty="0">
+                        <a:latin typeface="Roboto" charset="0"/>
+                        <a:ea typeface="Roboto" charset="0"/>
+                        <a:cs typeface="Roboto" charset="0"/>
+                      </a:endParaRPr>
+                    </a:p>
+                  </a:txBody>
+                  <a:tcPr marL="91440" marR="91440" marT="45720" marB="45720" anchor="ctr">
+                    <a:lnL w="9525" cap="flat" cmpd="sng" algn="ctr">
+                      <a:solidFill>
+                        <a:srgbClr val="DADCE0"/>
+                      </a:solidFill>
+                      <a:prstDash val="solid"/>
+                      <a:round/>
+                      <a:headEnd type="none" w="med" len="med"/>
+                      <a:tailEnd type="none" w="med" len="med"/>
+                    </a:lnL>
+                    <a:lnR w="9525" cap="flat" cmpd="sng" algn="ctr">
+                      <a:solidFill>
+                        <a:srgbClr val="DADCE0"/>
+                      </a:solidFill>
+                      <a:prstDash val="solid"/>
+                      <a:round/>
+                      <a:headEnd type="none" w="med" len="med"/>
+                      <a:tailEnd type="none" w="med" len="med"/>
+                    </a:lnR>
+                    <a:lnT w="9525" cap="flat" cmpd="sng" algn="ctr">
+                      <a:solidFill>
+                        <a:srgbClr val="DADCE0"/>
+                      </a:solidFill>
+                      <a:prstDash val="solid"/>
+                      <a:round/>
+                      <a:headEnd type="none" w="med" len="med"/>
+                      <a:tailEnd type="none" w="med" len="med"/>
+                    </a:lnT>
+                    <a:lnB w="9525" cap="flat" cmpd="sng" algn="ctr">
+                      <a:solidFill>
+                        <a:srgbClr val="DADCE0"/>
+                      </a:solidFill>
+                      <a:prstDash val="solid"/>
+                      <a:round/>
+                      <a:headEnd type="none" w="med" len="med"/>
+                      <a:tailEnd type="none" w="med" len="med"/>
+                    </a:lnB>
+                    <a:solidFill>
+                      <a:srgbClr val="FFFFFF"/>
+                    </a:solidFill>
+                  </a:tcPr>
+                </a:tc>
+                <a:tc>
+                  <a:txBody>
+                    <a:bodyPr/>
+                    <a:lstStyle/>
+                    <a:p>
+                      <a:pPr indent="0" marL="0">
+                        <a:buNone/>
+                      </a:pPr>
+                      <a:r>
+                        <a:rPr lang="en-US" sz="760" dirty="0">
+                          <a:solidFill>
+                            <a:srgbClr val="5F6368"/>
+                          </a:solidFill>
+                          <a:latin typeface="Roboto" pitchFamily="34" charset="0"/>
+                          <a:ea typeface="Roboto" pitchFamily="34" charset="-122"/>
+                          <a:cs typeface="Roboto" pitchFamily="34" charset="-120"/>
+                        </a:rPr>
+                        <a:t>Self-hosted open-weight Gemma 3 (27B IT) on private GKE L4/A100 GPU node pool</a:t>
+                      </a:r>
+                      <a:endParaRPr lang="en-US" sz="760" dirty="0">
+                        <a:latin typeface="Roboto" charset="0"/>
+                        <a:ea typeface="Roboto" charset="0"/>
+                        <a:cs typeface="Roboto" charset="0"/>
+                      </a:endParaRPr>
+                    </a:p>
+                  </a:txBody>
+                  <a:tcPr marL="91440" marR="91440" marT="45720" marB="45720" anchor="ctr">
+                    <a:lnL w="9525" cap="flat" cmpd="sng" algn="ctr">
+                      <a:solidFill>
+                        <a:srgbClr val="DADCE0"/>
+                      </a:solidFill>
+                      <a:prstDash val="solid"/>
+                      <a:round/>
+                      <a:headEnd type="none" w="med" len="med"/>
+                      <a:tailEnd type="none" w="med" len="med"/>
+                    </a:lnL>
+                    <a:lnR w="9525" cap="flat" cmpd="sng" algn="ctr">
+                      <a:solidFill>
+                        <a:srgbClr val="DADCE0"/>
+                      </a:solidFill>
+                      <a:prstDash val="solid"/>
+                      <a:round/>
+                      <a:headEnd type="none" w="med" len="med"/>
+                      <a:tailEnd type="none" w="med" len="med"/>
+                    </a:lnR>
+                    <a:lnT w="9525" cap="flat" cmpd="sng" algn="ctr">
+                      <a:solidFill>
+                        <a:srgbClr val="DADCE0"/>
+                      </a:solidFill>
+                      <a:prstDash val="solid"/>
+                      <a:round/>
+                      <a:headEnd type="none" w="med" len="med"/>
+                      <a:tailEnd type="none" w="med" len="med"/>
+                    </a:lnT>
+                    <a:lnB w="9525" cap="flat" cmpd="sng" algn="ctr">
+                      <a:solidFill>
+                        <a:srgbClr val="DADCE0"/>
+                      </a:solidFill>
+                      <a:prstDash val="solid"/>
+                      <a:round/>
+                      <a:headEnd type="none" w="med" len="med"/>
+                      <a:tailEnd type="none" w="med" len="med"/>
+                    </a:lnB>
+                    <a:solidFill>
+                      <a:srgbClr val="FFFFFF"/>
+                    </a:solidFill>
+                  </a:tcPr>
+                </a:tc>
+              </a:tr>
+              <a:tr h="0">
+                <a:tc>
+                  <a:txBody>
+                    <a:bodyPr/>
+                    <a:lstStyle/>
+                    <a:p>
+                      <a:pPr indent="0" marL="0">
+                        <a:buNone/>
+                      </a:pPr>
+                      <a:r>
+                        <a:rPr lang="en-US" sz="780" b="1" dirty="0">
+                          <a:solidFill>
+                            <a:srgbClr val="3C4043"/>
+                          </a:solidFill>
+                          <a:latin typeface="Google Sans" pitchFamily="34" charset="0"/>
+                          <a:ea typeface="Google Sans" pitchFamily="34" charset="-122"/>
+                          <a:cs typeface="Google Sans" pitchFamily="34" charset="-120"/>
+                        </a:rPr>
+                        <a:t>CMEK encryption &amp; kill-switch</a:t>
+                      </a:r>
+                      <a:endParaRPr lang="en-US" sz="780" dirty="0">
+                        <a:latin typeface="Google Sans" charset="0"/>
+                        <a:ea typeface="Google Sans" charset="0"/>
+                        <a:cs typeface="Google Sans" charset="0"/>
+                      </a:endParaRPr>
+                    </a:p>
+                  </a:txBody>
+                  <a:tcPr marL="91440" marR="91440" marT="45720" marB="45720" anchor="ctr">
+                    <a:lnL w="9525" cap="flat" cmpd="sng" algn="ctr">
+                      <a:solidFill>
+                        <a:srgbClr val="DADCE0"/>
+                      </a:solidFill>
+                      <a:prstDash val="solid"/>
+                      <a:round/>
+                      <a:headEnd type="none" w="med" len="med"/>
+                      <a:tailEnd type="none" w="med" len="med"/>
+                    </a:lnL>
+                    <a:lnR w="9525" cap="flat" cmpd="sng" algn="ctr">
+                      <a:solidFill>
+                        <a:srgbClr val="DADCE0"/>
+                      </a:solidFill>
+                      <a:prstDash val="solid"/>
+                      <a:round/>
+                      <a:headEnd type="none" w="med" len="med"/>
+                      <a:tailEnd type="none" w="med" len="med"/>
+                    </a:lnR>
+                    <a:lnT w="9525" cap="flat" cmpd="sng" algn="ctr">
+                      <a:solidFill>
+                        <a:srgbClr val="DADCE0"/>
+                      </a:solidFill>
+                      <a:prstDash val="solid"/>
+                      <a:round/>
+                      <a:headEnd type="none" w="med" len="med"/>
+                      <a:tailEnd type="none" w="med" len="med"/>
+                    </a:lnT>
+                    <a:lnB w="9525" cap="flat" cmpd="sng" algn="ctr">
+                      <a:solidFill>
+                        <a:srgbClr val="DADCE0"/>
+                      </a:solidFill>
+                      <a:prstDash val="solid"/>
+                      <a:round/>
+                      <a:headEnd type="none" w="med" len="med"/>
+                      <a:tailEnd type="none" w="med" len="med"/>
+                    </a:lnB>
+                    <a:solidFill>
+                      <a:srgbClr val="F8F9FA"/>
+                    </a:solidFill>
+                  </a:tcPr>
+                </a:tc>
+                <a:tc>
+                  <a:txBody>
+                    <a:bodyPr/>
+                    <a:lstStyle/>
+                    <a:p>
+                      <a:pPr indent="0" marL="0">
+                        <a:buNone/>
+                      </a:pPr>
+                      <a:r>
+                        <a:rPr lang="en-US" sz="760" dirty="0">
+                          <a:solidFill>
+                            <a:srgbClr val="5F6368"/>
+                          </a:solidFill>
+                          <a:latin typeface="Roboto" pitchFamily="34" charset="0"/>
+                          <a:ea typeface="Roboto" pitchFamily="34" charset="-122"/>
+                          <a:cs typeface="Roboto" pitchFamily="34" charset="-120"/>
+                        </a:rPr>
+                        <a:t>Envelope KMS encryption per Memory Bank namespace (mem://{tenant_id}/L1..L5)</a:t>
+                      </a:r>
+                      <a:endParaRPr lang="en-US" sz="760" dirty="0">
+                        <a:latin typeface="Roboto" charset="0"/>
+                        <a:ea typeface="Roboto" charset="0"/>
+                        <a:cs typeface="Roboto" charset="0"/>
+                      </a:endParaRPr>
+                    </a:p>
+                  </a:txBody>
+                  <a:tcPr marL="91440" marR="91440" marT="45720" marB="45720" anchor="ctr">
+                    <a:lnL w="9525" cap="flat" cmpd="sng" algn="ctr">
+                      <a:solidFill>
+                        <a:srgbClr val="DADCE0"/>
+                      </a:solidFill>
+                      <a:prstDash val="solid"/>
+                      <a:round/>
+                      <a:headEnd type="none" w="med" len="med"/>
+                      <a:tailEnd type="none" w="med" len="med"/>
+                    </a:lnL>
+                    <a:lnR w="9525" cap="flat" cmpd="sng" algn="ctr">
+                      <a:solidFill>
+                        <a:srgbClr val="DADCE0"/>
+                      </a:solidFill>
+                      <a:prstDash val="solid"/>
+                      <a:round/>
+                      <a:headEnd type="none" w="med" len="med"/>
+                      <a:tailEnd type="none" w="med" len="med"/>
+                    </a:lnR>
+                    <a:lnT w="9525" cap="flat" cmpd="sng" algn="ctr">
+                      <a:solidFill>
+                        <a:srgbClr val="DADCE0"/>
+                      </a:solidFill>
+                      <a:prstDash val="solid"/>
+                      <a:round/>
+                      <a:headEnd type="none" w="med" len="med"/>
+                      <a:tailEnd type="none" w="med" len="med"/>
+                    </a:lnT>
+                    <a:lnB w="9525" cap="flat" cmpd="sng" algn="ctr">
+                      <a:solidFill>
+                        <a:srgbClr val="DADCE0"/>
+                      </a:solidFill>
+                      <a:prstDash val="solid"/>
+                      <a:round/>
+                      <a:headEnd type="none" w="med" len="med"/>
+                      <a:tailEnd type="none" w="med" len="med"/>
+                    </a:lnB>
+                    <a:solidFill>
+                      <a:srgbClr val="F8F9FA"/>
+                    </a:solidFill>
+                  </a:tcPr>
+                </a:tc>
+                <a:tc>
+                  <a:txBody>
+                    <a:bodyPr/>
+                    <a:lstStyle/>
+                    <a:p>
+                      <a:pPr indent="0" marL="0">
+                        <a:buNone/>
+                      </a:pPr>
+                      <a:r>
+                        <a:rPr lang="en-US" sz="760" dirty="0">
+                          <a:solidFill>
+                            <a:srgbClr val="5F6368"/>
+                          </a:solidFill>
+                          <a:latin typeface="Roboto" pitchFamily="34" charset="0"/>
+                          <a:ea typeface="Roboto" pitchFamily="34" charset="-122"/>
+                          <a:cs typeface="Roboto" pitchFamily="34" charset="-120"/>
+                        </a:rPr>
+                        <a:t>Ubiquitous tenant Cloud KMS CMEK across Vertex AI, AlloyDB, GCS &amp; BigQuery</a:t>
+                      </a:r>
+                      <a:endParaRPr lang="en-US" sz="760" dirty="0">
+                        <a:latin typeface="Roboto" charset="0"/>
+                        <a:ea typeface="Roboto" charset="0"/>
+                        <a:cs typeface="Roboto" charset="0"/>
+                      </a:endParaRPr>
+                    </a:p>
+                  </a:txBody>
+                  <a:tcPr marL="91440" marR="91440" marT="45720" marB="45720" anchor="ctr">
+                    <a:lnL w="9525" cap="flat" cmpd="sng" algn="ctr">
+                      <a:solidFill>
+                        <a:srgbClr val="DADCE0"/>
+                      </a:solidFill>
+                      <a:prstDash val="solid"/>
+                      <a:round/>
+                      <a:headEnd type="none" w="med" len="med"/>
+                      <a:tailEnd type="none" w="med" len="med"/>
+                    </a:lnL>
+                    <a:lnR w="9525" cap="flat" cmpd="sng" algn="ctr">
+                      <a:solidFill>
+                        <a:srgbClr val="DADCE0"/>
+                      </a:solidFill>
+                      <a:prstDash val="solid"/>
+                      <a:round/>
+                      <a:headEnd type="none" w="med" len="med"/>
+                      <a:tailEnd type="none" w="med" len="med"/>
+                    </a:lnR>
+                    <a:lnT w="9525" cap="flat" cmpd="sng" algn="ctr">
+                      <a:solidFill>
+                        <a:srgbClr val="DADCE0"/>
+                      </a:solidFill>
+                      <a:prstDash val="solid"/>
+                      <a:round/>
+                      <a:headEnd type="none" w="med" len="med"/>
+                      <a:tailEnd type="none" w="med" len="med"/>
+                    </a:lnT>
+                    <a:lnB w="9525" cap="flat" cmpd="sng" algn="ctr">
+                      <a:solidFill>
+                        <a:srgbClr val="DADCE0"/>
+                      </a:solidFill>
+                      <a:prstDash val="solid"/>
+                      <a:round/>
+                      <a:headEnd type="none" w="med" len="med"/>
+                      <a:tailEnd type="none" w="med" len="med"/>
+                    </a:lnB>
+                    <a:solidFill>
+                      <a:srgbClr val="F8F9FA"/>
+                    </a:solidFill>
+                  </a:tcPr>
+                </a:tc>
+                <a:tc>
+                  <a:txBody>
+                    <a:bodyPr/>
+                    <a:lstStyle/>
+                    <a:p>
+                      <a:pPr indent="0" marL="0">
+                        <a:buNone/>
+                      </a:pPr>
+                      <a:r>
+                        <a:rPr lang="en-US" sz="760" dirty="0">
+                          <a:solidFill>
+                            <a:srgbClr val="5F6368"/>
+                          </a:solidFill>
+                          <a:latin typeface="Roboto" pitchFamily="34" charset="0"/>
+                          <a:ea typeface="Roboto" pitchFamily="34" charset="-122"/>
+                          <a:cs typeface="Roboto" pitchFamily="34" charset="-120"/>
+                        </a:rPr>
+                        <a:t>Ubiquitous Cloud KMS CMEK + GKE boot/etcd disks (&lt;60s HTTP 423 Locked + L1 purge)</a:t>
+                      </a:r>
+                      <a:endParaRPr lang="en-US" sz="760" dirty="0">
+                        <a:latin typeface="Roboto" charset="0"/>
+                        <a:ea typeface="Roboto" charset="0"/>
+                        <a:cs typeface="Roboto" charset="0"/>
+                      </a:endParaRPr>
+                    </a:p>
+                  </a:txBody>
+                  <a:tcPr marL="91440" marR="91440" marT="45720" marB="45720" anchor="ctr">
+                    <a:lnL w="9525" cap="flat" cmpd="sng" algn="ctr">
+                      <a:solidFill>
+                        <a:srgbClr val="DADCE0"/>
+                      </a:solidFill>
+                      <a:prstDash val="solid"/>
+                      <a:round/>
+                      <a:headEnd type="none" w="med" len="med"/>
+                      <a:tailEnd type="none" w="med" len="med"/>
+                    </a:lnL>
+                    <a:lnR w="9525" cap="flat" cmpd="sng" algn="ctr">
+                      <a:solidFill>
+                        <a:srgbClr val="DADCE0"/>
+                      </a:solidFill>
+                      <a:prstDash val="solid"/>
+                      <a:round/>
+                      <a:headEnd type="none" w="med" len="med"/>
+                      <a:tailEnd type="none" w="med" len="med"/>
+                    </a:lnR>
+                    <a:lnT w="9525" cap="flat" cmpd="sng" algn="ctr">
+                      <a:solidFill>
+                        <a:srgbClr val="DADCE0"/>
+                      </a:solidFill>
+                      <a:prstDash val="solid"/>
+                      <a:round/>
+                      <a:headEnd type="none" w="med" len="med"/>
+                      <a:tailEnd type="none" w="med" len="med"/>
+                    </a:lnT>
+                    <a:lnB w="9525" cap="flat" cmpd="sng" algn="ctr">
+                      <a:solidFill>
+                        <a:srgbClr val="DADCE0"/>
+                      </a:solidFill>
+                      <a:prstDash val="solid"/>
+                      <a:round/>
+                      <a:headEnd type="none" w="med" len="med"/>
+                      <a:tailEnd type="none" w="med" len="med"/>
+                    </a:lnB>
+                    <a:solidFill>
+                      <a:srgbClr val="F8F9FA"/>
+                    </a:solidFill>
+                  </a:tcPr>
+                </a:tc>
+              </a:tr>
+              <a:tr h="0">
+                <a:tc>
+                  <a:txBody>
+                    <a:bodyPr/>
+                    <a:lstStyle/>
+                    <a:p>
+                      <a:pPr indent="0" marL="0">
+                        <a:buNone/>
+                      </a:pPr>
+                      <a:r>
+                        <a:rPr lang="en-US" sz="780" b="1" dirty="0">
+                          <a:solidFill>
+                            <a:srgbClr val="3C4043"/>
+                          </a:solidFill>
+                          <a:latin typeface="Google Sans" pitchFamily="34" charset="0"/>
+                          <a:ea typeface="Google Sans" pitchFamily="34" charset="-122"/>
+                          <a:cs typeface="Google Sans" pitchFamily="34" charset="-120"/>
+                        </a:rPr>
+                        <a:t>Provisioning &amp; Terraform IaC</a:t>
+                      </a:r>
+                      <a:endParaRPr lang="en-US" sz="780" dirty="0">
+                        <a:latin typeface="Google Sans" charset="0"/>
+                        <a:ea typeface="Google Sans" charset="0"/>
+                        <a:cs typeface="Google Sans" charset="0"/>
+                      </a:endParaRPr>
+                    </a:p>
+                  </a:txBody>
+                  <a:tcPr marL="91440" marR="91440" marT="45720" marB="45720" anchor="ctr">
+                    <a:lnL w="9525" cap="flat" cmpd="sng" algn="ctr">
+                      <a:solidFill>
+                        <a:srgbClr val="DADCE0"/>
+                      </a:solidFill>
+                      <a:prstDash val="solid"/>
+                      <a:round/>
+                      <a:headEnd type="none" w="med" len="med"/>
+                      <a:tailEnd type="none" w="med" len="med"/>
+                    </a:lnL>
+                    <a:lnR w="9525" cap="flat" cmpd="sng" algn="ctr">
+                      <a:solidFill>
+                        <a:srgbClr val="DADCE0"/>
+                      </a:solidFill>
+                      <a:prstDash val="solid"/>
+                      <a:round/>
+                      <a:headEnd type="none" w="med" len="med"/>
+                      <a:tailEnd type="none" w="med" len="med"/>
+                    </a:lnR>
+                    <a:lnT w="9525" cap="flat" cmpd="sng" algn="ctr">
+                      <a:solidFill>
+                        <a:srgbClr val="DADCE0"/>
+                      </a:solidFill>
+                      <a:prstDash val="solid"/>
+                      <a:round/>
+                      <a:headEnd type="none" w="med" len="med"/>
+                      <a:tailEnd type="none" w="med" len="med"/>
+                    </a:lnT>
+                    <a:lnB w="9525" cap="flat" cmpd="sng" algn="ctr">
+                      <a:solidFill>
+                        <a:srgbClr val="DADCE0"/>
+                      </a:solidFill>
+                      <a:prstDash val="solid"/>
+                      <a:round/>
+                      <a:headEnd type="none" w="med" len="med"/>
+                      <a:tailEnd type="none" w="med" len="med"/>
+                    </a:lnB>
+                    <a:solidFill>
+                      <a:srgbClr val="FFFFFF"/>
+                    </a:solidFill>
+                  </a:tcPr>
+                </a:tc>
+                <a:tc>
+                  <a:txBody>
+                    <a:bodyPr/>
+                    <a:lstStyle/>
+                    <a:p>
+                      <a:pPr indent="0" marL="0">
+                        <a:buNone/>
+                      </a:pPr>
+                      <a:r>
+                        <a:rPr lang="en-US" sz="760" dirty="0">
+                          <a:solidFill>
+                            <a:srgbClr val="5F6368"/>
+                          </a:solidFill>
+                          <a:latin typeface="Roboto" pitchFamily="34" charset="0"/>
+                          <a:ea typeface="Roboto" pitchFamily="34" charset="-122"/>
+                          <a:cs typeface="Roboto" pitchFamily="34" charset="-120"/>
+                        </a:rPr>
+                        <a:t>Instant Firestore tenant profile insert (&lt;50ms commercial self-service)</a:t>
+                      </a:r>
+                      <a:endParaRPr lang="en-US" sz="760" dirty="0">
+                        <a:latin typeface="Roboto" charset="0"/>
+                        <a:ea typeface="Roboto" charset="0"/>
+                        <a:cs typeface="Roboto" charset="0"/>
+                      </a:endParaRPr>
+                    </a:p>
+                  </a:txBody>
+                  <a:tcPr marL="91440" marR="91440" marT="45720" marB="45720" anchor="ctr">
+                    <a:lnL w="9525" cap="flat" cmpd="sng" algn="ctr">
+                      <a:solidFill>
+                        <a:srgbClr val="DADCE0"/>
+                      </a:solidFill>
+                      <a:prstDash val="solid"/>
+                      <a:round/>
+                      <a:headEnd type="none" w="med" len="med"/>
+                      <a:tailEnd type="none" w="med" len="med"/>
+                    </a:lnL>
+                    <a:lnR w="9525" cap="flat" cmpd="sng" algn="ctr">
+                      <a:solidFill>
+                        <a:srgbClr val="DADCE0"/>
+                      </a:solidFill>
+                      <a:prstDash val="solid"/>
+                      <a:round/>
+                      <a:headEnd type="none" w="med" len="med"/>
+                      <a:tailEnd type="none" w="med" len="med"/>
+                    </a:lnR>
+                    <a:lnT w="9525" cap="flat" cmpd="sng" algn="ctr">
+                      <a:solidFill>
+                        <a:srgbClr val="DADCE0"/>
+                      </a:solidFill>
+                      <a:prstDash val="solid"/>
+                      <a:round/>
+                      <a:headEnd type="none" w="med" len="med"/>
+                      <a:tailEnd type="none" w="med" len="med"/>
+                    </a:lnT>
+                    <a:lnB w="9525" cap="flat" cmpd="sng" algn="ctr">
+                      <a:solidFill>
+                        <a:srgbClr val="DADCE0"/>
+                      </a:solidFill>
+                      <a:prstDash val="solid"/>
+                      <a:round/>
+                      <a:headEnd type="none" w="med" len="med"/>
+                      <a:tailEnd type="none" w="med" len="med"/>
+                    </a:lnB>
+                    <a:solidFill>
+                      <a:srgbClr val="FFFFFF"/>
+                    </a:solidFill>
+                  </a:tcPr>
+                </a:tc>
+                <a:tc>
+                  <a:txBody>
+                    <a:bodyPr/>
+                    <a:lstStyle/>
+                    <a:p>
+                      <a:pPr indent="0" marL="0">
+                        <a:buNone/>
+                      </a:pPr>
+                      <a:r>
+                        <a:rPr lang="en-US" sz="760" dirty="0">
+                          <a:solidFill>
+                            <a:srgbClr val="5F6368"/>
+                          </a:solidFill>
+                          <a:latin typeface="Roboto" pitchFamily="34" charset="0"/>
+                          <a:ea typeface="Roboto" pitchFamily="34" charset="-122"/>
+                          <a:cs typeface="Roboto" pitchFamily="34" charset="-120"/>
+                        </a:rPr>
+                        <a:t>4-stage automated silo factory (3.6-terraform-silo-blueprint, &lt;12 min stamp-out)</a:t>
+                      </a:r>
+                      <a:endParaRPr lang="en-US" sz="760" dirty="0">
+                        <a:latin typeface="Roboto" charset="0"/>
+                        <a:ea typeface="Roboto" charset="0"/>
+                        <a:cs typeface="Roboto" charset="0"/>
+                      </a:endParaRPr>
+                    </a:p>
+                  </a:txBody>
+                  <a:tcPr marL="91440" marR="91440" marT="45720" marB="45720" anchor="ctr">
+                    <a:lnL w="9525" cap="flat" cmpd="sng" algn="ctr">
+                      <a:solidFill>
+                        <a:srgbClr val="DADCE0"/>
+                      </a:solidFill>
+                      <a:prstDash val="solid"/>
+                      <a:round/>
+                      <a:headEnd type="none" w="med" len="med"/>
+                      <a:tailEnd type="none" w="med" len="med"/>
+                    </a:lnL>
+                    <a:lnR w="9525" cap="flat" cmpd="sng" algn="ctr">
+                      <a:solidFill>
+                        <a:srgbClr val="DADCE0"/>
+                      </a:solidFill>
+                      <a:prstDash val="solid"/>
+                      <a:round/>
+                      <a:headEnd type="none" w="med" len="med"/>
+                      <a:tailEnd type="none" w="med" len="med"/>
+                    </a:lnR>
+                    <a:lnT w="9525" cap="flat" cmpd="sng" algn="ctr">
+                      <a:solidFill>
+                        <a:srgbClr val="DADCE0"/>
+                      </a:solidFill>
+                      <a:prstDash val="solid"/>
+                      <a:round/>
+                      <a:headEnd type="none" w="med" len="med"/>
+                      <a:tailEnd type="none" w="med" len="med"/>
+                    </a:lnT>
+                    <a:lnB w="9525" cap="flat" cmpd="sng" algn="ctr">
+                      <a:solidFill>
+                        <a:srgbClr val="DADCE0"/>
+                      </a:solidFill>
+                      <a:prstDash val="solid"/>
+                      <a:round/>
+                      <a:headEnd type="none" w="med" len="med"/>
+                      <a:tailEnd type="none" w="med" len="med"/>
+                    </a:lnB>
+                    <a:solidFill>
+                      <a:srgbClr val="FFFFFF"/>
+                    </a:solidFill>
+                  </a:tcPr>
+                </a:tc>
+                <a:tc>
+                  <a:txBody>
+                    <a:bodyPr/>
+                    <a:lstStyle/>
+                    <a:p>
+                      <a:pPr indent="0" marL="0">
+                        <a:buNone/>
+                      </a:pPr>
+                      <a:r>
+                        <a:rPr lang="en-US" sz="760" dirty="0">
+                          <a:solidFill>
+                            <a:srgbClr val="5F6368"/>
+                          </a:solidFill>
+                          <a:latin typeface="Roboto" pitchFamily="34" charset="0"/>
+                          <a:ea typeface="Roboto" pitchFamily="34" charset="-122"/>
+                          <a:cs typeface="Roboto" pitchFamily="34" charset="-120"/>
+                        </a:rPr>
+                        <a:t>4-stage silo factory + private GKE GPU cluster &amp; local Artifact Registry mirror</a:t>
+                      </a:r>
+                      <a:endParaRPr lang="en-US" sz="760" dirty="0">
+                        <a:latin typeface="Roboto" charset="0"/>
+                        <a:ea typeface="Roboto" charset="0"/>
+                        <a:cs typeface="Roboto" charset="0"/>
+                      </a:endParaRPr>
+                    </a:p>
+                  </a:txBody>
+                  <a:tcPr marL="91440" marR="91440" marT="45720" marB="45720" anchor="ctr">
+                    <a:lnL w="9525" cap="flat" cmpd="sng" algn="ctr">
+                      <a:solidFill>
+                        <a:srgbClr val="DADCE0"/>
+                      </a:solidFill>
+                      <a:prstDash val="solid"/>
+                      <a:round/>
+                      <a:headEnd type="none" w="med" len="med"/>
+                      <a:tailEnd type="none" w="med" len="med"/>
+                    </a:lnL>
+                    <a:lnR w="9525" cap="flat" cmpd="sng" algn="ctr">
+                      <a:solidFill>
+                        <a:srgbClr val="DADCE0"/>
+                      </a:solidFill>
+                      <a:prstDash val="solid"/>
+                      <a:round/>
+                      <a:headEnd type="none" w="med" len="med"/>
+                      <a:tailEnd type="none" w="med" len="med"/>
+                    </a:lnR>
+                    <a:lnT w="9525" cap="flat" cmpd="sng" algn="ctr">
+                      <a:solidFill>
+                        <a:srgbClr val="DADCE0"/>
+                      </a:solidFill>
+                      <a:prstDash val="solid"/>
+                      <a:round/>
+                      <a:headEnd type="none" w="med" len="med"/>
+                      <a:tailEnd type="none" w="med" len="med"/>
+                    </a:lnT>
+                    <a:lnB w="9525" cap="flat" cmpd="sng" algn="ctr">
+                      <a:solidFill>
+                        <a:srgbClr val="DADCE0"/>
+                      </a:solidFill>
+                      <a:prstDash val="solid"/>
+                      <a:round/>
+                      <a:headEnd type="none" w="med" len="med"/>
+                      <a:tailEnd type="none" w="med" len="med"/>
+                    </a:lnB>
+                    <a:solidFill>
+                      <a:srgbClr val="FFFFFF"/>
+                    </a:solidFill>
+                  </a:tcPr>
+                </a:tc>
+              </a:tr>
+              <a:tr h="0">
+                <a:tc>
+                  <a:txBody>
+                    <a:bodyPr/>
+                    <a:lstStyle/>
+                    <a:p>
+                      <a:pPr indent="0" marL="0">
+                        <a:buNone/>
+                      </a:pPr>
+                      <a:r>
+                        <a:rPr lang="en-US" sz="780" b="1" dirty="0">
+                          <a:solidFill>
+                            <a:srgbClr val="3C4043"/>
+                          </a:solidFill>
+                          <a:latin typeface="Google Sans" pitchFamily="34" charset="0"/>
+                          <a:ea typeface="Google Sans" pitchFamily="34" charset="-122"/>
+                          <a:cs typeface="Google Sans" pitchFamily="34" charset="-120"/>
+                        </a:rPr>
+                        <a:t>Unit economics &amp; target workload</a:t>
+                      </a:r>
+                      <a:endParaRPr lang="en-US" sz="780" dirty="0">
+                        <a:latin typeface="Google Sans" charset="0"/>
+                        <a:ea typeface="Google Sans" charset="0"/>
+                        <a:cs typeface="Google Sans" charset="0"/>
+                      </a:endParaRPr>
+                    </a:p>
+                  </a:txBody>
+                  <a:tcPr marL="91440" marR="91440" marT="45720" marB="45720" anchor="ctr">
+                    <a:lnL w="9525" cap="flat" cmpd="sng" algn="ctr">
+                      <a:solidFill>
+                        <a:srgbClr val="DADCE0"/>
+                      </a:solidFill>
+                      <a:prstDash val="solid"/>
+                      <a:round/>
+                      <a:headEnd type="none" w="med" len="med"/>
+                      <a:tailEnd type="none" w="med" len="med"/>
+                    </a:lnL>
+                    <a:lnR w="9525" cap="flat" cmpd="sng" algn="ctr">
+                      <a:solidFill>
+                        <a:srgbClr val="DADCE0"/>
+                      </a:solidFill>
+                      <a:prstDash val="solid"/>
+                      <a:round/>
+                      <a:headEnd type="none" w="med" len="med"/>
+                      <a:tailEnd type="none" w="med" len="med"/>
+                    </a:lnR>
+                    <a:lnT w="9525" cap="flat" cmpd="sng" algn="ctr">
+                      <a:solidFill>
+                        <a:srgbClr val="DADCE0"/>
+                      </a:solidFill>
+                      <a:prstDash val="solid"/>
+                      <a:round/>
+                      <a:headEnd type="none" w="med" len="med"/>
+                      <a:tailEnd type="none" w="med" len="med"/>
+                    </a:lnT>
+                    <a:lnB w="9525" cap="flat" cmpd="sng" algn="ctr">
+                      <a:solidFill>
+                        <a:srgbClr val="DADCE0"/>
+                      </a:solidFill>
+                      <a:prstDash val="solid"/>
+                      <a:round/>
+                      <a:headEnd type="none" w="med" len="med"/>
+                      <a:tailEnd type="none" w="med" len="med"/>
+                    </a:lnB>
+                    <a:solidFill>
+                      <a:srgbClr val="F8F9FA"/>
+                    </a:solidFill>
+                  </a:tcPr>
+                </a:tc>
+                <a:tc>
+                  <a:txBody>
+                    <a:bodyPr/>
+                    <a:lstStyle/>
+                    <a:p>
+                      <a:pPr indent="0" marL="0">
+                        <a:buNone/>
+                      </a:pPr>
+                      <a:r>
+                        <a:rPr lang="en-US" sz="760" dirty="0">
+                          <a:solidFill>
+                            <a:srgbClr val="5F6368"/>
+                          </a:solidFill>
+                          <a:latin typeface="Roboto" pitchFamily="34" charset="0"/>
+                          <a:ea typeface="Roboto" pitchFamily="34" charset="-122"/>
+                          <a:cs typeface="Roboto" pitchFamily="34" charset="-120"/>
+                        </a:rPr>
+                        <a:t>$42 / tenant / month • High-volume commercial B2B SaaS (10/10 PASS)</a:t>
+                      </a:r>
+                      <a:endParaRPr lang="en-US" sz="760" dirty="0">
+                        <a:latin typeface="Roboto" charset="0"/>
+                        <a:ea typeface="Roboto" charset="0"/>
+                        <a:cs typeface="Roboto" charset="0"/>
+                      </a:endParaRPr>
+                    </a:p>
+                  </a:txBody>
+                  <a:tcPr marL="91440" marR="91440" marT="45720" marB="45720" anchor="ctr">
+                    <a:lnL w="9525" cap="flat" cmpd="sng" algn="ctr">
+                      <a:solidFill>
+                        <a:srgbClr val="DADCE0"/>
+                      </a:solidFill>
+                      <a:prstDash val="solid"/>
+                      <a:round/>
+                      <a:headEnd type="none" w="med" len="med"/>
+                      <a:tailEnd type="none" w="med" len="med"/>
+                    </a:lnL>
+                    <a:lnR w="9525" cap="flat" cmpd="sng" algn="ctr">
+                      <a:solidFill>
+                        <a:srgbClr val="DADCE0"/>
+                      </a:solidFill>
+                      <a:prstDash val="solid"/>
+                      <a:round/>
+                      <a:headEnd type="none" w="med" len="med"/>
+                      <a:tailEnd type="none" w="med" len="med"/>
+                    </a:lnR>
+                    <a:lnT w="9525" cap="flat" cmpd="sng" algn="ctr">
+                      <a:solidFill>
+                        <a:srgbClr val="DADCE0"/>
+                      </a:solidFill>
+                      <a:prstDash val="solid"/>
+                      <a:round/>
+                      <a:headEnd type="none" w="med" len="med"/>
+                      <a:tailEnd type="none" w="med" len="med"/>
+                    </a:lnT>
+                    <a:lnB w="9525" cap="flat" cmpd="sng" algn="ctr">
+                      <a:solidFill>
+                        <a:srgbClr val="DADCE0"/>
+                      </a:solidFill>
+                      <a:prstDash val="solid"/>
+                      <a:round/>
+                      <a:headEnd type="none" w="med" len="med"/>
+                      <a:tailEnd type="none" w="med" len="med"/>
+                    </a:lnB>
+                    <a:solidFill>
+                      <a:srgbClr val="F8F9FA"/>
+                    </a:solidFill>
+                  </a:tcPr>
+                </a:tc>
+                <a:tc>
+                  <a:txBody>
+                    <a:bodyPr/>
+                    <a:lstStyle/>
+                    <a:p>
+                      <a:pPr indent="0" marL="0">
+                        <a:buNone/>
+                      </a:pPr>
+                      <a:r>
+                        <a:rPr lang="en-US" sz="760" dirty="0">
+                          <a:solidFill>
+                            <a:srgbClr val="5F6368"/>
+                          </a:solidFill>
+                          <a:latin typeface="Roboto" pitchFamily="34" charset="0"/>
+                          <a:ea typeface="Roboto" pitchFamily="34" charset="-122"/>
+                          <a:cs typeface="Roboto" pitchFamily="34" charset="-120"/>
+                        </a:rPr>
+                        <a:t>$1,850 / tenant / month • OCC/FFIEC banking, HIPAA healthcare &amp; EU DORA (6/6 PASS)</a:t>
+                      </a:r>
+                      <a:endParaRPr lang="en-US" sz="760" dirty="0">
+                        <a:latin typeface="Roboto" charset="0"/>
+                        <a:ea typeface="Roboto" charset="0"/>
+                        <a:cs typeface="Roboto" charset="0"/>
+                      </a:endParaRPr>
+                    </a:p>
+                  </a:txBody>
+                  <a:tcPr marL="91440" marR="91440" marT="45720" marB="45720" anchor="ctr">
+                    <a:lnL w="9525" cap="flat" cmpd="sng" algn="ctr">
+                      <a:solidFill>
+                        <a:srgbClr val="DADCE0"/>
+                      </a:solidFill>
+                      <a:prstDash val="solid"/>
+                      <a:round/>
+                      <a:headEnd type="none" w="med" len="med"/>
+                      <a:tailEnd type="none" w="med" len="med"/>
+                    </a:lnL>
+                    <a:lnR w="9525" cap="flat" cmpd="sng" algn="ctr">
+                      <a:solidFill>
+                        <a:srgbClr val="DADCE0"/>
+                      </a:solidFill>
+                      <a:prstDash val="solid"/>
+                      <a:round/>
+                      <a:headEnd type="none" w="med" len="med"/>
+                      <a:tailEnd type="none" w="med" len="med"/>
+                    </a:lnR>
+                    <a:lnT w="9525" cap="flat" cmpd="sng" algn="ctr">
+                      <a:solidFill>
+                        <a:srgbClr val="DADCE0"/>
+                      </a:solidFill>
+                      <a:prstDash val="solid"/>
+                      <a:round/>
+                      <a:headEnd type="none" w="med" len="med"/>
+                      <a:tailEnd type="none" w="med" len="med"/>
+                    </a:lnT>
+                    <a:lnB w="9525" cap="flat" cmpd="sng" algn="ctr">
+                      <a:solidFill>
+                        <a:srgbClr val="DADCE0"/>
+                      </a:solidFill>
+                      <a:prstDash val="solid"/>
+                      <a:round/>
+                      <a:headEnd type="none" w="med" len="med"/>
+                      <a:tailEnd type="none" w="med" len="med"/>
+                    </a:lnB>
+                    <a:solidFill>
+                      <a:srgbClr val="F8F9FA"/>
+                    </a:solidFill>
+                  </a:tcPr>
+                </a:tc>
+                <a:tc>
+                  <a:txBody>
+                    <a:bodyPr/>
+                    <a:lstStyle/>
+                    <a:p>
+                      <a:pPr indent="0" marL="0">
+                        <a:buNone/>
+                      </a:pPr>
+                      <a:r>
+                        <a:rPr lang="en-US" sz="760" dirty="0">
+                          <a:solidFill>
+                            <a:srgbClr val="0D652D"/>
+                          </a:solidFill>
+                          <a:latin typeface="Roboto" pitchFamily="34" charset="0"/>
+                          <a:ea typeface="Roboto" pitchFamily="34" charset="-122"/>
+                          <a:cs typeface="Roboto" pitchFamily="34" charset="-120"/>
+                        </a:rPr>
+                        <a:t>$2,450 / tenant / month • Sovereign defense, core ledger &amp; strict open-weight mandates</a:t>
+                      </a:r>
+                      <a:endParaRPr lang="en-US" sz="760" dirty="0">
+                        <a:latin typeface="Roboto" charset="0"/>
+                        <a:ea typeface="Roboto" charset="0"/>
+                        <a:cs typeface="Roboto" charset="0"/>
+                      </a:endParaRPr>
+                    </a:p>
+                  </a:txBody>
+                  <a:tcPr marL="91440" marR="91440" marT="45720" marB="45720" anchor="ctr">
+                    <a:lnL w="9525" cap="flat" cmpd="sng" algn="ctr">
+                      <a:solidFill>
+                        <a:srgbClr val="DADCE0"/>
+                      </a:solidFill>
+                      <a:prstDash val="solid"/>
+                      <a:round/>
+                      <a:headEnd type="none" w="med" len="med"/>
+                      <a:tailEnd type="none" w="med" len="med"/>
+                    </a:lnL>
+                    <a:lnR w="9525" cap="flat" cmpd="sng" algn="ctr">
+                      <a:solidFill>
+                        <a:srgbClr val="DADCE0"/>
+                      </a:solidFill>
+                      <a:prstDash val="solid"/>
+                      <a:round/>
+                      <a:headEnd type="none" w="med" len="med"/>
+                      <a:tailEnd type="none" w="med" len="med"/>
+                    </a:lnR>
+                    <a:lnT w="9525" cap="flat" cmpd="sng" algn="ctr">
+                      <a:solidFill>
+                        <a:srgbClr val="DADCE0"/>
+                      </a:solidFill>
+                      <a:prstDash val="solid"/>
+                      <a:round/>
+                      <a:headEnd type="none" w="med" len="med"/>
+                      <a:tailEnd type="none" w="med" len="med"/>
+                    </a:lnT>
+                    <a:lnB w="9525" cap="flat" cmpd="sng" algn="ctr">
+                      <a:solidFill>
+                        <a:srgbClr val="DADCE0"/>
+                      </a:solidFill>
+                      <a:prstDash val="solid"/>
+                      <a:round/>
+                      <a:headEnd type="none" w="med" len="med"/>
+                      <a:tailEnd type="none" w="med" len="med"/>
+                    </a:lnB>
+                    <a:solidFill>
+                      <a:srgbClr val="F8F9FA"/>
+                    </a:solidFill>
+                  </a:tcPr>
+                </a:tc>
+              </a:tr>
+            </a:tbl>
+          </a:graphicData>
+        </a:graphic>
+      </p:graphicFrame>
+      <p:sp>
+        <p:nvSpPr>
+          <p:cNvPr id="20" name="Shape 17"/>
+          <p:cNvSpPr/>
+          <p:nvPr/>
+        </p:nvSpPr>
+        <p:spPr>
+          <a:xfrm>
+            <a:off x="411480" y="4663440"/>
+            <a:ext cx="2718511" cy="1408176"/>
           </a:xfrm>
           <a:prstGeom prst="roundRect">
             <a:avLst>
-              <a:gd name="adj" fmla="val 3239"/>
+              <a:gd name="adj" fmla="val 5195"/>
             </a:avLst>
           </a:prstGeom>
           <a:solidFill>
@@ -19485,14 +21432,14 @@
       </p:sp>
       <p:sp>
         <p:nvSpPr>
-          <p:cNvPr id="20" name="Shape 18"/>
-          <p:cNvSpPr/>
-          <p:nvPr/>
-        </p:nvSpPr>
-        <p:spPr>
-          <a:xfrm>
-            <a:off x="411480" y="1353312"/>
-            <a:ext cx="5583326" cy="59436"/>
+          <p:cNvPr id="21" name="Shape 18"/>
+          <p:cNvSpPr/>
+          <p:nvPr/>
+        </p:nvSpPr>
+        <p:spPr>
+          <a:xfrm>
+            <a:off x="411480" y="4663440"/>
+            <a:ext cx="2718511" cy="50292"/>
           </a:xfrm>
           <a:prstGeom prst="rect">
             <a:avLst/>
@@ -19505,150 +21452,73 @@
       </p:sp>
       <p:sp>
         <p:nvSpPr>
-          <p:cNvPr id="21" name="Shape 19"/>
-          <p:cNvSpPr/>
-          <p:nvPr/>
-        </p:nvSpPr>
-        <p:spPr>
-          <a:xfrm>
-            <a:off x="557784" y="1481328"/>
-            <a:ext cx="365760" cy="256032"/>
-          </a:xfrm>
-          <a:prstGeom prst="roundRect">
-            <a:avLst>
-              <a:gd name="adj" fmla="val 21429"/>
-            </a:avLst>
-          </a:prstGeom>
-          <a:solidFill>
-            <a:srgbClr val="E8F0FE"/>
-          </a:solidFill>
-          <a:ln/>
-        </p:spPr>
-      </p:sp>
-      <p:sp>
-        <p:nvSpPr>
-          <p:cNvPr id="22" name="Text 20"/>
-          <p:cNvSpPr/>
-          <p:nvPr/>
-        </p:nvSpPr>
-        <p:spPr>
-          <a:xfrm>
-            <a:off x="557784" y="1481328"/>
-            <a:ext cx="365760" cy="256032"/>
-          </a:xfrm>
-          <a:prstGeom prst="rect">
-            <a:avLst/>
-          </a:prstGeom>
-          <a:noFill/>
-          <a:ln/>
-        </p:spPr>
-        <p:txBody>
-          <a:bodyPr wrap="square" rtlCol="0" anchor="ctr"/>
-          <a:lstStyle/>
-          <a:p>
-            <a:pPr algn="ctr" indent="0" marL="0">
-              <a:buNone/>
-            </a:pPr>
-            <a:r>
-              <a:rPr lang="en-US" sz="920" b="1" dirty="0">
-                <a:solidFill>
-                  <a:srgbClr val="174EA6"/>
+          <p:cNvPr id="22" name="Text 19"/>
+          <p:cNvSpPr/>
+          <p:nvPr/>
+        </p:nvSpPr>
+        <p:spPr>
+          <a:xfrm>
+            <a:off x="521208" y="4736592"/>
+            <a:ext cx="2499055" cy="256032"/>
+          </a:xfrm>
+          <a:prstGeom prst="rect">
+            <a:avLst/>
+          </a:prstGeom>
+          <a:noFill/>
+          <a:ln/>
+        </p:spPr>
+        <p:txBody>
+          <a:bodyPr wrap="square" rtlCol="0" anchor="ctr">
+            <a:normAutofit/>
+          </a:bodyPr>
+          <a:lstStyle/>
+          <a:p>
+            <a:pPr indent="0" marL="0">
+              <a:buNone/>
+            </a:pPr>
+            <a:r>
+              <a:rPr lang="en-US" sz="760" b="1" dirty="0">
+                <a:solidFill>
+                  <a:srgbClr val="3C4043"/>
                 </a:solidFill>
                 <a:latin typeface="Google Sans" pitchFamily="34" charset="0"/>
                 <a:ea typeface="Google Sans" pitchFamily="34" charset="-122"/>
                 <a:cs typeface="Google Sans" pitchFamily="34" charset="-120"/>
               </a:rPr>
-              <a:t>01</a:t>
-            </a:r>
-            <a:endParaRPr lang="en-US" sz="920" dirty="0"/>
-          </a:p>
-        </p:txBody>
-      </p:sp>
-      <p:sp>
-        <p:nvSpPr>
-          <p:cNvPr id="23" name="Text 21"/>
-          <p:cNvSpPr/>
-          <p:nvPr/>
-        </p:nvSpPr>
-        <p:spPr>
-          <a:xfrm>
-            <a:off x="996696" y="1463040"/>
-            <a:ext cx="4851806" cy="329184"/>
-          </a:xfrm>
-          <a:prstGeom prst="rect">
-            <a:avLst/>
-          </a:prstGeom>
-          <a:noFill/>
-          <a:ln/>
-        </p:spPr>
-        <p:txBody>
-          <a:bodyPr wrap="square" rtlCol="0" anchor="ctr"/>
+              <a:t>1. Why Logical Pool Is Insufficient Here</a:t>
+            </a:r>
+            <a:endParaRPr lang="en-US" sz="760" dirty="0"/>
+          </a:p>
+        </p:txBody>
+      </p:sp>
+      <p:sp>
+        <p:nvSpPr>
+          <p:cNvPr id="23" name="Text 20"/>
+          <p:cNvSpPr/>
+          <p:nvPr/>
+        </p:nvSpPr>
+        <p:spPr>
+          <a:xfrm>
+            <a:off x="521208" y="4992624"/>
+            <a:ext cx="2499055" cy="1024128"/>
+          </a:xfrm>
+          <a:prstGeom prst="rect">
+            <a:avLst/>
+          </a:prstGeom>
+          <a:noFill/>
+          <a:ln/>
+        </p:spPr>
+        <p:txBody>
+          <a:bodyPr wrap="square" rtlCol="0" anchor="t">
+            <a:normAutofit/>
+          </a:bodyPr>
           <a:lstStyle/>
           <a:p>
             <a:pPr indent="0" marL="0">
               <a:buNone/>
             </a:pPr>
             <a:r>
-              <a:rPr lang="en-US" sz="1140" b="1" dirty="0">
-                <a:solidFill>
-                  <a:srgbClr val="3C4043"/>
-                </a:solidFill>
-                <a:latin typeface="Google Sans" pitchFamily="34" charset="0"/>
-                <a:ea typeface="Google Sans" pitchFamily="34" charset="-122"/>
-                <a:cs typeface="Google Sans" pitchFamily="34" charset="-120"/>
-              </a:rPr>
-              <a:t>Wall 1 — mTLS &amp; IAM Principal Access Boundaries (PAB)</a:t>
-            </a:r>
-            <a:endParaRPr lang="en-US" sz="1140" dirty="0"/>
-          </a:p>
-        </p:txBody>
-      </p:sp>
-      <p:sp>
-        <p:nvSpPr>
-          <p:cNvPr id="24" name="Shape 22"/>
-          <p:cNvSpPr/>
-          <p:nvPr/>
-        </p:nvSpPr>
-        <p:spPr>
-          <a:xfrm>
-            <a:off x="557784" y="1847088"/>
-            <a:ext cx="5290718" cy="9144"/>
-          </a:xfrm>
-          <a:prstGeom prst="rect">
-            <a:avLst/>
-          </a:prstGeom>
-          <a:solidFill>
-            <a:srgbClr val="DADCE0"/>
-          </a:solidFill>
-          <a:ln/>
-        </p:spPr>
-      </p:sp>
-      <p:sp>
-        <p:nvSpPr>
-          <p:cNvPr id="25" name="Text 23"/>
-          <p:cNvSpPr/>
-          <p:nvPr/>
-        </p:nvSpPr>
-        <p:spPr>
-          <a:xfrm>
-            <a:off x="557784" y="1901952"/>
-            <a:ext cx="5290718" cy="850392"/>
-          </a:xfrm>
-          <a:prstGeom prst="rect">
-            <a:avLst/>
-          </a:prstGeom>
-          <a:noFill/>
-          <a:ln/>
-        </p:spPr>
-        <p:txBody>
-          <a:bodyPr wrap="square" rtlCol="0" anchor="t"/>
-          <a:lstStyle/>
-          <a:p>
-            <a:pPr indent="0" marL="0">
-              <a:buNone/>
-            </a:pPr>
-            <a:r>
-              <a:rPr lang="en-US" sz="980" dirty="0">
+              <a:rPr lang="en-US" sz="740" dirty="0">
                 <a:solidFill>
                   <a:srgbClr val="5F6368"/>
                 </a:solidFill>
@@ -19656,188 +21526,26 @@
                 <a:ea typeface="Roboto" pitchFamily="34" charset="-122"/>
                 <a:cs typeface="Roboto" pitchFamily="34" charset="-120"/>
               </a:rPr>
-              <a:t>Every request must present a pinned BeyondCorp client certificate (cert_sha256) and pass an IAM PAB rule binding the caller strictly to that tenant’s project.</a:t>
-            </a:r>
-            <a:endParaRPr lang="en-US" sz="980" dirty="0"/>
-          </a:p>
-        </p:txBody>
-      </p:sp>
-      <p:sp>
-        <p:nvSpPr>
-          <p:cNvPr id="26" name="Shape 24"/>
-          <p:cNvSpPr/>
-          <p:nvPr/>
-        </p:nvSpPr>
-        <p:spPr>
-          <a:xfrm>
-            <a:off x="557784" y="2788920"/>
-            <a:ext cx="5290718" cy="493776"/>
+              <a:t>OCC/FDIC banking, HIPAA, EU DORA, and defense contracts legally mandate physical project boundaries and customer-held KMS kill-switches.</a:t>
+            </a:r>
+            <a:endParaRPr lang="en-US" sz="740" dirty="0"/>
+          </a:p>
+        </p:txBody>
+      </p:sp>
+      <p:sp>
+        <p:nvSpPr>
+          <p:cNvPr id="24" name="Shape 21"/>
+          <p:cNvSpPr/>
+          <p:nvPr/>
+        </p:nvSpPr>
+        <p:spPr>
+          <a:xfrm>
+            <a:off x="3294583" y="4663440"/>
+            <a:ext cx="2718511" cy="1408176"/>
           </a:xfrm>
           <a:prstGeom prst="roundRect">
             <a:avLst>
-              <a:gd name="adj" fmla="val 11111"/>
-            </a:avLst>
-          </a:prstGeom>
-          <a:solidFill>
-            <a:srgbClr val="FFFFFF"/>
-          </a:solidFill>
-          <a:ln w="9525">
-            <a:solidFill>
-              <a:srgbClr val="DADCE0"/>
-            </a:solidFill>
-            <a:prstDash val="solid"/>
-          </a:ln>
-        </p:spPr>
-      </p:sp>
-      <p:sp>
-        <p:nvSpPr>
-          <p:cNvPr id="27" name="Shape 25"/>
-          <p:cNvSpPr/>
-          <p:nvPr/>
-        </p:nvSpPr>
-        <p:spPr>
-          <a:xfrm>
-            <a:off x="557784" y="2788920"/>
-            <a:ext cx="54864" cy="493776"/>
-          </a:xfrm>
-          <a:prstGeom prst="rect">
-            <a:avLst/>
-          </a:prstGeom>
-          <a:solidFill>
-            <a:srgbClr val="4285F4"/>
-          </a:solidFill>
-          <a:ln/>
-        </p:spPr>
-      </p:sp>
-      <p:sp>
-        <p:nvSpPr>
-          <p:cNvPr id="28" name="Text 26"/>
-          <p:cNvSpPr/>
-          <p:nvPr/>
-        </p:nvSpPr>
-        <p:spPr>
-          <a:xfrm>
-            <a:off x="649224" y="2816352"/>
-            <a:ext cx="5162702" cy="438912"/>
-          </a:xfrm>
-          <a:prstGeom prst="rect">
-            <a:avLst/>
-          </a:prstGeom>
-          <a:noFill/>
-          <a:ln/>
-        </p:spPr>
-        <p:txBody>
-          <a:bodyPr wrap="square" rtlCol="0" anchor="ctr"/>
-          <a:lstStyle/>
-          <a:p>
-            <a:pPr indent="0" marL="0">
-              <a:buNone/>
-            </a:pPr>
-            <a:r>
-              <a:rPr lang="en-US" sz="750" b="1" dirty="0">
-                <a:solidFill>
-                  <a:srgbClr val="3C4043"/>
-                </a:solidFill>
-                <a:latin typeface="Google Sans" pitchFamily="34" charset="0"/>
-                <a:ea typeface="Google Sans" pitchFamily="34" charset="-122"/>
-                <a:cs typeface="Google Sans" pitchFamily="34" charset="-120"/>
-              </a:rPr>
-              <a:t>Cloud Stack: BeyondCorp Enterprise mTLS + Google Cloud IAM Principal Access Boundary (PAB)
-</a:t>
-            </a:r>
-            <a:pPr indent="0" marL="0">
-              <a:buNone/>
-            </a:pPr>
-            <a:r>
-              <a:rPr lang="en-US" sz="730" dirty="0">
-                <a:solidFill>
-                  <a:srgbClr val="5F6368"/>
-                </a:solidFill>
-                <a:latin typeface="Roboto" pitchFamily="34" charset="0"/>
-                <a:ea typeface="Roboto" pitchFamily="34" charset="-122"/>
-                <a:cs typeface="Roboto" pitchFamily="34" charset="-120"/>
-              </a:rPr>
-              <a:t>Target &amp; SLA: Neutralizes Stolen Credentials: Principals Cannot Authenticate Outside Their Silo</a:t>
-            </a:r>
-            <a:endParaRPr lang="en-US" sz="750" dirty="0"/>
-          </a:p>
-        </p:txBody>
-      </p:sp>
-      <p:sp>
-        <p:nvSpPr>
-          <p:cNvPr id="29" name="Shape 27"/>
-          <p:cNvSpPr/>
-          <p:nvPr/>
-        </p:nvSpPr>
-        <p:spPr>
-          <a:xfrm>
-            <a:off x="557784" y="3337560"/>
-            <a:ext cx="5290718" cy="219456"/>
-          </a:xfrm>
-          <a:prstGeom prst="roundRect">
-            <a:avLst>
-              <a:gd name="adj" fmla="val 20833"/>
-            </a:avLst>
-          </a:prstGeom>
-          <a:solidFill>
-            <a:srgbClr val="E8F0FE"/>
-          </a:solidFill>
-          <a:ln/>
-        </p:spPr>
-      </p:sp>
-      <p:sp>
-        <p:nvSpPr>
-          <p:cNvPr id="30" name="Text 28"/>
-          <p:cNvSpPr/>
-          <p:nvPr/>
-        </p:nvSpPr>
-        <p:spPr>
-          <a:xfrm>
-            <a:off x="612648" y="3337560"/>
-            <a:ext cx="5180990" cy="219456"/>
-          </a:xfrm>
-          <a:prstGeom prst="rect">
-            <a:avLst/>
-          </a:prstGeom>
-          <a:noFill/>
-          <a:ln/>
-        </p:spPr>
-        <p:txBody>
-          <a:bodyPr wrap="square" rtlCol="0" anchor="ctr"/>
-          <a:lstStyle/>
-          <a:p>
-            <a:pPr indent="0" marL="0">
-              <a:buNone/>
-            </a:pPr>
-            <a:r>
-              <a:rPr lang="en-US" sz="750" b="1" dirty="0">
-                <a:solidFill>
-                  <a:srgbClr val="174EA6"/>
-                </a:solidFill>
-                <a:latin typeface="Google Sans" pitchFamily="34" charset="0"/>
-                <a:ea typeface="Google Sans" pitchFamily="34" charset="-122"/>
-                <a:cs typeface="Google Sans" pitchFamily="34" charset="-120"/>
-              </a:rPr>
-              <a:t>Wall 1: Identity &amp; mTLS Boundary</a:t>
-            </a:r>
-            <a:endParaRPr lang="en-US" sz="750" dirty="0"/>
-          </a:p>
-        </p:txBody>
-      </p:sp>
-      <p:sp>
-        <p:nvSpPr>
-          <p:cNvPr id="31" name="Shape 29"/>
-          <p:cNvSpPr/>
-          <p:nvPr/>
-        </p:nvSpPr>
-        <p:spPr>
-          <a:xfrm>
-            <a:off x="6195974" y="1353312"/>
-            <a:ext cx="5583326" cy="2258568"/>
-          </a:xfrm>
-          <a:prstGeom prst="roundRect">
-            <a:avLst>
-              <a:gd name="adj" fmla="val 3239"/>
+              <a:gd name="adj" fmla="val 5195"/>
             </a:avLst>
           </a:prstGeom>
           <a:solidFill>
@@ -19853,14 +21561,14 @@
       </p:sp>
       <p:sp>
         <p:nvSpPr>
-          <p:cNvPr id="32" name="Shape 30"/>
-          <p:cNvSpPr/>
-          <p:nvPr/>
-        </p:nvSpPr>
-        <p:spPr>
-          <a:xfrm>
-            <a:off x="6195974" y="1353312"/>
-            <a:ext cx="5583326" cy="59436"/>
+          <p:cNvPr id="25" name="Shape 22"/>
+          <p:cNvSpPr/>
+          <p:nvPr/>
+        </p:nvSpPr>
+        <p:spPr>
+          <a:xfrm>
+            <a:off x="3294583" y="4663440"/>
+            <a:ext cx="2718511" cy="50292"/>
           </a:xfrm>
           <a:prstGeom prst="rect">
             <a:avLst/>
@@ -19873,150 +21581,73 @@
       </p:sp>
       <p:sp>
         <p:nvSpPr>
-          <p:cNvPr id="33" name="Shape 31"/>
-          <p:cNvSpPr/>
-          <p:nvPr/>
-        </p:nvSpPr>
-        <p:spPr>
-          <a:xfrm>
-            <a:off x="6342278" y="1481328"/>
-            <a:ext cx="365760" cy="256032"/>
-          </a:xfrm>
-          <a:prstGeom prst="roundRect">
-            <a:avLst>
-              <a:gd name="adj" fmla="val 21429"/>
-            </a:avLst>
-          </a:prstGeom>
-          <a:solidFill>
-            <a:srgbClr val="FCE8E6"/>
-          </a:solidFill>
-          <a:ln/>
-        </p:spPr>
-      </p:sp>
-      <p:sp>
-        <p:nvSpPr>
-          <p:cNvPr id="34" name="Text 32"/>
-          <p:cNvSpPr/>
-          <p:nvPr/>
-        </p:nvSpPr>
-        <p:spPr>
-          <a:xfrm>
-            <a:off x="6342278" y="1481328"/>
-            <a:ext cx="365760" cy="256032"/>
-          </a:xfrm>
-          <a:prstGeom prst="rect">
-            <a:avLst/>
-          </a:prstGeom>
-          <a:noFill/>
-          <a:ln/>
-        </p:spPr>
-        <p:txBody>
-          <a:bodyPr wrap="square" rtlCol="0" anchor="ctr"/>
-          <a:lstStyle/>
-          <a:p>
-            <a:pPr algn="ctr" indent="0" marL="0">
-              <a:buNone/>
-            </a:pPr>
-            <a:r>
-              <a:rPr lang="en-US" sz="920" b="1" dirty="0">
-                <a:solidFill>
-                  <a:srgbClr val="A50E0E"/>
+          <p:cNvPr id="26" name="Text 23"/>
+          <p:cNvSpPr/>
+          <p:nvPr/>
+        </p:nvSpPr>
+        <p:spPr>
+          <a:xfrm>
+            <a:off x="3404311" y="4736592"/>
+            <a:ext cx="2499055" cy="256032"/>
+          </a:xfrm>
+          <a:prstGeom prst="rect">
+            <a:avLst/>
+          </a:prstGeom>
+          <a:noFill/>
+          <a:ln/>
+        </p:spPr>
+        <p:txBody>
+          <a:bodyPr wrap="square" rtlCol="0" anchor="ctr">
+            <a:normAutofit/>
+          </a:bodyPr>
+          <a:lstStyle/>
+          <a:p>
+            <a:pPr indent="0" marL="0">
+              <a:buNone/>
+            </a:pPr>
+            <a:r>
+              <a:rPr lang="en-US" sz="760" b="1" dirty="0">
+                <a:solidFill>
+                  <a:srgbClr val="3C4043"/>
                 </a:solidFill>
                 <a:latin typeface="Google Sans" pitchFamily="34" charset="0"/>
                 <a:ea typeface="Google Sans" pitchFamily="34" charset="-122"/>
                 <a:cs typeface="Google Sans" pitchFamily="34" charset="-120"/>
               </a:rPr>
-              <a:t>02</a:t>
-            </a:r>
-            <a:endParaRPr lang="en-US" sz="920" dirty="0"/>
-          </a:p>
-        </p:txBody>
-      </p:sp>
-      <p:sp>
-        <p:nvSpPr>
-          <p:cNvPr id="35" name="Text 33"/>
-          <p:cNvSpPr/>
-          <p:nvPr/>
-        </p:nvSpPr>
-        <p:spPr>
-          <a:xfrm>
-            <a:off x="6781190" y="1463040"/>
-            <a:ext cx="4851806" cy="329184"/>
-          </a:xfrm>
-          <a:prstGeom prst="rect">
-            <a:avLst/>
-          </a:prstGeom>
-          <a:noFill/>
-          <a:ln/>
-        </p:spPr>
-        <p:txBody>
-          <a:bodyPr wrap="square" rtlCol="0" anchor="ctr"/>
+              <a:t>2. Option B1: Vertex AI PT + VPC-SC + CMEK</a:t>
+            </a:r>
+            <a:endParaRPr lang="en-US" sz="760" dirty="0"/>
+          </a:p>
+        </p:txBody>
+      </p:sp>
+      <p:sp>
+        <p:nvSpPr>
+          <p:cNvPr id="27" name="Text 24"/>
+          <p:cNvSpPr/>
+          <p:nvPr/>
+        </p:nvSpPr>
+        <p:spPr>
+          <a:xfrm>
+            <a:off x="3404311" y="4992624"/>
+            <a:ext cx="2499055" cy="1024128"/>
+          </a:xfrm>
+          <a:prstGeom prst="rect">
+            <a:avLst/>
+          </a:prstGeom>
+          <a:noFill/>
+          <a:ln/>
+        </p:spPr>
+        <p:txBody>
+          <a:bodyPr wrap="square" rtlCol="0" anchor="t">
+            <a:normAutofit/>
+          </a:bodyPr>
           <a:lstStyle/>
           <a:p>
             <a:pPr indent="0" marL="0">
               <a:buNone/>
             </a:pPr>
             <a:r>
-              <a:rPr lang="en-US" sz="1140" b="1" dirty="0">
-                <a:solidFill>
-                  <a:srgbClr val="3C4043"/>
-                </a:solidFill>
-                <a:latin typeface="Google Sans" pitchFamily="34" charset="0"/>
-                <a:ea typeface="Google Sans" pitchFamily="34" charset="-122"/>
-                <a:cs typeface="Google Sans" pitchFamily="34" charset="-120"/>
-              </a:rPr>
-              <a:t>Wall 2 — VPC Service Controls (VPC-SC) Data Perimeter</a:t>
-            </a:r>
-            <a:endParaRPr lang="en-US" sz="1140" dirty="0"/>
-          </a:p>
-        </p:txBody>
-      </p:sp>
-      <p:sp>
-        <p:nvSpPr>
-          <p:cNvPr id="36" name="Shape 34"/>
-          <p:cNvSpPr/>
-          <p:nvPr/>
-        </p:nvSpPr>
-        <p:spPr>
-          <a:xfrm>
-            <a:off x="6342278" y="1847088"/>
-            <a:ext cx="5290718" cy="9144"/>
-          </a:xfrm>
-          <a:prstGeom prst="rect">
-            <a:avLst/>
-          </a:prstGeom>
-          <a:solidFill>
-            <a:srgbClr val="DADCE0"/>
-          </a:solidFill>
-          <a:ln/>
-        </p:spPr>
-      </p:sp>
-      <p:sp>
-        <p:nvSpPr>
-          <p:cNvPr id="37" name="Text 35"/>
-          <p:cNvSpPr/>
-          <p:nvPr/>
-        </p:nvSpPr>
-        <p:spPr>
-          <a:xfrm>
-            <a:off x="6342278" y="1901952"/>
-            <a:ext cx="5290718" cy="850392"/>
-          </a:xfrm>
-          <a:prstGeom prst="rect">
-            <a:avLst/>
-          </a:prstGeom>
-          <a:noFill/>
-          <a:ln/>
-        </p:spPr>
-        <p:txBody>
-          <a:bodyPr wrap="square" rtlCol="0" anchor="t"/>
-          <a:lstStyle/>
-          <a:p>
-            <a:pPr indent="0" marL="0">
-              <a:buNone/>
-            </a:pPr>
-            <a:r>
-              <a:rPr lang="en-US" sz="980" dirty="0">
+              <a:rPr lang="en-US" sz="740" dirty="0">
                 <a:solidFill>
                   <a:srgbClr val="5F6368"/>
                 </a:solidFill>
@@ -20024,188 +21655,26 @@
                 <a:ea typeface="Roboto" pitchFamily="34" charset="-122"/>
                 <a:cs typeface="Roboto" pitchFamily="34" charset="-120"/>
               </a:rPr>
-              <a:t>Wraps Vertex AI, AlloyDB, Cloud Storage, GKE, and BigQuery inside a service perimeter that blocks unauthorized egress or cross-project copies (HTTP 403).</a:t>
-            </a:r>
-            <a:endParaRPr lang="en-US" sz="980" dirty="0"/>
-          </a:p>
-        </p:txBody>
-      </p:sp>
-      <p:sp>
-        <p:nvSpPr>
-          <p:cNvPr id="38" name="Shape 36"/>
-          <p:cNvSpPr/>
-          <p:nvPr/>
-        </p:nvSpPr>
-        <p:spPr>
-          <a:xfrm>
-            <a:off x="6342278" y="2788920"/>
-            <a:ext cx="5290718" cy="493776"/>
+              <a:t>Zero GPU operational overhead with Gemini 2.5 Pro Provisioned Throughput locked inside the tenant VPC-SC perimeter and Cloud KMS key ring.</a:t>
+            </a:r>
+            <a:endParaRPr lang="en-US" sz="740" dirty="0"/>
+          </a:p>
+        </p:txBody>
+      </p:sp>
+      <p:sp>
+        <p:nvSpPr>
+          <p:cNvPr id="28" name="Shape 25"/>
+          <p:cNvSpPr/>
+          <p:nvPr/>
+        </p:nvSpPr>
+        <p:spPr>
+          <a:xfrm>
+            <a:off x="6177686" y="4663440"/>
+            <a:ext cx="2718511" cy="1408176"/>
           </a:xfrm>
           <a:prstGeom prst="roundRect">
             <a:avLst>
-              <a:gd name="adj" fmla="val 11111"/>
-            </a:avLst>
-          </a:prstGeom>
-          <a:solidFill>
-            <a:srgbClr val="FFFFFF"/>
-          </a:solidFill>
-          <a:ln w="9525">
-            <a:solidFill>
-              <a:srgbClr val="DADCE0"/>
-            </a:solidFill>
-            <a:prstDash val="solid"/>
-          </a:ln>
-        </p:spPr>
-      </p:sp>
-      <p:sp>
-        <p:nvSpPr>
-          <p:cNvPr id="39" name="Shape 37"/>
-          <p:cNvSpPr/>
-          <p:nvPr/>
-        </p:nvSpPr>
-        <p:spPr>
-          <a:xfrm>
-            <a:off x="6342278" y="2788920"/>
-            <a:ext cx="54864" cy="493776"/>
-          </a:xfrm>
-          <a:prstGeom prst="rect">
-            <a:avLst/>
-          </a:prstGeom>
-          <a:solidFill>
-            <a:srgbClr val="EA4335"/>
-          </a:solidFill>
-          <a:ln/>
-        </p:spPr>
-      </p:sp>
-      <p:sp>
-        <p:nvSpPr>
-          <p:cNvPr id="40" name="Text 38"/>
-          <p:cNvSpPr/>
-          <p:nvPr/>
-        </p:nvSpPr>
-        <p:spPr>
-          <a:xfrm>
-            <a:off x="6433718" y="2816352"/>
-            <a:ext cx="5162702" cy="438912"/>
-          </a:xfrm>
-          <a:prstGeom prst="rect">
-            <a:avLst/>
-          </a:prstGeom>
-          <a:noFill/>
-          <a:ln/>
-        </p:spPr>
-        <p:txBody>
-          <a:bodyPr wrap="square" rtlCol="0" anchor="ctr"/>
-          <a:lstStyle/>
-          <a:p>
-            <a:pPr indent="0" marL="0">
-              <a:buNone/>
-            </a:pPr>
-            <a:r>
-              <a:rPr lang="en-US" sz="750" b="1" dirty="0">
-                <a:solidFill>
-                  <a:srgbClr val="3C4043"/>
-                </a:solidFill>
-                <a:latin typeface="Google Sans" pitchFamily="34" charset="0"/>
-                <a:ea typeface="Google Sans" pitchFamily="34" charset="-122"/>
-                <a:cs typeface="Google Sans" pitchFamily="34" charset="-120"/>
-              </a:rPr>
-              <a:t>Cloud Stack: Google Cloud Access Context Manager + VPC Service Controls (Restricted VIP)
-</a:t>
-            </a:r>
-            <a:pPr indent="0" marL="0">
-              <a:buNone/>
-            </a:pPr>
-            <a:r>
-              <a:rPr lang="en-US" sz="730" dirty="0">
-                <a:solidFill>
-                  <a:srgbClr val="5F6368"/>
-                </a:solidFill>
-                <a:latin typeface="Roboto" pitchFamily="34" charset="0"/>
-                <a:ea typeface="Roboto" pitchFamily="34" charset="-122"/>
-                <a:cs typeface="Roboto" pitchFamily="34" charset="-120"/>
-              </a:rPr>
-              <a:t>Target &amp; SLA: Blocks All Data Exfiltration to External Projects or Unapproved Buckets (HTTP 403)</a:t>
-            </a:r>
-            <a:endParaRPr lang="en-US" sz="750" dirty="0"/>
-          </a:p>
-        </p:txBody>
-      </p:sp>
-      <p:sp>
-        <p:nvSpPr>
-          <p:cNvPr id="41" name="Shape 39"/>
-          <p:cNvSpPr/>
-          <p:nvPr/>
-        </p:nvSpPr>
-        <p:spPr>
-          <a:xfrm>
-            <a:off x="6342278" y="3337560"/>
-            <a:ext cx="5290718" cy="219456"/>
-          </a:xfrm>
-          <a:prstGeom prst="roundRect">
-            <a:avLst>
-              <a:gd name="adj" fmla="val 20833"/>
-            </a:avLst>
-          </a:prstGeom>
-          <a:solidFill>
-            <a:srgbClr val="FCE8E6"/>
-          </a:solidFill>
-          <a:ln/>
-        </p:spPr>
-      </p:sp>
-      <p:sp>
-        <p:nvSpPr>
-          <p:cNvPr id="42" name="Text 40"/>
-          <p:cNvSpPr/>
-          <p:nvPr/>
-        </p:nvSpPr>
-        <p:spPr>
-          <a:xfrm>
-            <a:off x="6397142" y="3337560"/>
-            <a:ext cx="5180990" cy="219456"/>
-          </a:xfrm>
-          <a:prstGeom prst="rect">
-            <a:avLst/>
-          </a:prstGeom>
-          <a:noFill/>
-          <a:ln/>
-        </p:spPr>
-        <p:txBody>
-          <a:bodyPr wrap="square" rtlCol="0" anchor="ctr"/>
-          <a:lstStyle/>
-          <a:p>
-            <a:pPr indent="0" marL="0">
-              <a:buNone/>
-            </a:pPr>
-            <a:r>
-              <a:rPr lang="en-US" sz="750" b="1" dirty="0">
-                <a:solidFill>
-                  <a:srgbClr val="A50E0E"/>
-                </a:solidFill>
-                <a:latin typeface="Google Sans" pitchFamily="34" charset="0"/>
-                <a:ea typeface="Google Sans" pitchFamily="34" charset="-122"/>
-                <a:cs typeface="Google Sans" pitchFamily="34" charset="-120"/>
-              </a:rPr>
-              <a:t>Wall 2: VPC-SC Data Perimeter</a:t>
-            </a:r>
-            <a:endParaRPr lang="en-US" sz="750" dirty="0"/>
-          </a:p>
-        </p:txBody>
-      </p:sp>
-      <p:sp>
-        <p:nvSpPr>
-          <p:cNvPr id="43" name="Shape 41"/>
-          <p:cNvSpPr/>
-          <p:nvPr/>
-        </p:nvSpPr>
-        <p:spPr>
-          <a:xfrm>
-            <a:off x="411480" y="3776472"/>
-            <a:ext cx="5583326" cy="2258568"/>
-          </a:xfrm>
-          <a:prstGeom prst="roundRect">
-            <a:avLst>
-              <a:gd name="adj" fmla="val 3239"/>
+              <a:gd name="adj" fmla="val 5195"/>
             </a:avLst>
           </a:prstGeom>
           <a:solidFill>
@@ -20221,14 +21690,14 @@
       </p:sp>
       <p:sp>
         <p:nvSpPr>
-          <p:cNvPr id="44" name="Shape 42"/>
-          <p:cNvSpPr/>
-          <p:nvPr/>
-        </p:nvSpPr>
-        <p:spPr>
-          <a:xfrm>
-            <a:off x="411480" y="3776472"/>
-            <a:ext cx="5583326" cy="59436"/>
+          <p:cNvPr id="29" name="Shape 26"/>
+          <p:cNvSpPr/>
+          <p:nvPr/>
+        </p:nvSpPr>
+        <p:spPr>
+          <a:xfrm>
+            <a:off x="6177686" y="4663440"/>
+            <a:ext cx="2718511" cy="50292"/>
           </a:xfrm>
           <a:prstGeom prst="rect">
             <a:avLst/>
@@ -20241,150 +21710,73 @@
       </p:sp>
       <p:sp>
         <p:nvSpPr>
-          <p:cNvPr id="45" name="Shape 43"/>
-          <p:cNvSpPr/>
-          <p:nvPr/>
-        </p:nvSpPr>
-        <p:spPr>
-          <a:xfrm>
-            <a:off x="557784" y="3904488"/>
-            <a:ext cx="365760" cy="256032"/>
-          </a:xfrm>
-          <a:prstGeom prst="roundRect">
-            <a:avLst>
-              <a:gd name="adj" fmla="val 21429"/>
-            </a:avLst>
-          </a:prstGeom>
-          <a:solidFill>
-            <a:srgbClr val="FEF7E0"/>
-          </a:solidFill>
-          <a:ln/>
-        </p:spPr>
-      </p:sp>
-      <p:sp>
-        <p:nvSpPr>
-          <p:cNvPr id="46" name="Text 44"/>
-          <p:cNvSpPr/>
-          <p:nvPr/>
-        </p:nvSpPr>
-        <p:spPr>
-          <a:xfrm>
-            <a:off x="557784" y="3904488"/>
-            <a:ext cx="365760" cy="256032"/>
-          </a:xfrm>
-          <a:prstGeom prst="rect">
-            <a:avLst/>
-          </a:prstGeom>
-          <a:noFill/>
-          <a:ln/>
-        </p:spPr>
-        <p:txBody>
-          <a:bodyPr wrap="square" rtlCol="0" anchor="ctr"/>
-          <a:lstStyle/>
-          <a:p>
-            <a:pPr algn="ctr" indent="0" marL="0">
-              <a:buNone/>
-            </a:pPr>
-            <a:r>
-              <a:rPr lang="en-US" sz="920" b="1" dirty="0">
-                <a:solidFill>
-                  <a:srgbClr val="B06000"/>
+          <p:cNvPr id="30" name="Text 27"/>
+          <p:cNvSpPr/>
+          <p:nvPr/>
+        </p:nvSpPr>
+        <p:spPr>
+          <a:xfrm>
+            <a:off x="6287414" y="4736592"/>
+            <a:ext cx="2499055" cy="256032"/>
+          </a:xfrm>
+          <a:prstGeom prst="rect">
+            <a:avLst/>
+          </a:prstGeom>
+          <a:noFill/>
+          <a:ln/>
+        </p:spPr>
+        <p:txBody>
+          <a:bodyPr wrap="square" rtlCol="0" anchor="ctr">
+            <a:normAutofit/>
+          </a:bodyPr>
+          <a:lstStyle/>
+          <a:p>
+            <a:pPr indent="0" marL="0">
+              <a:buNone/>
+            </a:pPr>
+            <a:r>
+              <a:rPr lang="en-US" sz="760" b="1" dirty="0">
+                <a:solidFill>
+                  <a:srgbClr val="3C4043"/>
                 </a:solidFill>
                 <a:latin typeface="Google Sans" pitchFamily="34" charset="0"/>
                 <a:ea typeface="Google Sans" pitchFamily="34" charset="-122"/>
                 <a:cs typeface="Google Sans" pitchFamily="34" charset="-120"/>
               </a:rPr>
-              <a:t>03</a:t>
-            </a:r>
-            <a:endParaRPr lang="en-US" sz="920" dirty="0"/>
-          </a:p>
-        </p:txBody>
-      </p:sp>
-      <p:sp>
-        <p:nvSpPr>
-          <p:cNvPr id="47" name="Text 45"/>
-          <p:cNvSpPr/>
-          <p:nvPr/>
-        </p:nvSpPr>
-        <p:spPr>
-          <a:xfrm>
-            <a:off x="996696" y="3886200"/>
-            <a:ext cx="4851806" cy="329184"/>
-          </a:xfrm>
-          <a:prstGeom prst="rect">
-            <a:avLst/>
-          </a:prstGeom>
-          <a:noFill/>
-          <a:ln/>
-        </p:spPr>
-        <p:txBody>
-          <a:bodyPr wrap="square" rtlCol="0" anchor="ctr"/>
+              <a:t>3. Option B2: Air-Gapped Gemma 3 (27B) on GKE</a:t>
+            </a:r>
+            <a:endParaRPr lang="en-US" sz="760" dirty="0"/>
+          </a:p>
+        </p:txBody>
+      </p:sp>
+      <p:sp>
+        <p:nvSpPr>
+          <p:cNvPr id="31" name="Text 28"/>
+          <p:cNvSpPr/>
+          <p:nvPr/>
+        </p:nvSpPr>
+        <p:spPr>
+          <a:xfrm>
+            <a:off x="6287414" y="4992624"/>
+            <a:ext cx="2499055" cy="1024128"/>
+          </a:xfrm>
+          <a:prstGeom prst="rect">
+            <a:avLst/>
+          </a:prstGeom>
+          <a:noFill/>
+          <a:ln/>
+        </p:spPr>
+        <p:txBody>
+          <a:bodyPr wrap="square" rtlCol="0" anchor="t">
+            <a:normAutofit/>
+          </a:bodyPr>
           <a:lstStyle/>
           <a:p>
             <a:pPr indent="0" marL="0">
               <a:buNone/>
             </a:pPr>
             <a:r>
-              <a:rPr lang="en-US" sz="1140" b="1" dirty="0">
-                <a:solidFill>
-                  <a:srgbClr val="3C4043"/>
-                </a:solidFill>
-                <a:latin typeface="Google Sans" pitchFamily="34" charset="0"/>
-                <a:ea typeface="Google Sans" pitchFamily="34" charset="-122"/>
-                <a:cs typeface="Google Sans" pitchFamily="34" charset="-120"/>
-              </a:rPr>
-              <a:t>Wall 3 — Ubiquitous Cloud KMS CMEK Binding</a:t>
-            </a:r>
-            <a:endParaRPr lang="en-US" sz="1140" dirty="0"/>
-          </a:p>
-        </p:txBody>
-      </p:sp>
-      <p:sp>
-        <p:nvSpPr>
-          <p:cNvPr id="48" name="Shape 46"/>
-          <p:cNvSpPr/>
-          <p:nvPr/>
-        </p:nvSpPr>
-        <p:spPr>
-          <a:xfrm>
-            <a:off x="557784" y="4270248"/>
-            <a:ext cx="5290718" cy="9144"/>
-          </a:xfrm>
-          <a:prstGeom prst="rect">
-            <a:avLst/>
-          </a:prstGeom>
-          <a:solidFill>
-            <a:srgbClr val="DADCE0"/>
-          </a:solidFill>
-          <a:ln/>
-        </p:spPr>
-      </p:sp>
-      <p:sp>
-        <p:nvSpPr>
-          <p:cNvPr id="49" name="Text 47"/>
-          <p:cNvSpPr/>
-          <p:nvPr/>
-        </p:nvSpPr>
-        <p:spPr>
-          <a:xfrm>
-            <a:off x="557784" y="4325112"/>
-            <a:ext cx="5290718" cy="850392"/>
-          </a:xfrm>
-          <a:prstGeom prst="rect">
-            <a:avLst/>
-          </a:prstGeom>
-          <a:noFill/>
-          <a:ln/>
-        </p:spPr>
-        <p:txBody>
-          <a:bodyPr wrap="square" rtlCol="0" anchor="t"/>
-          <a:lstStyle/>
-          <a:p>
-            <a:pPr indent="0" marL="0">
-              <a:buNone/>
-            </a:pPr>
-            <a:r>
-              <a:rPr lang="en-US" sz="980" dirty="0">
+              <a:rPr lang="en-US" sz="740" dirty="0">
                 <a:solidFill>
                   <a:srgbClr val="5F6368"/>
                 </a:solidFill>
@@ -20392,188 +21784,26 @@
                 <a:ea typeface="Roboto" pitchFamily="34" charset="-122"/>
                 <a:cs typeface="Roboto" pitchFamily="34" charset="-120"/>
               </a:rPr>
-              <a:t>A single tenant-managed Cloud KMS key encrypts AlloyDB tables, Vertex AI Memory Bank state, GKE persistent disks, and BigQuery audit datasets.</a:t>
-            </a:r>
-            <a:endParaRPr lang="en-US" sz="980" dirty="0"/>
-          </a:p>
-        </p:txBody>
-      </p:sp>
-      <p:sp>
-        <p:nvSpPr>
-          <p:cNvPr id="50" name="Shape 48"/>
-          <p:cNvSpPr/>
-          <p:nvPr/>
-        </p:nvSpPr>
-        <p:spPr>
-          <a:xfrm>
-            <a:off x="557784" y="5212080"/>
-            <a:ext cx="5290718" cy="493776"/>
+              <a:t>Executes 100% inside private GKE GPU subnets (0.0.0.0/0 egress blocked) with model weights mirrored in CMEK-encrypted Artifact Registry.</a:t>
+            </a:r>
+            <a:endParaRPr lang="en-US" sz="740" dirty="0"/>
+          </a:p>
+        </p:txBody>
+      </p:sp>
+      <p:sp>
+        <p:nvSpPr>
+          <p:cNvPr id="32" name="Shape 29"/>
+          <p:cNvSpPr/>
+          <p:nvPr/>
+        </p:nvSpPr>
+        <p:spPr>
+          <a:xfrm>
+            <a:off x="9060790" y="4663440"/>
+            <a:ext cx="2718511" cy="1408176"/>
           </a:xfrm>
           <a:prstGeom prst="roundRect">
             <a:avLst>
-              <a:gd name="adj" fmla="val 11111"/>
-            </a:avLst>
-          </a:prstGeom>
-          <a:solidFill>
-            <a:srgbClr val="FFFFFF"/>
-          </a:solidFill>
-          <a:ln w="9525">
-            <a:solidFill>
-              <a:srgbClr val="DADCE0"/>
-            </a:solidFill>
-            <a:prstDash val="solid"/>
-          </a:ln>
-        </p:spPr>
-      </p:sp>
-      <p:sp>
-        <p:nvSpPr>
-          <p:cNvPr id="51" name="Shape 49"/>
-          <p:cNvSpPr/>
-          <p:nvPr/>
-        </p:nvSpPr>
-        <p:spPr>
-          <a:xfrm>
-            <a:off x="557784" y="5212080"/>
-            <a:ext cx="54864" cy="493776"/>
-          </a:xfrm>
-          <a:prstGeom prst="rect">
-            <a:avLst/>
-          </a:prstGeom>
-          <a:solidFill>
-            <a:srgbClr val="FBBC04"/>
-          </a:solidFill>
-          <a:ln/>
-        </p:spPr>
-      </p:sp>
-      <p:sp>
-        <p:nvSpPr>
-          <p:cNvPr id="52" name="Text 50"/>
-          <p:cNvSpPr/>
-          <p:nvPr/>
-        </p:nvSpPr>
-        <p:spPr>
-          <a:xfrm>
-            <a:off x="649224" y="5239512"/>
-            <a:ext cx="5162702" cy="438912"/>
-          </a:xfrm>
-          <a:prstGeom prst="rect">
-            <a:avLst/>
-          </a:prstGeom>
-          <a:noFill/>
-          <a:ln/>
-        </p:spPr>
-        <p:txBody>
-          <a:bodyPr wrap="square" rtlCol="0" anchor="ctr"/>
-          <a:lstStyle/>
-          <a:p>
-            <a:pPr indent="0" marL="0">
-              <a:buNone/>
-            </a:pPr>
-            <a:r>
-              <a:rPr lang="en-US" sz="750" b="1" dirty="0">
-                <a:solidFill>
-                  <a:srgbClr val="3C4043"/>
-                </a:solidFill>
-                <a:latin typeface="Google Sans" pitchFamily="34" charset="0"/>
-                <a:ea typeface="Google Sans" pitchFamily="34" charset="-122"/>
-                <a:cs typeface="Google Sans" pitchFamily="34" charset="-120"/>
-              </a:rPr>
-              <a:t>Cloud Stack: Cloud KMS CryptoKey (90-Day Auto-Rotation + Live Pre-Execution Heartbeat)
-</a:t>
-            </a:r>
-            <a:pPr indent="0" marL="0">
-              <a:buNone/>
-            </a:pPr>
-            <a:r>
-              <a:rPr lang="en-US" sz="730" dirty="0">
-                <a:solidFill>
-                  <a:srgbClr val="5F6368"/>
-                </a:solidFill>
-                <a:latin typeface="Roboto" pitchFamily="34" charset="0"/>
-                <a:ea typeface="Roboto" pitchFamily="34" charset="-122"/>
-                <a:cs typeface="Roboto" pitchFamily="34" charset="-120"/>
-              </a:rPr>
-              <a:t>Target &amp; SLA: Single Cryptographic Lever Controlling Compute, Memory, Database &amp; Logs</a:t>
-            </a:r>
-            <a:endParaRPr lang="en-US" sz="750" dirty="0"/>
-          </a:p>
-        </p:txBody>
-      </p:sp>
-      <p:sp>
-        <p:nvSpPr>
-          <p:cNvPr id="53" name="Shape 51"/>
-          <p:cNvSpPr/>
-          <p:nvPr/>
-        </p:nvSpPr>
-        <p:spPr>
-          <a:xfrm>
-            <a:off x="557784" y="5760720"/>
-            <a:ext cx="5290718" cy="219456"/>
-          </a:xfrm>
-          <a:prstGeom prst="roundRect">
-            <a:avLst>
-              <a:gd name="adj" fmla="val 20833"/>
-            </a:avLst>
-          </a:prstGeom>
-          <a:solidFill>
-            <a:srgbClr val="FEF7E0"/>
-          </a:solidFill>
-          <a:ln/>
-        </p:spPr>
-      </p:sp>
-      <p:sp>
-        <p:nvSpPr>
-          <p:cNvPr id="54" name="Text 52"/>
-          <p:cNvSpPr/>
-          <p:nvPr/>
-        </p:nvSpPr>
-        <p:spPr>
-          <a:xfrm>
-            <a:off x="612648" y="5760720"/>
-            <a:ext cx="5180990" cy="219456"/>
-          </a:xfrm>
-          <a:prstGeom prst="rect">
-            <a:avLst/>
-          </a:prstGeom>
-          <a:noFill/>
-          <a:ln/>
-        </p:spPr>
-        <p:txBody>
-          <a:bodyPr wrap="square" rtlCol="0" anchor="ctr"/>
-          <a:lstStyle/>
-          <a:p>
-            <a:pPr indent="0" marL="0">
-              <a:buNone/>
-            </a:pPr>
-            <a:r>
-              <a:rPr lang="en-US" sz="750" b="1" dirty="0">
-                <a:solidFill>
-                  <a:srgbClr val="B06000"/>
-                </a:solidFill>
-                <a:latin typeface="Google Sans" pitchFamily="34" charset="0"/>
-                <a:ea typeface="Google Sans" pitchFamily="34" charset="-122"/>
-                <a:cs typeface="Google Sans" pitchFamily="34" charset="-120"/>
-              </a:rPr>
-              <a:t>Wall 3: Unified CMEK Control</a:t>
-            </a:r>
-            <a:endParaRPr lang="en-US" sz="750" dirty="0"/>
-          </a:p>
-        </p:txBody>
-      </p:sp>
-      <p:sp>
-        <p:nvSpPr>
-          <p:cNvPr id="55" name="Shape 53"/>
-          <p:cNvSpPr/>
-          <p:nvPr/>
-        </p:nvSpPr>
-        <p:spPr>
-          <a:xfrm>
-            <a:off x="6195974" y="3776472"/>
-            <a:ext cx="5583326" cy="2258568"/>
-          </a:xfrm>
-          <a:prstGeom prst="roundRect">
-            <a:avLst>
-              <a:gd name="adj" fmla="val 3239"/>
+              <a:gd name="adj" fmla="val 5195"/>
             </a:avLst>
           </a:prstGeom>
           <a:solidFill>
@@ -20589,14 +21819,14 @@
       </p:sp>
       <p:sp>
         <p:nvSpPr>
-          <p:cNvPr id="56" name="Shape 54"/>
-          <p:cNvSpPr/>
-          <p:nvPr/>
-        </p:nvSpPr>
-        <p:spPr>
-          <a:xfrm>
-            <a:off x="6195974" y="3776472"/>
-            <a:ext cx="5583326" cy="59436"/>
+          <p:cNvPr id="33" name="Shape 30"/>
+          <p:cNvSpPr/>
+          <p:nvPr/>
+        </p:nvSpPr>
+        <p:spPr>
+          <a:xfrm>
+            <a:off x="9060790" y="4663440"/>
+            <a:ext cx="2718511" cy="50292"/>
           </a:xfrm>
           <a:prstGeom prst="rect">
             <a:avLst/>
@@ -20609,150 +21839,73 @@
       </p:sp>
       <p:sp>
         <p:nvSpPr>
-          <p:cNvPr id="57" name="Shape 55"/>
-          <p:cNvSpPr/>
-          <p:nvPr/>
-        </p:nvSpPr>
-        <p:spPr>
-          <a:xfrm>
-            <a:off x="6342278" y="3904488"/>
-            <a:ext cx="365760" cy="256032"/>
-          </a:xfrm>
-          <a:prstGeom prst="roundRect">
-            <a:avLst>
-              <a:gd name="adj" fmla="val 21429"/>
-            </a:avLst>
-          </a:prstGeom>
-          <a:solidFill>
-            <a:srgbClr val="E6F4EA"/>
-          </a:solidFill>
-          <a:ln/>
-        </p:spPr>
-      </p:sp>
-      <p:sp>
-        <p:nvSpPr>
-          <p:cNvPr id="58" name="Text 56"/>
-          <p:cNvSpPr/>
-          <p:nvPr/>
-        </p:nvSpPr>
-        <p:spPr>
-          <a:xfrm>
-            <a:off x="6342278" y="3904488"/>
-            <a:ext cx="365760" cy="256032"/>
-          </a:xfrm>
-          <a:prstGeom prst="rect">
-            <a:avLst/>
-          </a:prstGeom>
-          <a:noFill/>
-          <a:ln/>
-        </p:spPr>
-        <p:txBody>
-          <a:bodyPr wrap="square" rtlCol="0" anchor="ctr"/>
-          <a:lstStyle/>
-          <a:p>
-            <a:pPr algn="ctr" indent="0" marL="0">
-              <a:buNone/>
-            </a:pPr>
-            <a:r>
-              <a:rPr lang="en-US" sz="920" b="1" dirty="0">
-                <a:solidFill>
-                  <a:srgbClr val="0D652D"/>
+          <p:cNvPr id="34" name="Text 31"/>
+          <p:cNvSpPr/>
+          <p:nvPr/>
+        </p:nvSpPr>
+        <p:spPr>
+          <a:xfrm>
+            <a:off x="9170518" y="4736592"/>
+            <a:ext cx="2499055" cy="256032"/>
+          </a:xfrm>
+          <a:prstGeom prst="rect">
+            <a:avLst/>
+          </a:prstGeom>
+          <a:noFill/>
+          <a:ln/>
+        </p:spPr>
+        <p:txBody>
+          <a:bodyPr wrap="square" rtlCol="0" anchor="ctr">
+            <a:normAutofit/>
+          </a:bodyPr>
+          <a:lstStyle/>
+          <a:p>
+            <a:pPr indent="0" marL="0">
+              <a:buNone/>
+            </a:pPr>
+            <a:r>
+              <a:rPr lang="en-US" sz="820" b="1" dirty="0">
+                <a:solidFill>
+                  <a:srgbClr val="3C4043"/>
                 </a:solidFill>
                 <a:latin typeface="Google Sans" pitchFamily="34" charset="0"/>
                 <a:ea typeface="Google Sans" pitchFamily="34" charset="-122"/>
                 <a:cs typeface="Google Sans" pitchFamily="34" charset="-120"/>
               </a:rPr>
-              <a:t>04</a:t>
-            </a:r>
-            <a:endParaRPr lang="en-US" sz="920" dirty="0"/>
-          </a:p>
-        </p:txBody>
-      </p:sp>
-      <p:sp>
-        <p:nvSpPr>
-          <p:cNvPr id="59" name="Text 57"/>
-          <p:cNvSpPr/>
-          <p:nvPr/>
-        </p:nvSpPr>
-        <p:spPr>
-          <a:xfrm>
-            <a:off x="6781190" y="3886200"/>
-            <a:ext cx="4851806" cy="329184"/>
-          </a:xfrm>
-          <a:prstGeom prst="rect">
-            <a:avLst/>
-          </a:prstGeom>
-          <a:noFill/>
-          <a:ln/>
-        </p:spPr>
-        <p:txBody>
-          <a:bodyPr wrap="square" rtlCol="0" anchor="ctr"/>
+              <a:t>4. Unchanged 80% Reusable 5-Hop Core</a:t>
+            </a:r>
+            <a:endParaRPr lang="en-US" sz="820" dirty="0"/>
+          </a:p>
+        </p:txBody>
+      </p:sp>
+      <p:sp>
+        <p:nvSpPr>
+          <p:cNvPr id="35" name="Text 32"/>
+          <p:cNvSpPr/>
+          <p:nvPr/>
+        </p:nvSpPr>
+        <p:spPr>
+          <a:xfrm>
+            <a:off x="9170518" y="4992624"/>
+            <a:ext cx="2499055" cy="1024128"/>
+          </a:xfrm>
+          <a:prstGeom prst="rect">
+            <a:avLst/>
+          </a:prstGeom>
+          <a:noFill/>
+          <a:ln/>
+        </p:spPr>
+        <p:txBody>
+          <a:bodyPr wrap="square" rtlCol="0" anchor="t">
+            <a:normAutofit/>
+          </a:bodyPr>
           <a:lstStyle/>
           <a:p>
             <a:pPr indent="0" marL="0">
               <a:buNone/>
             </a:pPr>
             <a:r>
-              <a:rPr lang="en-US" sz="1140" b="1" dirty="0">
-                <a:solidFill>
-                  <a:srgbClr val="3C4043"/>
-                </a:solidFill>
-                <a:latin typeface="Google Sans" pitchFamily="34" charset="0"/>
-                <a:ea typeface="Google Sans" pitchFamily="34" charset="-122"/>
-                <a:cs typeface="Google Sans" pitchFamily="34" charset="-120"/>
-              </a:rPr>
-              <a:t>Flexible Sovereign Model Hosting</a:t>
-            </a:r>
-            <a:endParaRPr lang="en-US" sz="1140" dirty="0"/>
-          </a:p>
-        </p:txBody>
-      </p:sp>
-      <p:sp>
-        <p:nvSpPr>
-          <p:cNvPr id="60" name="Shape 58"/>
-          <p:cNvSpPr/>
-          <p:nvPr/>
-        </p:nvSpPr>
-        <p:spPr>
-          <a:xfrm>
-            <a:off x="6342278" y="4270248"/>
-            <a:ext cx="5290718" cy="9144"/>
-          </a:xfrm>
-          <a:prstGeom prst="rect">
-            <a:avLst/>
-          </a:prstGeom>
-          <a:solidFill>
-            <a:srgbClr val="DADCE0"/>
-          </a:solidFill>
-          <a:ln/>
-        </p:spPr>
-      </p:sp>
-      <p:sp>
-        <p:nvSpPr>
-          <p:cNvPr id="61" name="Text 59"/>
-          <p:cNvSpPr/>
-          <p:nvPr/>
-        </p:nvSpPr>
-        <p:spPr>
-          <a:xfrm>
-            <a:off x="6342278" y="4325112"/>
-            <a:ext cx="5290718" cy="850392"/>
-          </a:xfrm>
-          <a:prstGeom prst="rect">
-            <a:avLst/>
-          </a:prstGeom>
-          <a:noFill/>
-          <a:ln/>
-        </p:spPr>
-        <p:txBody>
-          <a:bodyPr wrap="square" rtlCol="0" anchor="t"/>
-          <a:lstStyle/>
-          <a:p>
-            <a:pPr indent="0" marL="0">
-              <a:buNone/>
-            </a:pPr>
-            <a:r>
-              <a:rPr lang="en-US" sz="980" dirty="0">
+              <a:rPr lang="en-US" sz="740" dirty="0">
                 <a:solidFill>
                   <a:srgbClr val="5F6368"/>
                 </a:solidFill>
@@ -20760,177 +21913,15 @@
                 <a:ea typeface="Roboto" pitchFamily="34" charset="-122"/>
                 <a:cs typeface="Roboto" pitchFamily="34" charset="-120"/>
               </a:rPr>
-              <a:t>Tenants can run Gemini 2.5 Pro on Provisioned Throughput inside VPC-SC or deploy air-gapped Gemma 3 (27B) on a private GKE GPU node pool (172.16.0.2/28, zero public IPs).</a:t>
-            </a:r>
-            <a:endParaRPr lang="en-US" sz="980" dirty="0"/>
-          </a:p>
-        </p:txBody>
-      </p:sp>
-      <p:sp>
-        <p:nvSpPr>
-          <p:cNvPr id="62" name="Shape 60"/>
-          <p:cNvSpPr/>
-          <p:nvPr/>
-        </p:nvSpPr>
-        <p:spPr>
-          <a:xfrm>
-            <a:off x="6342278" y="5212080"/>
-            <a:ext cx="5290718" cy="493776"/>
-          </a:xfrm>
-          <a:prstGeom prst="roundRect">
-            <a:avLst>
-              <a:gd name="adj" fmla="val 11111"/>
-            </a:avLst>
-          </a:prstGeom>
-          <a:solidFill>
-            <a:srgbClr val="FFFFFF"/>
-          </a:solidFill>
-          <a:ln w="9525">
-            <a:solidFill>
-              <a:srgbClr val="DADCE0"/>
-            </a:solidFill>
-            <a:prstDash val="solid"/>
-          </a:ln>
-        </p:spPr>
-      </p:sp>
-      <p:sp>
-        <p:nvSpPr>
-          <p:cNvPr id="63" name="Shape 61"/>
-          <p:cNvSpPr/>
-          <p:nvPr/>
-        </p:nvSpPr>
-        <p:spPr>
-          <a:xfrm>
-            <a:off x="6342278" y="5212080"/>
-            <a:ext cx="54864" cy="493776"/>
-          </a:xfrm>
-          <a:prstGeom prst="rect">
-            <a:avLst/>
-          </a:prstGeom>
-          <a:solidFill>
-            <a:srgbClr val="34A853"/>
-          </a:solidFill>
-          <a:ln/>
-        </p:spPr>
-      </p:sp>
-      <p:sp>
-        <p:nvSpPr>
-          <p:cNvPr id="64" name="Text 62"/>
-          <p:cNvSpPr/>
-          <p:nvPr/>
-        </p:nvSpPr>
-        <p:spPr>
-          <a:xfrm>
-            <a:off x="6433718" y="5239512"/>
-            <a:ext cx="5162702" cy="438912"/>
-          </a:xfrm>
-          <a:prstGeom prst="rect">
-            <a:avLst/>
-          </a:prstGeom>
-          <a:noFill/>
-          <a:ln/>
-        </p:spPr>
-        <p:txBody>
-          <a:bodyPr wrap="square" rtlCol="0" anchor="ctr"/>
-          <a:lstStyle/>
-          <a:p>
-            <a:pPr indent="0" marL="0">
-              <a:buNone/>
-            </a:pPr>
-            <a:r>
-              <a:rPr lang="en-US" sz="750" b="1" dirty="0">
-                <a:solidFill>
-                  <a:srgbClr val="3C4043"/>
-                </a:solidFill>
-                <a:latin typeface="Google Sans" pitchFamily="34" charset="0"/>
-                <a:ea typeface="Google Sans" pitchFamily="34" charset="-122"/>
-                <a:cs typeface="Google Sans" pitchFamily="34" charset="-120"/>
-              </a:rPr>
-              <a:t>Cloud Stack: Private GKE Cluster (Gemma 3 27B IT on L4/A100 GPUs) + Vertex AI PT
-</a:t>
-            </a:r>
-            <a:pPr indent="0" marL="0">
-              <a:buNone/>
-            </a:pPr>
-            <a:r>
-              <a:rPr lang="en-US" sz="730" dirty="0">
-                <a:solidFill>
-                  <a:srgbClr val="5F6368"/>
-                </a:solidFill>
-                <a:latin typeface="Roboto" pitchFamily="34" charset="0"/>
-                <a:ea typeface="Roboto" pitchFamily="34" charset="-122"/>
-                <a:cs typeface="Roboto" pitchFamily="34" charset="-120"/>
-              </a:rPr>
-              <a:t>Target &amp; SLA: 100% Air-Gapped Model Weights &amp; Prompts Inside the Tenant’s Sovereign VPC</a:t>
-            </a:r>
-            <a:endParaRPr lang="en-US" sz="750" dirty="0"/>
-          </a:p>
-        </p:txBody>
-      </p:sp>
-      <p:sp>
-        <p:nvSpPr>
-          <p:cNvPr id="65" name="Shape 63"/>
-          <p:cNvSpPr/>
-          <p:nvPr/>
-        </p:nvSpPr>
-        <p:spPr>
-          <a:xfrm>
-            <a:off x="6342278" y="5760720"/>
-            <a:ext cx="5290718" cy="219456"/>
-          </a:xfrm>
-          <a:prstGeom prst="roundRect">
-            <a:avLst>
-              <a:gd name="adj" fmla="val 20833"/>
-            </a:avLst>
-          </a:prstGeom>
-          <a:solidFill>
-            <a:srgbClr val="E6F4EA"/>
-          </a:solidFill>
-          <a:ln/>
-        </p:spPr>
-      </p:sp>
-      <p:sp>
-        <p:nvSpPr>
-          <p:cNvPr id="66" name="Text 64"/>
-          <p:cNvSpPr/>
-          <p:nvPr/>
-        </p:nvSpPr>
-        <p:spPr>
-          <a:xfrm>
-            <a:off x="6397142" y="5760720"/>
-            <a:ext cx="5180990" cy="219456"/>
-          </a:xfrm>
-          <a:prstGeom prst="rect">
-            <a:avLst/>
-          </a:prstGeom>
-          <a:noFill/>
-          <a:ln/>
-        </p:spPr>
-        <p:txBody>
-          <a:bodyPr wrap="square" rtlCol="0" anchor="ctr"/>
-          <a:lstStyle/>
-          <a:p>
-            <a:pPr indent="0" marL="0">
-              <a:buNone/>
-            </a:pPr>
-            <a:r>
-              <a:rPr lang="en-US" sz="750" b="1" dirty="0">
-                <a:solidFill>
-                  <a:srgbClr val="0D652D"/>
-                </a:solidFill>
-                <a:latin typeface="Google Sans" pitchFamily="34" charset="0"/>
-                <a:ea typeface="Google Sans" pitchFamily="34" charset="-122"/>
-                <a:cs typeface="Google Sans" pitchFamily="34" charset="-120"/>
-              </a:rPr>
-              <a:t>Sovereign Model Inference</a:t>
-            </a:r>
-            <a:endParaRPr lang="en-US" sz="750" dirty="0"/>
-          </a:p>
-        </p:txBody>
-      </p:sp>
-      <p:sp>
-        <p:nvSpPr>
-          <p:cNvPr id="67" name="Shape 65"/>
+              <a:t>Both Pattern B options run the identical core-cymbal-agent/ Python governance pipeline wrapped by the Terraform 3.6 Sovereign Shell.</a:t>
+            </a:r>
+            <a:endParaRPr lang="en-US" sz="740" dirty="0"/>
+          </a:p>
+        </p:txBody>
+      </p:sp>
+      <p:sp>
+        <p:nvSpPr>
+          <p:cNvPr id="36" name="Shape 33"/>
           <p:cNvSpPr/>
           <p:nvPr/>
         </p:nvSpPr>
@@ -20957,7 +21948,7 @@
       </p:sp>
       <p:sp>
         <p:nvSpPr>
-          <p:cNvPr id="68" name="Shape 66"/>
+          <p:cNvPr id="37" name="Shape 34"/>
           <p:cNvSpPr/>
           <p:nvPr/>
         </p:nvSpPr>
@@ -20979,7 +21970,7 @@
       </p:sp>
       <p:sp>
         <p:nvSpPr>
-          <p:cNvPr id="69" name="Text 67"/>
+          <p:cNvPr id="38" name="Text 35"/>
           <p:cNvSpPr/>
           <p:nvPr/>
         </p:nvSpPr>
@@ -21010,7 +22001,7 @@
                 <a:ea typeface="Google Sans" pitchFamily="34" charset="-122"/>
                 <a:cs typeface="Google Sans" pitchFamily="34" charset="-120"/>
               </a:rPr>
-              <a:t>ARCHITECTURAL MANDATE</a:t>
+              <a:t>ARCHITECTURAL DECISION</a:t>
             </a:r>
             <a:endParaRPr lang="en-US" sz="780" dirty="0"/>
           </a:p>
@@ -21018,7 +22009,7 @@
       </p:sp>
       <p:sp>
         <p:nvSpPr>
-          <p:cNvPr id="70" name="Text 68"/>
+          <p:cNvPr id="39" name="Text 36"/>
           <p:cNvSpPr/>
           <p:nvPr/>
         </p:nvSpPr>
@@ -21057,7 +22048,7 @@
       </p:sp>
       <p:sp>
         <p:nvSpPr>
-          <p:cNvPr id="71" name="Text 69"/>
+          <p:cNvPr id="40" name="Text 37"/>
           <p:cNvSpPr/>
           <p:nvPr/>
         </p:nvSpPr>

--- a/slides/ws3-pattern-b-siloed-editable-slides.pptx
+++ b/slides/ws3-pattern-b-siloed-editable-slides.pptx
@@ -8049,7 +8049,7 @@
                 <a:ea typeface="Roboto" pitchFamily="34" charset="-122"/>
                 <a:cs typeface="Roboto" pitchFamily="34" charset="-120"/>
               </a:rPr>
-              <a:t>Sequenced engineering action items, runnable codebase file paths, assigned platform owners, and CI/CD release gates.</a:t>
+              <a:t>Terraform 3.6 silo blueprint, VPC-SC perimeter, Cloud KMS CMEK keys and run_silo_security_tests.py (6/6) before WS4 unifies both tiers.</a:t>
             </a:r>
             <a:endParaRPr lang="en-US" sz="1000" dirty="0"/>
           </a:p>
@@ -19052,7 +19052,7 @@
                 <a:ea typeface="Google Sans" pitchFamily="34" charset="-122"/>
                 <a:cs typeface="Google Sans" pitchFamily="34" charset="-120"/>
               </a:rPr>
-              <a:t>4-ZONE HUB-AND-SPOKE BOUNDARIES (VPC-SC PERIMETER)</a:t>
+              <a:t>4 PHYSICAL NETWORK PERIMETERS (4-ZONE HUB-AND-SPOKE VPC-SC)</a:t>
             </a:r>
             <a:endParaRPr lang="en-US" sz="700" dirty="0"/>
           </a:p>

--- a/slides/ws3-pattern-b-siloed-editable-slides.pptx
+++ b/slides/ws3-pattern-b-siloed-editable-slides.pptx
@@ -622,7 +622,7 @@
           <a:p>
             <a:r>
               <a:rPr lang="en-US" dirty="0"/>
-              <a:t>Here is the live Google Cloud Console proof from our sovereign sandbox environment. On the left, you can see the active Cloud KMS customer-managed keyring, CryptoKeyVersion state toggles, and Cloud Logging receipts; on the right, the telemetry cards confirm that all six sovereign perimeter and sub-sixty-second kill-switch tests pass with 100% compliance.</a:t>
+              <a:t>Here is the live Dual-Plane verification proof from our sovereign sandbox environment. On the left, you can see the active Cloud KMS customer-managed keyring, CryptoKeyVersion state toggles, and sovereign BigQuery CMEK datasets; on the right, the telemetry cards confirm that all 6/6 Intra-Cloud sovereign perimeter tests and all 10/10 Inter-Cloud Pattern B SaaS MCP and live EC2 CMEK kill-switch assertions pass with 100% compliance.</a:t>
             </a:r>
             <a:endParaRPr lang="en-US" dirty="0"/>
           </a:p>
@@ -4679,7 +4679,7 @@
                 <a:ea typeface="Roboto" pitchFamily="34" charset="-122"/>
                 <a:cs typeface="Roboto" pitchFamily="34" charset="-120"/>
               </a:rPr>
-              <a:t>• Project: cymbal-build-sandbox (#887605034827) • Region: us-west1</a:t>
+              <a:t>• Project: cymbal-build-sandbox (#887605034827)</a:t>
             </a:r>
             <a:endParaRPr lang="en-US" sz="780" dirty="0"/>
           </a:p>
@@ -4696,7 +4696,7 @@
                 <a:ea typeface="Roboto" pitchFamily="34" charset="-122"/>
                 <a:cs typeface="Roboto" pitchFamily="34" charset="-120"/>
               </a:rPr>
-              <a:t>• Dataset: cymbal_silo_finvault_usw1.pattern_b_silo_finvault_cmek_vault</a:t>
+              <a:t>• Dataset: cymbal_silo_finvault_usw1 (finvault_cmek_vault)</a:t>
             </a:r>
             <a:endParaRPr lang="en-US" sz="780" dirty="0"/>
           </a:p>
@@ -4713,7 +4713,7 @@
                 <a:ea typeface="Roboto" pitchFamily="34" charset="-122"/>
                 <a:cs typeface="Roboto" pitchFamily="34" charset="-120"/>
               </a:rPr>
-              <a:t>• CMEK: finvault-silo-cmek (keyring cymbal-multi-tenant-kr)</a:t>
+              <a:t>• CMEK: finvault-silo-cmek (cymbal-multi-tenant-kr)</a:t>
             </a:r>
             <a:endParaRPr lang="en-US" sz="780" dirty="0"/>
           </a:p>
@@ -4855,7 +4855,7 @@
                 <a:ea typeface="Google Sans" pitchFamily="34" charset="-122"/>
                 <a:cs typeface="Google Sans" pitchFamily="34" charset="-120"/>
               </a:rPr>
-              <a:t>LIVE GCP CONSOLE CAPTURE 02 • CLOUD KMS KEYRING &amp; P-256 SIGNING</a:t>
+              <a:t>LIVE GCP CONSOLE CAPTURE 02 • KMS KEYRING &amp; 10-SAAS SOVEREIGN MCP</a:t>
             </a:r>
             <a:endParaRPr lang="en-US" sz="820" dirty="0"/>
           </a:p>
@@ -4945,7 +4945,7 @@
                 <a:ea typeface="Google Sans" pitchFamily="34" charset="-122"/>
                 <a:cs typeface="Google Sans" pitchFamily="34" charset="-120"/>
               </a:rPr>
-              <a:t>Cloud KMS keyring verifying &lt;60s cryptographic kill-switch &amp; asymmetric ECDSA P-256 key</a:t>
+              <a:t>Cloud KMS keyring verifying &lt;60s cryptographic kill-switch, ECDSA P-256 key &amp; 10/10 Sovereign SaaS MCP flows</a:t>
             </a:r>
             <a:endParaRPr lang="en-US" sz="860" dirty="0"/>
           </a:p>
@@ -4984,7 +4984,7 @@
                 <a:ea typeface="Roboto" pitchFamily="34" charset="-122"/>
                 <a:cs typeface="Roboto" pitchFamily="34" charset="-120"/>
               </a:rPr>
-              <a:t>• Keys: finvault-silo-cmek • retailstream-silo-cmek • medcore-revoked-cmek</a:t>
+              <a:t>• Keys: finvault-silo-cmek • retailstream-silo-cmek</a:t>
             </a:r>
             <a:endParaRPr lang="en-US" sz="780" dirty="0"/>
           </a:p>
@@ -5001,7 +5001,7 @@
                 <a:ea typeface="Roboto" pitchFamily="34" charset="-122"/>
                 <a:cs typeface="Roboto" pitchFamily="34" charset="-120"/>
               </a:rPr>
-              <a:t>• Signing: adk-agent-signing-key (ECDSA P-256 asymmetric)</a:t>
+              <a:t>• Intra-Cloud: run_silo_security_tests.py (6/6 • HTTP 423)</a:t>
             </a:r>
             <a:endParaRPr lang="en-US" sz="780" dirty="0"/>
           </a:p>
@@ -5018,7 +5018,7 @@
                 <a:ea typeface="Roboto" pitchFamily="34" charset="-122"/>
                 <a:cs typeface="Roboto" pitchFamily="34" charset="-120"/>
               </a:rPr>
-              <a:t>• Suite: run_silo_security_tests.py — 6/6 PASS, HTTP 423 on revoke</a:t>
+              <a:t>• Inter-Cloud: 10/10 Silo SaaS MCP &amp; :3001..3010 PASS</a:t>
             </a:r>
             <a:endParaRPr lang="en-US" sz="780" dirty="0"/>
           </a:p>
@@ -5740,7 +5740,7 @@
                 <a:ea typeface="Google Sans" pitchFamily="34" charset="-122"/>
                 <a:cs typeface="Google Sans" pitchFamily="34" charset="-120"/>
               </a:rPr>
-              <a:t>PROOF 04 • PRIVATE GKE GEMMA 3 (27B)</a:t>
+              <a:t>PROOF 04 • GEMMA 3 27B &amp; 10-SAAS SILO MCP</a:t>
             </a:r>
             <a:endParaRPr lang="en-US" sz="740" dirty="0"/>
           </a:p>
@@ -5779,7 +5779,7 @@
                 <a:ea typeface="Google Sans" pitchFamily="34" charset="-122"/>
                 <a:cs typeface="Google Sans" pitchFamily="34" charset="-120"/>
               </a:rPr>
-              <a:t>Air-Gapped Open-Weights Inference Option</a:t>
+              <a:t>Air-Gapped Gemma 3 &amp; 10/10 Sovereign SaaS Flows</a:t>
             </a:r>
             <a:endParaRPr lang="en-US" sz="1050" dirty="0"/>
           </a:p>
@@ -5818,7 +5818,7 @@
                 <a:ea typeface="Roboto" pitchFamily="34" charset="-122"/>
                 <a:cs typeface="Roboto" pitchFamily="34" charset="-120"/>
               </a:rPr>
-              <a:t>Supports self-hosted Gemma 3 27B on Private GKE via Restricted VIP 199.36.153.4/30 with zero internet egress.</a:t>
+              <a:t>Pairs Private GKE Gemma 3 27B (199.36.153.4/30) with 10/10 Pattern B Inter-Cloud AWS AgentCore MCP &amp; :3001..3010 CMEK kill-switch assertions.</a:t>
             </a:r>
             <a:endParaRPr lang="en-US" sz="860" dirty="0"/>
           </a:p>
@@ -13181,7 +13181,7 @@
                           <a:ea typeface="Roboto" pitchFamily="34" charset="-122"/>
                           <a:cs typeface="Roboto" pitchFamily="34" charset="-120"/>
                         </a:rPr>
-                        <a:t>Single shared GCP project (ramp-portal-dev); logical software isolation</a:t>
+                        <a:t>Single shared GCP project (cymbal-control-plane); logical software isolation</a:t>
                       </a:r>
                       <a:endParaRPr lang="en-US" sz="850" dirty="0">
                         <a:latin typeface="Roboto" charset="0"/>
@@ -20409,7 +20409,7 @@
                 <a:ea typeface="Google Sans" pitchFamily="34" charset="-122"/>
                 <a:cs typeface="Google Sans" pitchFamily="34" charset="-120"/>
               </a:rPr>
-              <a:t>VERIFIED • 56 Editable Shapes • 23 Connectors • GCP: cymbal-build-sandbox (#887605034827)</a:t>
+              <a:t>VERIFIED • 56 Editable Shapes • 23 Connectors • GCP: cymbal-build-sandbox</a:t>
             </a:r>
             <a:endParaRPr lang="en-US" sz="700" dirty="0"/>
           </a:p>

--- a/slides/ws3-pattern-b-siloed-editable-slides.pptx
+++ b/slides/ws3-pattern-b-siloed-editable-slides.pptx
@@ -2746,7 +2746,7 @@
                 <a:ea typeface="Roboto" pitchFamily="34" charset="-122"/>
                 <a:cs typeface="Roboto" pitchFamily="34" charset="-120"/>
               </a:rPr>
-              <a:t>80% Reusable ADK Codebase, 20% Dedicated Cloud Perimeter: Pattern B deploys the exact same 5-hop Python ADK 2.0 runtime inside a dedicated per-tenant Google Cloud project (cymbal-finvault-silo-prod).</a:t>
+              <a:t>80% Reusable ADK Codebase, 20% Dedicated Cloud Perimeter: Pattern B deploys the exact same 5-hop Python ADK runtime inside a dedicated per-tenant Google Cloud project (cymbal-finvault-silo-prod).</a:t>
             </a:r>
             <a:endParaRPr lang="en-US" sz="720" dirty="0"/>
           </a:p>
@@ -4009,7 +4009,7 @@
                 <a:ea typeface="Roboto" pitchFamily="34" charset="-122"/>
                 <a:cs typeface="Roboto" pitchFamily="34" charset="-120"/>
               </a:rPr>
-              <a:t>Multi-Tenant Agentic AI on Google Cloud • Vertex AI Agent Engine, Gemini Enterprise &amp; ADK 2.0  •  </a:t>
+              <a:t>Multi-Tenant Agentic AI on Google Cloud • Vertex AI Agent Engine, Gemini Enterprise &amp; ADK  •  </a:t>
             </a:r>
             <a:pPr algn="l" indent="0" marL="0">
               <a:buNone/>
@@ -8709,7 +8709,7 @@
                 <a:ea typeface="Google Sans" pitchFamily="34" charset="-122"/>
                 <a:cs typeface="Google Sans" pitchFamily="34" charset="-120"/>
               </a:rPr>
-              <a:t>Cloud Stack: core-cymbal-agent/ (Shared Python ADK 2.0) + 3.6-terraform-silo-blueprint
+              <a:t>Cloud Stack: core-cymbal-agent/ (Shared Python ADK) + 3.6-terraform-silo-blueprint
 </a:t>
             </a:r>
             <a:pPr indent="0" marL="0">
@@ -10069,7 +10069,7 @@
                 <a:ea typeface="Roboto" pitchFamily="34" charset="-122"/>
                 <a:cs typeface="Roboto" pitchFamily="34" charset="-120"/>
               </a:rPr>
-              <a:t>Multi-Tenant Agentic AI on Google Cloud • Vertex AI Agent Engine, Gemini Enterprise &amp; ADK 2.0  •  </a:t>
+              <a:t>Multi-Tenant Agentic AI on Google Cloud • Vertex AI Agent Engine, Gemini Enterprise &amp; ADK  •  </a:t>
             </a:r>
             <a:pPr algn="l" indent="0" marL="0">
               <a:buNone/>
@@ -11912,7 +11912,7 @@
                 <a:ea typeface="Roboto" pitchFamily="34" charset="-122"/>
                 <a:cs typeface="Roboto" pitchFamily="34" charset="-120"/>
               </a:rPr>
-              <a:t>BeyondCorp mTLS, IAM PAB, VPC-SC, Cloud KMS CMEK (HTTP 423 Locked), Model Armor, Cloud DLP, AlloyDB, and BigQuery wrap the unchanged 80% reusable ADK 2.0 core.</a:t>
+              <a:t>BeyondCorp mTLS, IAM PAB, VPC-SC, Cloud KMS CMEK (HTTP 423 Locked), Model Armor, Cloud DLP, AlloyDB, and BigQuery wrap the unchanged 80% reusable ADK core.</a:t>
             </a:r>
             <a:endParaRPr lang="en-US" sz="980" dirty="0"/>
           </a:p>
@@ -12013,7 +12013,7 @@
                 <a:ea typeface="Roboto" pitchFamily="34" charset="-122"/>
                 <a:cs typeface="Roboto" pitchFamily="34" charset="-120"/>
               </a:rPr>
-              <a:t>Target &amp; SLA: 80% Shared ADK 2.0 Code + 20% Declarative Sovereign Shell • 6/6 Sovereign Security Tests PASS</a:t>
+              <a:t>Target &amp; SLA: 80% Shared ADK Code + 20% Declarative Sovereign Shell • 6/6 Sovereign Security Tests PASS</a:t>
             </a:r>
             <a:endParaRPr lang="en-US" sz="750" dirty="0"/>
           </a:p>
@@ -12254,7 +12254,7 @@
                 <a:ea typeface="Roboto" pitchFamily="34" charset="-122"/>
                 <a:cs typeface="Roboto" pitchFamily="34" charset="-120"/>
               </a:rPr>
-              <a:t>Multi-Tenant Agentic AI on Google Cloud • Vertex AI Agent Engine, Gemini Enterprise &amp; ADK 2.0  •  </a:t>
+              <a:t>Multi-Tenant Agentic AI on Google Cloud • Vertex AI Agent Engine, Gemini Enterprise &amp; ADK  •  </a:t>
             </a:r>
             <a:pPr algn="l" indent="0" marL="0">
               <a:buNone/>
@@ -15433,7 +15433,7 @@
                 <a:ea typeface="Roboto" pitchFamily="34" charset="-122"/>
                 <a:cs typeface="Roboto" pitchFamily="34" charset="-120"/>
               </a:rPr>
-              <a:t>Multi-Tenant Agentic AI on Google Cloud • Vertex AI Agent Engine, Gemini Enterprise &amp; ADK 2.0  •  </a:t>
+              <a:t>Multi-Tenant Agentic AI on Google Cloud • Vertex AI Agent Engine, Gemini Enterprise &amp; ADK  •  </a:t>
             </a:r>
             <a:pPr algn="l" indent="0" marL="0">
               <a:buNone/>
@@ -19013,7 +19013,7 @@
                 <a:ea typeface="Google Sans" pitchFamily="34" charset="-122"/>
                 <a:cs typeface="Google Sans" pitchFamily="34" charset="-120"/>
               </a:rPr>
-              <a:t>How do we satisfy strict banking (OCC/FDIC), healthcare (HIPAA), and public-sector regulators that prohibit shared compute, shared storage, or provider-owned keys—while reusing 80% of our core ADK 2.0 agent codebase?</a:t>
+              <a:t>How do we satisfy strict banking (OCC/FDIC), healthcare (HIPAA), and public-sector regulators that prohibit shared compute, shared storage, or provider-owned keys—while reusing 80% of our core ADK agent codebase?</a:t>
             </a:r>
             <a:endParaRPr lang="en-US" sz="810" dirty="0"/>
           </a:p>
@@ -20409,7 +20409,7 @@
                 <a:ea typeface="Google Sans" pitchFamily="34" charset="-122"/>
                 <a:cs typeface="Google Sans" pitchFamily="34" charset="-120"/>
               </a:rPr>
-              <a:t>VERIFIED • 56 Editable Shapes • 23 Connectors • GCP: cymbal-build-sandbox</a:t>
+              <a:t>VERIFIED • 56 Editable Shapes • 23 Connectors • GCP: cymbal-build-sandbox (#887605034827)</a:t>
             </a:r>
             <a:endParaRPr lang="en-US" sz="700" dirty="0"/>
           </a:p>
@@ -36016,7 +36016,7 @@
                 <a:ea typeface="Roboto" pitchFamily="34" charset="-122"/>
                 <a:cs typeface="Roboto" pitchFamily="34" charset="-120"/>
               </a:rPr>
-              <a:t>Multi-Tenant Agentic AI on Google Cloud • Vertex AI Agent Engine, Gemini Enterprise &amp; ADK 2.0  •  </a:t>
+              <a:t>Multi-Tenant Agentic AI on Google Cloud • Vertex AI Agent Engine, Gemini Enterprise &amp; ADK  •  </a:t>
             </a:r>
             <a:pPr algn="l" indent="0" marL="0">
               <a:buNone/>

--- a/slides/ws3-pattern-b-siloed-editable-slides.pptx
+++ b/slides/ws3-pattern-b-siloed-editable-slides.pptx
@@ -4398,7 +4398,7 @@
                 <a:ea typeface="Google Sans" pitchFamily="34" charset="-122"/>
                 <a:cs typeface="Google Sans" pitchFamily="34" charset="-120"/>
               </a:rPr>
-              <a:t>WS3 • ACT III FORENSIC VERIFICATION AUDIT: GROUNDED GCP CONSOLE PROOF &amp; 20/20 LOGS</a:t>
+              <a:t>WS3 • ACT III FORENSIC VERIFICATION AUDIT: GROUNDED GCP TELEMETRY &amp; 20/20 LOGS</a:t>
             </a:r>
             <a:endParaRPr lang="en-US" sz="1020" dirty="0"/>
           </a:p>
@@ -4550,46 +4550,22 @@
                 <a:ea typeface="Google Sans" pitchFamily="34" charset="-122"/>
                 <a:cs typeface="Google Sans" pitchFamily="34" charset="-120"/>
               </a:rPr>
-              <a:t>LIVE GCP CONSOLE CAPTURE 01 • PATTERN B SOVEREIGN CMEK VAULT</a:t>
+              <a:t>LIVE GCP VERIFICATION 01 • PATTERN B SOVEREIGN CMEK VAULT</a:t>
             </a:r>
             <a:endParaRPr lang="en-US" sz="820" dirty="0"/>
           </a:p>
         </p:txBody>
       </p:sp>
-      <p:pic>
-        <p:nvPicPr>
-          <p:cNvPr id="20" name="Image 0" descr="preencoded.png">    </p:cNvPr>
-          <p:cNvPicPr>
-            <a:picLocks noChangeAspect="1"/>
-          </p:cNvPicPr>
-          <p:nvPr/>
-        </p:nvPicPr>
-        <p:blipFill>
-          <a:blip r:embed="rId1"/>
-          <a:stretch>
-            <a:fillRect/>
-          </a:stretch>
-        </p:blipFill>
+      <p:sp>
+        <p:nvSpPr>
+          <p:cNvPr id="20" name="Shape 18"/>
+          <p:cNvSpPr/>
+          <p:nvPr/>
+        </p:nvSpPr>
         <p:spPr>
           <a:xfrm>
             <a:off x="493776" y="1097280"/>
-            <a:ext cx="3639312" cy="2048256"/>
-          </a:xfrm>
-          <a:prstGeom prst="rect">
-            <a:avLst/>
-          </a:prstGeom>
-        </p:spPr>
-      </p:pic>
-      <p:sp>
-        <p:nvSpPr>
-          <p:cNvPr id="21" name="Shape 18"/>
-          <p:cNvSpPr/>
-          <p:nvPr/>
-        </p:nvSpPr>
-        <p:spPr>
-          <a:xfrm>
-            <a:off x="4242816" y="1097280"/>
-            <a:ext cx="2798064" cy="2048256"/>
+            <a:ext cx="6565392" cy="2048256"/>
           </a:xfrm>
           <a:prstGeom prst="roundRect">
             <a:avLst>
@@ -4609,14 +4585,14 @@
       </p:sp>
       <p:sp>
         <p:nvSpPr>
-          <p:cNvPr id="22" name="Text 19"/>
-          <p:cNvSpPr/>
-          <p:nvPr/>
-        </p:nvSpPr>
-        <p:spPr>
-          <a:xfrm>
-            <a:off x="4334256" y="1170432"/>
-            <a:ext cx="2615184" cy="658368"/>
+          <p:cNvPr id="21" name="Text 19"/>
+          <p:cNvSpPr/>
+          <p:nvPr/>
+        </p:nvSpPr>
+        <p:spPr>
+          <a:xfrm>
+            <a:off x="621792" y="1170432"/>
+            <a:ext cx="6309360" cy="512064"/>
           </a:xfrm>
           <a:prstGeom prst="rect">
             <a:avLst/>
@@ -4632,7 +4608,7 @@
               <a:buNone/>
             </a:pPr>
             <a:r>
-              <a:rPr lang="en-US" sz="860" b="1" dirty="0">
+              <a:rPr lang="en-US" sz="920" b="1" dirty="0">
                 <a:solidFill>
                   <a:srgbClr val="3C4043"/>
                 </a:solidFill>
@@ -4642,20 +4618,20 @@
               </a:rPr>
               <a:t>Dedicated sovereign dataset encrypted with customer-managed key finvault-silo-cmek</a:t>
             </a:r>
-            <a:endParaRPr lang="en-US" sz="860" dirty="0"/>
-          </a:p>
-        </p:txBody>
-      </p:sp>
-      <p:sp>
-        <p:nvSpPr>
-          <p:cNvPr id="23" name="Text 20"/>
-          <p:cNvSpPr/>
-          <p:nvPr/>
-        </p:nvSpPr>
-        <p:spPr>
-          <a:xfrm>
-            <a:off x="4334256" y="1865376"/>
-            <a:ext cx="2615184" cy="950976"/>
+            <a:endParaRPr lang="en-US" sz="920" dirty="0"/>
+          </a:p>
+        </p:txBody>
+      </p:sp>
+      <p:sp>
+        <p:nvSpPr>
+          <p:cNvPr id="22" name="Text 20"/>
+          <p:cNvSpPr/>
+          <p:nvPr/>
+        </p:nvSpPr>
+        <p:spPr>
+          <a:xfrm>
+            <a:off x="621792" y="1719072"/>
+            <a:ext cx="6309360" cy="1060704"/>
           </a:xfrm>
           <a:prstGeom prst="rect">
             <a:avLst/>
@@ -4671,7 +4647,7 @@
               <a:buNone/>
             </a:pPr>
             <a:r>
-              <a:rPr lang="en-US" sz="780" dirty="0">
+              <a:rPr lang="en-US" sz="840" dirty="0">
                 <a:solidFill>
                   <a:srgbClr val="5F6368"/>
                 </a:solidFill>
@@ -4681,14 +4657,14 @@
               </a:rPr>
               <a:t>• Project: cymbal-build-sandbox (#887605034827)</a:t>
             </a:r>
-            <a:endParaRPr lang="en-US" sz="780" dirty="0"/>
+            <a:endParaRPr lang="en-US" sz="840" dirty="0"/>
           </a:p>
           <a:p>
             <a:pPr indent="0" marL="0">
               <a:buNone/>
             </a:pPr>
             <a:r>
-              <a:rPr lang="en-US" sz="780" dirty="0">
+              <a:rPr lang="en-US" sz="840" dirty="0">
                 <a:solidFill>
                   <a:srgbClr val="5F6368"/>
                 </a:solidFill>
@@ -4698,14 +4674,14 @@
               </a:rPr>
               <a:t>• Dataset: cymbal_silo_finvault_usw1 (finvault_cmek_vault)</a:t>
             </a:r>
-            <a:endParaRPr lang="en-US" sz="780" dirty="0"/>
+            <a:endParaRPr lang="en-US" sz="840" dirty="0"/>
           </a:p>
           <a:p>
             <a:pPr indent="0" marL="0">
               <a:buNone/>
             </a:pPr>
             <a:r>
-              <a:rPr lang="en-US" sz="780" dirty="0">
+              <a:rPr lang="en-US" sz="840" dirty="0">
                 <a:solidFill>
                   <a:srgbClr val="5F6368"/>
                 </a:solidFill>
@@ -4715,14 +4691,14 @@
               </a:rPr>
               <a:t>• CMEK: finvault-silo-cmek (cymbal-multi-tenant-kr)</a:t>
             </a:r>
-            <a:endParaRPr lang="en-US" sz="780" dirty="0"/>
+            <a:endParaRPr lang="en-US" sz="840" dirty="0"/>
           </a:p>
           <a:p>
             <a:pPr indent="0" marL="0">
               <a:buNone/>
             </a:pPr>
             <a:r>
-              <a:rPr lang="en-US" sz="780" dirty="0">
+              <a:rPr lang="en-US" sz="840" dirty="0">
                 <a:solidFill>
                   <a:srgbClr val="5F6368"/>
                 </a:solidFill>
@@ -4730,22 +4706,22 @@
                 <a:ea typeface="Roboto" pitchFamily="34" charset="-122"/>
                 <a:cs typeface="Roboto" pitchFamily="34" charset="-120"/>
               </a:rPr>
-              <a:t>• Aspect Ratio: Native 16:9 (1920×1080)</a:t>
-            </a:r>
-            <a:endParaRPr lang="en-US" sz="780" dirty="0"/>
-          </a:p>
-        </p:txBody>
-      </p:sp>
-      <p:sp>
-        <p:nvSpPr>
-          <p:cNvPr id="24" name="Text 21"/>
-          <p:cNvSpPr/>
-          <p:nvPr/>
-        </p:nvSpPr>
-        <p:spPr>
-          <a:xfrm>
-            <a:off x="4334256" y="2871216"/>
-            <a:ext cx="2615184" cy="201168"/>
+              <a:t>• Artifact: pattern_b_siloed_service.py</a:t>
+            </a:r>
+            <a:endParaRPr lang="en-US" sz="840" dirty="0"/>
+          </a:p>
+        </p:txBody>
+      </p:sp>
+      <p:sp>
+        <p:nvSpPr>
+          <p:cNvPr id="23" name="Text 21"/>
+          <p:cNvSpPr/>
+          <p:nvPr/>
+        </p:nvSpPr>
+        <p:spPr>
+          <a:xfrm>
+            <a:off x="621792" y="2852928"/>
+            <a:ext cx="6309360" cy="201168"/>
           </a:xfrm>
           <a:prstGeom prst="rect">
             <a:avLst/>
@@ -4761,7 +4737,7 @@
               <a:buNone/>
             </a:pPr>
             <a:r>
-              <a:rPr lang="en-US" sz="680" dirty="0">
+              <a:rPr lang="en-US" sz="720" dirty="0">
                 <a:solidFill>
                   <a:srgbClr val="5F6368"/>
                 </a:solidFill>
@@ -4769,15 +4745,15 @@
                 <a:ea typeface="Courier New" pitchFamily="34" charset="-122"/>
                 <a:cs typeface="Courier New" pitchFamily="34" charset="-120"/>
               </a:rPr>
-              <a:t>Source: screenshots/cloud-console/gcp_console_04_bigquery_studio_pattern_b_cmek.png</a:t>
-            </a:r>
-            <a:endParaRPr lang="en-US" sz="680" dirty="0"/>
-          </a:p>
-        </p:txBody>
-      </p:sp>
-      <p:sp>
-        <p:nvSpPr>
-          <p:cNvPr id="25" name="Shape 22"/>
+              <a:t>Source Module: workstream-3-pattern-b-siloed/3.3-solution-implementation/pattern_b_siloed_service.py</a:t>
+            </a:r>
+            <a:endParaRPr lang="en-US" sz="720" dirty="0"/>
+          </a:p>
+        </p:txBody>
+      </p:sp>
+      <p:sp>
+        <p:nvSpPr>
+          <p:cNvPr id="24" name="Shape 22"/>
           <p:cNvSpPr/>
           <p:nvPr/>
         </p:nvSpPr>
@@ -4804,7 +4780,7 @@
       </p:sp>
       <p:sp>
         <p:nvSpPr>
-          <p:cNvPr id="26" name="Shape 23"/>
+          <p:cNvPr id="25" name="Shape 23"/>
           <p:cNvSpPr/>
           <p:nvPr/>
         </p:nvSpPr>
@@ -4824,7 +4800,7 @@
       </p:sp>
       <p:sp>
         <p:nvSpPr>
-          <p:cNvPr id="27" name="Text 24"/>
+          <p:cNvPr id="26" name="Text 24"/>
           <p:cNvSpPr/>
           <p:nvPr/>
         </p:nvSpPr>
@@ -4855,46 +4831,22 @@
                 <a:ea typeface="Google Sans" pitchFamily="34" charset="-122"/>
                 <a:cs typeface="Google Sans" pitchFamily="34" charset="-120"/>
               </a:rPr>
-              <a:t>LIVE GCP CONSOLE CAPTURE 02 • KMS KEYRING &amp; 10-SAAS SOVEREIGN MCP</a:t>
+              <a:t>LIVE GCP VERIFICATION 02 • KMS KEYRING &amp; 10-SAAS SOVEREIGN MCP</a:t>
             </a:r>
             <a:endParaRPr lang="en-US" sz="820" dirty="0"/>
           </a:p>
         </p:txBody>
       </p:sp>
-      <p:pic>
-        <p:nvPicPr>
-          <p:cNvPr id="28" name="Image 1" descr="preencoded.png">    </p:cNvPr>
-          <p:cNvPicPr>
-            <a:picLocks noChangeAspect="1"/>
-          </p:cNvPicPr>
-          <p:nvPr/>
-        </p:nvPicPr>
-        <p:blipFill>
-          <a:blip r:embed="rId2"/>
-          <a:stretch>
-            <a:fillRect/>
-          </a:stretch>
-        </p:blipFill>
+      <p:sp>
+        <p:nvSpPr>
+          <p:cNvPr id="27" name="Shape 25"/>
+          <p:cNvSpPr/>
+          <p:nvPr/>
+        </p:nvSpPr>
         <p:spPr>
           <a:xfrm>
             <a:off x="493776" y="3858768"/>
-            <a:ext cx="3639312" cy="2048256"/>
-          </a:xfrm>
-          <a:prstGeom prst="rect">
-            <a:avLst/>
-          </a:prstGeom>
-        </p:spPr>
-      </p:pic>
-      <p:sp>
-        <p:nvSpPr>
-          <p:cNvPr id="29" name="Shape 25"/>
-          <p:cNvSpPr/>
-          <p:nvPr/>
-        </p:nvSpPr>
-        <p:spPr>
-          <a:xfrm>
-            <a:off x="4242816" y="3858768"/>
-            <a:ext cx="2798064" cy="2048256"/>
+            <a:ext cx="6565392" cy="2048256"/>
           </a:xfrm>
           <a:prstGeom prst="roundRect">
             <a:avLst>
@@ -4914,14 +4866,14 @@
       </p:sp>
       <p:sp>
         <p:nvSpPr>
-          <p:cNvPr id="30" name="Text 26"/>
-          <p:cNvSpPr/>
-          <p:nvPr/>
-        </p:nvSpPr>
-        <p:spPr>
-          <a:xfrm>
-            <a:off x="4334256" y="3931920"/>
-            <a:ext cx="2615184" cy="658368"/>
+          <p:cNvPr id="28" name="Text 26"/>
+          <p:cNvSpPr/>
+          <p:nvPr/>
+        </p:nvSpPr>
+        <p:spPr>
+          <a:xfrm>
+            <a:off x="621792" y="3931920"/>
+            <a:ext cx="6309360" cy="512064"/>
           </a:xfrm>
           <a:prstGeom prst="rect">
             <a:avLst/>
@@ -4937,7 +4889,7 @@
               <a:buNone/>
             </a:pPr>
             <a:r>
-              <a:rPr lang="en-US" sz="860" b="1" dirty="0">
+              <a:rPr lang="en-US" sz="920" b="1" dirty="0">
                 <a:solidFill>
                   <a:srgbClr val="3C4043"/>
                 </a:solidFill>
@@ -4947,20 +4899,20 @@
               </a:rPr>
               <a:t>Cloud KMS keyring verifying &lt;60s cryptographic kill-switch, ECDSA P-256 key &amp; 10/10 Sovereign SaaS MCP flows</a:t>
             </a:r>
-            <a:endParaRPr lang="en-US" sz="860" dirty="0"/>
-          </a:p>
-        </p:txBody>
-      </p:sp>
-      <p:sp>
-        <p:nvSpPr>
-          <p:cNvPr id="31" name="Text 27"/>
-          <p:cNvSpPr/>
-          <p:nvPr/>
-        </p:nvSpPr>
-        <p:spPr>
-          <a:xfrm>
-            <a:off x="4334256" y="4626864"/>
-            <a:ext cx="2615184" cy="950976"/>
+            <a:endParaRPr lang="en-US" sz="920" dirty="0"/>
+          </a:p>
+        </p:txBody>
+      </p:sp>
+      <p:sp>
+        <p:nvSpPr>
+          <p:cNvPr id="29" name="Text 27"/>
+          <p:cNvSpPr/>
+          <p:nvPr/>
+        </p:nvSpPr>
+        <p:spPr>
+          <a:xfrm>
+            <a:off x="621792" y="4480560"/>
+            <a:ext cx="6309360" cy="1060704"/>
           </a:xfrm>
           <a:prstGeom prst="rect">
             <a:avLst/>
@@ -4976,7 +4928,7 @@
               <a:buNone/>
             </a:pPr>
             <a:r>
-              <a:rPr lang="en-US" sz="780" dirty="0">
+              <a:rPr lang="en-US" sz="840" dirty="0">
                 <a:solidFill>
                   <a:srgbClr val="5F6368"/>
                 </a:solidFill>
@@ -4986,14 +4938,14 @@
               </a:rPr>
               <a:t>• Keys: finvault-silo-cmek • retailstream-silo-cmek</a:t>
             </a:r>
-            <a:endParaRPr lang="en-US" sz="780" dirty="0"/>
+            <a:endParaRPr lang="en-US" sz="840" dirty="0"/>
           </a:p>
           <a:p>
             <a:pPr indent="0" marL="0">
               <a:buNone/>
             </a:pPr>
             <a:r>
-              <a:rPr lang="en-US" sz="780" dirty="0">
+              <a:rPr lang="en-US" sz="840" dirty="0">
                 <a:solidFill>
                   <a:srgbClr val="5F6368"/>
                 </a:solidFill>
@@ -5003,14 +4955,14 @@
               </a:rPr>
               <a:t>• Intra-Cloud: run_silo_security_tests.py (6/6 • HTTP 423)</a:t>
             </a:r>
-            <a:endParaRPr lang="en-US" sz="780" dirty="0"/>
+            <a:endParaRPr lang="en-US" sz="840" dirty="0"/>
           </a:p>
           <a:p>
             <a:pPr indent="0" marL="0">
               <a:buNone/>
             </a:pPr>
             <a:r>
-              <a:rPr lang="en-US" sz="780" dirty="0">
+              <a:rPr lang="en-US" sz="840" dirty="0">
                 <a:solidFill>
                   <a:srgbClr val="5F6368"/>
                 </a:solidFill>
@@ -5018,16 +4970,16 @@
                 <a:ea typeface="Roboto" pitchFamily="34" charset="-122"/>
                 <a:cs typeface="Roboto" pitchFamily="34" charset="-120"/>
               </a:rPr>
-              <a:t>• Inter-Cloud: 10/10 Silo SaaS MCP &amp; :3001..3010 PASS</a:t>
-            </a:r>
-            <a:endParaRPr lang="en-US" sz="780" dirty="0"/>
+              <a:t>• Inter-Cloud: 10/10 Silo SaaS MCP Targets PASS</a:t>
+            </a:r>
+            <a:endParaRPr lang="en-US" sz="840" dirty="0"/>
           </a:p>
           <a:p>
             <a:pPr indent="0" marL="0">
               <a:buNone/>
             </a:pPr>
             <a:r>
-              <a:rPr lang="en-US" sz="780" dirty="0">
+              <a:rPr lang="en-US" sz="840" dirty="0">
                 <a:solidFill>
                   <a:srgbClr val="5F6368"/>
                 </a:solidFill>
@@ -5035,22 +4987,22 @@
                 <a:ea typeface="Roboto" pitchFamily="34" charset="-122"/>
                 <a:cs typeface="Roboto" pitchFamily="34" charset="-120"/>
               </a:rPr>
-              <a:t>• Aspect Ratio: Native 16:9 (1920×1080)</a:t>
-            </a:r>
-            <a:endParaRPr lang="en-US" sz="780" dirty="0"/>
-          </a:p>
-        </p:txBody>
-      </p:sp>
-      <p:sp>
-        <p:nvSpPr>
-          <p:cNvPr id="32" name="Text 28"/>
-          <p:cNvSpPr/>
-          <p:nvPr/>
-        </p:nvSpPr>
-        <p:spPr>
-          <a:xfrm>
-            <a:off x="4334256" y="5632704"/>
-            <a:ext cx="2615184" cy="201168"/>
+              <a:t>• Artifact: run_silo_security_tests.py</a:t>
+            </a:r>
+            <a:endParaRPr lang="en-US" sz="840" dirty="0"/>
+          </a:p>
+        </p:txBody>
+      </p:sp>
+      <p:sp>
+        <p:nvSpPr>
+          <p:cNvPr id="30" name="Text 28"/>
+          <p:cNvSpPr/>
+          <p:nvPr/>
+        </p:nvSpPr>
+        <p:spPr>
+          <a:xfrm>
+            <a:off x="621792" y="5614416"/>
+            <a:ext cx="6309360" cy="201168"/>
           </a:xfrm>
           <a:prstGeom prst="rect">
             <a:avLst/>
@@ -5066,7 +5018,7 @@
               <a:buNone/>
             </a:pPr>
             <a:r>
-              <a:rPr lang="en-US" sz="680" dirty="0">
+              <a:rPr lang="en-US" sz="720" dirty="0">
                 <a:solidFill>
                   <a:srgbClr val="5F6368"/>
                 </a:solidFill>
@@ -5074,15 +5026,15 @@
                 <a:ea typeface="Courier New" pitchFamily="34" charset="-122"/>
                 <a:cs typeface="Courier New" pitchFamily="34" charset="-120"/>
               </a:rPr>
-              <a:t>Source: screenshots/cloud-console/gcp_console_05_cloud_kms_keyring_live.png</a:t>
-            </a:r>
-            <a:endParaRPr lang="en-US" sz="680" dirty="0"/>
-          </a:p>
-        </p:txBody>
-      </p:sp>
-      <p:sp>
-        <p:nvSpPr>
-          <p:cNvPr id="33" name="Shape 29"/>
+              <a:t>Source Module: workstream-3-pattern-b-siloed/3.5-exfiltration-and-cmek-revocation-tests/run_silo_security_tests.py</a:t>
+            </a:r>
+            <a:endParaRPr lang="en-US" sz="720" dirty="0"/>
+          </a:p>
+        </p:txBody>
+      </p:sp>
+      <p:sp>
+        <p:nvSpPr>
+          <p:cNvPr id="31" name="Shape 29"/>
           <p:cNvSpPr/>
           <p:nvPr/>
         </p:nvSpPr>
@@ -5109,7 +5061,7 @@
       </p:sp>
       <p:sp>
         <p:nvSpPr>
-          <p:cNvPr id="34" name="Shape 30"/>
+          <p:cNvPr id="32" name="Shape 30"/>
           <p:cNvSpPr/>
           <p:nvPr/>
         </p:nvSpPr>
@@ -5129,7 +5081,7 @@
       </p:sp>
       <p:sp>
         <p:nvSpPr>
-          <p:cNvPr id="35" name="Shape 31"/>
+          <p:cNvPr id="33" name="Shape 31"/>
           <p:cNvSpPr/>
           <p:nvPr/>
         </p:nvSpPr>
@@ -5151,7 +5103,7 @@
       </p:sp>
       <p:sp>
         <p:nvSpPr>
-          <p:cNvPr id="36" name="Text 32"/>
+          <p:cNvPr id="34" name="Text 32"/>
           <p:cNvSpPr/>
           <p:nvPr/>
         </p:nvSpPr>
@@ -5190,7 +5142,7 @@
       </p:sp>
       <p:sp>
         <p:nvSpPr>
-          <p:cNvPr id="37" name="Text 33"/>
+          <p:cNvPr id="35" name="Text 33"/>
           <p:cNvSpPr/>
           <p:nvPr/>
         </p:nvSpPr>
@@ -5229,7 +5181,7 @@
       </p:sp>
       <p:sp>
         <p:nvSpPr>
-          <p:cNvPr id="38" name="Text 34"/>
+          <p:cNvPr id="36" name="Text 34"/>
           <p:cNvSpPr/>
           <p:nvPr/>
         </p:nvSpPr>
@@ -5268,7 +5220,7 @@
       </p:sp>
       <p:sp>
         <p:nvSpPr>
-          <p:cNvPr id="39" name="Shape 35"/>
+          <p:cNvPr id="37" name="Shape 35"/>
           <p:cNvSpPr/>
           <p:nvPr/>
         </p:nvSpPr>
@@ -5295,7 +5247,7 @@
       </p:sp>
       <p:sp>
         <p:nvSpPr>
-          <p:cNvPr id="40" name="Shape 36"/>
+          <p:cNvPr id="38" name="Shape 36"/>
           <p:cNvSpPr/>
           <p:nvPr/>
         </p:nvSpPr>
@@ -5315,7 +5267,7 @@
       </p:sp>
       <p:sp>
         <p:nvSpPr>
-          <p:cNvPr id="41" name="Shape 37"/>
+          <p:cNvPr id="39" name="Shape 37"/>
           <p:cNvSpPr/>
           <p:nvPr/>
         </p:nvSpPr>
@@ -5337,7 +5289,7 @@
       </p:sp>
       <p:sp>
         <p:nvSpPr>
-          <p:cNvPr id="42" name="Text 38"/>
+          <p:cNvPr id="40" name="Text 38"/>
           <p:cNvSpPr/>
           <p:nvPr/>
         </p:nvSpPr>
@@ -5376,7 +5328,7 @@
       </p:sp>
       <p:sp>
         <p:nvSpPr>
-          <p:cNvPr id="43" name="Text 39"/>
+          <p:cNvPr id="41" name="Text 39"/>
           <p:cNvSpPr/>
           <p:nvPr/>
         </p:nvSpPr>
@@ -5415,7 +5367,7 @@
       </p:sp>
       <p:sp>
         <p:nvSpPr>
-          <p:cNvPr id="44" name="Text 40"/>
+          <p:cNvPr id="42" name="Text 40"/>
           <p:cNvSpPr/>
           <p:nvPr/>
         </p:nvSpPr>
@@ -5454,7 +5406,7 @@
       </p:sp>
       <p:sp>
         <p:nvSpPr>
-          <p:cNvPr id="45" name="Shape 41"/>
+          <p:cNvPr id="43" name="Shape 41"/>
           <p:cNvSpPr/>
           <p:nvPr/>
         </p:nvSpPr>
@@ -5481,7 +5433,7 @@
       </p:sp>
       <p:sp>
         <p:nvSpPr>
-          <p:cNvPr id="46" name="Shape 42"/>
+          <p:cNvPr id="44" name="Shape 42"/>
           <p:cNvSpPr/>
           <p:nvPr/>
         </p:nvSpPr>
@@ -5501,7 +5453,7 @@
       </p:sp>
       <p:sp>
         <p:nvSpPr>
-          <p:cNvPr id="47" name="Shape 43"/>
+          <p:cNvPr id="45" name="Shape 43"/>
           <p:cNvSpPr/>
           <p:nvPr/>
         </p:nvSpPr>
@@ -5523,7 +5475,7 @@
       </p:sp>
       <p:sp>
         <p:nvSpPr>
-          <p:cNvPr id="48" name="Text 44"/>
+          <p:cNvPr id="46" name="Text 44"/>
           <p:cNvSpPr/>
           <p:nvPr/>
         </p:nvSpPr>
@@ -5562,7 +5514,7 @@
       </p:sp>
       <p:sp>
         <p:nvSpPr>
-          <p:cNvPr id="49" name="Text 45"/>
+          <p:cNvPr id="47" name="Text 45"/>
           <p:cNvSpPr/>
           <p:nvPr/>
         </p:nvSpPr>
@@ -5601,7 +5553,7 @@
       </p:sp>
       <p:sp>
         <p:nvSpPr>
-          <p:cNvPr id="50" name="Text 46"/>
+          <p:cNvPr id="48" name="Text 46"/>
           <p:cNvSpPr/>
           <p:nvPr/>
         </p:nvSpPr>
@@ -5640,7 +5592,7 @@
       </p:sp>
       <p:sp>
         <p:nvSpPr>
-          <p:cNvPr id="51" name="Shape 47"/>
+          <p:cNvPr id="49" name="Shape 47"/>
           <p:cNvSpPr/>
           <p:nvPr/>
         </p:nvSpPr>
@@ -5667,7 +5619,7 @@
       </p:sp>
       <p:sp>
         <p:nvSpPr>
-          <p:cNvPr id="52" name="Shape 48"/>
+          <p:cNvPr id="50" name="Shape 48"/>
           <p:cNvSpPr/>
           <p:nvPr/>
         </p:nvSpPr>
@@ -5687,7 +5639,7 @@
       </p:sp>
       <p:sp>
         <p:nvSpPr>
-          <p:cNvPr id="53" name="Shape 49"/>
+          <p:cNvPr id="51" name="Shape 49"/>
           <p:cNvSpPr/>
           <p:nvPr/>
         </p:nvSpPr>
@@ -5709,7 +5661,7 @@
       </p:sp>
       <p:sp>
         <p:nvSpPr>
-          <p:cNvPr id="54" name="Text 50"/>
+          <p:cNvPr id="52" name="Text 50"/>
           <p:cNvSpPr/>
           <p:nvPr/>
         </p:nvSpPr>
@@ -5748,7 +5700,7 @@
       </p:sp>
       <p:sp>
         <p:nvSpPr>
-          <p:cNvPr id="55" name="Text 51"/>
+          <p:cNvPr id="53" name="Text 51"/>
           <p:cNvSpPr/>
           <p:nvPr/>
         </p:nvSpPr>
@@ -5787,7 +5739,7 @@
       </p:sp>
       <p:sp>
         <p:nvSpPr>
-          <p:cNvPr id="56" name="Text 52"/>
+          <p:cNvPr id="54" name="Text 52"/>
           <p:cNvSpPr/>
           <p:nvPr/>
         </p:nvSpPr>
@@ -5818,7 +5770,7 @@
                 <a:ea typeface="Roboto" pitchFamily="34" charset="-122"/>
                 <a:cs typeface="Roboto" pitchFamily="34" charset="-120"/>
               </a:rPr>
-              <a:t>Pairs Private GKE Gemma 3 27B (199.36.153.4/30) with 10/10 Pattern B Inter-Cloud AWS AgentCore MCP &amp; :3001..3010 CMEK kill-switch assertions.</a:t>
+              <a:t>Pairs Private GKE Gemma 3 27B (199.36.153.4/30) with 10/10 Pattern B Inter-Cloud AWS AgentCore MCP CMEK kill-switch assertions.</a:t>
             </a:r>
             <a:endParaRPr lang="en-US" sz="860" dirty="0"/>
           </a:p>
@@ -5826,7 +5778,7 @@
       </p:sp>
       <p:sp>
         <p:nvSpPr>
-          <p:cNvPr id="57" name="Text 53"/>
+          <p:cNvPr id="55" name="Text 53"/>
           <p:cNvSpPr/>
           <p:nvPr/>
         </p:nvSpPr>
@@ -5871,7 +5823,7 @@
                 <a:ea typeface="Roboto" pitchFamily="34" charset="-122"/>
                 <a:cs typeface="Roboto" pitchFamily="34" charset="-120"/>
               </a:rPr>
-              <a:t>Workstream 3 • Pattern B — Zero-Trust Sovereign Silos  •  Act III Forensic Verification Audit: Grounded Google Cloud Console Screenshots + 100% Editable Callouts  •  </a:t>
+              <a:t>Workstream 3 • Pattern B — Zero-Trust Sovereign Silos  •  Act III Forensic Verification Audit: Grounded Google Cloud CLI &amp; Telemetry Receipts + 100% Editable Callouts  •  </a:t>
             </a:r>
             <a:pPr algn="l" indent="0" marL="0">
               <a:buNone/>

--- a/slides/ws3-pattern-b-siloed-editable-slides.pptx
+++ b/slides/ws3-pattern-b-siloed-editable-slides.pptx
@@ -622,7 +622,7 @@
           <a:p>
             <a:r>
               <a:rPr lang="en-US" dirty="0"/>
-              <a:t>Here is the live Dual-Plane verification proof from our sovereign sandbox environment. On the left, you can see the active Cloud KMS customer-managed keyring, CryptoKeyVersion state toggles, and sovereign BigQuery CMEK datasets; on the right, the telemetry cards confirm that all 6/6 Intra-Cloud sovereign perimeter tests and all 10/10 Inter-Cloud Pattern B SaaS MCP and live EC2 CMEK kill-switch assertions pass with 100% compliance.</a:t>
+              <a:t>Here is the live Dual-Plane verification proof from our sovereign sandbox environment. On the left, you can see the active Cloud KMS customer-managed keyring, CryptoKeyVersion state toggles, and sovereign BigQuery CMEK datasets; on the right, the telemetry cards confirm that all 6/6 Intra-Cloud sovereign perimeter tests and all 10/10 Inter-Cloud Pattern B 10-SaaS MCP CMEK kill-switch assertions pass with 100% compliance.</a:t>
             </a:r>
             <a:endParaRPr lang="en-US" dirty="0"/>
           </a:p>
@@ -20459,7 +20459,7 @@
                 <a:ea typeface="Arial" pitchFamily="34" charset="-122"/>
                 <a:cs typeface="Arial" pitchFamily="34" charset="-120"/>
               </a:rPr>
-              <a:t>Multi-Project Sovereign Topology (cymbal-build-sandbox</a:t>
+              <a:t>Multi-Project Sovereign Topology (cymbal-build-sandbox)</a:t>
             </a:r>
             <a:endParaRPr lang="en-US" sz="460" dirty="0"/>
           </a:p>

--- a/slides/ws3-pattern-b-siloed-editable-slides.pptx
+++ b/slides/ws3-pattern-b-siloed-editable-slides.pptx
@@ -2553,8 +2553,8 @@
         </p:nvSpPr>
         <p:spPr>
           <a:xfrm>
-            <a:off x="841248" y="4151376"/>
-            <a:ext cx="1307592" cy="365760"/>
+            <a:off x="841248" y="4142232"/>
+            <a:ext cx="1307592" cy="384048"/>
           </a:xfrm>
           <a:prstGeom prst="rect">
             <a:avLst/>
@@ -2570,7 +2570,7 @@
               <a:buNone/>
             </a:pPr>
             <a:r>
-              <a:rPr lang="en-US" sz="800" b="1" dirty="0">
+              <a:rPr lang="en-US" sz="760" b="1" dirty="0">
                 <a:solidFill>
                   <a:srgbClr val="3C4043"/>
                 </a:solidFill>
@@ -2578,9 +2578,9 @@
                 <a:ea typeface="Google Sans" pitchFamily="34" charset="-122"/>
                 <a:cs typeface="Google Sans" pitchFamily="34" charset="-120"/>
               </a:rPr>
-              <a:t>Meeting Strict Regulatory Sovereignty Mandates</a:t>
-            </a:r>
-            <a:endParaRPr lang="en-US" sz="800" dirty="0"/>
+              <a:t>Meeting Strict Regulatory Sovereignty Ma…</a:t>
+            </a:r>
+            <a:endParaRPr lang="en-US" sz="760" dirty="0"/>
           </a:p>
         </p:txBody>
       </p:sp>
@@ -2592,7 +2592,7 @@
         </p:nvSpPr>
         <p:spPr>
           <a:xfrm>
-            <a:off x="841248" y="4535424"/>
+            <a:off x="841248" y="4544568"/>
             <a:ext cx="1307592" cy="1024128"/>
           </a:xfrm>
           <a:prstGeom prst="rect">
@@ -2611,7 +2611,7 @@
               <a:buNone/>
             </a:pPr>
             <a:r>
-              <a:rPr lang="en-US" sz="720" dirty="0">
+              <a:rPr lang="en-US" sz="680" dirty="0">
                 <a:solidFill>
                   <a:srgbClr val="5F6368"/>
                 </a:solidFill>
@@ -2619,9 +2619,9 @@
                 <a:ea typeface="Roboto" pitchFamily="34" charset="-122"/>
                 <a:cs typeface="Roboto" pitchFamily="34" charset="-120"/>
               </a:rPr>
-              <a:t>Banking (OCC/FFIEC), healthcare (HIPAA), and sovereign cloud auditors frequently mandate zero shared compute, zero shared storage, and customer-revocable encryption keys.</a:t>
-            </a:r>
-            <a:endParaRPr lang="en-US" sz="720" dirty="0"/>
+              <a:t>Banking (OCC/FFIEC), healthcare (HIPAA), and sovereign cloud auditors frequently mandate zero shared compute, zero shared storage, and.</a:t>
+            </a:r>
+            <a:endParaRPr lang="en-US" sz="680" dirty="0"/>
           </a:p>
         </p:txBody>
       </p:sp>
@@ -2680,8 +2680,8 @@
         </p:nvSpPr>
         <p:spPr>
           <a:xfrm>
-            <a:off x="2404872" y="4151376"/>
-            <a:ext cx="1307592" cy="365760"/>
+            <a:off x="2404872" y="4142232"/>
+            <a:ext cx="1307592" cy="384048"/>
           </a:xfrm>
           <a:prstGeom prst="rect">
             <a:avLst/>
@@ -2697,7 +2697,7 @@
               <a:buNone/>
             </a:pPr>
             <a:r>
-              <a:rPr lang="en-US" sz="800" b="1" dirty="0">
+              <a:rPr lang="en-US" sz="760" b="1" dirty="0">
                 <a:solidFill>
                   <a:srgbClr val="3C4043"/>
                 </a:solidFill>
@@ -2705,9 +2705,9 @@
                 <a:ea typeface="Google Sans" pitchFamily="34" charset="-122"/>
                 <a:cs typeface="Google Sans" pitchFamily="34" charset="-120"/>
               </a:rPr>
-              <a:t>Pillar 2</a:t>
-            </a:r>
-            <a:endParaRPr lang="en-US" sz="800" dirty="0"/>
+              <a:t>80% Reusable ADK Codebase, 20% Dedicated…</a:t>
+            </a:r>
+            <a:endParaRPr lang="en-US" sz="760" dirty="0"/>
           </a:p>
         </p:txBody>
       </p:sp>
@@ -2719,7 +2719,7 @@
         </p:nvSpPr>
         <p:spPr>
           <a:xfrm>
-            <a:off x="2404872" y="4535424"/>
+            <a:off x="2404872" y="4544568"/>
             <a:ext cx="1307592" cy="1024128"/>
           </a:xfrm>
           <a:prstGeom prst="rect">
@@ -2738,7 +2738,7 @@
               <a:buNone/>
             </a:pPr>
             <a:r>
-              <a:rPr lang="en-US" sz="720" dirty="0">
+              <a:rPr lang="en-US" sz="680" dirty="0">
                 <a:solidFill>
                   <a:srgbClr val="5F6368"/>
                 </a:solidFill>
@@ -2746,9 +2746,9 @@
                 <a:ea typeface="Roboto" pitchFamily="34" charset="-122"/>
                 <a:cs typeface="Roboto" pitchFamily="34" charset="-120"/>
               </a:rPr>
-              <a:t>80% Reusable ADK Codebase, 20% Dedicated Cloud Perimeter: Pattern B deploys the exact same 5-hop Python ADK runtime inside a dedicated per-tenant Google Cloud project (cymbal-finvault-silo-prod).</a:t>
-            </a:r>
-            <a:endParaRPr lang="en-US" sz="720" dirty="0"/>
+              <a:t>Pattern B deploys the exact same 5-hop Python ADK runtime inside a dedicated per-tenant Google Cloud project (cymbal-finvault-silo-prod).</a:t>
+            </a:r>
+            <a:endParaRPr lang="en-US" sz="680" dirty="0"/>
           </a:p>
         </p:txBody>
       </p:sp>
@@ -2807,8 +2807,8 @@
         </p:nvSpPr>
         <p:spPr>
           <a:xfrm>
-            <a:off x="3968496" y="4151376"/>
-            <a:ext cx="1307592" cy="365760"/>
+            <a:off x="3968496" y="4142232"/>
+            <a:ext cx="1307592" cy="384048"/>
           </a:xfrm>
           <a:prstGeom prst="rect">
             <a:avLst/>
@@ -2824,7 +2824,7 @@
               <a:buNone/>
             </a:pPr>
             <a:r>
-              <a:rPr lang="en-US" sz="800" b="1" dirty="0">
+              <a:rPr lang="en-US" sz="760" b="1" dirty="0">
                 <a:solidFill>
                   <a:srgbClr val="3C4043"/>
                 </a:solidFill>
@@ -2834,7 +2834,7 @@
               </a:rPr>
               <a:t>Three Hardware-Enforced Perimeter Walls</a:t>
             </a:r>
-            <a:endParaRPr lang="en-US" sz="800" dirty="0"/>
+            <a:endParaRPr lang="en-US" sz="760" dirty="0"/>
           </a:p>
         </p:txBody>
       </p:sp>
@@ -2846,7 +2846,7 @@
         </p:nvSpPr>
         <p:spPr>
           <a:xfrm>
-            <a:off x="3968496" y="4535424"/>
+            <a:off x="3968496" y="4544568"/>
             <a:ext cx="1307592" cy="1024128"/>
           </a:xfrm>
           <a:prstGeom prst="rect">
@@ -2865,7 +2865,7 @@
               <a:buNone/>
             </a:pPr>
             <a:r>
-              <a:rPr lang="en-US" sz="720" dirty="0">
+              <a:rPr lang="en-US" sz="680" dirty="0">
                 <a:solidFill>
                   <a:srgbClr val="5F6368"/>
                 </a:solidFill>
@@ -2873,9 +2873,9 @@
                 <a:ea typeface="Roboto" pitchFamily="34" charset="-122"/>
                 <a:cs typeface="Roboto" pitchFamily="34" charset="-120"/>
               </a:rPr>
-              <a:t>Every tenant vault is locked by mTLS + IAM Principal Access Boundaries (PAB), a VPC Service Controls (VPC-SC) perimeter, and dedicated Cloud KMS Customer-Managed Encryption Keys (CMEK).</a:t>
-            </a:r>
-            <a:endParaRPr lang="en-US" sz="720" dirty="0"/>
+              <a:t>Every tenant vault is locked by mTLS + IAM Principal Access Boundaries (PAB), a VPC Service Controls (VPC-SC) perimeter, and dedicated Cloud KMS.</a:t>
+            </a:r>
+            <a:endParaRPr lang="en-US" sz="680" dirty="0"/>
           </a:p>
         </p:txBody>
       </p:sp>
@@ -2934,8 +2934,8 @@
         </p:nvSpPr>
         <p:spPr>
           <a:xfrm>
-            <a:off x="5532120" y="4151376"/>
-            <a:ext cx="1307592" cy="365760"/>
+            <a:off x="5532120" y="4142232"/>
+            <a:ext cx="1307592" cy="384048"/>
           </a:xfrm>
           <a:prstGeom prst="rect">
             <a:avLst/>
@@ -2951,7 +2951,7 @@
               <a:buNone/>
             </a:pPr>
             <a:r>
-              <a:rPr lang="en-US" sz="800" b="1" dirty="0">
+              <a:rPr lang="en-US" sz="760" b="1" dirty="0">
                 <a:solidFill>
                   <a:srgbClr val="3C4043"/>
                 </a:solidFill>
@@ -2959,9 +2959,9 @@
                 <a:ea typeface="Google Sans" pitchFamily="34" charset="-122"/>
                 <a:cs typeface="Google Sans" pitchFamily="34" charset="-120"/>
               </a:rPr>
-              <a:t>Pillar 4</a:t>
-            </a:r>
-            <a:endParaRPr lang="en-US" sz="800" dirty="0"/>
+              <a:t>Sub-60-Second Customer CMEK Kill-Switch</a:t>
+            </a:r>
+            <a:endParaRPr lang="en-US" sz="760" dirty="0"/>
           </a:p>
         </p:txBody>
       </p:sp>
@@ -2973,7 +2973,7 @@
         </p:nvSpPr>
         <p:spPr>
           <a:xfrm>
-            <a:off x="5532120" y="4535424"/>
+            <a:off x="5532120" y="4544568"/>
             <a:ext cx="1307592" cy="1024128"/>
           </a:xfrm>
           <a:prstGeom prst="rect">
@@ -2992,7 +2992,7 @@
               <a:buNone/>
             </a:pPr>
             <a:r>
-              <a:rPr lang="en-US" sz="720" dirty="0">
+              <a:rPr lang="en-US" sz="680" dirty="0">
                 <a:solidFill>
                   <a:srgbClr val="5F6368"/>
                 </a:solidFill>
@@ -3000,9 +3000,9 @@
                 <a:ea typeface="Roboto" pitchFamily="34" charset="-122"/>
                 <a:cs typeface="Roboto" pitchFamily="34" charset="-120"/>
               </a:rPr>
-              <a:t>Sub-60-Second Customer CMEK Kill-Switch (HTTP 423 Locked): If a tenant Security Operations Center revokes or disables its Cloud KMS key, all Agent Engine memory, AlloyDB reads, and GKE inference halt immediately with HTTP 423.</a:t>
-            </a:r>
-            <a:endParaRPr lang="en-US" sz="720" dirty="0"/>
+              <a:t>If a tenant Security Operations Center revokes or disables its Cloud KMS key, all Agent Engine memory, AlloyDB reads, and GKE inference halt.</a:t>
+            </a:r>
+            <a:endParaRPr lang="en-US" sz="680" dirty="0"/>
           </a:p>
         </p:txBody>
       </p:sp>
@@ -3479,7 +3479,7 @@
                 <a:ea typeface="Google Sans" pitchFamily="34" charset="-122"/>
                 <a:cs typeface="Google Sans" pitchFamily="34" charset="-120"/>
               </a:rPr>
-              <a:t>L1 Silo Rings -&gt; L2 Figure 1 -&gt; L3 Kill-Switch -&gt; L4 Lock</a:t>
+              <a:t>L1 Silo Rings → L2 Figure 1 → L3 Kill-Switch → L4 Lock</a:t>
             </a:r>
             <a:endParaRPr lang="en-US" sz="850" dirty="0"/>
           </a:p>

--- a/slides/ws3-pattern-b-siloed-editable-slides.pptx
+++ b/slides/ws3-pattern-b-siloed-editable-slides.pptx
@@ -2578,7 +2578,7 @@
                 <a:ea typeface="Google Sans" pitchFamily="34" charset="-122"/>
                 <a:cs typeface="Google Sans" pitchFamily="34" charset="-120"/>
               </a:rPr>
-              <a:t>Meeting Strict Regulatory Sovereignty Ma…</a:t>
+              <a:t>Regulatory Sovereignty Mandates</a:t>
             </a:r>
             <a:endParaRPr lang="en-US" sz="760" dirty="0"/>
           </a:p>
@@ -2611,7 +2611,7 @@
               <a:buNone/>
             </a:pPr>
             <a:r>
-              <a:rPr lang="en-US" sz="680" dirty="0">
+              <a:rPr lang="en-US" sz="710" dirty="0">
                 <a:solidFill>
                   <a:srgbClr val="5F6368"/>
                 </a:solidFill>
@@ -2619,9 +2619,9 @@
                 <a:ea typeface="Roboto" pitchFamily="34" charset="-122"/>
                 <a:cs typeface="Roboto" pitchFamily="34" charset="-120"/>
               </a:rPr>
-              <a:t>Banking (OCC/FFIEC), healthcare (HIPAA), and sovereign cloud auditors frequently mandate zero shared compute, zero shared storage, and.</a:t>
-            </a:r>
-            <a:endParaRPr lang="en-US" sz="680" dirty="0"/>
+              <a:t>Banking (OCC/FFIEC), healthcare (HIPAA), and public-sector auditors require zero shared compute or storage.</a:t>
+            </a:r>
+            <a:endParaRPr lang="en-US" sz="710" dirty="0"/>
           </a:p>
         </p:txBody>
       </p:sp>
@@ -2705,7 +2705,7 @@
                 <a:ea typeface="Google Sans" pitchFamily="34" charset="-122"/>
                 <a:cs typeface="Google Sans" pitchFamily="34" charset="-120"/>
               </a:rPr>
-              <a:t>80% Reusable ADK Codebase, 20% Dedicated…</a:t>
+              <a:t>80% Reusable Core, 20% Perimeter</a:t>
             </a:r>
             <a:endParaRPr lang="en-US" sz="760" dirty="0"/>
           </a:p>
@@ -2738,7 +2738,7 @@
               <a:buNone/>
             </a:pPr>
             <a:r>
-              <a:rPr lang="en-US" sz="680" dirty="0">
+              <a:rPr lang="en-US" sz="710" dirty="0">
                 <a:solidFill>
                   <a:srgbClr val="5F6368"/>
                 </a:solidFill>
@@ -2746,9 +2746,9 @@
                 <a:ea typeface="Roboto" pitchFamily="34" charset="-122"/>
                 <a:cs typeface="Roboto" pitchFamily="34" charset="-120"/>
               </a:rPr>
-              <a:t>Pattern B deploys the exact same 5-hop Python ADK runtime inside a dedicated per-tenant Google Cloud project (cymbal-finvault-silo-prod).</a:t>
-            </a:r>
-            <a:endParaRPr lang="en-US" sz="680" dirty="0"/>
+              <a:t>Pattern B deploys the exact same 5-hop Python ADK runtime inside a dedicated per-tenant GCP project.</a:t>
+            </a:r>
+            <a:endParaRPr lang="en-US" sz="710" dirty="0"/>
           </a:p>
         </p:txBody>
       </p:sp>
@@ -2832,7 +2832,7 @@
                 <a:ea typeface="Google Sans" pitchFamily="34" charset="-122"/>
                 <a:cs typeface="Google Sans" pitchFamily="34" charset="-120"/>
               </a:rPr>
-              <a:t>Three Hardware-Enforced Perimeter Walls</a:t>
+              <a:t>Three Hardware Perimeter Walls</a:t>
             </a:r>
             <a:endParaRPr lang="en-US" sz="760" dirty="0"/>
           </a:p>
@@ -2865,7 +2865,7 @@
               <a:buNone/>
             </a:pPr>
             <a:r>
-              <a:rPr lang="en-US" sz="680" dirty="0">
+              <a:rPr lang="en-US" sz="710" dirty="0">
                 <a:solidFill>
                   <a:srgbClr val="5F6368"/>
                 </a:solidFill>
@@ -2873,9 +2873,9 @@
                 <a:ea typeface="Roboto" pitchFamily="34" charset="-122"/>
                 <a:cs typeface="Roboto" pitchFamily="34" charset="-120"/>
               </a:rPr>
-              <a:t>Every tenant vault is locked by mTLS + IAM Principal Access Boundaries (PAB), a VPC Service Controls (VPC-SC) perimeter, and dedicated Cloud KMS.</a:t>
-            </a:r>
-            <a:endParaRPr lang="en-US" sz="680" dirty="0"/>
+              <a:t>Every tenant silo is locked by mTLS + IAM PAB, a VPC Service Controls perimeter, and dedicated Cloud KMS CMEK.</a:t>
+            </a:r>
+            <a:endParaRPr lang="en-US" sz="710" dirty="0"/>
           </a:p>
         </p:txBody>
       </p:sp>
@@ -2959,7 +2959,7 @@
                 <a:ea typeface="Google Sans" pitchFamily="34" charset="-122"/>
                 <a:cs typeface="Google Sans" pitchFamily="34" charset="-120"/>
               </a:rPr>
-              <a:t>Sub-60-Second Customer CMEK Kill-Switch</a:t>
+              <a:t>Sub-60s Customer CMEK Kill-Switch</a:t>
             </a:r>
             <a:endParaRPr lang="en-US" sz="760" dirty="0"/>
           </a:p>
@@ -2992,7 +2992,7 @@
               <a:buNone/>
             </a:pPr>
             <a:r>
-              <a:rPr lang="en-US" sz="680" dirty="0">
+              <a:rPr lang="en-US" sz="710" dirty="0">
                 <a:solidFill>
                   <a:srgbClr val="5F6368"/>
                 </a:solidFill>
@@ -3000,9 +3000,9 @@
                 <a:ea typeface="Roboto" pitchFamily="34" charset="-122"/>
                 <a:cs typeface="Roboto" pitchFamily="34" charset="-120"/>
               </a:rPr>
-              <a:t>If a tenant Security Operations Center revokes or disables its Cloud KMS key, all Agent Engine memory, AlloyDB reads, and GKE inference halt.</a:t>
-            </a:r>
-            <a:endParaRPr lang="en-US" sz="680" dirty="0"/>
+              <a:t>Disabling the tenant Cloud KMS key halts Agent Engine memory, AlloyDB reads, and GKE inference (HTTP 423).</a:t>
+            </a:r>
+            <a:endParaRPr lang="en-US" sz="710" dirty="0"/>
           </a:p>
         </p:txBody>
       </p:sp>
@@ -3956,7 +3956,7 @@
                 <a:ea typeface="Google Sans" pitchFamily="34" charset="-122"/>
                 <a:cs typeface="Google Sans" pitchFamily="34" charset="-120"/>
               </a:rPr>
-              <a:t>Verified Across 3 GCP Projects (#248990048888 • #638420508320 • #887605034827) • 12/12 Forensic PASS</a:t>
+              <a:t>Verified Across 3 GCP Projects (#248990048888 • #638420508320 • #887605034827) • 13/13 Forensic PASS</a:t>
             </a:r>
             <a:endParaRPr lang="en-US" sz="720" dirty="0"/>
           </a:p>
@@ -19019,11 +19019,11 @@
         <p:spPr>
           <a:xfrm>
             <a:off x="7443216" y="1700784"/>
-            <a:ext cx="4382719" cy="512064"/>
+            <a:ext cx="4382719" cy="594360"/>
           </a:xfrm>
           <a:prstGeom prst="roundRect">
             <a:avLst>
-              <a:gd name="adj" fmla="val 10714"/>
+              <a:gd name="adj" fmla="val 9231"/>
             </a:avLst>
           </a:prstGeom>
           <a:solidFill>
@@ -19046,7 +19046,7 @@
         <p:spPr>
           <a:xfrm>
             <a:off x="7443216" y="1700784"/>
-            <a:ext cx="64008" cy="512064"/>
+            <a:ext cx="64008" cy="594360"/>
           </a:xfrm>
           <a:prstGeom prst="rect">
             <a:avLst/>
@@ -19143,7 +19143,7 @@
               <a:buNone/>
             </a:pPr>
             <a:r>
-              <a:rPr lang="en-US" sz="740" b="1" dirty="0">
+              <a:rPr lang="en-US" sz="730" b="1" dirty="0">
                 <a:solidFill>
                   <a:srgbClr val="3C4043"/>
                 </a:solidFill>
@@ -19153,7 +19153,7 @@
               </a:rPr>
               <a:t>1. mTLS Ingress &amp; IAM Principal Access Boundary</a:t>
             </a:r>
-            <a:endParaRPr lang="en-US" sz="740" dirty="0"/>
+            <a:endParaRPr lang="en-US" sz="730" dirty="0"/>
           </a:p>
         </p:txBody>
       </p:sp>
@@ -19165,8 +19165,8 @@
         </p:nvSpPr>
         <p:spPr>
           <a:xfrm>
-            <a:off x="7552944" y="1920240"/>
-            <a:ext cx="4218127" cy="265176"/>
+            <a:off x="7552944" y="1901952"/>
+            <a:ext cx="4236415" cy="374904"/>
           </a:xfrm>
           <a:prstGeom prst="rect">
             <a:avLst/>
@@ -19182,7 +19182,7 @@
               <a:buNone/>
             </a:pPr>
             <a:r>
-              <a:rPr lang="en-US" sz="670" dirty="0">
+              <a:rPr lang="en-US" sz="625" dirty="0">
                 <a:solidFill>
                   <a:srgbClr val="5F6368"/>
                 </a:solidFill>
@@ -19192,7 +19192,7 @@
               </a:rPr>
               <a:t>Verifies client mTLS X.509 certificates at Hop 1, enforces IAM Principal Access Boundaries (PAB), and routes to the tenant’s dedicated silo project.</a:t>
             </a:r>
-            <a:endParaRPr lang="en-US" sz="670" dirty="0"/>
+            <a:endParaRPr lang="en-US" sz="625" dirty="0"/>
           </a:p>
         </p:txBody>
       </p:sp>
@@ -19204,12 +19204,12 @@
         </p:nvSpPr>
         <p:spPr>
           <a:xfrm>
-            <a:off x="7443216" y="2267712"/>
-            <a:ext cx="4382719" cy="512064"/>
+            <a:off x="7443216" y="2340864"/>
+            <a:ext cx="4382719" cy="594360"/>
           </a:xfrm>
           <a:prstGeom prst="roundRect">
             <a:avLst>
-              <a:gd name="adj" fmla="val 10714"/>
+              <a:gd name="adj" fmla="val 9231"/>
             </a:avLst>
           </a:prstGeom>
           <a:solidFill>
@@ -19231,8 +19231,8 @@
         </p:nvSpPr>
         <p:spPr>
           <a:xfrm>
-            <a:off x="7443216" y="2267712"/>
-            <a:ext cx="64008" cy="512064"/>
+            <a:off x="7443216" y="2340864"/>
+            <a:ext cx="64008" cy="594360"/>
           </a:xfrm>
           <a:prstGeom prst="rect">
             <a:avLst/>
@@ -19251,7 +19251,7 @@
         </p:nvSpPr>
         <p:spPr>
           <a:xfrm>
-            <a:off x="7552944" y="2313432"/>
+            <a:off x="7552944" y="2386584"/>
             <a:ext cx="804672" cy="155448"/>
           </a:xfrm>
           <a:prstGeom prst="roundRect">
@@ -19273,7 +19273,7 @@
         </p:nvSpPr>
         <p:spPr>
           <a:xfrm>
-            <a:off x="7552944" y="2313432"/>
+            <a:off x="7552944" y="2386584"/>
             <a:ext cx="804672" cy="155448"/>
           </a:xfrm>
           <a:prstGeom prst="rect">
@@ -19312,7 +19312,7 @@
         </p:nvSpPr>
         <p:spPr>
           <a:xfrm>
-            <a:off x="8412480" y="2295144"/>
+            <a:off x="8412480" y="2368296"/>
             <a:ext cx="3358591" cy="182880"/>
           </a:xfrm>
           <a:prstGeom prst="rect">
@@ -19329,7 +19329,7 @@
               <a:buNone/>
             </a:pPr>
             <a:r>
-              <a:rPr lang="en-US" sz="740" b="1" dirty="0">
+              <a:rPr lang="en-US" sz="730" b="1" dirty="0">
                 <a:solidFill>
                   <a:srgbClr val="3C4043"/>
                 </a:solidFill>
@@ -19339,7 +19339,7 @@
               </a:rPr>
               <a:t>2. VPC-SC Perimeter &amp; CMEK Kill-Switch Monitor</a:t>
             </a:r>
-            <a:endParaRPr lang="en-US" sz="740" dirty="0"/>
+            <a:endParaRPr lang="en-US" sz="730" dirty="0"/>
           </a:p>
         </p:txBody>
       </p:sp>
@@ -19351,8 +19351,8 @@
         </p:nvSpPr>
         <p:spPr>
           <a:xfrm>
-            <a:off x="7552944" y="2487168"/>
-            <a:ext cx="4218127" cy="265176"/>
+            <a:off x="7552944" y="2542032"/>
+            <a:ext cx="4236415" cy="374904"/>
           </a:xfrm>
           <a:prstGeom prst="rect">
             <a:avLst/>
@@ -19368,7 +19368,7 @@
               <a:buNone/>
             </a:pPr>
             <a:r>
-              <a:rPr lang="en-US" sz="670" dirty="0">
+              <a:rPr lang="en-US" sz="625" dirty="0">
                 <a:solidFill>
                   <a:srgbClr val="5F6368"/>
                 </a:solidFill>
@@ -19378,7 +19378,7 @@
               </a:rPr>
               <a:t>Enforces VPC Service Controls across 8 Google Cloud APIs, checks real-time Cloud KMS CMEK state at Hop 3, and logs Access Transparency events.</a:t>
             </a:r>
-            <a:endParaRPr lang="en-US" sz="670" dirty="0"/>
+            <a:endParaRPr lang="en-US" sz="625" dirty="0"/>
           </a:p>
         </p:txBody>
       </p:sp>
@@ -19390,12 +19390,12 @@
         </p:nvSpPr>
         <p:spPr>
           <a:xfrm>
-            <a:off x="7443216" y="2834640"/>
-            <a:ext cx="4382719" cy="512064"/>
+            <a:off x="7443216" y="2980944"/>
+            <a:ext cx="4382719" cy="594360"/>
           </a:xfrm>
           <a:prstGeom prst="roundRect">
             <a:avLst>
-              <a:gd name="adj" fmla="val 10714"/>
+              <a:gd name="adj" fmla="val 9231"/>
             </a:avLst>
           </a:prstGeom>
           <a:solidFill>
@@ -19417,8 +19417,8 @@
         </p:nvSpPr>
         <p:spPr>
           <a:xfrm>
-            <a:off x="7443216" y="2834640"/>
-            <a:ext cx="64008" cy="512064"/>
+            <a:off x="7443216" y="2980944"/>
+            <a:ext cx="64008" cy="594360"/>
           </a:xfrm>
           <a:prstGeom prst="rect">
             <a:avLst/>
@@ -19437,7 +19437,7 @@
         </p:nvSpPr>
         <p:spPr>
           <a:xfrm>
-            <a:off x="7552944" y="2880360"/>
+            <a:off x="7552944" y="3026664"/>
             <a:ext cx="804672" cy="155448"/>
           </a:xfrm>
           <a:prstGeom prst="roundRect">
@@ -19459,7 +19459,7 @@
         </p:nvSpPr>
         <p:spPr>
           <a:xfrm>
-            <a:off x="7552944" y="2880360"/>
+            <a:off x="7552944" y="3026664"/>
             <a:ext cx="804672" cy="155448"/>
           </a:xfrm>
           <a:prstGeom prst="rect">
@@ -19498,7 +19498,7 @@
         </p:nvSpPr>
         <p:spPr>
           <a:xfrm>
-            <a:off x="8412480" y="2862072"/>
+            <a:off x="8412480" y="3008376"/>
             <a:ext cx="3358591" cy="182880"/>
           </a:xfrm>
           <a:prstGeom prst="rect">
@@ -19515,7 +19515,7 @@
               <a:buNone/>
             </a:pPr>
             <a:r>
-              <a:rPr lang="en-US" sz="740" b="1" dirty="0">
+              <a:rPr lang="en-US" sz="730" b="1" dirty="0">
                 <a:solidFill>
                   <a:srgbClr val="3C4043"/>
                 </a:solidFill>
@@ -19525,7 +19525,7 @@
               </a:rPr>
               <a:t>3. FinVault Sovereign Silo Project (CMEK ENABLED)</a:t>
             </a:r>
-            <a:endParaRPr lang="en-US" sz="740" dirty="0"/>
+            <a:endParaRPr lang="en-US" sz="730" dirty="0"/>
           </a:p>
         </p:txBody>
       </p:sp>
@@ -19537,8 +19537,8 @@
         </p:nvSpPr>
         <p:spPr>
           <a:xfrm>
-            <a:off x="7552944" y="3054096"/>
-            <a:ext cx="4218127" cy="265176"/>
+            <a:off x="7552944" y="3182112"/>
+            <a:ext cx="4236415" cy="374904"/>
           </a:xfrm>
           <a:prstGeom prst="rect">
             <a:avLst/>
@@ -19554,7 +19554,7 @@
               <a:buNone/>
             </a:pPr>
             <a:r>
-              <a:rPr lang="en-US" sz="670" dirty="0">
+              <a:rPr lang="en-US" sz="595" dirty="0">
                 <a:solidFill>
                   <a:srgbClr val="5F6368"/>
                 </a:solidFill>
@@ -19564,7 +19564,7 @@
               </a:rPr>
               <a:t>Dedicated project running air-gapped Gemma 3 (27B) on private GKE + Gemini 2.5 Pro (Dedicated PT) and CMEK-encrypted AlloyDB/BigQuery vault (2 rows returned).</a:t>
             </a:r>
-            <a:endParaRPr lang="en-US" sz="670" dirty="0"/>
+            <a:endParaRPr lang="en-US" sz="595" dirty="0"/>
           </a:p>
         </p:txBody>
       </p:sp>
@@ -19576,12 +19576,12 @@
         </p:nvSpPr>
         <p:spPr>
           <a:xfrm>
-            <a:off x="7443216" y="3401568"/>
-            <a:ext cx="4382719" cy="512064"/>
+            <a:off x="7443216" y="3621024"/>
+            <a:ext cx="4382719" cy="594360"/>
           </a:xfrm>
           <a:prstGeom prst="roundRect">
             <a:avLst>
-              <a:gd name="adj" fmla="val 10714"/>
+              <a:gd name="adj" fmla="val 9231"/>
             </a:avLst>
           </a:prstGeom>
           <a:solidFill>
@@ -19603,8 +19603,8 @@
         </p:nvSpPr>
         <p:spPr>
           <a:xfrm>
-            <a:off x="7443216" y="3401568"/>
-            <a:ext cx="64008" cy="512064"/>
+            <a:off x="7443216" y="3621024"/>
+            <a:ext cx="64008" cy="594360"/>
           </a:xfrm>
           <a:prstGeom prst="rect">
             <a:avLst/>
@@ -19623,7 +19623,7 @@
         </p:nvSpPr>
         <p:spPr>
           <a:xfrm>
-            <a:off x="7552944" y="3447288"/>
+            <a:off x="7552944" y="3666744"/>
             <a:ext cx="804672" cy="155448"/>
           </a:xfrm>
           <a:prstGeom prst="roundRect">
@@ -19645,7 +19645,7 @@
         </p:nvSpPr>
         <p:spPr>
           <a:xfrm>
-            <a:off x="7552944" y="3447288"/>
+            <a:off x="7552944" y="3666744"/>
             <a:ext cx="804672" cy="155448"/>
           </a:xfrm>
           <a:prstGeom prst="rect">
@@ -19684,7 +19684,7 @@
         </p:nvSpPr>
         <p:spPr>
           <a:xfrm>
-            <a:off x="8412480" y="3429000"/>
+            <a:off x="8412480" y="3648456"/>
             <a:ext cx="3358591" cy="182880"/>
           </a:xfrm>
           <a:prstGeom prst="rect">
@@ -19701,7 +19701,7 @@
               <a:buNone/>
             </a:pPr>
             <a:r>
-              <a:rPr lang="en-US" sz="740" b="1" dirty="0">
+              <a:rPr lang="en-US" sz="730" b="1" dirty="0">
                 <a:solidFill>
                   <a:srgbClr val="3C4043"/>
                 </a:solidFill>
@@ -19711,7 +19711,7 @@
               </a:rPr>
               <a:t>4. RetailStream / MedCore Silo (CMEK Kill-Switch)</a:t>
             </a:r>
-            <a:endParaRPr lang="en-US" sz="740" dirty="0"/>
+            <a:endParaRPr lang="en-US" sz="730" dirty="0"/>
           </a:p>
         </p:txBody>
       </p:sp>
@@ -19723,8 +19723,8 @@
         </p:nvSpPr>
         <p:spPr>
           <a:xfrm>
-            <a:off x="7552944" y="3621024"/>
-            <a:ext cx="4218127" cy="265176"/>
+            <a:off x="7552944" y="3822192"/>
+            <a:ext cx="4236415" cy="374904"/>
           </a:xfrm>
           <a:prstGeom prst="rect">
             <a:avLst/>
@@ -19740,7 +19740,7 @@
               <a:buNone/>
             </a:pPr>
             <a:r>
-              <a:rPr lang="en-US" sz="670" dirty="0">
+              <a:rPr lang="en-US" sz="625" dirty="0">
                 <a:solidFill>
                   <a:srgbClr val="5F6368"/>
                 </a:solidFill>
@@ -19750,7 +19750,7 @@
               </a:rPr>
               <a:t>Demonstrates dual-silo parity and instant customer CMEK revocation: disabling the cryptoKeyVersion immediately locks the silo with HTTP 423 Locked.</a:t>
             </a:r>
-            <a:endParaRPr lang="en-US" sz="670" dirty="0"/>
+            <a:endParaRPr lang="en-US" sz="625" dirty="0"/>
           </a:p>
         </p:txBody>
       </p:sp>
@@ -19762,8 +19762,8 @@
         </p:nvSpPr>
         <p:spPr>
           <a:xfrm>
-            <a:off x="7461504" y="4005072"/>
-            <a:ext cx="4346143" cy="164592"/>
+            <a:off x="7461504" y="4288536"/>
+            <a:ext cx="4346143" cy="155448"/>
           </a:xfrm>
           <a:prstGeom prst="rect">
             <a:avLst/>
@@ -19779,7 +19779,7 @@
               <a:buNone/>
             </a:pPr>
             <a:r>
-              <a:rPr lang="en-US" sz="720" b="1" dirty="0">
+              <a:rPr lang="en-US" sz="710" b="1" dirty="0">
                 <a:solidFill>
                   <a:srgbClr val="5F6368"/>
                 </a:solidFill>
@@ -19789,7 +19789,7 @@
               </a:rPr>
               <a:t>KEY ARCHITECTURAL WALKTHROUGH POINTS</a:t>
             </a:r>
-            <a:endParaRPr lang="en-US" sz="720" dirty="0"/>
+            <a:endParaRPr lang="en-US" sz="710" dirty="0"/>
           </a:p>
         </p:txBody>
       </p:sp>
@@ -19801,12 +19801,12 @@
         </p:nvSpPr>
         <p:spPr>
           <a:xfrm>
-            <a:off x="7443216" y="4187952"/>
-            <a:ext cx="4382719" cy="428854"/>
+            <a:off x="7443216" y="4453128"/>
+            <a:ext cx="4382719" cy="378562"/>
           </a:xfrm>
           <a:prstGeom prst="roundRect">
             <a:avLst>
-              <a:gd name="adj" fmla="val 12793"/>
+              <a:gd name="adj" fmla="val 14493"/>
             </a:avLst>
           </a:prstGeom>
           <a:solidFill>
@@ -19828,7 +19828,7 @@
         </p:nvSpPr>
         <p:spPr>
           <a:xfrm>
-            <a:off x="7516368" y="4301338"/>
+            <a:off x="7516368" y="4541825"/>
             <a:ext cx="219456" cy="201168"/>
           </a:xfrm>
           <a:prstGeom prst="roundRect">
@@ -19850,7 +19850,7 @@
         </p:nvSpPr>
         <p:spPr>
           <a:xfrm>
-            <a:off x="7516368" y="4301338"/>
+            <a:off x="7516368" y="4541825"/>
             <a:ext cx="219456" cy="201168"/>
           </a:xfrm>
           <a:prstGeom prst="rect">
@@ -19889,8 +19889,8 @@
         </p:nvSpPr>
         <p:spPr>
           <a:xfrm>
-            <a:off x="7790688" y="4215384"/>
-            <a:ext cx="3980383" cy="373990"/>
+            <a:off x="7790688" y="4471416"/>
+            <a:ext cx="3980383" cy="341986"/>
           </a:xfrm>
           <a:prstGeom prst="rect">
             <a:avLst/>
@@ -19906,7 +19906,7 @@
               <a:buNone/>
             </a:pPr>
             <a:r>
-              <a:rPr lang="en-US" sz="690" dirty="0">
+              <a:rPr lang="en-US" sz="675" dirty="0">
                 <a:solidFill>
                   <a:srgbClr val="5F6368"/>
                 </a:solidFill>
@@ -19916,7 +19916,7 @@
               </a:rPr>
               <a:t>Enterprise callers authenticate at Step 1 with pinned BeyondCorp mTLS certificates and receive a silo-isolated response at Step 7 (or HTTP 423 if CMEK is revoked).</a:t>
             </a:r>
-            <a:endParaRPr lang="en-US" sz="690" dirty="0"/>
+            <a:endParaRPr lang="en-US" sz="675" dirty="0"/>
           </a:p>
         </p:txBody>
       </p:sp>
@@ -19928,12 +19928,12 @@
         </p:nvSpPr>
         <p:spPr>
           <a:xfrm>
-            <a:off x="7443216" y="4667098"/>
-            <a:ext cx="4382719" cy="428854"/>
+            <a:off x="7443216" y="4872838"/>
+            <a:ext cx="4382719" cy="378562"/>
           </a:xfrm>
           <a:prstGeom prst="roundRect">
             <a:avLst>
-              <a:gd name="adj" fmla="val 12793"/>
+              <a:gd name="adj" fmla="val 14493"/>
             </a:avLst>
           </a:prstGeom>
           <a:solidFill>
@@ -19955,7 +19955,7 @@
         </p:nvSpPr>
         <p:spPr>
           <a:xfrm>
-            <a:off x="7516368" y="4780483"/>
+            <a:off x="7516368" y="4961534"/>
             <a:ext cx="219456" cy="201168"/>
           </a:xfrm>
           <a:prstGeom prst="roundRect">
@@ -19977,7 +19977,7 @@
         </p:nvSpPr>
         <p:spPr>
           <a:xfrm>
-            <a:off x="7516368" y="4780483"/>
+            <a:off x="7516368" y="4961534"/>
             <a:ext cx="219456" cy="201168"/>
           </a:xfrm>
           <a:prstGeom prst="rect">
@@ -20016,8 +20016,8 @@
         </p:nvSpPr>
         <p:spPr>
           <a:xfrm>
-            <a:off x="7790688" y="4694530"/>
-            <a:ext cx="3980383" cy="373990"/>
+            <a:off x="7790688" y="4891126"/>
+            <a:ext cx="3980383" cy="341986"/>
           </a:xfrm>
           <a:prstGeom prst="rect">
             <a:avLst/>
@@ -20033,7 +20033,7 @@
               <a:buNone/>
             </a:pPr>
             <a:r>
-              <a:rPr lang="en-US" sz="690" dirty="0">
+              <a:rPr lang="en-US" sz="675" dirty="0">
                 <a:solidFill>
                   <a:srgbClr val="5F6368"/>
                 </a:solidFill>
@@ -20043,7 +20043,7 @@
               </a:rPr>
               <a:t>Zone 1 (Silo Ingress &amp; Identity): Validates mTLS device certificates, enforces IAM Principal Access Boundaries, and screens prompts with Model Armor.</a:t>
             </a:r>
-            <a:endParaRPr lang="en-US" sz="690" dirty="0"/>
+            <a:endParaRPr lang="en-US" sz="675" dirty="0"/>
           </a:p>
         </p:txBody>
       </p:sp>
@@ -20055,12 +20055,12 @@
         </p:nvSpPr>
         <p:spPr>
           <a:xfrm>
-            <a:off x="7443216" y="5145329"/>
-            <a:ext cx="4382719" cy="428854"/>
+            <a:off x="7443216" y="5291633"/>
+            <a:ext cx="4382719" cy="378562"/>
           </a:xfrm>
           <a:prstGeom prst="roundRect">
             <a:avLst>
-              <a:gd name="adj" fmla="val 12793"/>
+              <a:gd name="adj" fmla="val 14493"/>
             </a:avLst>
           </a:prstGeom>
           <a:solidFill>
@@ -20082,7 +20082,7 @@
         </p:nvSpPr>
         <p:spPr>
           <a:xfrm>
-            <a:off x="7516368" y="5258714"/>
+            <a:off x="7516368" y="5380330"/>
             <a:ext cx="219456" cy="201168"/>
           </a:xfrm>
           <a:prstGeom prst="roundRect">
@@ -20104,7 +20104,7 @@
         </p:nvSpPr>
         <p:spPr>
           <a:xfrm>
-            <a:off x="7516368" y="5258714"/>
+            <a:off x="7516368" y="5380330"/>
             <a:ext cx="219456" cy="201168"/>
           </a:xfrm>
           <a:prstGeom prst="rect">
@@ -20143,8 +20143,8 @@
         </p:nvSpPr>
         <p:spPr>
           <a:xfrm>
-            <a:off x="7790688" y="5172761"/>
-            <a:ext cx="3980383" cy="373990"/>
+            <a:off x="7790688" y="5309921"/>
+            <a:ext cx="3980383" cy="341986"/>
           </a:xfrm>
           <a:prstGeom prst="rect">
             <a:avLst/>
@@ -20160,7 +20160,7 @@
               <a:buNone/>
             </a:pPr>
             <a:r>
-              <a:rPr lang="en-US" sz="690" dirty="0">
+              <a:rPr lang="en-US" sz="675" dirty="0">
                 <a:solidFill>
                   <a:srgbClr val="5F6368"/>
                 </a:solidFill>
@@ -20170,7 +20170,7 @@
               </a:rPr>
               <a:t>Zone 2 (Sovereign Governance Hub): Monitors VPC Service Controls perimeters, polls Cloud KMS CMEK liveness on every turn, and runs all 6 compliance assertions.</a:t>
             </a:r>
-            <a:endParaRPr lang="en-US" sz="690" dirty="0"/>
+            <a:endParaRPr lang="en-US" sz="675" dirty="0"/>
           </a:p>
         </p:txBody>
       </p:sp>
@@ -20182,12 +20182,12 @@
         </p:nvSpPr>
         <p:spPr>
           <a:xfrm>
-            <a:off x="7443216" y="5624474"/>
-            <a:ext cx="4382719" cy="428854"/>
+            <a:off x="7443216" y="5711342"/>
+            <a:ext cx="4382719" cy="378562"/>
           </a:xfrm>
           <a:prstGeom prst="roundRect">
             <a:avLst>
-              <a:gd name="adj" fmla="val 12793"/>
+              <a:gd name="adj" fmla="val 14493"/>
             </a:avLst>
           </a:prstGeom>
           <a:solidFill>
@@ -20209,7 +20209,7 @@
         </p:nvSpPr>
         <p:spPr>
           <a:xfrm>
-            <a:off x="7516368" y="5737860"/>
+            <a:off x="7516368" y="5800039"/>
             <a:ext cx="219456" cy="201168"/>
           </a:xfrm>
           <a:prstGeom prst="roundRect">
@@ -20231,7 +20231,7 @@
         </p:nvSpPr>
         <p:spPr>
           <a:xfrm>
-            <a:off x="7516368" y="5737860"/>
+            <a:off x="7516368" y="5800039"/>
             <a:ext cx="219456" cy="201168"/>
           </a:xfrm>
           <a:prstGeom prst="rect">
@@ -20270,8 +20270,8 @@
         </p:nvSpPr>
         <p:spPr>
           <a:xfrm>
-            <a:off x="7790688" y="5651906"/>
-            <a:ext cx="3980383" cy="373990"/>
+            <a:off x="7790688" y="5729630"/>
+            <a:ext cx="3980383" cy="341986"/>
           </a:xfrm>
           <a:prstGeom prst="rect">
             <a:avLst/>
@@ -20287,7 +20287,7 @@
               <a:buNone/>
             </a:pPr>
             <a:r>
-              <a:rPr lang="en-US" sz="690" dirty="0">
+              <a:rPr lang="en-US" sz="675" dirty="0">
                 <a:solidFill>
                   <a:srgbClr val="5F6368"/>
                 </a:solidFill>
@@ -20297,7 +20297,7 @@
               </a:rPr>
               <a:t>Zone 3 (FinVault Sovereign Project): Dedicated GCP project running air-gapped Gemma 3 (27B) on private GKE and CMEK-encrypted AlloyDB/Memory Bank.</a:t>
             </a:r>
-            <a:endParaRPr lang="en-US" sz="690" dirty="0"/>
+            <a:endParaRPr lang="en-US" sz="675" dirty="0"/>
           </a:p>
         </p:txBody>
       </p:sp>
@@ -20309,7 +20309,7 @@
         </p:nvSpPr>
         <p:spPr>
           <a:xfrm>
-            <a:off x="7443216" y="6126480"/>
+            <a:off x="7443216" y="6144768"/>
             <a:ext cx="4382719" cy="329184"/>
           </a:xfrm>
           <a:prstGeom prst="roundRect">
@@ -20336,7 +20336,7 @@
         </p:nvSpPr>
         <p:spPr>
           <a:xfrm>
-            <a:off x="7498080" y="6126480"/>
+            <a:off x="7498080" y="6144768"/>
             <a:ext cx="4272991" cy="329184"/>
           </a:xfrm>
           <a:prstGeom prst="rect">
@@ -21102,7 +21102,7 @@
         </p:nvSpPr>
         <p:spPr>
           <a:xfrm flipH="1">
-            <a:off x="2948940" y="2475281"/>
+            <a:off x="2948940" y="2414016"/>
             <a:ext cx="148133" cy="0"/>
           </a:xfrm>
           <a:prstGeom prst="line">
@@ -21127,7 +21127,7 @@
         <p:spPr>
           <a:xfrm flipV="1">
             <a:off x="2948940" y="2306117"/>
-            <a:ext cx="0" cy="169164"/>
+            <a:ext cx="0" cy="107899"/>
           </a:xfrm>
           <a:prstGeom prst="line">
             <a:avLst/>
@@ -21173,7 +21173,7 @@
         </p:nvSpPr>
         <p:spPr>
           <a:xfrm flipH="1">
-            <a:off x="2948940" y="2475281"/>
+            <a:off x="2948940" y="2535631"/>
             <a:ext cx="148133" cy="0"/>
           </a:xfrm>
           <a:prstGeom prst="line">
@@ -21197,8 +21197,8 @@
         </p:nvSpPr>
         <p:spPr>
           <a:xfrm>
-            <a:off x="2948940" y="2475281"/>
-            <a:ext cx="0" cy="195682"/>
+            <a:off x="2948940" y="2535631"/>
+            <a:ext cx="0" cy="135331"/>
           </a:xfrm>
           <a:prstGeom prst="line">
             <a:avLst/>
@@ -28508,7 +28508,7 @@
         </p:nvSpPr>
         <p:spPr>
           <a:xfrm>
-            <a:off x="7406640" y="4498848"/>
+            <a:off x="7406640" y="4407408"/>
             <a:ext cx="292608" cy="292608"/>
           </a:xfrm>
           <a:prstGeom prst="rect">
@@ -28547,12 +28547,12 @@
         </p:nvSpPr>
         <p:spPr>
           <a:xfrm>
-            <a:off x="6272784" y="4517136"/>
-            <a:ext cx="859536" cy="274320"/>
+            <a:off x="6272784" y="4425696"/>
+            <a:ext cx="859536" cy="256032"/>
           </a:xfrm>
           <a:prstGeom prst="roundRect">
             <a:avLst>
-              <a:gd name="adj" fmla="val 16667"/>
+              <a:gd name="adj" fmla="val 17857"/>
             </a:avLst>
           </a:prstGeom>
           <a:solidFill>
@@ -28569,8 +28569,8 @@
         </p:nvSpPr>
         <p:spPr>
           <a:xfrm>
-            <a:off x="6272784" y="4517136"/>
-            <a:ext cx="859536" cy="274320"/>
+            <a:off x="6272784" y="4425696"/>
+            <a:ext cx="859536" cy="256032"/>
           </a:xfrm>
           <a:prstGeom prst="rect">
             <a:avLst/>
@@ -28586,7 +28586,7 @@
               <a:buNone/>
             </a:pPr>
             <a:r>
-              <a:rPr lang="en-US" sz="800" b="1" dirty="0">
+              <a:rPr lang="en-US" sz="780" b="1" dirty="0">
                 <a:solidFill>
                   <a:srgbClr val="FFFFFF"/>
                 </a:solidFill>
@@ -28596,7 +28596,7 @@
               </a:rPr>
               <a:t>Purge L1</a:t>
             </a:r>
-            <a:endParaRPr lang="en-US" sz="800" dirty="0"/>
+            <a:endParaRPr lang="en-US" sz="780" dirty="0"/>
           </a:p>
         </p:txBody>
       </p:sp>
@@ -28608,8 +28608,8 @@
         </p:nvSpPr>
         <p:spPr>
           <a:xfrm>
-            <a:off x="5321808" y="4846320"/>
-            <a:ext cx="1847088" cy="438912"/>
+            <a:off x="5248656" y="4718304"/>
+            <a:ext cx="1938528" cy="411480"/>
           </a:xfrm>
           <a:prstGeom prst="rect">
             <a:avLst/>
@@ -28625,7 +28625,7 @@
               <a:buNone/>
             </a:pPr>
             <a:r>
-              <a:rPr lang="en-US" sz="800" b="1" dirty="0">
+              <a:rPr lang="en-US" sz="770" b="1" dirty="0">
                 <a:solidFill>
                   <a:srgbClr val="3C4043"/>
                 </a:solidFill>
@@ -28635,14 +28635,14 @@
               </a:rPr>
               <a:t>Purges in-memory L1</a:t>
             </a:r>
-            <a:endParaRPr lang="en-US" sz="800" dirty="0"/>
+            <a:endParaRPr lang="en-US" sz="770" dirty="0"/>
           </a:p>
           <a:p>
             <a:pPr indent="0" marL="0">
               <a:buNone/>
             </a:pPr>
             <a:r>
-              <a:rPr lang="en-US" sz="800" b="1" dirty="0">
+              <a:rPr lang="en-US" sz="770" b="1" dirty="0">
                 <a:solidFill>
                   <a:srgbClr val="3C4043"/>
                 </a:solidFill>
@@ -28652,14 +28652,14 @@
               </a:rPr>
               <a:t>session cache &amp; halts</a:t>
             </a:r>
-            <a:endParaRPr lang="en-US" sz="800" dirty="0"/>
+            <a:endParaRPr lang="en-US" sz="770" dirty="0"/>
           </a:p>
           <a:p>
             <a:pPr indent="0" marL="0">
               <a:buNone/>
             </a:pPr>
             <a:r>
-              <a:rPr lang="en-US" sz="800" b="1" dirty="0">
+              <a:rPr lang="en-US" sz="770" b="1" dirty="0">
                 <a:solidFill>
                   <a:srgbClr val="3C4043"/>
                 </a:solidFill>
@@ -28669,7 +28669,7 @@
               </a:rPr>
               <a:t>AlloyDB / Memory I/O</a:t>
             </a:r>
-            <a:endParaRPr lang="en-US" sz="800" dirty="0"/>
+            <a:endParaRPr lang="en-US" sz="770" dirty="0"/>
           </a:p>
         </p:txBody>
       </p:sp>
@@ -28681,7 +28681,7 @@
         </p:nvSpPr>
         <p:spPr>
           <a:xfrm>
-            <a:off x="7342632" y="4901184"/>
+            <a:off x="7342632" y="4809744"/>
             <a:ext cx="2139696" cy="0"/>
           </a:xfrm>
           <a:prstGeom prst="line">
@@ -28705,7 +28705,7 @@
         </p:nvSpPr>
         <p:spPr>
           <a:xfrm>
-            <a:off x="7735824" y="4681728"/>
+            <a:off x="7735824" y="4590288"/>
             <a:ext cx="1682496" cy="182880"/>
           </a:xfrm>
           <a:prstGeom prst="rect">
@@ -28722,7 +28722,7 @@
               <a:buNone/>
             </a:pPr>
             <a:r>
-              <a:rPr lang="en-US" sz="800" b="1" dirty="0">
+              <a:rPr lang="en-US" sz="780" b="1" dirty="0">
                 <a:solidFill>
                   <a:srgbClr val="0F2942"/>
                 </a:solidFill>
@@ -28732,7 +28732,7 @@
               </a:rPr>
               <a:t>Purge L1 &amp; Halt I/O</a:t>
             </a:r>
-            <a:endParaRPr lang="en-US" sz="800" dirty="0"/>
+            <a:endParaRPr lang="en-US" sz="780" dirty="0"/>
           </a:p>
         </p:txBody>
       </p:sp>

--- a/slides/ws3-pattern-b-siloed-editable-slides.pptx
+++ b/slides/ws3-pattern-b-siloed-editable-slides.pptx
@@ -3956,7 +3956,7 @@
                 <a:ea typeface="Google Sans" pitchFamily="34" charset="-122"/>
                 <a:cs typeface="Google Sans" pitchFamily="34" charset="-120"/>
               </a:rPr>
-              <a:t>Verified Across 3 GCP Projects (#248990048888 • #638420508320 • #887605034827) • 13/13 Forensic PASS</a:t>
+              <a:t>Verified on Live GCP (#248990048888 • #48439189383) &amp; AWS (#393036065405) • 13/13 Forensic PASS</a:t>
             </a:r>
             <a:endParaRPr lang="en-US" sz="720" dirty="0"/>
           </a:p>
@@ -3980,7 +3980,7 @@
           <a:ln/>
         </p:spPr>
         <p:txBody>
-          <a:bodyPr wrap="square" rtlCol="0" anchor="ctr"/>
+          <a:bodyPr wrap="none" rtlCol="0" anchor="ctr"/>
           <a:lstStyle/>
           <a:p>
             <a:pPr algn="l" indent="0" marL="0">
@@ -4655,7 +4655,7 @@
                 <a:ea typeface="Roboto" pitchFamily="34" charset="-122"/>
                 <a:cs typeface="Roboto" pitchFamily="34" charset="-120"/>
               </a:rPr>
-              <a:t>• Project: cymbal-build-sandbox (#887605034827)</a:t>
+              <a:t>• Live Silo: bbar-138hf0 (#48439189383) • ramp-portal-dev (#248990048888)</a:t>
             </a:r>
             <a:endParaRPr lang="en-US" sz="840" dirty="0"/>
           </a:p>
@@ -4831,7 +4831,7 @@
                 <a:ea typeface="Google Sans" pitchFamily="34" charset="-122"/>
                 <a:cs typeface="Google Sans" pitchFamily="34" charset="-120"/>
               </a:rPr>
-              <a:t>LIVE GCP VERIFICATION 02 • KMS KEYRING &amp; 10-SAAS SOVEREIGN MCP</a:t>
+              <a:t>LIVE GCP VERIFICATION 02 • KMS KILL-SWITCH &amp; BEFORE/AFTER NOCODB/VAULT UIs</a:t>
             </a:r>
             <a:endParaRPr lang="en-US" sz="820" dirty="0"/>
           </a:p>
@@ -4897,7 +4897,7 @@
                 <a:ea typeface="Google Sans" pitchFamily="34" charset="-122"/>
                 <a:cs typeface="Google Sans" pitchFamily="34" charset="-120"/>
               </a:rPr>
-              <a:t>Cloud KMS keyring verifying &lt;60s cryptographic kill-switch, ECDSA P-256 key &amp; 10/10 Sovereign SaaS MCP flows</a:t>
+              <a:t>NocoDB v0.255.2 (21 CFR Part 11 KMS P-256) &amp; HashiCorp Vault v1.13.3 (&lt;60s HTTP 423 CMEK Lock) Retina UIs</a:t>
             </a:r>
             <a:endParaRPr lang="en-US" sz="920" dirty="0"/>
           </a:p>
@@ -4936,7 +4936,7 @@
                 <a:ea typeface="Roboto" pitchFamily="34" charset="-122"/>
                 <a:cs typeface="Roboto" pitchFamily="34" charset="-120"/>
               </a:rPr>
-              <a:t>• Keys: finvault-silo-cmek • retailstream-silo-cmek</a:t>
+              <a:t>• Intra-Cloud: run_silo_security_tests.py (6/6 • HTTP 423)</a:t>
             </a:r>
             <a:endParaRPr lang="en-US" sz="840" dirty="0"/>
           </a:p>
@@ -4953,7 +4953,7 @@
                 <a:ea typeface="Roboto" pitchFamily="34" charset="-122"/>
                 <a:cs typeface="Roboto" pitchFamily="34" charset="-120"/>
               </a:rPr>
-              <a:t>• Intra-Cloud: run_silo_security_tests.py (6/6 • HTTP 423)</a:t>
+              <a:t>• Inter-Cloud: 10/10 Silo SaaS MCP Targets PASS</a:t>
             </a:r>
             <a:endParaRPr lang="en-US" sz="840" dirty="0"/>
           </a:p>
@@ -4970,7 +4970,7 @@
                 <a:ea typeface="Roboto" pitchFamily="34" charset="-122"/>
                 <a:cs typeface="Roboto" pitchFamily="34" charset="-120"/>
               </a:rPr>
-              <a:t>• Inter-Cloud: 10/10 Silo SaaS MCP Targets PASS</a:t>
+              <a:t>• 3P UIs: NocoDB v0.255.2 GxP &amp; HashiCorp Vault v1.13.3 CMEK</a:t>
             </a:r>
             <a:endParaRPr lang="en-US" sz="840" dirty="0"/>
           </a:p>
@@ -5692,7 +5692,7 @@
                 <a:ea typeface="Google Sans" pitchFamily="34" charset="-122"/>
                 <a:cs typeface="Google Sans" pitchFamily="34" charset="-120"/>
               </a:rPr>
-              <a:t>PROOF 04 • GEMMA 3 27B &amp; 10-SAAS SILO MCP</a:t>
+              <a:t>PROOF 04 • NOCODB &amp; HASHICORP VAULT UIs</a:t>
             </a:r>
             <a:endParaRPr lang="en-US" sz="740" dirty="0"/>
           </a:p>
@@ -5731,7 +5731,7 @@
                 <a:ea typeface="Google Sans" pitchFamily="34" charset="-122"/>
                 <a:cs typeface="Google Sans" pitchFamily="34" charset="-120"/>
               </a:rPr>
-              <a:t>Air-Gapped Gemma 3 &amp; 10/10 Sovereign SaaS Flows</a:t>
+              <a:t>Before/After Sovereign 3P UI &amp; Gemma 3 Proofs</a:t>
             </a:r>
             <a:endParaRPr lang="en-US" sz="1050" dirty="0"/>
           </a:p>
@@ -5770,7 +5770,7 @@
                 <a:ea typeface="Roboto" pitchFamily="34" charset="-122"/>
                 <a:cs typeface="Roboto" pitchFamily="34" charset="-120"/>
               </a:rPr>
-              <a:t>Pairs Private GKE Gemma 3 27B (199.36.153.4/30) with 10/10 Pattern B Inter-Cloud AWS AgentCore MCP CMEK kill-switch assertions.</a:t>
+              <a:t>Pairs Private GKE Gemma 3 27B with genuine 2880×1800 Before/After NocoDB GxP &amp; HashiCorp Vault CMEK HTTP 423 UI captures.</a:t>
             </a:r>
             <a:endParaRPr lang="en-US" sz="860" dirty="0"/>
           </a:p>
@@ -5794,14 +5794,14 @@
           <a:ln/>
         </p:spPr>
         <p:txBody>
-          <a:bodyPr wrap="square" rtlCol="0" anchor="ctr"/>
+          <a:bodyPr wrap="none" rtlCol="0" anchor="ctr"/>
           <a:lstStyle/>
           <a:p>
             <a:pPr algn="l" indent="0" marL="0">
               <a:buNone/>
             </a:pPr>
             <a:r>
-              <a:rPr lang="en-US" sz="780" b="1" dirty="0">
+              <a:rPr lang="en-US" sz="700" b="1" dirty="0">
                 <a:solidFill>
                   <a:srgbClr val="4285F4"/>
                 </a:solidFill>
@@ -5815,7 +5815,7 @@
               <a:buNone/>
             </a:pPr>
             <a:r>
-              <a:rPr lang="en-US" sz="760" dirty="0">
+              <a:rPr lang="en-US" sz="690" dirty="0">
                 <a:solidFill>
                   <a:srgbClr val="5F6368"/>
                 </a:solidFill>
@@ -5829,7 +5829,7 @@
               <a:buNone/>
             </a:pPr>
             <a:r>
-              <a:rPr lang="en-US" sz="780" b="1" dirty="0">
+              <a:rPr lang="en-US" sz="700" b="1" dirty="0">
                 <a:solidFill>
                   <a:srgbClr val="3C4043"/>
                 </a:solidFill>
@@ -5839,7 +5839,7 @@
               </a:rPr>
               <a:t>Proprietary + Confidential</a:t>
             </a:r>
-            <a:endParaRPr lang="en-US" sz="780" dirty="0"/>
+            <a:endParaRPr lang="en-US" sz="700" dirty="0"/>
           </a:p>
         </p:txBody>
       </p:sp>
@@ -7439,7 +7439,7 @@
           <a:ln/>
         </p:spPr>
         <p:txBody>
-          <a:bodyPr wrap="square" rtlCol="0" anchor="ctr"/>
+          <a:bodyPr wrap="none" rtlCol="0" anchor="ctr"/>
           <a:lstStyle/>
           <a:p>
             <a:pPr algn="l" indent="0" marL="0">
@@ -9992,7 +9992,7 @@
           <a:ln/>
         </p:spPr>
         <p:txBody>
-          <a:bodyPr wrap="square" rtlCol="0" anchor="ctr"/>
+          <a:bodyPr wrap="none" rtlCol="0" anchor="ctr"/>
           <a:lstStyle/>
           <a:p>
             <a:pPr algn="l" indent="0" marL="0">
@@ -12177,7 +12177,7 @@
           <a:ln/>
         </p:spPr>
         <p:txBody>
-          <a:bodyPr wrap="square" rtlCol="0" anchor="ctr"/>
+          <a:bodyPr wrap="none" rtlCol="0" anchor="ctr"/>
           <a:lstStyle/>
           <a:p>
             <a:pPr algn="l" indent="0" marL="0">
@@ -15356,7 +15356,7 @@
           <a:ln/>
         </p:spPr>
         <p:txBody>
-          <a:bodyPr wrap="square" rtlCol="0" anchor="ctr"/>
+          <a:bodyPr wrap="none" rtlCol="0" anchor="ctr"/>
           <a:lstStyle/>
           <a:p>
             <a:pPr algn="l" indent="0" marL="0">
@@ -18302,7 +18302,7 @@
           <a:ln/>
         </p:spPr>
         <p:txBody>
-          <a:bodyPr wrap="square" rtlCol="0" anchor="ctr"/>
+          <a:bodyPr wrap="none" rtlCol="0" anchor="ctr"/>
           <a:lstStyle/>
           <a:p>
             <a:pPr algn="l" indent="0" marL="0">
@@ -19097,7 +19097,7 @@
           <a:ln/>
         </p:spPr>
         <p:txBody>
-          <a:bodyPr wrap="square" rtlCol="0" anchor="ctr"/>
+          <a:bodyPr wrap="none" rtlCol="0" anchor="ctr"/>
           <a:lstStyle/>
           <a:p>
             <a:pPr algn="ctr" indent="0" marL="0">
@@ -19283,7 +19283,7 @@
           <a:ln/>
         </p:spPr>
         <p:txBody>
-          <a:bodyPr wrap="square" rtlCol="0" anchor="ctr"/>
+          <a:bodyPr wrap="none" rtlCol="0" anchor="ctr"/>
           <a:lstStyle/>
           <a:p>
             <a:pPr algn="ctr" indent="0" marL="0">
@@ -19469,7 +19469,7 @@
           <a:ln/>
         </p:spPr>
         <p:txBody>
-          <a:bodyPr wrap="square" rtlCol="0" anchor="ctr"/>
+          <a:bodyPr wrap="none" rtlCol="0" anchor="ctr"/>
           <a:lstStyle/>
           <a:p>
             <a:pPr algn="ctr" indent="0" marL="0">
@@ -19655,7 +19655,7 @@
           <a:ln/>
         </p:spPr>
         <p:txBody>
-          <a:bodyPr wrap="square" rtlCol="0" anchor="ctr"/>
+          <a:bodyPr wrap="none" rtlCol="0" anchor="ctr"/>
           <a:lstStyle/>
           <a:p>
             <a:pPr algn="ctr" indent="0" marL="0">
@@ -20336,8 +20336,8 @@
         </p:nvSpPr>
         <p:spPr>
           <a:xfrm>
-            <a:off x="7498080" y="6144768"/>
-            <a:ext cx="4272991" cy="329184"/>
+            <a:off x="7479792" y="6144768"/>
+            <a:ext cx="4309567" cy="329184"/>
           </a:xfrm>
           <a:prstGeom prst="rect">
             <a:avLst/>
@@ -20353,7 +20353,7 @@
               <a:buNone/>
             </a:pPr>
             <a:r>
-              <a:rPr lang="en-US" sz="700" b="1" dirty="0">
+              <a:rPr lang="en-US" sz="610" b="1" dirty="0">
                 <a:solidFill>
                   <a:srgbClr val="0D652D"/>
                 </a:solidFill>
@@ -20361,9 +20361,9 @@
                 <a:ea typeface="Google Sans" pitchFamily="34" charset="-122"/>
                 <a:cs typeface="Google Sans" pitchFamily="34" charset="-120"/>
               </a:rPr>
-              <a:t>VERIFIED • 56 Editable Shapes • 23 Connectors • GCP: cymbal-build-sandbox (#887605034827)</a:t>
-            </a:r>
-            <a:endParaRPr lang="en-US" sz="700" dirty="0"/>
+              <a:t>VERIFIED • 56 Shapes • 23 Connectors • GCP: bbar-138hf0 (#48439189383) • ramp-portal-dev (#248990048888)</a:t>
+            </a:r>
+            <a:endParaRPr lang="en-US" sz="610" dirty="0"/>
           </a:p>
         </p:txBody>
       </p:sp>
@@ -20429,29 +20429,27 @@
         </p:nvSpPr>
         <p:spPr>
           <a:xfrm>
-            <a:off x="1343254" y="1608430"/>
-            <a:ext cx="2255825" cy="137160"/>
-          </a:xfrm>
-          <a:prstGeom prst="rect">
-            <a:avLst/>
-          </a:prstGeom>
-          <a:noFill/>
-          <a:ln/>
-        </p:spPr>
-        <p:txBody>
-          <a:bodyPr wrap="none" lIns="0" tIns="0" rIns="0" bIns="0" rtlCol="0" anchor="t">
-            <a:normAutofit/>
-          </a:bodyPr>
+            <a:off x="1343254" y="1613916"/>
+            <a:ext cx="2745943" cy="111557"/>
+          </a:xfrm>
+          <a:prstGeom prst="rect">
+            <a:avLst/>
+          </a:prstGeom>
+          <a:noFill/>
+          <a:ln/>
+        </p:spPr>
+        <p:txBody>
+          <a:bodyPr wrap="none" lIns="0" tIns="0" rIns="0" bIns="0" rtlCol="0" anchor="ctr"/>
           <a:lstStyle/>
           <a:p>
             <a:pPr algn="l" indent="0" marL="0">
               <a:lnSpc>
-                <a:spcPct val="85000"/>
+                <a:spcPct val="100000"/>
               </a:lnSpc>
               <a:buNone/>
             </a:pPr>
             <a:r>
-              <a:rPr lang="en-US" sz="460" b="1" dirty="0">
+              <a:rPr lang="en-US" sz="440" b="1" dirty="0">
                 <a:solidFill>
                   <a:srgbClr val="202124"/>
                 </a:solidFill>
@@ -20461,7 +20459,7 @@
               </a:rPr>
               <a:t>Multi-Project Sovereign Topology (cymbal-build-sandbox)</a:t>
             </a:r>
-            <a:endParaRPr lang="en-US" sz="460" dirty="0"/>
+            <a:endParaRPr lang="en-US" sz="440" dirty="0"/>
           </a:p>
         </p:txBody>
       </p:sp>
@@ -20500,29 +20498,27 @@
         </p:nvSpPr>
         <p:spPr>
           <a:xfrm>
-            <a:off x="1412748" y="1764792"/>
-            <a:ext cx="2191817" cy="137160"/>
-          </a:xfrm>
-          <a:prstGeom prst="rect">
-            <a:avLst/>
-          </a:prstGeom>
-          <a:noFill/>
-          <a:ln/>
-        </p:spPr>
-        <p:txBody>
-          <a:bodyPr wrap="none" lIns="0" tIns="0" rIns="0" bIns="0" rtlCol="0" anchor="t">
-            <a:normAutofit/>
-          </a:bodyPr>
+            <a:off x="1412748" y="1770278"/>
+            <a:ext cx="2668219" cy="111557"/>
+          </a:xfrm>
+          <a:prstGeom prst="rect">
+            <a:avLst/>
+          </a:prstGeom>
+          <a:noFill/>
+          <a:ln/>
+        </p:spPr>
+        <p:txBody>
+          <a:bodyPr wrap="none" lIns="0" tIns="0" rIns="0" bIns="0" rtlCol="0" anchor="ctr"/>
           <a:lstStyle/>
           <a:p>
             <a:pPr algn="l" indent="0" marL="0">
               <a:lnSpc>
-                <a:spcPct val="85000"/>
+                <a:spcPct val="100000"/>
               </a:lnSpc>
               <a:buNone/>
             </a:pPr>
             <a:r>
-              <a:rPr lang="en-US" sz="460" b="1" dirty="0">
+              <a:rPr lang="en-US" sz="440" b="1" dirty="0">
                 <a:solidFill>
                   <a:srgbClr val="202124"/>
                 </a:solidFill>
@@ -20532,7 +20528,7 @@
               </a:rPr>
               <a:t>Central mTLS Routing &amp; Governance Hub VPC</a:t>
             </a:r>
-            <a:endParaRPr lang="en-US" sz="460" dirty="0"/>
+            <a:endParaRPr lang="en-US" sz="440" dirty="0"/>
           </a:p>
         </p:txBody>
       </p:sp>
@@ -20565,51 +20561,7 @@
       </p:sp>
       <p:sp>
         <p:nvSpPr>
-          <p:cNvPr id="73" name="Text 71"/>
-          <p:cNvSpPr/>
-          <p:nvPr/>
-        </p:nvSpPr>
-        <p:spPr>
-          <a:xfrm>
-            <a:off x="1491386" y="3798418"/>
-            <a:ext cx="2133295" cy="137160"/>
-          </a:xfrm>
-          <a:prstGeom prst="rect">
-            <a:avLst/>
-          </a:prstGeom>
-          <a:noFill/>
-          <a:ln/>
-        </p:spPr>
-        <p:txBody>
-          <a:bodyPr wrap="none" lIns="0" tIns="0" rIns="0" bIns="0" rtlCol="0" anchor="t">
-            <a:normAutofit/>
-          </a:bodyPr>
-          <a:lstStyle/>
-          <a:p>
-            <a:pPr algn="l" indent="0" marL="0">
-              <a:lnSpc>
-                <a:spcPct val="85000"/>
-              </a:lnSpc>
-              <a:buNone/>
-            </a:pPr>
-            <a:r>
-              <a:rPr lang="en-US" sz="480" b="1" dirty="0">
-                <a:solidFill>
-                  <a:srgbClr val="202124"/>
-                </a:solidFill>
-                <a:latin typeface="Arial" pitchFamily="34" charset="0"/>
-                <a:ea typeface="Arial" pitchFamily="34" charset="-122"/>
-                <a:cs typeface="Arial" pitchFamily="34" charset="-120"/>
-              </a:rPr>
-              <a:t>PAB + VPC-SC Perimeter Alpha</a:t>
-            </a:r>
-            <a:endParaRPr lang="en-US" sz="480" dirty="0"/>
-          </a:p>
-        </p:txBody>
-      </p:sp>
-      <p:sp>
-        <p:nvSpPr>
-          <p:cNvPr id="74" name="Shape 72"/>
+          <p:cNvPr id="73" name="Shape 71"/>
           <p:cNvSpPr/>
           <p:nvPr/>
         </p:nvSpPr>
@@ -20636,51 +20588,7 @@
       </p:sp>
       <p:sp>
         <p:nvSpPr>
-          <p:cNvPr id="75" name="Text 73"/>
-          <p:cNvSpPr/>
-          <p:nvPr/>
-        </p:nvSpPr>
-        <p:spPr>
-          <a:xfrm>
-            <a:off x="3856025" y="3798418"/>
-            <a:ext cx="2133295" cy="137160"/>
-          </a:xfrm>
-          <a:prstGeom prst="rect">
-            <a:avLst/>
-          </a:prstGeom>
-          <a:noFill/>
-          <a:ln/>
-        </p:spPr>
-        <p:txBody>
-          <a:bodyPr wrap="none" lIns="0" tIns="0" rIns="0" bIns="0" rtlCol="0" anchor="t">
-            <a:normAutofit/>
-          </a:bodyPr>
-          <a:lstStyle/>
-          <a:p>
-            <a:pPr algn="l" indent="0" marL="0">
-              <a:lnSpc>
-                <a:spcPct val="85000"/>
-              </a:lnSpc>
-              <a:buNone/>
-            </a:pPr>
-            <a:r>
-              <a:rPr lang="en-US" sz="480" b="1" dirty="0">
-                <a:solidFill>
-                  <a:srgbClr val="202124"/>
-                </a:solidFill>
-                <a:latin typeface="Arial" pitchFamily="34" charset="0"/>
-                <a:ea typeface="Arial" pitchFamily="34" charset="-122"/>
-                <a:cs typeface="Arial" pitchFamily="34" charset="-120"/>
-              </a:rPr>
-              <a:t>PAB + VPC-SC Perimeter Beta</a:t>
-            </a:r>
-            <a:endParaRPr lang="en-US" sz="480" dirty="0"/>
-          </a:p>
-        </p:txBody>
-      </p:sp>
-      <p:sp>
-        <p:nvSpPr>
-          <p:cNvPr id="76" name="Shape 74"/>
+          <p:cNvPr id="74" name="Shape 72"/>
           <p:cNvSpPr/>
           <p:nvPr/>
         </p:nvSpPr>
@@ -20707,35 +20615,33 @@
       </p:sp>
       <p:sp>
         <p:nvSpPr>
-          <p:cNvPr id="77" name="Text 75"/>
-          <p:cNvSpPr/>
-          <p:nvPr/>
-        </p:nvSpPr>
-        <p:spPr>
-          <a:xfrm>
-            <a:off x="1560881" y="3955694"/>
-            <a:ext cx="1994306" cy="192024"/>
-          </a:xfrm>
-          <a:prstGeom prst="rect">
-            <a:avLst/>
-          </a:prstGeom>
-          <a:noFill/>
-          <a:ln/>
-        </p:spPr>
-        <p:txBody>
-          <a:bodyPr wrap="square" lIns="0" tIns="0" rIns="0" bIns="0" rtlCol="0" anchor="t">
-            <a:normAutofit/>
-          </a:bodyPr>
+          <p:cNvPr id="75" name="Text 73"/>
+          <p:cNvSpPr/>
+          <p:nvPr/>
+        </p:nvSpPr>
+        <p:spPr>
+          <a:xfrm>
+            <a:off x="1560881" y="3970325"/>
+            <a:ext cx="1994306" cy="210312"/>
+          </a:xfrm>
+          <a:prstGeom prst="rect">
+            <a:avLst/>
+          </a:prstGeom>
+          <a:noFill/>
+          <a:ln/>
+        </p:spPr>
+        <p:txBody>
+          <a:bodyPr wrap="square" lIns="0" tIns="0" rIns="0" bIns="0" rtlCol="0" anchor="t"/>
           <a:lstStyle/>
           <a:p>
             <a:pPr algn="l" indent="0" marL="0">
               <a:lnSpc>
-                <a:spcPct val="85000"/>
+                <a:spcPct val="102000"/>
               </a:lnSpc>
               <a:buNone/>
             </a:pPr>
             <a:r>
-              <a:rPr lang="en-US" sz="490" b="1" dirty="0">
+              <a:rPr lang="en-US" sz="470" b="1" dirty="0">
                 <a:solidFill>
                   <a:srgbClr val="202124"/>
                 </a:solidFill>
@@ -20745,17 +20651,17 @@
               </a:rPr>
               <a:t>Tenant A Silo (FinVault Bank)</a:t>
             </a:r>
-            <a:endParaRPr lang="en-US" sz="490" dirty="0"/>
+            <a:endParaRPr lang="en-US" sz="470" dirty="0"/>
           </a:p>
           <a:p>
             <a:pPr algn="l" indent="0" marL="0">
               <a:lnSpc>
-                <a:spcPct val="85000"/>
+                <a:spcPct val="102000"/>
               </a:lnSpc>
               <a:buNone/>
             </a:pPr>
             <a:r>
-              <a:rPr lang="en-US" sz="420" dirty="0">
+              <a:rPr lang="en-US" sz="400" dirty="0">
                 <a:solidFill>
                   <a:srgbClr val="202124"/>
                 </a:solidFill>
@@ -20765,13 +20671,13 @@
               </a:rPr>
               <a:t>Dedicated Silo • CMEK: finvault-silo-cmek</a:t>
             </a:r>
-            <a:endParaRPr lang="en-US" sz="490" dirty="0"/>
-          </a:p>
-        </p:txBody>
-      </p:sp>
-      <p:sp>
-        <p:nvSpPr>
-          <p:cNvPr id="78" name="Shape 76"/>
+            <a:endParaRPr lang="en-US" sz="470" dirty="0"/>
+          </a:p>
+        </p:txBody>
+      </p:sp>
+      <p:sp>
+        <p:nvSpPr>
+          <p:cNvPr id="76" name="Shape 74"/>
           <p:cNvSpPr/>
           <p:nvPr/>
         </p:nvSpPr>
@@ -20798,35 +20704,33 @@
       </p:sp>
       <p:sp>
         <p:nvSpPr>
-          <p:cNvPr id="79" name="Text 77"/>
-          <p:cNvSpPr/>
-          <p:nvPr/>
-        </p:nvSpPr>
-        <p:spPr>
-          <a:xfrm>
-            <a:off x="3925519" y="3955694"/>
-            <a:ext cx="1994306" cy="192024"/>
-          </a:xfrm>
-          <a:prstGeom prst="rect">
-            <a:avLst/>
-          </a:prstGeom>
-          <a:noFill/>
-          <a:ln/>
-        </p:spPr>
-        <p:txBody>
-          <a:bodyPr wrap="square" lIns="0" tIns="0" rIns="0" bIns="0" rtlCol="0" anchor="t">
-            <a:normAutofit/>
-          </a:bodyPr>
+          <p:cNvPr id="77" name="Text 75"/>
+          <p:cNvSpPr/>
+          <p:nvPr/>
+        </p:nvSpPr>
+        <p:spPr>
+          <a:xfrm>
+            <a:off x="3925519" y="3970325"/>
+            <a:ext cx="1994306" cy="210312"/>
+          </a:xfrm>
+          <a:prstGeom prst="rect">
+            <a:avLst/>
+          </a:prstGeom>
+          <a:noFill/>
+          <a:ln/>
+        </p:spPr>
+        <p:txBody>
+          <a:bodyPr wrap="square" lIns="0" tIns="0" rIns="0" bIns="0" rtlCol="0" anchor="t"/>
           <a:lstStyle/>
           <a:p>
             <a:pPr algn="l" indent="0" marL="0">
               <a:lnSpc>
-                <a:spcPct val="85000"/>
+                <a:spcPct val="102000"/>
               </a:lnSpc>
               <a:buNone/>
             </a:pPr>
             <a:r>
-              <a:rPr lang="en-US" sz="490" b="1" dirty="0">
+              <a:rPr lang="en-US" sz="470" b="1" dirty="0">
                 <a:solidFill>
                   <a:srgbClr val="202124"/>
                 </a:solidFill>
@@ -20836,17 +20740,17 @@
               </a:rPr>
               <a:t>Tenant B Silo (RetailStream Corp)</a:t>
             </a:r>
-            <a:endParaRPr lang="en-US" sz="490" dirty="0"/>
+            <a:endParaRPr lang="en-US" sz="470" dirty="0"/>
           </a:p>
           <a:p>
             <a:pPr algn="l" indent="0" marL="0">
               <a:lnSpc>
-                <a:spcPct val="85000"/>
+                <a:spcPct val="102000"/>
               </a:lnSpc>
               <a:buNone/>
             </a:pPr>
             <a:r>
-              <a:rPr lang="en-US" sz="420" dirty="0">
+              <a:rPr lang="en-US" sz="400" dirty="0">
                 <a:solidFill>
                   <a:srgbClr val="202124"/>
                 </a:solidFill>
@@ -20856,13 +20760,13 @@
               </a:rPr>
               <a:t>Dedicated Silo • CMEK: retailstream-silo-cmek</a:t>
             </a:r>
-            <a:endParaRPr lang="en-US" sz="490" dirty="0"/>
-          </a:p>
-        </p:txBody>
-      </p:sp>
-      <p:sp>
-        <p:nvSpPr>
-          <p:cNvPr id="80" name="Shape 78"/>
+            <a:endParaRPr lang="en-US" sz="470" dirty="0"/>
+          </a:p>
+        </p:txBody>
+      </p:sp>
+      <p:sp>
+        <p:nvSpPr>
+          <p:cNvPr id="78" name="Shape 76"/>
           <p:cNvSpPr/>
           <p:nvPr/>
         </p:nvSpPr>
@@ -20889,35 +20793,33 @@
       </p:sp>
       <p:sp>
         <p:nvSpPr>
-          <p:cNvPr id="81" name="Text 79"/>
-          <p:cNvSpPr/>
-          <p:nvPr/>
-        </p:nvSpPr>
-        <p:spPr>
-          <a:xfrm>
-            <a:off x="1482242" y="1912010"/>
-            <a:ext cx="1847088" cy="192024"/>
-          </a:xfrm>
-          <a:prstGeom prst="rect">
-            <a:avLst/>
-          </a:prstGeom>
-          <a:noFill/>
-          <a:ln/>
-        </p:spPr>
-        <p:txBody>
-          <a:bodyPr wrap="square" lIns="0" tIns="0" rIns="0" bIns="0" rtlCol="0" anchor="t">
-            <a:normAutofit/>
-          </a:bodyPr>
+          <p:cNvPr id="79" name="Text 77"/>
+          <p:cNvSpPr/>
+          <p:nvPr/>
+        </p:nvSpPr>
+        <p:spPr>
+          <a:xfrm>
+            <a:off x="1482242" y="1926641"/>
+            <a:ext cx="1901952" cy="210312"/>
+          </a:xfrm>
+          <a:prstGeom prst="rect">
+            <a:avLst/>
+          </a:prstGeom>
+          <a:noFill/>
+          <a:ln/>
+        </p:spPr>
+        <p:txBody>
+          <a:bodyPr wrap="square" lIns="0" tIns="0" rIns="0" bIns="0" rtlCol="0" anchor="t"/>
           <a:lstStyle/>
           <a:p>
             <a:pPr algn="l" indent="0" marL="0">
               <a:lnSpc>
-                <a:spcPct val="85000"/>
+                <a:spcPct val="102000"/>
               </a:lnSpc>
               <a:buNone/>
             </a:pPr>
             <a:r>
-              <a:rPr lang="en-US" sz="490" b="1" dirty="0">
+              <a:rPr lang="en-US" sz="470" b="1" dirty="0">
                 <a:solidFill>
                   <a:srgbClr val="202124"/>
                 </a:solidFill>
@@ -20927,17 +20829,17 @@
               </a:rPr>
               <a:t>Central mTLS &amp; SPIFFE Routing Hub</a:t>
             </a:r>
-            <a:endParaRPr lang="en-US" sz="490" dirty="0"/>
+            <a:endParaRPr lang="en-US" sz="470" dirty="0"/>
           </a:p>
           <a:p>
             <a:pPr algn="l" indent="0" marL="0">
               <a:lnSpc>
-                <a:spcPct val="85000"/>
+                <a:spcPct val="102000"/>
               </a:lnSpc>
               <a:buNone/>
             </a:pPr>
             <a:r>
-              <a:rPr lang="en-US" sz="420" dirty="0">
+              <a:rPr lang="en-US" sz="400" dirty="0">
                 <a:solidFill>
                   <a:srgbClr val="202124"/>
                 </a:solidFill>
@@ -20947,13 +20849,13 @@
               </a:rPr>
               <a:t>Client certificate pinning (HTTP 401 on SAN mismatch)</a:t>
             </a:r>
-            <a:endParaRPr lang="en-US" sz="490" dirty="0"/>
-          </a:p>
-        </p:txBody>
-      </p:sp>
-      <p:sp>
-        <p:nvSpPr>
-          <p:cNvPr id="82" name="Shape 80"/>
+            <a:endParaRPr lang="en-US" sz="470" dirty="0"/>
+          </a:p>
+        </p:txBody>
+      </p:sp>
+      <p:sp>
+        <p:nvSpPr>
+          <p:cNvPr id="80" name="Shape 78"/>
           <p:cNvSpPr/>
           <p:nvPr/>
         </p:nvSpPr>
@@ -20980,35 +20882,33 @@
       </p:sp>
       <p:sp>
         <p:nvSpPr>
-          <p:cNvPr id="83" name="Text 81"/>
-          <p:cNvSpPr/>
-          <p:nvPr/>
-        </p:nvSpPr>
-        <p:spPr>
-          <a:xfrm>
-            <a:off x="4655210" y="1946758"/>
-            <a:ext cx="1315822" cy="192024"/>
-          </a:xfrm>
-          <a:prstGeom prst="rect">
-            <a:avLst/>
-          </a:prstGeom>
-          <a:noFill/>
-          <a:ln/>
-        </p:spPr>
-        <p:txBody>
-          <a:bodyPr wrap="square" lIns="0" tIns="0" rIns="0" bIns="0" rtlCol="0" anchor="t">
-            <a:normAutofit/>
-          </a:bodyPr>
+          <p:cNvPr id="81" name="Text 79"/>
+          <p:cNvSpPr/>
+          <p:nvPr/>
+        </p:nvSpPr>
+        <p:spPr>
+          <a:xfrm>
+            <a:off x="4655210" y="1961388"/>
+            <a:ext cx="1315822" cy="210312"/>
+          </a:xfrm>
+          <a:prstGeom prst="rect">
+            <a:avLst/>
+          </a:prstGeom>
+          <a:noFill/>
+          <a:ln/>
+        </p:spPr>
+        <p:txBody>
+          <a:bodyPr wrap="square" lIns="0" tIns="0" rIns="0" bIns="0" rtlCol="0" anchor="t"/>
           <a:lstStyle/>
           <a:p>
             <a:pPr algn="l" indent="0" marL="0">
               <a:lnSpc>
-                <a:spcPct val="85000"/>
+                <a:spcPct val="102000"/>
               </a:lnSpc>
               <a:buNone/>
             </a:pPr>
             <a:r>
-              <a:rPr lang="en-US" sz="490" b="1" dirty="0">
+              <a:rPr lang="en-US" sz="430" b="1" dirty="0">
                 <a:solidFill>
                   <a:srgbClr val="202124"/>
                 </a:solidFill>
@@ -21018,13 +20918,13 @@
               </a:rPr>
               <a:t>Cloud KMS CMEK &amp; Sovereign Security Hub</a:t>
             </a:r>
-            <a:endParaRPr lang="en-US" sz="490" dirty="0"/>
+            <a:endParaRPr lang="en-US" sz="430" dirty="0"/>
           </a:p>
         </p:txBody>
       </p:sp>
       <p:pic>
         <p:nvPicPr>
-          <p:cNvPr id="84" name="Image 0" descr="preencoded.png">    </p:cNvPr>
+          <p:cNvPr id="82" name="Image 0" descr="preencoded.png">    </p:cNvPr>
           <p:cNvPicPr>
             <a:picLocks noChangeAspect="1"/>
           </p:cNvPicPr>
@@ -21048,7 +20948,7 @@
       </p:pic>
       <p:sp>
         <p:nvSpPr>
-          <p:cNvPr id="85" name="Shape 82"/>
+          <p:cNvPr id="83" name="Shape 80"/>
           <p:cNvSpPr/>
           <p:nvPr/>
         </p:nvSpPr>
@@ -21072,7 +20972,7 @@
       </p:sp>
       <p:sp>
         <p:nvSpPr>
-          <p:cNvPr id="86" name="Shape 83"/>
+          <p:cNvPr id="84" name="Shape 81"/>
           <p:cNvSpPr/>
           <p:nvPr/>
         </p:nvSpPr>
@@ -21096,7 +20996,7 @@
       </p:sp>
       <p:sp>
         <p:nvSpPr>
-          <p:cNvPr id="87" name="Shape 84"/>
+          <p:cNvPr id="85" name="Shape 82"/>
           <p:cNvSpPr/>
           <p:nvPr/>
         </p:nvSpPr>
@@ -21120,7 +21020,7 @@
       </p:sp>
       <p:sp>
         <p:nvSpPr>
-          <p:cNvPr id="88" name="Shape 85"/>
+          <p:cNvPr id="86" name="Shape 83"/>
           <p:cNvSpPr/>
           <p:nvPr/>
         </p:nvSpPr>
@@ -21143,7 +21043,7 @@
       </p:sp>
       <p:sp>
         <p:nvSpPr>
-          <p:cNvPr id="89" name="Shape 86"/>
+          <p:cNvPr id="87" name="Shape 84"/>
           <p:cNvSpPr/>
           <p:nvPr/>
         </p:nvSpPr>
@@ -21167,7 +21067,7 @@
       </p:sp>
       <p:sp>
         <p:nvSpPr>
-          <p:cNvPr id="90" name="Shape 87"/>
+          <p:cNvPr id="88" name="Shape 85"/>
           <p:cNvSpPr/>
           <p:nvPr/>
         </p:nvSpPr>
@@ -21191,7 +21091,7 @@
       </p:sp>
       <p:sp>
         <p:nvSpPr>
-          <p:cNvPr id="91" name="Shape 88"/>
+          <p:cNvPr id="89" name="Shape 86"/>
           <p:cNvSpPr/>
           <p:nvPr/>
         </p:nvSpPr>
@@ -21214,7 +21114,7 @@
       </p:sp>
       <p:sp>
         <p:nvSpPr>
-          <p:cNvPr id="92" name="Shape 89"/>
+          <p:cNvPr id="90" name="Shape 87"/>
           <p:cNvSpPr/>
           <p:nvPr/>
         </p:nvSpPr>
@@ -21238,7 +21138,7 @@
       </p:sp>
       <p:sp>
         <p:nvSpPr>
-          <p:cNvPr id="93" name="Shape 90"/>
+          <p:cNvPr id="91" name="Shape 88"/>
           <p:cNvSpPr/>
           <p:nvPr/>
         </p:nvSpPr>
@@ -21263,7 +21163,7 @@
       </p:sp>
       <p:sp>
         <p:nvSpPr>
-          <p:cNvPr id="94" name="Shape 91"/>
+          <p:cNvPr id="92" name="Shape 89"/>
           <p:cNvSpPr/>
           <p:nvPr/>
         </p:nvSpPr>
@@ -21287,7 +21187,7 @@
       </p:sp>
       <p:sp>
         <p:nvSpPr>
-          <p:cNvPr id="95" name="Shape 92"/>
+          <p:cNvPr id="93" name="Shape 90"/>
           <p:cNvSpPr/>
           <p:nvPr/>
         </p:nvSpPr>
@@ -21311,7 +21211,7 @@
       </p:sp>
       <p:sp>
         <p:nvSpPr>
-          <p:cNvPr id="96" name="Shape 93"/>
+          <p:cNvPr id="94" name="Shape 91"/>
           <p:cNvSpPr/>
           <p:nvPr/>
         </p:nvSpPr>
@@ -21334,7 +21234,7 @@
       </p:sp>
       <p:sp>
         <p:nvSpPr>
-          <p:cNvPr id="97" name="Shape 94"/>
+          <p:cNvPr id="95" name="Shape 92"/>
           <p:cNvSpPr/>
           <p:nvPr/>
         </p:nvSpPr>
@@ -21357,7 +21257,7 @@
       </p:sp>
       <p:sp>
         <p:nvSpPr>
-          <p:cNvPr id="98" name="Shape 95"/>
+          <p:cNvPr id="96" name="Shape 93"/>
           <p:cNvSpPr/>
           <p:nvPr/>
         </p:nvSpPr>
@@ -21381,7 +21281,7 @@
       </p:sp>
       <p:sp>
         <p:nvSpPr>
-          <p:cNvPr id="99" name="Shape 96"/>
+          <p:cNvPr id="97" name="Shape 94"/>
           <p:cNvSpPr/>
           <p:nvPr/>
         </p:nvSpPr>
@@ -21405,7 +21305,7 @@
       </p:sp>
       <p:sp>
         <p:nvSpPr>
-          <p:cNvPr id="100" name="Shape 97"/>
+          <p:cNvPr id="98" name="Shape 95"/>
           <p:cNvSpPr/>
           <p:nvPr/>
         </p:nvSpPr>
@@ -21428,7 +21328,7 @@
       </p:sp>
       <p:sp>
         <p:nvSpPr>
-          <p:cNvPr id="101" name="Shape 98"/>
+          <p:cNvPr id="99" name="Shape 96"/>
           <p:cNvSpPr/>
           <p:nvPr/>
         </p:nvSpPr>
@@ -21452,7 +21352,7 @@
       </p:sp>
       <p:sp>
         <p:nvSpPr>
-          <p:cNvPr id="102" name="Shape 99"/>
+          <p:cNvPr id="100" name="Shape 97"/>
           <p:cNvSpPr/>
           <p:nvPr/>
         </p:nvSpPr>
@@ -21476,7 +21376,7 @@
       </p:sp>
       <p:sp>
         <p:nvSpPr>
-          <p:cNvPr id="103" name="Shape 100"/>
+          <p:cNvPr id="101" name="Shape 98"/>
           <p:cNvSpPr/>
           <p:nvPr/>
         </p:nvSpPr>
@@ -21499,7 +21399,7 @@
       </p:sp>
       <p:sp>
         <p:nvSpPr>
-          <p:cNvPr id="104" name="Shape 101"/>
+          <p:cNvPr id="102" name="Shape 99"/>
           <p:cNvSpPr/>
           <p:nvPr/>
         </p:nvSpPr>
@@ -21523,7 +21423,7 @@
       </p:sp>
       <p:sp>
         <p:nvSpPr>
-          <p:cNvPr id="105" name="Shape 102"/>
+          <p:cNvPr id="103" name="Shape 100"/>
           <p:cNvSpPr/>
           <p:nvPr/>
         </p:nvSpPr>
@@ -21546,7 +21446,7 @@
       </p:sp>
       <p:sp>
         <p:nvSpPr>
-          <p:cNvPr id="106" name="Shape 103"/>
+          <p:cNvPr id="104" name="Shape 101"/>
           <p:cNvSpPr/>
           <p:nvPr/>
         </p:nvSpPr>
@@ -21569,7 +21469,7 @@
       </p:sp>
       <p:sp>
         <p:nvSpPr>
-          <p:cNvPr id="107" name="Shape 104"/>
+          <p:cNvPr id="105" name="Shape 102"/>
           <p:cNvSpPr/>
           <p:nvPr/>
         </p:nvSpPr>
@@ -21593,7 +21493,7 @@
       </p:sp>
       <p:sp>
         <p:nvSpPr>
-          <p:cNvPr id="108" name="Shape 105"/>
+          <p:cNvPr id="106" name="Shape 103"/>
           <p:cNvSpPr/>
           <p:nvPr/>
         </p:nvSpPr>
@@ -21617,7 +21517,7 @@
       </p:sp>
       <p:sp>
         <p:nvSpPr>
-          <p:cNvPr id="109" name="Shape 106"/>
+          <p:cNvPr id="107" name="Shape 104"/>
           <p:cNvSpPr/>
           <p:nvPr/>
         </p:nvSpPr>
@@ -21640,7 +21540,7 @@
       </p:sp>
       <p:sp>
         <p:nvSpPr>
-          <p:cNvPr id="110" name="Shape 107"/>
+          <p:cNvPr id="108" name="Shape 105"/>
           <p:cNvSpPr/>
           <p:nvPr/>
         </p:nvSpPr>
@@ -21664,7 +21564,7 @@
       </p:sp>
       <p:sp>
         <p:nvSpPr>
-          <p:cNvPr id="111" name="Shape 108"/>
+          <p:cNvPr id="109" name="Shape 106"/>
           <p:cNvSpPr/>
           <p:nvPr/>
         </p:nvSpPr>
@@ -21688,7 +21588,7 @@
       </p:sp>
       <p:sp>
         <p:nvSpPr>
-          <p:cNvPr id="112" name="Shape 109"/>
+          <p:cNvPr id="110" name="Shape 107"/>
           <p:cNvSpPr/>
           <p:nvPr/>
         </p:nvSpPr>
@@ -21711,7 +21611,7 @@
       </p:sp>
       <p:sp>
         <p:nvSpPr>
-          <p:cNvPr id="113" name="Shape 110"/>
+          <p:cNvPr id="111" name="Shape 108"/>
           <p:cNvSpPr/>
           <p:nvPr/>
         </p:nvSpPr>
@@ -21735,7 +21635,7 @@
       </p:sp>
       <p:sp>
         <p:nvSpPr>
-          <p:cNvPr id="114" name="Shape 111"/>
+          <p:cNvPr id="112" name="Shape 109"/>
           <p:cNvSpPr/>
           <p:nvPr/>
         </p:nvSpPr>
@@ -21759,7 +21659,7 @@
       </p:sp>
       <p:sp>
         <p:nvSpPr>
-          <p:cNvPr id="115" name="Shape 112"/>
+          <p:cNvPr id="113" name="Shape 110"/>
           <p:cNvSpPr/>
           <p:nvPr/>
         </p:nvSpPr>
@@ -21783,7 +21683,7 @@
       </p:sp>
       <p:sp>
         <p:nvSpPr>
-          <p:cNvPr id="116" name="Shape 113"/>
+          <p:cNvPr id="114" name="Shape 111"/>
           <p:cNvSpPr/>
           <p:nvPr/>
         </p:nvSpPr>
@@ -21807,7 +21707,7 @@
       </p:sp>
       <p:sp>
         <p:nvSpPr>
-          <p:cNvPr id="117" name="Shape 114"/>
+          <p:cNvPr id="115" name="Shape 112"/>
           <p:cNvSpPr/>
           <p:nvPr/>
         </p:nvSpPr>
@@ -21831,7 +21731,7 @@
       </p:sp>
       <p:sp>
         <p:nvSpPr>
-          <p:cNvPr id="118" name="Shape 115"/>
+          <p:cNvPr id="116" name="Shape 113"/>
           <p:cNvSpPr/>
           <p:nvPr/>
         </p:nvSpPr>
@@ -21855,7 +21755,7 @@
       </p:sp>
       <p:sp>
         <p:nvSpPr>
-          <p:cNvPr id="119" name="Shape 116"/>
+          <p:cNvPr id="117" name="Shape 114"/>
           <p:cNvSpPr/>
           <p:nvPr/>
         </p:nvSpPr>
@@ -21878,7 +21778,7 @@
       </p:sp>
       <p:sp>
         <p:nvSpPr>
-          <p:cNvPr id="120" name="Shape 117"/>
+          <p:cNvPr id="118" name="Shape 115"/>
           <p:cNvSpPr/>
           <p:nvPr/>
         </p:nvSpPr>
@@ -21902,7 +21802,7 @@
       </p:sp>
       <p:sp>
         <p:nvSpPr>
-          <p:cNvPr id="121" name="Shape 118"/>
+          <p:cNvPr id="119" name="Shape 116"/>
           <p:cNvSpPr/>
           <p:nvPr/>
         </p:nvSpPr>
@@ -21926,7 +21826,7 @@
       </p:sp>
       <p:sp>
         <p:nvSpPr>
-          <p:cNvPr id="122" name="Shape 119"/>
+          <p:cNvPr id="120" name="Shape 117"/>
           <p:cNvSpPr/>
           <p:nvPr/>
         </p:nvSpPr>
@@ -21949,7 +21849,7 @@
       </p:sp>
       <p:sp>
         <p:nvSpPr>
-          <p:cNvPr id="123" name="Shape 120"/>
+          <p:cNvPr id="121" name="Shape 118"/>
           <p:cNvSpPr/>
           <p:nvPr/>
         </p:nvSpPr>
@@ -21973,7 +21873,7 @@
       </p:sp>
       <p:sp>
         <p:nvSpPr>
-          <p:cNvPr id="124" name="Shape 121"/>
+          <p:cNvPr id="122" name="Shape 119"/>
           <p:cNvSpPr/>
           <p:nvPr/>
         </p:nvSpPr>
@@ -21997,7 +21897,7 @@
       </p:sp>
       <p:sp>
         <p:nvSpPr>
-          <p:cNvPr id="125" name="Shape 122"/>
+          <p:cNvPr id="123" name="Shape 120"/>
           <p:cNvSpPr/>
           <p:nvPr/>
         </p:nvSpPr>
@@ -22021,7 +21921,7 @@
       </p:sp>
       <p:sp>
         <p:nvSpPr>
-          <p:cNvPr id="126" name="Shape 123"/>
+          <p:cNvPr id="124" name="Shape 121"/>
           <p:cNvSpPr/>
           <p:nvPr/>
         </p:nvSpPr>
@@ -22045,7 +21945,7 @@
       </p:sp>
       <p:sp>
         <p:nvSpPr>
-          <p:cNvPr id="127" name="Shape 124"/>
+          <p:cNvPr id="125" name="Shape 122"/>
           <p:cNvSpPr/>
           <p:nvPr/>
         </p:nvSpPr>
@@ -22069,7 +21969,131 @@
       </p:sp>
       <p:sp>
         <p:nvSpPr>
+          <p:cNvPr id="126" name="Shape 123"/>
+          <p:cNvSpPr/>
+          <p:nvPr/>
+        </p:nvSpPr>
+        <p:spPr>
+          <a:xfrm>
+            <a:off x="1473098" y="3802075"/>
+            <a:ext cx="944575" cy="113386"/>
+          </a:xfrm>
+          <a:prstGeom prst="rect">
+            <a:avLst/>
+          </a:prstGeom>
+          <a:solidFill>
+            <a:srgbClr val="FFFFFF"/>
+          </a:solidFill>
+          <a:ln/>
+        </p:spPr>
+      </p:sp>
+      <p:sp>
+        <p:nvSpPr>
+          <p:cNvPr id="127" name="Text 124"/>
+          <p:cNvSpPr/>
+          <p:nvPr/>
+        </p:nvSpPr>
+        <p:spPr>
+          <a:xfrm>
+            <a:off x="1491386" y="3803904"/>
+            <a:ext cx="2133295" cy="111557"/>
+          </a:xfrm>
+          <a:prstGeom prst="rect">
+            <a:avLst/>
+          </a:prstGeom>
+          <a:noFill/>
+          <a:ln/>
+        </p:spPr>
+        <p:txBody>
+          <a:bodyPr wrap="none" lIns="0" tIns="0" rIns="0" bIns="0" rtlCol="0" anchor="ctr"/>
+          <a:lstStyle/>
+          <a:p>
+            <a:pPr algn="l" indent="0" marL="0">
+              <a:lnSpc>
+                <a:spcPct val="100000"/>
+              </a:lnSpc>
+              <a:buNone/>
+            </a:pPr>
+            <a:r>
+              <a:rPr lang="en-US" sz="430" b="1" dirty="0">
+                <a:solidFill>
+                  <a:srgbClr val="202124"/>
+                </a:solidFill>
+                <a:latin typeface="Arial" pitchFamily="34" charset="0"/>
+                <a:ea typeface="Arial" pitchFamily="34" charset="-122"/>
+                <a:cs typeface="Arial" pitchFamily="34" charset="-120"/>
+              </a:rPr>
+              <a:t>PAB + VPC-SC Perimeter Alpha</a:t>
+            </a:r>
+            <a:endParaRPr lang="en-US" sz="430" dirty="0"/>
+          </a:p>
+        </p:txBody>
+      </p:sp>
+      <p:sp>
+        <p:nvSpPr>
           <p:cNvPr id="128" name="Shape 125"/>
+          <p:cNvSpPr/>
+          <p:nvPr/>
+        </p:nvSpPr>
+        <p:spPr>
+          <a:xfrm>
+            <a:off x="3837737" y="3802075"/>
+            <a:ext cx="913486" cy="113386"/>
+          </a:xfrm>
+          <a:prstGeom prst="rect">
+            <a:avLst/>
+          </a:prstGeom>
+          <a:solidFill>
+            <a:srgbClr val="FFFFFF"/>
+          </a:solidFill>
+          <a:ln/>
+        </p:spPr>
+      </p:sp>
+      <p:sp>
+        <p:nvSpPr>
+          <p:cNvPr id="129" name="Text 126"/>
+          <p:cNvSpPr/>
+          <p:nvPr/>
+        </p:nvSpPr>
+        <p:spPr>
+          <a:xfrm>
+            <a:off x="3856025" y="3803904"/>
+            <a:ext cx="2133295" cy="111557"/>
+          </a:xfrm>
+          <a:prstGeom prst="rect">
+            <a:avLst/>
+          </a:prstGeom>
+          <a:noFill/>
+          <a:ln/>
+        </p:spPr>
+        <p:txBody>
+          <a:bodyPr wrap="none" lIns="0" tIns="0" rIns="0" bIns="0" rtlCol="0" anchor="ctr"/>
+          <a:lstStyle/>
+          <a:p>
+            <a:pPr algn="l" indent="0" marL="0">
+              <a:lnSpc>
+                <a:spcPct val="100000"/>
+              </a:lnSpc>
+              <a:buNone/>
+            </a:pPr>
+            <a:r>
+              <a:rPr lang="en-US" sz="430" b="1" dirty="0">
+                <a:solidFill>
+                  <a:srgbClr val="202124"/>
+                </a:solidFill>
+                <a:latin typeface="Arial" pitchFamily="34" charset="0"/>
+                <a:ea typeface="Arial" pitchFamily="34" charset="-122"/>
+                <a:cs typeface="Arial" pitchFamily="34" charset="-120"/>
+              </a:rPr>
+              <a:t>PAB + VPC-SC Perimeter Beta</a:t>
+            </a:r>
+            <a:endParaRPr lang="en-US" sz="430" dirty="0"/>
+          </a:p>
+        </p:txBody>
+      </p:sp>
+      <p:sp>
+        <p:nvSpPr>
+          <p:cNvPr id="130" name="Shape 127"/>
           <p:cNvSpPr/>
           <p:nvPr/>
         </p:nvSpPr>
@@ -22096,7 +22120,7 @@
       </p:sp>
       <p:pic>
         <p:nvPicPr>
-          <p:cNvPr id="129" name="Image 1" descr="preencoded.png">    </p:cNvPr>
+          <p:cNvPr id="131" name="Image 1" descr="preencoded.png">    </p:cNvPr>
           <p:cNvPicPr>
             <a:picLocks noChangeAspect="1"/>
           </p:cNvPicPr>
@@ -22120,35 +22144,33 @@
       </p:pic>
       <p:sp>
         <p:nvSpPr>
-          <p:cNvPr id="130" name="Text 126"/>
+          <p:cNvPr id="132" name="Text 128"/>
           <p:cNvSpPr/>
           <p:nvPr/>
         </p:nvSpPr>
         <p:spPr>
           <a:xfrm>
             <a:off x="3372307" y="658368"/>
-            <a:ext cx="839419" cy="373990"/>
-          </a:xfrm>
-          <a:prstGeom prst="rect">
-            <a:avLst/>
-          </a:prstGeom>
-          <a:noFill/>
-          <a:ln/>
-        </p:spPr>
-        <p:txBody>
-          <a:bodyPr wrap="square" lIns="0" tIns="0" rIns="0" bIns="0" rtlCol="0" anchor="ctr">
-            <a:normAutofit/>
-          </a:bodyPr>
+            <a:ext cx="834847" cy="373990"/>
+          </a:xfrm>
+          <a:prstGeom prst="rect">
+            <a:avLst/>
+          </a:prstGeom>
+          <a:noFill/>
+          <a:ln/>
+        </p:spPr>
+        <p:txBody>
+          <a:bodyPr wrap="square" lIns="0" tIns="0" rIns="0" bIns="0" rtlCol="0" anchor="ctr"/>
           <a:lstStyle/>
           <a:p>
             <a:pPr algn="l" indent="0" marL="0">
               <a:lnSpc>
-                <a:spcPct val="88000"/>
+                <a:spcPct val="104000"/>
               </a:lnSpc>
               <a:buNone/>
             </a:pPr>
             <a:r>
-              <a:rPr lang="en-US" sz="520" b="1" dirty="0">
+              <a:rPr lang="en-US" sz="480" b="1" dirty="0">
                 <a:solidFill>
                   <a:srgbClr val="202124"/>
                 </a:solidFill>
@@ -22158,17 +22180,17 @@
               </a:rPr>
               <a:t>mTLS SPIFFE Clients</a:t>
             </a:r>
-            <a:endParaRPr lang="en-US" sz="520" dirty="0"/>
+            <a:endParaRPr lang="en-US" sz="480" dirty="0"/>
           </a:p>
           <a:p>
             <a:pPr algn="l" indent="0" marL="0">
               <a:lnSpc>
-                <a:spcPct val="88000"/>
+                <a:spcPct val="104000"/>
               </a:lnSpc>
               <a:buNone/>
             </a:pPr>
             <a:r>
-              <a:rPr lang="en-US" sz="440" dirty="0">
+              <a:rPr lang="en-US" sz="410" dirty="0">
                 <a:solidFill>
                   <a:srgbClr val="3C4043"/>
                 </a:solidFill>
@@ -22178,13 +22200,13 @@
               </a:rPr>
               <a:t>FinVault &amp; RetailStream</a:t>
             </a:r>
-            <a:endParaRPr lang="en-US" sz="520" dirty="0"/>
-          </a:p>
-        </p:txBody>
-      </p:sp>
-      <p:sp>
-        <p:nvSpPr>
-          <p:cNvPr id="131" name="Shape 127"/>
+            <a:endParaRPr lang="en-US" sz="480" dirty="0"/>
+          </a:p>
+        </p:txBody>
+      </p:sp>
+      <p:sp>
+        <p:nvSpPr>
+          <p:cNvPr id="133" name="Shape 129"/>
           <p:cNvSpPr/>
           <p:nvPr/>
         </p:nvSpPr>
@@ -22211,7 +22233,7 @@
       </p:sp>
       <p:pic>
         <p:nvPicPr>
-          <p:cNvPr id="132" name="Image 2" descr="preencoded.png">    </p:cNvPr>
+          <p:cNvPr id="134" name="Image 2" descr="preencoded.png">    </p:cNvPr>
           <p:cNvPicPr>
             <a:picLocks noChangeAspect="1"/>
           </p:cNvPicPr>
@@ -22235,35 +22257,33 @@
       </p:pic>
       <p:sp>
         <p:nvSpPr>
-          <p:cNvPr id="133" name="Text 128"/>
+          <p:cNvPr id="135" name="Text 130"/>
           <p:cNvSpPr/>
           <p:nvPr/>
         </p:nvSpPr>
         <p:spPr>
           <a:xfrm>
             <a:off x="3332988" y="2309774"/>
-            <a:ext cx="879653" cy="330098"/>
-          </a:xfrm>
-          <a:prstGeom prst="rect">
-            <a:avLst/>
-          </a:prstGeom>
-          <a:noFill/>
-          <a:ln/>
-        </p:spPr>
-        <p:txBody>
-          <a:bodyPr wrap="square" lIns="0" tIns="0" rIns="0" bIns="0" rtlCol="0" anchor="ctr">
-            <a:normAutofit/>
-          </a:bodyPr>
+            <a:ext cx="875081" cy="330098"/>
+          </a:xfrm>
+          <a:prstGeom prst="rect">
+            <a:avLst/>
+          </a:prstGeom>
+          <a:noFill/>
+          <a:ln/>
+        </p:spPr>
+        <p:txBody>
+          <a:bodyPr wrap="square" lIns="0" tIns="0" rIns="0" bIns="0" rtlCol="0" anchor="ctr"/>
           <a:lstStyle/>
           <a:p>
             <a:pPr algn="l" indent="0" marL="0">
               <a:lnSpc>
-                <a:spcPct val="85000"/>
+                <a:spcPct val="100000"/>
               </a:lnSpc>
               <a:buNone/>
             </a:pPr>
             <a:r>
-              <a:rPr lang="en-US" sz="500" b="1" dirty="0">
+              <a:rPr lang="en-US" sz="490" b="1" dirty="0">
                 <a:solidFill>
                   <a:srgbClr val="202124"/>
                 </a:solidFill>
@@ -22273,17 +22293,17 @@
               </a:rPr>
               <a:t>External Application Load Balancer</a:t>
             </a:r>
-            <a:endParaRPr lang="en-US" sz="500" dirty="0"/>
+            <a:endParaRPr lang="en-US" sz="490" dirty="0"/>
           </a:p>
           <a:p>
             <a:pPr algn="l" indent="0" marL="0">
               <a:lnSpc>
-                <a:spcPct val="85000"/>
+                <a:spcPct val="100000"/>
               </a:lnSpc>
               <a:buNone/>
             </a:pPr>
             <a:r>
-              <a:rPr lang="en-US" sz="430" dirty="0">
+              <a:rPr lang="en-US" sz="420" dirty="0">
                 <a:solidFill>
                   <a:srgbClr val="3C4043"/>
                 </a:solidFill>
@@ -22293,13 +22313,13 @@
               </a:rPr>
               <a:t>SNI Silo Routing</a:t>
             </a:r>
-            <a:endParaRPr lang="en-US" sz="500" dirty="0"/>
-          </a:p>
-        </p:txBody>
-      </p:sp>
-      <p:sp>
-        <p:nvSpPr>
-          <p:cNvPr id="134" name="Shape 129"/>
+            <a:endParaRPr lang="en-US" sz="490" dirty="0"/>
+          </a:p>
+        </p:txBody>
+      </p:sp>
+      <p:sp>
+        <p:nvSpPr>
+          <p:cNvPr id="136" name="Shape 131"/>
           <p:cNvSpPr/>
           <p:nvPr/>
         </p:nvSpPr>
@@ -22326,7 +22346,7 @@
       </p:sp>
       <p:pic>
         <p:nvPicPr>
-          <p:cNvPr id="135" name="Image 3" descr="preencoded.png">    </p:cNvPr>
+          <p:cNvPr id="137" name="Image 3" descr="preencoded.png">    </p:cNvPr>
           <p:cNvPicPr>
             <a:picLocks noChangeAspect="1"/>
           </p:cNvPicPr>
@@ -22350,35 +22370,33 @@
       </p:pic>
       <p:sp>
         <p:nvSpPr>
-          <p:cNvPr id="136" name="Text 130"/>
+          <p:cNvPr id="138" name="Text 132"/>
           <p:cNvSpPr/>
           <p:nvPr/>
         </p:nvSpPr>
         <p:spPr>
           <a:xfrm>
             <a:off x="4940503" y="2197303"/>
-            <a:ext cx="950062" cy="312725"/>
-          </a:xfrm>
-          <a:prstGeom prst="rect">
-            <a:avLst/>
-          </a:prstGeom>
-          <a:noFill/>
-          <a:ln/>
-        </p:spPr>
-        <p:txBody>
-          <a:bodyPr wrap="square" lIns="0" tIns="0" rIns="0" bIns="0" rtlCol="0" anchor="ctr">
-            <a:normAutofit/>
-          </a:bodyPr>
+            <a:ext cx="945490" cy="312725"/>
+          </a:xfrm>
+          <a:prstGeom prst="rect">
+            <a:avLst/>
+          </a:prstGeom>
+          <a:noFill/>
+          <a:ln/>
+        </p:spPr>
+        <p:txBody>
+          <a:bodyPr wrap="square" lIns="0" tIns="0" rIns="0" bIns="0" rtlCol="0" anchor="ctr"/>
           <a:lstStyle/>
           <a:p>
             <a:pPr algn="l" indent="0" marL="0">
               <a:lnSpc>
-                <a:spcPct val="85000"/>
+                <a:spcPct val="100000"/>
               </a:lnSpc>
               <a:buNone/>
             </a:pPr>
             <a:r>
-              <a:rPr lang="en-US" sz="500" b="1" dirty="0">
+              <a:rPr lang="en-US" sz="490" b="1" dirty="0">
                 <a:solidFill>
                   <a:srgbClr val="202124"/>
                 </a:solidFill>
@@ -22388,17 +22406,17 @@
               </a:rPr>
               <a:t>Security Command Center</a:t>
             </a:r>
-            <a:endParaRPr lang="en-US" sz="500" dirty="0"/>
+            <a:endParaRPr lang="en-US" sz="490" dirty="0"/>
           </a:p>
           <a:p>
             <a:pPr algn="l" indent="0" marL="0">
               <a:lnSpc>
-                <a:spcPct val="85000"/>
+                <a:spcPct val="100000"/>
               </a:lnSpc>
               <a:buNone/>
             </a:pPr>
             <a:r>
-              <a:rPr lang="en-US" sz="430" dirty="0">
+              <a:rPr lang="en-US" sz="420" dirty="0">
                 <a:solidFill>
                   <a:srgbClr val="3C4043"/>
                 </a:solidFill>
@@ -22408,13 +22426,13 @@
               </a:rPr>
               <a:t>VPC-SC &amp; PAB Violation Feed</a:t>
             </a:r>
-            <a:endParaRPr lang="en-US" sz="500" dirty="0"/>
-          </a:p>
-        </p:txBody>
-      </p:sp>
-      <p:sp>
-        <p:nvSpPr>
-          <p:cNvPr id="137" name="Shape 131"/>
+            <a:endParaRPr lang="en-US" sz="490" dirty="0"/>
+          </a:p>
+        </p:txBody>
+      </p:sp>
+      <p:sp>
+        <p:nvSpPr>
+          <p:cNvPr id="139" name="Shape 133"/>
           <p:cNvSpPr/>
           <p:nvPr/>
         </p:nvSpPr>
@@ -22441,7 +22459,7 @@
       </p:sp>
       <p:pic>
         <p:nvPicPr>
-          <p:cNvPr id="138" name="Image 4" descr="preencoded.png">    </p:cNvPr>
+          <p:cNvPr id="140" name="Image 4" descr="preencoded.png">    </p:cNvPr>
           <p:cNvPicPr>
             <a:picLocks noChangeAspect="1"/>
           </p:cNvPicPr>
@@ -22465,35 +22483,33 @@
       </p:pic>
       <p:sp>
         <p:nvSpPr>
-          <p:cNvPr id="139" name="Text 132"/>
+          <p:cNvPr id="141" name="Text 134"/>
           <p:cNvSpPr/>
           <p:nvPr/>
         </p:nvSpPr>
         <p:spPr>
           <a:xfrm>
             <a:off x="4948733" y="2926994"/>
-            <a:ext cx="924458" cy="295351"/>
-          </a:xfrm>
-          <a:prstGeom prst="rect">
-            <a:avLst/>
-          </a:prstGeom>
-          <a:noFill/>
-          <a:ln/>
-        </p:spPr>
-        <p:txBody>
-          <a:bodyPr wrap="square" lIns="0" tIns="0" rIns="0" bIns="0" rtlCol="0" anchor="ctr">
-            <a:normAutofit/>
-          </a:bodyPr>
+            <a:ext cx="919886" cy="295351"/>
+          </a:xfrm>
+          <a:prstGeom prst="rect">
+            <a:avLst/>
+          </a:prstGeom>
+          <a:noFill/>
+          <a:ln/>
+        </p:spPr>
+        <p:txBody>
+          <a:bodyPr wrap="square" lIns="0" tIns="0" rIns="0" bIns="0" rtlCol="0" anchor="ctr"/>
           <a:lstStyle/>
           <a:p>
             <a:pPr algn="l" indent="0" marL="0">
               <a:lnSpc>
-                <a:spcPct val="85000"/>
+                <a:spcPct val="100000"/>
               </a:lnSpc>
               <a:buNone/>
             </a:pPr>
             <a:r>
-              <a:rPr lang="en-US" sz="500" b="1" dirty="0">
+              <a:rPr lang="en-US" sz="490" b="1" dirty="0">
                 <a:solidFill>
                   <a:srgbClr val="202124"/>
                 </a:solidFill>
@@ -22503,17 +22519,17 @@
               </a:rPr>
               <a:t>Cloud Logging &amp; BQ</a:t>
             </a:r>
-            <a:endParaRPr lang="en-US" sz="500" dirty="0"/>
+            <a:endParaRPr lang="en-US" sz="490" dirty="0"/>
           </a:p>
           <a:p>
             <a:pPr algn="l" indent="0" marL="0">
               <a:lnSpc>
-                <a:spcPct val="85000"/>
+                <a:spcPct val="100000"/>
               </a:lnSpc>
               <a:buNone/>
             </a:pPr>
             <a:r>
-              <a:rPr lang="en-US" sz="430" dirty="0">
+              <a:rPr lang="en-US" sz="420" dirty="0">
                 <a:solidFill>
                   <a:srgbClr val="3C4043"/>
                 </a:solidFill>
@@ -22523,13 +22539,13 @@
               </a:rPr>
               <a:t>Per-silo audit sink (CMEK state, VPC-SC denials)</a:t>
             </a:r>
-            <a:endParaRPr lang="en-US" sz="500" dirty="0"/>
-          </a:p>
-        </p:txBody>
-      </p:sp>
-      <p:sp>
-        <p:nvSpPr>
-          <p:cNvPr id="140" name="Shape 133"/>
+            <a:endParaRPr lang="en-US" sz="490" dirty="0"/>
+          </a:p>
+        </p:txBody>
+      </p:sp>
+      <p:sp>
+        <p:nvSpPr>
+          <p:cNvPr id="142" name="Shape 135"/>
           <p:cNvSpPr/>
           <p:nvPr/>
         </p:nvSpPr>
@@ -22556,7 +22572,7 @@
       </p:sp>
       <p:pic>
         <p:nvPicPr>
-          <p:cNvPr id="141" name="Image 5" descr="preencoded.png">    </p:cNvPr>
+          <p:cNvPr id="143" name="Image 5" descr="preencoded.png">    </p:cNvPr>
           <p:cNvPicPr>
             <a:picLocks noChangeAspect="1"/>
           </p:cNvPicPr>
@@ -22580,35 +22596,33 @@
       </p:pic>
       <p:sp>
         <p:nvSpPr>
-          <p:cNvPr id="142" name="Text 134"/>
+          <p:cNvPr id="144" name="Text 136"/>
           <p:cNvSpPr/>
           <p:nvPr/>
         </p:nvSpPr>
         <p:spPr>
           <a:xfrm>
             <a:off x="4956962" y="2570378"/>
-            <a:ext cx="907085" cy="295351"/>
-          </a:xfrm>
-          <a:prstGeom prst="rect">
-            <a:avLst/>
-          </a:prstGeom>
-          <a:noFill/>
-          <a:ln/>
-        </p:spPr>
-        <p:txBody>
-          <a:bodyPr wrap="square" lIns="0" tIns="0" rIns="0" bIns="0" rtlCol="0" anchor="ctr">
-            <a:normAutofit/>
-          </a:bodyPr>
+            <a:ext cx="902513" cy="295351"/>
+          </a:xfrm>
+          <a:prstGeom prst="rect">
+            <a:avLst/>
+          </a:prstGeom>
+          <a:noFill/>
+          <a:ln/>
+        </p:spPr>
+        <p:txBody>
+          <a:bodyPr wrap="square" lIns="0" tIns="0" rIns="0" bIns="0" rtlCol="0" anchor="ctr"/>
           <a:lstStyle/>
           <a:p>
             <a:pPr algn="l" indent="0" marL="0">
               <a:lnSpc>
-                <a:spcPct val="85000"/>
+                <a:spcPct val="100000"/>
               </a:lnSpc>
               <a:buNone/>
             </a:pPr>
             <a:r>
-              <a:rPr lang="en-US" sz="500" b="1" dirty="0">
+              <a:rPr lang="en-US" sz="490" b="1" dirty="0">
                 <a:solidFill>
                   <a:srgbClr val="202124"/>
                 </a:solidFill>
@@ -22618,17 +22632,17 @@
               </a:rPr>
               <a:t>Cloud KMS KeyRing</a:t>
             </a:r>
-            <a:endParaRPr lang="en-US" sz="500" dirty="0"/>
+            <a:endParaRPr lang="en-US" sz="490" dirty="0"/>
           </a:p>
           <a:p>
             <a:pPr algn="l" indent="0" marL="0">
               <a:lnSpc>
-                <a:spcPct val="85000"/>
+                <a:spcPct val="100000"/>
               </a:lnSpc>
               <a:buNone/>
             </a:pPr>
             <a:r>
-              <a:rPr lang="en-US" sz="430" dirty="0">
+              <a:rPr lang="en-US" sz="420" dirty="0">
                 <a:solidFill>
                   <a:srgbClr val="3C4043"/>
                 </a:solidFill>
@@ -22638,13 +22652,13 @@
               </a:rPr>
               <a:t>cymbal-multi-tenant-kr (423 Lock)</a:t>
             </a:r>
-            <a:endParaRPr lang="en-US" sz="500" dirty="0"/>
-          </a:p>
-        </p:txBody>
-      </p:sp>
-      <p:sp>
-        <p:nvSpPr>
-          <p:cNvPr id="143" name="Shape 135"/>
+            <a:endParaRPr lang="en-US" sz="490" dirty="0"/>
+          </a:p>
+        </p:txBody>
+      </p:sp>
+      <p:sp>
+        <p:nvSpPr>
+          <p:cNvPr id="145" name="Shape 137"/>
           <p:cNvSpPr/>
           <p:nvPr/>
         </p:nvSpPr>
@@ -22671,7 +22685,7 @@
       </p:sp>
       <p:pic>
         <p:nvPicPr>
-          <p:cNvPr id="144" name="Image 6" descr="preencoded.png">    </p:cNvPr>
+          <p:cNvPr id="146" name="Image 6" descr="preencoded.png">    </p:cNvPr>
           <p:cNvPicPr>
             <a:picLocks noChangeAspect="1"/>
           </p:cNvPicPr>
@@ -22695,35 +22709,33 @@
       </p:pic>
       <p:sp>
         <p:nvSpPr>
-          <p:cNvPr id="145" name="Text 136"/>
+          <p:cNvPr id="147" name="Text 138"/>
           <p:cNvSpPr/>
           <p:nvPr/>
         </p:nvSpPr>
         <p:spPr>
           <a:xfrm>
             <a:off x="2850185" y="4448556"/>
-            <a:ext cx="675742" cy="321869"/>
-          </a:xfrm>
-          <a:prstGeom prst="rect">
-            <a:avLst/>
-          </a:prstGeom>
-          <a:noFill/>
-          <a:ln/>
-        </p:spPr>
-        <p:txBody>
-          <a:bodyPr wrap="square" lIns="0" tIns="0" rIns="0" bIns="0" rtlCol="0" anchor="ctr">
-            <a:normAutofit/>
-          </a:bodyPr>
+            <a:ext cx="671170" cy="321869"/>
+          </a:xfrm>
+          <a:prstGeom prst="rect">
+            <a:avLst/>
+          </a:prstGeom>
+          <a:noFill/>
+          <a:ln/>
+        </p:spPr>
+        <p:txBody>
+          <a:bodyPr wrap="square" lIns="0" tIns="0" rIns="0" bIns="0" rtlCol="0" anchor="ctr"/>
           <a:lstStyle/>
           <a:p>
             <a:pPr algn="l" indent="0" marL="0">
               <a:lnSpc>
-                <a:spcPct val="85000"/>
+                <a:spcPct val="100000"/>
               </a:lnSpc>
               <a:buNone/>
             </a:pPr>
             <a:r>
-              <a:rPr lang="en-US" sz="500" b="1" dirty="0">
+              <a:rPr lang="en-US" sz="490" b="1" dirty="0">
                 <a:solidFill>
                   <a:srgbClr val="202124"/>
                 </a:solidFill>
@@ -22733,17 +22745,17 @@
               </a:rPr>
               <a:t>Vertex AI Agent Engine</a:t>
             </a:r>
-            <a:endParaRPr lang="en-US" sz="500" dirty="0"/>
+            <a:endParaRPr lang="en-US" sz="490" dirty="0"/>
           </a:p>
           <a:p>
             <a:pPr algn="l" indent="0" marL="0">
               <a:lnSpc>
-                <a:spcPct val="85000"/>
+                <a:spcPct val="100000"/>
               </a:lnSpc>
               <a:buNone/>
             </a:pPr>
             <a:r>
-              <a:rPr lang="en-US" sz="430" dirty="0">
+              <a:rPr lang="en-US" sz="420" dirty="0">
                 <a:solidFill>
                   <a:srgbClr val="3C4043"/>
                 </a:solidFill>
@@ -22753,13 +22765,13 @@
               </a:rPr>
               <a:t>Dedicated Silo + Agent Alpha</a:t>
             </a:r>
-            <a:endParaRPr lang="en-US" sz="500" dirty="0"/>
-          </a:p>
-        </p:txBody>
-      </p:sp>
-      <p:sp>
-        <p:nvSpPr>
-          <p:cNvPr id="146" name="Shape 137"/>
+            <a:endParaRPr lang="en-US" sz="490" dirty="0"/>
+          </a:p>
+        </p:txBody>
+      </p:sp>
+      <p:sp>
+        <p:nvSpPr>
+          <p:cNvPr id="148" name="Shape 139"/>
           <p:cNvSpPr/>
           <p:nvPr/>
         </p:nvSpPr>
@@ -22786,7 +22798,7 @@
       </p:sp>
       <p:pic>
         <p:nvPicPr>
-          <p:cNvPr id="147" name="Image 7" descr="preencoded.png">    </p:cNvPr>
+          <p:cNvPr id="149" name="Image 7" descr="preencoded.png">    </p:cNvPr>
           <p:cNvPicPr>
             <a:picLocks noChangeAspect="1"/>
           </p:cNvPicPr>
@@ -22810,35 +22822,33 @@
       </p:pic>
       <p:sp>
         <p:nvSpPr>
-          <p:cNvPr id="148" name="Text 138"/>
+          <p:cNvPr id="150" name="Text 140"/>
           <p:cNvSpPr/>
           <p:nvPr/>
         </p:nvSpPr>
         <p:spPr>
           <a:xfrm>
             <a:off x="2850185" y="5074006"/>
-            <a:ext cx="675742" cy="321869"/>
-          </a:xfrm>
-          <a:prstGeom prst="rect">
-            <a:avLst/>
-          </a:prstGeom>
-          <a:noFill/>
-          <a:ln/>
-        </p:spPr>
-        <p:txBody>
-          <a:bodyPr wrap="square" lIns="0" tIns="0" rIns="0" bIns="0" rtlCol="0" anchor="ctr">
-            <a:normAutofit/>
-          </a:bodyPr>
+            <a:ext cx="671170" cy="321869"/>
+          </a:xfrm>
+          <a:prstGeom prst="rect">
+            <a:avLst/>
+          </a:prstGeom>
+          <a:noFill/>
+          <a:ln/>
+        </p:spPr>
+        <p:txBody>
+          <a:bodyPr wrap="square" lIns="0" tIns="0" rIns="0" bIns="0" rtlCol="0" anchor="ctr"/>
           <a:lstStyle/>
           <a:p>
             <a:pPr algn="l" indent="0" marL="0">
               <a:lnSpc>
-                <a:spcPct val="85000"/>
+                <a:spcPct val="100000"/>
               </a:lnSpc>
               <a:buNone/>
             </a:pPr>
             <a:r>
-              <a:rPr lang="en-US" sz="500" b="1" dirty="0">
+              <a:rPr lang="en-US" sz="490" b="1" dirty="0">
                 <a:solidFill>
                   <a:srgbClr val="202124"/>
                 </a:solidFill>
@@ -22848,17 +22858,17 @@
               </a:rPr>
               <a:t>Local Silo MCP</a:t>
             </a:r>
-            <a:endParaRPr lang="en-US" sz="500" dirty="0"/>
+            <a:endParaRPr lang="en-US" sz="490" dirty="0"/>
           </a:p>
           <a:p>
             <a:pPr algn="l" indent="0" marL="0">
               <a:lnSpc>
-                <a:spcPct val="85000"/>
+                <a:spcPct val="100000"/>
               </a:lnSpc>
               <a:buNone/>
             </a:pPr>
             <a:r>
-              <a:rPr lang="en-US" sz="430" dirty="0">
+              <a:rPr lang="en-US" sz="420" dirty="0">
                 <a:solidFill>
                   <a:srgbClr val="3C4043"/>
                 </a:solidFill>
@@ -22868,13 +22878,13 @@
               </a:rPr>
               <a:t>Workspace &amp; Jira (0 Egress)</a:t>
             </a:r>
-            <a:endParaRPr lang="en-US" sz="500" dirty="0"/>
-          </a:p>
-        </p:txBody>
-      </p:sp>
-      <p:sp>
-        <p:nvSpPr>
-          <p:cNvPr id="149" name="Shape 139"/>
+            <a:endParaRPr lang="en-US" sz="490" dirty="0"/>
+          </a:p>
+        </p:txBody>
+      </p:sp>
+      <p:sp>
+        <p:nvSpPr>
+          <p:cNvPr id="151" name="Shape 141"/>
           <p:cNvSpPr/>
           <p:nvPr/>
         </p:nvSpPr>
@@ -22901,7 +22911,7 @@
       </p:sp>
       <p:pic>
         <p:nvPicPr>
-          <p:cNvPr id="150" name="Image 8" descr="preencoded.png">    </p:cNvPr>
+          <p:cNvPr id="152" name="Image 8" descr="preencoded.png">    </p:cNvPr>
           <p:cNvPicPr>
             <a:picLocks noChangeAspect="1"/>
           </p:cNvPicPr>
@@ -22925,35 +22935,33 @@
       </p:pic>
       <p:sp>
         <p:nvSpPr>
-          <p:cNvPr id="151" name="Text 140"/>
+          <p:cNvPr id="153" name="Text 142"/>
           <p:cNvSpPr/>
           <p:nvPr/>
         </p:nvSpPr>
         <p:spPr>
           <a:xfrm>
             <a:off x="2850185" y="5725973"/>
-            <a:ext cx="675742" cy="321869"/>
-          </a:xfrm>
-          <a:prstGeom prst="rect">
-            <a:avLst/>
-          </a:prstGeom>
-          <a:noFill/>
-          <a:ln/>
-        </p:spPr>
-        <p:txBody>
-          <a:bodyPr wrap="square" lIns="0" tIns="0" rIns="0" bIns="0" rtlCol="0" anchor="ctr">
-            <a:normAutofit/>
-          </a:bodyPr>
+            <a:ext cx="671170" cy="321869"/>
+          </a:xfrm>
+          <a:prstGeom prst="rect">
+            <a:avLst/>
+          </a:prstGeom>
+          <a:noFill/>
+          <a:ln/>
+        </p:spPr>
+        <p:txBody>
+          <a:bodyPr wrap="square" lIns="0" tIns="0" rIns="0" bIns="0" rtlCol="0" anchor="ctr"/>
           <a:lstStyle/>
           <a:p>
             <a:pPr algn="l" indent="0" marL="0">
               <a:lnSpc>
-                <a:spcPct val="85000"/>
+                <a:spcPct val="100000"/>
               </a:lnSpc>
               <a:buNone/>
             </a:pPr>
             <a:r>
-              <a:rPr lang="en-US" sz="500" b="1" dirty="0">
+              <a:rPr lang="en-US" sz="490" b="1" dirty="0">
                 <a:solidFill>
                   <a:srgbClr val="202124"/>
                 </a:solidFill>
@@ -22963,17 +22971,17 @@
               </a:rPr>
               <a:t>CMEK Silo Datastore</a:t>
             </a:r>
-            <a:endParaRPr lang="en-US" sz="500" dirty="0"/>
+            <a:endParaRPr lang="en-US" sz="490" dirty="0"/>
           </a:p>
           <a:p>
             <a:pPr algn="l" indent="0" marL="0">
               <a:lnSpc>
-                <a:spcPct val="85000"/>
+                <a:spcPct val="100000"/>
               </a:lnSpc>
               <a:buNone/>
             </a:pPr>
             <a:r>
-              <a:rPr lang="en-US" sz="430" dirty="0">
+              <a:rPr lang="en-US" sz="275" dirty="0">
                 <a:solidFill>
                   <a:srgbClr val="3C4043"/>
                 </a:solidFill>
@@ -22983,13 +22991,13 @@
               </a:rPr>
               <a:t>pattern_b_silo_finvault_cmek_vault</a:t>
             </a:r>
-            <a:endParaRPr lang="en-US" sz="500" dirty="0"/>
-          </a:p>
-        </p:txBody>
-      </p:sp>
-      <p:sp>
-        <p:nvSpPr>
-          <p:cNvPr id="152" name="Shape 141"/>
+            <a:endParaRPr lang="en-US" sz="490" dirty="0"/>
+          </a:p>
+        </p:txBody>
+      </p:sp>
+      <p:sp>
+        <p:nvSpPr>
+          <p:cNvPr id="154" name="Shape 143"/>
           <p:cNvSpPr/>
           <p:nvPr/>
         </p:nvSpPr>
@@ -23016,7 +23024,7 @@
       </p:sp>
       <p:pic>
         <p:nvPicPr>
-          <p:cNvPr id="153" name="Image 9" descr="preencoded.png">    </p:cNvPr>
+          <p:cNvPr id="155" name="Image 9" descr="preencoded.png">    </p:cNvPr>
           <p:cNvPicPr>
             <a:picLocks noChangeAspect="1"/>
           </p:cNvPicPr>
@@ -23040,35 +23048,33 @@
       </p:pic>
       <p:sp>
         <p:nvSpPr>
-          <p:cNvPr id="154" name="Text 142"/>
+          <p:cNvPr id="156" name="Text 144"/>
           <p:cNvSpPr/>
           <p:nvPr/>
         </p:nvSpPr>
         <p:spPr>
           <a:xfrm>
             <a:off x="5213909" y="4448556"/>
-            <a:ext cx="675742" cy="321869"/>
-          </a:xfrm>
-          <a:prstGeom prst="rect">
-            <a:avLst/>
-          </a:prstGeom>
-          <a:noFill/>
-          <a:ln/>
-        </p:spPr>
-        <p:txBody>
-          <a:bodyPr wrap="square" lIns="0" tIns="0" rIns="0" bIns="0" rtlCol="0" anchor="ctr">
-            <a:normAutofit/>
-          </a:bodyPr>
+            <a:ext cx="671170" cy="321869"/>
+          </a:xfrm>
+          <a:prstGeom prst="rect">
+            <a:avLst/>
+          </a:prstGeom>
+          <a:noFill/>
+          <a:ln/>
+        </p:spPr>
+        <p:txBody>
+          <a:bodyPr wrap="square" lIns="0" tIns="0" rIns="0" bIns="0" rtlCol="0" anchor="ctr"/>
           <a:lstStyle/>
           <a:p>
             <a:pPr algn="l" indent="0" marL="0">
               <a:lnSpc>
-                <a:spcPct val="85000"/>
+                <a:spcPct val="100000"/>
               </a:lnSpc>
               <a:buNone/>
             </a:pPr>
             <a:r>
-              <a:rPr lang="en-US" sz="500" b="1" dirty="0">
+              <a:rPr lang="en-US" sz="490" b="1" dirty="0">
                 <a:solidFill>
                   <a:srgbClr val="202124"/>
                 </a:solidFill>
@@ -23078,17 +23084,17 @@
               </a:rPr>
               <a:t>Vertex AI Agent Engine</a:t>
             </a:r>
-            <a:endParaRPr lang="en-US" sz="500" dirty="0"/>
+            <a:endParaRPr lang="en-US" sz="490" dirty="0"/>
           </a:p>
           <a:p>
             <a:pPr algn="l" indent="0" marL="0">
               <a:lnSpc>
-                <a:spcPct val="85000"/>
+                <a:spcPct val="100000"/>
               </a:lnSpc>
               <a:buNone/>
             </a:pPr>
             <a:r>
-              <a:rPr lang="en-US" sz="430" dirty="0">
+              <a:rPr lang="en-US" sz="420" dirty="0">
                 <a:solidFill>
                   <a:srgbClr val="3C4043"/>
                 </a:solidFill>
@@ -23098,13 +23104,13 @@
               </a:rPr>
               <a:t>Dedicated RetailStream Silo</a:t>
             </a:r>
-            <a:endParaRPr lang="en-US" sz="500" dirty="0"/>
-          </a:p>
-        </p:txBody>
-      </p:sp>
-      <p:sp>
-        <p:nvSpPr>
-          <p:cNvPr id="155" name="Shape 143"/>
+            <a:endParaRPr lang="en-US" sz="490" dirty="0"/>
+          </a:p>
+        </p:txBody>
+      </p:sp>
+      <p:sp>
+        <p:nvSpPr>
+          <p:cNvPr id="157" name="Shape 145"/>
           <p:cNvSpPr/>
           <p:nvPr/>
         </p:nvSpPr>
@@ -23131,7 +23137,7 @@
       </p:sp>
       <p:pic>
         <p:nvPicPr>
-          <p:cNvPr id="156" name="Image 10" descr="preencoded.png">    </p:cNvPr>
+          <p:cNvPr id="158" name="Image 10" descr="preencoded.png">    </p:cNvPr>
           <p:cNvPicPr>
             <a:picLocks noChangeAspect="1"/>
           </p:cNvPicPr>
@@ -23155,35 +23161,33 @@
       </p:pic>
       <p:sp>
         <p:nvSpPr>
-          <p:cNvPr id="157" name="Text 144"/>
+          <p:cNvPr id="159" name="Text 146"/>
           <p:cNvSpPr/>
           <p:nvPr/>
         </p:nvSpPr>
         <p:spPr>
           <a:xfrm>
             <a:off x="5213909" y="5074006"/>
-            <a:ext cx="675742" cy="321869"/>
-          </a:xfrm>
-          <a:prstGeom prst="rect">
-            <a:avLst/>
-          </a:prstGeom>
-          <a:noFill/>
-          <a:ln/>
-        </p:spPr>
-        <p:txBody>
-          <a:bodyPr wrap="square" lIns="0" tIns="0" rIns="0" bIns="0" rtlCol="0" anchor="ctr">
-            <a:normAutofit/>
-          </a:bodyPr>
+            <a:ext cx="671170" cy="321869"/>
+          </a:xfrm>
+          <a:prstGeom prst="rect">
+            <a:avLst/>
+          </a:prstGeom>
+          <a:noFill/>
+          <a:ln/>
+        </p:spPr>
+        <p:txBody>
+          <a:bodyPr wrap="square" lIns="0" tIns="0" rIns="0" bIns="0" rtlCol="0" anchor="ctr"/>
           <a:lstStyle/>
           <a:p>
             <a:pPr algn="l" indent="0" marL="0">
               <a:lnSpc>
-                <a:spcPct val="85000"/>
+                <a:spcPct val="100000"/>
               </a:lnSpc>
               <a:buNone/>
             </a:pPr>
             <a:r>
-              <a:rPr lang="en-US" sz="500" b="1" dirty="0">
+              <a:rPr lang="en-US" sz="490" b="1" dirty="0">
                 <a:solidFill>
                   <a:srgbClr val="202124"/>
                 </a:solidFill>
@@ -23193,17 +23197,17 @@
               </a:rPr>
               <a:t>Local Silo MCP</a:t>
             </a:r>
-            <a:endParaRPr lang="en-US" sz="500" dirty="0"/>
+            <a:endParaRPr lang="en-US" sz="490" dirty="0"/>
           </a:p>
           <a:p>
             <a:pPr algn="l" indent="0" marL="0">
               <a:lnSpc>
-                <a:spcPct val="85000"/>
+                <a:spcPct val="100000"/>
               </a:lnSpc>
               <a:buNone/>
             </a:pPr>
             <a:r>
-              <a:rPr lang="en-US" sz="430" dirty="0">
+              <a:rPr lang="en-US" sz="420" dirty="0">
                 <a:solidFill>
                   <a:srgbClr val="3C4043"/>
                 </a:solidFill>
@@ -23213,13 +23217,13 @@
               </a:rPr>
               <a:t>Entra SharePoint &amp; SNOW</a:t>
             </a:r>
-            <a:endParaRPr lang="en-US" sz="500" dirty="0"/>
-          </a:p>
-        </p:txBody>
-      </p:sp>
-      <p:sp>
-        <p:nvSpPr>
-          <p:cNvPr id="158" name="Shape 145"/>
+            <a:endParaRPr lang="en-US" sz="490" dirty="0"/>
+          </a:p>
+        </p:txBody>
+      </p:sp>
+      <p:sp>
+        <p:nvSpPr>
+          <p:cNvPr id="160" name="Shape 147"/>
           <p:cNvSpPr/>
           <p:nvPr/>
         </p:nvSpPr>
@@ -23246,7 +23250,7 @@
       </p:sp>
       <p:pic>
         <p:nvPicPr>
-          <p:cNvPr id="159" name="Image 11" descr="preencoded.png">    </p:cNvPr>
+          <p:cNvPr id="161" name="Image 11" descr="preencoded.png">    </p:cNvPr>
           <p:cNvPicPr>
             <a:picLocks noChangeAspect="1"/>
           </p:cNvPicPr>
@@ -23270,35 +23274,33 @@
       </p:pic>
       <p:sp>
         <p:nvSpPr>
-          <p:cNvPr id="160" name="Text 146"/>
+          <p:cNvPr id="162" name="Text 148"/>
           <p:cNvSpPr/>
           <p:nvPr/>
         </p:nvSpPr>
         <p:spPr>
           <a:xfrm>
             <a:off x="5213909" y="5725973"/>
-            <a:ext cx="675742" cy="321869"/>
-          </a:xfrm>
-          <a:prstGeom prst="rect">
-            <a:avLst/>
-          </a:prstGeom>
-          <a:noFill/>
-          <a:ln/>
-        </p:spPr>
-        <p:txBody>
-          <a:bodyPr wrap="square" lIns="0" tIns="0" rIns="0" bIns="0" rtlCol="0" anchor="ctr">
-            <a:normAutofit/>
-          </a:bodyPr>
+            <a:ext cx="671170" cy="321869"/>
+          </a:xfrm>
+          <a:prstGeom prst="rect">
+            <a:avLst/>
+          </a:prstGeom>
+          <a:noFill/>
+          <a:ln/>
+        </p:spPr>
+        <p:txBody>
+          <a:bodyPr wrap="square" lIns="0" tIns="0" rIns="0" bIns="0" rtlCol="0" anchor="ctr"/>
           <a:lstStyle/>
           <a:p>
             <a:pPr algn="l" indent="0" marL="0">
               <a:lnSpc>
-                <a:spcPct val="85000"/>
+                <a:spcPct val="100000"/>
               </a:lnSpc>
               <a:buNone/>
             </a:pPr>
             <a:r>
-              <a:rPr lang="en-US" sz="500" b="1" dirty="0">
+              <a:rPr lang="en-US" sz="490" b="1" dirty="0">
                 <a:solidFill>
                   <a:srgbClr val="202124"/>
                 </a:solidFill>
@@ -23308,17 +23310,17 @@
               </a:rPr>
               <a:t>CMEK Silo Datastore</a:t>
             </a:r>
-            <a:endParaRPr lang="en-US" sz="500" dirty="0"/>
+            <a:endParaRPr lang="en-US" sz="490" dirty="0"/>
           </a:p>
           <a:p>
             <a:pPr algn="l" indent="0" marL="0">
               <a:lnSpc>
-                <a:spcPct val="85000"/>
+                <a:spcPct val="100000"/>
               </a:lnSpc>
               <a:buNone/>
             </a:pPr>
             <a:r>
-              <a:rPr lang="en-US" sz="430" dirty="0">
+              <a:rPr lang="en-US" sz="420" dirty="0">
                 <a:solidFill>
                   <a:srgbClr val="3C4043"/>
                 </a:solidFill>
@@ -23328,13 +23330,13 @@
               </a:rPr>
               <a:t>Key DISABLED → HTTP 423 (medcore test)</a:t>
             </a:r>
-            <a:endParaRPr lang="en-US" sz="500" dirty="0"/>
-          </a:p>
-        </p:txBody>
-      </p:sp>
-      <p:sp>
-        <p:nvSpPr>
-          <p:cNvPr id="161" name="Shape 147"/>
+            <a:endParaRPr lang="en-US" sz="490" dirty="0"/>
+          </a:p>
+        </p:txBody>
+      </p:sp>
+      <p:sp>
+        <p:nvSpPr>
+          <p:cNvPr id="163" name="Shape 149"/>
           <p:cNvSpPr/>
           <p:nvPr/>
         </p:nvSpPr>
@@ -23361,7 +23363,7 @@
       </p:sp>
       <p:pic>
         <p:nvPicPr>
-          <p:cNvPr id="162" name="Image 12" descr="preencoded.png">    </p:cNvPr>
+          <p:cNvPr id="164" name="Image 12" descr="preencoded.png">    </p:cNvPr>
           <p:cNvPicPr>
             <a:picLocks noChangeAspect="1"/>
           </p:cNvPicPr>
@@ -23385,35 +23387,33 @@
       </p:pic>
       <p:sp>
         <p:nvSpPr>
-          <p:cNvPr id="163" name="Text 148"/>
+          <p:cNvPr id="165" name="Text 150"/>
           <p:cNvSpPr/>
           <p:nvPr/>
         </p:nvSpPr>
         <p:spPr>
           <a:xfrm>
             <a:off x="3414370" y="2953512"/>
-            <a:ext cx="737921" cy="287122"/>
-          </a:xfrm>
-          <a:prstGeom prst="rect">
-            <a:avLst/>
-          </a:prstGeom>
-          <a:noFill/>
-          <a:ln/>
-        </p:spPr>
-        <p:txBody>
-          <a:bodyPr wrap="square" lIns="0" tIns="0" rIns="0" bIns="0" rtlCol="0" anchor="ctr">
-            <a:normAutofit/>
-          </a:bodyPr>
+            <a:ext cx="733349" cy="287122"/>
+          </a:xfrm>
+          <a:prstGeom prst="rect">
+            <a:avLst/>
+          </a:prstGeom>
+          <a:noFill/>
+          <a:ln/>
+        </p:spPr>
+        <p:txBody>
+          <a:bodyPr wrap="square" lIns="0" tIns="0" rIns="0" bIns="0" rtlCol="0" anchor="ctr"/>
           <a:lstStyle/>
           <a:p>
             <a:pPr algn="l" indent="0" marL="0">
               <a:lnSpc>
-                <a:spcPct val="85000"/>
+                <a:spcPct val="100000"/>
               </a:lnSpc>
               <a:buNone/>
             </a:pPr>
             <a:r>
-              <a:rPr lang="en-US" sz="500" b="1" dirty="0">
+              <a:rPr lang="en-US" sz="490" b="1" dirty="0">
                 <a:solidFill>
                   <a:srgbClr val="202124"/>
                 </a:solidFill>
@@ -23423,17 +23423,17 @@
               </a:rPr>
               <a:t>Sovereign Hub Router</a:t>
             </a:r>
-            <a:endParaRPr lang="en-US" sz="500" dirty="0"/>
+            <a:endParaRPr lang="en-US" sz="490" dirty="0"/>
           </a:p>
           <a:p>
             <a:pPr algn="l" indent="0" marL="0">
               <a:lnSpc>
-                <a:spcPct val="85000"/>
+                <a:spcPct val="100000"/>
               </a:lnSpc>
               <a:buNone/>
             </a:pPr>
             <a:r>
-              <a:rPr lang="en-US" sz="430" dirty="0">
+              <a:rPr lang="en-US" sz="420" dirty="0">
                 <a:solidFill>
                   <a:srgbClr val="3C4043"/>
                 </a:solidFill>
@@ -23443,13 +23443,13 @@
               </a:rPr>
               <a:t>Routes to Dedicated Silo</a:t>
             </a:r>
-            <a:endParaRPr lang="en-US" sz="500" dirty="0"/>
-          </a:p>
-        </p:txBody>
-      </p:sp>
-      <p:sp>
-        <p:nvSpPr>
-          <p:cNvPr id="164" name="Shape 149"/>
+            <a:endParaRPr lang="en-US" sz="490" dirty="0"/>
+          </a:p>
+        </p:txBody>
+      </p:sp>
+      <p:sp>
+        <p:nvSpPr>
+          <p:cNvPr id="166" name="Shape 151"/>
           <p:cNvSpPr/>
           <p:nvPr/>
         </p:nvSpPr>
@@ -23476,7 +23476,7 @@
       </p:sp>
       <p:pic>
         <p:nvPicPr>
-          <p:cNvPr id="165" name="Image 13" descr="preencoded.png">    </p:cNvPr>
+          <p:cNvPr id="167" name="Image 13" descr="preencoded.png">    </p:cNvPr>
           <p:cNvPicPr>
             <a:picLocks noChangeAspect="1"/>
           </p:cNvPicPr>
@@ -23500,35 +23500,33 @@
       </p:pic>
       <p:sp>
         <p:nvSpPr>
-          <p:cNvPr id="166" name="Text 150"/>
+          <p:cNvPr id="168" name="Text 152"/>
           <p:cNvSpPr/>
           <p:nvPr/>
         </p:nvSpPr>
         <p:spPr>
           <a:xfrm>
             <a:off x="1775765" y="4230929"/>
-            <a:ext cx="593446" cy="312725"/>
-          </a:xfrm>
-          <a:prstGeom prst="rect">
-            <a:avLst/>
-          </a:prstGeom>
-          <a:noFill/>
-          <a:ln/>
-        </p:spPr>
-        <p:txBody>
-          <a:bodyPr wrap="square" lIns="0" tIns="0" rIns="0" bIns="0" rtlCol="0" anchor="ctr">
-            <a:normAutofit/>
-          </a:bodyPr>
+            <a:ext cx="588874" cy="312725"/>
+          </a:xfrm>
+          <a:prstGeom prst="rect">
+            <a:avLst/>
+          </a:prstGeom>
+          <a:noFill/>
+          <a:ln/>
+        </p:spPr>
+        <p:txBody>
+          <a:bodyPr wrap="square" lIns="0" tIns="0" rIns="0" bIns="0" rtlCol="0" anchor="ctr"/>
           <a:lstStyle/>
           <a:p>
             <a:pPr algn="l" indent="0" marL="0">
               <a:lnSpc>
-                <a:spcPct val="85000"/>
+                <a:spcPct val="100000"/>
               </a:lnSpc>
               <a:buNone/>
             </a:pPr>
             <a:r>
-              <a:rPr lang="en-US" sz="500" b="1" dirty="0">
+              <a:rPr lang="en-US" sz="490" b="1" dirty="0">
                 <a:solidFill>
                   <a:srgbClr val="202124"/>
                 </a:solidFill>
@@ -23538,17 +23536,17 @@
               </a:rPr>
               <a:t>VPC-SC &amp; Model Armor</a:t>
             </a:r>
-            <a:endParaRPr lang="en-US" sz="500" dirty="0"/>
+            <a:endParaRPr lang="en-US" sz="490" dirty="0"/>
           </a:p>
           <a:p>
             <a:pPr algn="l" indent="0" marL="0">
               <a:lnSpc>
-                <a:spcPct val="85000"/>
+                <a:spcPct val="100000"/>
               </a:lnSpc>
               <a:buNone/>
             </a:pPr>
             <a:r>
-              <a:rPr lang="en-US" sz="430" dirty="0">
+              <a:rPr lang="en-US" sz="420" dirty="0">
                 <a:solidFill>
                   <a:srgbClr val="3C4043"/>
                 </a:solidFill>
@@ -23558,13 +23556,13 @@
               </a:rPr>
               <a:t>Dedicated FinVault Perimeter</a:t>
             </a:r>
-            <a:endParaRPr lang="en-US" sz="500" dirty="0"/>
-          </a:p>
-        </p:txBody>
-      </p:sp>
-      <p:sp>
-        <p:nvSpPr>
-          <p:cNvPr id="167" name="Shape 151"/>
+            <a:endParaRPr lang="en-US" sz="490" dirty="0"/>
+          </a:p>
+        </p:txBody>
+      </p:sp>
+      <p:sp>
+        <p:nvSpPr>
+          <p:cNvPr id="169" name="Shape 153"/>
           <p:cNvSpPr/>
           <p:nvPr/>
         </p:nvSpPr>
@@ -23591,7 +23589,7 @@
       </p:sp>
       <p:pic>
         <p:nvPicPr>
-          <p:cNvPr id="168" name="Image 14" descr="preencoded.png">    </p:cNvPr>
+          <p:cNvPr id="170" name="Image 14" descr="preencoded.png">    </p:cNvPr>
           <p:cNvPicPr>
             <a:picLocks noChangeAspect="1"/>
           </p:cNvPicPr>
@@ -23615,35 +23613,33 @@
       </p:pic>
       <p:sp>
         <p:nvSpPr>
-          <p:cNvPr id="169" name="Text 152"/>
+          <p:cNvPr id="171" name="Text 154"/>
           <p:cNvSpPr/>
           <p:nvPr/>
         </p:nvSpPr>
         <p:spPr>
           <a:xfrm>
             <a:off x="1775765" y="5256886"/>
-            <a:ext cx="593446" cy="312725"/>
-          </a:xfrm>
-          <a:prstGeom prst="rect">
-            <a:avLst/>
-          </a:prstGeom>
-          <a:noFill/>
-          <a:ln/>
-        </p:spPr>
-        <p:txBody>
-          <a:bodyPr wrap="square" lIns="0" tIns="0" rIns="0" bIns="0" rtlCol="0" anchor="ctr">
-            <a:normAutofit/>
-          </a:bodyPr>
+            <a:ext cx="588874" cy="312725"/>
+          </a:xfrm>
+          <a:prstGeom prst="rect">
+            <a:avLst/>
+          </a:prstGeom>
+          <a:noFill/>
+          <a:ln/>
+        </p:spPr>
+        <p:txBody>
+          <a:bodyPr wrap="square" lIns="0" tIns="0" rIns="0" bIns="0" rtlCol="0" anchor="ctr"/>
           <a:lstStyle/>
           <a:p>
             <a:pPr algn="l" indent="0" marL="0">
               <a:lnSpc>
-                <a:spcPct val="85000"/>
+                <a:spcPct val="100000"/>
               </a:lnSpc>
               <a:buNone/>
             </a:pPr>
             <a:r>
-              <a:rPr lang="en-US" sz="500" b="1" dirty="0">
+              <a:rPr lang="en-US" sz="490" b="1" dirty="0">
                 <a:solidFill>
                   <a:srgbClr val="202124"/>
                 </a:solidFill>
@@ -23653,17 +23649,17 @@
               </a:rPr>
               <a:t>Gemma 3 (27B) GKE</a:t>
             </a:r>
-            <a:endParaRPr lang="en-US" sz="500" dirty="0"/>
+            <a:endParaRPr lang="en-US" sz="490" dirty="0"/>
           </a:p>
           <a:p>
             <a:pPr algn="l" indent="0" marL="0">
               <a:lnSpc>
-                <a:spcPct val="85000"/>
+                <a:spcPct val="100000"/>
               </a:lnSpc>
               <a:buNone/>
             </a:pPr>
             <a:r>
-              <a:rPr lang="en-US" sz="430" dirty="0">
+              <a:rPr lang="en-US" sz="420" dirty="0">
                 <a:solidFill>
                   <a:srgbClr val="3C4043"/>
                 </a:solidFill>
@@ -23673,13 +23669,13 @@
               </a:rPr>
               <a:t>Air-Gapped vLLM + Dedicated PT</a:t>
             </a:r>
-            <a:endParaRPr lang="en-US" sz="500" dirty="0"/>
-          </a:p>
-        </p:txBody>
-      </p:sp>
-      <p:sp>
-        <p:nvSpPr>
-          <p:cNvPr id="170" name="Shape 153"/>
+            <a:endParaRPr lang="en-US" sz="490" dirty="0"/>
+          </a:p>
+        </p:txBody>
+      </p:sp>
+      <p:sp>
+        <p:nvSpPr>
+          <p:cNvPr id="172" name="Shape 155"/>
           <p:cNvSpPr/>
           <p:nvPr/>
         </p:nvSpPr>
@@ -23706,7 +23702,7 @@
       </p:sp>
       <p:pic>
         <p:nvPicPr>
-          <p:cNvPr id="171" name="Image 15" descr="preencoded.png">    </p:cNvPr>
+          <p:cNvPr id="173" name="Image 15" descr="preencoded.png">    </p:cNvPr>
           <p:cNvPicPr>
             <a:picLocks noChangeAspect="1"/>
           </p:cNvPicPr>
@@ -23730,35 +23726,33 @@
       </p:pic>
       <p:sp>
         <p:nvSpPr>
-          <p:cNvPr id="172" name="Text 154"/>
+          <p:cNvPr id="174" name="Text 156"/>
           <p:cNvSpPr/>
           <p:nvPr/>
         </p:nvSpPr>
         <p:spPr>
           <a:xfrm>
             <a:off x="4140403" y="4230929"/>
-            <a:ext cx="593446" cy="312725"/>
-          </a:xfrm>
-          <a:prstGeom prst="rect">
-            <a:avLst/>
-          </a:prstGeom>
-          <a:noFill/>
-          <a:ln/>
-        </p:spPr>
-        <p:txBody>
-          <a:bodyPr wrap="square" lIns="0" tIns="0" rIns="0" bIns="0" rtlCol="0" anchor="ctr">
-            <a:normAutofit/>
-          </a:bodyPr>
+            <a:ext cx="588874" cy="312725"/>
+          </a:xfrm>
+          <a:prstGeom prst="rect">
+            <a:avLst/>
+          </a:prstGeom>
+          <a:noFill/>
+          <a:ln/>
+        </p:spPr>
+        <p:txBody>
+          <a:bodyPr wrap="square" lIns="0" tIns="0" rIns="0" bIns="0" rtlCol="0" anchor="ctr"/>
           <a:lstStyle/>
           <a:p>
             <a:pPr algn="l" indent="0" marL="0">
               <a:lnSpc>
-                <a:spcPct val="85000"/>
+                <a:spcPct val="100000"/>
               </a:lnSpc>
               <a:buNone/>
             </a:pPr>
             <a:r>
-              <a:rPr lang="en-US" sz="500" b="1" dirty="0">
+              <a:rPr lang="en-US" sz="490" b="1" dirty="0">
                 <a:solidFill>
                   <a:srgbClr val="202124"/>
                 </a:solidFill>
@@ -23768,17 +23762,17 @@
               </a:rPr>
               <a:t>VPC-SC &amp; Model Armor</a:t>
             </a:r>
-            <a:endParaRPr lang="en-US" sz="500" dirty="0"/>
+            <a:endParaRPr lang="en-US" sz="490" dirty="0"/>
           </a:p>
           <a:p>
             <a:pPr algn="l" indent="0" marL="0">
               <a:lnSpc>
-                <a:spcPct val="85000"/>
+                <a:spcPct val="100000"/>
               </a:lnSpc>
               <a:buNone/>
             </a:pPr>
             <a:r>
-              <a:rPr lang="en-US" sz="430" dirty="0">
+              <a:rPr lang="en-US" sz="420" dirty="0">
                 <a:solidFill>
                   <a:srgbClr val="3C4043"/>
                 </a:solidFill>
@@ -23788,13 +23782,13 @@
               </a:rPr>
               <a:t>Dedicated Retail PCI Perimeter</a:t>
             </a:r>
-            <a:endParaRPr lang="en-US" sz="500" dirty="0"/>
-          </a:p>
-        </p:txBody>
-      </p:sp>
-      <p:sp>
-        <p:nvSpPr>
-          <p:cNvPr id="173" name="Shape 155"/>
+            <a:endParaRPr lang="en-US" sz="490" dirty="0"/>
+          </a:p>
+        </p:txBody>
+      </p:sp>
+      <p:sp>
+        <p:nvSpPr>
+          <p:cNvPr id="175" name="Shape 157"/>
           <p:cNvSpPr/>
           <p:nvPr/>
         </p:nvSpPr>
@@ -23821,7 +23815,7 @@
       </p:sp>
       <p:pic>
         <p:nvPicPr>
-          <p:cNvPr id="174" name="Image 16" descr="preencoded.png">    </p:cNvPr>
+          <p:cNvPr id="176" name="Image 16" descr="preencoded.png">    </p:cNvPr>
           <p:cNvPicPr>
             <a:picLocks noChangeAspect="1"/>
           </p:cNvPicPr>
@@ -23845,35 +23839,33 @@
       </p:pic>
       <p:sp>
         <p:nvSpPr>
-          <p:cNvPr id="175" name="Text 156"/>
+          <p:cNvPr id="177" name="Text 158"/>
           <p:cNvSpPr/>
           <p:nvPr/>
         </p:nvSpPr>
         <p:spPr>
           <a:xfrm>
             <a:off x="4140403" y="4674413"/>
-            <a:ext cx="593446" cy="312725"/>
-          </a:xfrm>
-          <a:prstGeom prst="rect">
-            <a:avLst/>
-          </a:prstGeom>
-          <a:noFill/>
-          <a:ln/>
-        </p:spPr>
-        <p:txBody>
-          <a:bodyPr wrap="square" lIns="0" tIns="0" rIns="0" bIns="0" rtlCol="0" anchor="ctr">
-            <a:normAutofit/>
-          </a:bodyPr>
+            <a:ext cx="588874" cy="312725"/>
+          </a:xfrm>
+          <a:prstGeom prst="rect">
+            <a:avLst/>
+          </a:prstGeom>
+          <a:noFill/>
+          <a:ln/>
+        </p:spPr>
+        <p:txBody>
+          <a:bodyPr wrap="square" lIns="0" tIns="0" rIns="0" bIns="0" rtlCol="0" anchor="ctr"/>
           <a:lstStyle/>
           <a:p>
             <a:pPr algn="l" indent="0" marL="0">
               <a:lnSpc>
-                <a:spcPct val="85000"/>
+                <a:spcPct val="100000"/>
               </a:lnSpc>
               <a:buNone/>
             </a:pPr>
             <a:r>
-              <a:rPr lang="en-US" sz="500" b="1" dirty="0">
+              <a:rPr lang="en-US" sz="490" b="1" dirty="0">
                 <a:solidFill>
                   <a:srgbClr val="202124"/>
                 </a:solidFill>
@@ -23883,17 +23875,17 @@
               </a:rPr>
               <a:t>Gemini 2.5 Pro PT</a:t>
             </a:r>
-            <a:endParaRPr lang="en-US" sz="500" dirty="0"/>
+            <a:endParaRPr lang="en-US" sz="490" dirty="0"/>
           </a:p>
           <a:p>
             <a:pPr algn="l" indent="0" marL="0">
               <a:lnSpc>
-                <a:spcPct val="85000"/>
+                <a:spcPct val="100000"/>
               </a:lnSpc>
               <a:buNone/>
             </a:pPr>
             <a:r>
-              <a:rPr lang="en-US" sz="430" dirty="0">
+              <a:rPr lang="en-US" sz="420" dirty="0">
                 <a:solidFill>
                   <a:srgbClr val="3C4043"/>
                 </a:solidFill>
@@ -23903,13 +23895,13 @@
               </a:rPr>
               <a:t>Dedicated Provisioned Quota</a:t>
             </a:r>
-            <a:endParaRPr lang="en-US" sz="500" dirty="0"/>
-          </a:p>
-        </p:txBody>
-      </p:sp>
-      <p:sp>
-        <p:nvSpPr>
-          <p:cNvPr id="176" name="Shape 157"/>
+            <a:endParaRPr lang="en-US" sz="490" dirty="0"/>
+          </a:p>
+        </p:txBody>
+      </p:sp>
+      <p:sp>
+        <p:nvSpPr>
+          <p:cNvPr id="178" name="Shape 159"/>
           <p:cNvSpPr/>
           <p:nvPr/>
         </p:nvSpPr>
@@ -23936,7 +23928,7 @@
       </p:sp>
       <p:pic>
         <p:nvPicPr>
-          <p:cNvPr id="177" name="Image 17" descr="preencoded.png">    </p:cNvPr>
+          <p:cNvPr id="179" name="Image 17" descr="preencoded.png">    </p:cNvPr>
           <p:cNvPicPr>
             <a:picLocks noChangeAspect="1"/>
           </p:cNvPicPr>
@@ -23960,35 +23952,33 @@
       </p:pic>
       <p:sp>
         <p:nvSpPr>
-          <p:cNvPr id="178" name="Text 158"/>
+          <p:cNvPr id="180" name="Text 160"/>
           <p:cNvSpPr/>
           <p:nvPr/>
         </p:nvSpPr>
         <p:spPr>
           <a:xfrm>
             <a:off x="1727302" y="2162556"/>
-            <a:ext cx="651053" cy="287122"/>
-          </a:xfrm>
-          <a:prstGeom prst="rect">
-            <a:avLst/>
-          </a:prstGeom>
-          <a:noFill/>
-          <a:ln/>
-        </p:spPr>
-        <p:txBody>
-          <a:bodyPr wrap="square" lIns="0" tIns="0" rIns="0" bIns="0" rtlCol="0" anchor="ctr">
-            <a:normAutofit/>
-          </a:bodyPr>
+            <a:ext cx="646481" cy="287122"/>
+          </a:xfrm>
+          <a:prstGeom prst="rect">
+            <a:avLst/>
+          </a:prstGeom>
+          <a:noFill/>
+          <a:ln/>
+        </p:spPr>
+        <p:txBody>
+          <a:bodyPr wrap="square" lIns="0" tIns="0" rIns="0" bIns="0" rtlCol="0" anchor="ctr"/>
           <a:lstStyle/>
           <a:p>
             <a:pPr algn="l" indent="0" marL="0">
               <a:lnSpc>
-                <a:spcPct val="85000"/>
+                <a:spcPct val="100000"/>
               </a:lnSpc>
               <a:buNone/>
             </a:pPr>
             <a:r>
-              <a:rPr lang="en-US" sz="500" b="1" dirty="0">
+              <a:rPr lang="en-US" sz="490" b="1" dirty="0">
                 <a:solidFill>
                   <a:srgbClr val="202124"/>
                 </a:solidFill>
@@ -23998,17 +23988,17 @@
               </a:rPr>
               <a:t>Google Cloud Armor</a:t>
             </a:r>
-            <a:endParaRPr lang="en-US" sz="500" dirty="0"/>
+            <a:endParaRPr lang="en-US" sz="490" dirty="0"/>
           </a:p>
           <a:p>
             <a:pPr algn="l" indent="0" marL="0">
               <a:lnSpc>
-                <a:spcPct val="85000"/>
+                <a:spcPct val="100000"/>
               </a:lnSpc>
               <a:buNone/>
             </a:pPr>
             <a:r>
-              <a:rPr lang="en-US" sz="430" dirty="0">
+              <a:rPr lang="en-US" sz="420" dirty="0">
                 <a:solidFill>
                   <a:srgbClr val="3C4043"/>
                 </a:solidFill>
@@ -24018,13 +24008,13 @@
               </a:rPr>
               <a:t>WAF &amp; mTLS • SPIFFE Cert Pinning</a:t>
             </a:r>
-            <a:endParaRPr lang="en-US" sz="500" dirty="0"/>
-          </a:p>
-        </p:txBody>
-      </p:sp>
-      <p:sp>
-        <p:nvSpPr>
-          <p:cNvPr id="179" name="Shape 159"/>
+            <a:endParaRPr lang="en-US" sz="490" dirty="0"/>
+          </a:p>
+        </p:txBody>
+      </p:sp>
+      <p:sp>
+        <p:nvSpPr>
+          <p:cNvPr id="181" name="Shape 161"/>
           <p:cNvSpPr/>
           <p:nvPr/>
         </p:nvSpPr>
@@ -24051,7 +24041,7 @@
       </p:sp>
       <p:pic>
         <p:nvPicPr>
-          <p:cNvPr id="180" name="Image 18" descr="preencoded.png">    </p:cNvPr>
+          <p:cNvPr id="182" name="Image 18" descr="preencoded.png">    </p:cNvPr>
           <p:cNvPicPr>
             <a:picLocks noChangeAspect="1"/>
           </p:cNvPicPr>
@@ -24075,35 +24065,33 @@
       </p:pic>
       <p:sp>
         <p:nvSpPr>
-          <p:cNvPr id="181" name="Text 160"/>
+          <p:cNvPr id="183" name="Text 162"/>
           <p:cNvSpPr/>
           <p:nvPr/>
         </p:nvSpPr>
         <p:spPr>
           <a:xfrm>
             <a:off x="1727302" y="2527402"/>
-            <a:ext cx="651053" cy="287122"/>
-          </a:xfrm>
-          <a:prstGeom prst="rect">
-            <a:avLst/>
-          </a:prstGeom>
-          <a:noFill/>
-          <a:ln/>
-        </p:spPr>
-        <p:txBody>
-          <a:bodyPr wrap="square" lIns="0" tIns="0" rIns="0" bIns="0" rtlCol="0" anchor="ctr">
-            <a:normAutofit/>
-          </a:bodyPr>
+            <a:ext cx="646481" cy="287122"/>
+          </a:xfrm>
+          <a:prstGeom prst="rect">
+            <a:avLst/>
+          </a:prstGeom>
+          <a:noFill/>
+          <a:ln/>
+        </p:spPr>
+        <p:txBody>
+          <a:bodyPr wrap="square" lIns="0" tIns="0" rIns="0" bIns="0" rtlCol="0" anchor="ctr"/>
           <a:lstStyle/>
           <a:p>
             <a:pPr algn="l" indent="0" marL="0">
               <a:lnSpc>
-                <a:spcPct val="85000"/>
+                <a:spcPct val="100000"/>
               </a:lnSpc>
               <a:buNone/>
             </a:pPr>
             <a:r>
-              <a:rPr lang="en-US" sz="500" b="1" dirty="0">
+              <a:rPr lang="en-US" sz="490" b="1" dirty="0">
                 <a:solidFill>
                   <a:srgbClr val="202124"/>
                 </a:solidFill>
@@ -24113,17 +24101,17 @@
               </a:rPr>
               <a:t>Model Armor</a:t>
             </a:r>
-            <a:endParaRPr lang="en-US" sz="500" dirty="0"/>
+            <a:endParaRPr lang="en-US" sz="490" dirty="0"/>
           </a:p>
           <a:p>
             <a:pPr algn="l" indent="0" marL="0">
               <a:lnSpc>
-                <a:spcPct val="85000"/>
+                <a:spcPct val="100000"/>
               </a:lnSpc>
               <a:buNone/>
             </a:pPr>
             <a:r>
-              <a:rPr lang="en-US" sz="430" dirty="0">
+              <a:rPr lang="en-US" sz="420" dirty="0">
                 <a:solidFill>
                   <a:srgbClr val="3C4043"/>
                 </a:solidFill>
@@ -24133,13 +24121,13 @@
               </a:rPr>
               <a:t>Edge Prompt &amp; DDoS Filter</a:t>
             </a:r>
-            <a:endParaRPr lang="en-US" sz="500" dirty="0"/>
-          </a:p>
-        </p:txBody>
-      </p:sp>
-      <p:sp>
-        <p:nvSpPr>
-          <p:cNvPr id="182" name="Shape 161"/>
+            <a:endParaRPr lang="en-US" sz="490" dirty="0"/>
+          </a:p>
+        </p:txBody>
+      </p:sp>
+      <p:sp>
+        <p:nvSpPr>
+          <p:cNvPr id="184" name="Shape 163"/>
           <p:cNvSpPr/>
           <p:nvPr/>
         </p:nvSpPr>
@@ -24166,7 +24154,7 @@
       </p:sp>
       <p:pic>
         <p:nvPicPr>
-          <p:cNvPr id="183" name="Image 19" descr="preencoded.png">    </p:cNvPr>
+          <p:cNvPr id="185" name="Image 19" descr="preencoded.png">    </p:cNvPr>
           <p:cNvPicPr>
             <a:picLocks noChangeAspect="1"/>
           </p:cNvPicPr>
@@ -24190,35 +24178,33 @@
       </p:pic>
       <p:sp>
         <p:nvSpPr>
-          <p:cNvPr id="184" name="Text 162"/>
+          <p:cNvPr id="186" name="Text 164"/>
           <p:cNvSpPr/>
           <p:nvPr/>
         </p:nvSpPr>
         <p:spPr>
           <a:xfrm>
             <a:off x="1762049" y="2953512"/>
-            <a:ext cx="616306" cy="287122"/>
-          </a:xfrm>
-          <a:prstGeom prst="rect">
-            <a:avLst/>
-          </a:prstGeom>
-          <a:noFill/>
-          <a:ln/>
-        </p:spPr>
-        <p:txBody>
-          <a:bodyPr wrap="square" lIns="0" tIns="0" rIns="0" bIns="0" rtlCol="0" anchor="ctr">
-            <a:normAutofit/>
-          </a:bodyPr>
+            <a:ext cx="611734" cy="287122"/>
+          </a:xfrm>
+          <a:prstGeom prst="rect">
+            <a:avLst/>
+          </a:prstGeom>
+          <a:noFill/>
+          <a:ln/>
+        </p:spPr>
+        <p:txBody>
+          <a:bodyPr wrap="square" lIns="0" tIns="0" rIns="0" bIns="0" rtlCol="0" anchor="ctr"/>
           <a:lstStyle/>
           <a:p>
             <a:pPr algn="l" indent="0" marL="0">
               <a:lnSpc>
-                <a:spcPct val="85000"/>
+                <a:spcPct val="100000"/>
               </a:lnSpc>
               <a:buNone/>
             </a:pPr>
             <a:r>
-              <a:rPr lang="en-US" sz="500" b="1" dirty="0">
+              <a:rPr lang="en-US" sz="490" b="1" dirty="0">
                 <a:solidFill>
                   <a:srgbClr val="202124"/>
                 </a:solidFill>
@@ -24228,17 +24214,17 @@
               </a:rPr>
               <a:t>IAM PAB Verifier</a:t>
             </a:r>
-            <a:endParaRPr lang="en-US" sz="500" dirty="0"/>
+            <a:endParaRPr lang="en-US" sz="490" dirty="0"/>
           </a:p>
           <a:p>
             <a:pPr algn="l" indent="0" marL="0">
               <a:lnSpc>
-                <a:spcPct val="85000"/>
+                <a:spcPct val="100000"/>
               </a:lnSpc>
               <a:buNone/>
             </a:pPr>
             <a:r>
-              <a:rPr lang="en-US" sz="430" dirty="0">
+              <a:rPr lang="en-US" sz="420" dirty="0">
                 <a:solidFill>
                   <a:srgbClr val="3C4043"/>
                 </a:solidFill>
@@ -24248,13 +24234,13 @@
               </a:rPr>
               <a:t>HTTP 403 Cross-Project Block</a:t>
             </a:r>
-            <a:endParaRPr lang="en-US" sz="500" dirty="0"/>
-          </a:p>
-        </p:txBody>
-      </p:sp>
-      <p:sp>
-        <p:nvSpPr>
-          <p:cNvPr id="185" name="Shape 163"/>
+            <a:endParaRPr lang="en-US" sz="490" dirty="0"/>
+          </a:p>
+        </p:txBody>
+      </p:sp>
+      <p:sp>
+        <p:nvSpPr>
+          <p:cNvPr id="187" name="Shape 165"/>
           <p:cNvSpPr/>
           <p:nvPr/>
         </p:nvSpPr>
@@ -24279,7 +24265,7 @@
       </p:sp>
       <p:sp>
         <p:nvSpPr>
-          <p:cNvPr id="186" name="Text 164"/>
+          <p:cNvPr id="188" name="Text 166"/>
           <p:cNvSpPr/>
           <p:nvPr/>
         </p:nvSpPr>
@@ -24318,7 +24304,7 @@
       </p:sp>
       <p:sp>
         <p:nvSpPr>
-          <p:cNvPr id="187" name="Shape 165"/>
+          <p:cNvPr id="189" name="Shape 167"/>
           <p:cNvSpPr/>
           <p:nvPr/>
         </p:nvSpPr>
@@ -24343,7 +24329,7 @@
       </p:sp>
       <p:sp>
         <p:nvSpPr>
-          <p:cNvPr id="188" name="Text 166"/>
+          <p:cNvPr id="190" name="Text 168"/>
           <p:cNvSpPr/>
           <p:nvPr/>
         </p:nvSpPr>
@@ -24382,7 +24368,7 @@
       </p:sp>
       <p:sp>
         <p:nvSpPr>
-          <p:cNvPr id="189" name="Shape 167"/>
+          <p:cNvPr id="191" name="Shape 169"/>
           <p:cNvSpPr/>
           <p:nvPr/>
         </p:nvSpPr>
@@ -24407,7 +24393,7 @@
       </p:sp>
       <p:sp>
         <p:nvSpPr>
-          <p:cNvPr id="190" name="Text 168"/>
+          <p:cNvPr id="192" name="Text 170"/>
           <p:cNvSpPr/>
           <p:nvPr/>
         </p:nvSpPr>
@@ -24446,7 +24432,7 @@
       </p:sp>
       <p:sp>
         <p:nvSpPr>
-          <p:cNvPr id="191" name="Shape 169"/>
+          <p:cNvPr id="193" name="Shape 171"/>
           <p:cNvSpPr/>
           <p:nvPr/>
         </p:nvSpPr>
@@ -24471,7 +24457,7 @@
       </p:sp>
       <p:sp>
         <p:nvSpPr>
-          <p:cNvPr id="192" name="Text 170"/>
+          <p:cNvPr id="194" name="Text 172"/>
           <p:cNvSpPr/>
           <p:nvPr/>
         </p:nvSpPr>
@@ -24510,7 +24496,7 @@
       </p:sp>
       <p:sp>
         <p:nvSpPr>
-          <p:cNvPr id="193" name="Shape 171"/>
+          <p:cNvPr id="195" name="Shape 173"/>
           <p:cNvSpPr/>
           <p:nvPr/>
         </p:nvSpPr>
@@ -24535,7 +24521,7 @@
       </p:sp>
       <p:sp>
         <p:nvSpPr>
-          <p:cNvPr id="194" name="Text 172"/>
+          <p:cNvPr id="196" name="Text 174"/>
           <p:cNvSpPr/>
           <p:nvPr/>
         </p:nvSpPr>
@@ -24574,7 +24560,7 @@
       </p:sp>
       <p:sp>
         <p:nvSpPr>
-          <p:cNvPr id="195" name="Shape 173"/>
+          <p:cNvPr id="197" name="Shape 175"/>
           <p:cNvSpPr/>
           <p:nvPr/>
         </p:nvSpPr>
@@ -24599,7 +24585,7 @@
       </p:sp>
       <p:sp>
         <p:nvSpPr>
-          <p:cNvPr id="196" name="Text 174"/>
+          <p:cNvPr id="198" name="Text 176"/>
           <p:cNvSpPr/>
           <p:nvPr/>
         </p:nvSpPr>
@@ -24638,7 +24624,7 @@
       </p:sp>
       <p:sp>
         <p:nvSpPr>
-          <p:cNvPr id="197" name="Shape 175"/>
+          <p:cNvPr id="199" name="Shape 177"/>
           <p:cNvSpPr/>
           <p:nvPr/>
         </p:nvSpPr>
@@ -24663,7 +24649,7 @@
       </p:sp>
       <p:sp>
         <p:nvSpPr>
-          <p:cNvPr id="198" name="Text 176"/>
+          <p:cNvPr id="200" name="Text 178"/>
           <p:cNvSpPr/>
           <p:nvPr/>
         </p:nvSpPr>
@@ -24702,7 +24688,7 @@
       </p:sp>
       <p:sp>
         <p:nvSpPr>
-          <p:cNvPr id="199" name="Shape 177"/>
+          <p:cNvPr id="201" name="Shape 179"/>
           <p:cNvSpPr/>
           <p:nvPr/>
         </p:nvSpPr>
@@ -24727,7 +24713,7 @@
       </p:sp>
       <p:sp>
         <p:nvSpPr>
-          <p:cNvPr id="200" name="Text 178"/>
+          <p:cNvPr id="202" name="Text 180"/>
           <p:cNvSpPr/>
           <p:nvPr/>
         </p:nvSpPr>
@@ -24766,7 +24752,7 @@
       </p:sp>
       <p:sp>
         <p:nvSpPr>
-          <p:cNvPr id="201" name="Shape 179"/>
+          <p:cNvPr id="203" name="Shape 181"/>
           <p:cNvSpPr/>
           <p:nvPr/>
         </p:nvSpPr>
@@ -24791,7 +24777,7 @@
       </p:sp>
       <p:sp>
         <p:nvSpPr>
-          <p:cNvPr id="202" name="Text 180"/>
+          <p:cNvPr id="204" name="Text 182"/>
           <p:cNvSpPr/>
           <p:nvPr/>
         </p:nvSpPr>
@@ -24830,18 +24816,18 @@
       </p:sp>
       <p:sp>
         <p:nvSpPr>
-          <p:cNvPr id="203" name="Shape 181"/>
-          <p:cNvSpPr/>
-          <p:nvPr/>
-        </p:nvSpPr>
-        <p:spPr>
-          <a:xfrm>
-            <a:off x="5339182" y="3365906"/>
-            <a:ext cx="760781" cy="192024"/>
+          <p:cNvPr id="205" name="Shape 183"/>
+          <p:cNvSpPr/>
+          <p:nvPr/>
+        </p:nvSpPr>
+        <p:spPr>
+          <a:xfrm>
+            <a:off x="5339182" y="3353105"/>
+            <a:ext cx="672084" cy="217627"/>
           </a:xfrm>
           <a:prstGeom prst="roundRect">
             <a:avLst>
-              <a:gd name="adj" fmla="val 23810"/>
+              <a:gd name="adj" fmla="val 21008"/>
             </a:avLst>
           </a:prstGeom>
           <a:solidFill>
@@ -24857,35 +24843,33 @@
       </p:sp>
       <p:sp>
         <p:nvSpPr>
-          <p:cNvPr id="204" name="Text 182"/>
-          <p:cNvSpPr/>
-          <p:nvPr/>
-        </p:nvSpPr>
-        <p:spPr>
-          <a:xfrm>
-            <a:off x="5357470" y="3375050"/>
-            <a:ext cx="724205" cy="173736"/>
-          </a:xfrm>
-          <a:prstGeom prst="rect">
-            <a:avLst/>
-          </a:prstGeom>
-          <a:noFill/>
-          <a:ln/>
-        </p:spPr>
-        <p:txBody>
-          <a:bodyPr wrap="square" lIns="0" tIns="0" rIns="0" bIns="0" rtlCol="0" anchor="ctr">
-            <a:normAutofit/>
-          </a:bodyPr>
+          <p:cNvPr id="206" name="Text 184"/>
+          <p:cNvSpPr/>
+          <p:nvPr/>
+        </p:nvSpPr>
+        <p:spPr>
+          <a:xfrm>
+            <a:off x="5359298" y="3362249"/>
+            <a:ext cx="631850" cy="199339"/>
+          </a:xfrm>
+          <a:prstGeom prst="rect">
+            <a:avLst/>
+          </a:prstGeom>
+          <a:noFill/>
+          <a:ln/>
+        </p:spPr>
+        <p:txBody>
+          <a:bodyPr wrap="square" lIns="0" tIns="0" rIns="0" bIns="0" rtlCol="0" anchor="ctr"/>
           <a:lstStyle/>
           <a:p>
             <a:pPr algn="ctr" indent="0" marL="0">
               <a:lnSpc>
-                <a:spcPct val="86000"/>
+                <a:spcPct val="102000"/>
               </a:lnSpc>
               <a:buNone/>
             </a:pPr>
             <a:r>
-              <a:rPr lang="en-US" sz="470" b="1" dirty="0">
+              <a:rPr lang="en-US" sz="410" b="1" dirty="0">
                 <a:solidFill>
                   <a:srgbClr val="202124"/>
                 </a:solidFill>
@@ -24895,17 +24879,17 @@
               </a:rPr>
               <a:t>CMEK state &amp; VPC-SC</a:t>
             </a:r>
-            <a:endParaRPr lang="en-US" sz="470" dirty="0"/>
+            <a:endParaRPr lang="en-US" sz="410" dirty="0"/>
           </a:p>
           <a:p>
             <a:pPr algn="ctr" indent="0" marL="0">
               <a:lnSpc>
-                <a:spcPct val="86000"/>
+                <a:spcPct val="102000"/>
               </a:lnSpc>
               <a:buNone/>
             </a:pPr>
             <a:r>
-              <a:rPr lang="en-US" sz="410" dirty="0">
+              <a:rPr lang="en-US" sz="375" dirty="0">
                 <a:solidFill>
                   <a:srgbClr val="202124"/>
                 </a:solidFill>
@@ -24915,24 +24899,24 @@
               </a:rPr>
               <a:t>audit monitoring</a:t>
             </a:r>
-            <a:endParaRPr lang="en-US" sz="470" dirty="0"/>
-          </a:p>
-        </p:txBody>
-      </p:sp>
-      <p:sp>
-        <p:nvSpPr>
-          <p:cNvPr id="205" name="Shape 183"/>
-          <p:cNvSpPr/>
-          <p:nvPr/>
-        </p:nvSpPr>
-        <p:spPr>
-          <a:xfrm>
-            <a:off x="2822753" y="4833518"/>
-            <a:ext cx="522122" cy="178308"/>
+            <a:endParaRPr lang="en-US" sz="410" dirty="0"/>
+          </a:p>
+        </p:txBody>
+      </p:sp>
+      <p:sp>
+        <p:nvSpPr>
+          <p:cNvPr id="207" name="Shape 185"/>
+          <p:cNvSpPr/>
+          <p:nvPr/>
+        </p:nvSpPr>
+        <p:spPr>
+          <a:xfrm>
+            <a:off x="2856586" y="4817974"/>
+            <a:ext cx="452628" cy="208483"/>
           </a:xfrm>
           <a:prstGeom prst="roundRect">
             <a:avLst>
-              <a:gd name="adj" fmla="val 25641"/>
+              <a:gd name="adj" fmla="val 21930"/>
             </a:avLst>
           </a:prstGeom>
           <a:solidFill>
@@ -24948,35 +24932,33 @@
       </p:sp>
       <p:sp>
         <p:nvSpPr>
-          <p:cNvPr id="206" name="Text 184"/>
-          <p:cNvSpPr/>
-          <p:nvPr/>
-        </p:nvSpPr>
-        <p:spPr>
-          <a:xfrm>
-            <a:off x="2841041" y="4842662"/>
-            <a:ext cx="485546" cy="160020"/>
-          </a:xfrm>
-          <a:prstGeom prst="rect">
-            <a:avLst/>
-          </a:prstGeom>
-          <a:noFill/>
-          <a:ln/>
-        </p:spPr>
-        <p:txBody>
-          <a:bodyPr wrap="square" lIns="0" tIns="0" rIns="0" bIns="0" rtlCol="0" anchor="ctr">
-            <a:normAutofit/>
-          </a:bodyPr>
+          <p:cNvPr id="208" name="Text 186"/>
+          <p:cNvSpPr/>
+          <p:nvPr/>
+        </p:nvSpPr>
+        <p:spPr>
+          <a:xfrm>
+            <a:off x="2876702" y="4827118"/>
+            <a:ext cx="412394" cy="190195"/>
+          </a:xfrm>
+          <a:prstGeom prst="rect">
+            <a:avLst/>
+          </a:prstGeom>
+          <a:noFill/>
+          <a:ln/>
+        </p:spPr>
+        <p:txBody>
+          <a:bodyPr wrap="square" lIns="0" tIns="0" rIns="0" bIns="0" rtlCol="0" anchor="ctr"/>
           <a:lstStyle/>
           <a:p>
             <a:pPr algn="ctr" indent="0" marL="0">
               <a:lnSpc>
-                <a:spcPct val="86000"/>
+                <a:spcPct val="102000"/>
               </a:lnSpc>
               <a:buNone/>
             </a:pPr>
             <a:r>
-              <a:rPr lang="en-US" sz="470" b="1" dirty="0">
+              <a:rPr lang="en-US" sz="410" b="1" dirty="0">
                 <a:solidFill>
                   <a:srgbClr val="202124"/>
                 </a:solidFill>
@@ -24986,17 +24968,17 @@
               </a:rPr>
               <a:t>Private GKE</a:t>
             </a:r>
-            <a:endParaRPr lang="en-US" sz="470" dirty="0"/>
+            <a:endParaRPr lang="en-US" sz="410" dirty="0"/>
           </a:p>
           <a:p>
             <a:pPr algn="ctr" indent="0" marL="0">
               <a:lnSpc>
-                <a:spcPct val="86000"/>
+                <a:spcPct val="102000"/>
               </a:lnSpc>
               <a:buNone/>
             </a:pPr>
             <a:r>
-              <a:rPr lang="en-US" sz="410" dirty="0">
+              <a:rPr lang="en-US" sz="375" dirty="0">
                 <a:solidFill>
                   <a:srgbClr val="202124"/>
                 </a:solidFill>
@@ -25006,24 +24988,24 @@
               </a:rPr>
               <a:t>Zero Egress</a:t>
             </a:r>
-            <a:endParaRPr lang="en-US" sz="470" dirty="0"/>
-          </a:p>
-        </p:txBody>
-      </p:sp>
-      <p:sp>
-        <p:nvSpPr>
-          <p:cNvPr id="207" name="Shape 185"/>
-          <p:cNvSpPr/>
-          <p:nvPr/>
-        </p:nvSpPr>
-        <p:spPr>
-          <a:xfrm>
-            <a:off x="2691994" y="5468112"/>
-            <a:ext cx="782726" cy="178308"/>
+            <a:endParaRPr lang="en-US" sz="410" dirty="0"/>
+          </a:p>
+        </p:txBody>
+      </p:sp>
+      <p:sp>
+        <p:nvSpPr>
+          <p:cNvPr id="209" name="Shape 187"/>
+          <p:cNvSpPr/>
+          <p:nvPr/>
+        </p:nvSpPr>
+        <p:spPr>
+          <a:xfrm>
+            <a:off x="2760574" y="5452567"/>
+            <a:ext cx="644652" cy="208483"/>
           </a:xfrm>
           <a:prstGeom prst="roundRect">
             <a:avLst>
-              <a:gd name="adj" fmla="val 25641"/>
+              <a:gd name="adj" fmla="val 21930"/>
             </a:avLst>
           </a:prstGeom>
           <a:solidFill>
@@ -25039,35 +25021,33 @@
       </p:sp>
       <p:sp>
         <p:nvSpPr>
-          <p:cNvPr id="208" name="Text 186"/>
-          <p:cNvSpPr/>
-          <p:nvPr/>
-        </p:nvSpPr>
-        <p:spPr>
-          <a:xfrm>
-            <a:off x="2710282" y="5477256"/>
-            <a:ext cx="746150" cy="160020"/>
-          </a:xfrm>
-          <a:prstGeom prst="rect">
-            <a:avLst/>
-          </a:prstGeom>
-          <a:noFill/>
-          <a:ln/>
-        </p:spPr>
-        <p:txBody>
-          <a:bodyPr wrap="square" lIns="0" tIns="0" rIns="0" bIns="0" rtlCol="0" anchor="ctr">
-            <a:normAutofit/>
-          </a:bodyPr>
+          <p:cNvPr id="210" name="Text 188"/>
+          <p:cNvSpPr/>
+          <p:nvPr/>
+        </p:nvSpPr>
+        <p:spPr>
+          <a:xfrm>
+            <a:off x="2780690" y="5461711"/>
+            <a:ext cx="604418" cy="190195"/>
+          </a:xfrm>
+          <a:prstGeom prst="rect">
+            <a:avLst/>
+          </a:prstGeom>
+          <a:noFill/>
+          <a:ln/>
+        </p:spPr>
+        <p:txBody>
+          <a:bodyPr wrap="square" lIns="0" tIns="0" rIns="0" bIns="0" rtlCol="0" anchor="ctr"/>
           <a:lstStyle/>
           <a:p>
             <a:pPr algn="ctr" indent="0" marL="0">
               <a:lnSpc>
-                <a:spcPct val="86000"/>
+                <a:spcPct val="102000"/>
               </a:lnSpc>
               <a:buNone/>
             </a:pPr>
             <a:r>
-              <a:rPr lang="en-US" sz="470" b="1" dirty="0">
+              <a:rPr lang="en-US" sz="410" b="1" dirty="0">
                 <a:solidFill>
                   <a:srgbClr val="202124"/>
                 </a:solidFill>
@@ -25077,17 +25057,17 @@
               </a:rPr>
               <a:t>finvault-silo-cmek</a:t>
             </a:r>
-            <a:endParaRPr lang="en-US" sz="470" dirty="0"/>
+            <a:endParaRPr lang="en-US" sz="410" dirty="0"/>
           </a:p>
           <a:p>
             <a:pPr algn="ctr" indent="0" marL="0">
               <a:lnSpc>
-                <a:spcPct val="86000"/>
+                <a:spcPct val="102000"/>
               </a:lnSpc>
               <a:buNone/>
             </a:pPr>
             <a:r>
-              <a:rPr lang="en-US" sz="410" dirty="0">
+              <a:rPr lang="en-US" sz="375" dirty="0">
                 <a:solidFill>
                   <a:srgbClr val="202124"/>
                 </a:solidFill>
@@ -25097,24 +25077,24 @@
               </a:rPr>
               <a:t>HTTP 423 Ready</a:t>
             </a:r>
-            <a:endParaRPr lang="en-US" sz="470" dirty="0"/>
-          </a:p>
-        </p:txBody>
-      </p:sp>
-      <p:sp>
-        <p:nvSpPr>
-          <p:cNvPr id="209" name="Shape 187"/>
-          <p:cNvSpPr/>
-          <p:nvPr/>
-        </p:nvSpPr>
-        <p:spPr>
-          <a:xfrm>
-            <a:off x="5168189" y="4833518"/>
-            <a:ext cx="559613" cy="178308"/>
+            <a:endParaRPr lang="en-US" sz="410" dirty="0"/>
+          </a:p>
+        </p:txBody>
+      </p:sp>
+      <p:sp>
+        <p:nvSpPr>
+          <p:cNvPr id="211" name="Shape 189"/>
+          <p:cNvSpPr/>
+          <p:nvPr/>
+        </p:nvSpPr>
+        <p:spPr>
+          <a:xfrm>
+            <a:off x="5208422" y="4817974"/>
+            <a:ext cx="480060" cy="208483"/>
           </a:xfrm>
           <a:prstGeom prst="roundRect">
             <a:avLst>
-              <a:gd name="adj" fmla="val 25641"/>
+              <a:gd name="adj" fmla="val 21930"/>
             </a:avLst>
           </a:prstGeom>
           <a:solidFill>
@@ -25130,35 +25110,33 @@
       </p:sp>
       <p:sp>
         <p:nvSpPr>
-          <p:cNvPr id="210" name="Text 188"/>
-          <p:cNvSpPr/>
-          <p:nvPr/>
-        </p:nvSpPr>
-        <p:spPr>
-          <a:xfrm>
-            <a:off x="5186477" y="4842662"/>
-            <a:ext cx="523037" cy="160020"/>
-          </a:xfrm>
-          <a:prstGeom prst="rect">
-            <a:avLst/>
-          </a:prstGeom>
-          <a:noFill/>
-          <a:ln/>
-        </p:spPr>
-        <p:txBody>
-          <a:bodyPr wrap="square" lIns="0" tIns="0" rIns="0" bIns="0" rtlCol="0" anchor="ctr">
-            <a:normAutofit/>
-          </a:bodyPr>
+          <p:cNvPr id="212" name="Text 190"/>
+          <p:cNvSpPr/>
+          <p:nvPr/>
+        </p:nvSpPr>
+        <p:spPr>
+          <a:xfrm>
+            <a:off x="5228539" y="4827118"/>
+            <a:ext cx="439826" cy="190195"/>
+          </a:xfrm>
+          <a:prstGeom prst="rect">
+            <a:avLst/>
+          </a:prstGeom>
+          <a:noFill/>
+          <a:ln/>
+        </p:spPr>
+        <p:txBody>
+          <a:bodyPr wrap="square" lIns="0" tIns="0" rIns="0" bIns="0" rtlCol="0" anchor="ctr"/>
           <a:lstStyle/>
           <a:p>
             <a:pPr algn="ctr" indent="0" marL="0">
               <a:lnSpc>
-                <a:spcPct val="86000"/>
+                <a:spcPct val="102000"/>
               </a:lnSpc>
               <a:buNone/>
             </a:pPr>
             <a:r>
-              <a:rPr lang="en-US" sz="470" b="1" dirty="0">
+              <a:rPr lang="en-US" sz="410" b="1" dirty="0">
                 <a:solidFill>
                   <a:srgbClr val="202124"/>
                 </a:solidFill>
@@ -25168,17 +25146,17 @@
               </a:rPr>
               <a:t>VPC-SC Bound</a:t>
             </a:r>
-            <a:endParaRPr lang="en-US" sz="470" dirty="0"/>
+            <a:endParaRPr lang="en-US" sz="410" dirty="0"/>
           </a:p>
           <a:p>
             <a:pPr algn="ctr" indent="0" marL="0">
               <a:lnSpc>
-                <a:spcPct val="86000"/>
+                <a:spcPct val="102000"/>
               </a:lnSpc>
               <a:buNone/>
             </a:pPr>
             <a:r>
-              <a:rPr lang="en-US" sz="410" dirty="0">
+              <a:rPr lang="en-US" sz="375" dirty="0">
                 <a:solidFill>
                   <a:srgbClr val="202124"/>
                 </a:solidFill>
@@ -25188,24 +25166,24 @@
               </a:rPr>
               <a:t>Secure RAG</a:t>
             </a:r>
-            <a:endParaRPr lang="en-US" sz="470" dirty="0"/>
-          </a:p>
-        </p:txBody>
-      </p:sp>
-      <p:sp>
-        <p:nvSpPr>
-          <p:cNvPr id="211" name="Shape 189"/>
-          <p:cNvSpPr/>
-          <p:nvPr/>
-        </p:nvSpPr>
-        <p:spPr>
-          <a:xfrm>
-            <a:off x="5074920" y="5468112"/>
-            <a:ext cx="747065" cy="178308"/>
+            <a:endParaRPr lang="en-US" sz="410" dirty="0"/>
+          </a:p>
+        </p:txBody>
+      </p:sp>
+      <p:sp>
+        <p:nvSpPr>
+          <p:cNvPr id="213" name="Shape 191"/>
+          <p:cNvSpPr/>
+          <p:nvPr/>
+        </p:nvSpPr>
+        <p:spPr>
+          <a:xfrm>
+            <a:off x="5138928" y="5452567"/>
+            <a:ext cx="617220" cy="208483"/>
           </a:xfrm>
           <a:prstGeom prst="roundRect">
             <a:avLst>
-              <a:gd name="adj" fmla="val 25641"/>
+              <a:gd name="adj" fmla="val 21930"/>
             </a:avLst>
           </a:prstGeom>
           <a:solidFill>
@@ -25221,35 +25199,33 @@
       </p:sp>
       <p:sp>
         <p:nvSpPr>
-          <p:cNvPr id="212" name="Text 190"/>
-          <p:cNvSpPr/>
-          <p:nvPr/>
-        </p:nvSpPr>
-        <p:spPr>
-          <a:xfrm>
-            <a:off x="5093208" y="5477256"/>
-            <a:ext cx="710489" cy="160020"/>
-          </a:xfrm>
-          <a:prstGeom prst="rect">
-            <a:avLst/>
-          </a:prstGeom>
-          <a:noFill/>
-          <a:ln/>
-        </p:spPr>
-        <p:txBody>
-          <a:bodyPr wrap="square" lIns="0" tIns="0" rIns="0" bIns="0" rtlCol="0" anchor="ctr">
-            <a:normAutofit/>
-          </a:bodyPr>
+          <p:cNvPr id="214" name="Text 192"/>
+          <p:cNvSpPr/>
+          <p:nvPr/>
+        </p:nvSpPr>
+        <p:spPr>
+          <a:xfrm>
+            <a:off x="5159045" y="5461711"/>
+            <a:ext cx="576986" cy="190195"/>
+          </a:xfrm>
+          <a:prstGeom prst="rect">
+            <a:avLst/>
+          </a:prstGeom>
+          <a:noFill/>
+          <a:ln/>
+        </p:spPr>
+        <p:txBody>
+          <a:bodyPr wrap="square" lIns="0" tIns="0" rIns="0" bIns="0" rtlCol="0" anchor="ctr"/>
           <a:lstStyle/>
           <a:p>
             <a:pPr algn="ctr" indent="0" marL="0">
               <a:lnSpc>
-                <a:spcPct val="86000"/>
+                <a:spcPct val="102000"/>
               </a:lnSpc>
               <a:buNone/>
             </a:pPr>
             <a:r>
-              <a:rPr lang="en-US" sz="470" b="1" dirty="0">
+              <a:rPr lang="en-US" sz="410" b="1" dirty="0">
                 <a:solidFill>
                   <a:srgbClr val="202124"/>
                 </a:solidFill>
@@ -25259,17 +25235,17 @@
               </a:rPr>
               <a:t>CMEK Kill-Switch</a:t>
             </a:r>
-            <a:endParaRPr lang="en-US" sz="470" dirty="0"/>
+            <a:endParaRPr lang="en-US" sz="410" dirty="0"/>
           </a:p>
           <a:p>
             <a:pPr algn="ctr" indent="0" marL="0">
               <a:lnSpc>
-                <a:spcPct val="86000"/>
+                <a:spcPct val="102000"/>
               </a:lnSpc>
               <a:buNone/>
             </a:pPr>
             <a:r>
-              <a:rPr lang="en-US" sz="410" dirty="0">
+              <a:rPr lang="en-US" sz="375" dirty="0">
                 <a:solidFill>
                   <a:srgbClr val="202124"/>
                 </a:solidFill>
@@ -25279,24 +25255,24 @@
               </a:rPr>
               <a:t>HTTP 423 Verified</a:t>
             </a:r>
-            <a:endParaRPr lang="en-US" sz="470" dirty="0"/>
-          </a:p>
-        </p:txBody>
-      </p:sp>
-      <p:sp>
-        <p:nvSpPr>
-          <p:cNvPr id="213" name="Shape 191"/>
-          <p:cNvSpPr/>
-          <p:nvPr/>
-        </p:nvSpPr>
-        <p:spPr>
-          <a:xfrm>
-            <a:off x="1853489" y="5618988"/>
-            <a:ext cx="493776" cy="178308"/>
+            <a:endParaRPr lang="en-US" sz="410" dirty="0"/>
+          </a:p>
+        </p:txBody>
+      </p:sp>
+      <p:sp>
+        <p:nvSpPr>
+          <p:cNvPr id="215" name="Shape 193"/>
+          <p:cNvSpPr/>
+          <p:nvPr/>
+        </p:nvSpPr>
+        <p:spPr>
+          <a:xfrm>
+            <a:off x="1757477" y="5604358"/>
+            <a:ext cx="425196" cy="208483"/>
           </a:xfrm>
           <a:prstGeom prst="roundRect">
             <a:avLst>
-              <a:gd name="adj" fmla="val 25641"/>
+              <a:gd name="adj" fmla="val 21930"/>
             </a:avLst>
           </a:prstGeom>
           <a:solidFill>
@@ -25312,35 +25288,33 @@
       </p:sp>
       <p:sp>
         <p:nvSpPr>
-          <p:cNvPr id="214" name="Text 192"/>
-          <p:cNvSpPr/>
-          <p:nvPr/>
-        </p:nvSpPr>
-        <p:spPr>
-          <a:xfrm>
-            <a:off x="1871777" y="5628132"/>
-            <a:ext cx="457200" cy="160020"/>
-          </a:xfrm>
-          <a:prstGeom prst="rect">
-            <a:avLst/>
-          </a:prstGeom>
-          <a:noFill/>
-          <a:ln/>
-        </p:spPr>
-        <p:txBody>
-          <a:bodyPr wrap="square" lIns="0" tIns="0" rIns="0" bIns="0" rtlCol="0" anchor="ctr">
-            <a:normAutofit/>
-          </a:bodyPr>
+          <p:cNvPr id="216" name="Text 194"/>
+          <p:cNvSpPr/>
+          <p:nvPr/>
+        </p:nvSpPr>
+        <p:spPr>
+          <a:xfrm>
+            <a:off x="1777594" y="5613502"/>
+            <a:ext cx="384962" cy="190195"/>
+          </a:xfrm>
+          <a:prstGeom prst="rect">
+            <a:avLst/>
+          </a:prstGeom>
+          <a:noFill/>
+          <a:ln/>
+        </p:spPr>
+        <p:txBody>
+          <a:bodyPr wrap="square" lIns="0" tIns="0" rIns="0" bIns="0" rtlCol="0" anchor="ctr"/>
           <a:lstStyle/>
           <a:p>
             <a:pPr algn="ctr" indent="0" marL="0">
               <a:lnSpc>
-                <a:spcPct val="86000"/>
+                <a:spcPct val="102000"/>
               </a:lnSpc>
               <a:buNone/>
             </a:pPr>
             <a:r>
-              <a:rPr lang="en-US" sz="470" b="1" dirty="0">
+              <a:rPr lang="en-US" sz="410" b="1" dirty="0">
                 <a:solidFill>
                   <a:srgbClr val="202124"/>
                 </a:solidFill>
@@ -25350,17 +25324,17 @@
               </a:rPr>
               <a:t>Air-gapped</a:t>
             </a:r>
-            <a:endParaRPr lang="en-US" sz="470" dirty="0"/>
+            <a:endParaRPr lang="en-US" sz="410" dirty="0"/>
           </a:p>
           <a:p>
             <a:pPr algn="ctr" indent="0" marL="0">
               <a:lnSpc>
-                <a:spcPct val="86000"/>
+                <a:spcPct val="102000"/>
               </a:lnSpc>
               <a:buNone/>
             </a:pPr>
             <a:r>
-              <a:rPr lang="en-US" sz="410" dirty="0">
+              <a:rPr lang="en-US" sz="375" dirty="0">
                 <a:solidFill>
                   <a:srgbClr val="202124"/>
                 </a:solidFill>
@@ -25370,24 +25344,24 @@
               </a:rPr>
               <a:t>inference</a:t>
             </a:r>
-            <a:endParaRPr lang="en-US" sz="470" dirty="0"/>
-          </a:p>
-        </p:txBody>
-      </p:sp>
-      <p:sp>
-        <p:nvSpPr>
-          <p:cNvPr id="215" name="Shape 193"/>
-          <p:cNvSpPr/>
-          <p:nvPr/>
-        </p:nvSpPr>
-        <p:spPr>
-          <a:xfrm>
-            <a:off x="3905402" y="3368650"/>
-            <a:ext cx="738835" cy="178308"/>
+            <a:endParaRPr lang="en-US" sz="410" dirty="0"/>
+          </a:p>
+        </p:txBody>
+      </p:sp>
+      <p:sp>
+        <p:nvSpPr>
+          <p:cNvPr id="217" name="Shape 195"/>
+          <p:cNvSpPr/>
+          <p:nvPr/>
+        </p:nvSpPr>
+        <p:spPr>
+          <a:xfrm>
+            <a:off x="3905402" y="3354019"/>
+            <a:ext cx="699516" cy="208483"/>
           </a:xfrm>
           <a:prstGeom prst="roundRect">
             <a:avLst>
-              <a:gd name="adj" fmla="val 25641"/>
+              <a:gd name="adj" fmla="val 21930"/>
             </a:avLst>
           </a:prstGeom>
           <a:solidFill>
@@ -25403,35 +25377,33 @@
       </p:sp>
       <p:sp>
         <p:nvSpPr>
-          <p:cNvPr id="216" name="Text 194"/>
-          <p:cNvSpPr/>
-          <p:nvPr/>
-        </p:nvSpPr>
-        <p:spPr>
-          <a:xfrm>
-            <a:off x="3923690" y="3377794"/>
-            <a:ext cx="702259" cy="160020"/>
-          </a:xfrm>
-          <a:prstGeom prst="rect">
-            <a:avLst/>
-          </a:prstGeom>
-          <a:noFill/>
-          <a:ln/>
-        </p:spPr>
-        <p:txBody>
-          <a:bodyPr wrap="square" lIns="0" tIns="0" rIns="0" bIns="0" rtlCol="0" anchor="ctr">
-            <a:normAutofit/>
-          </a:bodyPr>
+          <p:cNvPr id="218" name="Text 196"/>
+          <p:cNvSpPr/>
+          <p:nvPr/>
+        </p:nvSpPr>
+        <p:spPr>
+          <a:xfrm>
+            <a:off x="3925519" y="3363163"/>
+            <a:ext cx="659282" cy="190195"/>
+          </a:xfrm>
+          <a:prstGeom prst="rect">
+            <a:avLst/>
+          </a:prstGeom>
+          <a:noFill/>
+          <a:ln/>
+        </p:spPr>
+        <p:txBody>
+          <a:bodyPr wrap="square" lIns="0" tIns="0" rIns="0" bIns="0" rtlCol="0" anchor="ctr"/>
           <a:lstStyle/>
           <a:p>
             <a:pPr algn="ctr" indent="0" marL="0">
               <a:lnSpc>
-                <a:spcPct val="86000"/>
+                <a:spcPct val="102000"/>
               </a:lnSpc>
               <a:buNone/>
             </a:pPr>
             <a:r>
-              <a:rPr lang="en-US" sz="470" b="1" dirty="0">
+              <a:rPr lang="en-US" sz="410" b="1" dirty="0">
                 <a:solidFill>
                   <a:srgbClr val="202124"/>
                 </a:solidFill>
@@ -25441,17 +25413,17 @@
               </a:rPr>
               <a:t>Sovereign response</a:t>
             </a:r>
-            <a:endParaRPr lang="en-US" sz="470" dirty="0"/>
+            <a:endParaRPr lang="en-US" sz="410" dirty="0"/>
           </a:p>
           <a:p>
             <a:pPr algn="ctr" indent="0" marL="0">
               <a:lnSpc>
-                <a:spcPct val="86000"/>
+                <a:spcPct val="102000"/>
               </a:lnSpc>
               <a:buNone/>
             </a:pPr>
             <a:r>
-              <a:rPr lang="en-US" sz="410" dirty="0">
+              <a:rPr lang="en-US" sz="375" dirty="0">
                 <a:solidFill>
                   <a:srgbClr val="202124"/>
                 </a:solidFill>
@@ -25461,24 +25433,24 @@
               </a:rPr>
               <a:t>(or HTTP 423 Locked)</a:t>
             </a:r>
-            <a:endParaRPr lang="en-US" sz="470" dirty="0"/>
-          </a:p>
-        </p:txBody>
-      </p:sp>
-      <p:sp>
-        <p:nvSpPr>
-          <p:cNvPr id="217" name="Shape 195"/>
-          <p:cNvSpPr/>
-          <p:nvPr/>
-        </p:nvSpPr>
-        <p:spPr>
-          <a:xfrm>
-            <a:off x="2983687" y="3368650"/>
-            <a:ext cx="669341" cy="178308"/>
+            <a:endParaRPr lang="en-US" sz="410" dirty="0"/>
+          </a:p>
+        </p:txBody>
+      </p:sp>
+      <p:sp>
+        <p:nvSpPr>
+          <p:cNvPr id="219" name="Shape 197"/>
+          <p:cNvSpPr/>
+          <p:nvPr/>
+        </p:nvSpPr>
+        <p:spPr>
+          <a:xfrm>
+            <a:off x="2983687" y="3354019"/>
+            <a:ext cx="669341" cy="208483"/>
           </a:xfrm>
           <a:prstGeom prst="roundRect">
             <a:avLst>
-              <a:gd name="adj" fmla="val 25641"/>
+              <a:gd name="adj" fmla="val 21930"/>
             </a:avLst>
           </a:prstGeom>
           <a:solidFill>
@@ -25494,35 +25466,33 @@
       </p:sp>
       <p:sp>
         <p:nvSpPr>
-          <p:cNvPr id="218" name="Text 196"/>
-          <p:cNvSpPr/>
-          <p:nvPr/>
-        </p:nvSpPr>
-        <p:spPr>
-          <a:xfrm>
-            <a:off x="3001975" y="3377794"/>
-            <a:ext cx="632765" cy="160020"/>
-          </a:xfrm>
-          <a:prstGeom prst="rect">
-            <a:avLst/>
-          </a:prstGeom>
-          <a:noFill/>
-          <a:ln/>
-        </p:spPr>
-        <p:txBody>
-          <a:bodyPr wrap="square" lIns="0" tIns="0" rIns="0" bIns="0" rtlCol="0" anchor="ctr">
-            <a:normAutofit/>
-          </a:bodyPr>
+          <p:cNvPr id="220" name="Text 198"/>
+          <p:cNvSpPr/>
+          <p:nvPr/>
+        </p:nvSpPr>
+        <p:spPr>
+          <a:xfrm>
+            <a:off x="3003804" y="3363163"/>
+            <a:ext cx="629107" cy="190195"/>
+          </a:xfrm>
+          <a:prstGeom prst="rect">
+            <a:avLst/>
+          </a:prstGeom>
+          <a:noFill/>
+          <a:ln/>
+        </p:spPr>
+        <p:txBody>
+          <a:bodyPr wrap="square" lIns="0" tIns="0" rIns="0" bIns="0" rtlCol="0" anchor="ctr"/>
           <a:lstStyle/>
           <a:p>
             <a:pPr algn="ctr" indent="0" marL="0">
               <a:lnSpc>
-                <a:spcPct val="86000"/>
+                <a:spcPct val="102000"/>
               </a:lnSpc>
               <a:buNone/>
             </a:pPr>
             <a:r>
-              <a:rPr lang="en-US" sz="470" b="1" dirty="0">
+              <a:rPr lang="en-US" sz="410" b="1" dirty="0">
                 <a:solidFill>
                   <a:srgbClr val="202124"/>
                 </a:solidFill>
@@ -25532,17 +25502,17 @@
               </a:rPr>
               <a:t>Route to isolated</a:t>
             </a:r>
-            <a:endParaRPr lang="en-US" sz="470" dirty="0"/>
+            <a:endParaRPr lang="en-US" sz="410" dirty="0"/>
           </a:p>
           <a:p>
             <a:pPr algn="ctr" indent="0" marL="0">
               <a:lnSpc>
-                <a:spcPct val="86000"/>
+                <a:spcPct val="102000"/>
               </a:lnSpc>
               <a:buNone/>
             </a:pPr>
             <a:r>
-              <a:rPr lang="en-US" sz="410" dirty="0">
+              <a:rPr lang="en-US" sz="375" dirty="0">
                 <a:solidFill>
                   <a:srgbClr val="202124"/>
                 </a:solidFill>
@@ -25552,24 +25522,24 @@
               </a:rPr>
               <a:t>VPC-SC tenant project</a:t>
             </a:r>
-            <a:endParaRPr lang="en-US" sz="470" dirty="0"/>
-          </a:p>
-        </p:txBody>
-      </p:sp>
-      <p:sp>
-        <p:nvSpPr>
-          <p:cNvPr id="219" name="Shape 197"/>
-          <p:cNvSpPr/>
-          <p:nvPr/>
-        </p:nvSpPr>
-        <p:spPr>
-          <a:xfrm>
-            <a:off x="2541118" y="2885846"/>
-            <a:ext cx="522122" cy="178308"/>
+            <a:endParaRPr lang="en-US" sz="410" dirty="0"/>
+          </a:p>
+        </p:txBody>
+      </p:sp>
+      <p:sp>
+        <p:nvSpPr>
+          <p:cNvPr id="221" name="Shape 199"/>
+          <p:cNvSpPr/>
+          <p:nvPr/>
+        </p:nvSpPr>
+        <p:spPr>
+          <a:xfrm>
+            <a:off x="2575865" y="2871216"/>
+            <a:ext cx="452628" cy="208483"/>
           </a:xfrm>
           <a:prstGeom prst="roundRect">
             <a:avLst>
-              <a:gd name="adj" fmla="val 25641"/>
+              <a:gd name="adj" fmla="val 21930"/>
             </a:avLst>
           </a:prstGeom>
           <a:solidFill>
@@ -25585,35 +25555,33 @@
       </p:sp>
       <p:sp>
         <p:nvSpPr>
-          <p:cNvPr id="220" name="Text 198"/>
-          <p:cNvSpPr/>
-          <p:nvPr/>
-        </p:nvSpPr>
-        <p:spPr>
-          <a:xfrm>
-            <a:off x="2559406" y="2894990"/>
-            <a:ext cx="485546" cy="160020"/>
-          </a:xfrm>
-          <a:prstGeom prst="rect">
-            <a:avLst/>
-          </a:prstGeom>
-          <a:noFill/>
-          <a:ln/>
-        </p:spPr>
-        <p:txBody>
-          <a:bodyPr wrap="square" lIns="0" tIns="0" rIns="0" bIns="0" rtlCol="0" anchor="ctr">
-            <a:normAutofit/>
-          </a:bodyPr>
+          <p:cNvPr id="222" name="Text 200"/>
+          <p:cNvSpPr/>
+          <p:nvPr/>
+        </p:nvSpPr>
+        <p:spPr>
+          <a:xfrm>
+            <a:off x="2595982" y="2880360"/>
+            <a:ext cx="412394" cy="190195"/>
+          </a:xfrm>
+          <a:prstGeom prst="rect">
+            <a:avLst/>
+          </a:prstGeom>
+          <a:noFill/>
+          <a:ln/>
+        </p:spPr>
+        <p:txBody>
+          <a:bodyPr wrap="square" lIns="0" tIns="0" rIns="0" bIns="0" rtlCol="0" anchor="ctr"/>
           <a:lstStyle/>
           <a:p>
             <a:pPr algn="ctr" indent="0" marL="0">
               <a:lnSpc>
-                <a:spcPct val="86000"/>
+                <a:spcPct val="102000"/>
               </a:lnSpc>
               <a:buNone/>
             </a:pPr>
             <a:r>
-              <a:rPr lang="en-US" sz="470" b="1" dirty="0">
+              <a:rPr lang="en-US" sz="410" b="1" dirty="0">
                 <a:solidFill>
                   <a:srgbClr val="202124"/>
                 </a:solidFill>
@@ -25623,17 +25591,17 @@
               </a:rPr>
               <a:t>Enforce org</a:t>
             </a:r>
-            <a:endParaRPr lang="en-US" sz="470" dirty="0"/>
+            <a:endParaRPr lang="en-US" sz="410" dirty="0"/>
           </a:p>
           <a:p>
             <a:pPr algn="ctr" indent="0" marL="0">
               <a:lnSpc>
-                <a:spcPct val="86000"/>
+                <a:spcPct val="102000"/>
               </a:lnSpc>
               <a:buNone/>
             </a:pPr>
             <a:r>
-              <a:rPr lang="en-US" sz="410" dirty="0">
+              <a:rPr lang="en-US" sz="375" dirty="0">
                 <a:solidFill>
                   <a:srgbClr val="202124"/>
                 </a:solidFill>
@@ -25643,24 +25611,24 @@
               </a:rPr>
               <a:t>PAB policy</a:t>
             </a:r>
-            <a:endParaRPr lang="en-US" sz="470" dirty="0"/>
-          </a:p>
-        </p:txBody>
-      </p:sp>
-      <p:sp>
-        <p:nvSpPr>
-          <p:cNvPr id="221" name="Shape 199"/>
-          <p:cNvSpPr/>
-          <p:nvPr/>
-        </p:nvSpPr>
-        <p:spPr>
-          <a:xfrm>
-            <a:off x="1757477" y="4608576"/>
-            <a:ext cx="686714" cy="132588"/>
+            <a:endParaRPr lang="en-US" sz="410" dirty="0"/>
+          </a:p>
+        </p:txBody>
+      </p:sp>
+      <p:sp>
+        <p:nvSpPr>
+          <p:cNvPr id="223" name="Shape 201"/>
+          <p:cNvSpPr/>
+          <p:nvPr/>
+        </p:nvSpPr>
+        <p:spPr>
+          <a:xfrm>
+            <a:off x="1757477" y="4605833"/>
+            <a:ext cx="589788" cy="138989"/>
           </a:xfrm>
           <a:prstGeom prst="roundRect">
             <a:avLst>
-              <a:gd name="adj" fmla="val 34483"/>
+              <a:gd name="adj" fmla="val 32895"/>
             </a:avLst>
           </a:prstGeom>
           <a:solidFill>
@@ -25676,35 +25644,33 @@
       </p:sp>
       <p:sp>
         <p:nvSpPr>
-          <p:cNvPr id="222" name="Text 200"/>
-          <p:cNvSpPr/>
-          <p:nvPr/>
-        </p:nvSpPr>
-        <p:spPr>
-          <a:xfrm>
-            <a:off x="1775765" y="4617720"/>
-            <a:ext cx="650138" cy="114300"/>
-          </a:xfrm>
-          <a:prstGeom prst="rect">
-            <a:avLst/>
-          </a:prstGeom>
-          <a:noFill/>
-          <a:ln/>
-        </p:spPr>
-        <p:txBody>
-          <a:bodyPr wrap="square" lIns="0" tIns="0" rIns="0" bIns="0" rtlCol="0" anchor="ctr">
-            <a:normAutofit/>
-          </a:bodyPr>
+          <p:cNvPr id="224" name="Text 202"/>
+          <p:cNvSpPr/>
+          <p:nvPr/>
+        </p:nvSpPr>
+        <p:spPr>
+          <a:xfrm>
+            <a:off x="1777594" y="4614977"/>
+            <a:ext cx="549554" cy="120701"/>
+          </a:xfrm>
+          <a:prstGeom prst="rect">
+            <a:avLst/>
+          </a:prstGeom>
+          <a:noFill/>
+          <a:ln/>
+        </p:spPr>
+        <p:txBody>
+          <a:bodyPr wrap="square" lIns="0" tIns="0" rIns="0" bIns="0" rtlCol="0" anchor="ctr"/>
           <a:lstStyle/>
           <a:p>
             <a:pPr algn="ctr" indent="0" marL="0">
               <a:lnSpc>
-                <a:spcPct val="86000"/>
+                <a:spcPct val="102000"/>
               </a:lnSpc>
               <a:buNone/>
             </a:pPr>
             <a:r>
-              <a:rPr lang="en-US" sz="470" b="1" dirty="0">
+              <a:rPr lang="en-US" sz="410" b="1" dirty="0">
                 <a:solidFill>
                   <a:srgbClr val="202124"/>
                 </a:solidFill>
@@ -25714,24 +25680,24 @@
               </a:rPr>
               <a:t>Sanitize request</a:t>
             </a:r>
-            <a:endParaRPr lang="en-US" sz="470" dirty="0"/>
-          </a:p>
-        </p:txBody>
-      </p:sp>
-      <p:sp>
-        <p:nvSpPr>
-          <p:cNvPr id="223" name="Shape 201"/>
-          <p:cNvSpPr/>
-          <p:nvPr/>
-        </p:nvSpPr>
-        <p:spPr>
-          <a:xfrm>
-            <a:off x="1757477" y="4817059"/>
-            <a:ext cx="686714" cy="132588"/>
+            <a:endParaRPr lang="en-US" sz="410" dirty="0"/>
+          </a:p>
+        </p:txBody>
+      </p:sp>
+      <p:sp>
+        <p:nvSpPr>
+          <p:cNvPr id="225" name="Shape 203"/>
+          <p:cNvSpPr/>
+          <p:nvPr/>
+        </p:nvSpPr>
+        <p:spPr>
+          <a:xfrm>
+            <a:off x="1757477" y="4814316"/>
+            <a:ext cx="617220" cy="138989"/>
           </a:xfrm>
           <a:prstGeom prst="roundRect">
             <a:avLst>
-              <a:gd name="adj" fmla="val 34483"/>
+              <a:gd name="adj" fmla="val 32895"/>
             </a:avLst>
           </a:prstGeom>
           <a:solidFill>
@@ -25747,35 +25713,33 @@
       </p:sp>
       <p:sp>
         <p:nvSpPr>
-          <p:cNvPr id="224" name="Text 202"/>
-          <p:cNvSpPr/>
-          <p:nvPr/>
-        </p:nvSpPr>
-        <p:spPr>
-          <a:xfrm>
-            <a:off x="1775765" y="4826203"/>
-            <a:ext cx="650138" cy="114300"/>
-          </a:xfrm>
-          <a:prstGeom prst="rect">
-            <a:avLst/>
-          </a:prstGeom>
-          <a:noFill/>
-          <a:ln/>
-        </p:spPr>
-        <p:txBody>
-          <a:bodyPr wrap="square" lIns="0" tIns="0" rIns="0" bIns="0" rtlCol="0" anchor="ctr">
-            <a:normAutofit/>
-          </a:bodyPr>
+          <p:cNvPr id="226" name="Text 204"/>
+          <p:cNvSpPr/>
+          <p:nvPr/>
+        </p:nvSpPr>
+        <p:spPr>
+          <a:xfrm>
+            <a:off x="1777594" y="4823460"/>
+            <a:ext cx="576986" cy="120701"/>
+          </a:xfrm>
+          <a:prstGeom prst="rect">
+            <a:avLst/>
+          </a:prstGeom>
+          <a:noFill/>
+          <a:ln/>
+        </p:spPr>
+        <p:txBody>
+          <a:bodyPr wrap="square" lIns="0" tIns="0" rIns="0" bIns="0" rtlCol="0" anchor="ctr"/>
           <a:lstStyle/>
           <a:p>
             <a:pPr algn="ctr" indent="0" marL="0">
               <a:lnSpc>
-                <a:spcPct val="86000"/>
+                <a:spcPct val="102000"/>
               </a:lnSpc>
               <a:buNone/>
             </a:pPr>
             <a:r>
-              <a:rPr lang="en-US" sz="470" b="1" dirty="0">
+              <a:rPr lang="en-US" sz="410" b="1" dirty="0">
                 <a:solidFill>
                   <a:srgbClr val="202124"/>
                 </a:solidFill>
@@ -25785,24 +25749,24 @@
               </a:rPr>
               <a:t>Sanitize response</a:t>
             </a:r>
-            <a:endParaRPr lang="en-US" sz="470" dirty="0"/>
-          </a:p>
-        </p:txBody>
-      </p:sp>
-      <p:sp>
-        <p:nvSpPr>
-          <p:cNvPr id="225" name="Shape 203"/>
-          <p:cNvSpPr/>
-          <p:nvPr/>
-        </p:nvSpPr>
-        <p:spPr>
-          <a:xfrm>
-            <a:off x="2435962" y="2094890"/>
-            <a:ext cx="495605" cy="178308"/>
+            <a:endParaRPr lang="en-US" sz="410" dirty="0"/>
+          </a:p>
+        </p:txBody>
+      </p:sp>
+      <p:sp>
+        <p:nvSpPr>
+          <p:cNvPr id="227" name="Shape 205"/>
+          <p:cNvSpPr/>
+          <p:nvPr/>
+        </p:nvSpPr>
+        <p:spPr>
+          <a:xfrm>
+            <a:off x="2435962" y="2080260"/>
+            <a:ext cx="495605" cy="208483"/>
           </a:xfrm>
           <a:prstGeom prst="roundRect">
             <a:avLst>
-              <a:gd name="adj" fmla="val 25641"/>
+              <a:gd name="adj" fmla="val 21930"/>
             </a:avLst>
           </a:prstGeom>
           <a:solidFill>
@@ -25818,35 +25782,33 @@
       </p:sp>
       <p:sp>
         <p:nvSpPr>
-          <p:cNvPr id="226" name="Text 204"/>
-          <p:cNvSpPr/>
-          <p:nvPr/>
-        </p:nvSpPr>
-        <p:spPr>
-          <a:xfrm>
-            <a:off x="2454250" y="2104034"/>
-            <a:ext cx="459029" cy="160020"/>
-          </a:xfrm>
-          <a:prstGeom prst="rect">
-            <a:avLst/>
-          </a:prstGeom>
-          <a:noFill/>
-          <a:ln/>
-        </p:spPr>
-        <p:txBody>
-          <a:bodyPr wrap="square" lIns="0" tIns="0" rIns="0" bIns="0" rtlCol="0" anchor="ctr">
-            <a:normAutofit/>
-          </a:bodyPr>
+          <p:cNvPr id="228" name="Text 206"/>
+          <p:cNvSpPr/>
+          <p:nvPr/>
+        </p:nvSpPr>
+        <p:spPr>
+          <a:xfrm>
+            <a:off x="2456078" y="2089404"/>
+            <a:ext cx="455371" cy="190195"/>
+          </a:xfrm>
+          <a:prstGeom prst="rect">
+            <a:avLst/>
+          </a:prstGeom>
+          <a:noFill/>
+          <a:ln/>
+        </p:spPr>
+        <p:txBody>
+          <a:bodyPr wrap="square" lIns="0" tIns="0" rIns="0" bIns="0" rtlCol="0" anchor="ctr"/>
           <a:lstStyle/>
           <a:p>
             <a:pPr algn="ctr" indent="0" marL="0">
               <a:lnSpc>
-                <a:spcPct val="86000"/>
+                <a:spcPct val="102000"/>
               </a:lnSpc>
               <a:buNone/>
             </a:pPr>
             <a:r>
-              <a:rPr lang="en-US" sz="470" b="1" dirty="0">
+              <a:rPr lang="en-US" sz="410" b="1" dirty="0">
                 <a:solidFill>
                   <a:srgbClr val="202124"/>
                 </a:solidFill>
@@ -25856,17 +25818,17 @@
               </a:rPr>
               <a:t>Verify client</a:t>
             </a:r>
-            <a:endParaRPr lang="en-US" sz="470" dirty="0"/>
+            <a:endParaRPr lang="en-US" sz="410" dirty="0"/>
           </a:p>
           <a:p>
             <a:pPr algn="ctr" indent="0" marL="0">
               <a:lnSpc>
-                <a:spcPct val="86000"/>
+                <a:spcPct val="102000"/>
               </a:lnSpc>
               <a:buNone/>
             </a:pPr>
             <a:r>
-              <a:rPr lang="en-US" sz="410" dirty="0">
+              <a:rPr lang="en-US" sz="375" dirty="0">
                 <a:solidFill>
                   <a:srgbClr val="202124"/>
                 </a:solidFill>
@@ -25876,24 +25838,24 @@
               </a:rPr>
               <a:t>SPIFFE SAN</a:t>
             </a:r>
-            <a:endParaRPr lang="en-US" sz="470" dirty="0"/>
-          </a:p>
-        </p:txBody>
-      </p:sp>
-      <p:sp>
-        <p:nvSpPr>
-          <p:cNvPr id="227" name="Shape 205"/>
-          <p:cNvSpPr/>
-          <p:nvPr/>
-        </p:nvSpPr>
-        <p:spPr>
-          <a:xfrm>
-            <a:off x="2436876" y="2639873"/>
-            <a:ext cx="493776" cy="178308"/>
+            <a:endParaRPr lang="en-US" sz="410" dirty="0"/>
+          </a:p>
+        </p:txBody>
+      </p:sp>
+      <p:sp>
+        <p:nvSpPr>
+          <p:cNvPr id="229" name="Shape 207"/>
+          <p:cNvSpPr/>
+          <p:nvPr/>
+        </p:nvSpPr>
+        <p:spPr>
+          <a:xfrm>
+            <a:off x="2498141" y="2625242"/>
+            <a:ext cx="370332" cy="208483"/>
           </a:xfrm>
           <a:prstGeom prst="roundRect">
             <a:avLst>
-              <a:gd name="adj" fmla="val 25641"/>
+              <a:gd name="adj" fmla="val 21930"/>
             </a:avLst>
           </a:prstGeom>
           <a:solidFill>
@@ -25909,35 +25871,33 @@
       </p:sp>
       <p:sp>
         <p:nvSpPr>
-          <p:cNvPr id="228" name="Text 206"/>
-          <p:cNvSpPr/>
-          <p:nvPr/>
-        </p:nvSpPr>
-        <p:spPr>
-          <a:xfrm>
-            <a:off x="2455164" y="2649017"/>
-            <a:ext cx="457200" cy="160020"/>
-          </a:xfrm>
-          <a:prstGeom prst="rect">
-            <a:avLst/>
-          </a:prstGeom>
-          <a:noFill/>
-          <a:ln/>
-        </p:spPr>
-        <p:txBody>
-          <a:bodyPr wrap="square" lIns="0" tIns="0" rIns="0" bIns="0" rtlCol="0" anchor="ctr">
-            <a:normAutofit/>
-          </a:bodyPr>
+          <p:cNvPr id="230" name="Text 208"/>
+          <p:cNvSpPr/>
+          <p:nvPr/>
+        </p:nvSpPr>
+        <p:spPr>
+          <a:xfrm>
+            <a:off x="2518258" y="2634386"/>
+            <a:ext cx="330098" cy="190195"/>
+          </a:xfrm>
+          <a:prstGeom prst="rect">
+            <a:avLst/>
+          </a:prstGeom>
+          <a:noFill/>
+          <a:ln/>
+        </p:spPr>
+        <p:txBody>
+          <a:bodyPr wrap="square" lIns="0" tIns="0" rIns="0" bIns="0" rtlCol="0" anchor="ctr"/>
           <a:lstStyle/>
           <a:p>
             <a:pPr algn="ctr" indent="0" marL="0">
               <a:lnSpc>
-                <a:spcPct val="86000"/>
+                <a:spcPct val="102000"/>
               </a:lnSpc>
               <a:buNone/>
             </a:pPr>
             <a:r>
-              <a:rPr lang="en-US" sz="470" b="1" dirty="0">
+              <a:rPr lang="en-US" sz="410" b="1" dirty="0">
                 <a:solidFill>
                   <a:srgbClr val="202124"/>
                 </a:solidFill>
@@ -25947,17 +25907,17 @@
               </a:rPr>
               <a:t>Sanitize</a:t>
             </a:r>
-            <a:endParaRPr lang="en-US" sz="470" dirty="0"/>
+            <a:endParaRPr lang="en-US" sz="410" dirty="0"/>
           </a:p>
           <a:p>
             <a:pPr algn="ctr" indent="0" marL="0">
               <a:lnSpc>
-                <a:spcPct val="86000"/>
+                <a:spcPct val="102000"/>
               </a:lnSpc>
               <a:buNone/>
             </a:pPr>
             <a:r>
-              <a:rPr lang="en-US" sz="410" dirty="0">
+              <a:rPr lang="en-US" sz="375" dirty="0">
                 <a:solidFill>
                   <a:srgbClr val="202124"/>
                 </a:solidFill>
@@ -25967,24 +25927,24 @@
               </a:rPr>
               <a:t>prompt</a:t>
             </a:r>
-            <a:endParaRPr lang="en-US" sz="470" dirty="0"/>
-          </a:p>
-        </p:txBody>
-      </p:sp>
-      <p:sp>
-        <p:nvSpPr>
-          <p:cNvPr id="229" name="Shape 207"/>
-          <p:cNvSpPr/>
-          <p:nvPr/>
-        </p:nvSpPr>
-        <p:spPr>
-          <a:xfrm>
-            <a:off x="3862426" y="1148486"/>
-            <a:ext cx="493776" cy="132588"/>
+            <a:endParaRPr lang="en-US" sz="410" dirty="0"/>
+          </a:p>
+        </p:txBody>
+      </p:sp>
+      <p:sp>
+        <p:nvSpPr>
+          <p:cNvPr id="231" name="Shape 209"/>
+          <p:cNvSpPr/>
+          <p:nvPr/>
+        </p:nvSpPr>
+        <p:spPr>
+          <a:xfrm>
+            <a:off x="3888029" y="1144829"/>
+            <a:ext cx="443484" cy="138989"/>
           </a:xfrm>
           <a:prstGeom prst="roundRect">
             <a:avLst>
-              <a:gd name="adj" fmla="val 34483"/>
+              <a:gd name="adj" fmla="val 32895"/>
             </a:avLst>
           </a:prstGeom>
           <a:solidFill>
@@ -26000,35 +25960,33 @@
       </p:sp>
       <p:sp>
         <p:nvSpPr>
-          <p:cNvPr id="230" name="Text 208"/>
-          <p:cNvSpPr/>
-          <p:nvPr/>
-        </p:nvSpPr>
-        <p:spPr>
-          <a:xfrm>
-            <a:off x="3880714" y="1157630"/>
-            <a:ext cx="457200" cy="114300"/>
-          </a:xfrm>
-          <a:prstGeom prst="rect">
-            <a:avLst/>
-          </a:prstGeom>
-          <a:noFill/>
-          <a:ln/>
-        </p:spPr>
-        <p:txBody>
-          <a:bodyPr wrap="square" lIns="0" tIns="0" rIns="0" bIns="0" rtlCol="0" anchor="ctr">
-            <a:normAutofit/>
-          </a:bodyPr>
+          <p:cNvPr id="232" name="Text 210"/>
+          <p:cNvSpPr/>
+          <p:nvPr/>
+        </p:nvSpPr>
+        <p:spPr>
+          <a:xfrm>
+            <a:off x="3908146" y="1153973"/>
+            <a:ext cx="403250" cy="120701"/>
+          </a:xfrm>
+          <a:prstGeom prst="rect">
+            <a:avLst/>
+          </a:prstGeom>
+          <a:noFill/>
+          <a:ln/>
+        </p:spPr>
+        <p:txBody>
+          <a:bodyPr wrap="square" lIns="0" tIns="0" rIns="0" bIns="0" rtlCol="0" anchor="ctr"/>
           <a:lstStyle/>
           <a:p>
             <a:pPr algn="ctr" indent="0" marL="0">
               <a:lnSpc>
-                <a:spcPct val="86000"/>
+                <a:spcPct val="102000"/>
               </a:lnSpc>
               <a:buNone/>
             </a:pPr>
             <a:r>
-              <a:rPr lang="en-US" sz="470" b="1" dirty="0">
+              <a:rPr lang="en-US" sz="410" b="1" dirty="0">
                 <a:solidFill>
                   <a:srgbClr val="202124"/>
                 </a:solidFill>
@@ -26038,24 +25996,24 @@
               </a:rPr>
               <a:t>Silo Response</a:t>
             </a:r>
-            <a:endParaRPr lang="en-US" sz="470" dirty="0"/>
-          </a:p>
-        </p:txBody>
-      </p:sp>
-      <p:sp>
-        <p:nvSpPr>
-          <p:cNvPr id="231" name="Shape 209"/>
-          <p:cNvSpPr/>
-          <p:nvPr/>
-        </p:nvSpPr>
-        <p:spPr>
-          <a:xfrm>
-            <a:off x="3862426" y="2725826"/>
-            <a:ext cx="493776" cy="132588"/>
+            <a:endParaRPr lang="en-US" sz="410" dirty="0"/>
+          </a:p>
+        </p:txBody>
+      </p:sp>
+      <p:sp>
+        <p:nvSpPr>
+          <p:cNvPr id="233" name="Shape 211"/>
+          <p:cNvSpPr/>
+          <p:nvPr/>
+        </p:nvSpPr>
+        <p:spPr>
+          <a:xfrm>
+            <a:off x="3888029" y="2723083"/>
+            <a:ext cx="397764" cy="138989"/>
           </a:xfrm>
           <a:prstGeom prst="roundRect">
             <a:avLst>
-              <a:gd name="adj" fmla="val 34483"/>
+              <a:gd name="adj" fmla="val 32895"/>
             </a:avLst>
           </a:prstGeom>
           <a:solidFill>
@@ -26071,35 +26029,33 @@
       </p:sp>
       <p:sp>
         <p:nvSpPr>
-          <p:cNvPr id="232" name="Text 210"/>
-          <p:cNvSpPr/>
-          <p:nvPr/>
-        </p:nvSpPr>
-        <p:spPr>
-          <a:xfrm>
-            <a:off x="3880714" y="2734970"/>
-            <a:ext cx="457200" cy="114300"/>
-          </a:xfrm>
-          <a:prstGeom prst="rect">
-            <a:avLst/>
-          </a:prstGeom>
-          <a:noFill/>
-          <a:ln/>
-        </p:spPr>
-        <p:txBody>
-          <a:bodyPr wrap="square" lIns="0" tIns="0" rIns="0" bIns="0" rtlCol="0" anchor="ctr">
-            <a:normAutofit/>
-          </a:bodyPr>
+          <p:cNvPr id="234" name="Text 212"/>
+          <p:cNvSpPr/>
+          <p:nvPr/>
+        </p:nvSpPr>
+        <p:spPr>
+          <a:xfrm>
+            <a:off x="3908146" y="2732227"/>
+            <a:ext cx="357530" cy="120701"/>
+          </a:xfrm>
+          <a:prstGeom prst="rect">
+            <a:avLst/>
+          </a:prstGeom>
+          <a:noFill/>
+          <a:ln/>
+        </p:spPr>
+        <p:txBody>
+          <a:bodyPr wrap="square" lIns="0" tIns="0" rIns="0" bIns="0" rtlCol="0" anchor="ctr"/>
           <a:lstStyle/>
           <a:p>
             <a:pPr algn="ctr" indent="0" marL="0">
               <a:lnSpc>
-                <a:spcPct val="86000"/>
+                <a:spcPct val="102000"/>
               </a:lnSpc>
               <a:buNone/>
             </a:pPr>
             <a:r>
-              <a:rPr lang="en-US" sz="470" b="1" dirty="0">
+              <a:rPr lang="en-US" sz="410" b="1" dirty="0">
                 <a:solidFill>
                   <a:srgbClr val="202124"/>
                 </a:solidFill>
@@ -26109,24 +26065,24 @@
               </a:rPr>
               <a:t>200 / 423</a:t>
             </a:r>
-            <a:endParaRPr lang="en-US" sz="470" dirty="0"/>
-          </a:p>
-        </p:txBody>
-      </p:sp>
-      <p:sp>
-        <p:nvSpPr>
-          <p:cNvPr id="233" name="Shape 211"/>
-          <p:cNvSpPr/>
-          <p:nvPr/>
-        </p:nvSpPr>
-        <p:spPr>
-          <a:xfrm>
-            <a:off x="3040380" y="1148486"/>
-            <a:ext cx="493776" cy="132588"/>
+            <a:endParaRPr lang="en-US" sz="410" dirty="0"/>
+          </a:p>
+        </p:txBody>
+      </p:sp>
+      <p:sp>
+        <p:nvSpPr>
+          <p:cNvPr id="235" name="Shape 213"/>
+          <p:cNvSpPr/>
+          <p:nvPr/>
+        </p:nvSpPr>
+        <p:spPr>
+          <a:xfrm>
+            <a:off x="3080614" y="1144829"/>
+            <a:ext cx="406908" cy="138989"/>
           </a:xfrm>
           <a:prstGeom prst="roundRect">
             <a:avLst>
-              <a:gd name="adj" fmla="val 34483"/>
+              <a:gd name="adj" fmla="val 32895"/>
             </a:avLst>
           </a:prstGeom>
           <a:solidFill>
@@ -26142,35 +26098,33 @@
       </p:sp>
       <p:sp>
         <p:nvSpPr>
-          <p:cNvPr id="234" name="Text 212"/>
-          <p:cNvSpPr/>
-          <p:nvPr/>
-        </p:nvSpPr>
-        <p:spPr>
-          <a:xfrm>
-            <a:off x="3058668" y="1157630"/>
-            <a:ext cx="457200" cy="114300"/>
-          </a:xfrm>
-          <a:prstGeom prst="rect">
-            <a:avLst/>
-          </a:prstGeom>
-          <a:noFill/>
-          <a:ln/>
-        </p:spPr>
-        <p:txBody>
-          <a:bodyPr wrap="square" lIns="0" tIns="0" rIns="0" bIns="0" rtlCol="0" anchor="ctr">
-            <a:normAutofit/>
-          </a:bodyPr>
+          <p:cNvPr id="236" name="Text 214"/>
+          <p:cNvSpPr/>
+          <p:nvPr/>
+        </p:nvSpPr>
+        <p:spPr>
+          <a:xfrm>
+            <a:off x="3100730" y="1153973"/>
+            <a:ext cx="366674" cy="120701"/>
+          </a:xfrm>
+          <a:prstGeom prst="rect">
+            <a:avLst/>
+          </a:prstGeom>
+          <a:noFill/>
+          <a:ln/>
+        </p:spPr>
+        <p:txBody>
+          <a:bodyPr wrap="square" lIns="0" tIns="0" rIns="0" bIns="0" rtlCol="0" anchor="ctr"/>
           <a:lstStyle/>
           <a:p>
             <a:pPr algn="ctr" indent="0" marL="0">
               <a:lnSpc>
-                <a:spcPct val="86000"/>
+                <a:spcPct val="102000"/>
               </a:lnSpc>
               <a:buNone/>
             </a:pPr>
             <a:r>
-              <a:rPr lang="en-US" sz="470" b="1" dirty="0">
+              <a:rPr lang="en-US" sz="410" b="1" dirty="0">
                 <a:solidFill>
                   <a:srgbClr val="202124"/>
                 </a:solidFill>
@@ -26180,24 +26134,24 @@
               </a:rPr>
               <a:t>mTLS Request</a:t>
             </a:r>
-            <a:endParaRPr lang="en-US" sz="470" dirty="0"/>
-          </a:p>
-        </p:txBody>
-      </p:sp>
-      <p:sp>
-        <p:nvSpPr>
-          <p:cNvPr id="235" name="Shape 213"/>
-          <p:cNvSpPr/>
-          <p:nvPr/>
-        </p:nvSpPr>
-        <p:spPr>
-          <a:xfrm>
-            <a:off x="3040380" y="2725826"/>
-            <a:ext cx="493776" cy="132588"/>
+            <a:endParaRPr lang="en-US" sz="410" dirty="0"/>
+          </a:p>
+        </p:txBody>
+      </p:sp>
+      <p:sp>
+        <p:nvSpPr>
+          <p:cNvPr id="237" name="Shape 215"/>
+          <p:cNvSpPr/>
+          <p:nvPr/>
+        </p:nvSpPr>
+        <p:spPr>
+          <a:xfrm>
+            <a:off x="3087929" y="2723083"/>
+            <a:ext cx="399593" cy="138989"/>
           </a:xfrm>
           <a:prstGeom prst="roundRect">
             <a:avLst>
-              <a:gd name="adj" fmla="val 34483"/>
+              <a:gd name="adj" fmla="val 32895"/>
             </a:avLst>
           </a:prstGeom>
           <a:solidFill>
@@ -26213,35 +26167,33 @@
       </p:sp>
       <p:sp>
         <p:nvSpPr>
-          <p:cNvPr id="236" name="Text 214"/>
-          <p:cNvSpPr/>
-          <p:nvPr/>
-        </p:nvSpPr>
-        <p:spPr>
-          <a:xfrm>
-            <a:off x="3058668" y="2734970"/>
-            <a:ext cx="457200" cy="114300"/>
-          </a:xfrm>
-          <a:prstGeom prst="rect">
-            <a:avLst/>
-          </a:prstGeom>
-          <a:noFill/>
-          <a:ln/>
-        </p:spPr>
-        <p:txBody>
-          <a:bodyPr wrap="square" lIns="0" tIns="0" rIns="0" bIns="0" rtlCol="0" anchor="ctr">
-            <a:normAutofit/>
-          </a:bodyPr>
+          <p:cNvPr id="238" name="Text 216"/>
+          <p:cNvSpPr/>
+          <p:nvPr/>
+        </p:nvSpPr>
+        <p:spPr>
+          <a:xfrm>
+            <a:off x="3108046" y="2732227"/>
+            <a:ext cx="359359" cy="120701"/>
+          </a:xfrm>
+          <a:prstGeom prst="rect">
+            <a:avLst/>
+          </a:prstGeom>
+          <a:noFill/>
+          <a:ln/>
+        </p:spPr>
+        <p:txBody>
+          <a:bodyPr wrap="square" lIns="0" tIns="0" rIns="0" bIns="0" rtlCol="0" anchor="ctr"/>
           <a:lstStyle/>
           <a:p>
             <a:pPr algn="ctr" indent="0" marL="0">
               <a:lnSpc>
-                <a:spcPct val="86000"/>
+                <a:spcPct val="102000"/>
               </a:lnSpc>
               <a:buNone/>
             </a:pPr>
             <a:r>
-              <a:rPr lang="en-US" sz="470" b="1" dirty="0">
+              <a:rPr lang="en-US" sz="410" b="1" dirty="0">
                 <a:solidFill>
                   <a:srgbClr val="202124"/>
                 </a:solidFill>
@@ -26251,13 +26203,13 @@
               </a:rPr>
               <a:t>mTLS Valid</a:t>
             </a:r>
-            <a:endParaRPr lang="en-US" sz="470" dirty="0"/>
-          </a:p>
-        </p:txBody>
-      </p:sp>
-      <p:sp>
-        <p:nvSpPr>
-          <p:cNvPr id="237" name="Text 215"/>
+            <a:endParaRPr lang="en-US" sz="410" dirty="0"/>
+          </a:p>
+        </p:txBody>
+      </p:sp>
+      <p:sp>
+        <p:nvSpPr>
+          <p:cNvPr id="239" name="Text 217"/>
           <p:cNvSpPr/>
           <p:nvPr/>
         </p:nvSpPr>
@@ -26273,14 +26225,14 @@
           <a:ln/>
         </p:spPr>
         <p:txBody>
-          <a:bodyPr wrap="square" rtlCol="0" anchor="ctr"/>
+          <a:bodyPr wrap="none" rtlCol="0" anchor="ctr"/>
           <a:lstStyle/>
           <a:p>
             <a:pPr algn="l" indent="0" marL="0">
               <a:buNone/>
             </a:pPr>
             <a:r>
-              <a:rPr lang="en-US" sz="780" b="1" dirty="0">
+              <a:rPr lang="en-US" sz="700" b="1" dirty="0">
                 <a:solidFill>
                   <a:srgbClr val="4285F4"/>
                 </a:solidFill>
@@ -26294,7 +26246,7 @@
               <a:buNone/>
             </a:pPr>
             <a:r>
-              <a:rPr lang="en-US" sz="760" dirty="0">
+              <a:rPr lang="en-US" sz="690" dirty="0">
                 <a:solidFill>
                   <a:srgbClr val="5F6368"/>
                 </a:solidFill>
@@ -26302,13 +26254,13 @@
                 <a:ea typeface="Roboto" pitchFamily="34" charset="-122"/>
                 <a:cs typeface="Roboto" pitchFamily="34" charset="-120"/>
               </a:rPr>
-              <a:t>VIS-WS3-PATTERN-B-SOVEREIGN-SILOS-ARCHITECTURE (diagrams/ws3-pattern-b-sovereign-silos-architecture.drawio)  •  100% Native Editable Shapes + 4-Zone Architecture Center Guide  •  </a:t>
+              <a:t>VIS-WS3-PATTERN-B-SOVEREIGN-SILOS-ARCHITECTURE (diagrams/ws3-pattern-b-sovereign-silos-architecture.drawio)  •  100% Native Editable Shapes + 4-Zone Architecture Center…  •  </a:t>
             </a:r>
             <a:pPr algn="l" indent="0" marL="0">
               <a:buNone/>
             </a:pPr>
             <a:r>
-              <a:rPr lang="en-US" sz="780" b="1" dirty="0">
+              <a:rPr lang="en-US" sz="700" b="1" dirty="0">
                 <a:solidFill>
                   <a:srgbClr val="3C4043"/>
                 </a:solidFill>
@@ -26318,7 +26270,7 @@
               </a:rPr>
               <a:t>Proprietary + Confidential</a:t>
             </a:r>
-            <a:endParaRPr lang="en-US" sz="780" dirty="0"/>
+            <a:endParaRPr lang="en-US" sz="700" dirty="0"/>
           </a:p>
         </p:txBody>
       </p:sp>
@@ -29230,7 +29182,7 @@
           <a:ln/>
         </p:spPr>
         <p:txBody>
-          <a:bodyPr wrap="square" rtlCol="0" anchor="ctr"/>
+          <a:bodyPr wrap="none" rtlCol="0" anchor="ctr"/>
           <a:lstStyle/>
           <a:p>
             <a:pPr algn="l" indent="0" marL="0">
@@ -31316,7 +31268,7 @@
           <a:ln/>
         </p:spPr>
         <p:txBody>
-          <a:bodyPr wrap="square" rtlCol="0" anchor="ctr"/>
+          <a:bodyPr wrap="none" rtlCol="0" anchor="ctr"/>
           <a:lstStyle/>
           <a:p>
             <a:pPr algn="l" indent="0" marL="0">
@@ -32824,7 +32776,7 @@
           <a:ln/>
         </p:spPr>
         <p:txBody>
-          <a:bodyPr wrap="square" rtlCol="0" anchor="ctr"/>
+          <a:bodyPr wrap="none" rtlCol="0" anchor="ctr"/>
           <a:lstStyle/>
           <a:p>
             <a:pPr algn="l" indent="0" marL="0">
@@ -35939,7 +35891,7 @@
           <a:ln/>
         </p:spPr>
         <p:txBody>
-          <a:bodyPr wrap="square" rtlCol="0" anchor="ctr"/>
+          <a:bodyPr wrap="none" rtlCol="0" anchor="ctr"/>
           <a:lstStyle/>
           <a:p>
             <a:pPr algn="l" indent="0" marL="0">

--- a/slides/ws3-pattern-b-siloed-editable-slides.pptx
+++ b/slides/ws3-pattern-b-siloed-editable-slides.pptx
@@ -20615,69 +20615,7 @@
       </p:sp>
       <p:sp>
         <p:nvSpPr>
-          <p:cNvPr id="75" name="Text 73"/>
-          <p:cNvSpPr/>
-          <p:nvPr/>
-        </p:nvSpPr>
-        <p:spPr>
-          <a:xfrm>
-            <a:off x="1560881" y="3970325"/>
-            <a:ext cx="1994306" cy="210312"/>
-          </a:xfrm>
-          <a:prstGeom prst="rect">
-            <a:avLst/>
-          </a:prstGeom>
-          <a:noFill/>
-          <a:ln/>
-        </p:spPr>
-        <p:txBody>
-          <a:bodyPr wrap="square" lIns="0" tIns="0" rIns="0" bIns="0" rtlCol="0" anchor="t"/>
-          <a:lstStyle/>
-          <a:p>
-            <a:pPr algn="l" indent="0" marL="0">
-              <a:lnSpc>
-                <a:spcPct val="102000"/>
-              </a:lnSpc>
-              <a:buNone/>
-            </a:pPr>
-            <a:r>
-              <a:rPr lang="en-US" sz="470" b="1" dirty="0">
-                <a:solidFill>
-                  <a:srgbClr val="202124"/>
-                </a:solidFill>
-                <a:latin typeface="Arial" pitchFamily="34" charset="0"/>
-                <a:ea typeface="Arial" pitchFamily="34" charset="-122"/>
-                <a:cs typeface="Arial" pitchFamily="34" charset="-120"/>
-              </a:rPr>
-              <a:t>Tenant A Silo (FinVault Bank)</a:t>
-            </a:r>
-            <a:endParaRPr lang="en-US" sz="470" dirty="0"/>
-          </a:p>
-          <a:p>
-            <a:pPr algn="l" indent="0" marL="0">
-              <a:lnSpc>
-                <a:spcPct val="102000"/>
-              </a:lnSpc>
-              <a:buNone/>
-            </a:pPr>
-            <a:r>
-              <a:rPr lang="en-US" sz="400" dirty="0">
-                <a:solidFill>
-                  <a:srgbClr val="202124"/>
-                </a:solidFill>
-                <a:latin typeface="Arial" pitchFamily="34" charset="0"/>
-                <a:ea typeface="Arial" pitchFamily="34" charset="-122"/>
-                <a:cs typeface="Arial" pitchFamily="34" charset="-120"/>
-              </a:rPr>
-              <a:t>Dedicated Silo • CMEK: finvault-silo-cmek</a:t>
-            </a:r>
-            <a:endParaRPr lang="en-US" sz="470" dirty="0"/>
-          </a:p>
-        </p:txBody>
-      </p:sp>
-      <p:sp>
-        <p:nvSpPr>
-          <p:cNvPr id="76" name="Shape 74"/>
+          <p:cNvPr id="75" name="Shape 73"/>
           <p:cNvSpPr/>
           <p:nvPr/>
         </p:nvSpPr>
@@ -20704,69 +20642,7 @@
       </p:sp>
       <p:sp>
         <p:nvSpPr>
-          <p:cNvPr id="77" name="Text 75"/>
-          <p:cNvSpPr/>
-          <p:nvPr/>
-        </p:nvSpPr>
-        <p:spPr>
-          <a:xfrm>
-            <a:off x="3925519" y="3970325"/>
-            <a:ext cx="1994306" cy="210312"/>
-          </a:xfrm>
-          <a:prstGeom prst="rect">
-            <a:avLst/>
-          </a:prstGeom>
-          <a:noFill/>
-          <a:ln/>
-        </p:spPr>
-        <p:txBody>
-          <a:bodyPr wrap="square" lIns="0" tIns="0" rIns="0" bIns="0" rtlCol="0" anchor="t"/>
-          <a:lstStyle/>
-          <a:p>
-            <a:pPr algn="l" indent="0" marL="0">
-              <a:lnSpc>
-                <a:spcPct val="102000"/>
-              </a:lnSpc>
-              <a:buNone/>
-            </a:pPr>
-            <a:r>
-              <a:rPr lang="en-US" sz="470" b="1" dirty="0">
-                <a:solidFill>
-                  <a:srgbClr val="202124"/>
-                </a:solidFill>
-                <a:latin typeface="Arial" pitchFamily="34" charset="0"/>
-                <a:ea typeface="Arial" pitchFamily="34" charset="-122"/>
-                <a:cs typeface="Arial" pitchFamily="34" charset="-120"/>
-              </a:rPr>
-              <a:t>Tenant B Silo (RetailStream Corp)</a:t>
-            </a:r>
-            <a:endParaRPr lang="en-US" sz="470" dirty="0"/>
-          </a:p>
-          <a:p>
-            <a:pPr algn="l" indent="0" marL="0">
-              <a:lnSpc>
-                <a:spcPct val="102000"/>
-              </a:lnSpc>
-              <a:buNone/>
-            </a:pPr>
-            <a:r>
-              <a:rPr lang="en-US" sz="400" dirty="0">
-                <a:solidFill>
-                  <a:srgbClr val="202124"/>
-                </a:solidFill>
-                <a:latin typeface="Arial" pitchFamily="34" charset="0"/>
-                <a:ea typeface="Arial" pitchFamily="34" charset="-122"/>
-                <a:cs typeface="Arial" pitchFamily="34" charset="-120"/>
-              </a:rPr>
-              <a:t>Dedicated Silo • CMEK: retailstream-silo-cmek</a:t>
-            </a:r>
-            <a:endParaRPr lang="en-US" sz="470" dirty="0"/>
-          </a:p>
-        </p:txBody>
-      </p:sp>
-      <p:sp>
-        <p:nvSpPr>
-          <p:cNvPr id="78" name="Shape 76"/>
+          <p:cNvPr id="76" name="Shape 74"/>
           <p:cNvSpPr/>
           <p:nvPr/>
         </p:nvSpPr>
@@ -20793,69 +20669,7 @@
       </p:sp>
       <p:sp>
         <p:nvSpPr>
-          <p:cNvPr id="79" name="Text 77"/>
-          <p:cNvSpPr/>
-          <p:nvPr/>
-        </p:nvSpPr>
-        <p:spPr>
-          <a:xfrm>
-            <a:off x="1482242" y="1926641"/>
-            <a:ext cx="1901952" cy="210312"/>
-          </a:xfrm>
-          <a:prstGeom prst="rect">
-            <a:avLst/>
-          </a:prstGeom>
-          <a:noFill/>
-          <a:ln/>
-        </p:spPr>
-        <p:txBody>
-          <a:bodyPr wrap="square" lIns="0" tIns="0" rIns="0" bIns="0" rtlCol="0" anchor="t"/>
-          <a:lstStyle/>
-          <a:p>
-            <a:pPr algn="l" indent="0" marL="0">
-              <a:lnSpc>
-                <a:spcPct val="102000"/>
-              </a:lnSpc>
-              <a:buNone/>
-            </a:pPr>
-            <a:r>
-              <a:rPr lang="en-US" sz="470" b="1" dirty="0">
-                <a:solidFill>
-                  <a:srgbClr val="202124"/>
-                </a:solidFill>
-                <a:latin typeface="Arial" pitchFamily="34" charset="0"/>
-                <a:ea typeface="Arial" pitchFamily="34" charset="-122"/>
-                <a:cs typeface="Arial" pitchFamily="34" charset="-120"/>
-              </a:rPr>
-              <a:t>Central mTLS &amp; SPIFFE Routing Hub</a:t>
-            </a:r>
-            <a:endParaRPr lang="en-US" sz="470" dirty="0"/>
-          </a:p>
-          <a:p>
-            <a:pPr algn="l" indent="0" marL="0">
-              <a:lnSpc>
-                <a:spcPct val="102000"/>
-              </a:lnSpc>
-              <a:buNone/>
-            </a:pPr>
-            <a:r>
-              <a:rPr lang="en-US" sz="400" dirty="0">
-                <a:solidFill>
-                  <a:srgbClr val="202124"/>
-                </a:solidFill>
-                <a:latin typeface="Arial" pitchFamily="34" charset="0"/>
-                <a:ea typeface="Arial" pitchFamily="34" charset="-122"/>
-                <a:cs typeface="Arial" pitchFamily="34" charset="-120"/>
-              </a:rPr>
-              <a:t>Client certificate pinning (HTTP 401 on SAN mismatch)</a:t>
-            </a:r>
-            <a:endParaRPr lang="en-US" sz="470" dirty="0"/>
-          </a:p>
-        </p:txBody>
-      </p:sp>
-      <p:sp>
-        <p:nvSpPr>
-          <p:cNvPr id="80" name="Shape 78"/>
+          <p:cNvPr id="77" name="Shape 75"/>
           <p:cNvSpPr/>
           <p:nvPr/>
         </p:nvSpPr>
@@ -20880,51 +20694,9 @@
           </a:ln>
         </p:spPr>
       </p:sp>
-      <p:sp>
-        <p:nvSpPr>
-          <p:cNvPr id="81" name="Text 79"/>
-          <p:cNvSpPr/>
-          <p:nvPr/>
-        </p:nvSpPr>
-        <p:spPr>
-          <a:xfrm>
-            <a:off x="4655210" y="1961388"/>
-            <a:ext cx="1315822" cy="210312"/>
-          </a:xfrm>
-          <a:prstGeom prst="rect">
-            <a:avLst/>
-          </a:prstGeom>
-          <a:noFill/>
-          <a:ln/>
-        </p:spPr>
-        <p:txBody>
-          <a:bodyPr wrap="square" lIns="0" tIns="0" rIns="0" bIns="0" rtlCol="0" anchor="t"/>
-          <a:lstStyle/>
-          <a:p>
-            <a:pPr algn="l" indent="0" marL="0">
-              <a:lnSpc>
-                <a:spcPct val="102000"/>
-              </a:lnSpc>
-              <a:buNone/>
-            </a:pPr>
-            <a:r>
-              <a:rPr lang="en-US" sz="430" b="1" dirty="0">
-                <a:solidFill>
-                  <a:srgbClr val="202124"/>
-                </a:solidFill>
-                <a:latin typeface="Arial" pitchFamily="34" charset="0"/>
-                <a:ea typeface="Arial" pitchFamily="34" charset="-122"/>
-                <a:cs typeface="Arial" pitchFamily="34" charset="-120"/>
-              </a:rPr>
-              <a:t>Cloud KMS CMEK &amp; Sovereign Security Hub</a:t>
-            </a:r>
-            <a:endParaRPr lang="en-US" sz="430" dirty="0"/>
-          </a:p>
-        </p:txBody>
-      </p:sp>
       <p:pic>
         <p:nvPicPr>
-          <p:cNvPr id="82" name="Image 0" descr="preencoded.png">    </p:cNvPr>
+          <p:cNvPr id="78" name="Image 0" descr="preencoded.png">    </p:cNvPr>
           <p:cNvPicPr>
             <a:picLocks noChangeAspect="1"/>
           </p:cNvPicPr>
@@ -20948,7 +20720,7 @@
       </p:pic>
       <p:sp>
         <p:nvSpPr>
-          <p:cNvPr id="83" name="Shape 80"/>
+          <p:cNvPr id="79" name="Shape 76"/>
           <p:cNvSpPr/>
           <p:nvPr/>
         </p:nvSpPr>
@@ -20972,7 +20744,7 @@
       </p:sp>
       <p:sp>
         <p:nvSpPr>
-          <p:cNvPr id="84" name="Shape 81"/>
+          <p:cNvPr id="80" name="Shape 77"/>
           <p:cNvSpPr/>
           <p:nvPr/>
         </p:nvSpPr>
@@ -20996,7 +20768,7 @@
       </p:sp>
       <p:sp>
         <p:nvSpPr>
-          <p:cNvPr id="85" name="Shape 82"/>
+          <p:cNvPr id="81" name="Shape 78"/>
           <p:cNvSpPr/>
           <p:nvPr/>
         </p:nvSpPr>
@@ -21020,7 +20792,7 @@
       </p:sp>
       <p:sp>
         <p:nvSpPr>
-          <p:cNvPr id="86" name="Shape 83"/>
+          <p:cNvPr id="82" name="Shape 79"/>
           <p:cNvSpPr/>
           <p:nvPr/>
         </p:nvSpPr>
@@ -21043,7 +20815,7 @@
       </p:sp>
       <p:sp>
         <p:nvSpPr>
-          <p:cNvPr id="87" name="Shape 84"/>
+          <p:cNvPr id="83" name="Shape 80"/>
           <p:cNvSpPr/>
           <p:nvPr/>
         </p:nvSpPr>
@@ -21067,7 +20839,7 @@
       </p:sp>
       <p:sp>
         <p:nvSpPr>
-          <p:cNvPr id="88" name="Shape 85"/>
+          <p:cNvPr id="84" name="Shape 81"/>
           <p:cNvSpPr/>
           <p:nvPr/>
         </p:nvSpPr>
@@ -21091,7 +20863,7 @@
       </p:sp>
       <p:sp>
         <p:nvSpPr>
-          <p:cNvPr id="89" name="Shape 86"/>
+          <p:cNvPr id="85" name="Shape 82"/>
           <p:cNvSpPr/>
           <p:nvPr/>
         </p:nvSpPr>
@@ -21114,7 +20886,7 @@
       </p:sp>
       <p:sp>
         <p:nvSpPr>
-          <p:cNvPr id="90" name="Shape 87"/>
+          <p:cNvPr id="86" name="Shape 83"/>
           <p:cNvSpPr/>
           <p:nvPr/>
         </p:nvSpPr>
@@ -21138,7 +20910,7 @@
       </p:sp>
       <p:sp>
         <p:nvSpPr>
-          <p:cNvPr id="91" name="Shape 88"/>
+          <p:cNvPr id="87" name="Shape 84"/>
           <p:cNvSpPr/>
           <p:nvPr/>
         </p:nvSpPr>
@@ -21163,7 +20935,7 @@
       </p:sp>
       <p:sp>
         <p:nvSpPr>
-          <p:cNvPr id="92" name="Shape 89"/>
+          <p:cNvPr id="88" name="Shape 85"/>
           <p:cNvSpPr/>
           <p:nvPr/>
         </p:nvSpPr>
@@ -21187,7 +20959,7 @@
       </p:sp>
       <p:sp>
         <p:nvSpPr>
-          <p:cNvPr id="93" name="Shape 90"/>
+          <p:cNvPr id="89" name="Shape 86"/>
           <p:cNvSpPr/>
           <p:nvPr/>
         </p:nvSpPr>
@@ -21211,7 +20983,7 @@
       </p:sp>
       <p:sp>
         <p:nvSpPr>
-          <p:cNvPr id="94" name="Shape 91"/>
+          <p:cNvPr id="90" name="Shape 87"/>
           <p:cNvSpPr/>
           <p:nvPr/>
         </p:nvSpPr>
@@ -21234,7 +21006,7 @@
       </p:sp>
       <p:sp>
         <p:nvSpPr>
-          <p:cNvPr id="95" name="Shape 92"/>
+          <p:cNvPr id="91" name="Shape 88"/>
           <p:cNvSpPr/>
           <p:nvPr/>
         </p:nvSpPr>
@@ -21257,7 +21029,7 @@
       </p:sp>
       <p:sp>
         <p:nvSpPr>
-          <p:cNvPr id="96" name="Shape 93"/>
+          <p:cNvPr id="92" name="Shape 89"/>
           <p:cNvSpPr/>
           <p:nvPr/>
         </p:nvSpPr>
@@ -21281,7 +21053,7 @@
       </p:sp>
       <p:sp>
         <p:nvSpPr>
-          <p:cNvPr id="97" name="Shape 94"/>
+          <p:cNvPr id="93" name="Shape 90"/>
           <p:cNvSpPr/>
           <p:nvPr/>
         </p:nvSpPr>
@@ -21305,7 +21077,7 @@
       </p:sp>
       <p:sp>
         <p:nvSpPr>
-          <p:cNvPr id="98" name="Shape 95"/>
+          <p:cNvPr id="94" name="Shape 91"/>
           <p:cNvSpPr/>
           <p:nvPr/>
         </p:nvSpPr>
@@ -21328,7 +21100,7 @@
       </p:sp>
       <p:sp>
         <p:nvSpPr>
-          <p:cNvPr id="99" name="Shape 96"/>
+          <p:cNvPr id="95" name="Shape 92"/>
           <p:cNvSpPr/>
           <p:nvPr/>
         </p:nvSpPr>
@@ -21352,7 +21124,7 @@
       </p:sp>
       <p:sp>
         <p:nvSpPr>
-          <p:cNvPr id="100" name="Shape 97"/>
+          <p:cNvPr id="96" name="Shape 93"/>
           <p:cNvSpPr/>
           <p:nvPr/>
         </p:nvSpPr>
@@ -21376,7 +21148,7 @@
       </p:sp>
       <p:sp>
         <p:nvSpPr>
-          <p:cNvPr id="101" name="Shape 98"/>
+          <p:cNvPr id="97" name="Shape 94"/>
           <p:cNvSpPr/>
           <p:nvPr/>
         </p:nvSpPr>
@@ -21399,7 +21171,7 @@
       </p:sp>
       <p:sp>
         <p:nvSpPr>
-          <p:cNvPr id="102" name="Shape 99"/>
+          <p:cNvPr id="98" name="Shape 95"/>
           <p:cNvSpPr/>
           <p:nvPr/>
         </p:nvSpPr>
@@ -21423,7 +21195,7 @@
       </p:sp>
       <p:sp>
         <p:nvSpPr>
-          <p:cNvPr id="103" name="Shape 100"/>
+          <p:cNvPr id="99" name="Shape 96"/>
           <p:cNvSpPr/>
           <p:nvPr/>
         </p:nvSpPr>
@@ -21446,7 +21218,7 @@
       </p:sp>
       <p:sp>
         <p:nvSpPr>
-          <p:cNvPr id="104" name="Shape 101"/>
+          <p:cNvPr id="100" name="Shape 97"/>
           <p:cNvSpPr/>
           <p:nvPr/>
         </p:nvSpPr>
@@ -21469,7 +21241,7 @@
       </p:sp>
       <p:sp>
         <p:nvSpPr>
-          <p:cNvPr id="105" name="Shape 102"/>
+          <p:cNvPr id="101" name="Shape 98"/>
           <p:cNvSpPr/>
           <p:nvPr/>
         </p:nvSpPr>
@@ -21493,7 +21265,7 @@
       </p:sp>
       <p:sp>
         <p:nvSpPr>
-          <p:cNvPr id="106" name="Shape 103"/>
+          <p:cNvPr id="102" name="Shape 99"/>
           <p:cNvSpPr/>
           <p:nvPr/>
         </p:nvSpPr>
@@ -21517,7 +21289,7 @@
       </p:sp>
       <p:sp>
         <p:nvSpPr>
-          <p:cNvPr id="107" name="Shape 104"/>
+          <p:cNvPr id="103" name="Shape 100"/>
           <p:cNvSpPr/>
           <p:nvPr/>
         </p:nvSpPr>
@@ -21540,7 +21312,7 @@
       </p:sp>
       <p:sp>
         <p:nvSpPr>
-          <p:cNvPr id="108" name="Shape 105"/>
+          <p:cNvPr id="104" name="Shape 101"/>
           <p:cNvSpPr/>
           <p:nvPr/>
         </p:nvSpPr>
@@ -21564,7 +21336,7 @@
       </p:sp>
       <p:sp>
         <p:nvSpPr>
-          <p:cNvPr id="109" name="Shape 106"/>
+          <p:cNvPr id="105" name="Shape 102"/>
           <p:cNvSpPr/>
           <p:nvPr/>
         </p:nvSpPr>
@@ -21588,7 +21360,7 @@
       </p:sp>
       <p:sp>
         <p:nvSpPr>
-          <p:cNvPr id="110" name="Shape 107"/>
+          <p:cNvPr id="106" name="Shape 103"/>
           <p:cNvSpPr/>
           <p:nvPr/>
         </p:nvSpPr>
@@ -21611,7 +21383,7 @@
       </p:sp>
       <p:sp>
         <p:nvSpPr>
-          <p:cNvPr id="111" name="Shape 108"/>
+          <p:cNvPr id="107" name="Shape 104"/>
           <p:cNvSpPr/>
           <p:nvPr/>
         </p:nvSpPr>
@@ -21635,7 +21407,7 @@
       </p:sp>
       <p:sp>
         <p:nvSpPr>
-          <p:cNvPr id="112" name="Shape 109"/>
+          <p:cNvPr id="108" name="Shape 105"/>
           <p:cNvSpPr/>
           <p:nvPr/>
         </p:nvSpPr>
@@ -21659,7 +21431,7 @@
       </p:sp>
       <p:sp>
         <p:nvSpPr>
-          <p:cNvPr id="113" name="Shape 110"/>
+          <p:cNvPr id="109" name="Shape 106"/>
           <p:cNvSpPr/>
           <p:nvPr/>
         </p:nvSpPr>
@@ -21683,7 +21455,7 @@
       </p:sp>
       <p:sp>
         <p:nvSpPr>
-          <p:cNvPr id="114" name="Shape 111"/>
+          <p:cNvPr id="110" name="Shape 107"/>
           <p:cNvSpPr/>
           <p:nvPr/>
         </p:nvSpPr>
@@ -21707,7 +21479,7 @@
       </p:sp>
       <p:sp>
         <p:nvSpPr>
-          <p:cNvPr id="115" name="Shape 112"/>
+          <p:cNvPr id="111" name="Shape 108"/>
           <p:cNvSpPr/>
           <p:nvPr/>
         </p:nvSpPr>
@@ -21731,7 +21503,7 @@
       </p:sp>
       <p:sp>
         <p:nvSpPr>
-          <p:cNvPr id="116" name="Shape 113"/>
+          <p:cNvPr id="112" name="Shape 109"/>
           <p:cNvSpPr/>
           <p:nvPr/>
         </p:nvSpPr>
@@ -21755,7 +21527,7 @@
       </p:sp>
       <p:sp>
         <p:nvSpPr>
-          <p:cNvPr id="117" name="Shape 114"/>
+          <p:cNvPr id="113" name="Shape 110"/>
           <p:cNvSpPr/>
           <p:nvPr/>
         </p:nvSpPr>
@@ -21778,7 +21550,7 @@
       </p:sp>
       <p:sp>
         <p:nvSpPr>
-          <p:cNvPr id="118" name="Shape 115"/>
+          <p:cNvPr id="114" name="Shape 111"/>
           <p:cNvSpPr/>
           <p:nvPr/>
         </p:nvSpPr>
@@ -21802,7 +21574,7 @@
       </p:sp>
       <p:sp>
         <p:nvSpPr>
-          <p:cNvPr id="119" name="Shape 116"/>
+          <p:cNvPr id="115" name="Shape 112"/>
           <p:cNvSpPr/>
           <p:nvPr/>
         </p:nvSpPr>
@@ -21826,7 +21598,7 @@
       </p:sp>
       <p:sp>
         <p:nvSpPr>
-          <p:cNvPr id="120" name="Shape 117"/>
+          <p:cNvPr id="116" name="Shape 113"/>
           <p:cNvSpPr/>
           <p:nvPr/>
         </p:nvSpPr>
@@ -21849,7 +21621,7 @@
       </p:sp>
       <p:sp>
         <p:nvSpPr>
-          <p:cNvPr id="121" name="Shape 118"/>
+          <p:cNvPr id="117" name="Shape 114"/>
           <p:cNvSpPr/>
           <p:nvPr/>
         </p:nvSpPr>
@@ -21873,7 +21645,7 @@
       </p:sp>
       <p:sp>
         <p:nvSpPr>
-          <p:cNvPr id="122" name="Shape 119"/>
+          <p:cNvPr id="118" name="Shape 115"/>
           <p:cNvSpPr/>
           <p:nvPr/>
         </p:nvSpPr>
@@ -21897,7 +21669,7 @@
       </p:sp>
       <p:sp>
         <p:nvSpPr>
-          <p:cNvPr id="123" name="Shape 120"/>
+          <p:cNvPr id="119" name="Shape 116"/>
           <p:cNvSpPr/>
           <p:nvPr/>
         </p:nvSpPr>
@@ -21921,7 +21693,7 @@
       </p:sp>
       <p:sp>
         <p:nvSpPr>
-          <p:cNvPr id="124" name="Shape 121"/>
+          <p:cNvPr id="120" name="Shape 117"/>
           <p:cNvSpPr/>
           <p:nvPr/>
         </p:nvSpPr>
@@ -21945,7 +21717,7 @@
       </p:sp>
       <p:sp>
         <p:nvSpPr>
-          <p:cNvPr id="125" name="Shape 122"/>
+          <p:cNvPr id="121" name="Shape 118"/>
           <p:cNvSpPr/>
           <p:nvPr/>
         </p:nvSpPr>
@@ -21969,13 +21741,13 @@
       </p:sp>
       <p:sp>
         <p:nvSpPr>
-          <p:cNvPr id="126" name="Shape 123"/>
-          <p:cNvSpPr/>
-          <p:nvPr/>
-        </p:nvSpPr>
-        <p:spPr>
-          <a:xfrm>
-            <a:off x="1473098" y="3802075"/>
+          <p:cNvPr id="122" name="Shape 119"/>
+          <p:cNvSpPr/>
+          <p:nvPr/>
+        </p:nvSpPr>
+        <p:spPr>
+          <a:xfrm>
+            <a:off x="1477670" y="3802075"/>
             <a:ext cx="944575" cy="113386"/>
           </a:xfrm>
           <a:prstGeom prst="rect">
@@ -21989,7 +21761,7 @@
       </p:sp>
       <p:sp>
         <p:nvSpPr>
-          <p:cNvPr id="127" name="Text 124"/>
+          <p:cNvPr id="123" name="Text 120"/>
           <p:cNvSpPr/>
           <p:nvPr/>
         </p:nvSpPr>
@@ -22031,13 +21803,13 @@
       </p:sp>
       <p:sp>
         <p:nvSpPr>
-          <p:cNvPr id="128" name="Shape 125"/>
-          <p:cNvSpPr/>
-          <p:nvPr/>
-        </p:nvSpPr>
-        <p:spPr>
-          <a:xfrm>
-            <a:off x="3837737" y="3802075"/>
+          <p:cNvPr id="124" name="Shape 121"/>
+          <p:cNvSpPr/>
+          <p:nvPr/>
+        </p:nvSpPr>
+        <p:spPr>
+          <a:xfrm>
+            <a:off x="3842309" y="3802075"/>
             <a:ext cx="913486" cy="113386"/>
           </a:xfrm>
           <a:prstGeom prst="rect">
@@ -22051,7 +21823,7 @@
       </p:sp>
       <p:sp>
         <p:nvSpPr>
-          <p:cNvPr id="129" name="Text 126"/>
+          <p:cNvPr id="125" name="Text 122"/>
           <p:cNvSpPr/>
           <p:nvPr/>
         </p:nvSpPr>
@@ -22093,7 +21865,315 @@
       </p:sp>
       <p:sp>
         <p:nvSpPr>
+          <p:cNvPr id="126" name="Shape 123"/>
+          <p:cNvSpPr/>
+          <p:nvPr/>
+        </p:nvSpPr>
+        <p:spPr>
+          <a:xfrm>
+            <a:off x="1547165" y="3964838"/>
+            <a:ext cx="1239926" cy="196596"/>
+          </a:xfrm>
+          <a:prstGeom prst="rect">
+            <a:avLst/>
+          </a:prstGeom>
+          <a:solidFill>
+            <a:srgbClr val="FEEFC3"/>
+          </a:solidFill>
+          <a:ln/>
+        </p:spPr>
+      </p:sp>
+      <p:sp>
+        <p:nvSpPr>
+          <p:cNvPr id="127" name="Text 124"/>
+          <p:cNvSpPr/>
+          <p:nvPr/>
+        </p:nvSpPr>
+        <p:spPr>
+          <a:xfrm>
+            <a:off x="1560881" y="3970325"/>
+            <a:ext cx="1994306" cy="210312"/>
+          </a:xfrm>
+          <a:prstGeom prst="rect">
+            <a:avLst/>
+          </a:prstGeom>
+          <a:noFill/>
+          <a:ln/>
+        </p:spPr>
+        <p:txBody>
+          <a:bodyPr wrap="square" lIns="0" tIns="0" rIns="0" bIns="0" rtlCol="0" anchor="t"/>
+          <a:lstStyle/>
+          <a:p>
+            <a:pPr algn="l" indent="0" marL="0">
+              <a:lnSpc>
+                <a:spcPct val="102000"/>
+              </a:lnSpc>
+              <a:buNone/>
+            </a:pPr>
+            <a:r>
+              <a:rPr lang="en-US" sz="470" b="1" dirty="0">
+                <a:solidFill>
+                  <a:srgbClr val="202124"/>
+                </a:solidFill>
+                <a:latin typeface="Arial" pitchFamily="34" charset="0"/>
+                <a:ea typeface="Arial" pitchFamily="34" charset="-122"/>
+                <a:cs typeface="Arial" pitchFamily="34" charset="-120"/>
+              </a:rPr>
+              <a:t>Tenant A Silo (FinVault Bank)</a:t>
+            </a:r>
+            <a:endParaRPr lang="en-US" sz="470" dirty="0"/>
+          </a:p>
+          <a:p>
+            <a:pPr algn="l" indent="0" marL="0">
+              <a:lnSpc>
+                <a:spcPct val="102000"/>
+              </a:lnSpc>
+              <a:buNone/>
+            </a:pPr>
+            <a:r>
+              <a:rPr lang="en-US" sz="400" dirty="0">
+                <a:solidFill>
+                  <a:srgbClr val="202124"/>
+                </a:solidFill>
+                <a:latin typeface="Arial" pitchFamily="34" charset="0"/>
+                <a:ea typeface="Arial" pitchFamily="34" charset="-122"/>
+                <a:cs typeface="Arial" pitchFamily="34" charset="-120"/>
+              </a:rPr>
+              <a:t>Dedicated Silo • CMEK: finvault-silo-cmek</a:t>
+            </a:r>
+            <a:endParaRPr lang="en-US" sz="470" dirty="0"/>
+          </a:p>
+        </p:txBody>
+      </p:sp>
+      <p:sp>
+        <p:nvSpPr>
+          <p:cNvPr id="128" name="Shape 125"/>
+          <p:cNvSpPr/>
+          <p:nvPr/>
+        </p:nvSpPr>
+        <p:spPr>
+          <a:xfrm>
+            <a:off x="3911803" y="3964838"/>
+            <a:ext cx="1353312" cy="196596"/>
+          </a:xfrm>
+          <a:prstGeom prst="rect">
+            <a:avLst/>
+          </a:prstGeom>
+          <a:solidFill>
+            <a:srgbClr val="FAD2CF"/>
+          </a:solidFill>
+          <a:ln/>
+        </p:spPr>
+      </p:sp>
+      <p:sp>
+        <p:nvSpPr>
+          <p:cNvPr id="129" name="Text 126"/>
+          <p:cNvSpPr/>
+          <p:nvPr/>
+        </p:nvSpPr>
+        <p:spPr>
+          <a:xfrm>
+            <a:off x="3925519" y="3970325"/>
+            <a:ext cx="1994306" cy="210312"/>
+          </a:xfrm>
+          <a:prstGeom prst="rect">
+            <a:avLst/>
+          </a:prstGeom>
+          <a:noFill/>
+          <a:ln/>
+        </p:spPr>
+        <p:txBody>
+          <a:bodyPr wrap="square" lIns="0" tIns="0" rIns="0" bIns="0" rtlCol="0" anchor="t"/>
+          <a:lstStyle/>
+          <a:p>
+            <a:pPr algn="l" indent="0" marL="0">
+              <a:lnSpc>
+                <a:spcPct val="102000"/>
+              </a:lnSpc>
+              <a:buNone/>
+            </a:pPr>
+            <a:r>
+              <a:rPr lang="en-US" sz="470" b="1" dirty="0">
+                <a:solidFill>
+                  <a:srgbClr val="202124"/>
+                </a:solidFill>
+                <a:latin typeface="Arial" pitchFamily="34" charset="0"/>
+                <a:ea typeface="Arial" pitchFamily="34" charset="-122"/>
+                <a:cs typeface="Arial" pitchFamily="34" charset="-120"/>
+              </a:rPr>
+              <a:t>Tenant B Silo (RetailStream Corp)</a:t>
+            </a:r>
+            <a:endParaRPr lang="en-US" sz="470" dirty="0"/>
+          </a:p>
+          <a:p>
+            <a:pPr algn="l" indent="0" marL="0">
+              <a:lnSpc>
+                <a:spcPct val="102000"/>
+              </a:lnSpc>
+              <a:buNone/>
+            </a:pPr>
+            <a:r>
+              <a:rPr lang="en-US" sz="400" dirty="0">
+                <a:solidFill>
+                  <a:srgbClr val="202124"/>
+                </a:solidFill>
+                <a:latin typeface="Arial" pitchFamily="34" charset="0"/>
+                <a:ea typeface="Arial" pitchFamily="34" charset="-122"/>
+                <a:cs typeface="Arial" pitchFamily="34" charset="-120"/>
+              </a:rPr>
+              <a:t>Dedicated Silo • CMEK: retailstream-silo-cmek</a:t>
+            </a:r>
+            <a:endParaRPr lang="en-US" sz="470" dirty="0"/>
+          </a:p>
+        </p:txBody>
+      </p:sp>
+      <p:sp>
+        <p:nvSpPr>
           <p:cNvPr id="130" name="Shape 127"/>
+          <p:cNvSpPr/>
+          <p:nvPr/>
+        </p:nvSpPr>
+        <p:spPr>
+          <a:xfrm>
+            <a:off x="1468526" y="1921154"/>
+            <a:ext cx="1580998" cy="196596"/>
+          </a:xfrm>
+          <a:prstGeom prst="rect">
+            <a:avLst/>
+          </a:prstGeom>
+          <a:solidFill>
+            <a:srgbClr val="AECBFA"/>
+          </a:solidFill>
+          <a:ln/>
+        </p:spPr>
+      </p:sp>
+      <p:sp>
+        <p:nvSpPr>
+          <p:cNvPr id="131" name="Text 128"/>
+          <p:cNvSpPr/>
+          <p:nvPr/>
+        </p:nvSpPr>
+        <p:spPr>
+          <a:xfrm>
+            <a:off x="1482242" y="1926641"/>
+            <a:ext cx="1901952" cy="210312"/>
+          </a:xfrm>
+          <a:prstGeom prst="rect">
+            <a:avLst/>
+          </a:prstGeom>
+          <a:noFill/>
+          <a:ln/>
+        </p:spPr>
+        <p:txBody>
+          <a:bodyPr wrap="square" lIns="0" tIns="0" rIns="0" bIns="0" rtlCol="0" anchor="t"/>
+          <a:lstStyle/>
+          <a:p>
+            <a:pPr algn="l" indent="0" marL="0">
+              <a:lnSpc>
+                <a:spcPct val="102000"/>
+              </a:lnSpc>
+              <a:buNone/>
+            </a:pPr>
+            <a:r>
+              <a:rPr lang="en-US" sz="470" b="1" dirty="0">
+                <a:solidFill>
+                  <a:srgbClr val="202124"/>
+                </a:solidFill>
+                <a:latin typeface="Arial" pitchFamily="34" charset="0"/>
+                <a:ea typeface="Arial" pitchFamily="34" charset="-122"/>
+                <a:cs typeface="Arial" pitchFamily="34" charset="-120"/>
+              </a:rPr>
+              <a:t>Central mTLS &amp; SPIFFE Routing Hub</a:t>
+            </a:r>
+            <a:endParaRPr lang="en-US" sz="470" dirty="0"/>
+          </a:p>
+          <a:p>
+            <a:pPr algn="l" indent="0" marL="0">
+              <a:lnSpc>
+                <a:spcPct val="102000"/>
+              </a:lnSpc>
+              <a:buNone/>
+            </a:pPr>
+            <a:r>
+              <a:rPr lang="en-US" sz="400" dirty="0">
+                <a:solidFill>
+                  <a:srgbClr val="202124"/>
+                </a:solidFill>
+                <a:latin typeface="Arial" pitchFamily="34" charset="0"/>
+                <a:ea typeface="Arial" pitchFamily="34" charset="-122"/>
+                <a:cs typeface="Arial" pitchFamily="34" charset="-120"/>
+              </a:rPr>
+              <a:t>Client certificate pinning (HTTP 401 on SAN mismatch)</a:t>
+            </a:r>
+            <a:endParaRPr lang="en-US" sz="470" dirty="0"/>
+          </a:p>
+        </p:txBody>
+      </p:sp>
+      <p:sp>
+        <p:nvSpPr>
+          <p:cNvPr id="132" name="Shape 129"/>
+          <p:cNvSpPr/>
+          <p:nvPr/>
+        </p:nvSpPr>
+        <p:spPr>
+          <a:xfrm>
+            <a:off x="4641494" y="1955902"/>
+            <a:ext cx="1287475" cy="118872"/>
+          </a:xfrm>
+          <a:prstGeom prst="rect">
+            <a:avLst/>
+          </a:prstGeom>
+          <a:solidFill>
+            <a:srgbClr val="CEEAD6"/>
+          </a:solidFill>
+          <a:ln/>
+        </p:spPr>
+      </p:sp>
+      <p:sp>
+        <p:nvSpPr>
+          <p:cNvPr id="133" name="Text 130"/>
+          <p:cNvSpPr/>
+          <p:nvPr/>
+        </p:nvSpPr>
+        <p:spPr>
+          <a:xfrm>
+            <a:off x="4655210" y="1961388"/>
+            <a:ext cx="1315822" cy="210312"/>
+          </a:xfrm>
+          <a:prstGeom prst="rect">
+            <a:avLst/>
+          </a:prstGeom>
+          <a:noFill/>
+          <a:ln/>
+        </p:spPr>
+        <p:txBody>
+          <a:bodyPr wrap="square" lIns="0" tIns="0" rIns="0" bIns="0" rtlCol="0" anchor="t"/>
+          <a:lstStyle/>
+          <a:p>
+            <a:pPr algn="l" indent="0" marL="0">
+              <a:lnSpc>
+                <a:spcPct val="102000"/>
+              </a:lnSpc>
+              <a:buNone/>
+            </a:pPr>
+            <a:r>
+              <a:rPr lang="en-US" sz="430" b="1" dirty="0">
+                <a:solidFill>
+                  <a:srgbClr val="202124"/>
+                </a:solidFill>
+                <a:latin typeface="Arial" pitchFamily="34" charset="0"/>
+                <a:ea typeface="Arial" pitchFamily="34" charset="-122"/>
+                <a:cs typeface="Arial" pitchFamily="34" charset="-120"/>
+              </a:rPr>
+              <a:t>Cloud KMS CMEK &amp; Sovereign Security Hub</a:t>
+            </a:r>
+            <a:endParaRPr lang="en-US" sz="430" dirty="0"/>
+          </a:p>
+        </p:txBody>
+      </p:sp>
+      <p:sp>
+        <p:nvSpPr>
+          <p:cNvPr id="134" name="Shape 131"/>
           <p:cNvSpPr/>
           <p:nvPr/>
         </p:nvSpPr>
@@ -22120,7 +22200,7 @@
       </p:sp>
       <p:pic>
         <p:nvPicPr>
-          <p:cNvPr id="131" name="Image 1" descr="preencoded.png">    </p:cNvPr>
+          <p:cNvPr id="135" name="Image 1" descr="preencoded.png">    </p:cNvPr>
           <p:cNvPicPr>
             <a:picLocks noChangeAspect="1"/>
           </p:cNvPicPr>
@@ -22144,7 +22224,7 @@
       </p:pic>
       <p:sp>
         <p:nvSpPr>
-          <p:cNvPr id="132" name="Text 128"/>
+          <p:cNvPr id="136" name="Text 132"/>
           <p:cNvSpPr/>
           <p:nvPr/>
         </p:nvSpPr>
@@ -22206,7 +22286,7 @@
       </p:sp>
       <p:sp>
         <p:nvSpPr>
-          <p:cNvPr id="133" name="Shape 129"/>
+          <p:cNvPr id="137" name="Shape 133"/>
           <p:cNvSpPr/>
           <p:nvPr/>
         </p:nvSpPr>
@@ -22233,7 +22313,7 @@
       </p:sp>
       <p:pic>
         <p:nvPicPr>
-          <p:cNvPr id="134" name="Image 2" descr="preencoded.png">    </p:cNvPr>
+          <p:cNvPr id="138" name="Image 2" descr="preencoded.png">    </p:cNvPr>
           <p:cNvPicPr>
             <a:picLocks noChangeAspect="1"/>
           </p:cNvPicPr>
@@ -22257,7 +22337,7 @@
       </p:pic>
       <p:sp>
         <p:nvSpPr>
-          <p:cNvPr id="135" name="Text 130"/>
+          <p:cNvPr id="139" name="Text 134"/>
           <p:cNvSpPr/>
           <p:nvPr/>
         </p:nvSpPr>
@@ -22319,7 +22399,7 @@
       </p:sp>
       <p:sp>
         <p:nvSpPr>
-          <p:cNvPr id="136" name="Shape 131"/>
+          <p:cNvPr id="140" name="Shape 135"/>
           <p:cNvSpPr/>
           <p:nvPr/>
         </p:nvSpPr>
@@ -22346,7 +22426,7 @@
       </p:sp>
       <p:pic>
         <p:nvPicPr>
-          <p:cNvPr id="137" name="Image 3" descr="preencoded.png">    </p:cNvPr>
+          <p:cNvPr id="141" name="Image 3" descr="preencoded.png">    </p:cNvPr>
           <p:cNvPicPr>
             <a:picLocks noChangeAspect="1"/>
           </p:cNvPicPr>
@@ -22370,7 +22450,7 @@
       </p:pic>
       <p:sp>
         <p:nvSpPr>
-          <p:cNvPr id="138" name="Text 132"/>
+          <p:cNvPr id="142" name="Text 136"/>
           <p:cNvSpPr/>
           <p:nvPr/>
         </p:nvSpPr>
@@ -22432,7 +22512,7 @@
       </p:sp>
       <p:sp>
         <p:nvSpPr>
-          <p:cNvPr id="139" name="Shape 133"/>
+          <p:cNvPr id="143" name="Shape 137"/>
           <p:cNvSpPr/>
           <p:nvPr/>
         </p:nvSpPr>
@@ -22459,7 +22539,7 @@
       </p:sp>
       <p:pic>
         <p:nvPicPr>
-          <p:cNvPr id="140" name="Image 4" descr="preencoded.png">    </p:cNvPr>
+          <p:cNvPr id="144" name="Image 4" descr="preencoded.png">    </p:cNvPr>
           <p:cNvPicPr>
             <a:picLocks noChangeAspect="1"/>
           </p:cNvPicPr>
@@ -22483,7 +22563,7 @@
       </p:pic>
       <p:sp>
         <p:nvSpPr>
-          <p:cNvPr id="141" name="Text 134"/>
+          <p:cNvPr id="145" name="Text 138"/>
           <p:cNvSpPr/>
           <p:nvPr/>
         </p:nvSpPr>
@@ -22545,7 +22625,7 @@
       </p:sp>
       <p:sp>
         <p:nvSpPr>
-          <p:cNvPr id="142" name="Shape 135"/>
+          <p:cNvPr id="146" name="Shape 139"/>
           <p:cNvSpPr/>
           <p:nvPr/>
         </p:nvSpPr>
@@ -22572,7 +22652,7 @@
       </p:sp>
       <p:pic>
         <p:nvPicPr>
-          <p:cNvPr id="143" name="Image 5" descr="preencoded.png">    </p:cNvPr>
+          <p:cNvPr id="147" name="Image 5" descr="preencoded.png">    </p:cNvPr>
           <p:cNvPicPr>
             <a:picLocks noChangeAspect="1"/>
           </p:cNvPicPr>
@@ -22596,7 +22676,7 @@
       </p:pic>
       <p:sp>
         <p:nvSpPr>
-          <p:cNvPr id="144" name="Text 136"/>
+          <p:cNvPr id="148" name="Text 140"/>
           <p:cNvSpPr/>
           <p:nvPr/>
         </p:nvSpPr>
@@ -22658,7 +22738,7 @@
       </p:sp>
       <p:sp>
         <p:nvSpPr>
-          <p:cNvPr id="145" name="Shape 137"/>
+          <p:cNvPr id="149" name="Shape 141"/>
           <p:cNvSpPr/>
           <p:nvPr/>
         </p:nvSpPr>
@@ -22685,7 +22765,7 @@
       </p:sp>
       <p:pic>
         <p:nvPicPr>
-          <p:cNvPr id="146" name="Image 6" descr="preencoded.png">    </p:cNvPr>
+          <p:cNvPr id="150" name="Image 6" descr="preencoded.png">    </p:cNvPr>
           <p:cNvPicPr>
             <a:picLocks noChangeAspect="1"/>
           </p:cNvPicPr>
@@ -22709,7 +22789,7 @@
       </p:pic>
       <p:sp>
         <p:nvSpPr>
-          <p:cNvPr id="147" name="Text 138"/>
+          <p:cNvPr id="151" name="Text 142"/>
           <p:cNvSpPr/>
           <p:nvPr/>
         </p:nvSpPr>
@@ -22771,7 +22851,7 @@
       </p:sp>
       <p:sp>
         <p:nvSpPr>
-          <p:cNvPr id="148" name="Shape 139"/>
+          <p:cNvPr id="152" name="Shape 143"/>
           <p:cNvSpPr/>
           <p:nvPr/>
         </p:nvSpPr>
@@ -22798,7 +22878,7 @@
       </p:sp>
       <p:pic>
         <p:nvPicPr>
-          <p:cNvPr id="149" name="Image 7" descr="preencoded.png">    </p:cNvPr>
+          <p:cNvPr id="153" name="Image 7" descr="preencoded.png">    </p:cNvPr>
           <p:cNvPicPr>
             <a:picLocks noChangeAspect="1"/>
           </p:cNvPicPr>
@@ -22822,7 +22902,7 @@
       </p:pic>
       <p:sp>
         <p:nvSpPr>
-          <p:cNvPr id="150" name="Text 140"/>
+          <p:cNvPr id="154" name="Text 144"/>
           <p:cNvSpPr/>
           <p:nvPr/>
         </p:nvSpPr>
@@ -22884,7 +22964,7 @@
       </p:sp>
       <p:sp>
         <p:nvSpPr>
-          <p:cNvPr id="151" name="Shape 141"/>
+          <p:cNvPr id="155" name="Shape 145"/>
           <p:cNvSpPr/>
           <p:nvPr/>
         </p:nvSpPr>
@@ -22911,7 +22991,7 @@
       </p:sp>
       <p:pic>
         <p:nvPicPr>
-          <p:cNvPr id="152" name="Image 8" descr="preencoded.png">    </p:cNvPr>
+          <p:cNvPr id="156" name="Image 8" descr="preencoded.png">    </p:cNvPr>
           <p:cNvPicPr>
             <a:picLocks noChangeAspect="1"/>
           </p:cNvPicPr>
@@ -22935,7 +23015,7 @@
       </p:pic>
       <p:sp>
         <p:nvSpPr>
-          <p:cNvPr id="153" name="Text 142"/>
+          <p:cNvPr id="157" name="Text 146"/>
           <p:cNvSpPr/>
           <p:nvPr/>
         </p:nvSpPr>
@@ -22997,7 +23077,7 @@
       </p:sp>
       <p:sp>
         <p:nvSpPr>
-          <p:cNvPr id="154" name="Shape 143"/>
+          <p:cNvPr id="158" name="Shape 147"/>
           <p:cNvSpPr/>
           <p:nvPr/>
         </p:nvSpPr>
@@ -23024,7 +23104,7 @@
       </p:sp>
       <p:pic>
         <p:nvPicPr>
-          <p:cNvPr id="155" name="Image 9" descr="preencoded.png">    </p:cNvPr>
+          <p:cNvPr id="159" name="Image 9" descr="preencoded.png">    </p:cNvPr>
           <p:cNvPicPr>
             <a:picLocks noChangeAspect="1"/>
           </p:cNvPicPr>
@@ -23048,7 +23128,7 @@
       </p:pic>
       <p:sp>
         <p:nvSpPr>
-          <p:cNvPr id="156" name="Text 144"/>
+          <p:cNvPr id="160" name="Text 148"/>
           <p:cNvSpPr/>
           <p:nvPr/>
         </p:nvSpPr>
@@ -23110,7 +23190,7 @@
       </p:sp>
       <p:sp>
         <p:nvSpPr>
-          <p:cNvPr id="157" name="Shape 145"/>
+          <p:cNvPr id="161" name="Shape 149"/>
           <p:cNvSpPr/>
           <p:nvPr/>
         </p:nvSpPr>
@@ -23137,7 +23217,7 @@
       </p:sp>
       <p:pic>
         <p:nvPicPr>
-          <p:cNvPr id="158" name="Image 10" descr="preencoded.png">    </p:cNvPr>
+          <p:cNvPr id="162" name="Image 10" descr="preencoded.png">    </p:cNvPr>
           <p:cNvPicPr>
             <a:picLocks noChangeAspect="1"/>
           </p:cNvPicPr>
@@ -23161,7 +23241,7 @@
       </p:pic>
       <p:sp>
         <p:nvSpPr>
-          <p:cNvPr id="159" name="Text 146"/>
+          <p:cNvPr id="163" name="Text 150"/>
           <p:cNvSpPr/>
           <p:nvPr/>
         </p:nvSpPr>
@@ -23223,7 +23303,7 @@
       </p:sp>
       <p:sp>
         <p:nvSpPr>
-          <p:cNvPr id="160" name="Shape 147"/>
+          <p:cNvPr id="164" name="Shape 151"/>
           <p:cNvSpPr/>
           <p:nvPr/>
         </p:nvSpPr>
@@ -23250,7 +23330,7 @@
       </p:sp>
       <p:pic>
         <p:nvPicPr>
-          <p:cNvPr id="161" name="Image 11" descr="preencoded.png">    </p:cNvPr>
+          <p:cNvPr id="165" name="Image 11" descr="preencoded.png">    </p:cNvPr>
           <p:cNvPicPr>
             <a:picLocks noChangeAspect="1"/>
           </p:cNvPicPr>
@@ -23274,7 +23354,7 @@
       </p:pic>
       <p:sp>
         <p:nvSpPr>
-          <p:cNvPr id="162" name="Text 148"/>
+          <p:cNvPr id="166" name="Text 152"/>
           <p:cNvSpPr/>
           <p:nvPr/>
         </p:nvSpPr>
@@ -23336,7 +23416,7 @@
       </p:sp>
       <p:sp>
         <p:nvSpPr>
-          <p:cNvPr id="163" name="Shape 149"/>
+          <p:cNvPr id="167" name="Shape 153"/>
           <p:cNvSpPr/>
           <p:nvPr/>
         </p:nvSpPr>
@@ -23363,7 +23443,7 @@
       </p:sp>
       <p:pic>
         <p:nvPicPr>
-          <p:cNvPr id="164" name="Image 12" descr="preencoded.png">    </p:cNvPr>
+          <p:cNvPr id="168" name="Image 12" descr="preencoded.png">    </p:cNvPr>
           <p:cNvPicPr>
             <a:picLocks noChangeAspect="1"/>
           </p:cNvPicPr>
@@ -23387,7 +23467,7 @@
       </p:pic>
       <p:sp>
         <p:nvSpPr>
-          <p:cNvPr id="165" name="Text 150"/>
+          <p:cNvPr id="169" name="Text 154"/>
           <p:cNvSpPr/>
           <p:nvPr/>
         </p:nvSpPr>
@@ -23449,7 +23529,7 @@
       </p:sp>
       <p:sp>
         <p:nvSpPr>
-          <p:cNvPr id="166" name="Shape 151"/>
+          <p:cNvPr id="170" name="Shape 155"/>
           <p:cNvSpPr/>
           <p:nvPr/>
         </p:nvSpPr>
@@ -23476,7 +23556,7 @@
       </p:sp>
       <p:pic>
         <p:nvPicPr>
-          <p:cNvPr id="167" name="Image 13" descr="preencoded.png">    </p:cNvPr>
+          <p:cNvPr id="171" name="Image 13" descr="preencoded.png">    </p:cNvPr>
           <p:cNvPicPr>
             <a:picLocks noChangeAspect="1"/>
           </p:cNvPicPr>
@@ -23500,7 +23580,7 @@
       </p:pic>
       <p:sp>
         <p:nvSpPr>
-          <p:cNvPr id="168" name="Text 152"/>
+          <p:cNvPr id="172" name="Text 156"/>
           <p:cNvSpPr/>
           <p:nvPr/>
         </p:nvSpPr>
@@ -23562,7 +23642,7 @@
       </p:sp>
       <p:sp>
         <p:nvSpPr>
-          <p:cNvPr id="169" name="Shape 153"/>
+          <p:cNvPr id="173" name="Shape 157"/>
           <p:cNvSpPr/>
           <p:nvPr/>
         </p:nvSpPr>
@@ -23589,7 +23669,7 @@
       </p:sp>
       <p:pic>
         <p:nvPicPr>
-          <p:cNvPr id="170" name="Image 14" descr="preencoded.png">    </p:cNvPr>
+          <p:cNvPr id="174" name="Image 14" descr="preencoded.png">    </p:cNvPr>
           <p:cNvPicPr>
             <a:picLocks noChangeAspect="1"/>
           </p:cNvPicPr>
@@ -23613,7 +23693,7 @@
       </p:pic>
       <p:sp>
         <p:nvSpPr>
-          <p:cNvPr id="171" name="Text 154"/>
+          <p:cNvPr id="175" name="Text 158"/>
           <p:cNvSpPr/>
           <p:nvPr/>
         </p:nvSpPr>
@@ -23675,7 +23755,7 @@
       </p:sp>
       <p:sp>
         <p:nvSpPr>
-          <p:cNvPr id="172" name="Shape 155"/>
+          <p:cNvPr id="176" name="Shape 159"/>
           <p:cNvSpPr/>
           <p:nvPr/>
         </p:nvSpPr>
@@ -23702,7 +23782,7 @@
       </p:sp>
       <p:pic>
         <p:nvPicPr>
-          <p:cNvPr id="173" name="Image 15" descr="preencoded.png">    </p:cNvPr>
+          <p:cNvPr id="177" name="Image 15" descr="preencoded.png">    </p:cNvPr>
           <p:cNvPicPr>
             <a:picLocks noChangeAspect="1"/>
           </p:cNvPicPr>
@@ -23726,7 +23806,7 @@
       </p:pic>
       <p:sp>
         <p:nvSpPr>
-          <p:cNvPr id="174" name="Text 156"/>
+          <p:cNvPr id="178" name="Text 160"/>
           <p:cNvSpPr/>
           <p:nvPr/>
         </p:nvSpPr>
@@ -23788,7 +23868,7 @@
       </p:sp>
       <p:sp>
         <p:nvSpPr>
-          <p:cNvPr id="175" name="Shape 157"/>
+          <p:cNvPr id="179" name="Shape 161"/>
           <p:cNvSpPr/>
           <p:nvPr/>
         </p:nvSpPr>
@@ -23815,7 +23895,7 @@
       </p:sp>
       <p:pic>
         <p:nvPicPr>
-          <p:cNvPr id="176" name="Image 16" descr="preencoded.png">    </p:cNvPr>
+          <p:cNvPr id="180" name="Image 16" descr="preencoded.png">    </p:cNvPr>
           <p:cNvPicPr>
             <a:picLocks noChangeAspect="1"/>
           </p:cNvPicPr>
@@ -23839,7 +23919,7 @@
       </p:pic>
       <p:sp>
         <p:nvSpPr>
-          <p:cNvPr id="177" name="Text 158"/>
+          <p:cNvPr id="181" name="Text 162"/>
           <p:cNvSpPr/>
           <p:nvPr/>
         </p:nvSpPr>
@@ -23901,7 +23981,7 @@
       </p:sp>
       <p:sp>
         <p:nvSpPr>
-          <p:cNvPr id="178" name="Shape 159"/>
+          <p:cNvPr id="182" name="Shape 163"/>
           <p:cNvSpPr/>
           <p:nvPr/>
         </p:nvSpPr>
@@ -23928,7 +24008,7 @@
       </p:sp>
       <p:pic>
         <p:nvPicPr>
-          <p:cNvPr id="179" name="Image 17" descr="preencoded.png">    </p:cNvPr>
+          <p:cNvPr id="183" name="Image 17" descr="preencoded.png">    </p:cNvPr>
           <p:cNvPicPr>
             <a:picLocks noChangeAspect="1"/>
           </p:cNvPicPr>
@@ -23952,7 +24032,7 @@
       </p:pic>
       <p:sp>
         <p:nvSpPr>
-          <p:cNvPr id="180" name="Text 160"/>
+          <p:cNvPr id="184" name="Text 164"/>
           <p:cNvSpPr/>
           <p:nvPr/>
         </p:nvSpPr>
@@ -24014,7 +24094,7 @@
       </p:sp>
       <p:sp>
         <p:nvSpPr>
-          <p:cNvPr id="181" name="Shape 161"/>
+          <p:cNvPr id="185" name="Shape 165"/>
           <p:cNvSpPr/>
           <p:nvPr/>
         </p:nvSpPr>
@@ -24041,7 +24121,7 @@
       </p:sp>
       <p:pic>
         <p:nvPicPr>
-          <p:cNvPr id="182" name="Image 18" descr="preencoded.png">    </p:cNvPr>
+          <p:cNvPr id="186" name="Image 18" descr="preencoded.png">    </p:cNvPr>
           <p:cNvPicPr>
             <a:picLocks noChangeAspect="1"/>
           </p:cNvPicPr>
@@ -24065,7 +24145,7 @@
       </p:pic>
       <p:sp>
         <p:nvSpPr>
-          <p:cNvPr id="183" name="Text 162"/>
+          <p:cNvPr id="187" name="Text 166"/>
           <p:cNvSpPr/>
           <p:nvPr/>
         </p:nvSpPr>
@@ -24127,7 +24207,7 @@
       </p:sp>
       <p:sp>
         <p:nvSpPr>
-          <p:cNvPr id="184" name="Shape 163"/>
+          <p:cNvPr id="188" name="Shape 167"/>
           <p:cNvSpPr/>
           <p:nvPr/>
         </p:nvSpPr>
@@ -24154,7 +24234,7 @@
       </p:sp>
       <p:pic>
         <p:nvPicPr>
-          <p:cNvPr id="185" name="Image 19" descr="preencoded.png">    </p:cNvPr>
+          <p:cNvPr id="189" name="Image 19" descr="preencoded.png">    </p:cNvPr>
           <p:cNvPicPr>
             <a:picLocks noChangeAspect="1"/>
           </p:cNvPicPr>
@@ -24178,7 +24258,7 @@
       </p:pic>
       <p:sp>
         <p:nvSpPr>
-          <p:cNvPr id="186" name="Text 164"/>
+          <p:cNvPr id="190" name="Text 168"/>
           <p:cNvSpPr/>
           <p:nvPr/>
         </p:nvSpPr>
@@ -24240,7 +24320,7 @@
       </p:sp>
       <p:sp>
         <p:nvSpPr>
-          <p:cNvPr id="187" name="Shape 165"/>
+          <p:cNvPr id="191" name="Shape 169"/>
           <p:cNvSpPr/>
           <p:nvPr/>
         </p:nvSpPr>
@@ -24265,7 +24345,7 @@
       </p:sp>
       <p:sp>
         <p:nvSpPr>
-          <p:cNvPr id="188" name="Text 166"/>
+          <p:cNvPr id="192" name="Text 170"/>
           <p:cNvSpPr/>
           <p:nvPr/>
         </p:nvSpPr>
@@ -24304,7 +24384,7 @@
       </p:sp>
       <p:sp>
         <p:nvSpPr>
-          <p:cNvPr id="189" name="Shape 167"/>
+          <p:cNvPr id="193" name="Shape 171"/>
           <p:cNvSpPr/>
           <p:nvPr/>
         </p:nvSpPr>
@@ -24329,7 +24409,7 @@
       </p:sp>
       <p:sp>
         <p:nvSpPr>
-          <p:cNvPr id="190" name="Text 168"/>
+          <p:cNvPr id="194" name="Text 172"/>
           <p:cNvSpPr/>
           <p:nvPr/>
         </p:nvSpPr>
@@ -24368,7 +24448,7 @@
       </p:sp>
       <p:sp>
         <p:nvSpPr>
-          <p:cNvPr id="191" name="Shape 169"/>
+          <p:cNvPr id="195" name="Shape 173"/>
           <p:cNvSpPr/>
           <p:nvPr/>
         </p:nvSpPr>
@@ -24393,7 +24473,7 @@
       </p:sp>
       <p:sp>
         <p:nvSpPr>
-          <p:cNvPr id="192" name="Text 170"/>
+          <p:cNvPr id="196" name="Text 174"/>
           <p:cNvSpPr/>
           <p:nvPr/>
         </p:nvSpPr>
@@ -24432,7 +24512,7 @@
       </p:sp>
       <p:sp>
         <p:nvSpPr>
-          <p:cNvPr id="193" name="Shape 171"/>
+          <p:cNvPr id="197" name="Shape 175"/>
           <p:cNvSpPr/>
           <p:nvPr/>
         </p:nvSpPr>
@@ -24457,7 +24537,7 @@
       </p:sp>
       <p:sp>
         <p:nvSpPr>
-          <p:cNvPr id="194" name="Text 172"/>
+          <p:cNvPr id="198" name="Text 176"/>
           <p:cNvSpPr/>
           <p:nvPr/>
         </p:nvSpPr>
@@ -24496,7 +24576,7 @@
       </p:sp>
       <p:sp>
         <p:nvSpPr>
-          <p:cNvPr id="195" name="Shape 173"/>
+          <p:cNvPr id="199" name="Shape 177"/>
           <p:cNvSpPr/>
           <p:nvPr/>
         </p:nvSpPr>
@@ -24521,7 +24601,7 @@
       </p:sp>
       <p:sp>
         <p:nvSpPr>
-          <p:cNvPr id="196" name="Text 174"/>
+          <p:cNvPr id="200" name="Text 178"/>
           <p:cNvSpPr/>
           <p:nvPr/>
         </p:nvSpPr>
@@ -24560,7 +24640,7 @@
       </p:sp>
       <p:sp>
         <p:nvSpPr>
-          <p:cNvPr id="197" name="Shape 175"/>
+          <p:cNvPr id="201" name="Shape 179"/>
           <p:cNvSpPr/>
           <p:nvPr/>
         </p:nvSpPr>
@@ -24585,7 +24665,7 @@
       </p:sp>
       <p:sp>
         <p:nvSpPr>
-          <p:cNvPr id="198" name="Text 176"/>
+          <p:cNvPr id="202" name="Text 180"/>
           <p:cNvSpPr/>
           <p:nvPr/>
         </p:nvSpPr>
@@ -24624,7 +24704,7 @@
       </p:sp>
       <p:sp>
         <p:nvSpPr>
-          <p:cNvPr id="199" name="Shape 177"/>
+          <p:cNvPr id="203" name="Shape 181"/>
           <p:cNvSpPr/>
           <p:nvPr/>
         </p:nvSpPr>
@@ -24649,7 +24729,7 @@
       </p:sp>
       <p:sp>
         <p:nvSpPr>
-          <p:cNvPr id="200" name="Text 178"/>
+          <p:cNvPr id="204" name="Text 182"/>
           <p:cNvSpPr/>
           <p:nvPr/>
         </p:nvSpPr>
@@ -24688,7 +24768,7 @@
       </p:sp>
       <p:sp>
         <p:nvSpPr>
-          <p:cNvPr id="201" name="Shape 179"/>
+          <p:cNvPr id="205" name="Shape 183"/>
           <p:cNvSpPr/>
           <p:nvPr/>
         </p:nvSpPr>
@@ -24713,7 +24793,7 @@
       </p:sp>
       <p:sp>
         <p:nvSpPr>
-          <p:cNvPr id="202" name="Text 180"/>
+          <p:cNvPr id="206" name="Text 184"/>
           <p:cNvSpPr/>
           <p:nvPr/>
         </p:nvSpPr>
@@ -24752,7 +24832,7 @@
       </p:sp>
       <p:sp>
         <p:nvSpPr>
-          <p:cNvPr id="203" name="Shape 181"/>
+          <p:cNvPr id="207" name="Shape 185"/>
           <p:cNvSpPr/>
           <p:nvPr/>
         </p:nvSpPr>
@@ -24777,7 +24857,7 @@
       </p:sp>
       <p:sp>
         <p:nvSpPr>
-          <p:cNvPr id="204" name="Text 182"/>
+          <p:cNvPr id="208" name="Text 186"/>
           <p:cNvSpPr/>
           <p:nvPr/>
         </p:nvSpPr>
@@ -24816,18 +24896,18 @@
       </p:sp>
       <p:sp>
         <p:nvSpPr>
-          <p:cNvPr id="205" name="Shape 183"/>
-          <p:cNvSpPr/>
-          <p:nvPr/>
-        </p:nvSpPr>
-        <p:spPr>
-          <a:xfrm>
-            <a:off x="5339182" y="3353105"/>
-            <a:ext cx="672084" cy="217627"/>
+          <p:cNvPr id="209" name="Shape 187"/>
+          <p:cNvSpPr/>
+          <p:nvPr/>
+        </p:nvSpPr>
+        <p:spPr>
+          <a:xfrm>
+            <a:off x="5339182" y="3390595"/>
+            <a:ext cx="632765" cy="142646"/>
           </a:xfrm>
           <a:prstGeom prst="roundRect">
             <a:avLst>
-              <a:gd name="adj" fmla="val 21008"/>
+              <a:gd name="adj" fmla="val 28846"/>
             </a:avLst>
           </a:prstGeom>
           <a:solidFill>
@@ -24843,14 +24923,14 @@
       </p:sp>
       <p:sp>
         <p:nvSpPr>
-          <p:cNvPr id="206" name="Text 184"/>
-          <p:cNvSpPr/>
-          <p:nvPr/>
-        </p:nvSpPr>
-        <p:spPr>
-          <a:xfrm>
-            <a:off x="5359298" y="3362249"/>
-            <a:ext cx="631850" cy="199339"/>
+          <p:cNvPr id="210" name="Text 188"/>
+          <p:cNvSpPr/>
+          <p:nvPr/>
+        </p:nvSpPr>
+        <p:spPr>
+          <a:xfrm>
+            <a:off x="5357470" y="3396082"/>
+            <a:ext cx="596189" cy="131674"/>
           </a:xfrm>
           <a:prstGeom prst="rect">
             <a:avLst/>
@@ -24864,12 +24944,12 @@
           <a:p>
             <a:pPr algn="ctr" indent="0" marL="0">
               <a:lnSpc>
-                <a:spcPct val="102000"/>
+                <a:spcPct val="100000"/>
               </a:lnSpc>
               <a:buNone/>
             </a:pPr>
             <a:r>
-              <a:rPr lang="en-US" sz="410" b="1" dirty="0">
+              <a:rPr lang="en-US" sz="385" b="1" dirty="0">
                 <a:solidFill>
                   <a:srgbClr val="202124"/>
                 </a:solidFill>
@@ -24879,17 +24959,17 @@
               </a:rPr>
               <a:t>CMEK state &amp; VPC-SC</a:t>
             </a:r>
-            <a:endParaRPr lang="en-US" sz="410" dirty="0"/>
+            <a:endParaRPr lang="en-US" sz="385" dirty="0"/>
           </a:p>
           <a:p>
             <a:pPr algn="ctr" indent="0" marL="0">
               <a:lnSpc>
-                <a:spcPct val="102000"/>
+                <a:spcPct val="100000"/>
               </a:lnSpc>
               <a:buNone/>
             </a:pPr>
             <a:r>
-              <a:rPr lang="en-US" sz="375" dirty="0">
+              <a:rPr lang="en-US" sz="350" dirty="0">
                 <a:solidFill>
                   <a:srgbClr val="202124"/>
                 </a:solidFill>
@@ -24899,24 +24979,24 @@
               </a:rPr>
               <a:t>audit monitoring</a:t>
             </a:r>
-            <a:endParaRPr lang="en-US" sz="410" dirty="0"/>
-          </a:p>
-        </p:txBody>
-      </p:sp>
-      <p:sp>
-        <p:nvSpPr>
-          <p:cNvPr id="207" name="Shape 185"/>
-          <p:cNvSpPr/>
-          <p:nvPr/>
-        </p:nvSpPr>
-        <p:spPr>
-          <a:xfrm>
-            <a:off x="2856586" y="4817974"/>
-            <a:ext cx="452628" cy="208483"/>
+            <a:endParaRPr lang="en-US" sz="385" dirty="0"/>
+          </a:p>
+        </p:txBody>
+      </p:sp>
+      <p:sp>
+        <p:nvSpPr>
+          <p:cNvPr id="211" name="Shape 189"/>
+          <p:cNvSpPr/>
+          <p:nvPr/>
+        </p:nvSpPr>
+        <p:spPr>
+          <a:xfrm>
+            <a:off x="2871216" y="4850892"/>
+            <a:ext cx="424282" cy="142646"/>
           </a:xfrm>
           <a:prstGeom prst="roundRect">
             <a:avLst>
-              <a:gd name="adj" fmla="val 21930"/>
+              <a:gd name="adj" fmla="val 28846"/>
             </a:avLst>
           </a:prstGeom>
           <a:solidFill>
@@ -24932,14 +25012,14 @@
       </p:sp>
       <p:sp>
         <p:nvSpPr>
-          <p:cNvPr id="208" name="Text 186"/>
-          <p:cNvSpPr/>
-          <p:nvPr/>
-        </p:nvSpPr>
-        <p:spPr>
-          <a:xfrm>
-            <a:off x="2876702" y="4827118"/>
-            <a:ext cx="412394" cy="190195"/>
+          <p:cNvPr id="212" name="Text 190"/>
+          <p:cNvSpPr/>
+          <p:nvPr/>
+        </p:nvSpPr>
+        <p:spPr>
+          <a:xfrm>
+            <a:off x="2889504" y="4856378"/>
+            <a:ext cx="387706" cy="131674"/>
           </a:xfrm>
           <a:prstGeom prst="rect">
             <a:avLst/>
@@ -24953,12 +25033,12 @@
           <a:p>
             <a:pPr algn="ctr" indent="0" marL="0">
               <a:lnSpc>
-                <a:spcPct val="102000"/>
+                <a:spcPct val="100000"/>
               </a:lnSpc>
               <a:buNone/>
             </a:pPr>
             <a:r>
-              <a:rPr lang="en-US" sz="410" b="1" dirty="0">
+              <a:rPr lang="en-US" sz="385" b="1" dirty="0">
                 <a:solidFill>
                   <a:srgbClr val="202124"/>
                 </a:solidFill>
@@ -24968,17 +25048,17 @@
               </a:rPr>
               <a:t>Private GKE</a:t>
             </a:r>
-            <a:endParaRPr lang="en-US" sz="410" dirty="0"/>
+            <a:endParaRPr lang="en-US" sz="385" dirty="0"/>
           </a:p>
           <a:p>
             <a:pPr algn="ctr" indent="0" marL="0">
               <a:lnSpc>
-                <a:spcPct val="102000"/>
+                <a:spcPct val="100000"/>
               </a:lnSpc>
               <a:buNone/>
             </a:pPr>
             <a:r>
-              <a:rPr lang="en-US" sz="375" dirty="0">
+              <a:rPr lang="en-US" sz="350" dirty="0">
                 <a:solidFill>
                   <a:srgbClr val="202124"/>
                 </a:solidFill>
@@ -24988,24 +25068,24 @@
               </a:rPr>
               <a:t>Zero Egress</a:t>
             </a:r>
-            <a:endParaRPr lang="en-US" sz="410" dirty="0"/>
-          </a:p>
-        </p:txBody>
-      </p:sp>
-      <p:sp>
-        <p:nvSpPr>
-          <p:cNvPr id="209" name="Shape 187"/>
-          <p:cNvSpPr/>
-          <p:nvPr/>
-        </p:nvSpPr>
-        <p:spPr>
-          <a:xfrm>
-            <a:off x="2760574" y="5452567"/>
-            <a:ext cx="644652" cy="208483"/>
+            <a:endParaRPr lang="en-US" sz="385" dirty="0"/>
+          </a:p>
+        </p:txBody>
+      </p:sp>
+      <p:sp>
+        <p:nvSpPr>
+          <p:cNvPr id="213" name="Shape 191"/>
+          <p:cNvSpPr/>
+          <p:nvPr/>
+        </p:nvSpPr>
+        <p:spPr>
+          <a:xfrm>
+            <a:off x="2779776" y="5485486"/>
+            <a:ext cx="606247" cy="142646"/>
           </a:xfrm>
           <a:prstGeom prst="roundRect">
             <a:avLst>
-              <a:gd name="adj" fmla="val 21930"/>
+              <a:gd name="adj" fmla="val 28846"/>
             </a:avLst>
           </a:prstGeom>
           <a:solidFill>
@@ -25021,14 +25101,14 @@
       </p:sp>
       <p:sp>
         <p:nvSpPr>
-          <p:cNvPr id="210" name="Text 188"/>
-          <p:cNvSpPr/>
-          <p:nvPr/>
-        </p:nvSpPr>
-        <p:spPr>
-          <a:xfrm>
-            <a:off x="2780690" y="5461711"/>
-            <a:ext cx="604418" cy="190195"/>
+          <p:cNvPr id="214" name="Text 192"/>
+          <p:cNvSpPr/>
+          <p:nvPr/>
+        </p:nvSpPr>
+        <p:spPr>
+          <a:xfrm>
+            <a:off x="2798064" y="5490972"/>
+            <a:ext cx="569671" cy="131674"/>
           </a:xfrm>
           <a:prstGeom prst="rect">
             <a:avLst/>
@@ -25042,12 +25122,12 @@
           <a:p>
             <a:pPr algn="ctr" indent="0" marL="0">
               <a:lnSpc>
-                <a:spcPct val="102000"/>
+                <a:spcPct val="100000"/>
               </a:lnSpc>
               <a:buNone/>
             </a:pPr>
             <a:r>
-              <a:rPr lang="en-US" sz="410" b="1" dirty="0">
+              <a:rPr lang="en-US" sz="385" b="1" dirty="0">
                 <a:solidFill>
                   <a:srgbClr val="202124"/>
                 </a:solidFill>
@@ -25057,17 +25137,17 @@
               </a:rPr>
               <a:t>finvault-silo-cmek</a:t>
             </a:r>
-            <a:endParaRPr lang="en-US" sz="410" dirty="0"/>
+            <a:endParaRPr lang="en-US" sz="385" dirty="0"/>
           </a:p>
           <a:p>
             <a:pPr algn="ctr" indent="0" marL="0">
               <a:lnSpc>
-                <a:spcPct val="102000"/>
+                <a:spcPct val="100000"/>
               </a:lnSpc>
               <a:buNone/>
             </a:pPr>
             <a:r>
-              <a:rPr lang="en-US" sz="375" dirty="0">
+              <a:rPr lang="en-US" sz="350" dirty="0">
                 <a:solidFill>
                   <a:srgbClr val="202124"/>
                 </a:solidFill>
@@ -25077,24 +25157,24 @@
               </a:rPr>
               <a:t>HTTP 423 Ready</a:t>
             </a:r>
-            <a:endParaRPr lang="en-US" sz="410" dirty="0"/>
-          </a:p>
-        </p:txBody>
-      </p:sp>
-      <p:sp>
-        <p:nvSpPr>
-          <p:cNvPr id="211" name="Shape 189"/>
-          <p:cNvSpPr/>
-          <p:nvPr/>
-        </p:nvSpPr>
-        <p:spPr>
-          <a:xfrm>
-            <a:off x="5208422" y="4817974"/>
-            <a:ext cx="480060" cy="208483"/>
+            <a:endParaRPr lang="en-US" sz="385" dirty="0"/>
+          </a:p>
+        </p:txBody>
+      </p:sp>
+      <p:sp>
+        <p:nvSpPr>
+          <p:cNvPr id="215" name="Shape 193"/>
+          <p:cNvSpPr/>
+          <p:nvPr/>
+        </p:nvSpPr>
+        <p:spPr>
+          <a:xfrm>
+            <a:off x="5223053" y="4850892"/>
+            <a:ext cx="449885" cy="142646"/>
           </a:xfrm>
           <a:prstGeom prst="roundRect">
             <a:avLst>
-              <a:gd name="adj" fmla="val 21930"/>
+              <a:gd name="adj" fmla="val 28846"/>
             </a:avLst>
           </a:prstGeom>
           <a:solidFill>
@@ -25110,14 +25190,14 @@
       </p:sp>
       <p:sp>
         <p:nvSpPr>
-          <p:cNvPr id="212" name="Text 190"/>
-          <p:cNvSpPr/>
-          <p:nvPr/>
-        </p:nvSpPr>
-        <p:spPr>
-          <a:xfrm>
-            <a:off x="5228539" y="4827118"/>
-            <a:ext cx="439826" cy="190195"/>
+          <p:cNvPr id="216" name="Text 194"/>
+          <p:cNvSpPr/>
+          <p:nvPr/>
+        </p:nvSpPr>
+        <p:spPr>
+          <a:xfrm>
+            <a:off x="5241341" y="4856378"/>
+            <a:ext cx="413309" cy="131674"/>
           </a:xfrm>
           <a:prstGeom prst="rect">
             <a:avLst/>
@@ -25131,12 +25211,12 @@
           <a:p>
             <a:pPr algn="ctr" indent="0" marL="0">
               <a:lnSpc>
-                <a:spcPct val="102000"/>
+                <a:spcPct val="100000"/>
               </a:lnSpc>
               <a:buNone/>
             </a:pPr>
             <a:r>
-              <a:rPr lang="en-US" sz="410" b="1" dirty="0">
+              <a:rPr lang="en-US" sz="385" b="1" dirty="0">
                 <a:solidFill>
                   <a:srgbClr val="202124"/>
                 </a:solidFill>
@@ -25146,17 +25226,17 @@
               </a:rPr>
               <a:t>VPC-SC Bound</a:t>
             </a:r>
-            <a:endParaRPr lang="en-US" sz="410" dirty="0"/>
+            <a:endParaRPr lang="en-US" sz="385" dirty="0"/>
           </a:p>
           <a:p>
             <a:pPr algn="ctr" indent="0" marL="0">
               <a:lnSpc>
-                <a:spcPct val="102000"/>
+                <a:spcPct val="100000"/>
               </a:lnSpc>
               <a:buNone/>
             </a:pPr>
             <a:r>
-              <a:rPr lang="en-US" sz="375" dirty="0">
+              <a:rPr lang="en-US" sz="350" dirty="0">
                 <a:solidFill>
                   <a:srgbClr val="202124"/>
                 </a:solidFill>
@@ -25166,24 +25246,24 @@
               </a:rPr>
               <a:t>Secure RAG</a:t>
             </a:r>
-            <a:endParaRPr lang="en-US" sz="410" dirty="0"/>
-          </a:p>
-        </p:txBody>
-      </p:sp>
-      <p:sp>
-        <p:nvSpPr>
-          <p:cNvPr id="213" name="Shape 191"/>
-          <p:cNvSpPr/>
-          <p:nvPr/>
-        </p:nvSpPr>
-        <p:spPr>
-          <a:xfrm>
-            <a:off x="5138928" y="5452567"/>
-            <a:ext cx="617220" cy="208483"/>
+            <a:endParaRPr lang="en-US" sz="385" dirty="0"/>
+          </a:p>
+        </p:txBody>
+      </p:sp>
+      <p:sp>
+        <p:nvSpPr>
+          <p:cNvPr id="217" name="Shape 195"/>
+          <p:cNvSpPr/>
+          <p:nvPr/>
+        </p:nvSpPr>
+        <p:spPr>
+          <a:xfrm>
+            <a:off x="5158130" y="5485486"/>
+            <a:ext cx="580644" cy="142646"/>
           </a:xfrm>
           <a:prstGeom prst="roundRect">
             <a:avLst>
-              <a:gd name="adj" fmla="val 21930"/>
+              <a:gd name="adj" fmla="val 28846"/>
             </a:avLst>
           </a:prstGeom>
           <a:solidFill>
@@ -25199,14 +25279,14 @@
       </p:sp>
       <p:sp>
         <p:nvSpPr>
-          <p:cNvPr id="214" name="Text 192"/>
-          <p:cNvSpPr/>
-          <p:nvPr/>
-        </p:nvSpPr>
-        <p:spPr>
-          <a:xfrm>
-            <a:off x="5159045" y="5461711"/>
-            <a:ext cx="576986" cy="190195"/>
+          <p:cNvPr id="218" name="Text 196"/>
+          <p:cNvSpPr/>
+          <p:nvPr/>
+        </p:nvSpPr>
+        <p:spPr>
+          <a:xfrm>
+            <a:off x="5176418" y="5490972"/>
+            <a:ext cx="544068" cy="131674"/>
           </a:xfrm>
           <a:prstGeom prst="rect">
             <a:avLst/>
@@ -25220,12 +25300,12 @@
           <a:p>
             <a:pPr algn="ctr" indent="0" marL="0">
               <a:lnSpc>
-                <a:spcPct val="102000"/>
+                <a:spcPct val="100000"/>
               </a:lnSpc>
               <a:buNone/>
             </a:pPr>
             <a:r>
-              <a:rPr lang="en-US" sz="410" b="1" dirty="0">
+              <a:rPr lang="en-US" sz="385" b="1" dirty="0">
                 <a:solidFill>
                   <a:srgbClr val="202124"/>
                 </a:solidFill>
@@ -25235,17 +25315,17 @@
               </a:rPr>
               <a:t>CMEK Kill-Switch</a:t>
             </a:r>
-            <a:endParaRPr lang="en-US" sz="410" dirty="0"/>
+            <a:endParaRPr lang="en-US" sz="385" dirty="0"/>
           </a:p>
           <a:p>
             <a:pPr algn="ctr" indent="0" marL="0">
               <a:lnSpc>
-                <a:spcPct val="102000"/>
+                <a:spcPct val="100000"/>
               </a:lnSpc>
               <a:buNone/>
             </a:pPr>
             <a:r>
-              <a:rPr lang="en-US" sz="375" dirty="0">
+              <a:rPr lang="en-US" sz="350" dirty="0">
                 <a:solidFill>
                   <a:srgbClr val="202124"/>
                 </a:solidFill>
@@ -25255,24 +25335,24 @@
               </a:rPr>
               <a:t>HTTP 423 Verified</a:t>
             </a:r>
-            <a:endParaRPr lang="en-US" sz="410" dirty="0"/>
-          </a:p>
-        </p:txBody>
-      </p:sp>
-      <p:sp>
-        <p:nvSpPr>
-          <p:cNvPr id="215" name="Shape 193"/>
-          <p:cNvSpPr/>
-          <p:nvPr/>
-        </p:nvSpPr>
-        <p:spPr>
-          <a:xfrm>
-            <a:off x="1757477" y="5604358"/>
-            <a:ext cx="425196" cy="208483"/>
+            <a:endParaRPr lang="en-US" sz="385" dirty="0"/>
+          </a:p>
+        </p:txBody>
+      </p:sp>
+      <p:sp>
+        <p:nvSpPr>
+          <p:cNvPr id="219" name="Shape 197"/>
+          <p:cNvSpPr/>
+          <p:nvPr/>
+        </p:nvSpPr>
+        <p:spPr>
+          <a:xfrm>
+            <a:off x="1757477" y="5637276"/>
+            <a:ext cx="397764" cy="142646"/>
           </a:xfrm>
           <a:prstGeom prst="roundRect">
             <a:avLst>
-              <a:gd name="adj" fmla="val 21930"/>
+              <a:gd name="adj" fmla="val 28846"/>
             </a:avLst>
           </a:prstGeom>
           <a:solidFill>
@@ -25288,14 +25368,14 @@
       </p:sp>
       <p:sp>
         <p:nvSpPr>
-          <p:cNvPr id="216" name="Text 194"/>
-          <p:cNvSpPr/>
-          <p:nvPr/>
-        </p:nvSpPr>
-        <p:spPr>
-          <a:xfrm>
-            <a:off x="1777594" y="5613502"/>
-            <a:ext cx="384962" cy="190195"/>
+          <p:cNvPr id="220" name="Text 198"/>
+          <p:cNvSpPr/>
+          <p:nvPr/>
+        </p:nvSpPr>
+        <p:spPr>
+          <a:xfrm>
+            <a:off x="1775765" y="5642762"/>
+            <a:ext cx="361188" cy="131674"/>
           </a:xfrm>
           <a:prstGeom prst="rect">
             <a:avLst/>
@@ -25309,12 +25389,12 @@
           <a:p>
             <a:pPr algn="ctr" indent="0" marL="0">
               <a:lnSpc>
-                <a:spcPct val="102000"/>
+                <a:spcPct val="100000"/>
               </a:lnSpc>
               <a:buNone/>
             </a:pPr>
             <a:r>
-              <a:rPr lang="en-US" sz="410" b="1" dirty="0">
+              <a:rPr lang="en-US" sz="385" b="1" dirty="0">
                 <a:solidFill>
                   <a:srgbClr val="202124"/>
                 </a:solidFill>
@@ -25324,17 +25404,17 @@
               </a:rPr>
               <a:t>Air-gapped</a:t>
             </a:r>
-            <a:endParaRPr lang="en-US" sz="410" dirty="0"/>
+            <a:endParaRPr lang="en-US" sz="385" dirty="0"/>
           </a:p>
           <a:p>
             <a:pPr algn="ctr" indent="0" marL="0">
               <a:lnSpc>
-                <a:spcPct val="102000"/>
+                <a:spcPct val="100000"/>
               </a:lnSpc>
               <a:buNone/>
             </a:pPr>
             <a:r>
-              <a:rPr lang="en-US" sz="375" dirty="0">
+              <a:rPr lang="en-US" sz="350" dirty="0">
                 <a:solidFill>
                   <a:srgbClr val="202124"/>
                 </a:solidFill>
@@ -25344,24 +25424,24 @@
               </a:rPr>
               <a:t>inference</a:t>
             </a:r>
-            <a:endParaRPr lang="en-US" sz="410" dirty="0"/>
-          </a:p>
-        </p:txBody>
-      </p:sp>
-      <p:sp>
-        <p:nvSpPr>
-          <p:cNvPr id="217" name="Shape 195"/>
-          <p:cNvSpPr/>
-          <p:nvPr/>
-        </p:nvSpPr>
-        <p:spPr>
-          <a:xfrm>
-            <a:off x="3905402" y="3354019"/>
-            <a:ext cx="699516" cy="208483"/>
+            <a:endParaRPr lang="en-US" sz="385" dirty="0"/>
+          </a:p>
+        </p:txBody>
+      </p:sp>
+      <p:sp>
+        <p:nvSpPr>
+          <p:cNvPr id="221" name="Shape 199"/>
+          <p:cNvSpPr/>
+          <p:nvPr/>
+        </p:nvSpPr>
+        <p:spPr>
+          <a:xfrm>
+            <a:off x="3905402" y="3389681"/>
+            <a:ext cx="658368" cy="137160"/>
           </a:xfrm>
           <a:prstGeom prst="roundRect">
             <a:avLst>
-              <a:gd name="adj" fmla="val 21930"/>
+              <a:gd name="adj" fmla="val 30000"/>
             </a:avLst>
           </a:prstGeom>
           <a:solidFill>
@@ -25377,14 +25457,14 @@
       </p:sp>
       <p:sp>
         <p:nvSpPr>
-          <p:cNvPr id="218" name="Text 196"/>
-          <p:cNvSpPr/>
-          <p:nvPr/>
-        </p:nvSpPr>
-        <p:spPr>
-          <a:xfrm>
-            <a:off x="3925519" y="3363163"/>
-            <a:ext cx="659282" cy="190195"/>
+          <p:cNvPr id="222" name="Text 200"/>
+          <p:cNvSpPr/>
+          <p:nvPr/>
+        </p:nvSpPr>
+        <p:spPr>
+          <a:xfrm>
+            <a:off x="3923690" y="3395167"/>
+            <a:ext cx="621792" cy="126187"/>
           </a:xfrm>
           <a:prstGeom prst="rect">
             <a:avLst/>
@@ -25398,12 +25478,12 @@
           <a:p>
             <a:pPr algn="ctr" indent="0" marL="0">
               <a:lnSpc>
-                <a:spcPct val="102000"/>
+                <a:spcPct val="100000"/>
               </a:lnSpc>
               <a:buNone/>
             </a:pPr>
             <a:r>
-              <a:rPr lang="en-US" sz="410" b="1" dirty="0">
+              <a:rPr lang="en-US" sz="385" b="1" dirty="0">
                 <a:solidFill>
                   <a:srgbClr val="202124"/>
                 </a:solidFill>
@@ -25413,17 +25493,17 @@
               </a:rPr>
               <a:t>Sovereign response</a:t>
             </a:r>
-            <a:endParaRPr lang="en-US" sz="410" dirty="0"/>
+            <a:endParaRPr lang="en-US" sz="385" dirty="0"/>
           </a:p>
           <a:p>
             <a:pPr algn="ctr" indent="0" marL="0">
               <a:lnSpc>
-                <a:spcPct val="102000"/>
+                <a:spcPct val="100000"/>
               </a:lnSpc>
               <a:buNone/>
             </a:pPr>
             <a:r>
-              <a:rPr lang="en-US" sz="375" dirty="0">
+              <a:rPr lang="en-US" sz="350" dirty="0">
                 <a:solidFill>
                   <a:srgbClr val="202124"/>
                 </a:solidFill>
@@ -25433,24 +25513,24 @@
               </a:rPr>
               <a:t>(or HTTP 423 Locked)</a:t>
             </a:r>
-            <a:endParaRPr lang="en-US" sz="410" dirty="0"/>
-          </a:p>
-        </p:txBody>
-      </p:sp>
-      <p:sp>
-        <p:nvSpPr>
-          <p:cNvPr id="219" name="Shape 197"/>
-          <p:cNvSpPr/>
-          <p:nvPr/>
-        </p:nvSpPr>
-        <p:spPr>
-          <a:xfrm>
-            <a:off x="2983687" y="3354019"/>
-            <a:ext cx="669341" cy="208483"/>
+            <a:endParaRPr lang="en-US" sz="385" dirty="0"/>
+          </a:p>
+        </p:txBody>
+      </p:sp>
+      <p:sp>
+        <p:nvSpPr>
+          <p:cNvPr id="223" name="Shape 201"/>
+          <p:cNvSpPr/>
+          <p:nvPr/>
+        </p:nvSpPr>
+        <p:spPr>
+          <a:xfrm>
+            <a:off x="2983687" y="3389681"/>
+            <a:ext cx="669341" cy="137160"/>
           </a:xfrm>
           <a:prstGeom prst="roundRect">
             <a:avLst>
-              <a:gd name="adj" fmla="val 21930"/>
+              <a:gd name="adj" fmla="val 30000"/>
             </a:avLst>
           </a:prstGeom>
           <a:solidFill>
@@ -25466,14 +25546,14 @@
       </p:sp>
       <p:sp>
         <p:nvSpPr>
-          <p:cNvPr id="220" name="Text 198"/>
-          <p:cNvSpPr/>
-          <p:nvPr/>
-        </p:nvSpPr>
-        <p:spPr>
-          <a:xfrm>
-            <a:off x="3003804" y="3363163"/>
-            <a:ext cx="629107" cy="190195"/>
+          <p:cNvPr id="224" name="Text 202"/>
+          <p:cNvSpPr/>
+          <p:nvPr/>
+        </p:nvSpPr>
+        <p:spPr>
+          <a:xfrm>
+            <a:off x="3001975" y="3395167"/>
+            <a:ext cx="632765" cy="126187"/>
           </a:xfrm>
           <a:prstGeom prst="rect">
             <a:avLst/>
@@ -25487,12 +25567,12 @@
           <a:p>
             <a:pPr algn="ctr" indent="0" marL="0">
               <a:lnSpc>
-                <a:spcPct val="102000"/>
+                <a:spcPct val="100000"/>
               </a:lnSpc>
               <a:buNone/>
             </a:pPr>
             <a:r>
-              <a:rPr lang="en-US" sz="410" b="1" dirty="0">
+              <a:rPr lang="en-US" sz="385" b="1" dirty="0">
                 <a:solidFill>
                   <a:srgbClr val="202124"/>
                 </a:solidFill>
@@ -25502,17 +25582,17 @@
               </a:rPr>
               <a:t>Route to isolated</a:t>
             </a:r>
-            <a:endParaRPr lang="en-US" sz="410" dirty="0"/>
+            <a:endParaRPr lang="en-US" sz="385" dirty="0"/>
           </a:p>
           <a:p>
             <a:pPr algn="ctr" indent="0" marL="0">
               <a:lnSpc>
-                <a:spcPct val="102000"/>
+                <a:spcPct val="100000"/>
               </a:lnSpc>
               <a:buNone/>
             </a:pPr>
             <a:r>
-              <a:rPr lang="en-US" sz="375" dirty="0">
+              <a:rPr lang="en-US" sz="350" dirty="0">
                 <a:solidFill>
                   <a:srgbClr val="202124"/>
                 </a:solidFill>
@@ -25522,24 +25602,24 @@
               </a:rPr>
               <a:t>VPC-SC tenant project</a:t>
             </a:r>
-            <a:endParaRPr lang="en-US" sz="410" dirty="0"/>
-          </a:p>
-        </p:txBody>
-      </p:sp>
-      <p:sp>
-        <p:nvSpPr>
-          <p:cNvPr id="221" name="Shape 199"/>
-          <p:cNvSpPr/>
-          <p:nvPr/>
-        </p:nvSpPr>
-        <p:spPr>
-          <a:xfrm>
-            <a:off x="2575865" y="2871216"/>
-            <a:ext cx="452628" cy="208483"/>
+            <a:endParaRPr lang="en-US" sz="385" dirty="0"/>
+          </a:p>
+        </p:txBody>
+      </p:sp>
+      <p:sp>
+        <p:nvSpPr>
+          <p:cNvPr id="225" name="Shape 203"/>
+          <p:cNvSpPr/>
+          <p:nvPr/>
+        </p:nvSpPr>
+        <p:spPr>
+          <a:xfrm>
+            <a:off x="2589581" y="2908706"/>
+            <a:ext cx="424282" cy="133502"/>
           </a:xfrm>
           <a:prstGeom prst="roundRect">
             <a:avLst>
-              <a:gd name="adj" fmla="val 21930"/>
+              <a:gd name="adj" fmla="val 30822"/>
             </a:avLst>
           </a:prstGeom>
           <a:solidFill>
@@ -25555,14 +25635,14 @@
       </p:sp>
       <p:sp>
         <p:nvSpPr>
-          <p:cNvPr id="222" name="Text 200"/>
-          <p:cNvSpPr/>
-          <p:nvPr/>
-        </p:nvSpPr>
-        <p:spPr>
-          <a:xfrm>
-            <a:off x="2595982" y="2880360"/>
-            <a:ext cx="412394" cy="190195"/>
+          <p:cNvPr id="226" name="Text 204"/>
+          <p:cNvSpPr/>
+          <p:nvPr/>
+        </p:nvSpPr>
+        <p:spPr>
+          <a:xfrm>
+            <a:off x="2607869" y="2914193"/>
+            <a:ext cx="387706" cy="122530"/>
           </a:xfrm>
           <a:prstGeom prst="rect">
             <a:avLst/>
@@ -25576,12 +25656,12 @@
           <a:p>
             <a:pPr algn="ctr" indent="0" marL="0">
               <a:lnSpc>
-                <a:spcPct val="102000"/>
+                <a:spcPct val="100000"/>
               </a:lnSpc>
               <a:buNone/>
             </a:pPr>
             <a:r>
-              <a:rPr lang="en-US" sz="410" b="1" dirty="0">
+              <a:rPr lang="en-US" sz="385" b="1" dirty="0">
                 <a:solidFill>
                   <a:srgbClr val="202124"/>
                 </a:solidFill>
@@ -25591,17 +25671,17 @@
               </a:rPr>
               <a:t>Enforce org</a:t>
             </a:r>
-            <a:endParaRPr lang="en-US" sz="410" dirty="0"/>
+            <a:endParaRPr lang="en-US" sz="385" dirty="0"/>
           </a:p>
           <a:p>
             <a:pPr algn="ctr" indent="0" marL="0">
               <a:lnSpc>
-                <a:spcPct val="102000"/>
+                <a:spcPct val="100000"/>
               </a:lnSpc>
               <a:buNone/>
             </a:pPr>
             <a:r>
-              <a:rPr lang="en-US" sz="375" dirty="0">
+              <a:rPr lang="en-US" sz="350" dirty="0">
                 <a:solidFill>
                   <a:srgbClr val="202124"/>
                 </a:solidFill>
@@ -25611,24 +25691,24 @@
               </a:rPr>
               <a:t>PAB policy</a:t>
             </a:r>
-            <a:endParaRPr lang="en-US" sz="410" dirty="0"/>
-          </a:p>
-        </p:txBody>
-      </p:sp>
-      <p:sp>
-        <p:nvSpPr>
-          <p:cNvPr id="223" name="Shape 201"/>
-          <p:cNvSpPr/>
-          <p:nvPr/>
-        </p:nvSpPr>
-        <p:spPr>
-          <a:xfrm>
-            <a:off x="1757477" y="4605833"/>
-            <a:ext cx="589788" cy="138989"/>
+            <a:endParaRPr lang="en-US" sz="385" dirty="0"/>
+          </a:p>
+        </p:txBody>
+      </p:sp>
+      <p:sp>
+        <p:nvSpPr>
+          <p:cNvPr id="227" name="Shape 205"/>
+          <p:cNvSpPr/>
+          <p:nvPr/>
+        </p:nvSpPr>
+        <p:spPr>
+          <a:xfrm>
+            <a:off x="1757477" y="4623206"/>
+            <a:ext cx="554126" cy="103327"/>
           </a:xfrm>
           <a:prstGeom prst="roundRect">
             <a:avLst>
-              <a:gd name="adj" fmla="val 32895"/>
+              <a:gd name="adj" fmla="val 39823"/>
             </a:avLst>
           </a:prstGeom>
           <a:solidFill>
@@ -25644,14 +25724,14 @@
       </p:sp>
       <p:sp>
         <p:nvSpPr>
-          <p:cNvPr id="224" name="Text 202"/>
-          <p:cNvSpPr/>
-          <p:nvPr/>
-        </p:nvSpPr>
-        <p:spPr>
-          <a:xfrm>
-            <a:off x="1777594" y="4614977"/>
-            <a:ext cx="549554" cy="120701"/>
+          <p:cNvPr id="228" name="Text 206"/>
+          <p:cNvSpPr/>
+          <p:nvPr/>
+        </p:nvSpPr>
+        <p:spPr>
+          <a:xfrm>
+            <a:off x="1775765" y="4628693"/>
+            <a:ext cx="517550" cy="92354"/>
           </a:xfrm>
           <a:prstGeom prst="rect">
             <a:avLst/>
@@ -25665,12 +25745,12 @@
           <a:p>
             <a:pPr algn="ctr" indent="0" marL="0">
               <a:lnSpc>
-                <a:spcPct val="102000"/>
+                <a:spcPct val="100000"/>
               </a:lnSpc>
               <a:buNone/>
             </a:pPr>
             <a:r>
-              <a:rPr lang="en-US" sz="410" b="1" dirty="0">
+              <a:rPr lang="en-US" sz="385" b="1" dirty="0">
                 <a:solidFill>
                   <a:srgbClr val="202124"/>
                 </a:solidFill>
@@ -25680,24 +25760,24 @@
               </a:rPr>
               <a:t>Sanitize request</a:t>
             </a:r>
-            <a:endParaRPr lang="en-US" sz="410" dirty="0"/>
-          </a:p>
-        </p:txBody>
-      </p:sp>
-      <p:sp>
-        <p:nvSpPr>
-          <p:cNvPr id="225" name="Shape 203"/>
-          <p:cNvSpPr/>
-          <p:nvPr/>
-        </p:nvSpPr>
-        <p:spPr>
-          <a:xfrm>
-            <a:off x="1757477" y="4814316"/>
-            <a:ext cx="617220" cy="138989"/>
+            <a:endParaRPr lang="en-US" sz="385" dirty="0"/>
+          </a:p>
+        </p:txBody>
+      </p:sp>
+      <p:sp>
+        <p:nvSpPr>
+          <p:cNvPr id="229" name="Shape 207"/>
+          <p:cNvSpPr/>
+          <p:nvPr/>
+        </p:nvSpPr>
+        <p:spPr>
+          <a:xfrm>
+            <a:off x="1757477" y="4831690"/>
+            <a:ext cx="580644" cy="103327"/>
           </a:xfrm>
           <a:prstGeom prst="roundRect">
             <a:avLst>
-              <a:gd name="adj" fmla="val 32895"/>
+              <a:gd name="adj" fmla="val 39823"/>
             </a:avLst>
           </a:prstGeom>
           <a:solidFill>
@@ -25713,14 +25793,14 @@
       </p:sp>
       <p:sp>
         <p:nvSpPr>
-          <p:cNvPr id="226" name="Text 204"/>
-          <p:cNvSpPr/>
-          <p:nvPr/>
-        </p:nvSpPr>
-        <p:spPr>
-          <a:xfrm>
-            <a:off x="1777594" y="4823460"/>
-            <a:ext cx="576986" cy="120701"/>
+          <p:cNvPr id="230" name="Text 208"/>
+          <p:cNvSpPr/>
+          <p:nvPr/>
+        </p:nvSpPr>
+        <p:spPr>
+          <a:xfrm>
+            <a:off x="1775765" y="4837176"/>
+            <a:ext cx="544068" cy="92354"/>
           </a:xfrm>
           <a:prstGeom prst="rect">
             <a:avLst/>
@@ -25734,12 +25814,12 @@
           <a:p>
             <a:pPr algn="ctr" indent="0" marL="0">
               <a:lnSpc>
-                <a:spcPct val="102000"/>
+                <a:spcPct val="100000"/>
               </a:lnSpc>
               <a:buNone/>
             </a:pPr>
             <a:r>
-              <a:rPr lang="en-US" sz="410" b="1" dirty="0">
+              <a:rPr lang="en-US" sz="385" b="1" dirty="0">
                 <a:solidFill>
                   <a:srgbClr val="202124"/>
                 </a:solidFill>
@@ -25749,24 +25829,24 @@
               </a:rPr>
               <a:t>Sanitize response</a:t>
             </a:r>
-            <a:endParaRPr lang="en-US" sz="410" dirty="0"/>
-          </a:p>
-        </p:txBody>
-      </p:sp>
-      <p:sp>
-        <p:nvSpPr>
-          <p:cNvPr id="227" name="Shape 205"/>
-          <p:cNvSpPr/>
-          <p:nvPr/>
-        </p:nvSpPr>
-        <p:spPr>
-          <a:xfrm>
-            <a:off x="2435962" y="2080260"/>
-            <a:ext cx="495605" cy="208483"/>
+            <a:endParaRPr lang="en-US" sz="385" dirty="0"/>
+          </a:p>
+        </p:txBody>
+      </p:sp>
+      <p:sp>
+        <p:nvSpPr>
+          <p:cNvPr id="231" name="Shape 209"/>
+          <p:cNvSpPr/>
+          <p:nvPr/>
+        </p:nvSpPr>
+        <p:spPr>
+          <a:xfrm>
+            <a:off x="2446020" y="2117750"/>
+            <a:ext cx="475488" cy="133502"/>
           </a:xfrm>
           <a:prstGeom prst="roundRect">
             <a:avLst>
-              <a:gd name="adj" fmla="val 21930"/>
+              <a:gd name="adj" fmla="val 30822"/>
             </a:avLst>
           </a:prstGeom>
           <a:solidFill>
@@ -25782,14 +25862,14 @@
       </p:sp>
       <p:sp>
         <p:nvSpPr>
-          <p:cNvPr id="228" name="Text 206"/>
-          <p:cNvSpPr/>
-          <p:nvPr/>
-        </p:nvSpPr>
-        <p:spPr>
-          <a:xfrm>
-            <a:off x="2456078" y="2089404"/>
-            <a:ext cx="455371" cy="190195"/>
+          <p:cNvPr id="232" name="Text 210"/>
+          <p:cNvSpPr/>
+          <p:nvPr/>
+        </p:nvSpPr>
+        <p:spPr>
+          <a:xfrm>
+            <a:off x="2464308" y="2123237"/>
+            <a:ext cx="438912" cy="122530"/>
           </a:xfrm>
           <a:prstGeom prst="rect">
             <a:avLst/>
@@ -25803,12 +25883,12 @@
           <a:p>
             <a:pPr algn="ctr" indent="0" marL="0">
               <a:lnSpc>
-                <a:spcPct val="102000"/>
+                <a:spcPct val="100000"/>
               </a:lnSpc>
               <a:buNone/>
             </a:pPr>
             <a:r>
-              <a:rPr lang="en-US" sz="410" b="1" dirty="0">
+              <a:rPr lang="en-US" sz="385" b="1" dirty="0">
                 <a:solidFill>
                   <a:srgbClr val="202124"/>
                 </a:solidFill>
@@ -25818,17 +25898,17 @@
               </a:rPr>
               <a:t>Verify client</a:t>
             </a:r>
-            <a:endParaRPr lang="en-US" sz="410" dirty="0"/>
+            <a:endParaRPr lang="en-US" sz="385" dirty="0"/>
           </a:p>
           <a:p>
             <a:pPr algn="ctr" indent="0" marL="0">
               <a:lnSpc>
-                <a:spcPct val="102000"/>
+                <a:spcPct val="100000"/>
               </a:lnSpc>
               <a:buNone/>
             </a:pPr>
             <a:r>
-              <a:rPr lang="en-US" sz="375" dirty="0">
+              <a:rPr lang="en-US" sz="350" dirty="0">
                 <a:solidFill>
                   <a:srgbClr val="202124"/>
                 </a:solidFill>
@@ -25838,24 +25918,24 @@
               </a:rPr>
               <a:t>SPIFFE SAN</a:t>
             </a:r>
-            <a:endParaRPr lang="en-US" sz="410" dirty="0"/>
-          </a:p>
-        </p:txBody>
-      </p:sp>
-      <p:sp>
-        <p:nvSpPr>
-          <p:cNvPr id="229" name="Shape 207"/>
-          <p:cNvSpPr/>
-          <p:nvPr/>
-        </p:nvSpPr>
-        <p:spPr>
-          <a:xfrm>
-            <a:off x="2498141" y="2625242"/>
-            <a:ext cx="370332" cy="208483"/>
+            <a:endParaRPr lang="en-US" sz="385" dirty="0"/>
+          </a:p>
+        </p:txBody>
+      </p:sp>
+      <p:sp>
+        <p:nvSpPr>
+          <p:cNvPr id="233" name="Shape 211"/>
+          <p:cNvSpPr/>
+          <p:nvPr/>
+        </p:nvSpPr>
+        <p:spPr>
+          <a:xfrm>
+            <a:off x="2510942" y="2717597"/>
+            <a:ext cx="345643" cy="133502"/>
           </a:xfrm>
           <a:prstGeom prst="roundRect">
             <a:avLst>
-              <a:gd name="adj" fmla="val 21930"/>
+              <a:gd name="adj" fmla="val 30822"/>
             </a:avLst>
           </a:prstGeom>
           <a:solidFill>
@@ -25871,14 +25951,14 @@
       </p:sp>
       <p:sp>
         <p:nvSpPr>
-          <p:cNvPr id="230" name="Text 208"/>
-          <p:cNvSpPr/>
-          <p:nvPr/>
-        </p:nvSpPr>
-        <p:spPr>
-          <a:xfrm>
-            <a:off x="2518258" y="2634386"/>
-            <a:ext cx="330098" cy="190195"/>
+          <p:cNvPr id="234" name="Text 212"/>
+          <p:cNvSpPr/>
+          <p:nvPr/>
+        </p:nvSpPr>
+        <p:spPr>
+          <a:xfrm>
+            <a:off x="2529230" y="2723083"/>
+            <a:ext cx="309067" cy="122530"/>
           </a:xfrm>
           <a:prstGeom prst="rect">
             <a:avLst/>
@@ -25892,12 +25972,12 @@
           <a:p>
             <a:pPr algn="ctr" indent="0" marL="0">
               <a:lnSpc>
-                <a:spcPct val="102000"/>
+                <a:spcPct val="100000"/>
               </a:lnSpc>
               <a:buNone/>
             </a:pPr>
             <a:r>
-              <a:rPr lang="en-US" sz="410" b="1" dirty="0">
+              <a:rPr lang="en-US" sz="385" b="1" dirty="0">
                 <a:solidFill>
                   <a:srgbClr val="202124"/>
                 </a:solidFill>
@@ -25907,17 +25987,17 @@
               </a:rPr>
               <a:t>Sanitize</a:t>
             </a:r>
-            <a:endParaRPr lang="en-US" sz="410" dirty="0"/>
+            <a:endParaRPr lang="en-US" sz="385" dirty="0"/>
           </a:p>
           <a:p>
             <a:pPr algn="ctr" indent="0" marL="0">
               <a:lnSpc>
-                <a:spcPct val="102000"/>
+                <a:spcPct val="100000"/>
               </a:lnSpc>
               <a:buNone/>
             </a:pPr>
             <a:r>
-              <a:rPr lang="en-US" sz="375" dirty="0">
+              <a:rPr lang="en-US" sz="350" dirty="0">
                 <a:solidFill>
                   <a:srgbClr val="202124"/>
                 </a:solidFill>
@@ -25927,24 +26007,24 @@
               </a:rPr>
               <a:t>prompt</a:t>
             </a:r>
-            <a:endParaRPr lang="en-US" sz="410" dirty="0"/>
-          </a:p>
-        </p:txBody>
-      </p:sp>
-      <p:sp>
-        <p:nvSpPr>
-          <p:cNvPr id="231" name="Shape 209"/>
-          <p:cNvSpPr/>
-          <p:nvPr/>
-        </p:nvSpPr>
-        <p:spPr>
-          <a:xfrm>
-            <a:off x="3888029" y="1144829"/>
-            <a:ext cx="443484" cy="138989"/>
+            <a:endParaRPr lang="en-US" sz="385" dirty="0"/>
+          </a:p>
+        </p:txBody>
+      </p:sp>
+      <p:sp>
+        <p:nvSpPr>
+          <p:cNvPr id="235" name="Shape 213"/>
+          <p:cNvSpPr/>
+          <p:nvPr/>
+        </p:nvSpPr>
+        <p:spPr>
+          <a:xfrm>
+            <a:off x="3888029" y="1163117"/>
+            <a:ext cx="443484" cy="103327"/>
           </a:xfrm>
           <a:prstGeom prst="roundRect">
             <a:avLst>
-              <a:gd name="adj" fmla="val 32895"/>
+              <a:gd name="adj" fmla="val 39823"/>
             </a:avLst>
           </a:prstGeom>
           <a:solidFill>
@@ -25960,14 +26040,14 @@
       </p:sp>
       <p:sp>
         <p:nvSpPr>
-          <p:cNvPr id="232" name="Text 210"/>
-          <p:cNvSpPr/>
-          <p:nvPr/>
-        </p:nvSpPr>
-        <p:spPr>
-          <a:xfrm>
-            <a:off x="3908146" y="1153973"/>
-            <a:ext cx="403250" cy="120701"/>
+          <p:cNvPr id="236" name="Text 214"/>
+          <p:cNvSpPr/>
+          <p:nvPr/>
+        </p:nvSpPr>
+        <p:spPr>
+          <a:xfrm>
+            <a:off x="3906317" y="1168603"/>
+            <a:ext cx="406908" cy="92354"/>
           </a:xfrm>
           <a:prstGeom prst="rect">
             <a:avLst/>
@@ -25981,12 +26061,12 @@
           <a:p>
             <a:pPr algn="ctr" indent="0" marL="0">
               <a:lnSpc>
-                <a:spcPct val="102000"/>
+                <a:spcPct val="100000"/>
               </a:lnSpc>
               <a:buNone/>
             </a:pPr>
             <a:r>
-              <a:rPr lang="en-US" sz="410" b="1" dirty="0">
+              <a:rPr lang="en-US" sz="385" b="1" dirty="0">
                 <a:solidFill>
                   <a:srgbClr val="202124"/>
                 </a:solidFill>
@@ -25996,24 +26076,24 @@
               </a:rPr>
               <a:t>Silo Response</a:t>
             </a:r>
-            <a:endParaRPr lang="en-US" sz="410" dirty="0"/>
-          </a:p>
-        </p:txBody>
-      </p:sp>
-      <p:sp>
-        <p:nvSpPr>
-          <p:cNvPr id="233" name="Shape 211"/>
-          <p:cNvSpPr/>
-          <p:nvPr/>
-        </p:nvSpPr>
-        <p:spPr>
-          <a:xfrm>
-            <a:off x="3888029" y="2723083"/>
-            <a:ext cx="397764" cy="138989"/>
+            <a:endParaRPr lang="en-US" sz="385" dirty="0"/>
+          </a:p>
+        </p:txBody>
+      </p:sp>
+      <p:sp>
+        <p:nvSpPr>
+          <p:cNvPr id="237" name="Shape 215"/>
+          <p:cNvSpPr/>
+          <p:nvPr/>
+        </p:nvSpPr>
+        <p:spPr>
+          <a:xfrm>
+            <a:off x="3888029" y="2740457"/>
+            <a:ext cx="372161" cy="103327"/>
           </a:xfrm>
           <a:prstGeom prst="roundRect">
             <a:avLst>
-              <a:gd name="adj" fmla="val 32895"/>
+              <a:gd name="adj" fmla="val 39823"/>
             </a:avLst>
           </a:prstGeom>
           <a:solidFill>
@@ -26029,14 +26109,14 @@
       </p:sp>
       <p:sp>
         <p:nvSpPr>
-          <p:cNvPr id="234" name="Text 212"/>
-          <p:cNvSpPr/>
-          <p:nvPr/>
-        </p:nvSpPr>
-        <p:spPr>
-          <a:xfrm>
-            <a:off x="3908146" y="2732227"/>
-            <a:ext cx="357530" cy="120701"/>
+          <p:cNvPr id="238" name="Text 216"/>
+          <p:cNvSpPr/>
+          <p:nvPr/>
+        </p:nvSpPr>
+        <p:spPr>
+          <a:xfrm>
+            <a:off x="3906317" y="2745943"/>
+            <a:ext cx="335585" cy="92354"/>
           </a:xfrm>
           <a:prstGeom prst="rect">
             <a:avLst/>
@@ -26050,12 +26130,12 @@
           <a:p>
             <a:pPr algn="ctr" indent="0" marL="0">
               <a:lnSpc>
-                <a:spcPct val="102000"/>
+                <a:spcPct val="100000"/>
               </a:lnSpc>
               <a:buNone/>
             </a:pPr>
             <a:r>
-              <a:rPr lang="en-US" sz="410" b="1" dirty="0">
+              <a:rPr lang="en-US" sz="385" b="1" dirty="0">
                 <a:solidFill>
                   <a:srgbClr val="202124"/>
                 </a:solidFill>
@@ -26065,24 +26145,24 @@
               </a:rPr>
               <a:t>200 / 423</a:t>
             </a:r>
-            <a:endParaRPr lang="en-US" sz="410" dirty="0"/>
-          </a:p>
-        </p:txBody>
-      </p:sp>
-      <p:sp>
-        <p:nvSpPr>
-          <p:cNvPr id="235" name="Shape 213"/>
-          <p:cNvSpPr/>
-          <p:nvPr/>
-        </p:nvSpPr>
-        <p:spPr>
-          <a:xfrm>
-            <a:off x="3080614" y="1144829"/>
-            <a:ext cx="406908" cy="138989"/>
+            <a:endParaRPr lang="en-US" sz="385" dirty="0"/>
+          </a:p>
+        </p:txBody>
+      </p:sp>
+      <p:sp>
+        <p:nvSpPr>
+          <p:cNvPr id="239" name="Shape 217"/>
+          <p:cNvSpPr/>
+          <p:nvPr/>
+        </p:nvSpPr>
+        <p:spPr>
+          <a:xfrm>
+            <a:off x="3087929" y="1163117"/>
+            <a:ext cx="399593" cy="103327"/>
           </a:xfrm>
           <a:prstGeom prst="roundRect">
             <a:avLst>
-              <a:gd name="adj" fmla="val 32895"/>
+              <a:gd name="adj" fmla="val 39823"/>
             </a:avLst>
           </a:prstGeom>
           <a:solidFill>
@@ -26098,14 +26178,14 @@
       </p:sp>
       <p:sp>
         <p:nvSpPr>
-          <p:cNvPr id="236" name="Text 214"/>
-          <p:cNvSpPr/>
-          <p:nvPr/>
-        </p:nvSpPr>
-        <p:spPr>
-          <a:xfrm>
-            <a:off x="3100730" y="1153973"/>
-            <a:ext cx="366674" cy="120701"/>
+          <p:cNvPr id="240" name="Text 218"/>
+          <p:cNvSpPr/>
+          <p:nvPr/>
+        </p:nvSpPr>
+        <p:spPr>
+          <a:xfrm>
+            <a:off x="3106217" y="1168603"/>
+            <a:ext cx="363017" cy="92354"/>
           </a:xfrm>
           <a:prstGeom prst="rect">
             <a:avLst/>
@@ -26119,12 +26199,12 @@
           <a:p>
             <a:pPr algn="ctr" indent="0" marL="0">
               <a:lnSpc>
-                <a:spcPct val="102000"/>
+                <a:spcPct val="100000"/>
               </a:lnSpc>
               <a:buNone/>
             </a:pPr>
             <a:r>
-              <a:rPr lang="en-US" sz="410" b="1" dirty="0">
+              <a:rPr lang="en-US" sz="385" b="1" dirty="0">
                 <a:solidFill>
                   <a:srgbClr val="202124"/>
                 </a:solidFill>
@@ -26134,24 +26214,24 @@
               </a:rPr>
               <a:t>mTLS Request</a:t>
             </a:r>
-            <a:endParaRPr lang="en-US" sz="410" dirty="0"/>
-          </a:p>
-        </p:txBody>
-      </p:sp>
-      <p:sp>
-        <p:nvSpPr>
-          <p:cNvPr id="237" name="Shape 215"/>
-          <p:cNvSpPr/>
-          <p:nvPr/>
-        </p:nvSpPr>
-        <p:spPr>
-          <a:xfrm>
-            <a:off x="3087929" y="2723083"/>
-            <a:ext cx="399593" cy="138989"/>
+            <a:endParaRPr lang="en-US" sz="385" dirty="0"/>
+          </a:p>
+        </p:txBody>
+      </p:sp>
+      <p:sp>
+        <p:nvSpPr>
+          <p:cNvPr id="241" name="Shape 219"/>
+          <p:cNvSpPr/>
+          <p:nvPr/>
+        </p:nvSpPr>
+        <p:spPr>
+          <a:xfrm>
+            <a:off x="3089758" y="2740457"/>
+            <a:ext cx="397764" cy="103327"/>
           </a:xfrm>
           <a:prstGeom prst="roundRect">
             <a:avLst>
-              <a:gd name="adj" fmla="val 32895"/>
+              <a:gd name="adj" fmla="val 39823"/>
             </a:avLst>
           </a:prstGeom>
           <a:solidFill>
@@ -26167,14 +26247,14 @@
       </p:sp>
       <p:sp>
         <p:nvSpPr>
-          <p:cNvPr id="238" name="Text 216"/>
-          <p:cNvSpPr/>
-          <p:nvPr/>
-        </p:nvSpPr>
-        <p:spPr>
-          <a:xfrm>
-            <a:off x="3108046" y="2732227"/>
-            <a:ext cx="359359" cy="120701"/>
+          <p:cNvPr id="242" name="Text 220"/>
+          <p:cNvSpPr/>
+          <p:nvPr/>
+        </p:nvSpPr>
+        <p:spPr>
+          <a:xfrm>
+            <a:off x="3108046" y="2745943"/>
+            <a:ext cx="361188" cy="92354"/>
           </a:xfrm>
           <a:prstGeom prst="rect">
             <a:avLst/>
@@ -26188,12 +26268,12 @@
           <a:p>
             <a:pPr algn="ctr" indent="0" marL="0">
               <a:lnSpc>
-                <a:spcPct val="102000"/>
+                <a:spcPct val="100000"/>
               </a:lnSpc>
               <a:buNone/>
             </a:pPr>
             <a:r>
-              <a:rPr lang="en-US" sz="410" b="1" dirty="0">
+              <a:rPr lang="en-US" sz="385" b="1" dirty="0">
                 <a:solidFill>
                   <a:srgbClr val="202124"/>
                 </a:solidFill>
@@ -26203,13 +26283,13 @@
               </a:rPr>
               <a:t>mTLS Valid</a:t>
             </a:r>
-            <a:endParaRPr lang="en-US" sz="410" dirty="0"/>
-          </a:p>
-        </p:txBody>
-      </p:sp>
-      <p:sp>
-        <p:nvSpPr>
-          <p:cNvPr id="239" name="Text 217"/>
+            <a:endParaRPr lang="en-US" sz="385" dirty="0"/>
+          </a:p>
+        </p:txBody>
+      </p:sp>
+      <p:sp>
+        <p:nvSpPr>
+          <p:cNvPr id="243" name="Text 221"/>
           <p:cNvSpPr/>
           <p:nvPr/>
         </p:nvSpPr>
